--- a/presentation/토큰_절약_발표_후속_에이전트셋팅.pptx
+++ b/presentation/토큰_절약_발표_후속_에이전트셋팅.pptx
@@ -17563,7 +17563,7 @@
         <p:spPr>
           <a:xfrm>
             <a:off x="685800" y="2286000"/>
-            <a:ext cx="5943600" cy="365760"/>
+            <a:ext cx="5943600" cy="384048"/>
           </a:xfrm>
           <a:prstGeom prst="rect">
             <a:avLst/>
@@ -17607,7 +17607,7 @@
         <p:spPr>
           <a:xfrm>
             <a:off x="813816" y="2368296"/>
-            <a:ext cx="1463040" cy="365760"/>
+            <a:ext cx="1417320" cy="384048"/>
           </a:xfrm>
           <a:prstGeom prst="rect">
             <a:avLst/>
@@ -17647,8 +17647,8 @@
         </p:nvSpPr>
         <p:spPr>
           <a:xfrm>
-            <a:off x="2459736" y="2368296"/>
-            <a:ext cx="685800" cy="365760"/>
+            <a:off x="2414016" y="2368296"/>
+            <a:ext cx="640080" cy="384048"/>
           </a:xfrm>
           <a:prstGeom prst="rect">
             <a:avLst/>
@@ -17688,8 +17688,8 @@
         </p:nvSpPr>
         <p:spPr>
           <a:xfrm>
-            <a:off x="3328416" y="2368296"/>
-            <a:ext cx="1508760" cy="365760"/>
+            <a:off x="3236976" y="2368296"/>
+            <a:ext cx="1508760" cy="384048"/>
           </a:xfrm>
           <a:prstGeom prst="rect">
             <a:avLst/>
@@ -17729,8 +17729,8 @@
         </p:nvSpPr>
         <p:spPr>
           <a:xfrm>
-            <a:off x="5020055" y="2368296"/>
-            <a:ext cx="1554480" cy="365760"/>
+            <a:off x="4928616" y="2368296"/>
+            <a:ext cx="1600200" cy="384048"/>
           </a:xfrm>
           <a:prstGeom prst="rect">
             <a:avLst/>
@@ -17770,8 +17770,8 @@
         </p:nvSpPr>
         <p:spPr>
           <a:xfrm>
-            <a:off x="685800" y="2651760"/>
-            <a:ext cx="5943600" cy="365760"/>
+            <a:off x="685800" y="2670048"/>
+            <a:ext cx="5943600" cy="384048"/>
           </a:xfrm>
           <a:prstGeom prst="rect">
             <a:avLst/>
@@ -17814,27 +17814,27 @@
         </p:nvSpPr>
         <p:spPr>
           <a:xfrm>
-            <a:off x="813816" y="2734056"/>
-            <a:ext cx="1463040" cy="365760"/>
-          </a:xfrm>
-          <a:prstGeom prst="rect">
-            <a:avLst/>
-          </a:prstGeom>
-          <a:noFill/>
-        </p:spPr>
-        <p:txBody>
-          <a:bodyPr wrap="square" lIns="0" rIns="0" tIns="0" bIns="0" anchor="t">
-            <a:spAutoFit/>
-          </a:bodyPr>
-          <a:lstStyle/>
-          <a:p>
-            <a:pPr algn="l">
-              <a:lnSpc>
-                <a:spcPct val="115000"/>
-              </a:lnSpc>
-            </a:pPr>
-            <a:r>
-              <a:rPr sz="1250" b="0">
+            <a:off x="813816" y="2752344"/>
+            <a:ext cx="1417320" cy="384048"/>
+          </a:xfrm>
+          <a:prstGeom prst="rect">
+            <a:avLst/>
+          </a:prstGeom>
+          <a:noFill/>
+        </p:spPr>
+        <p:txBody>
+          <a:bodyPr wrap="square" lIns="0" rIns="0" tIns="0" bIns="0" anchor="t">
+            <a:spAutoFit/>
+          </a:bodyPr>
+          <a:lstStyle/>
+          <a:p>
+            <a:pPr algn="l">
+              <a:lnSpc>
+                <a:spcPct val="115000"/>
+              </a:lnSpc>
+            </a:pPr>
+            <a:r>
+              <a:rPr sz="1200" b="0">
                 <a:solidFill>
                   <a:srgbClr val="ECF1F6"/>
                 </a:solidFill>
@@ -17855,27 +17855,27 @@
         </p:nvSpPr>
         <p:spPr>
           <a:xfrm>
-            <a:off x="2459736" y="2734056"/>
-            <a:ext cx="685800" cy="365760"/>
-          </a:xfrm>
-          <a:prstGeom prst="rect">
-            <a:avLst/>
-          </a:prstGeom>
-          <a:noFill/>
-        </p:spPr>
-        <p:txBody>
-          <a:bodyPr wrap="square" lIns="0" rIns="0" tIns="0" bIns="0" anchor="t">
-            <a:spAutoFit/>
-          </a:bodyPr>
-          <a:lstStyle/>
-          <a:p>
-            <a:pPr algn="l">
-              <a:lnSpc>
-                <a:spcPct val="115000"/>
-              </a:lnSpc>
-            </a:pPr>
-            <a:r>
-              <a:rPr sz="1250" b="0">
+            <a:off x="2414016" y="2752344"/>
+            <a:ext cx="640080" cy="384048"/>
+          </a:xfrm>
+          <a:prstGeom prst="rect">
+            <a:avLst/>
+          </a:prstGeom>
+          <a:noFill/>
+        </p:spPr>
+        <p:txBody>
+          <a:bodyPr wrap="square" lIns="0" rIns="0" tIns="0" bIns="0" anchor="t">
+            <a:spAutoFit/>
+          </a:bodyPr>
+          <a:lstStyle/>
+          <a:p>
+            <a:pPr algn="l">
+              <a:lnSpc>
+                <a:spcPct val="115000"/>
+              </a:lnSpc>
+            </a:pPr>
+            <a:r>
+              <a:rPr sz="1200" b="0">
                 <a:solidFill>
                   <a:srgbClr val="ECF1F6"/>
                 </a:solidFill>
@@ -17896,27 +17896,27 @@
         </p:nvSpPr>
         <p:spPr>
           <a:xfrm>
-            <a:off x="3328416" y="2734056"/>
-            <a:ext cx="1508760" cy="365760"/>
-          </a:xfrm>
-          <a:prstGeom prst="rect">
-            <a:avLst/>
-          </a:prstGeom>
-          <a:noFill/>
-        </p:spPr>
-        <p:txBody>
-          <a:bodyPr wrap="square" lIns="0" rIns="0" tIns="0" bIns="0" anchor="t">
-            <a:spAutoFit/>
-          </a:bodyPr>
-          <a:lstStyle/>
-          <a:p>
-            <a:pPr algn="l">
-              <a:lnSpc>
-                <a:spcPct val="115000"/>
-              </a:lnSpc>
-            </a:pPr>
-            <a:r>
-              <a:rPr sz="1250" b="0">
+            <a:off x="3236976" y="2752344"/>
+            <a:ext cx="1508760" cy="384048"/>
+          </a:xfrm>
+          <a:prstGeom prst="rect">
+            <a:avLst/>
+          </a:prstGeom>
+          <a:noFill/>
+        </p:spPr>
+        <p:txBody>
+          <a:bodyPr wrap="square" lIns="0" rIns="0" tIns="0" bIns="0" anchor="t">
+            <a:spAutoFit/>
+          </a:bodyPr>
+          <a:lstStyle/>
+          <a:p>
+            <a:pPr algn="l">
+              <a:lnSpc>
+                <a:spcPct val="115000"/>
+              </a:lnSpc>
+            </a:pPr>
+            <a:r>
+              <a:rPr sz="1200" b="0">
                 <a:solidFill>
                   <a:srgbClr val="ECF1F6"/>
                 </a:solidFill>
@@ -17937,27 +17937,27 @@
         </p:nvSpPr>
         <p:spPr>
           <a:xfrm>
-            <a:off x="5020055" y="2734056"/>
-            <a:ext cx="1554480" cy="365760"/>
-          </a:xfrm>
-          <a:prstGeom prst="rect">
-            <a:avLst/>
-          </a:prstGeom>
-          <a:noFill/>
-        </p:spPr>
-        <p:txBody>
-          <a:bodyPr wrap="square" lIns="0" rIns="0" tIns="0" bIns="0" anchor="t">
-            <a:spAutoFit/>
-          </a:bodyPr>
-          <a:lstStyle/>
-          <a:p>
-            <a:pPr algn="l">
-              <a:lnSpc>
-                <a:spcPct val="115000"/>
-              </a:lnSpc>
-            </a:pPr>
-            <a:r>
-              <a:rPr sz="1250" b="1">
+            <a:off x="4928616" y="2752344"/>
+            <a:ext cx="1600200" cy="384048"/>
+          </a:xfrm>
+          <a:prstGeom prst="rect">
+            <a:avLst/>
+          </a:prstGeom>
+          <a:noFill/>
+        </p:spPr>
+        <p:txBody>
+          <a:bodyPr wrap="square" lIns="0" rIns="0" tIns="0" bIns="0" anchor="t">
+            <a:spAutoFit/>
+          </a:bodyPr>
+          <a:lstStyle/>
+          <a:p>
+            <a:pPr algn="l">
+              <a:lnSpc>
+                <a:spcPct val="115000"/>
+              </a:lnSpc>
+            </a:pPr>
+            <a:r>
+              <a:rPr sz="1200" b="1">
                 <a:solidFill>
                   <a:srgbClr val="FF6B6B"/>
                 </a:solidFill>
@@ -17978,27 +17978,27 @@
         </p:nvSpPr>
         <p:spPr>
           <a:xfrm>
-            <a:off x="813816" y="3099815"/>
-            <a:ext cx="1463040" cy="365760"/>
-          </a:xfrm>
-          <a:prstGeom prst="rect">
-            <a:avLst/>
-          </a:prstGeom>
-          <a:noFill/>
-        </p:spPr>
-        <p:txBody>
-          <a:bodyPr wrap="square" lIns="0" rIns="0" tIns="0" bIns="0" anchor="t">
-            <a:spAutoFit/>
-          </a:bodyPr>
-          <a:lstStyle/>
-          <a:p>
-            <a:pPr algn="l">
-              <a:lnSpc>
-                <a:spcPct val="115000"/>
-              </a:lnSpc>
-            </a:pPr>
-            <a:r>
-              <a:rPr sz="1250" b="0">
+            <a:off x="813816" y="3136391"/>
+            <a:ext cx="1417320" cy="384048"/>
+          </a:xfrm>
+          <a:prstGeom prst="rect">
+            <a:avLst/>
+          </a:prstGeom>
+          <a:noFill/>
+        </p:spPr>
+        <p:txBody>
+          <a:bodyPr wrap="square" lIns="0" rIns="0" tIns="0" bIns="0" anchor="t">
+            <a:spAutoFit/>
+          </a:bodyPr>
+          <a:lstStyle/>
+          <a:p>
+            <a:pPr algn="l">
+              <a:lnSpc>
+                <a:spcPct val="115000"/>
+              </a:lnSpc>
+            </a:pPr>
+            <a:r>
+              <a:rPr sz="1200" b="0">
                 <a:solidFill>
                   <a:srgbClr val="ECF1F6"/>
                 </a:solidFill>
@@ -18019,27 +18019,27 @@
         </p:nvSpPr>
         <p:spPr>
           <a:xfrm>
-            <a:off x="2459736" y="3099815"/>
-            <a:ext cx="685800" cy="365760"/>
-          </a:xfrm>
-          <a:prstGeom prst="rect">
-            <a:avLst/>
-          </a:prstGeom>
-          <a:noFill/>
-        </p:spPr>
-        <p:txBody>
-          <a:bodyPr wrap="square" lIns="0" rIns="0" tIns="0" bIns="0" anchor="t">
-            <a:spAutoFit/>
-          </a:bodyPr>
-          <a:lstStyle/>
-          <a:p>
-            <a:pPr algn="l">
-              <a:lnSpc>
-                <a:spcPct val="115000"/>
-              </a:lnSpc>
-            </a:pPr>
-            <a:r>
-              <a:rPr sz="1250" b="0">
+            <a:off x="2414016" y="3136391"/>
+            <a:ext cx="640080" cy="384048"/>
+          </a:xfrm>
+          <a:prstGeom prst="rect">
+            <a:avLst/>
+          </a:prstGeom>
+          <a:noFill/>
+        </p:spPr>
+        <p:txBody>
+          <a:bodyPr wrap="square" lIns="0" rIns="0" tIns="0" bIns="0" anchor="t">
+            <a:spAutoFit/>
+          </a:bodyPr>
+          <a:lstStyle/>
+          <a:p>
+            <a:pPr algn="l">
+              <a:lnSpc>
+                <a:spcPct val="115000"/>
+              </a:lnSpc>
+            </a:pPr>
+            <a:r>
+              <a:rPr sz="1200" b="0">
                 <a:solidFill>
                   <a:srgbClr val="ECF1F6"/>
                 </a:solidFill>
@@ -18060,27 +18060,27 @@
         </p:nvSpPr>
         <p:spPr>
           <a:xfrm>
-            <a:off x="3328416" y="3099815"/>
-            <a:ext cx="1508760" cy="365760"/>
-          </a:xfrm>
-          <a:prstGeom prst="rect">
-            <a:avLst/>
-          </a:prstGeom>
-          <a:noFill/>
-        </p:spPr>
-        <p:txBody>
-          <a:bodyPr wrap="square" lIns="0" rIns="0" tIns="0" bIns="0" anchor="t">
-            <a:spAutoFit/>
-          </a:bodyPr>
-          <a:lstStyle/>
-          <a:p>
-            <a:pPr algn="l">
-              <a:lnSpc>
-                <a:spcPct val="115000"/>
-              </a:lnSpc>
-            </a:pPr>
-            <a:r>
-              <a:rPr sz="1250" b="0">
+            <a:off x="3236976" y="3136391"/>
+            <a:ext cx="1508760" cy="384048"/>
+          </a:xfrm>
+          <a:prstGeom prst="rect">
+            <a:avLst/>
+          </a:prstGeom>
+          <a:noFill/>
+        </p:spPr>
+        <p:txBody>
+          <a:bodyPr wrap="square" lIns="0" rIns="0" tIns="0" bIns="0" anchor="t">
+            <a:spAutoFit/>
+          </a:bodyPr>
+          <a:lstStyle/>
+          <a:p>
+            <a:pPr algn="l">
+              <a:lnSpc>
+                <a:spcPct val="115000"/>
+              </a:lnSpc>
+            </a:pPr>
+            <a:r>
+              <a:rPr sz="1200" b="0">
                 <a:solidFill>
                   <a:srgbClr val="ECF1F6"/>
                 </a:solidFill>
@@ -18101,27 +18101,27 @@
         </p:nvSpPr>
         <p:spPr>
           <a:xfrm>
-            <a:off x="5020055" y="3099815"/>
-            <a:ext cx="1554480" cy="365760"/>
-          </a:xfrm>
-          <a:prstGeom prst="rect">
-            <a:avLst/>
-          </a:prstGeom>
-          <a:noFill/>
-        </p:spPr>
-        <p:txBody>
-          <a:bodyPr wrap="square" lIns="0" rIns="0" tIns="0" bIns="0" anchor="t">
-            <a:spAutoFit/>
-          </a:bodyPr>
-          <a:lstStyle/>
-          <a:p>
-            <a:pPr algn="l">
-              <a:lnSpc>
-                <a:spcPct val="115000"/>
-              </a:lnSpc>
-            </a:pPr>
-            <a:r>
-              <a:rPr sz="1250" b="1">
+            <a:off x="4928616" y="3136391"/>
+            <a:ext cx="1600200" cy="384048"/>
+          </a:xfrm>
+          <a:prstGeom prst="rect">
+            <a:avLst/>
+          </a:prstGeom>
+          <a:noFill/>
+        </p:spPr>
+        <p:txBody>
+          <a:bodyPr wrap="square" lIns="0" rIns="0" tIns="0" bIns="0" anchor="t">
+            <a:spAutoFit/>
+          </a:bodyPr>
+          <a:lstStyle/>
+          <a:p>
+            <a:pPr algn="l">
+              <a:lnSpc>
+                <a:spcPct val="115000"/>
+              </a:lnSpc>
+            </a:pPr>
+            <a:r>
+              <a:rPr sz="1200" b="1">
                 <a:solidFill>
                   <a:srgbClr val="FFB04D"/>
                 </a:solidFill>
@@ -18142,8 +18142,8 @@
         </p:nvSpPr>
         <p:spPr>
           <a:xfrm>
-            <a:off x="685800" y="3383280"/>
-            <a:ext cx="5943600" cy="365760"/>
+            <a:off x="685800" y="3438144"/>
+            <a:ext cx="5943600" cy="384048"/>
           </a:xfrm>
           <a:prstGeom prst="rect">
             <a:avLst/>
@@ -18186,27 +18186,27 @@
         </p:nvSpPr>
         <p:spPr>
           <a:xfrm>
-            <a:off x="813816" y="3465576"/>
-            <a:ext cx="1463040" cy="365760"/>
-          </a:xfrm>
-          <a:prstGeom prst="rect">
-            <a:avLst/>
-          </a:prstGeom>
-          <a:noFill/>
-        </p:spPr>
-        <p:txBody>
-          <a:bodyPr wrap="square" lIns="0" rIns="0" tIns="0" bIns="0" anchor="t">
-            <a:spAutoFit/>
-          </a:bodyPr>
-          <a:lstStyle/>
-          <a:p>
-            <a:pPr algn="l">
-              <a:lnSpc>
-                <a:spcPct val="115000"/>
-              </a:lnSpc>
-            </a:pPr>
-            <a:r>
-              <a:rPr sz="1250" b="0">
+            <a:off x="813816" y="3520439"/>
+            <a:ext cx="1417320" cy="384048"/>
+          </a:xfrm>
+          <a:prstGeom prst="rect">
+            <a:avLst/>
+          </a:prstGeom>
+          <a:noFill/>
+        </p:spPr>
+        <p:txBody>
+          <a:bodyPr wrap="square" lIns="0" rIns="0" tIns="0" bIns="0" anchor="t">
+            <a:spAutoFit/>
+          </a:bodyPr>
+          <a:lstStyle/>
+          <a:p>
+            <a:pPr algn="l">
+              <a:lnSpc>
+                <a:spcPct val="115000"/>
+              </a:lnSpc>
+            </a:pPr>
+            <a:r>
+              <a:rPr sz="1200" b="0">
                 <a:solidFill>
                   <a:srgbClr val="ECF1F6"/>
                 </a:solidFill>
@@ -18227,27 +18227,27 @@
         </p:nvSpPr>
         <p:spPr>
           <a:xfrm>
-            <a:off x="2459736" y="3465576"/>
-            <a:ext cx="685800" cy="365760"/>
-          </a:xfrm>
-          <a:prstGeom prst="rect">
-            <a:avLst/>
-          </a:prstGeom>
-          <a:noFill/>
-        </p:spPr>
-        <p:txBody>
-          <a:bodyPr wrap="square" lIns="0" rIns="0" tIns="0" bIns="0" anchor="t">
-            <a:spAutoFit/>
-          </a:bodyPr>
-          <a:lstStyle/>
-          <a:p>
-            <a:pPr algn="l">
-              <a:lnSpc>
-                <a:spcPct val="115000"/>
-              </a:lnSpc>
-            </a:pPr>
-            <a:r>
-              <a:rPr sz="1250" b="0">
+            <a:off x="2414016" y="3520439"/>
+            <a:ext cx="640080" cy="384048"/>
+          </a:xfrm>
+          <a:prstGeom prst="rect">
+            <a:avLst/>
+          </a:prstGeom>
+          <a:noFill/>
+        </p:spPr>
+        <p:txBody>
+          <a:bodyPr wrap="square" lIns="0" rIns="0" tIns="0" bIns="0" anchor="t">
+            <a:spAutoFit/>
+          </a:bodyPr>
+          <a:lstStyle/>
+          <a:p>
+            <a:pPr algn="l">
+              <a:lnSpc>
+                <a:spcPct val="115000"/>
+              </a:lnSpc>
+            </a:pPr>
+            <a:r>
+              <a:rPr sz="1200" b="0">
                 <a:solidFill>
                   <a:srgbClr val="ECF1F6"/>
                 </a:solidFill>
@@ -18268,27 +18268,27 @@
         </p:nvSpPr>
         <p:spPr>
           <a:xfrm>
-            <a:off x="3328416" y="3465576"/>
-            <a:ext cx="1508760" cy="365760"/>
-          </a:xfrm>
-          <a:prstGeom prst="rect">
-            <a:avLst/>
-          </a:prstGeom>
-          <a:noFill/>
-        </p:spPr>
-        <p:txBody>
-          <a:bodyPr wrap="square" lIns="0" rIns="0" tIns="0" bIns="0" anchor="t">
-            <a:spAutoFit/>
-          </a:bodyPr>
-          <a:lstStyle/>
-          <a:p>
-            <a:pPr algn="l">
-              <a:lnSpc>
-                <a:spcPct val="115000"/>
-              </a:lnSpc>
-            </a:pPr>
-            <a:r>
-              <a:rPr sz="1250" b="0">
+            <a:off x="3236976" y="3520439"/>
+            <a:ext cx="1508760" cy="384048"/>
+          </a:xfrm>
+          <a:prstGeom prst="rect">
+            <a:avLst/>
+          </a:prstGeom>
+          <a:noFill/>
+        </p:spPr>
+        <p:txBody>
+          <a:bodyPr wrap="square" lIns="0" rIns="0" tIns="0" bIns="0" anchor="t">
+            <a:spAutoFit/>
+          </a:bodyPr>
+          <a:lstStyle/>
+          <a:p>
+            <a:pPr algn="l">
+              <a:lnSpc>
+                <a:spcPct val="115000"/>
+              </a:lnSpc>
+            </a:pPr>
+            <a:r>
+              <a:rPr sz="1200" b="0">
                 <a:solidFill>
                   <a:srgbClr val="ECF1F6"/>
                 </a:solidFill>
@@ -18309,27 +18309,27 @@
         </p:nvSpPr>
         <p:spPr>
           <a:xfrm>
-            <a:off x="5020055" y="3465576"/>
-            <a:ext cx="1554480" cy="365760"/>
-          </a:xfrm>
-          <a:prstGeom prst="rect">
-            <a:avLst/>
-          </a:prstGeom>
-          <a:noFill/>
-        </p:spPr>
-        <p:txBody>
-          <a:bodyPr wrap="square" lIns="0" rIns="0" tIns="0" bIns="0" anchor="t">
-            <a:spAutoFit/>
-          </a:bodyPr>
-          <a:lstStyle/>
-          <a:p>
-            <a:pPr algn="l">
-              <a:lnSpc>
-                <a:spcPct val="115000"/>
-              </a:lnSpc>
-            </a:pPr>
-            <a:r>
-              <a:rPr sz="1250" b="1">
+            <a:off x="4928616" y="3520439"/>
+            <a:ext cx="1600200" cy="384048"/>
+          </a:xfrm>
+          <a:prstGeom prst="rect">
+            <a:avLst/>
+          </a:prstGeom>
+          <a:noFill/>
+        </p:spPr>
+        <p:txBody>
+          <a:bodyPr wrap="square" lIns="0" rIns="0" tIns="0" bIns="0" anchor="t">
+            <a:spAutoFit/>
+          </a:bodyPr>
+          <a:lstStyle/>
+          <a:p>
+            <a:pPr algn="l">
+              <a:lnSpc>
+                <a:spcPct val="115000"/>
+              </a:lnSpc>
+            </a:pPr>
+            <a:r>
+              <a:rPr sz="1200" b="1">
                 <a:solidFill>
                   <a:srgbClr val="FF6B6B"/>
                 </a:solidFill>
@@ -18337,7 +18337,7 @@
                 <a:ea typeface="맑은 고딕"/>
                 <a:cs typeface="맑은 고딕"/>
               </a:rPr>
-              <a:t>best effort · 보장 없음</a:t>
+              <a:t>best effort</a:t>
             </a:r>
           </a:p>
         </p:txBody>
@@ -18350,27 +18350,27 @@
         </p:nvSpPr>
         <p:spPr>
           <a:xfrm>
-            <a:off x="813816" y="3831335"/>
-            <a:ext cx="1463040" cy="365760"/>
-          </a:xfrm>
-          <a:prstGeom prst="rect">
-            <a:avLst/>
-          </a:prstGeom>
-          <a:noFill/>
-        </p:spPr>
-        <p:txBody>
-          <a:bodyPr wrap="square" lIns="0" rIns="0" tIns="0" bIns="0" anchor="t">
-            <a:spAutoFit/>
-          </a:bodyPr>
-          <a:lstStyle/>
-          <a:p>
-            <a:pPr algn="l">
-              <a:lnSpc>
-                <a:spcPct val="115000"/>
-              </a:lnSpc>
-            </a:pPr>
-            <a:r>
-              <a:rPr sz="1250" b="0">
+            <a:off x="813816" y="3904487"/>
+            <a:ext cx="1417320" cy="384048"/>
+          </a:xfrm>
+          <a:prstGeom prst="rect">
+            <a:avLst/>
+          </a:prstGeom>
+          <a:noFill/>
+        </p:spPr>
+        <p:txBody>
+          <a:bodyPr wrap="square" lIns="0" rIns="0" tIns="0" bIns="0" anchor="t">
+            <a:spAutoFit/>
+          </a:bodyPr>
+          <a:lstStyle/>
+          <a:p>
+            <a:pPr algn="l">
+              <a:lnSpc>
+                <a:spcPct val="115000"/>
+              </a:lnSpc>
+            </a:pPr>
+            <a:r>
+              <a:rPr sz="1200" b="0">
                 <a:solidFill>
                   <a:srgbClr val="ECF1F6"/>
                 </a:solidFill>
@@ -18391,27 +18391,27 @@
         </p:nvSpPr>
         <p:spPr>
           <a:xfrm>
-            <a:off x="2459736" y="3831335"/>
-            <a:ext cx="685800" cy="365760"/>
-          </a:xfrm>
-          <a:prstGeom prst="rect">
-            <a:avLst/>
-          </a:prstGeom>
-          <a:noFill/>
-        </p:spPr>
-        <p:txBody>
-          <a:bodyPr wrap="square" lIns="0" rIns="0" tIns="0" bIns="0" anchor="t">
-            <a:spAutoFit/>
-          </a:bodyPr>
-          <a:lstStyle/>
-          <a:p>
-            <a:pPr algn="l">
-              <a:lnSpc>
-                <a:spcPct val="115000"/>
-              </a:lnSpc>
-            </a:pPr>
-            <a:r>
-              <a:rPr sz="1250" b="0">
+            <a:off x="2414016" y="3904487"/>
+            <a:ext cx="640080" cy="384048"/>
+          </a:xfrm>
+          <a:prstGeom prst="rect">
+            <a:avLst/>
+          </a:prstGeom>
+          <a:noFill/>
+        </p:spPr>
+        <p:txBody>
+          <a:bodyPr wrap="square" lIns="0" rIns="0" tIns="0" bIns="0" anchor="t">
+            <a:spAutoFit/>
+          </a:bodyPr>
+          <a:lstStyle/>
+          <a:p>
+            <a:pPr algn="l">
+              <a:lnSpc>
+                <a:spcPct val="115000"/>
+              </a:lnSpc>
+            </a:pPr>
+            <a:r>
+              <a:rPr sz="1200" b="0">
                 <a:solidFill>
                   <a:srgbClr val="ECF1F6"/>
                 </a:solidFill>
@@ -18432,27 +18432,27 @@
         </p:nvSpPr>
         <p:spPr>
           <a:xfrm>
-            <a:off x="3328416" y="3831335"/>
-            <a:ext cx="1508760" cy="365760"/>
-          </a:xfrm>
-          <a:prstGeom prst="rect">
-            <a:avLst/>
-          </a:prstGeom>
-          <a:noFill/>
-        </p:spPr>
-        <p:txBody>
-          <a:bodyPr wrap="square" lIns="0" rIns="0" tIns="0" bIns="0" anchor="t">
-            <a:spAutoFit/>
-          </a:bodyPr>
-          <a:lstStyle/>
-          <a:p>
-            <a:pPr algn="l">
-              <a:lnSpc>
-                <a:spcPct val="115000"/>
-              </a:lnSpc>
-            </a:pPr>
-            <a:r>
-              <a:rPr sz="1250" b="0">
+            <a:off x="3236976" y="3904487"/>
+            <a:ext cx="1508760" cy="384048"/>
+          </a:xfrm>
+          <a:prstGeom prst="rect">
+            <a:avLst/>
+          </a:prstGeom>
+          <a:noFill/>
+        </p:spPr>
+        <p:txBody>
+          <a:bodyPr wrap="square" lIns="0" rIns="0" tIns="0" bIns="0" anchor="t">
+            <a:spAutoFit/>
+          </a:bodyPr>
+          <a:lstStyle/>
+          <a:p>
+            <a:pPr algn="l">
+              <a:lnSpc>
+                <a:spcPct val="115000"/>
+              </a:lnSpc>
+            </a:pPr>
+            <a:r>
+              <a:rPr sz="1200" b="0">
                 <a:solidFill>
                   <a:srgbClr val="ECF1F6"/>
                 </a:solidFill>
@@ -18473,27 +18473,27 @@
         </p:nvSpPr>
         <p:spPr>
           <a:xfrm>
-            <a:off x="5020055" y="3831335"/>
-            <a:ext cx="1554480" cy="365760"/>
-          </a:xfrm>
-          <a:prstGeom prst="rect">
-            <a:avLst/>
-          </a:prstGeom>
-          <a:noFill/>
-        </p:spPr>
-        <p:txBody>
-          <a:bodyPr wrap="square" lIns="0" rIns="0" tIns="0" bIns="0" anchor="t">
-            <a:spAutoFit/>
-          </a:bodyPr>
-          <a:lstStyle/>
-          <a:p>
-            <a:pPr algn="l">
-              <a:lnSpc>
-                <a:spcPct val="115000"/>
-              </a:lnSpc>
-            </a:pPr>
-            <a:r>
-              <a:rPr sz="1250" b="1">
+            <a:off x="4928616" y="3904487"/>
+            <a:ext cx="1600200" cy="384048"/>
+          </a:xfrm>
+          <a:prstGeom prst="rect">
+            <a:avLst/>
+          </a:prstGeom>
+          <a:noFill/>
+        </p:spPr>
+        <p:txBody>
+          <a:bodyPr wrap="square" lIns="0" rIns="0" tIns="0" bIns="0" anchor="t">
+            <a:spAutoFit/>
+          </a:bodyPr>
+          <a:lstStyle/>
+          <a:p>
+            <a:pPr algn="l">
+              <a:lnSpc>
+                <a:spcPct val="115000"/>
+              </a:lnSpc>
+            </a:pPr>
+            <a:r>
+              <a:rPr sz="1200" b="1">
                 <a:solidFill>
                   <a:srgbClr val="36D399"/>
                 </a:solidFill>

--- a/presentation/토큰_절약_발표_후속_에이전트셋팅.pptx
+++ b/presentation/토큰_절약_발표_후속_에이전트셋팅.pptx
@@ -18,6 +18,8 @@
     <p:sldId id="266" r:id="rId17"/>
     <p:sldId id="267" r:id="rId18"/>
     <p:sldId id="268" r:id="rId19"/>
+    <p:sldId id="269" r:id="rId20"/>
+    <p:sldId id="270" r:id="rId21"/>
   </p:sldIdLst>
   <p:sldSz cx="12191695" cy="6858000" type="screen4x3"/>
   <p:notesSz cx="6858000" cy="9144000"/>
@@ -3621,7 +3623,7 @@
                 <a:ea typeface="맑은 고딕"/>
                 <a:cs typeface="맑은 고딕"/>
               </a:rPr>
-              <a:t>FOLLOW-UP · 시연</a:t>
+              <a:t>FOLLOW-UP · 리워크</a:t>
             </a:r>
           </a:p>
         </p:txBody>
@@ -3662,7 +3664,7 @@
                 <a:ea typeface="맑은 고딕"/>
                 <a:cs typeface="맑은 고딕"/>
               </a:rPr>
-              <a:t>라이브 — 지금 돌려봅니다</a:t>
+              <a:t>실패하면 — 모델만 올리지 않는다</a:t>
             </a:r>
           </a:p>
         </p:txBody>
@@ -3788,7 +3790,7 @@
                 <a:ea typeface="맑은 고딕"/>
                 <a:cs typeface="맑은 고딕"/>
               </a:rPr>
-              <a:t>python3 agent_setup/test_router.py — 의존성 없음. 인터넷 없어도 돕니다.</a:t>
+              <a:t>라우팅은 첫 배정만 정한다. 돈이 실제로 타는 곳은 실패하고 다시 시작하는 구간이다.</a:t>
             </a:r>
           </a:p>
         </p:txBody>
@@ -3801,13 +3803,523 @@
         </p:nvSpPr>
         <p:spPr>
           <a:xfrm>
-            <a:off x="685800" y="2240280"/>
-            <a:ext cx="7086600" cy="3429000"/>
+            <a:off x="685800" y="2194560"/>
+            <a:ext cx="5394960" cy="914400"/>
           </a:xfrm>
           <a:prstGeom prst="roundRect">
             <a:avLst>
-              <a:gd name="adj" fmla="val 5000"/>
+              <a:gd name="adj" fmla="val 6000"/>
             </a:avLst>
+          </a:prstGeom>
+          <a:solidFill>
+            <a:srgbClr val="18222E"/>
+          </a:solidFill>
+          <a:ln>
+            <a:noFill/>
+          </a:ln>
+          <a:effectLst/>
+        </p:spPr>
+        <p:style>
+          <a:lnRef idx="1">
+            <a:schemeClr val="accent1"/>
+          </a:lnRef>
+          <a:fillRef idx="3">
+            <a:schemeClr val="accent1"/>
+          </a:fillRef>
+          <a:effectRef idx="2">
+            <a:schemeClr val="accent1"/>
+          </a:effectRef>
+          <a:fontRef idx="minor">
+            <a:schemeClr val="lt1"/>
+          </a:fontRef>
+        </p:style>
+        <p:txBody>
+          <a:bodyPr rtlCol="0" anchor="ctr"/>
+          <a:lstStyle/>
+          <a:p>
+            <a:pPr algn="ctr"/>
+          </a:p>
+        </p:txBody>
+      </p:sp>
+      <p:sp>
+        <p:nvSpPr>
+          <p:cNvPr id="10" name="Rectangle 9"/>
+          <p:cNvSpPr/>
+          <p:nvPr/>
+        </p:nvSpPr>
+        <p:spPr>
+          <a:xfrm>
+            <a:off x="685800" y="2194560"/>
+            <a:ext cx="50292" cy="914400"/>
+          </a:xfrm>
+          <a:prstGeom prst="rect">
+            <a:avLst/>
+          </a:prstGeom>
+          <a:solidFill>
+            <a:srgbClr val="FF6B6B"/>
+          </a:solidFill>
+          <a:ln>
+            <a:noFill/>
+          </a:ln>
+          <a:effectLst/>
+        </p:spPr>
+        <p:style>
+          <a:lnRef idx="1">
+            <a:schemeClr val="accent1"/>
+          </a:lnRef>
+          <a:fillRef idx="3">
+            <a:schemeClr val="accent1"/>
+          </a:fillRef>
+          <a:effectRef idx="2">
+            <a:schemeClr val="accent1"/>
+          </a:effectRef>
+          <a:fontRef idx="minor">
+            <a:schemeClr val="lt1"/>
+          </a:fontRef>
+        </p:style>
+        <p:txBody>
+          <a:bodyPr rtlCol="0" anchor="ctr"/>
+          <a:lstStyle/>
+          <a:p>
+            <a:pPr algn="ctr"/>
+          </a:p>
+        </p:txBody>
+      </p:sp>
+      <p:sp>
+        <p:nvSpPr>
+          <p:cNvPr id="11" name="TextBox 10"/>
+          <p:cNvSpPr txBox="1"/>
+          <p:nvPr/>
+        </p:nvSpPr>
+        <p:spPr>
+          <a:xfrm>
+            <a:off x="960120" y="2340864"/>
+            <a:ext cx="5029200" cy="731520"/>
+          </a:xfrm>
+          <a:prstGeom prst="rect">
+            <a:avLst/>
+          </a:prstGeom>
+          <a:noFill/>
+        </p:spPr>
+        <p:txBody>
+          <a:bodyPr wrap="square" lIns="0" rIns="0" tIns="0" bIns="0" anchor="t">
+            <a:spAutoFit/>
+          </a:bodyPr>
+          <a:lstStyle/>
+          <a:p>
+            <a:pPr algn="l">
+              <a:lnSpc>
+                <a:spcPct val="115000"/>
+              </a:lnSpc>
+            </a:pPr>
+            <a:r>
+              <a:rPr sz="1400" b="1">
+                <a:solidFill>
+                  <a:srgbClr val="FF6B6B"/>
+                </a:solidFill>
+                <a:latin typeface="맑은 고딕"/>
+                <a:ea typeface="맑은 고딕"/>
+                <a:cs typeface="맑은 고딕"/>
+              </a:rPr>
+              <a:t>흔한 실패 (✗)</a:t>
+            </a:r>
+          </a:p>
+          <a:p>
+            <a:pPr algn="l">
+              <a:lnSpc>
+                <a:spcPct val="115000"/>
+              </a:lnSpc>
+              <a:spcBef>
+                <a:spcPts val="400"/>
+              </a:spcBef>
+            </a:pPr>
+            <a:r>
+              <a:rPr sz="1250" b="0">
+                <a:solidFill>
+                  <a:srgbClr val="93A4B5"/>
+                </a:solidFill>
+                <a:latin typeface="맑은 고딕"/>
+                <a:ea typeface="맑은 고딕"/>
+                <a:cs typeface="맑은 고딕"/>
+              </a:rPr>
+              <a:t>같은 범위에 더 비싼 모델을 다시 넣는다.</a:t>
+            </a:r>
+          </a:p>
+        </p:txBody>
+      </p:sp>
+      <p:sp>
+        <p:nvSpPr>
+          <p:cNvPr id="12" name="Rounded Rectangle 11"/>
+          <p:cNvSpPr/>
+          <p:nvPr/>
+        </p:nvSpPr>
+        <p:spPr>
+          <a:xfrm>
+            <a:off x="6172200" y="2194560"/>
+            <a:ext cx="5349240" cy="914400"/>
+          </a:xfrm>
+          <a:prstGeom prst="roundRect">
+            <a:avLst>
+              <a:gd name="adj" fmla="val 6000"/>
+            </a:avLst>
+          </a:prstGeom>
+          <a:solidFill>
+            <a:srgbClr val="18222E"/>
+          </a:solidFill>
+          <a:ln>
+            <a:noFill/>
+          </a:ln>
+          <a:effectLst/>
+        </p:spPr>
+        <p:style>
+          <a:lnRef idx="1">
+            <a:schemeClr val="accent1"/>
+          </a:lnRef>
+          <a:fillRef idx="3">
+            <a:schemeClr val="accent1"/>
+          </a:fillRef>
+          <a:effectRef idx="2">
+            <a:schemeClr val="accent1"/>
+          </a:effectRef>
+          <a:fontRef idx="minor">
+            <a:schemeClr val="lt1"/>
+          </a:fontRef>
+        </p:style>
+        <p:txBody>
+          <a:bodyPr rtlCol="0" anchor="ctr"/>
+          <a:lstStyle/>
+          <a:p>
+            <a:pPr algn="ctr"/>
+          </a:p>
+        </p:txBody>
+      </p:sp>
+      <p:sp>
+        <p:nvSpPr>
+          <p:cNvPr id="13" name="Rectangle 12"/>
+          <p:cNvSpPr/>
+          <p:nvPr/>
+        </p:nvSpPr>
+        <p:spPr>
+          <a:xfrm>
+            <a:off x="6172200" y="2194560"/>
+            <a:ext cx="50292" cy="914400"/>
+          </a:xfrm>
+          <a:prstGeom prst="rect">
+            <a:avLst/>
+          </a:prstGeom>
+          <a:solidFill>
+            <a:srgbClr val="36D399"/>
+          </a:solidFill>
+          <a:ln>
+            <a:noFill/>
+          </a:ln>
+          <a:effectLst/>
+        </p:spPr>
+        <p:style>
+          <a:lnRef idx="1">
+            <a:schemeClr val="accent1"/>
+          </a:lnRef>
+          <a:fillRef idx="3">
+            <a:schemeClr val="accent1"/>
+          </a:fillRef>
+          <a:effectRef idx="2">
+            <a:schemeClr val="accent1"/>
+          </a:effectRef>
+          <a:fontRef idx="minor">
+            <a:schemeClr val="lt1"/>
+          </a:fontRef>
+        </p:style>
+        <p:txBody>
+          <a:bodyPr rtlCol="0" anchor="ctr"/>
+          <a:lstStyle/>
+          <a:p>
+            <a:pPr algn="ctr"/>
+          </a:p>
+        </p:txBody>
+      </p:sp>
+      <p:sp>
+        <p:nvSpPr>
+          <p:cNvPr id="14" name="TextBox 13"/>
+          <p:cNvSpPr txBox="1"/>
+          <p:nvPr/>
+        </p:nvSpPr>
+        <p:spPr>
+          <a:xfrm>
+            <a:off x="6446520" y="2340864"/>
+            <a:ext cx="4983480" cy="731520"/>
+          </a:xfrm>
+          <a:prstGeom prst="rect">
+            <a:avLst/>
+          </a:prstGeom>
+          <a:noFill/>
+        </p:spPr>
+        <p:txBody>
+          <a:bodyPr wrap="square" lIns="0" rIns="0" tIns="0" bIns="0" anchor="t">
+            <a:spAutoFit/>
+          </a:bodyPr>
+          <a:lstStyle/>
+          <a:p>
+            <a:pPr algn="l">
+              <a:lnSpc>
+                <a:spcPct val="115000"/>
+              </a:lnSpc>
+            </a:pPr>
+            <a:r>
+              <a:rPr sz="1400" b="1">
+                <a:solidFill>
+                  <a:srgbClr val="36D399"/>
+                </a:solidFill>
+                <a:latin typeface="맑은 고딕"/>
+                <a:ea typeface="맑은 고딕"/>
+                <a:cs typeface="맑은 고딕"/>
+              </a:rPr>
+              <a:t>해야 할 일 (○)</a:t>
+            </a:r>
+          </a:p>
+          <a:p>
+            <a:pPr algn="l">
+              <a:lnSpc>
+                <a:spcPct val="115000"/>
+              </a:lnSpc>
+              <a:spcBef>
+                <a:spcPts val="400"/>
+              </a:spcBef>
+            </a:pPr>
+            <a:r>
+              <a:rPr sz="1250" b="0">
+                <a:solidFill>
+                  <a:srgbClr val="93A4B5"/>
+                </a:solidFill>
+                <a:latin typeface="맑은 고딕"/>
+                <a:ea typeface="맑은 고딕"/>
+                <a:cs typeface="맑은 고딕"/>
+              </a:rPr>
+              <a:t>범위와 티어를 같이 올린다. 2회 이상 실패는 범위가 잘못 잘린 신호다.</a:t>
+            </a:r>
+          </a:p>
+        </p:txBody>
+      </p:sp>
+      <p:sp>
+        <p:nvSpPr>
+          <p:cNvPr id="15" name="Rectangle 14"/>
+          <p:cNvSpPr/>
+          <p:nvPr/>
+        </p:nvSpPr>
+        <p:spPr>
+          <a:xfrm>
+            <a:off x="685800" y="3310128"/>
+            <a:ext cx="10835640" cy="384048"/>
+          </a:xfrm>
+          <a:prstGeom prst="rect">
+            <a:avLst/>
+          </a:prstGeom>
+          <a:solidFill>
+            <a:srgbClr val="18222E"/>
+          </a:solidFill>
+          <a:ln>
+            <a:noFill/>
+          </a:ln>
+          <a:effectLst/>
+        </p:spPr>
+        <p:style>
+          <a:lnRef idx="1">
+            <a:schemeClr val="accent1"/>
+          </a:lnRef>
+          <a:fillRef idx="3">
+            <a:schemeClr val="accent1"/>
+          </a:fillRef>
+          <a:effectRef idx="2">
+            <a:schemeClr val="accent1"/>
+          </a:effectRef>
+          <a:fontRef idx="minor">
+            <a:schemeClr val="lt1"/>
+          </a:fontRef>
+        </p:style>
+        <p:txBody>
+          <a:bodyPr rtlCol="0" anchor="ctr"/>
+          <a:lstStyle/>
+          <a:p>
+            <a:pPr algn="ctr"/>
+          </a:p>
+        </p:txBody>
+      </p:sp>
+      <p:sp>
+        <p:nvSpPr>
+          <p:cNvPr id="16" name="TextBox 15"/>
+          <p:cNvSpPr txBox="1"/>
+          <p:nvPr/>
+        </p:nvSpPr>
+        <p:spPr>
+          <a:xfrm>
+            <a:off x="813816" y="3392424"/>
+            <a:ext cx="1005840" cy="384048"/>
+          </a:xfrm>
+          <a:prstGeom prst="rect">
+            <a:avLst/>
+          </a:prstGeom>
+          <a:noFill/>
+        </p:spPr>
+        <p:txBody>
+          <a:bodyPr wrap="square" lIns="0" rIns="0" tIns="0" bIns="0" anchor="t">
+            <a:spAutoFit/>
+          </a:bodyPr>
+          <a:lstStyle/>
+          <a:p>
+            <a:pPr algn="l">
+              <a:lnSpc>
+                <a:spcPct val="115000"/>
+              </a:lnSpc>
+            </a:pPr>
+            <a:r>
+              <a:rPr sz="1300" b="1">
+                <a:solidFill>
+                  <a:srgbClr val="36D399"/>
+                </a:solidFill>
+                <a:latin typeface="맑은 고딕"/>
+                <a:ea typeface="맑은 고딕"/>
+                <a:cs typeface="맑은 고딕"/>
+              </a:rPr>
+              <a:t>시도</a:t>
+            </a:r>
+          </a:p>
+        </p:txBody>
+      </p:sp>
+      <p:sp>
+        <p:nvSpPr>
+          <p:cNvPr id="17" name="TextBox 16"/>
+          <p:cNvSpPr txBox="1"/>
+          <p:nvPr/>
+        </p:nvSpPr>
+        <p:spPr>
+          <a:xfrm>
+            <a:off x="2002536" y="3392424"/>
+            <a:ext cx="1371600" cy="384048"/>
+          </a:xfrm>
+          <a:prstGeom prst="rect">
+            <a:avLst/>
+          </a:prstGeom>
+          <a:noFill/>
+        </p:spPr>
+        <p:txBody>
+          <a:bodyPr wrap="square" lIns="0" rIns="0" tIns="0" bIns="0" anchor="t">
+            <a:spAutoFit/>
+          </a:bodyPr>
+          <a:lstStyle/>
+          <a:p>
+            <a:pPr algn="l">
+              <a:lnSpc>
+                <a:spcPct val="115000"/>
+              </a:lnSpc>
+            </a:pPr>
+            <a:r>
+              <a:rPr sz="1300" b="1">
+                <a:solidFill>
+                  <a:srgbClr val="36D399"/>
+                </a:solidFill>
+                <a:latin typeface="맑은 고딕"/>
+                <a:ea typeface="맑은 고딕"/>
+                <a:cs typeface="맑은 고딕"/>
+              </a:rPr>
+              <a:t>티어</a:t>
+            </a:r>
+          </a:p>
+        </p:txBody>
+      </p:sp>
+      <p:sp>
+        <p:nvSpPr>
+          <p:cNvPr id="18" name="TextBox 17"/>
+          <p:cNvSpPr txBox="1"/>
+          <p:nvPr/>
+        </p:nvSpPr>
+        <p:spPr>
+          <a:xfrm>
+            <a:off x="3557016" y="3392424"/>
+            <a:ext cx="3794759" cy="384048"/>
+          </a:xfrm>
+          <a:prstGeom prst="rect">
+            <a:avLst/>
+          </a:prstGeom>
+          <a:noFill/>
+        </p:spPr>
+        <p:txBody>
+          <a:bodyPr wrap="square" lIns="0" rIns="0" tIns="0" bIns="0" anchor="t">
+            <a:spAutoFit/>
+          </a:bodyPr>
+          <a:lstStyle/>
+          <a:p>
+            <a:pPr algn="l">
+              <a:lnSpc>
+                <a:spcPct val="115000"/>
+              </a:lnSpc>
+            </a:pPr>
+            <a:r>
+              <a:rPr sz="1300" b="1">
+                <a:solidFill>
+                  <a:srgbClr val="36D399"/>
+                </a:solidFill>
+                <a:latin typeface="맑은 고딕"/>
+                <a:ea typeface="맑은 고딕"/>
+                <a:cs typeface="맑은 고딕"/>
+              </a:rPr>
+              <a:t>다시 여는 범위</a:t>
+            </a:r>
+          </a:p>
+        </p:txBody>
+      </p:sp>
+      <p:sp>
+        <p:nvSpPr>
+          <p:cNvPr id="19" name="TextBox 18"/>
+          <p:cNvSpPr txBox="1"/>
+          <p:nvPr/>
+        </p:nvSpPr>
+        <p:spPr>
+          <a:xfrm>
+            <a:off x="7534656" y="3392424"/>
+            <a:ext cx="3931920" cy="384048"/>
+          </a:xfrm>
+          <a:prstGeom prst="rect">
+            <a:avLst/>
+          </a:prstGeom>
+          <a:noFill/>
+        </p:spPr>
+        <p:txBody>
+          <a:bodyPr wrap="square" lIns="0" rIns="0" tIns="0" bIns="0" anchor="t">
+            <a:spAutoFit/>
+          </a:bodyPr>
+          <a:lstStyle/>
+          <a:p>
+            <a:pPr algn="l">
+              <a:lnSpc>
+                <a:spcPct val="115000"/>
+              </a:lnSpc>
+            </a:pPr>
+            <a:r>
+              <a:rPr sz="1300" b="1">
+                <a:solidFill>
+                  <a:srgbClr val="36D399"/>
+                </a:solidFill>
+                <a:latin typeface="맑은 고딕"/>
+                <a:ea typeface="맑은 고딕"/>
+                <a:cs typeface="맑은 고딕"/>
+              </a:rPr>
+              <a:t>이번에 바뀌는 것</a:t>
+            </a:r>
+          </a:p>
+        </p:txBody>
+      </p:sp>
+      <p:sp>
+        <p:nvSpPr>
+          <p:cNvPr id="20" name="Rectangle 19"/>
+          <p:cNvSpPr/>
+          <p:nvPr/>
+        </p:nvSpPr>
+        <p:spPr>
+          <a:xfrm>
+            <a:off x="685800" y="3694176"/>
+            <a:ext cx="10835640" cy="384048"/>
+          </a:xfrm>
+          <a:prstGeom prst="rect">
+            <a:avLst/>
           </a:prstGeom>
           <a:solidFill>
             <a:srgbClr val="111A24"/>
@@ -3841,20 +4353,348 @@
       </p:sp>
       <p:sp>
         <p:nvSpPr>
-          <p:cNvPr id="10" name="Rectangle 9"/>
+          <p:cNvPr id="21" name="TextBox 20"/>
+          <p:cNvSpPr txBox="1"/>
+          <p:nvPr/>
+        </p:nvSpPr>
+        <p:spPr>
+          <a:xfrm>
+            <a:off x="813816" y="3776472"/>
+            <a:ext cx="1005840" cy="384048"/>
+          </a:xfrm>
+          <a:prstGeom prst="rect">
+            <a:avLst/>
+          </a:prstGeom>
+          <a:noFill/>
+        </p:spPr>
+        <p:txBody>
+          <a:bodyPr wrap="square" lIns="0" rIns="0" tIns="0" bIns="0" anchor="t">
+            <a:spAutoFit/>
+          </a:bodyPr>
+          <a:lstStyle/>
+          <a:p>
+            <a:pPr algn="l">
+              <a:lnSpc>
+                <a:spcPct val="115000"/>
+              </a:lnSpc>
+            </a:pPr>
+            <a:r>
+              <a:rPr sz="1250" b="0">
+                <a:solidFill>
+                  <a:srgbClr val="ECF1F6"/>
+                </a:solidFill>
+                <a:latin typeface="맑은 고딕"/>
+                <a:ea typeface="맑은 고딕"/>
+                <a:cs typeface="맑은 고딕"/>
+              </a:rPr>
+              <a:t>1회차</a:t>
+            </a:r>
+          </a:p>
+        </p:txBody>
+      </p:sp>
+      <p:sp>
+        <p:nvSpPr>
+          <p:cNvPr id="22" name="TextBox 21"/>
+          <p:cNvSpPr txBox="1"/>
+          <p:nvPr/>
+        </p:nvSpPr>
+        <p:spPr>
+          <a:xfrm>
+            <a:off x="2002536" y="3776472"/>
+            <a:ext cx="1371600" cy="384048"/>
+          </a:xfrm>
+          <a:prstGeom prst="rect">
+            <a:avLst/>
+          </a:prstGeom>
+          <a:noFill/>
+        </p:spPr>
+        <p:txBody>
+          <a:bodyPr wrap="square" lIns="0" rIns="0" tIns="0" bIns="0" anchor="t">
+            <a:spAutoFit/>
+          </a:bodyPr>
+          <a:lstStyle/>
+          <a:p>
+            <a:pPr algn="l">
+              <a:lnSpc>
+                <a:spcPct val="115000"/>
+              </a:lnSpc>
+            </a:pPr>
+            <a:r>
+              <a:rPr sz="1250" b="0">
+                <a:solidFill>
+                  <a:srgbClr val="ECF1F6"/>
+                </a:solidFill>
+                <a:latin typeface="맑은 고딕"/>
+                <a:ea typeface="맑은 고딕"/>
+                <a:cs typeface="맑은 고딕"/>
+              </a:rPr>
+              <a:t>MID</a:t>
+            </a:r>
+          </a:p>
+        </p:txBody>
+      </p:sp>
+      <p:sp>
+        <p:nvSpPr>
+          <p:cNvPr id="23" name="TextBox 22"/>
+          <p:cNvSpPr txBox="1"/>
+          <p:nvPr/>
+        </p:nvSpPr>
+        <p:spPr>
+          <a:xfrm>
+            <a:off x="3557016" y="3776472"/>
+            <a:ext cx="3794759" cy="384048"/>
+          </a:xfrm>
+          <a:prstGeom prst="rect">
+            <a:avLst/>
+          </a:prstGeom>
+          <a:noFill/>
+        </p:spPr>
+        <p:txBody>
+          <a:bodyPr wrap="square" lIns="0" rIns="0" tIns="0" bIns="0" anchor="t">
+            <a:spAutoFit/>
+          </a:bodyPr>
+          <a:lstStyle/>
+          <a:p>
+            <a:pPr algn="l">
+              <a:lnSpc>
+                <a:spcPct val="115000"/>
+              </a:lnSpc>
+            </a:pPr>
+            <a:r>
+              <a:rPr sz="1250" b="0">
+                <a:solidFill>
+                  <a:srgbClr val="ECF1F6"/>
+                </a:solidFill>
+                <a:latin typeface="맑은 고딕"/>
+                <a:ea typeface="맑은 고딕"/>
+                <a:cs typeface="맑은 고딕"/>
+              </a:rPr>
+              <a:t>실패한 함수/블록만</a:t>
+            </a:r>
+          </a:p>
+        </p:txBody>
+      </p:sp>
+      <p:sp>
+        <p:nvSpPr>
+          <p:cNvPr id="24" name="TextBox 23"/>
+          <p:cNvSpPr txBox="1"/>
+          <p:nvPr/>
+        </p:nvSpPr>
+        <p:spPr>
+          <a:xfrm>
+            <a:off x="7534656" y="3776472"/>
+            <a:ext cx="3931920" cy="384048"/>
+          </a:xfrm>
+          <a:prstGeom prst="rect">
+            <a:avLst/>
+          </a:prstGeom>
+          <a:noFill/>
+        </p:spPr>
+        <p:txBody>
+          <a:bodyPr wrap="square" lIns="0" rIns="0" tIns="0" bIns="0" anchor="t">
+            <a:spAutoFit/>
+          </a:bodyPr>
+          <a:lstStyle/>
+          <a:p>
+            <a:pPr algn="l">
+              <a:lnSpc>
+                <a:spcPct val="115000"/>
+              </a:lnSpc>
+            </a:pPr>
+            <a:r>
+              <a:rPr sz="1250" b="0">
+                <a:solidFill>
+                  <a:srgbClr val="ECF1F6"/>
+                </a:solidFill>
+                <a:latin typeface="맑은 고딕"/>
+                <a:ea typeface="맑은 고딕"/>
+                <a:cs typeface="맑은 고딕"/>
+              </a:rPr>
+              <a:t>첫 배정</a:t>
+            </a:r>
+          </a:p>
+        </p:txBody>
+      </p:sp>
+      <p:sp>
+        <p:nvSpPr>
+          <p:cNvPr id="25" name="TextBox 24"/>
+          <p:cNvSpPr txBox="1"/>
+          <p:nvPr/>
+        </p:nvSpPr>
+        <p:spPr>
+          <a:xfrm>
+            <a:off x="813816" y="4160520"/>
+            <a:ext cx="1005840" cy="384048"/>
+          </a:xfrm>
+          <a:prstGeom prst="rect">
+            <a:avLst/>
+          </a:prstGeom>
+          <a:noFill/>
+        </p:spPr>
+        <p:txBody>
+          <a:bodyPr wrap="square" lIns="0" rIns="0" tIns="0" bIns="0" anchor="t">
+            <a:spAutoFit/>
+          </a:bodyPr>
+          <a:lstStyle/>
+          <a:p>
+            <a:pPr algn="l">
+              <a:lnSpc>
+                <a:spcPct val="115000"/>
+              </a:lnSpc>
+            </a:pPr>
+            <a:r>
+              <a:rPr sz="1250" b="0">
+                <a:solidFill>
+                  <a:srgbClr val="ECF1F6"/>
+                </a:solidFill>
+                <a:latin typeface="맑은 고딕"/>
+                <a:ea typeface="맑은 고딕"/>
+                <a:cs typeface="맑은 고딕"/>
+              </a:rPr>
+              <a:t>2회차</a:t>
+            </a:r>
+          </a:p>
+        </p:txBody>
+      </p:sp>
+      <p:sp>
+        <p:nvSpPr>
+          <p:cNvPr id="26" name="TextBox 25"/>
+          <p:cNvSpPr txBox="1"/>
+          <p:nvPr/>
+        </p:nvSpPr>
+        <p:spPr>
+          <a:xfrm>
+            <a:off x="2002536" y="4160520"/>
+            <a:ext cx="1371600" cy="384048"/>
+          </a:xfrm>
+          <a:prstGeom prst="rect">
+            <a:avLst/>
+          </a:prstGeom>
+          <a:noFill/>
+        </p:spPr>
+        <p:txBody>
+          <a:bodyPr wrap="square" lIns="0" rIns="0" tIns="0" bIns="0" anchor="t">
+            <a:spAutoFit/>
+          </a:bodyPr>
+          <a:lstStyle/>
+          <a:p>
+            <a:pPr algn="l">
+              <a:lnSpc>
+                <a:spcPct val="115000"/>
+              </a:lnSpc>
+            </a:pPr>
+            <a:r>
+              <a:rPr sz="1250" b="0">
+                <a:solidFill>
+                  <a:srgbClr val="ECF1F6"/>
+                </a:solidFill>
+                <a:latin typeface="맑은 고딕"/>
+                <a:ea typeface="맑은 고딕"/>
+                <a:cs typeface="맑은 고딕"/>
+              </a:rPr>
+              <a:t>LARGE</a:t>
+            </a:r>
+          </a:p>
+        </p:txBody>
+      </p:sp>
+      <p:sp>
+        <p:nvSpPr>
+          <p:cNvPr id="27" name="TextBox 26"/>
+          <p:cNvSpPr txBox="1"/>
+          <p:nvPr/>
+        </p:nvSpPr>
+        <p:spPr>
+          <a:xfrm>
+            <a:off x="3557016" y="4160520"/>
+            <a:ext cx="3794759" cy="384048"/>
+          </a:xfrm>
+          <a:prstGeom prst="rect">
+            <a:avLst/>
+          </a:prstGeom>
+          <a:noFill/>
+        </p:spPr>
+        <p:txBody>
+          <a:bodyPr wrap="square" lIns="0" rIns="0" tIns="0" bIns="0" anchor="t">
+            <a:spAutoFit/>
+          </a:bodyPr>
+          <a:lstStyle/>
+          <a:p>
+            <a:pPr algn="l">
+              <a:lnSpc>
+                <a:spcPct val="115000"/>
+              </a:lnSpc>
+            </a:pPr>
+            <a:r>
+              <a:rPr sz="1250" b="0">
+                <a:solidFill>
+                  <a:srgbClr val="ECF1F6"/>
+                </a:solidFill>
+                <a:latin typeface="맑은 고딕"/>
+                <a:ea typeface="맑은 고딕"/>
+                <a:cs typeface="맑은 고딕"/>
+              </a:rPr>
+              <a:t>파일 전체 + 호출부</a:t>
+            </a:r>
+          </a:p>
+        </p:txBody>
+      </p:sp>
+      <p:sp>
+        <p:nvSpPr>
+          <p:cNvPr id="28" name="TextBox 27"/>
+          <p:cNvSpPr txBox="1"/>
+          <p:nvPr/>
+        </p:nvSpPr>
+        <p:spPr>
+          <a:xfrm>
+            <a:off x="7534656" y="4160520"/>
+            <a:ext cx="3931920" cy="384048"/>
+          </a:xfrm>
+          <a:prstGeom prst="rect">
+            <a:avLst/>
+          </a:prstGeom>
+          <a:noFill/>
+        </p:spPr>
+        <p:txBody>
+          <a:bodyPr wrap="square" lIns="0" rIns="0" tIns="0" bIns="0" anchor="t">
+            <a:spAutoFit/>
+          </a:bodyPr>
+          <a:lstStyle/>
+          <a:p>
+            <a:pPr algn="l">
+              <a:lnSpc>
+                <a:spcPct val="115000"/>
+              </a:lnSpc>
+            </a:pPr>
+            <a:r>
+              <a:rPr sz="1250" b="1">
+                <a:solidFill>
+                  <a:srgbClr val="5A9CFF"/>
+                </a:solidFill>
+                <a:latin typeface="맑은 고딕"/>
+                <a:ea typeface="맑은 고딕"/>
+                <a:cs typeface="맑은 고딕"/>
+              </a:rPr>
+              <a:t>실패 로그·diff 첨부</a:t>
+            </a:r>
+          </a:p>
+        </p:txBody>
+      </p:sp>
+      <p:sp>
+        <p:nvSpPr>
+          <p:cNvPr id="29" name="Rectangle 28"/>
           <p:cNvSpPr/>
           <p:nvPr/>
         </p:nvSpPr>
         <p:spPr>
           <a:xfrm>
-            <a:off x="685800" y="2240280"/>
-            <a:ext cx="45720" cy="3429000"/>
+            <a:off x="685800" y="4462272"/>
+            <a:ext cx="10835640" cy="384048"/>
           </a:xfrm>
           <a:prstGeom prst="rect">
             <a:avLst/>
           </a:prstGeom>
           <a:solidFill>
-            <a:srgbClr val="36D399"/>
+            <a:srgbClr val="111A24"/>
           </a:solidFill>
           <a:ln>
             <a:noFill/>
@@ -3885,314 +4725,346 @@
       </p:sp>
       <p:sp>
         <p:nvSpPr>
-          <p:cNvPr id="11" name="TextBox 10"/>
-          <p:cNvSpPr txBox="1"/>
-          <p:nvPr/>
-        </p:nvSpPr>
-        <p:spPr>
-          <a:xfrm>
-            <a:off x="932688" y="2432304"/>
-            <a:ext cx="6766560" cy="3108960"/>
-          </a:xfrm>
-          <a:prstGeom prst="rect">
-            <a:avLst/>
-          </a:prstGeom>
-          <a:noFill/>
-        </p:spPr>
-        <p:txBody>
-          <a:bodyPr wrap="square" lIns="0" rIns="0" tIns="0" bIns="0" anchor="t">
-            <a:spAutoFit/>
-          </a:bodyPr>
-          <a:lstStyle/>
-          <a:p>
-            <a:pPr algn="l">
-              <a:lnSpc>
-                <a:spcPct val="115000"/>
-              </a:lnSpc>
-              <a:spcBef>
-                <a:spcPts val="0"/>
-              </a:spcBef>
-            </a:pPr>
-            <a:r>
-              <a:rPr sz="1200" b="0">
+          <p:cNvPr id="30" name="TextBox 29"/>
+          <p:cNvSpPr txBox="1"/>
+          <p:nvPr/>
+        </p:nvSpPr>
+        <p:spPr>
+          <a:xfrm>
+            <a:off x="813816" y="4544568"/>
+            <a:ext cx="1005840" cy="384048"/>
+          </a:xfrm>
+          <a:prstGeom prst="rect">
+            <a:avLst/>
+          </a:prstGeom>
+          <a:noFill/>
+        </p:spPr>
+        <p:txBody>
+          <a:bodyPr wrap="square" lIns="0" rIns="0" tIns="0" bIns="0" anchor="t">
+            <a:spAutoFit/>
+          </a:bodyPr>
+          <a:lstStyle/>
+          <a:p>
+            <a:pPr algn="l">
+              <a:lnSpc>
+                <a:spcPct val="115000"/>
+              </a:lnSpc>
+            </a:pPr>
+            <a:r>
+              <a:rPr sz="1250" b="0">
+                <a:solidFill>
+                  <a:srgbClr val="ECF1F6"/>
+                </a:solidFill>
+                <a:latin typeface="맑은 고딕"/>
+                <a:ea typeface="맑은 고딕"/>
+                <a:cs typeface="맑은 고딕"/>
+              </a:rPr>
+              <a:t>3회차</a:t>
+            </a:r>
+          </a:p>
+        </p:txBody>
+      </p:sp>
+      <p:sp>
+        <p:nvSpPr>
+          <p:cNvPr id="31" name="TextBox 30"/>
+          <p:cNvSpPr txBox="1"/>
+          <p:nvPr/>
+        </p:nvSpPr>
+        <p:spPr>
+          <a:xfrm>
+            <a:off x="2002536" y="4544568"/>
+            <a:ext cx="1371600" cy="384048"/>
+          </a:xfrm>
+          <a:prstGeom prst="rect">
+            <a:avLst/>
+          </a:prstGeom>
+          <a:noFill/>
+        </p:spPr>
+        <p:txBody>
+          <a:bodyPr wrap="square" lIns="0" rIns="0" tIns="0" bIns="0" anchor="t">
+            <a:spAutoFit/>
+          </a:bodyPr>
+          <a:lstStyle/>
+          <a:p>
+            <a:pPr algn="l">
+              <a:lnSpc>
+                <a:spcPct val="115000"/>
+              </a:lnSpc>
+            </a:pPr>
+            <a:r>
+              <a:rPr sz="1250" b="0">
+                <a:solidFill>
+                  <a:srgbClr val="ECF1F6"/>
+                </a:solidFill>
+                <a:latin typeface="맑은 고딕"/>
+                <a:ea typeface="맑은 고딕"/>
+                <a:cs typeface="맑은 고딕"/>
+              </a:rPr>
+              <a:t>LARGE</a:t>
+            </a:r>
+          </a:p>
+        </p:txBody>
+      </p:sp>
+      <p:sp>
+        <p:nvSpPr>
+          <p:cNvPr id="32" name="TextBox 31"/>
+          <p:cNvSpPr txBox="1"/>
+          <p:nvPr/>
+        </p:nvSpPr>
+        <p:spPr>
+          <a:xfrm>
+            <a:off x="3557016" y="4544568"/>
+            <a:ext cx="3794759" cy="384048"/>
+          </a:xfrm>
+          <a:prstGeom prst="rect">
+            <a:avLst/>
+          </a:prstGeom>
+          <a:noFill/>
+        </p:spPr>
+        <p:txBody>
+          <a:bodyPr wrap="square" lIns="0" rIns="0" tIns="0" bIns="0" anchor="t">
+            <a:spAutoFit/>
+          </a:bodyPr>
+          <a:lstStyle/>
+          <a:p>
+            <a:pPr algn="l">
+              <a:lnSpc>
+                <a:spcPct val="115000"/>
+              </a:lnSpc>
+            </a:pPr>
+            <a:r>
+              <a:rPr sz="1250" b="0">
+                <a:solidFill>
+                  <a:srgbClr val="ECF1F6"/>
+                </a:solidFill>
+                <a:latin typeface="맑은 고딕"/>
+                <a:ea typeface="맑은 고딕"/>
+                <a:cs typeface="맑은 고딕"/>
+              </a:rPr>
+              <a:t>모듈 + 인접 계약</a:t>
+            </a:r>
+          </a:p>
+        </p:txBody>
+      </p:sp>
+      <p:sp>
+        <p:nvSpPr>
+          <p:cNvPr id="33" name="TextBox 32"/>
+          <p:cNvSpPr txBox="1"/>
+          <p:nvPr/>
+        </p:nvSpPr>
+        <p:spPr>
+          <a:xfrm>
+            <a:off x="7534656" y="4544568"/>
+            <a:ext cx="3931920" cy="384048"/>
+          </a:xfrm>
+          <a:prstGeom prst="rect">
+            <a:avLst/>
+          </a:prstGeom>
+          <a:noFill/>
+        </p:spPr>
+        <p:txBody>
+          <a:bodyPr wrap="square" lIns="0" rIns="0" tIns="0" bIns="0" anchor="t">
+            <a:spAutoFit/>
+          </a:bodyPr>
+          <a:lstStyle/>
+          <a:p>
+            <a:pPr algn="l">
+              <a:lnSpc>
+                <a:spcPct val="115000"/>
+              </a:lnSpc>
+            </a:pPr>
+            <a:r>
+              <a:rPr sz="1250" b="1">
                 <a:solidFill>
                   <a:srgbClr val="5A9CFF"/>
                 </a:solidFill>
-                <a:latin typeface="Consolas"/>
-                <a:ea typeface="Consolas"/>
-                <a:cs typeface="Consolas"/>
-              </a:rPr>
-              <a:t>[1] 분류 정확도</a:t>
-            </a:r>
-          </a:p>
-          <a:p>
-            <a:pPr algn="l">
-              <a:lnSpc>
-                <a:spcPct val="115000"/>
-              </a:lnSpc>
-              <a:spcBef>
-                <a:spcPts val="200"/>
-              </a:spcBef>
-            </a:pPr>
-            <a:r>
-              <a:rPr sz="1200" b="0">
-                <a:solidFill>
-                  <a:srgbClr val="36D399"/>
-                </a:solidFill>
-                <a:latin typeface="Consolas"/>
-                <a:ea typeface="Consolas"/>
-                <a:cs typeface="Consolas"/>
-              </a:rPr>
-              <a:t>  PASS  결제 모듈 아키텍처 설계 트레이드오프 정리해줘  → reasoning</a:t>
-            </a:r>
-          </a:p>
-          <a:p>
-            <a:pPr algn="l">
-              <a:lnSpc>
-                <a:spcPct val="115000"/>
-              </a:lnSpc>
-              <a:spcBef>
-                <a:spcPts val="200"/>
-              </a:spcBef>
-            </a:pPr>
-            <a:r>
-              <a:rPr sz="1200" b="0">
-                <a:solidFill>
-                  <a:srgbClr val="36D399"/>
-                </a:solidFill>
-                <a:latin typeface="Consolas"/>
-                <a:ea typeface="Consolas"/>
-                <a:cs typeface="Consolas"/>
-              </a:rPr>
-              <a:t>  PASS  스펙대로 핸들러 구현해줘                    → implement</a:t>
-            </a:r>
-          </a:p>
-          <a:p>
-            <a:pPr algn="l">
-              <a:lnSpc>
-                <a:spcPct val="115000"/>
-              </a:lnSpc>
-              <a:spcBef>
-                <a:spcPts val="200"/>
-              </a:spcBef>
-            </a:pPr>
-            <a:r>
-              <a:rPr sz="1200" b="0">
-                <a:solidFill>
-                  <a:srgbClr val="36D399"/>
-                </a:solidFill>
-                <a:latin typeface="Consolas"/>
-                <a:ea typeface="Consolas"/>
-                <a:cs typeface="Consolas"/>
-              </a:rPr>
-              <a:t>  PASS  방금 짠 코드 설명해줘                       → explain</a:t>
-            </a:r>
-          </a:p>
-          <a:p>
-            <a:pPr algn="l">
-              <a:lnSpc>
-                <a:spcPct val="115000"/>
-              </a:lnSpc>
-              <a:spcBef>
-                <a:spcPts val="200"/>
-              </a:spcBef>
-            </a:pPr>
-            <a:r>
-              <a:rPr sz="1200" b="0">
-                <a:solidFill>
-                  <a:srgbClr val="36D399"/>
-                </a:solidFill>
-                <a:latin typeface="Consolas"/>
-                <a:ea typeface="Consolas"/>
-                <a:cs typeface="Consolas"/>
-              </a:rPr>
-              <a:t>  PASS  src 밑에서 TODO 전부 grep 해줘             → tool</a:t>
-            </a:r>
-          </a:p>
-          <a:p>
-            <a:pPr algn="l">
-              <a:lnSpc>
-                <a:spcPct val="115000"/>
-              </a:lnSpc>
-              <a:spcBef>
-                <a:spcPts val="200"/>
-              </a:spcBef>
-            </a:pPr>
-            <a:r>
-              <a:rPr sz="1200" b="0">
-                <a:solidFill>
-                  <a:srgbClr val="36D399"/>
-                </a:solidFill>
-                <a:latin typeface="Consolas"/>
-                <a:ea typeface="Consolas"/>
-                <a:cs typeface="Consolas"/>
-              </a:rPr>
-              <a:t>  PASS  경쟁사 40개 가격 페이지 조사해서 정규화해줘   → bulk</a:t>
-            </a:r>
-          </a:p>
-          <a:p>
-            <a:pPr algn="l">
-              <a:lnSpc>
-                <a:spcPct val="115000"/>
-              </a:lnSpc>
-              <a:spcBef>
-                <a:spcPts val="200"/>
-              </a:spcBef>
-            </a:pPr>
-            <a:r>
-              <a:rPr sz="1200" b="0">
+                <a:latin typeface="맑은 고딕"/>
+                <a:ea typeface="맑은 고딕"/>
+                <a:cs typeface="맑은 고딕"/>
+              </a:rPr>
+              <a:t>테스트 먼저 작성 강제</a:t>
+            </a:r>
+          </a:p>
+        </p:txBody>
+      </p:sp>
+      <p:sp>
+        <p:nvSpPr>
+          <p:cNvPr id="34" name="TextBox 33"/>
+          <p:cNvSpPr txBox="1"/>
+          <p:nvPr/>
+        </p:nvSpPr>
+        <p:spPr>
+          <a:xfrm>
+            <a:off x="813816" y="4928616"/>
+            <a:ext cx="1005840" cy="384048"/>
+          </a:xfrm>
+          <a:prstGeom prst="rect">
+            <a:avLst/>
+          </a:prstGeom>
+          <a:noFill/>
+        </p:spPr>
+        <p:txBody>
+          <a:bodyPr wrap="square" lIns="0" rIns="0" tIns="0" bIns="0" anchor="t">
+            <a:spAutoFit/>
+          </a:bodyPr>
+          <a:lstStyle/>
+          <a:p>
+            <a:pPr algn="l">
+              <a:lnSpc>
+                <a:spcPct val="115000"/>
+              </a:lnSpc>
+            </a:pPr>
+            <a:r>
+              <a:rPr sz="1250" b="0">
                 <a:solidFill>
                   <a:srgbClr val="ECF1F6"/>
                 </a:solidFill>
-                <a:latin typeface="Consolas"/>
-                <a:ea typeface="Consolas"/>
-                <a:cs typeface="Consolas"/>
-              </a:rPr>
-              <a:t> </a:t>
-            </a:r>
-          </a:p>
-          <a:p>
-            <a:pPr algn="l">
-              <a:lnSpc>
-                <a:spcPct val="115000"/>
-              </a:lnSpc>
-              <a:spcBef>
-                <a:spcPts val="200"/>
-              </a:spcBef>
-            </a:pPr>
-            <a:r>
-              <a:rPr sz="1200" b="0">
-                <a:solidFill>
-                  <a:srgbClr val="5A9CFF"/>
-                </a:solidFill>
-                <a:latin typeface="Consolas"/>
-                <a:ea typeface="Consolas"/>
-                <a:cs typeface="Consolas"/>
-              </a:rPr>
-              <a:t>[2] 라우팅 티어      [3] 설명 3줄 강제</a:t>
-            </a:r>
-          </a:p>
-          <a:p>
-            <a:pPr algn="l">
-              <a:lnSpc>
-                <a:spcPct val="115000"/>
-              </a:lnSpc>
-              <a:spcBef>
-                <a:spcPts val="200"/>
-              </a:spcBef>
-            </a:pPr>
-            <a:r>
-              <a:rPr sz="1200" b="0">
-                <a:solidFill>
-                  <a:srgbClr val="5A9CFF"/>
-                </a:solidFill>
-                <a:latin typeface="Consolas"/>
-                <a:ea typeface="Consolas"/>
-                <a:cs typeface="Consolas"/>
-              </a:rPr>
-              <a:t>[4] 세션 리셋 트리거  [5] 비용 산식</a:t>
-            </a:r>
-          </a:p>
-          <a:p>
-            <a:pPr algn="l">
-              <a:lnSpc>
-                <a:spcPct val="115000"/>
-              </a:lnSpc>
-              <a:spcBef>
-                <a:spcPts val="200"/>
-              </a:spcBef>
-            </a:pPr>
-            <a:r>
-              <a:rPr sz="1200" b="0">
-                <a:solidFill>
-                  <a:srgbClr val="ECF1F6"/>
-                </a:solidFill>
-                <a:latin typeface="Consolas"/>
-                <a:ea typeface="Consolas"/>
-                <a:cs typeface="Consolas"/>
-              </a:rPr>
-              <a:t> </a:t>
-            </a:r>
-          </a:p>
-          <a:p>
-            <a:pPr algn="l">
-              <a:lnSpc>
-                <a:spcPct val="115000"/>
-              </a:lnSpc>
-              <a:spcBef>
-                <a:spcPts val="200"/>
-              </a:spcBef>
-            </a:pPr>
-            <a:r>
-              <a:rPr sz="1200" b="0">
-                <a:solidFill>
-                  <a:srgbClr val="FFB04D"/>
-                </a:solidFill>
-                <a:latin typeface="Consolas"/>
-                <a:ea typeface="Consolas"/>
-                <a:cs typeface="Consolas"/>
-              </a:rPr>
-              <a:t>        기준선 $0.6500 → 라우팅 $0.0437  (93.3% 절감)</a:t>
-            </a:r>
-          </a:p>
-          <a:p>
-            <a:pPr algn="l">
-              <a:lnSpc>
-                <a:spcPct val="115000"/>
-              </a:lnSpc>
-              <a:spcBef>
-                <a:spcPts val="200"/>
-              </a:spcBef>
-            </a:pPr>
-            <a:r>
-              <a:rPr sz="1200" b="0">
-                <a:solidFill>
-                  <a:srgbClr val="ECF1F6"/>
-                </a:solidFill>
-                <a:latin typeface="Consolas"/>
-                <a:ea typeface="Consolas"/>
-                <a:cs typeface="Consolas"/>
-              </a:rPr>
-              <a:t> </a:t>
-            </a:r>
-          </a:p>
-          <a:p>
-            <a:pPr algn="l">
-              <a:lnSpc>
-                <a:spcPct val="115000"/>
-              </a:lnSpc>
-              <a:spcBef>
-                <a:spcPts val="200"/>
-              </a:spcBef>
-            </a:pPr>
-            <a:r>
-              <a:rPr sz="1200" b="0">
-                <a:solidFill>
-                  <a:srgbClr val="FFB04D"/>
-                </a:solidFill>
-                <a:latin typeface="Consolas"/>
-                <a:ea typeface="Consolas"/>
-                <a:cs typeface="Consolas"/>
-              </a:rPr>
-              <a:t>  32건 중 32 PASS / 0 FAIL</a:t>
-            </a:r>
-          </a:p>
-        </p:txBody>
-      </p:sp>
-      <p:sp>
-        <p:nvSpPr>
-          <p:cNvPr id="12" name="Rounded Rectangle 11"/>
+                <a:latin typeface="맑은 고딕"/>
+                <a:ea typeface="맑은 고딕"/>
+                <a:cs typeface="맑은 고딕"/>
+              </a:rPr>
+              <a:t>4회차</a:t>
+            </a:r>
+          </a:p>
+        </p:txBody>
+      </p:sp>
+      <p:sp>
+        <p:nvSpPr>
+          <p:cNvPr id="35" name="TextBox 34"/>
+          <p:cNvSpPr txBox="1"/>
+          <p:nvPr/>
+        </p:nvSpPr>
+        <p:spPr>
+          <a:xfrm>
+            <a:off x="2002536" y="4928616"/>
+            <a:ext cx="1371600" cy="384048"/>
+          </a:xfrm>
+          <a:prstGeom prst="rect">
+            <a:avLst/>
+          </a:prstGeom>
+          <a:noFill/>
+        </p:spPr>
+        <p:txBody>
+          <a:bodyPr wrap="square" lIns="0" rIns="0" tIns="0" bIns="0" anchor="t">
+            <a:spAutoFit/>
+          </a:bodyPr>
+          <a:lstStyle/>
+          <a:p>
+            <a:pPr algn="l">
+              <a:lnSpc>
+                <a:spcPct val="115000"/>
+              </a:lnSpc>
+            </a:pPr>
+            <a:r>
+              <a:rPr sz="1250" b="1">
+                <a:solidFill>
+                  <a:srgbClr val="FF6B6B"/>
+                </a:solidFill>
+                <a:latin typeface="맑은 고딕"/>
+                <a:ea typeface="맑은 고딕"/>
+                <a:cs typeface="맑은 고딕"/>
+              </a:rPr>
+              <a:t>중단</a:t>
+            </a:r>
+          </a:p>
+        </p:txBody>
+      </p:sp>
+      <p:sp>
+        <p:nvSpPr>
+          <p:cNvPr id="36" name="TextBox 35"/>
+          <p:cNvSpPr txBox="1"/>
+          <p:nvPr/>
+        </p:nvSpPr>
+        <p:spPr>
+          <a:xfrm>
+            <a:off x="3557016" y="4928616"/>
+            <a:ext cx="3794759" cy="384048"/>
+          </a:xfrm>
+          <a:prstGeom prst="rect">
+            <a:avLst/>
+          </a:prstGeom>
+          <a:noFill/>
+        </p:spPr>
+        <p:txBody>
+          <a:bodyPr wrap="square" lIns="0" rIns="0" tIns="0" bIns="0" anchor="t">
+            <a:spAutoFit/>
+          </a:bodyPr>
+          <a:lstStyle/>
+          <a:p>
+            <a:pPr algn="l">
+              <a:lnSpc>
+                <a:spcPct val="115000"/>
+              </a:lnSpc>
+            </a:pPr>
+            <a:r>
+              <a:rPr sz="1250" b="1">
+                <a:solidFill>
+                  <a:srgbClr val="FF6B6B"/>
+                </a:solidFill>
+                <a:latin typeface="맑은 고딕"/>
+                <a:ea typeface="맑은 고딕"/>
+                <a:cs typeface="맑은 고딕"/>
+              </a:rPr>
+              <a:t>스펙으로 복귀</a:t>
+            </a:r>
+          </a:p>
+        </p:txBody>
+      </p:sp>
+      <p:sp>
+        <p:nvSpPr>
+          <p:cNvPr id="37" name="TextBox 36"/>
+          <p:cNvSpPr txBox="1"/>
+          <p:nvPr/>
+        </p:nvSpPr>
+        <p:spPr>
+          <a:xfrm>
+            <a:off x="7534656" y="4928616"/>
+            <a:ext cx="3931920" cy="384048"/>
+          </a:xfrm>
+          <a:prstGeom prst="rect">
+            <a:avLst/>
+          </a:prstGeom>
+          <a:noFill/>
+        </p:spPr>
+        <p:txBody>
+          <a:bodyPr wrap="square" lIns="0" rIns="0" tIns="0" bIns="0" anchor="t">
+            <a:spAutoFit/>
+          </a:bodyPr>
+          <a:lstStyle/>
+          <a:p>
+            <a:pPr algn="l">
+              <a:lnSpc>
+                <a:spcPct val="115000"/>
+              </a:lnSpc>
+            </a:pPr>
+            <a:r>
+              <a:rPr sz="1250" b="1">
+                <a:solidFill>
+                  <a:srgbClr val="FF6B6B"/>
+                </a:solidFill>
+                <a:latin typeface="맑은 고딕"/>
+                <a:ea typeface="맑은 고딕"/>
+                <a:cs typeface="맑은 고딕"/>
+              </a:rPr>
+              <a:t>모델을 더 올리지 않는다</a:t>
+            </a:r>
+          </a:p>
+        </p:txBody>
+      </p:sp>
+      <p:sp>
+        <p:nvSpPr>
+          <p:cNvPr id="38" name="Rounded Rectangle 37"/>
           <p:cNvSpPr/>
           <p:nvPr/>
         </p:nvSpPr>
         <p:spPr>
           <a:xfrm>
-            <a:off x="8001000" y="2240280"/>
-            <a:ext cx="3520440" cy="1783080"/>
+            <a:off x="685800" y="5230368"/>
+            <a:ext cx="10835640" cy="868680"/>
           </a:xfrm>
           <a:prstGeom prst="roundRect">
             <a:avLst>
-              <a:gd name="adj" fmla="val 6000"/>
+              <a:gd name="adj" fmla="val 5000"/>
             </a:avLst>
           </a:prstGeom>
           <a:solidFill>
@@ -4227,231 +5099,14 @@
       </p:sp>
       <p:sp>
         <p:nvSpPr>
-          <p:cNvPr id="13" name="Rectangle 12"/>
+          <p:cNvPr id="39" name="Rectangle 38"/>
           <p:cNvSpPr/>
           <p:nvPr/>
         </p:nvSpPr>
         <p:spPr>
           <a:xfrm>
-            <a:off x="8001000" y="2240280"/>
-            <a:ext cx="50292" cy="1783080"/>
-          </a:xfrm>
-          <a:prstGeom prst="rect">
-            <a:avLst/>
-          </a:prstGeom>
-          <a:solidFill>
-            <a:srgbClr val="5A9CFF"/>
-          </a:solidFill>
-          <a:ln>
-            <a:noFill/>
-          </a:ln>
-          <a:effectLst/>
-        </p:spPr>
-        <p:style>
-          <a:lnRef idx="1">
-            <a:schemeClr val="accent1"/>
-          </a:lnRef>
-          <a:fillRef idx="3">
-            <a:schemeClr val="accent1"/>
-          </a:fillRef>
-          <a:effectRef idx="2">
-            <a:schemeClr val="accent1"/>
-          </a:effectRef>
-          <a:fontRef idx="minor">
-            <a:schemeClr val="lt1"/>
-          </a:fontRef>
-        </p:style>
-        <p:txBody>
-          <a:bodyPr rtlCol="0" anchor="ctr"/>
-          <a:lstStyle/>
-          <a:p>
-            <a:pPr algn="ctr"/>
-          </a:p>
-        </p:txBody>
-      </p:sp>
-      <p:sp>
-        <p:nvSpPr>
-          <p:cNvPr id="14" name="TextBox 13"/>
-          <p:cNvSpPr txBox="1"/>
-          <p:nvPr/>
-        </p:nvSpPr>
-        <p:spPr>
-          <a:xfrm>
-            <a:off x="8311896" y="2478024"/>
-            <a:ext cx="2971800" cy="365760"/>
-          </a:xfrm>
-          <a:prstGeom prst="rect">
-            <a:avLst/>
-          </a:prstGeom>
-          <a:noFill/>
-        </p:spPr>
-        <p:txBody>
-          <a:bodyPr wrap="square" lIns="0" rIns="0" tIns="0" bIns="0" anchor="t">
-            <a:spAutoFit/>
-          </a:bodyPr>
-          <a:lstStyle/>
-          <a:p>
-            <a:pPr algn="l">
-              <a:lnSpc>
-                <a:spcPct val="115000"/>
-              </a:lnSpc>
-            </a:pPr>
-            <a:r>
-              <a:rPr sz="1500" b="1">
-                <a:solidFill>
-                  <a:srgbClr val="ECF1F6"/>
-                </a:solidFill>
-                <a:latin typeface="맑은 고딕"/>
-                <a:ea typeface="맑은 고딕"/>
-                <a:cs typeface="맑은 고딕"/>
-              </a:rPr>
-              <a:t>시연 순서</a:t>
-            </a:r>
-          </a:p>
-        </p:txBody>
-      </p:sp>
-      <p:sp>
-        <p:nvSpPr>
-          <p:cNvPr id="15" name="TextBox 14"/>
-          <p:cNvSpPr txBox="1"/>
-          <p:nvPr/>
-        </p:nvSpPr>
-        <p:spPr>
-          <a:xfrm>
-            <a:off x="8311896" y="3017520"/>
-            <a:ext cx="2971800" cy="868680"/>
-          </a:xfrm>
-          <a:prstGeom prst="rect">
-            <a:avLst/>
-          </a:prstGeom>
-          <a:noFill/>
-        </p:spPr>
-        <p:txBody>
-          <a:bodyPr wrap="square" lIns="0" rIns="0" tIns="0" bIns="0" anchor="t">
-            <a:spAutoFit/>
-          </a:bodyPr>
-          <a:lstStyle/>
-          <a:p>
-            <a:pPr algn="l">
-              <a:lnSpc>
-                <a:spcPct val="135000"/>
-              </a:lnSpc>
-              <a:spcBef>
-                <a:spcPts val="0"/>
-              </a:spcBef>
-            </a:pPr>
-            <a:r>
-              <a:rPr sz="1200" b="0">
-                <a:solidFill>
-                  <a:srgbClr val="93A4B5"/>
-                </a:solidFill>
-                <a:latin typeface="맑은 고딕"/>
-                <a:ea typeface="맑은 고딕"/>
-                <a:cs typeface="맑은 고딕"/>
-              </a:rPr>
-              <a:t>1. router.py — 5개 요청의 행선지</a:t>
-            </a:r>
-          </a:p>
-          <a:p>
-            <a:pPr algn="l">
-              <a:lnSpc>
-                <a:spcPct val="135000"/>
-              </a:lnSpc>
-              <a:spcBef>
-                <a:spcPts val="600"/>
-              </a:spcBef>
-            </a:pPr>
-            <a:r>
-              <a:rPr sz="1200" b="0">
-                <a:solidFill>
-                  <a:srgbClr val="93A4B5"/>
-                </a:solidFill>
-                <a:latin typeface="맑은 고딕"/>
-                <a:ea typeface="맑은 고딕"/>
-                <a:cs typeface="맑은 고딕"/>
-              </a:rPr>
-              <a:t>2. test_router.py — 32건 검증</a:t>
-            </a:r>
-          </a:p>
-          <a:p>
-            <a:pPr algn="l">
-              <a:lnSpc>
-                <a:spcPct val="135000"/>
-              </a:lnSpc>
-              <a:spcBef>
-                <a:spcPts val="600"/>
-              </a:spcBef>
-            </a:pPr>
-            <a:r>
-              <a:rPr sz="1200" b="0">
-                <a:solidFill>
-                  <a:srgbClr val="93A4B5"/>
-                </a:solidFill>
-                <a:latin typeface="맑은 고딕"/>
-                <a:ea typeface="맑은 고딕"/>
-                <a:cs typeface="맑은 고딕"/>
-              </a:rPr>
-              <a:t>3. 규칙 하나를 깨뜨려 FAIL 재현</a:t>
-            </a:r>
-          </a:p>
-        </p:txBody>
-      </p:sp>
-      <p:sp>
-        <p:nvSpPr>
-          <p:cNvPr id="16" name="Rounded Rectangle 15"/>
-          <p:cNvSpPr/>
-          <p:nvPr/>
-        </p:nvSpPr>
-        <p:spPr>
-          <a:xfrm>
-            <a:off x="8001000" y="4160520"/>
-            <a:ext cx="3520440" cy="1783080"/>
-          </a:xfrm>
-          <a:prstGeom prst="roundRect">
-            <a:avLst>
-              <a:gd name="adj" fmla="val 6000"/>
-            </a:avLst>
-          </a:prstGeom>
-          <a:solidFill>
-            <a:srgbClr val="18222E"/>
-          </a:solidFill>
-          <a:ln>
-            <a:noFill/>
-          </a:ln>
-          <a:effectLst/>
-        </p:spPr>
-        <p:style>
-          <a:lnRef idx="1">
-            <a:schemeClr val="accent1"/>
-          </a:lnRef>
-          <a:fillRef idx="3">
-            <a:schemeClr val="accent1"/>
-          </a:fillRef>
-          <a:effectRef idx="2">
-            <a:schemeClr val="accent1"/>
-          </a:effectRef>
-          <a:fontRef idx="minor">
-            <a:schemeClr val="lt1"/>
-          </a:fontRef>
-        </p:style>
-        <p:txBody>
-          <a:bodyPr rtlCol="0" anchor="ctr"/>
-          <a:lstStyle/>
-          <a:p>
-            <a:pPr algn="ctr"/>
-          </a:p>
-        </p:txBody>
-      </p:sp>
-      <p:sp>
-        <p:nvSpPr>
-          <p:cNvPr id="17" name="Rectangle 16"/>
-          <p:cNvSpPr/>
-          <p:nvPr/>
-        </p:nvSpPr>
-        <p:spPr>
-          <a:xfrm>
-            <a:off x="8001000" y="4160520"/>
-            <a:ext cx="50292" cy="1783080"/>
+            <a:off x="685800" y="5230368"/>
+            <a:ext cx="50292" cy="868680"/>
           </a:xfrm>
           <a:prstGeom prst="rect">
             <a:avLst/>
@@ -4488,73 +5143,50 @@
       </p:sp>
       <p:sp>
         <p:nvSpPr>
-          <p:cNvPr id="18" name="TextBox 17"/>
-          <p:cNvSpPr txBox="1"/>
-          <p:nvPr/>
-        </p:nvSpPr>
-        <p:spPr>
-          <a:xfrm>
-            <a:off x="8311896" y="4398264"/>
-            <a:ext cx="2971800" cy="365760"/>
-          </a:xfrm>
-          <a:prstGeom prst="rect">
-            <a:avLst/>
-          </a:prstGeom>
-          <a:noFill/>
-        </p:spPr>
-        <p:txBody>
-          <a:bodyPr wrap="square" lIns="0" rIns="0" tIns="0" bIns="0" anchor="t">
-            <a:spAutoFit/>
-          </a:bodyPr>
-          <a:lstStyle/>
-          <a:p>
-            <a:pPr algn="l">
-              <a:lnSpc>
-                <a:spcPct val="115000"/>
-              </a:lnSpc>
-            </a:pPr>
-            <a:r>
-              <a:rPr sz="1500" b="1">
-                <a:solidFill>
-                  <a:srgbClr val="ECF1F6"/>
-                </a:solidFill>
-                <a:latin typeface="맑은 고딕"/>
-                <a:ea typeface="맑은 고딕"/>
-                <a:cs typeface="맑은 고딕"/>
-              </a:rPr>
-              <a:t>숫자를 읽는 법</a:t>
-            </a:r>
-          </a:p>
-        </p:txBody>
-      </p:sp>
-      <p:sp>
-        <p:nvSpPr>
-          <p:cNvPr id="19" name="TextBox 18"/>
-          <p:cNvSpPr txBox="1"/>
-          <p:nvPr/>
-        </p:nvSpPr>
-        <p:spPr>
-          <a:xfrm>
-            <a:off x="8311896" y="4937759"/>
-            <a:ext cx="2971800" cy="868680"/>
-          </a:xfrm>
-          <a:prstGeom prst="rect">
-            <a:avLst/>
-          </a:prstGeom>
-          <a:noFill/>
-        </p:spPr>
-        <p:txBody>
-          <a:bodyPr wrap="square" lIns="0" rIns="0" tIns="0" bIns="0" anchor="t">
-            <a:spAutoFit/>
-          </a:bodyPr>
-          <a:lstStyle/>
-          <a:p>
-            <a:pPr algn="l">
-              <a:lnSpc>
-                <a:spcPct val="135000"/>
+          <p:cNvPr id="40" name="TextBox 39"/>
+          <p:cNvSpPr txBox="1"/>
+          <p:nvPr/>
+        </p:nvSpPr>
+        <p:spPr>
+          <a:xfrm>
+            <a:off x="960120" y="5358384"/>
+            <a:ext cx="10424160" cy="685800"/>
+          </a:xfrm>
+          <a:prstGeom prst="rect">
+            <a:avLst/>
+          </a:prstGeom>
+          <a:noFill/>
+        </p:spPr>
+        <p:txBody>
+          <a:bodyPr wrap="square" lIns="0" rIns="0" tIns="0" bIns="0" anchor="t">
+            <a:spAutoFit/>
+          </a:bodyPr>
+          <a:lstStyle/>
+          <a:p>
+            <a:pPr algn="l">
+              <a:lnSpc>
+                <a:spcPct val="115000"/>
+              </a:lnSpc>
+            </a:pPr>
+            <a:r>
+              <a:rPr sz="1350" b="1">
+                <a:solidFill>
+                  <a:srgbClr val="FFB04D"/>
+                </a:solidFill>
+                <a:latin typeface="맑은 고딕"/>
+                <a:ea typeface="맑은 고딕"/>
+                <a:cs typeface="맑은 고딕"/>
+              </a:rPr>
+              <a:t>솔직히 — 이건 절감책이 아니라 보험이다</a:t>
+            </a:r>
+          </a:p>
+          <a:p>
+            <a:pPr algn="l">
+              <a:lnSpc>
+                <a:spcPct val="115000"/>
               </a:lnSpc>
               <a:spcBef>
-                <a:spcPts val="0"/>
+                <a:spcPts val="300"/>
               </a:spcBef>
             </a:pPr>
             <a:r>
@@ -4566,20 +5198,40 @@
                 <a:ea typeface="맑은 고딕"/>
                 <a:cs typeface="맑은 고딕"/>
               </a:rPr>
-              <a:t>93.3%는 "전부 상위 모델" 대비 추정치다.</a:t>
-            </a:r>
-          </a:p>
-          <a:p>
-            <a:pPr algn="l">
-              <a:lnSpc>
-                <a:spcPct val="135000"/>
-              </a:lnSpc>
-              <a:spcBef>
-                <a:spcPts val="600"/>
-              </a:spcBef>
-            </a:pPr>
-            <a:r>
-              <a:rPr sz="1200" b="0">
+              <a:t>턴당 단가는 오른다(2회차 3.28배). 대신 4회차에서 구현을 멈추므로 총비용이 $0.21에서 상한이 걸린다. 제자리 재시도는 상한이 없다.</a:t>
+            </a:r>
+          </a:p>
+        </p:txBody>
+      </p:sp>
+      <p:sp>
+        <p:nvSpPr>
+          <p:cNvPr id="41" name="TextBox 40"/>
+          <p:cNvSpPr txBox="1"/>
+          <p:nvPr/>
+        </p:nvSpPr>
+        <p:spPr>
+          <a:xfrm>
+            <a:off x="685800" y="6199632"/>
+            <a:ext cx="10789920" cy="320040"/>
+          </a:xfrm>
+          <a:prstGeom prst="rect">
+            <a:avLst/>
+          </a:prstGeom>
+          <a:noFill/>
+        </p:spPr>
+        <p:txBody>
+          <a:bodyPr wrap="square" lIns="0" rIns="0" tIns="0" bIns="0" anchor="t">
+            <a:spAutoFit/>
+          </a:bodyPr>
+          <a:lstStyle/>
+          <a:p>
+            <a:pPr algn="l">
+              <a:lnSpc>
+                <a:spcPct val="115000"/>
+              </a:lnSpc>
+            </a:pPr>
+            <a:r>
+              <a:rPr sz="1100" b="0">
                 <a:solidFill>
                   <a:srgbClr val="93A4B5"/>
                 </a:solidFill>
@@ -4587,69 +5239,7 @@
                 <a:ea typeface="맑은 고딕"/>
                 <a:cs typeface="맑은 고딕"/>
               </a:rPr>
-              <a:t>실제 절감폭은 요청 구성비에 따라 달라진다.</a:t>
-            </a:r>
-          </a:p>
-          <a:p>
-            <a:pPr algn="l">
-              <a:lnSpc>
-                <a:spcPct val="135000"/>
-              </a:lnSpc>
-              <a:spcBef>
-                <a:spcPts val="600"/>
-              </a:spcBef>
-            </a:pPr>
-            <a:r>
-              <a:rPr sz="1200" b="0">
-                <a:solidFill>
-                  <a:srgbClr val="93A4B5"/>
-                </a:solidFill>
-                <a:latin typeface="맑은 고딕"/>
-                <a:ea typeface="맑은 고딕"/>
-                <a:cs typeface="맑은 고딕"/>
-              </a:rPr>
-              <a:t>PRICES 상수를 각자 단가로 바꿔 다시 재라.</a:t>
-            </a:r>
-          </a:p>
-        </p:txBody>
-      </p:sp>
-      <p:sp>
-        <p:nvSpPr>
-          <p:cNvPr id="20" name="TextBox 19"/>
-          <p:cNvSpPr txBox="1"/>
-          <p:nvPr/>
-        </p:nvSpPr>
-        <p:spPr>
-          <a:xfrm>
-            <a:off x="685800" y="5943600"/>
-            <a:ext cx="10789920" cy="320040"/>
-          </a:xfrm>
-          <a:prstGeom prst="rect">
-            <a:avLst/>
-          </a:prstGeom>
-          <a:noFill/>
-        </p:spPr>
-        <p:txBody>
-          <a:bodyPr wrap="square" lIns="0" rIns="0" tIns="0" bIns="0" anchor="t">
-            <a:spAutoFit/>
-          </a:bodyPr>
-          <a:lstStyle/>
-          <a:p>
-            <a:pPr algn="l">
-              <a:lnSpc>
-                <a:spcPct val="115000"/>
-              </a:lnSpc>
-            </a:pPr>
-            <a:r>
-              <a:rPr sz="1100" b="0">
-                <a:solidFill>
-                  <a:srgbClr val="93A4B5"/>
-                </a:solidFill>
-                <a:latin typeface="맑은 고딕"/>
-                <a:ea typeface="맑은 고딕"/>
-                <a:cs typeface="맑은 고딕"/>
-              </a:rPr>
-              <a:t>agent_setup/router.py (라우터) · agent_setup/test_router.py (검증 32건) — 저장소에 그대로 들어 있습니다.</a:t>
+              <a:t>측정 지표는 비용이 아니라 같은 작업이 몇 번 돌아왔는가다 — exp09-C의 48턴 리워크(16.6배)가 그 경고다.</a:t>
             </a:r>
           </a:p>
         </p:txBody>
@@ -4796,7 +5386,7 @@
                 <a:ea typeface="맑은 고딕"/>
                 <a:cs typeface="맑은 고딕"/>
               </a:rPr>
-              <a:t>FOLLOW-UP · 도입 순서</a:t>
+              <a:t>FOLLOW-UP · 리워크</a:t>
             </a:r>
           </a:p>
         </p:txBody>
@@ -4837,7 +5427,7 @@
                 <a:ea typeface="맑은 고딕"/>
                 <a:cs typeface="맑은 고딕"/>
               </a:rPr>
-              <a:t>내일부터 뭘 켜나</a:t>
+              <a:t>에스컬레이션은 비싸질까 — 숫자로</a:t>
             </a:r>
           </a:p>
         </p:txBody>
@@ -4963,7 +5553,7 @@
                 <a:ea typeface="맑은 고딕"/>
                 <a:cs typeface="맑은 고딕"/>
               </a:rPr>
-              <a:t>전부 한 번에 켜지 않는다. 위험이 낮고 효과가 즉시 보이는 것부터.</a:t>
+              <a:t>"비싼 모델로 올리면 비용이 폭발하지 않나" — 정당한 우려다. 세 가지로 나눠 답한다.</a:t>
             </a:r>
           </a:p>
         </p:txBody>
@@ -4976,8 +5566,8 @@
         </p:nvSpPr>
         <p:spPr>
           <a:xfrm>
-            <a:off x="685800" y="2286000"/>
-            <a:ext cx="10835640" cy="384048"/>
+            <a:off x="685800" y="2240280"/>
+            <a:ext cx="6858000" cy="338328"/>
           </a:xfrm>
           <a:prstGeom prst="rect">
             <a:avLst/>
@@ -5020,8 +5610,8 @@
         </p:nvSpPr>
         <p:spPr>
           <a:xfrm>
-            <a:off x="813816" y="2368296"/>
-            <a:ext cx="868680" cy="384048"/>
+            <a:off x="813816" y="2322576"/>
+            <a:ext cx="1737360" cy="338328"/>
           </a:xfrm>
           <a:prstGeom prst="rect">
             <a:avLst/>
@@ -5048,7 +5638,7 @@
                 <a:ea typeface="맑은 고딕"/>
                 <a:cs typeface="맑은 고딕"/>
               </a:rPr>
-              <a:t>시점</a:t>
+              <a:t>실패 횟수</a:t>
             </a:r>
           </a:p>
         </p:txBody>
@@ -5061,8 +5651,8 @@
         </p:nvSpPr>
         <p:spPr>
           <a:xfrm>
-            <a:off x="1865376" y="2368296"/>
-            <a:ext cx="2194560" cy="384048"/>
+            <a:off x="2734056" y="2322576"/>
+            <a:ext cx="1508760" cy="338328"/>
           </a:xfrm>
           <a:prstGeom prst="rect">
             <a:avLst/>
@@ -5089,7 +5679,7 @@
                 <a:ea typeface="맑은 고딕"/>
                 <a:cs typeface="맑은 고딕"/>
               </a:rPr>
-              <a:t>무엇을</a:t>
+              <a:t>제자리 재시도</a:t>
             </a:r>
           </a:p>
         </p:txBody>
@@ -5102,8 +5692,8 @@
         </p:nvSpPr>
         <p:spPr>
           <a:xfrm>
-            <a:off x="4242816" y="2368296"/>
-            <a:ext cx="3017520" cy="384048"/>
+            <a:off x="4425696" y="2322576"/>
+            <a:ext cx="1508760" cy="338328"/>
           </a:xfrm>
           <a:prstGeom prst="rect">
             <a:avLst/>
@@ -5130,7 +5720,7 @@
                 <a:ea typeface="맑은 고딕"/>
                 <a:cs typeface="맑은 고딕"/>
               </a:rPr>
-              <a:t>어떻게</a:t>
+              <a:t>에스컬레이션</a:t>
             </a:r>
           </a:p>
         </p:txBody>
@@ -5143,8 +5733,8 @@
         </p:nvSpPr>
         <p:spPr>
           <a:xfrm>
-            <a:off x="7443216" y="2368296"/>
-            <a:ext cx="2286000" cy="384048"/>
+            <a:off x="6117336" y="2322576"/>
+            <a:ext cx="1371600" cy="338328"/>
           </a:xfrm>
           <a:prstGeom prst="rect">
             <a:avLst/>
@@ -5171,62 +5761,21 @@
                 <a:ea typeface="맑은 고딕"/>
                 <a:cs typeface="맑은 고딕"/>
               </a:rPr>
-              <a:t>기대 효과</a:t>
-            </a:r>
-          </a:p>
-        </p:txBody>
-      </p:sp>
-      <p:sp>
-        <p:nvSpPr>
-          <p:cNvPr id="14" name="TextBox 13"/>
-          <p:cNvSpPr txBox="1"/>
-          <p:nvPr/>
-        </p:nvSpPr>
-        <p:spPr>
-          <a:xfrm>
-            <a:off x="9912096" y="2368296"/>
-            <a:ext cx="1554480" cy="384048"/>
-          </a:xfrm>
-          <a:prstGeom prst="rect">
-            <a:avLst/>
-          </a:prstGeom>
-          <a:noFill/>
-        </p:spPr>
-        <p:txBody>
-          <a:bodyPr wrap="square" lIns="0" rIns="0" tIns="0" bIns="0" anchor="t">
-            <a:spAutoFit/>
-          </a:bodyPr>
-          <a:lstStyle/>
-          <a:p>
-            <a:pPr algn="l">
-              <a:lnSpc>
-                <a:spcPct val="115000"/>
-              </a:lnSpc>
-            </a:pPr>
-            <a:r>
-              <a:rPr sz="1300" b="1">
-                <a:solidFill>
-                  <a:srgbClr val="36D399"/>
-                </a:solidFill>
-                <a:latin typeface="맑은 고딕"/>
-                <a:ea typeface="맑은 고딕"/>
-                <a:cs typeface="맑은 고딕"/>
-              </a:rPr>
-              <a:t>주의</a:t>
-            </a:r>
-          </a:p>
-        </p:txBody>
-      </p:sp>
-      <p:sp>
-        <p:nvSpPr>
-          <p:cNvPr id="15" name="Rectangle 14"/>
+              <a:t>배수</a:t>
+            </a:r>
+          </a:p>
+        </p:txBody>
+      </p:sp>
+      <p:sp>
+        <p:nvSpPr>
+          <p:cNvPr id="14" name="Rectangle 13"/>
           <p:cNvSpPr/>
           <p:nvPr/>
         </p:nvSpPr>
         <p:spPr>
           <a:xfrm>
-            <a:off x="685800" y="2670048"/>
-            <a:ext cx="10835640" cy="384048"/>
+            <a:off x="685800" y="2578608"/>
+            <a:ext cx="6858000" cy="338328"/>
           </a:xfrm>
           <a:prstGeom prst="rect">
             <a:avLst/>
@@ -5263,33 +5812,74 @@
       </p:sp>
       <p:sp>
         <p:nvSpPr>
+          <p:cNvPr id="15" name="TextBox 14"/>
+          <p:cNvSpPr txBox="1"/>
+          <p:nvPr/>
+        </p:nvSpPr>
+        <p:spPr>
+          <a:xfrm>
+            <a:off x="813816" y="2660904"/>
+            <a:ext cx="1737360" cy="338328"/>
+          </a:xfrm>
+          <a:prstGeom prst="rect">
+            <a:avLst/>
+          </a:prstGeom>
+          <a:noFill/>
+        </p:spPr>
+        <p:txBody>
+          <a:bodyPr wrap="square" lIns="0" rIns="0" tIns="0" bIns="0" anchor="t">
+            <a:spAutoFit/>
+          </a:bodyPr>
+          <a:lstStyle/>
+          <a:p>
+            <a:pPr algn="l">
+              <a:lnSpc>
+                <a:spcPct val="115000"/>
+              </a:lnSpc>
+            </a:pPr>
+            <a:r>
+              <a:rPr sz="1150" b="0">
+                <a:solidFill>
+                  <a:srgbClr val="ECF1F6"/>
+                </a:solidFill>
+                <a:latin typeface="맑은 고딕"/>
+                <a:ea typeface="맑은 고딕"/>
+                <a:cs typeface="맑은 고딕"/>
+              </a:rPr>
+              <a:t>0회 (성공)</a:t>
+            </a:r>
+          </a:p>
+        </p:txBody>
+      </p:sp>
+      <p:sp>
+        <p:nvSpPr>
           <p:cNvPr id="16" name="TextBox 15"/>
           <p:cNvSpPr txBox="1"/>
           <p:nvPr/>
         </p:nvSpPr>
         <p:spPr>
           <a:xfrm>
-            <a:off x="813816" y="2752344"/>
-            <a:ext cx="868680" cy="384048"/>
-          </a:xfrm>
-          <a:prstGeom prst="rect">
-            <a:avLst/>
-          </a:prstGeom>
-          <a:noFill/>
-        </p:spPr>
-        <p:txBody>
-          <a:bodyPr wrap="square" lIns="0" rIns="0" tIns="0" bIns="0" anchor="t">
-            <a:spAutoFit/>
-          </a:bodyPr>
-          <a:lstStyle/>
-          <a:p>
-            <a:pPr algn="l">
-              <a:lnSpc>
-                <a:spcPct val="115000"/>
-              </a:lnSpc>
-            </a:pPr>
-            <a:r>
-              <a:rPr sz="1250" b="0">
+            <a:off x="2734056" y="2660904"/>
+            <a:ext cx="1508760" cy="338328"/>
+          </a:xfrm>
+          <a:prstGeom prst="rect">
+            <a:avLst/>
+          </a:prstGeom>
+          <a:noFill/>
+        </p:spPr>
+        <p:txBody>
+          <a:bodyPr wrap="square" lIns="0" rIns="0" tIns="0" bIns="0" anchor="t">
+            <a:spAutoFit/>
+          </a:bodyPr>
+          <a:lstStyle/>
+          <a:p>
+            <a:pPr algn="l">
+              <a:lnSpc>
+                <a:spcPct val="115000"/>
+              </a:lnSpc>
+            </a:pPr>
+            <a:r>
+              <a:rPr sz="1150" b="0">
                 <a:solidFill>
                   <a:srgbClr val="ECF1F6"/>
                 </a:solidFill>
@@ -5297,7 +5887,7 @@
                 <a:ea typeface="맑은 고딕"/>
                 <a:cs typeface="맑은 고딕"/>
               </a:rPr>
-              <a:t>1일차</a:t>
+              <a:t>$0.0272</a:t>
             </a:r>
           </a:p>
         </p:txBody>
@@ -5310,27 +5900,27 @@
         </p:nvSpPr>
         <p:spPr>
           <a:xfrm>
-            <a:off x="1865376" y="2752344"/>
-            <a:ext cx="2194560" cy="384048"/>
-          </a:xfrm>
-          <a:prstGeom prst="rect">
-            <a:avLst/>
-          </a:prstGeom>
-          <a:noFill/>
-        </p:spPr>
-        <p:txBody>
-          <a:bodyPr wrap="square" lIns="0" rIns="0" tIns="0" bIns="0" anchor="t">
-            <a:spAutoFit/>
-          </a:bodyPr>
-          <a:lstStyle/>
-          <a:p>
-            <a:pPr algn="l">
-              <a:lnSpc>
-                <a:spcPct val="115000"/>
-              </a:lnSpc>
-            </a:pPr>
-            <a:r>
-              <a:rPr sz="1250" b="0">
+            <a:off x="4425696" y="2660904"/>
+            <a:ext cx="1508760" cy="338328"/>
+          </a:xfrm>
+          <a:prstGeom prst="rect">
+            <a:avLst/>
+          </a:prstGeom>
+          <a:noFill/>
+        </p:spPr>
+        <p:txBody>
+          <a:bodyPr wrap="square" lIns="0" rIns="0" tIns="0" bIns="0" anchor="t">
+            <a:spAutoFit/>
+          </a:bodyPr>
+          <a:lstStyle/>
+          <a:p>
+            <a:pPr algn="l">
+              <a:lnSpc>
+                <a:spcPct val="115000"/>
+              </a:lnSpc>
+            </a:pPr>
+            <a:r>
+              <a:rPr sz="1150" b="0">
                 <a:solidFill>
                   <a:srgbClr val="ECF1F6"/>
                 </a:solidFill>
@@ -5338,7 +5928,7 @@
                 <a:ea typeface="맑은 고딕"/>
                 <a:cs typeface="맑은 고딕"/>
               </a:rPr>
-              <a:t>설명 3줄 상한</a:t>
+              <a:t>$0.0272</a:t>
             </a:r>
           </a:p>
         </p:txBody>
@@ -5351,27 +5941,68 @@
         </p:nvSpPr>
         <p:spPr>
           <a:xfrm>
-            <a:off x="4242816" y="2752344"/>
-            <a:ext cx="3017520" cy="384048"/>
-          </a:xfrm>
-          <a:prstGeom prst="rect">
-            <a:avLst/>
-          </a:prstGeom>
-          <a:noFill/>
-        </p:spPr>
-        <p:txBody>
-          <a:bodyPr wrap="square" lIns="0" rIns="0" tIns="0" bIns="0" anchor="t">
-            <a:spAutoFit/>
-          </a:bodyPr>
-          <a:lstStyle/>
-          <a:p>
-            <a:pPr algn="l">
-              <a:lnSpc>
-                <a:spcPct val="115000"/>
-              </a:lnSpc>
-            </a:pPr>
-            <a:r>
-              <a:rPr sz="1250" b="0">
+            <a:off x="6117336" y="2660904"/>
+            <a:ext cx="1371600" cy="338328"/>
+          </a:xfrm>
+          <a:prstGeom prst="rect">
+            <a:avLst/>
+          </a:prstGeom>
+          <a:noFill/>
+        </p:spPr>
+        <p:txBody>
+          <a:bodyPr wrap="square" lIns="0" rIns="0" tIns="0" bIns="0" anchor="t">
+            <a:spAutoFit/>
+          </a:bodyPr>
+          <a:lstStyle/>
+          <a:p>
+            <a:pPr algn="l">
+              <a:lnSpc>
+                <a:spcPct val="115000"/>
+              </a:lnSpc>
+            </a:pPr>
+            <a:r>
+              <a:rPr sz="1150" b="1">
+                <a:solidFill>
+                  <a:srgbClr val="93A4B5"/>
+                </a:solidFill>
+                <a:latin typeface="맑은 고딕"/>
+                <a:ea typeface="맑은 고딕"/>
+                <a:cs typeface="맑은 고딕"/>
+              </a:rPr>
+              <a:t>동일</a:t>
+            </a:r>
+          </a:p>
+        </p:txBody>
+      </p:sp>
+      <p:sp>
+        <p:nvSpPr>
+          <p:cNvPr id="19" name="TextBox 18"/>
+          <p:cNvSpPr txBox="1"/>
+          <p:nvPr/>
+        </p:nvSpPr>
+        <p:spPr>
+          <a:xfrm>
+            <a:off x="813816" y="2999232"/>
+            <a:ext cx="1737360" cy="338328"/>
+          </a:xfrm>
+          <a:prstGeom prst="rect">
+            <a:avLst/>
+          </a:prstGeom>
+          <a:noFill/>
+        </p:spPr>
+        <p:txBody>
+          <a:bodyPr wrap="square" lIns="0" rIns="0" tIns="0" bIns="0" anchor="t">
+            <a:spAutoFit/>
+          </a:bodyPr>
+          <a:lstStyle/>
+          <a:p>
+            <a:pPr algn="l">
+              <a:lnSpc>
+                <a:spcPct val="115000"/>
+              </a:lnSpc>
+            </a:pPr>
+            <a:r>
+              <a:rPr sz="1150" b="0">
                 <a:solidFill>
                   <a:srgbClr val="ECF1F6"/>
                 </a:solidFill>
@@ -5379,48 +6010,7 @@
                 <a:ea typeface="맑은 고딕"/>
                 <a:cs typeface="맑은 고딕"/>
               </a:rPr>
-              <a:t>프롬프트 + 후처리 컷</a:t>
-            </a:r>
-          </a:p>
-        </p:txBody>
-      </p:sp>
-      <p:sp>
-        <p:nvSpPr>
-          <p:cNvPr id="19" name="TextBox 18"/>
-          <p:cNvSpPr txBox="1"/>
-          <p:nvPr/>
-        </p:nvSpPr>
-        <p:spPr>
-          <a:xfrm>
-            <a:off x="7443216" y="2752344"/>
-            <a:ext cx="2286000" cy="384048"/>
-          </a:xfrm>
-          <a:prstGeom prst="rect">
-            <a:avLst/>
-          </a:prstGeom>
-          <a:noFill/>
-        </p:spPr>
-        <p:txBody>
-          <a:bodyPr wrap="square" lIns="0" rIns="0" tIns="0" bIns="0" anchor="t">
-            <a:spAutoFit/>
-          </a:bodyPr>
-          <a:lstStyle/>
-          <a:p>
-            <a:pPr algn="l">
-              <a:lnSpc>
-                <a:spcPct val="115000"/>
-              </a:lnSpc>
-            </a:pPr>
-            <a:r>
-              <a:rPr sz="1250" b="1">
-                <a:solidFill>
-                  <a:srgbClr val="36D399"/>
-                </a:solidFill>
-                <a:latin typeface="맑은 고딕"/>
-                <a:ea typeface="맑은 고딕"/>
-                <a:cs typeface="맑은 고딕"/>
-              </a:rPr>
-              <a:t>즉시 −40~60% 출력</a:t>
+              <a:t>1회</a:t>
             </a:r>
           </a:p>
         </p:txBody>
@@ -5433,27 +6023,27 @@
         </p:nvSpPr>
         <p:spPr>
           <a:xfrm>
-            <a:off x="9912096" y="2752344"/>
-            <a:ext cx="1554480" cy="384048"/>
-          </a:xfrm>
-          <a:prstGeom prst="rect">
-            <a:avLst/>
-          </a:prstGeom>
-          <a:noFill/>
-        </p:spPr>
-        <p:txBody>
-          <a:bodyPr wrap="square" lIns="0" rIns="0" tIns="0" bIns="0" anchor="t">
-            <a:spAutoFit/>
-          </a:bodyPr>
-          <a:lstStyle/>
-          <a:p>
-            <a:pPr algn="l">
-              <a:lnSpc>
-                <a:spcPct val="115000"/>
-              </a:lnSpc>
-            </a:pPr>
-            <a:r>
-              <a:rPr sz="1250" b="0">
+            <a:off x="2734056" y="2999232"/>
+            <a:ext cx="1508760" cy="338328"/>
+          </a:xfrm>
+          <a:prstGeom prst="rect">
+            <a:avLst/>
+          </a:prstGeom>
+          <a:noFill/>
+        </p:spPr>
+        <p:txBody>
+          <a:bodyPr wrap="square" lIns="0" rIns="0" tIns="0" bIns="0" anchor="t">
+            <a:spAutoFit/>
+          </a:bodyPr>
+          <a:lstStyle/>
+          <a:p>
+            <a:pPr algn="l">
+              <a:lnSpc>
+                <a:spcPct val="115000"/>
+              </a:lnSpc>
+            </a:pPr>
+            <a:r>
+              <a:rPr sz="1150" b="0">
                 <a:solidFill>
                   <a:srgbClr val="ECF1F6"/>
                 </a:solidFill>
@@ -5461,7 +6051,7 @@
                 <a:ea typeface="맑은 고딕"/>
                 <a:cs typeface="맑은 고딕"/>
               </a:rPr>
-              <a:t>없음</a:t>
+              <a:t>$0.0545</a:t>
             </a:r>
           </a:p>
         </p:txBody>
@@ -5474,27 +6064,27 @@
         </p:nvSpPr>
         <p:spPr>
           <a:xfrm>
-            <a:off x="813816" y="3136391"/>
-            <a:ext cx="868680" cy="384048"/>
-          </a:xfrm>
-          <a:prstGeom prst="rect">
-            <a:avLst/>
-          </a:prstGeom>
-          <a:noFill/>
-        </p:spPr>
-        <p:txBody>
-          <a:bodyPr wrap="square" lIns="0" rIns="0" tIns="0" bIns="0" anchor="t">
-            <a:spAutoFit/>
-          </a:bodyPr>
-          <a:lstStyle/>
-          <a:p>
-            <a:pPr algn="l">
-              <a:lnSpc>
-                <a:spcPct val="115000"/>
-              </a:lnSpc>
-            </a:pPr>
-            <a:r>
-              <a:rPr sz="1250" b="0">
+            <a:off x="4425696" y="2999232"/>
+            <a:ext cx="1508760" cy="338328"/>
+          </a:xfrm>
+          <a:prstGeom prst="rect">
+            <a:avLst/>
+          </a:prstGeom>
+          <a:noFill/>
+        </p:spPr>
+        <p:txBody>
+          <a:bodyPr wrap="square" lIns="0" rIns="0" tIns="0" bIns="0" anchor="t">
+            <a:spAutoFit/>
+          </a:bodyPr>
+          <a:lstStyle/>
+          <a:p>
+            <a:pPr algn="l">
+              <a:lnSpc>
+                <a:spcPct val="115000"/>
+              </a:lnSpc>
+            </a:pPr>
+            <a:r>
+              <a:rPr sz="1150" b="0">
                 <a:solidFill>
                   <a:srgbClr val="ECF1F6"/>
                 </a:solidFill>
@@ -5502,7 +6092,7 @@
                 <a:ea typeface="맑은 고딕"/>
                 <a:cs typeface="맑은 고딕"/>
               </a:rPr>
-              <a:t>1주차</a:t>
+              <a:t>$0.1166</a:t>
             </a:r>
           </a:p>
         </p:txBody>
@@ -5515,172 +6105,49 @@
         </p:nvSpPr>
         <p:spPr>
           <a:xfrm>
-            <a:off x="1865376" y="3136391"/>
-            <a:ext cx="2194560" cy="384048"/>
-          </a:xfrm>
-          <a:prstGeom prst="rect">
-            <a:avLst/>
-          </a:prstGeom>
-          <a:noFill/>
-        </p:spPr>
-        <p:txBody>
-          <a:bodyPr wrap="square" lIns="0" rIns="0" tIns="0" bIns="0" anchor="t">
-            <a:spAutoFit/>
-          </a:bodyPr>
-          <a:lstStyle/>
-          <a:p>
-            <a:pPr algn="l">
-              <a:lnSpc>
-                <a:spcPct val="115000"/>
-              </a:lnSpc>
-            </a:pPr>
-            <a:r>
-              <a:rPr sz="1250" b="0">
-                <a:solidFill>
-                  <a:srgbClr val="ECF1F6"/>
-                </a:solidFill>
-                <a:latin typeface="맑은 고딕"/>
-                <a:ea typeface="맑은 고딕"/>
-                <a:cs typeface="맑은 고딕"/>
-              </a:rPr>
-              <a:t>규칙 기반 라우팅</a:t>
-            </a:r>
-          </a:p>
-        </p:txBody>
-      </p:sp>
-      <p:sp>
-        <p:nvSpPr>
-          <p:cNvPr id="23" name="TextBox 22"/>
-          <p:cNvSpPr txBox="1"/>
-          <p:nvPr/>
-        </p:nvSpPr>
-        <p:spPr>
-          <a:xfrm>
-            <a:off x="4242816" y="3136391"/>
-            <a:ext cx="3017520" cy="384048"/>
-          </a:xfrm>
-          <a:prstGeom prst="rect">
-            <a:avLst/>
-          </a:prstGeom>
-          <a:noFill/>
-        </p:spPr>
-        <p:txBody>
-          <a:bodyPr wrap="square" lIns="0" rIns="0" tIns="0" bIns="0" anchor="t">
-            <a:spAutoFit/>
-          </a:bodyPr>
-          <a:lstStyle/>
-          <a:p>
-            <a:pPr algn="l">
-              <a:lnSpc>
-                <a:spcPct val="115000"/>
-              </a:lnSpc>
-            </a:pPr>
-            <a:r>
-              <a:rPr sz="1250" b="0">
-                <a:solidFill>
-                  <a:srgbClr val="ECF1F6"/>
-                </a:solidFill>
-                <a:latin typeface="맑은 고딕"/>
-                <a:ea typeface="맑은 고딕"/>
-                <a:cs typeface="맑은 고딕"/>
-              </a:rPr>
-              <a:t>route() 붙이고 로그만 남김</a:t>
-            </a:r>
-          </a:p>
-        </p:txBody>
-      </p:sp>
-      <p:sp>
-        <p:nvSpPr>
-          <p:cNvPr id="24" name="TextBox 23"/>
-          <p:cNvSpPr txBox="1"/>
-          <p:nvPr/>
-        </p:nvSpPr>
-        <p:spPr>
-          <a:xfrm>
-            <a:off x="7443216" y="3136391"/>
-            <a:ext cx="2286000" cy="384048"/>
-          </a:xfrm>
-          <a:prstGeom prst="rect">
-            <a:avLst/>
-          </a:prstGeom>
-          <a:noFill/>
-        </p:spPr>
-        <p:txBody>
-          <a:bodyPr wrap="square" lIns="0" rIns="0" tIns="0" bIns="0" anchor="t">
-            <a:spAutoFit/>
-          </a:bodyPr>
-          <a:lstStyle/>
-          <a:p>
-            <a:pPr algn="l">
-              <a:lnSpc>
-                <a:spcPct val="115000"/>
-              </a:lnSpc>
-            </a:pPr>
-            <a:r>
-              <a:rPr sz="1250" b="1">
-                <a:solidFill>
-                  <a:srgbClr val="5A9CFF"/>
-                </a:solidFill>
-                <a:latin typeface="맑은 고딕"/>
-                <a:ea typeface="맑은 고딕"/>
-                <a:cs typeface="맑은 고딕"/>
-              </a:rPr>
-              <a:t>측정 먼저</a:t>
-            </a:r>
-          </a:p>
-        </p:txBody>
-      </p:sp>
-      <p:sp>
-        <p:nvSpPr>
-          <p:cNvPr id="25" name="TextBox 24"/>
-          <p:cNvSpPr txBox="1"/>
-          <p:nvPr/>
-        </p:nvSpPr>
-        <p:spPr>
-          <a:xfrm>
-            <a:off x="9912096" y="3136391"/>
-            <a:ext cx="1554480" cy="384048"/>
-          </a:xfrm>
-          <a:prstGeom prst="rect">
-            <a:avLst/>
-          </a:prstGeom>
-          <a:noFill/>
-        </p:spPr>
-        <p:txBody>
-          <a:bodyPr wrap="square" lIns="0" rIns="0" tIns="0" bIns="0" anchor="t">
-            <a:spAutoFit/>
-          </a:bodyPr>
-          <a:lstStyle/>
-          <a:p>
-            <a:pPr algn="l">
-              <a:lnSpc>
-                <a:spcPct val="115000"/>
-              </a:lnSpc>
-            </a:pPr>
-            <a:r>
-              <a:rPr sz="1250" b="0">
-                <a:solidFill>
-                  <a:srgbClr val="ECF1F6"/>
-                </a:solidFill>
-                <a:latin typeface="맑은 고딕"/>
-                <a:ea typeface="맑은 고딕"/>
-                <a:cs typeface="맑은 고딕"/>
-              </a:rPr>
-              <a:t>오분류</a:t>
-            </a:r>
-          </a:p>
-        </p:txBody>
-      </p:sp>
-      <p:sp>
-        <p:nvSpPr>
-          <p:cNvPr id="26" name="Rectangle 25"/>
+            <a:off x="6117336" y="2999232"/>
+            <a:ext cx="1371600" cy="338328"/>
+          </a:xfrm>
+          <a:prstGeom prst="rect">
+            <a:avLst/>
+          </a:prstGeom>
+          <a:noFill/>
+        </p:spPr>
+        <p:txBody>
+          <a:bodyPr wrap="square" lIns="0" rIns="0" tIns="0" bIns="0" anchor="t">
+            <a:spAutoFit/>
+          </a:bodyPr>
+          <a:lstStyle/>
+          <a:p>
+            <a:pPr algn="l">
+              <a:lnSpc>
+                <a:spcPct val="115000"/>
+              </a:lnSpc>
+            </a:pPr>
+            <a:r>
+              <a:rPr sz="1150" b="1">
+                <a:solidFill>
+                  <a:srgbClr val="FF6B6B"/>
+                </a:solidFill>
+                <a:latin typeface="맑은 고딕"/>
+                <a:ea typeface="맑은 고딕"/>
+                <a:cs typeface="맑은 고딕"/>
+              </a:rPr>
+              <a:t>2.14배</a:t>
+            </a:r>
+          </a:p>
+        </p:txBody>
+      </p:sp>
+      <p:sp>
+        <p:nvSpPr>
+          <p:cNvPr id="23" name="Rectangle 22"/>
           <p:cNvSpPr/>
           <p:nvPr/>
         </p:nvSpPr>
         <p:spPr>
           <a:xfrm>
-            <a:off x="685800" y="3438144"/>
-            <a:ext cx="10835640" cy="384048"/>
+            <a:off x="685800" y="3255264"/>
+            <a:ext cx="6858000" cy="338328"/>
           </a:xfrm>
           <a:prstGeom prst="rect">
             <a:avLst/>
@@ -5717,33 +6184,197 @@
       </p:sp>
       <p:sp>
         <p:nvSpPr>
+          <p:cNvPr id="24" name="TextBox 23"/>
+          <p:cNvSpPr txBox="1"/>
+          <p:nvPr/>
+        </p:nvSpPr>
+        <p:spPr>
+          <a:xfrm>
+            <a:off x="813816" y="3337560"/>
+            <a:ext cx="1737360" cy="338328"/>
+          </a:xfrm>
+          <a:prstGeom prst="rect">
+            <a:avLst/>
+          </a:prstGeom>
+          <a:noFill/>
+        </p:spPr>
+        <p:txBody>
+          <a:bodyPr wrap="square" lIns="0" rIns="0" tIns="0" bIns="0" anchor="t">
+            <a:spAutoFit/>
+          </a:bodyPr>
+          <a:lstStyle/>
+          <a:p>
+            <a:pPr algn="l">
+              <a:lnSpc>
+                <a:spcPct val="115000"/>
+              </a:lnSpc>
+            </a:pPr>
+            <a:r>
+              <a:rPr sz="1150" b="0">
+                <a:solidFill>
+                  <a:srgbClr val="ECF1F6"/>
+                </a:solidFill>
+                <a:latin typeface="맑은 고딕"/>
+                <a:ea typeface="맑은 고딕"/>
+                <a:cs typeface="맑은 고딕"/>
+              </a:rPr>
+              <a:t>2회</a:t>
+            </a:r>
+          </a:p>
+        </p:txBody>
+      </p:sp>
+      <p:sp>
+        <p:nvSpPr>
+          <p:cNvPr id="25" name="TextBox 24"/>
+          <p:cNvSpPr txBox="1"/>
+          <p:nvPr/>
+        </p:nvSpPr>
+        <p:spPr>
+          <a:xfrm>
+            <a:off x="2734056" y="3337560"/>
+            <a:ext cx="1508760" cy="338328"/>
+          </a:xfrm>
+          <a:prstGeom prst="rect">
+            <a:avLst/>
+          </a:prstGeom>
+          <a:noFill/>
+        </p:spPr>
+        <p:txBody>
+          <a:bodyPr wrap="square" lIns="0" rIns="0" tIns="0" bIns="0" anchor="t">
+            <a:spAutoFit/>
+          </a:bodyPr>
+          <a:lstStyle/>
+          <a:p>
+            <a:pPr algn="l">
+              <a:lnSpc>
+                <a:spcPct val="115000"/>
+              </a:lnSpc>
+            </a:pPr>
+            <a:r>
+              <a:rPr sz="1150" b="0">
+                <a:solidFill>
+                  <a:srgbClr val="ECF1F6"/>
+                </a:solidFill>
+                <a:latin typeface="맑은 고딕"/>
+                <a:ea typeface="맑은 고딕"/>
+                <a:cs typeface="맑은 고딕"/>
+              </a:rPr>
+              <a:t>$0.0818</a:t>
+            </a:r>
+          </a:p>
+        </p:txBody>
+      </p:sp>
+      <p:sp>
+        <p:nvSpPr>
+          <p:cNvPr id="26" name="TextBox 25"/>
+          <p:cNvSpPr txBox="1"/>
+          <p:nvPr/>
+        </p:nvSpPr>
+        <p:spPr>
+          <a:xfrm>
+            <a:off x="4425696" y="3337560"/>
+            <a:ext cx="1508760" cy="338328"/>
+          </a:xfrm>
+          <a:prstGeom prst="rect">
+            <a:avLst/>
+          </a:prstGeom>
+          <a:noFill/>
+        </p:spPr>
+        <p:txBody>
+          <a:bodyPr wrap="square" lIns="0" rIns="0" tIns="0" bIns="0" anchor="t">
+            <a:spAutoFit/>
+          </a:bodyPr>
+          <a:lstStyle/>
+          <a:p>
+            <a:pPr algn="l">
+              <a:lnSpc>
+                <a:spcPct val="115000"/>
+              </a:lnSpc>
+            </a:pPr>
+            <a:r>
+              <a:rPr sz="1150" b="0">
+                <a:solidFill>
+                  <a:srgbClr val="ECF1F6"/>
+                </a:solidFill>
+                <a:latin typeface="맑은 고딕"/>
+                <a:ea typeface="맑은 고딕"/>
+                <a:cs typeface="맑은 고딕"/>
+              </a:rPr>
+              <a:t>$0.2132</a:t>
+            </a:r>
+          </a:p>
+        </p:txBody>
+      </p:sp>
+      <p:sp>
+        <p:nvSpPr>
           <p:cNvPr id="27" name="TextBox 26"/>
           <p:cNvSpPr txBox="1"/>
           <p:nvPr/>
         </p:nvSpPr>
         <p:spPr>
           <a:xfrm>
-            <a:off x="813816" y="3520439"/>
-            <a:ext cx="868680" cy="384048"/>
-          </a:xfrm>
-          <a:prstGeom prst="rect">
-            <a:avLst/>
-          </a:prstGeom>
-          <a:noFill/>
-        </p:spPr>
-        <p:txBody>
-          <a:bodyPr wrap="square" lIns="0" rIns="0" tIns="0" bIns="0" anchor="t">
-            <a:spAutoFit/>
-          </a:bodyPr>
-          <a:lstStyle/>
-          <a:p>
-            <a:pPr algn="l">
-              <a:lnSpc>
-                <a:spcPct val="115000"/>
-              </a:lnSpc>
-            </a:pPr>
-            <a:r>
-              <a:rPr sz="1250" b="0">
+            <a:off x="6117336" y="3337560"/>
+            <a:ext cx="1371600" cy="338328"/>
+          </a:xfrm>
+          <a:prstGeom prst="rect">
+            <a:avLst/>
+          </a:prstGeom>
+          <a:noFill/>
+        </p:spPr>
+        <p:txBody>
+          <a:bodyPr wrap="square" lIns="0" rIns="0" tIns="0" bIns="0" anchor="t">
+            <a:spAutoFit/>
+          </a:bodyPr>
+          <a:lstStyle/>
+          <a:p>
+            <a:pPr algn="l">
+              <a:lnSpc>
+                <a:spcPct val="115000"/>
+              </a:lnSpc>
+            </a:pPr>
+            <a:r>
+              <a:rPr sz="1150" b="1">
+                <a:solidFill>
+                  <a:srgbClr val="FF6B6B"/>
+                </a:solidFill>
+                <a:latin typeface="맑은 고딕"/>
+                <a:ea typeface="맑은 고딕"/>
+                <a:cs typeface="맑은 고딕"/>
+              </a:rPr>
+              <a:t>2.61배 ← 최악</a:t>
+            </a:r>
+          </a:p>
+        </p:txBody>
+      </p:sp>
+      <p:sp>
+        <p:nvSpPr>
+          <p:cNvPr id="28" name="TextBox 27"/>
+          <p:cNvSpPr txBox="1"/>
+          <p:nvPr/>
+        </p:nvSpPr>
+        <p:spPr>
+          <a:xfrm>
+            <a:off x="813816" y="3675888"/>
+            <a:ext cx="1737360" cy="338328"/>
+          </a:xfrm>
+          <a:prstGeom prst="rect">
+            <a:avLst/>
+          </a:prstGeom>
+          <a:noFill/>
+        </p:spPr>
+        <p:txBody>
+          <a:bodyPr wrap="square" lIns="0" rIns="0" tIns="0" bIns="0" anchor="t">
+            <a:spAutoFit/>
+          </a:bodyPr>
+          <a:lstStyle/>
+          <a:p>
+            <a:pPr algn="l">
+              <a:lnSpc>
+                <a:spcPct val="115000"/>
+              </a:lnSpc>
+            </a:pPr>
+            <a:r>
+              <a:rPr sz="1150" b="0">
                 <a:solidFill>
                   <a:srgbClr val="ECF1F6"/>
                 </a:solidFill>
@@ -5751,40 +6382,40 @@
                 <a:ea typeface="맑은 고딕"/>
                 <a:cs typeface="맑은 고딕"/>
               </a:rPr>
-              <a:t>2주차</a:t>
-            </a:r>
-          </a:p>
-        </p:txBody>
-      </p:sp>
-      <p:sp>
-        <p:nvSpPr>
-          <p:cNvPr id="28" name="TextBox 27"/>
-          <p:cNvSpPr txBox="1"/>
-          <p:nvPr/>
-        </p:nvSpPr>
-        <p:spPr>
-          <a:xfrm>
-            <a:off x="1865376" y="3520439"/>
-            <a:ext cx="2194560" cy="384048"/>
-          </a:xfrm>
-          <a:prstGeom prst="rect">
-            <a:avLst/>
-          </a:prstGeom>
-          <a:noFill/>
-        </p:spPr>
-        <p:txBody>
-          <a:bodyPr wrap="square" lIns="0" rIns="0" tIns="0" bIns="0" anchor="t">
-            <a:spAutoFit/>
-          </a:bodyPr>
-          <a:lstStyle/>
-          <a:p>
-            <a:pPr algn="l">
-              <a:lnSpc>
-                <a:spcPct val="115000"/>
-              </a:lnSpc>
-            </a:pPr>
-            <a:r>
-              <a:rPr sz="1250" b="0">
+              <a:t>3회</a:t>
+            </a:r>
+          </a:p>
+        </p:txBody>
+      </p:sp>
+      <p:sp>
+        <p:nvSpPr>
+          <p:cNvPr id="29" name="TextBox 28"/>
+          <p:cNvSpPr txBox="1"/>
+          <p:nvPr/>
+        </p:nvSpPr>
+        <p:spPr>
+          <a:xfrm>
+            <a:off x="2734056" y="3675888"/>
+            <a:ext cx="1508760" cy="338328"/>
+          </a:xfrm>
+          <a:prstGeom prst="rect">
+            <a:avLst/>
+          </a:prstGeom>
+          <a:noFill/>
+        </p:spPr>
+        <p:txBody>
+          <a:bodyPr wrap="square" lIns="0" rIns="0" tIns="0" bIns="0" anchor="t">
+            <a:spAutoFit/>
+          </a:bodyPr>
+          <a:lstStyle/>
+          <a:p>
+            <a:pPr algn="l">
+              <a:lnSpc>
+                <a:spcPct val="115000"/>
+              </a:lnSpc>
+            </a:pPr>
+            <a:r>
+              <a:rPr sz="1150" b="0">
                 <a:solidFill>
                   <a:srgbClr val="ECF1F6"/>
                 </a:solidFill>
@@ -5792,40 +6423,40 @@
                 <a:ea typeface="맑은 고딕"/>
                 <a:cs typeface="맑은 고딕"/>
               </a:rPr>
-              <a:t>라우팅 실제 적용</a:t>
-            </a:r>
-          </a:p>
-        </p:txBody>
-      </p:sp>
-      <p:sp>
-        <p:nvSpPr>
-          <p:cNvPr id="29" name="TextBox 28"/>
-          <p:cNvSpPr txBox="1"/>
-          <p:nvPr/>
-        </p:nvSpPr>
-        <p:spPr>
-          <a:xfrm>
-            <a:off x="4242816" y="3520439"/>
-            <a:ext cx="3017520" cy="384048"/>
-          </a:xfrm>
-          <a:prstGeom prst="rect">
-            <a:avLst/>
-          </a:prstGeom>
-          <a:noFill/>
-        </p:spPr>
-        <p:txBody>
-          <a:bodyPr wrap="square" lIns="0" rIns="0" tIns="0" bIns="0" anchor="t">
-            <a:spAutoFit/>
-          </a:bodyPr>
-          <a:lstStyle/>
-          <a:p>
-            <a:pPr algn="l">
-              <a:lnSpc>
-                <a:spcPct val="115000"/>
-              </a:lnSpc>
-            </a:pPr>
-            <a:r>
-              <a:rPr sz="1250" b="0">
+              <a:t>$0.1090</a:t>
+            </a:r>
+          </a:p>
+        </p:txBody>
+      </p:sp>
+      <p:sp>
+        <p:nvSpPr>
+          <p:cNvPr id="30" name="TextBox 29"/>
+          <p:cNvSpPr txBox="1"/>
+          <p:nvPr/>
+        </p:nvSpPr>
+        <p:spPr>
+          <a:xfrm>
+            <a:off x="4425696" y="3675888"/>
+            <a:ext cx="1508760" cy="338328"/>
+          </a:xfrm>
+          <a:prstGeom prst="rect">
+            <a:avLst/>
+          </a:prstGeom>
+          <a:noFill/>
+        </p:spPr>
+        <p:txBody>
+          <a:bodyPr wrap="square" lIns="0" rIns="0" tIns="0" bIns="0" anchor="t">
+            <a:spAutoFit/>
+          </a:bodyPr>
+          <a:lstStyle/>
+          <a:p>
+            <a:pPr algn="l">
+              <a:lnSpc>
+                <a:spcPct val="115000"/>
+              </a:lnSpc>
+            </a:pPr>
+            <a:r>
+              <a:rPr sz="1150" b="0">
                 <a:solidFill>
                   <a:srgbClr val="ECF1F6"/>
                 </a:solidFill>
@@ -5833,48 +6464,7 @@
                 <a:ea typeface="맑은 고딕"/>
                 <a:cs typeface="맑은 고딕"/>
               </a:rPr>
-              <a:t>툴·설명부터 소형으로</a:t>
-            </a:r>
-          </a:p>
-        </p:txBody>
-      </p:sp>
-      <p:sp>
-        <p:nvSpPr>
-          <p:cNvPr id="30" name="TextBox 29"/>
-          <p:cNvSpPr txBox="1"/>
-          <p:nvPr/>
-        </p:nvSpPr>
-        <p:spPr>
-          <a:xfrm>
-            <a:off x="7443216" y="3520439"/>
-            <a:ext cx="2286000" cy="384048"/>
-          </a:xfrm>
-          <a:prstGeom prst="rect">
-            <a:avLst/>
-          </a:prstGeom>
-          <a:noFill/>
-        </p:spPr>
-        <p:txBody>
-          <a:bodyPr wrap="square" lIns="0" rIns="0" tIns="0" bIns="0" anchor="t">
-            <a:spAutoFit/>
-          </a:bodyPr>
-          <a:lstStyle/>
-          <a:p>
-            <a:pPr algn="l">
-              <a:lnSpc>
-                <a:spcPct val="115000"/>
-              </a:lnSpc>
-            </a:pPr>
-            <a:r>
-              <a:rPr sz="1250" b="1">
-                <a:solidFill>
-                  <a:srgbClr val="36D399"/>
-                </a:solidFill>
-                <a:latin typeface="맑은 고딕"/>
-                <a:ea typeface="맑은 고딕"/>
-                <a:cs typeface="맑은 고딕"/>
-              </a:rPr>
-              <a:t>−49~84%</a:t>
+              <a:t>$0.2132</a:t>
             </a:r>
           </a:p>
         </p:txBody>
@@ -5887,254 +6477,49 @@
         </p:nvSpPr>
         <p:spPr>
           <a:xfrm>
-            <a:off x="9912096" y="3520439"/>
-            <a:ext cx="1554480" cy="384048"/>
-          </a:xfrm>
-          <a:prstGeom prst="rect">
-            <a:avLst/>
-          </a:prstGeom>
-          <a:noFill/>
-        </p:spPr>
-        <p:txBody>
-          <a:bodyPr wrap="square" lIns="0" rIns="0" tIns="0" bIns="0" anchor="t">
-            <a:spAutoFit/>
-          </a:bodyPr>
-          <a:lstStyle/>
-          <a:p>
-            <a:pPr algn="l">
-              <a:lnSpc>
-                <a:spcPct val="115000"/>
-              </a:lnSpc>
-            </a:pPr>
-            <a:r>
-              <a:rPr sz="1250" b="0">
-                <a:solidFill>
-                  <a:srgbClr val="ECF1F6"/>
-                </a:solidFill>
-                <a:latin typeface="맑은 고딕"/>
-                <a:ea typeface="맑은 고딕"/>
-                <a:cs typeface="맑은 고딕"/>
-              </a:rPr>
-              <a:t>품질 회귀</a:t>
-            </a:r>
-          </a:p>
-        </p:txBody>
-      </p:sp>
-      <p:sp>
-        <p:nvSpPr>
-          <p:cNvPr id="32" name="TextBox 31"/>
-          <p:cNvSpPr txBox="1"/>
-          <p:nvPr/>
-        </p:nvSpPr>
-        <p:spPr>
-          <a:xfrm>
-            <a:off x="813816" y="3904487"/>
-            <a:ext cx="868680" cy="384048"/>
-          </a:xfrm>
-          <a:prstGeom prst="rect">
-            <a:avLst/>
-          </a:prstGeom>
-          <a:noFill/>
-        </p:spPr>
-        <p:txBody>
-          <a:bodyPr wrap="square" lIns="0" rIns="0" tIns="0" bIns="0" anchor="t">
-            <a:spAutoFit/>
-          </a:bodyPr>
-          <a:lstStyle/>
-          <a:p>
-            <a:pPr algn="l">
-              <a:lnSpc>
-                <a:spcPct val="115000"/>
-              </a:lnSpc>
-            </a:pPr>
-            <a:r>
-              <a:rPr sz="1250" b="0">
-                <a:solidFill>
-                  <a:srgbClr val="ECF1F6"/>
-                </a:solidFill>
-                <a:latin typeface="맑은 고딕"/>
-                <a:ea typeface="맑은 고딕"/>
-                <a:cs typeface="맑은 고딕"/>
-              </a:rPr>
-              <a:t>3주차</a:t>
-            </a:r>
-          </a:p>
-        </p:txBody>
-      </p:sp>
-      <p:sp>
-        <p:nvSpPr>
-          <p:cNvPr id="33" name="TextBox 32"/>
-          <p:cNvSpPr txBox="1"/>
-          <p:nvPr/>
-        </p:nvSpPr>
-        <p:spPr>
-          <a:xfrm>
-            <a:off x="1865376" y="3904487"/>
-            <a:ext cx="2194560" cy="384048"/>
-          </a:xfrm>
-          <a:prstGeom prst="rect">
-            <a:avLst/>
-          </a:prstGeom>
-          <a:noFill/>
-        </p:spPr>
-        <p:txBody>
-          <a:bodyPr wrap="square" lIns="0" rIns="0" tIns="0" bIns="0" anchor="t">
-            <a:spAutoFit/>
-          </a:bodyPr>
-          <a:lstStyle/>
-          <a:p>
-            <a:pPr algn="l">
-              <a:lnSpc>
-                <a:spcPct val="115000"/>
-              </a:lnSpc>
-            </a:pPr>
-            <a:r>
-              <a:rPr sz="1250" b="0">
-                <a:solidFill>
-                  <a:srgbClr val="ECF1F6"/>
-                </a:solidFill>
-                <a:latin typeface="맑은 고딕"/>
-                <a:ea typeface="맑은 고딕"/>
-                <a:cs typeface="맑은 고딕"/>
-              </a:rPr>
-              <a:t>세션 리셋 자동화</a:t>
-            </a:r>
-          </a:p>
-        </p:txBody>
-      </p:sp>
-      <p:sp>
-        <p:nvSpPr>
-          <p:cNvPr id="34" name="TextBox 33"/>
-          <p:cNvSpPr txBox="1"/>
-          <p:nvPr/>
-        </p:nvSpPr>
-        <p:spPr>
-          <a:xfrm>
-            <a:off x="4242816" y="3904487"/>
-            <a:ext cx="3017520" cy="384048"/>
-          </a:xfrm>
-          <a:prstGeom prst="rect">
-            <a:avLst/>
-          </a:prstGeom>
-          <a:noFill/>
-        </p:spPr>
-        <p:txBody>
-          <a:bodyPr wrap="square" lIns="0" rIns="0" tIns="0" bIns="0" anchor="t">
-            <a:spAutoFit/>
-          </a:bodyPr>
-          <a:lstStyle/>
-          <a:p>
-            <a:pPr algn="l">
-              <a:lnSpc>
-                <a:spcPct val="115000"/>
-              </a:lnSpc>
-            </a:pPr>
-            <a:r>
-              <a:rPr sz="1250" b="0">
-                <a:solidFill>
-                  <a:srgbClr val="ECF1F6"/>
-                </a:solidFill>
-                <a:latin typeface="맑은 고딕"/>
-                <a:ea typeface="맑은 고딕"/>
-                <a:cs typeface="맑은 고딕"/>
-              </a:rPr>
-              <a:t>반복 감지 → 커밋 → 재시작</a:t>
-            </a:r>
-          </a:p>
-        </p:txBody>
-      </p:sp>
-      <p:sp>
-        <p:nvSpPr>
-          <p:cNvPr id="35" name="TextBox 34"/>
-          <p:cNvSpPr txBox="1"/>
-          <p:nvPr/>
-        </p:nvSpPr>
-        <p:spPr>
-          <a:xfrm>
-            <a:off x="7443216" y="3904487"/>
-            <a:ext cx="2286000" cy="384048"/>
-          </a:xfrm>
-          <a:prstGeom prst="rect">
-            <a:avLst/>
-          </a:prstGeom>
-          <a:noFill/>
-        </p:spPr>
-        <p:txBody>
-          <a:bodyPr wrap="square" lIns="0" rIns="0" tIns="0" bIns="0" anchor="t">
-            <a:spAutoFit/>
-          </a:bodyPr>
-          <a:lstStyle/>
-          <a:p>
-            <a:pPr algn="l">
-              <a:lnSpc>
-                <a:spcPct val="115000"/>
-              </a:lnSpc>
-            </a:pPr>
-            <a:r>
-              <a:rPr sz="1250" b="1">
-                <a:solidFill>
-                  <a:srgbClr val="36D399"/>
-                </a:solidFill>
-                <a:latin typeface="맑은 고딕"/>
-                <a:ea typeface="맑은 고딕"/>
-                <a:cs typeface="맑은 고딕"/>
-              </a:rPr>
-              <a:t>컨텍스트 단가 억제</a:t>
-            </a:r>
-          </a:p>
-        </p:txBody>
-      </p:sp>
-      <p:sp>
-        <p:nvSpPr>
-          <p:cNvPr id="36" name="TextBox 35"/>
-          <p:cNvSpPr txBox="1"/>
-          <p:nvPr/>
-        </p:nvSpPr>
-        <p:spPr>
-          <a:xfrm>
-            <a:off x="9912096" y="3904487"/>
-            <a:ext cx="1554480" cy="384048"/>
-          </a:xfrm>
-          <a:prstGeom prst="rect">
-            <a:avLst/>
-          </a:prstGeom>
-          <a:noFill/>
-        </p:spPr>
-        <p:txBody>
-          <a:bodyPr wrap="square" lIns="0" rIns="0" tIns="0" bIns="0" anchor="t">
-            <a:spAutoFit/>
-          </a:bodyPr>
-          <a:lstStyle/>
-          <a:p>
-            <a:pPr algn="l">
-              <a:lnSpc>
-                <a:spcPct val="115000"/>
-              </a:lnSpc>
-            </a:pPr>
-            <a:r>
-              <a:rPr sz="1250" b="0">
-                <a:solidFill>
-                  <a:srgbClr val="ECF1F6"/>
-                </a:solidFill>
-                <a:latin typeface="맑은 고딕"/>
-                <a:ea typeface="맑은 고딕"/>
-                <a:cs typeface="맑은 고딕"/>
-              </a:rPr>
-              <a:t>맥락 유실</a:t>
-            </a:r>
-          </a:p>
-        </p:txBody>
-      </p:sp>
-      <p:sp>
-        <p:nvSpPr>
-          <p:cNvPr id="37" name="Rectangle 36"/>
+            <a:off x="6117336" y="3675888"/>
+            <a:ext cx="1371600" cy="338328"/>
+          </a:xfrm>
+          <a:prstGeom prst="rect">
+            <a:avLst/>
+          </a:prstGeom>
+          <a:noFill/>
+        </p:spPr>
+        <p:txBody>
+          <a:bodyPr wrap="square" lIns="0" rIns="0" tIns="0" bIns="0" anchor="t">
+            <a:spAutoFit/>
+          </a:bodyPr>
+          <a:lstStyle/>
+          <a:p>
+            <a:pPr algn="l">
+              <a:lnSpc>
+                <a:spcPct val="115000"/>
+              </a:lnSpc>
+            </a:pPr>
+            <a:r>
+              <a:rPr sz="1150" b="1">
+                <a:solidFill>
+                  <a:srgbClr val="FFB04D"/>
+                </a:solidFill>
+                <a:latin typeface="맑은 고딕"/>
+                <a:ea typeface="맑은 고딕"/>
+                <a:cs typeface="맑은 고딕"/>
+              </a:rPr>
+              <a:t>1.96배</a:t>
+            </a:r>
+          </a:p>
+        </p:txBody>
+      </p:sp>
+      <p:sp>
+        <p:nvSpPr>
+          <p:cNvPr id="32" name="Rectangle 31"/>
           <p:cNvSpPr/>
           <p:nvPr/>
         </p:nvSpPr>
         <p:spPr>
           <a:xfrm>
-            <a:off x="685800" y="4206240"/>
-            <a:ext cx="10835640" cy="384048"/>
+            <a:off x="685800" y="3931920"/>
+            <a:ext cx="6858000" cy="338328"/>
           </a:xfrm>
           <a:prstGeom prst="rect">
             <a:avLst/>
@@ -6171,33 +6556,238 @@
       </p:sp>
       <p:sp>
         <p:nvSpPr>
+          <p:cNvPr id="33" name="TextBox 32"/>
+          <p:cNvSpPr txBox="1"/>
+          <p:nvPr/>
+        </p:nvSpPr>
+        <p:spPr>
+          <a:xfrm>
+            <a:off x="813816" y="4014216"/>
+            <a:ext cx="1737360" cy="338328"/>
+          </a:xfrm>
+          <a:prstGeom prst="rect">
+            <a:avLst/>
+          </a:prstGeom>
+          <a:noFill/>
+        </p:spPr>
+        <p:txBody>
+          <a:bodyPr wrap="square" lIns="0" rIns="0" tIns="0" bIns="0" anchor="t">
+            <a:spAutoFit/>
+          </a:bodyPr>
+          <a:lstStyle/>
+          <a:p>
+            <a:pPr algn="l">
+              <a:lnSpc>
+                <a:spcPct val="115000"/>
+              </a:lnSpc>
+            </a:pPr>
+            <a:r>
+              <a:rPr sz="1150" b="0">
+                <a:solidFill>
+                  <a:srgbClr val="ECF1F6"/>
+                </a:solidFill>
+                <a:latin typeface="맑은 고딕"/>
+                <a:ea typeface="맑은 고딕"/>
+                <a:cs typeface="맑은 고딕"/>
+              </a:rPr>
+              <a:t>10회</a:t>
+            </a:r>
+          </a:p>
+        </p:txBody>
+      </p:sp>
+      <p:sp>
+        <p:nvSpPr>
+          <p:cNvPr id="34" name="TextBox 33"/>
+          <p:cNvSpPr txBox="1"/>
+          <p:nvPr/>
+        </p:nvSpPr>
+        <p:spPr>
+          <a:xfrm>
+            <a:off x="2734056" y="4014216"/>
+            <a:ext cx="1508760" cy="338328"/>
+          </a:xfrm>
+          <a:prstGeom prst="rect">
+            <a:avLst/>
+          </a:prstGeom>
+          <a:noFill/>
+        </p:spPr>
+        <p:txBody>
+          <a:bodyPr wrap="square" lIns="0" rIns="0" tIns="0" bIns="0" anchor="t">
+            <a:spAutoFit/>
+          </a:bodyPr>
+          <a:lstStyle/>
+          <a:p>
+            <a:pPr algn="l">
+              <a:lnSpc>
+                <a:spcPct val="115000"/>
+              </a:lnSpc>
+            </a:pPr>
+            <a:r>
+              <a:rPr sz="1150" b="0">
+                <a:solidFill>
+                  <a:srgbClr val="ECF1F6"/>
+                </a:solidFill>
+                <a:latin typeface="맑은 고딕"/>
+                <a:ea typeface="맑은 고딕"/>
+                <a:cs typeface="맑은 고딕"/>
+              </a:rPr>
+              <a:t>$0.2998</a:t>
+            </a:r>
+          </a:p>
+        </p:txBody>
+      </p:sp>
+      <p:sp>
+        <p:nvSpPr>
+          <p:cNvPr id="35" name="TextBox 34"/>
+          <p:cNvSpPr txBox="1"/>
+          <p:nvPr/>
+        </p:nvSpPr>
+        <p:spPr>
+          <a:xfrm>
+            <a:off x="4425696" y="4014216"/>
+            <a:ext cx="1508760" cy="338328"/>
+          </a:xfrm>
+          <a:prstGeom prst="rect">
+            <a:avLst/>
+          </a:prstGeom>
+          <a:noFill/>
+        </p:spPr>
+        <p:txBody>
+          <a:bodyPr wrap="square" lIns="0" rIns="0" tIns="0" bIns="0" anchor="t">
+            <a:spAutoFit/>
+          </a:bodyPr>
+          <a:lstStyle/>
+          <a:p>
+            <a:pPr algn="l">
+              <a:lnSpc>
+                <a:spcPct val="115000"/>
+              </a:lnSpc>
+            </a:pPr>
+            <a:r>
+              <a:rPr sz="1150" b="0">
+                <a:solidFill>
+                  <a:srgbClr val="ECF1F6"/>
+                </a:solidFill>
+                <a:latin typeface="맑은 고딕"/>
+                <a:ea typeface="맑은 고딕"/>
+                <a:cs typeface="맑은 고딕"/>
+              </a:rPr>
+              <a:t>$0.2132</a:t>
+            </a:r>
+          </a:p>
+        </p:txBody>
+      </p:sp>
+      <p:sp>
+        <p:nvSpPr>
+          <p:cNvPr id="36" name="TextBox 35"/>
+          <p:cNvSpPr txBox="1"/>
+          <p:nvPr/>
+        </p:nvSpPr>
+        <p:spPr>
+          <a:xfrm>
+            <a:off x="6117336" y="4014216"/>
+            <a:ext cx="1371600" cy="338328"/>
+          </a:xfrm>
+          <a:prstGeom prst="rect">
+            <a:avLst/>
+          </a:prstGeom>
+          <a:noFill/>
+        </p:spPr>
+        <p:txBody>
+          <a:bodyPr wrap="square" lIns="0" rIns="0" tIns="0" bIns="0" anchor="t">
+            <a:spAutoFit/>
+          </a:bodyPr>
+          <a:lstStyle/>
+          <a:p>
+            <a:pPr algn="l">
+              <a:lnSpc>
+                <a:spcPct val="115000"/>
+              </a:lnSpc>
+            </a:pPr>
+            <a:r>
+              <a:rPr sz="1150" b="1">
+                <a:solidFill>
+                  <a:srgbClr val="36D399"/>
+                </a:solidFill>
+                <a:latin typeface="맑은 고딕"/>
+                <a:ea typeface="맑은 고딕"/>
+                <a:cs typeface="맑은 고딕"/>
+              </a:rPr>
+              <a:t>0.71배 ← 역전</a:t>
+            </a:r>
+          </a:p>
+        </p:txBody>
+      </p:sp>
+      <p:sp>
+        <p:nvSpPr>
+          <p:cNvPr id="37" name="TextBox 36"/>
+          <p:cNvSpPr txBox="1"/>
+          <p:nvPr/>
+        </p:nvSpPr>
+        <p:spPr>
+          <a:xfrm>
+            <a:off x="813816" y="4352544"/>
+            <a:ext cx="1737360" cy="338328"/>
+          </a:xfrm>
+          <a:prstGeom prst="rect">
+            <a:avLst/>
+          </a:prstGeom>
+          <a:noFill/>
+        </p:spPr>
+        <p:txBody>
+          <a:bodyPr wrap="square" lIns="0" rIns="0" tIns="0" bIns="0" anchor="t">
+            <a:spAutoFit/>
+          </a:bodyPr>
+          <a:lstStyle/>
+          <a:p>
+            <a:pPr algn="l">
+              <a:lnSpc>
+                <a:spcPct val="115000"/>
+              </a:lnSpc>
+            </a:pPr>
+            <a:r>
+              <a:rPr sz="1150" b="0">
+                <a:solidFill>
+                  <a:srgbClr val="ECF1F6"/>
+                </a:solidFill>
+                <a:latin typeface="맑은 고딕"/>
+                <a:ea typeface="맑은 고딕"/>
+                <a:cs typeface="맑은 고딕"/>
+              </a:rPr>
+              <a:t>48회 (exp09-C)</a:t>
+            </a:r>
+          </a:p>
+        </p:txBody>
+      </p:sp>
+      <p:sp>
+        <p:nvSpPr>
           <p:cNvPr id="38" name="TextBox 37"/>
           <p:cNvSpPr txBox="1"/>
           <p:nvPr/>
         </p:nvSpPr>
         <p:spPr>
           <a:xfrm>
-            <a:off x="813816" y="4288536"/>
-            <a:ext cx="868680" cy="384048"/>
-          </a:xfrm>
-          <a:prstGeom prst="rect">
-            <a:avLst/>
-          </a:prstGeom>
-          <a:noFill/>
-        </p:spPr>
-        <p:txBody>
-          <a:bodyPr wrap="square" lIns="0" rIns="0" tIns="0" bIns="0" anchor="t">
-            <a:spAutoFit/>
-          </a:bodyPr>
-          <a:lstStyle/>
-          <a:p>
-            <a:pPr algn="l">
-              <a:lnSpc>
-                <a:spcPct val="115000"/>
-              </a:lnSpc>
-            </a:pPr>
-            <a:r>
-              <a:rPr sz="1250" b="0">
+            <a:off x="2734056" y="4352544"/>
+            <a:ext cx="1508760" cy="338328"/>
+          </a:xfrm>
+          <a:prstGeom prst="rect">
+            <a:avLst/>
+          </a:prstGeom>
+          <a:noFill/>
+        </p:spPr>
+        <p:txBody>
+          <a:bodyPr wrap="square" lIns="0" rIns="0" tIns="0" bIns="0" anchor="t">
+            <a:spAutoFit/>
+          </a:bodyPr>
+          <a:lstStyle/>
+          <a:p>
+            <a:pPr algn="l">
+              <a:lnSpc>
+                <a:spcPct val="115000"/>
+              </a:lnSpc>
+            </a:pPr>
+            <a:r>
+              <a:rPr sz="1150" b="0">
                 <a:solidFill>
                   <a:srgbClr val="ECF1F6"/>
                 </a:solidFill>
@@ -6205,7 +6795,7 @@
                 <a:ea typeface="맑은 고딕"/>
                 <a:cs typeface="맑은 고딕"/>
               </a:rPr>
-              <a:t>4주차</a:t>
+              <a:t>$1.3353</a:t>
             </a:r>
           </a:p>
         </p:txBody>
@@ -6218,27 +6808,27 @@
         </p:nvSpPr>
         <p:spPr>
           <a:xfrm>
-            <a:off x="1865376" y="4288536"/>
-            <a:ext cx="2194560" cy="384048"/>
-          </a:xfrm>
-          <a:prstGeom prst="rect">
-            <a:avLst/>
-          </a:prstGeom>
-          <a:noFill/>
-        </p:spPr>
-        <p:txBody>
-          <a:bodyPr wrap="square" lIns="0" rIns="0" tIns="0" bIns="0" anchor="t">
-            <a:spAutoFit/>
-          </a:bodyPr>
-          <a:lstStyle/>
-          <a:p>
-            <a:pPr algn="l">
-              <a:lnSpc>
-                <a:spcPct val="115000"/>
-              </a:lnSpc>
-            </a:pPr>
-            <a:r>
-              <a:rPr sz="1250" b="0">
+            <a:off x="4425696" y="4352544"/>
+            <a:ext cx="1508760" cy="338328"/>
+          </a:xfrm>
+          <a:prstGeom prst="rect">
+            <a:avLst/>
+          </a:prstGeom>
+          <a:noFill/>
+        </p:spPr>
+        <p:txBody>
+          <a:bodyPr wrap="square" lIns="0" rIns="0" tIns="0" bIns="0" anchor="t">
+            <a:spAutoFit/>
+          </a:bodyPr>
+          <a:lstStyle/>
+          <a:p>
+            <a:pPr algn="l">
+              <a:lnSpc>
+                <a:spcPct val="115000"/>
+              </a:lnSpc>
+            </a:pPr>
+            <a:r>
+              <a:rPr sz="1150" b="0">
                 <a:solidFill>
                   <a:srgbClr val="ECF1F6"/>
                 </a:solidFill>
@@ -6246,7 +6836,7 @@
                 <a:ea typeface="맑은 고딕"/>
                 <a:cs typeface="맑은 고딕"/>
               </a:rPr>
-              <a:t>배치 도입</a:t>
+              <a:t>$0.2132</a:t>
             </a:r>
           </a:p>
         </p:txBody>
@@ -6259,68 +6849,27 @@
         </p:nvSpPr>
         <p:spPr>
           <a:xfrm>
-            <a:off x="4242816" y="4288536"/>
-            <a:ext cx="3017520" cy="384048"/>
-          </a:xfrm>
-          <a:prstGeom prst="rect">
-            <a:avLst/>
-          </a:prstGeom>
-          <a:noFill/>
-        </p:spPr>
-        <p:txBody>
-          <a:bodyPr wrap="square" lIns="0" rIns="0" tIns="0" bIns="0" anchor="t">
-            <a:spAutoFit/>
-          </a:bodyPr>
-          <a:lstStyle/>
-          <a:p>
-            <a:pPr algn="l">
-              <a:lnSpc>
-                <a:spcPct val="115000"/>
-              </a:lnSpc>
-            </a:pPr>
-            <a:r>
-              <a:rPr sz="1250" b="0">
-                <a:solidFill>
-                  <a:srgbClr val="ECF1F6"/>
-                </a:solidFill>
-                <a:latin typeface="맑은 고딕"/>
-                <a:ea typeface="맑은 고딕"/>
-                <a:cs typeface="맑은 고딕"/>
-              </a:rPr>
-              <a:t>마감 없는 대량 작업만</a:t>
-            </a:r>
-          </a:p>
-        </p:txBody>
-      </p:sp>
-      <p:sp>
-        <p:nvSpPr>
-          <p:cNvPr id="41" name="TextBox 40"/>
-          <p:cNvSpPr txBox="1"/>
-          <p:nvPr/>
-        </p:nvSpPr>
-        <p:spPr>
-          <a:xfrm>
-            <a:off x="7443216" y="4288536"/>
-            <a:ext cx="2286000" cy="384048"/>
-          </a:xfrm>
-          <a:prstGeom prst="rect">
-            <a:avLst/>
-          </a:prstGeom>
-          <a:noFill/>
-        </p:spPr>
-        <p:txBody>
-          <a:bodyPr wrap="square" lIns="0" rIns="0" tIns="0" bIns="0" anchor="t">
-            <a:spAutoFit/>
-          </a:bodyPr>
-          <a:lstStyle/>
-          <a:p>
-            <a:pPr algn="l">
-              <a:lnSpc>
-                <a:spcPct val="115000"/>
-              </a:lnSpc>
-            </a:pPr>
-            <a:r>
-              <a:rPr sz="1250" b="1">
+            <a:off x="6117336" y="4352544"/>
+            <a:ext cx="1371600" cy="338328"/>
+          </a:xfrm>
+          <a:prstGeom prst="rect">
+            <a:avLst/>
+          </a:prstGeom>
+          <a:noFill/>
+        </p:spPr>
+        <p:txBody>
+          <a:bodyPr wrap="square" lIns="0" rIns="0" tIns="0" bIns="0" anchor="t">
+            <a:spAutoFit/>
+          </a:bodyPr>
+          <a:lstStyle/>
+          <a:p>
+            <a:pPr algn="l">
+              <a:lnSpc>
+                <a:spcPct val="115000"/>
+              </a:lnSpc>
+            </a:pPr>
+            <a:r>
+              <a:rPr sz="1150" b="1">
                 <a:solidFill>
                   <a:srgbClr val="36D399"/>
                 </a:solidFill>
@@ -6328,271 +6877,25 @@
                 <a:ea typeface="맑은 고딕"/>
                 <a:cs typeface="맑은 고딕"/>
               </a:rPr>
-              <a:t>−50%</a:t>
-            </a:r>
-          </a:p>
-        </p:txBody>
-      </p:sp>
-      <p:sp>
-        <p:nvSpPr>
-          <p:cNvPr id="42" name="TextBox 41"/>
-          <p:cNvSpPr txBox="1"/>
-          <p:nvPr/>
-        </p:nvSpPr>
-        <p:spPr>
-          <a:xfrm>
-            <a:off x="9912096" y="4288536"/>
-            <a:ext cx="1554480" cy="384048"/>
-          </a:xfrm>
-          <a:prstGeom prst="rect">
-            <a:avLst/>
-          </a:prstGeom>
-          <a:noFill/>
-        </p:spPr>
-        <p:txBody>
-          <a:bodyPr wrap="square" lIns="0" rIns="0" tIns="0" bIns="0" anchor="t">
-            <a:spAutoFit/>
-          </a:bodyPr>
-          <a:lstStyle/>
-          <a:p>
-            <a:pPr algn="l">
-              <a:lnSpc>
-                <a:spcPct val="115000"/>
-              </a:lnSpc>
-            </a:pPr>
-            <a:r>
-              <a:rPr sz="1250" b="0">
-                <a:solidFill>
-                  <a:srgbClr val="ECF1F6"/>
-                </a:solidFill>
-                <a:latin typeface="맑은 고딕"/>
-                <a:ea typeface="맑은 고딕"/>
-                <a:cs typeface="맑은 고딕"/>
-              </a:rPr>
-              <a:t>expired</a:t>
-            </a:r>
-          </a:p>
-        </p:txBody>
-      </p:sp>
-      <p:sp>
-        <p:nvSpPr>
-          <p:cNvPr id="43" name="TextBox 42"/>
-          <p:cNvSpPr txBox="1"/>
-          <p:nvPr/>
-        </p:nvSpPr>
-        <p:spPr>
-          <a:xfrm>
-            <a:off x="813816" y="4672583"/>
-            <a:ext cx="868680" cy="384048"/>
-          </a:xfrm>
-          <a:prstGeom prst="rect">
-            <a:avLst/>
-          </a:prstGeom>
-          <a:noFill/>
-        </p:spPr>
-        <p:txBody>
-          <a:bodyPr wrap="square" lIns="0" rIns="0" tIns="0" bIns="0" anchor="t">
-            <a:spAutoFit/>
-          </a:bodyPr>
-          <a:lstStyle/>
-          <a:p>
-            <a:pPr algn="l">
-              <a:lnSpc>
-                <a:spcPct val="115000"/>
-              </a:lnSpc>
-            </a:pPr>
-            <a:r>
-              <a:rPr sz="1250" b="0">
-                <a:solidFill>
-                  <a:srgbClr val="ECF1F6"/>
-                </a:solidFill>
-                <a:latin typeface="맑은 고딕"/>
-                <a:ea typeface="맑은 고딕"/>
-                <a:cs typeface="맑은 고딕"/>
-              </a:rPr>
-              <a:t>보류</a:t>
-            </a:r>
-          </a:p>
-        </p:txBody>
-      </p:sp>
-      <p:sp>
-        <p:nvSpPr>
-          <p:cNvPr id="44" name="TextBox 43"/>
-          <p:cNvSpPr txBox="1"/>
-          <p:nvPr/>
-        </p:nvSpPr>
-        <p:spPr>
-          <a:xfrm>
-            <a:off x="1865376" y="4672583"/>
-            <a:ext cx="2194560" cy="384048"/>
-          </a:xfrm>
-          <a:prstGeom prst="rect">
-            <a:avLst/>
-          </a:prstGeom>
-          <a:noFill/>
-        </p:spPr>
-        <p:txBody>
-          <a:bodyPr wrap="square" lIns="0" rIns="0" tIns="0" bIns="0" anchor="t">
-            <a:spAutoFit/>
-          </a:bodyPr>
-          <a:lstStyle/>
-          <a:p>
-            <a:pPr algn="l">
-              <a:lnSpc>
-                <a:spcPct val="115000"/>
-              </a:lnSpc>
-            </a:pPr>
-            <a:r>
-              <a:rPr sz="1250" b="0">
-                <a:solidFill>
-                  <a:srgbClr val="ECF1F6"/>
-                </a:solidFill>
-                <a:latin typeface="맑은 고딕"/>
-                <a:ea typeface="맑은 고딕"/>
-                <a:cs typeface="맑은 고딕"/>
-              </a:rPr>
-              <a:t>웹 세션 자동 조작</a:t>
-            </a:r>
-          </a:p>
-        </p:txBody>
-      </p:sp>
-      <p:sp>
-        <p:nvSpPr>
-          <p:cNvPr id="45" name="TextBox 44"/>
-          <p:cNvSpPr txBox="1"/>
-          <p:nvPr/>
-        </p:nvSpPr>
-        <p:spPr>
-          <a:xfrm>
-            <a:off x="4242816" y="4672583"/>
-            <a:ext cx="3017520" cy="384048"/>
-          </a:xfrm>
-          <a:prstGeom prst="rect">
-            <a:avLst/>
-          </a:prstGeom>
-          <a:noFill/>
-        </p:spPr>
-        <p:txBody>
-          <a:bodyPr wrap="square" lIns="0" rIns="0" tIns="0" bIns="0" anchor="t">
-            <a:spAutoFit/>
-          </a:bodyPr>
-          <a:lstStyle/>
-          <a:p>
-            <a:pPr algn="l">
-              <a:lnSpc>
-                <a:spcPct val="115000"/>
-              </a:lnSpc>
-            </a:pPr>
-            <a:r>
-              <a:rPr sz="1250" b="0">
-                <a:solidFill>
-                  <a:srgbClr val="ECF1F6"/>
-                </a:solidFill>
-                <a:latin typeface="맑은 고딕"/>
-                <a:ea typeface="맑은 고딕"/>
-                <a:cs typeface="맑은 고딕"/>
-              </a:rPr>
-              <a:t>법무 확인 전까지 수동</a:t>
-            </a:r>
-          </a:p>
-        </p:txBody>
-      </p:sp>
-      <p:sp>
-        <p:nvSpPr>
-          <p:cNvPr id="46" name="TextBox 45"/>
-          <p:cNvSpPr txBox="1"/>
-          <p:nvPr/>
-        </p:nvSpPr>
-        <p:spPr>
-          <a:xfrm>
-            <a:off x="7443216" y="4672583"/>
-            <a:ext cx="2286000" cy="384048"/>
-          </a:xfrm>
-          <a:prstGeom prst="rect">
-            <a:avLst/>
-          </a:prstGeom>
-          <a:noFill/>
-        </p:spPr>
-        <p:txBody>
-          <a:bodyPr wrap="square" lIns="0" rIns="0" tIns="0" bIns="0" anchor="t">
-            <a:spAutoFit/>
-          </a:bodyPr>
-          <a:lstStyle/>
-          <a:p>
-            <a:pPr algn="l">
-              <a:lnSpc>
-                <a:spcPct val="115000"/>
-              </a:lnSpc>
-            </a:pPr>
-            <a:r>
-              <a:rPr sz="1250" b="1">
-                <a:solidFill>
-                  <a:srgbClr val="FFB04D"/>
-                </a:solidFill>
-                <a:latin typeface="맑은 고딕"/>
-                <a:ea typeface="맑은 고딕"/>
-                <a:cs typeface="맑은 고딕"/>
-              </a:rPr>
-              <a:t>종량 0원</a:t>
-            </a:r>
-          </a:p>
-        </p:txBody>
-      </p:sp>
-      <p:sp>
-        <p:nvSpPr>
-          <p:cNvPr id="47" name="TextBox 46"/>
-          <p:cNvSpPr txBox="1"/>
-          <p:nvPr/>
-        </p:nvSpPr>
-        <p:spPr>
-          <a:xfrm>
-            <a:off x="9912096" y="4672583"/>
-            <a:ext cx="1554480" cy="384048"/>
-          </a:xfrm>
-          <a:prstGeom prst="rect">
-            <a:avLst/>
-          </a:prstGeom>
-          <a:noFill/>
-        </p:spPr>
-        <p:txBody>
-          <a:bodyPr wrap="square" lIns="0" rIns="0" tIns="0" bIns="0" anchor="t">
-            <a:spAutoFit/>
-          </a:bodyPr>
-          <a:lstStyle/>
-          <a:p>
-            <a:pPr algn="l">
-              <a:lnSpc>
-                <a:spcPct val="115000"/>
-              </a:lnSpc>
-            </a:pPr>
-            <a:r>
-              <a:rPr sz="1250" b="0">
-                <a:solidFill>
-                  <a:srgbClr val="ECF1F6"/>
-                </a:solidFill>
-                <a:latin typeface="맑은 고딕"/>
-                <a:ea typeface="맑은 고딕"/>
-                <a:cs typeface="맑은 고딕"/>
-              </a:rPr>
-              <a:t>약관</a:t>
-            </a:r>
-          </a:p>
-        </p:txBody>
-      </p:sp>
-      <p:sp>
-        <p:nvSpPr>
-          <p:cNvPr id="48" name="Rounded Rectangle 47"/>
+              <a:t>0.16배</a:t>
+            </a:r>
+          </a:p>
+        </p:txBody>
+      </p:sp>
+      <p:sp>
+        <p:nvSpPr>
+          <p:cNvPr id="41" name="Rounded Rectangle 40"/>
           <p:cNvSpPr/>
           <p:nvPr/>
         </p:nvSpPr>
         <p:spPr>
           <a:xfrm>
-            <a:off x="685800" y="5212080"/>
-            <a:ext cx="10835640" cy="868680"/>
+            <a:off x="7818120" y="2240280"/>
+            <a:ext cx="3703320" cy="1325880"/>
           </a:xfrm>
           <a:prstGeom prst="roundRect">
             <a:avLst>
-              <a:gd name="adj" fmla="val 5000"/>
+              <a:gd name="adj" fmla="val 6000"/>
             </a:avLst>
           </a:prstGeom>
           <a:solidFill>
@@ -6627,14 +6930,210 @@
       </p:sp>
       <p:sp>
         <p:nvSpPr>
-          <p:cNvPr id="49" name="Rectangle 48"/>
+          <p:cNvPr id="42" name="Rectangle 41"/>
           <p:cNvSpPr/>
           <p:nvPr/>
         </p:nvSpPr>
         <p:spPr>
           <a:xfrm>
-            <a:off x="685800" y="5212080"/>
-            <a:ext cx="50292" cy="868680"/>
+            <a:off x="7818120" y="2240280"/>
+            <a:ext cx="50292" cy="1325880"/>
+          </a:xfrm>
+          <a:prstGeom prst="rect">
+            <a:avLst/>
+          </a:prstGeom>
+          <a:solidFill>
+            <a:srgbClr val="FF6B6B"/>
+          </a:solidFill>
+          <a:ln>
+            <a:noFill/>
+          </a:ln>
+          <a:effectLst/>
+        </p:spPr>
+        <p:style>
+          <a:lnRef idx="1">
+            <a:schemeClr val="accent1"/>
+          </a:lnRef>
+          <a:fillRef idx="3">
+            <a:schemeClr val="accent1"/>
+          </a:fillRef>
+          <a:effectRef idx="2">
+            <a:schemeClr val="accent1"/>
+          </a:effectRef>
+          <a:fontRef idx="minor">
+            <a:schemeClr val="lt1"/>
+          </a:fontRef>
+        </p:style>
+        <p:txBody>
+          <a:bodyPr rtlCol="0" anchor="ctr"/>
+          <a:lstStyle/>
+          <a:p>
+            <a:pPr algn="ctr"/>
+          </a:p>
+        </p:txBody>
+      </p:sp>
+      <p:sp>
+        <p:nvSpPr>
+          <p:cNvPr id="43" name="TextBox 42"/>
+          <p:cNvSpPr txBox="1"/>
+          <p:nvPr/>
+        </p:nvSpPr>
+        <p:spPr>
+          <a:xfrm>
+            <a:off x="8129016" y="2478024"/>
+            <a:ext cx="3154679" cy="365760"/>
+          </a:xfrm>
+          <a:prstGeom prst="rect">
+            <a:avLst/>
+          </a:prstGeom>
+          <a:noFill/>
+        </p:spPr>
+        <p:txBody>
+          <a:bodyPr wrap="square" lIns="0" rIns="0" tIns="0" bIns="0" anchor="t">
+            <a:spAutoFit/>
+          </a:bodyPr>
+          <a:lstStyle/>
+          <a:p>
+            <a:pPr algn="l">
+              <a:lnSpc>
+                <a:spcPct val="115000"/>
+              </a:lnSpc>
+            </a:pPr>
+            <a:r>
+              <a:rPr sz="1900" b="1">
+                <a:solidFill>
+                  <a:srgbClr val="ECF1F6"/>
+                </a:solidFill>
+                <a:latin typeface="맑은 고딕"/>
+                <a:ea typeface="맑은 고딕"/>
+                <a:cs typeface="맑은 고딕"/>
+              </a:rPr>
+              <a:t>① 최악은 2.6배</a:t>
+            </a:r>
+          </a:p>
+        </p:txBody>
+      </p:sp>
+      <p:sp>
+        <p:nvSpPr>
+          <p:cNvPr id="44" name="TextBox 43"/>
+          <p:cNvSpPr txBox="1"/>
+          <p:nvPr/>
+        </p:nvSpPr>
+        <p:spPr>
+          <a:xfrm>
+            <a:off x="8129016" y="3017520"/>
+            <a:ext cx="3154679" cy="411479"/>
+          </a:xfrm>
+          <a:prstGeom prst="rect">
+            <a:avLst/>
+          </a:prstGeom>
+          <a:noFill/>
+        </p:spPr>
+        <p:txBody>
+          <a:bodyPr wrap="square" lIns="0" rIns="0" tIns="0" bIns="0" anchor="t">
+            <a:spAutoFit/>
+          </a:bodyPr>
+          <a:lstStyle/>
+          <a:p>
+            <a:pPr algn="l">
+              <a:lnSpc>
+                <a:spcPct val="135000"/>
+              </a:lnSpc>
+              <a:spcBef>
+                <a:spcPts val="0"/>
+              </a:spcBef>
+            </a:pPr>
+            <a:r>
+              <a:rPr sz="1400" b="0">
+                <a:solidFill>
+                  <a:srgbClr val="93A4B5"/>
+                </a:solidFill>
+                <a:latin typeface="맑은 고딕"/>
+                <a:ea typeface="맑은 고딕"/>
+                <a:cs typeface="맑은 고딕"/>
+              </a:rPr>
+              <a:t>실패 2회 구간이 가장 불리.</a:t>
+            </a:r>
+          </a:p>
+          <a:p>
+            <a:pPr algn="l">
+              <a:lnSpc>
+                <a:spcPct val="135000"/>
+              </a:lnSpc>
+              <a:spcBef>
+                <a:spcPts val="600"/>
+              </a:spcBef>
+            </a:pPr>
+            <a:r>
+              <a:rPr sz="1400" b="0">
+                <a:solidFill>
+                  <a:srgbClr val="93A4B5"/>
+                </a:solidFill>
+                <a:latin typeface="맑은 고딕"/>
+                <a:ea typeface="맑은 고딕"/>
+                <a:cs typeface="맑은 고딕"/>
+              </a:rPr>
+              <a:t>절대값 $0.08 → $0.21 (13센트).</a:t>
+            </a:r>
+          </a:p>
+        </p:txBody>
+      </p:sp>
+      <p:sp>
+        <p:nvSpPr>
+          <p:cNvPr id="45" name="Rounded Rectangle 44"/>
+          <p:cNvSpPr/>
+          <p:nvPr/>
+        </p:nvSpPr>
+        <p:spPr>
+          <a:xfrm>
+            <a:off x="7818120" y="3675887"/>
+            <a:ext cx="3703320" cy="1737360"/>
+          </a:xfrm>
+          <a:prstGeom prst="roundRect">
+            <a:avLst>
+              <a:gd name="adj" fmla="val 6000"/>
+            </a:avLst>
+          </a:prstGeom>
+          <a:solidFill>
+            <a:srgbClr val="18222E"/>
+          </a:solidFill>
+          <a:ln>
+            <a:noFill/>
+          </a:ln>
+          <a:effectLst/>
+        </p:spPr>
+        <p:style>
+          <a:lnRef idx="1">
+            <a:schemeClr val="accent1"/>
+          </a:lnRef>
+          <a:fillRef idx="3">
+            <a:schemeClr val="accent1"/>
+          </a:fillRef>
+          <a:effectRef idx="2">
+            <a:schemeClr val="accent1"/>
+          </a:effectRef>
+          <a:fontRef idx="minor">
+            <a:schemeClr val="lt1"/>
+          </a:fontRef>
+        </p:style>
+        <p:txBody>
+          <a:bodyPr rtlCol="0" anchor="ctr"/>
+          <a:lstStyle/>
+          <a:p>
+            <a:pPr algn="ctr"/>
+          </a:p>
+        </p:txBody>
+      </p:sp>
+      <p:sp>
+        <p:nvSpPr>
+          <p:cNvPr id="46" name="Rectangle 45"/>
+          <p:cNvSpPr/>
+          <p:nvPr/>
+        </p:nvSpPr>
+        <p:spPr>
+          <a:xfrm>
+            <a:off x="7818120" y="3675887"/>
+            <a:ext cx="50292" cy="1737360"/>
           </a:xfrm>
           <a:prstGeom prst="rect">
             <a:avLst/>
@@ -6671,33 +7170,292 @@
       </p:sp>
       <p:sp>
         <p:nvSpPr>
-          <p:cNvPr id="50" name="TextBox 49"/>
-          <p:cNvSpPr txBox="1"/>
-          <p:nvPr/>
-        </p:nvSpPr>
-        <p:spPr>
-          <a:xfrm>
-            <a:off x="960120" y="5358384"/>
-            <a:ext cx="10424160" cy="640080"/>
-          </a:xfrm>
-          <a:prstGeom prst="rect">
-            <a:avLst/>
-          </a:prstGeom>
-          <a:noFill/>
-        </p:spPr>
-        <p:txBody>
-          <a:bodyPr wrap="square" lIns="0" rIns="0" tIns="0" bIns="0" anchor="t">
-            <a:spAutoFit/>
-          </a:bodyPr>
-          <a:lstStyle/>
-          <a:p>
-            <a:pPr algn="l">
-              <a:lnSpc>
-                <a:spcPct val="115000"/>
-              </a:lnSpc>
-            </a:pPr>
-            <a:r>
-              <a:rPr sz="1500" b="1">
+          <p:cNvPr id="47" name="TextBox 46"/>
+          <p:cNvSpPr txBox="1"/>
+          <p:nvPr/>
+        </p:nvSpPr>
+        <p:spPr>
+          <a:xfrm>
+            <a:off x="8129016" y="3913631"/>
+            <a:ext cx="3154679" cy="365760"/>
+          </a:xfrm>
+          <a:prstGeom prst="rect">
+            <a:avLst/>
+          </a:prstGeom>
+          <a:noFill/>
+        </p:spPr>
+        <p:txBody>
+          <a:bodyPr wrap="square" lIns="0" rIns="0" tIns="0" bIns="0" anchor="t">
+            <a:spAutoFit/>
+          </a:bodyPr>
+          <a:lstStyle/>
+          <a:p>
+            <a:pPr algn="l">
+              <a:lnSpc>
+                <a:spcPct val="115000"/>
+              </a:lnSpc>
+            </a:pPr>
+            <a:r>
+              <a:rPr sz="1900" b="1">
+                <a:solidFill>
+                  <a:srgbClr val="ECF1F6"/>
+                </a:solidFill>
+                <a:latin typeface="맑은 고딕"/>
+                <a:ea typeface="맑은 고딕"/>
+                <a:cs typeface="맑은 고딕"/>
+              </a:rPr>
+              <a:t>② 상한이 걸린다</a:t>
+            </a:r>
+          </a:p>
+        </p:txBody>
+      </p:sp>
+      <p:sp>
+        <p:nvSpPr>
+          <p:cNvPr id="48" name="TextBox 47"/>
+          <p:cNvSpPr txBox="1"/>
+          <p:nvPr/>
+        </p:nvSpPr>
+        <p:spPr>
+          <a:xfrm>
+            <a:off x="8129016" y="4453127"/>
+            <a:ext cx="3154679" cy="822959"/>
+          </a:xfrm>
+          <a:prstGeom prst="rect">
+            <a:avLst/>
+          </a:prstGeom>
+          <a:noFill/>
+        </p:spPr>
+        <p:txBody>
+          <a:bodyPr wrap="square" lIns="0" rIns="0" tIns="0" bIns="0" anchor="t">
+            <a:spAutoFit/>
+          </a:bodyPr>
+          <a:lstStyle/>
+          <a:p>
+            <a:pPr algn="l">
+              <a:lnSpc>
+                <a:spcPct val="135000"/>
+              </a:lnSpc>
+              <a:spcBef>
+                <a:spcPts val="0"/>
+              </a:spcBef>
+            </a:pPr>
+            <a:r>
+              <a:rPr sz="1400" b="0">
+                <a:solidFill>
+                  <a:srgbClr val="93A4B5"/>
+                </a:solidFill>
+                <a:latin typeface="맑은 고딕"/>
+                <a:ea typeface="맑은 고딕"/>
+                <a:cs typeface="맑은 고딕"/>
+              </a:rPr>
+              <a:t>4회차에 구현을 멈춘다.</a:t>
+            </a:r>
+          </a:p>
+          <a:p>
+            <a:pPr algn="l">
+              <a:lnSpc>
+                <a:spcPct val="135000"/>
+              </a:lnSpc>
+              <a:spcBef>
+                <a:spcPts val="600"/>
+              </a:spcBef>
+            </a:pPr>
+            <a:r>
+              <a:rPr sz="1400" b="0">
+                <a:solidFill>
+                  <a:srgbClr val="93A4B5"/>
+                </a:solidFill>
+                <a:latin typeface="맑은 고딕"/>
+                <a:ea typeface="맑은 고딕"/>
+                <a:cs typeface="맑은 고딕"/>
+              </a:rPr>
+              <a:t>$0.2132에서 정지.</a:t>
+            </a:r>
+          </a:p>
+          <a:p>
+            <a:pPr algn="l">
+              <a:lnSpc>
+                <a:spcPct val="135000"/>
+              </a:lnSpc>
+              <a:spcBef>
+                <a:spcPts val="600"/>
+              </a:spcBef>
+            </a:pPr>
+            <a:r>
+              <a:rPr sz="1400" b="0">
+                <a:solidFill>
+                  <a:srgbClr val="93A4B5"/>
+                </a:solidFill>
+                <a:latin typeface="맑은 고딕"/>
+                <a:ea typeface="맑은 고딕"/>
+                <a:cs typeface="맑은 고딕"/>
+              </a:rPr>
+              <a:t>제자리는 선형으로 계속 오른다.</a:t>
+            </a:r>
+          </a:p>
+        </p:txBody>
+      </p:sp>
+      <p:sp>
+        <p:nvSpPr>
+          <p:cNvPr id="49" name="Rounded Rectangle 48"/>
+          <p:cNvSpPr/>
+          <p:nvPr/>
+        </p:nvSpPr>
+        <p:spPr>
+          <a:xfrm>
+            <a:off x="685800" y="4736592"/>
+            <a:ext cx="6858000" cy="1371600"/>
+          </a:xfrm>
+          <a:prstGeom prst="roundRect">
+            <a:avLst>
+              <a:gd name="adj" fmla="val 6000"/>
+            </a:avLst>
+          </a:prstGeom>
+          <a:solidFill>
+            <a:srgbClr val="18222E"/>
+          </a:solidFill>
+          <a:ln>
+            <a:noFill/>
+          </a:ln>
+          <a:effectLst/>
+        </p:spPr>
+        <p:style>
+          <a:lnRef idx="1">
+            <a:schemeClr val="accent1"/>
+          </a:lnRef>
+          <a:fillRef idx="3">
+            <a:schemeClr val="accent1"/>
+          </a:fillRef>
+          <a:effectRef idx="2">
+            <a:schemeClr val="accent1"/>
+          </a:effectRef>
+          <a:fontRef idx="minor">
+            <a:schemeClr val="lt1"/>
+          </a:fontRef>
+        </p:style>
+        <p:txBody>
+          <a:bodyPr rtlCol="0" anchor="ctr"/>
+          <a:lstStyle/>
+          <a:p>
+            <a:pPr algn="ctr"/>
+          </a:p>
+        </p:txBody>
+      </p:sp>
+      <p:sp>
+        <p:nvSpPr>
+          <p:cNvPr id="50" name="Rectangle 49"/>
+          <p:cNvSpPr/>
+          <p:nvPr/>
+        </p:nvSpPr>
+        <p:spPr>
+          <a:xfrm>
+            <a:off x="685800" y="4736592"/>
+            <a:ext cx="50292" cy="1371600"/>
+          </a:xfrm>
+          <a:prstGeom prst="rect">
+            <a:avLst/>
+          </a:prstGeom>
+          <a:solidFill>
+            <a:srgbClr val="5A9CFF"/>
+          </a:solidFill>
+          <a:ln>
+            <a:noFill/>
+          </a:ln>
+          <a:effectLst/>
+        </p:spPr>
+        <p:style>
+          <a:lnRef idx="1">
+            <a:schemeClr val="accent1"/>
+          </a:lnRef>
+          <a:fillRef idx="3">
+            <a:schemeClr val="accent1"/>
+          </a:fillRef>
+          <a:effectRef idx="2">
+            <a:schemeClr val="accent1"/>
+          </a:effectRef>
+          <a:fontRef idx="minor">
+            <a:schemeClr val="lt1"/>
+          </a:fontRef>
+        </p:style>
+        <p:txBody>
+          <a:bodyPr rtlCol="0" anchor="ctr"/>
+          <a:lstStyle/>
+          <a:p>
+            <a:pPr algn="ctr"/>
+          </a:p>
+        </p:txBody>
+      </p:sp>
+      <p:sp>
+        <p:nvSpPr>
+          <p:cNvPr id="51" name="TextBox 50"/>
+          <p:cNvSpPr txBox="1"/>
+          <p:nvPr/>
+        </p:nvSpPr>
+        <p:spPr>
+          <a:xfrm>
+            <a:off x="960120" y="4855464"/>
+            <a:ext cx="6492240" cy="1207008"/>
+          </a:xfrm>
+          <a:prstGeom prst="rect">
+            <a:avLst/>
+          </a:prstGeom>
+          <a:noFill/>
+        </p:spPr>
+        <p:txBody>
+          <a:bodyPr wrap="square" lIns="0" rIns="0" tIns="0" bIns="0" anchor="t">
+            <a:spAutoFit/>
+          </a:bodyPr>
+          <a:lstStyle/>
+          <a:p>
+            <a:pPr algn="l">
+              <a:lnSpc>
+                <a:spcPct val="115000"/>
+              </a:lnSpc>
+            </a:pPr>
+            <a:r>
+              <a:rPr sz="1300" b="1">
+                <a:solidFill>
+                  <a:srgbClr val="5A9CFF"/>
+                </a:solidFill>
+                <a:latin typeface="맑은 고딕"/>
+                <a:ea typeface="맑은 고딕"/>
+                <a:cs typeface="맑은 고딕"/>
+              </a:rPr>
+              <a:t>③ 진짜 비용은 미해결 잔여다 (난제 시나리오, 4턴 소진 후)</a:t>
+            </a:r>
+          </a:p>
+          <a:p>
+            <a:pPr algn="l">
+              <a:lnSpc>
+                <a:spcPct val="115000"/>
+              </a:lnSpc>
+              <a:spcBef>
+                <a:spcPts val="400"/>
+              </a:spcBef>
+            </a:pPr>
+            <a:r>
+              <a:rPr sz="1200" b="0">
+                <a:solidFill>
+                  <a:srgbClr val="93A4B5"/>
+                </a:solidFill>
+                <a:latin typeface="맑은 고딕"/>
+                <a:ea typeface="맑은 고딕"/>
+                <a:cs typeface="맑은 고딕"/>
+              </a:rPr>
+              <a:t>제자리 재시도  기대 $0.0804  —  41.0% 확률로 여전히 미해결</a:t>
+            </a:r>
+          </a:p>
+          <a:p>
+            <a:pPr algn="l">
+              <a:lnSpc>
+                <a:spcPct val="115000"/>
+              </a:lnSpc>
+              <a:spcBef>
+                <a:spcPts val="200"/>
+              </a:spcBef>
+            </a:pPr>
+            <a:r>
+              <a:rPr sz="1200" b="0">
                 <a:solidFill>
                   <a:srgbClr val="36D399"/>
                 </a:solidFill>
@@ -6705,7 +7463,7 @@
                 <a:ea typeface="맑은 고딕"/>
                 <a:cs typeface="맑은 고딕"/>
               </a:rPr>
-              <a:t>측정 없이 켜지 마라.</a:t>
+              <a:t>에스컬레이션   기대 $0.1335  —   1.4% 미해결, 스펙 문서가 남음</a:t>
             </a:r>
           </a:p>
           <a:p>
@@ -6714,26 +7472,26 @@
                 <a:spcPct val="115000"/>
               </a:lnSpc>
               <a:spcBef>
-                <a:spcPts val="500"/>
+                <a:spcPts val="400"/>
               </a:spcBef>
             </a:pPr>
             <a:r>
-              <a:rPr sz="1300" b="0">
-                <a:solidFill>
-                  <a:srgbClr val="93A4B5"/>
-                </a:solidFill>
-                <a:latin typeface="맑은 고딕"/>
-                <a:ea typeface="맑은 고딕"/>
-                <a:cs typeface="맑은 고딕"/>
-              </a:rPr>
-              <a:t>1주차에 로그만 남기는 이유가 이것이다. 라우팅 전후의 요청당 비용과 리워크 턴 수를 같이 재야, 절감이 진짜인지 품질을 팔아 산 것인지 구분된다.</a:t>
-            </a:r>
-          </a:p>
-        </p:txBody>
-      </p:sp>
-      <p:sp>
-        <p:nvSpPr>
-          <p:cNvPr id="51" name="TextBox 50"/>
+              <a:rPr sz="1200" b="0">
+                <a:solidFill>
+                  <a:srgbClr val="FFB04D"/>
+                </a:solidFill>
+                <a:latin typeface="맑은 고딕"/>
+                <a:ea typeface="맑은 고딕"/>
+                <a:cs typeface="맑은 고딕"/>
+              </a:rPr>
+              <a:t>개발자 1시간 $50 기준 41% × 1h = $20.5 기대손실. 토큰 5센트를 아끼려다 $20를 태운다.</a:t>
+            </a:r>
+          </a:p>
+        </p:txBody>
+      </p:sp>
+      <p:sp>
+        <p:nvSpPr>
+          <p:cNvPr id="52" name="TextBox 51"/>
           <p:cNvSpPr txBox="1"/>
           <p:nvPr/>
         </p:nvSpPr>
@@ -6767,7 +7525,7 @@
                 <a:ea typeface="맑은 고딕"/>
                 <a:cs typeface="맑은 고딕"/>
               </a:rPr>
-              <a:t>되돌릴 수 있게 만들어라 — route()가 항상 상위 모델을 반환하도록 하는 킬 스위치 하나면 롤백이 끝난다.</a:t>
+              <a:t>결론 — 에스컬레이션은 평균 비용을 낮추는 장치가 아니라 꼬리 위험을 자르는 장치다. 절감은 라우팅이, 사고 방지는 이쪽이 한다.</a:t>
             </a:r>
           </a:p>
         </p:txBody>
@@ -6914,7 +7672,7 @@
                 <a:ea typeface="맑은 고딕"/>
                 <a:cs typeface="맑은 고딕"/>
               </a:rPr>
-              <a:t>FOLLOW-UP · 마무리</a:t>
+              <a:t>FOLLOW-UP · 시연</a:t>
             </a:r>
           </a:p>
         </p:txBody>
@@ -6955,7 +7713,7 @@
                 <a:ea typeface="맑은 고딕"/>
                 <a:cs typeface="맑은 고딕"/>
               </a:rPr>
-              <a:t>정리</a:t>
+              <a:t>라이브 — 지금 돌려봅니다</a:t>
             </a:r>
           </a:p>
         </p:txBody>
@@ -7047,14 +7805,101 @@
       </p:sp>
       <p:sp>
         <p:nvSpPr>
-          <p:cNvPr id="8" name="Rectangle 7"/>
+          <p:cNvPr id="8" name="TextBox 7"/>
+          <p:cNvSpPr txBox="1"/>
+          <p:nvPr/>
+        </p:nvSpPr>
+        <p:spPr>
+          <a:xfrm>
+            <a:off x="685800" y="1737360"/>
+            <a:ext cx="10881360" cy="365760"/>
+          </a:xfrm>
+          <a:prstGeom prst="rect">
+            <a:avLst/>
+          </a:prstGeom>
+          <a:noFill/>
+        </p:spPr>
+        <p:txBody>
+          <a:bodyPr wrap="square" lIns="0" rIns="0" tIns="0" bIns="0" anchor="t">
+            <a:spAutoFit/>
+          </a:bodyPr>
+          <a:lstStyle/>
+          <a:p>
+            <a:pPr algn="l">
+              <a:lnSpc>
+                <a:spcPct val="115000"/>
+              </a:lnSpc>
+            </a:pPr>
+            <a:r>
+              <a:rPr sz="1450" b="0">
+                <a:solidFill>
+                  <a:srgbClr val="93A4B5"/>
+                </a:solidFill>
+                <a:latin typeface="맑은 고딕"/>
+                <a:ea typeface="맑은 고딕"/>
+                <a:cs typeface="맑은 고딕"/>
+              </a:rPr>
+              <a:t>python3 agent_setup/test_router.py — 의존성 없음. 인터넷 없어도 돕니다.</a:t>
+            </a:r>
+          </a:p>
+        </p:txBody>
+      </p:sp>
+      <p:sp>
+        <p:nvSpPr>
+          <p:cNvPr id="9" name="Rounded Rectangle 8"/>
           <p:cNvSpPr/>
           <p:nvPr/>
         </p:nvSpPr>
         <p:spPr>
           <a:xfrm>
-            <a:off x="777240" y="2066543"/>
-            <a:ext cx="109728" cy="109728"/>
+            <a:off x="685800" y="2240280"/>
+            <a:ext cx="7086600" cy="3429000"/>
+          </a:xfrm>
+          <a:prstGeom prst="roundRect">
+            <a:avLst>
+              <a:gd name="adj" fmla="val 5000"/>
+            </a:avLst>
+          </a:prstGeom>
+          <a:solidFill>
+            <a:srgbClr val="111A24"/>
+          </a:solidFill>
+          <a:ln>
+            <a:noFill/>
+          </a:ln>
+          <a:effectLst/>
+        </p:spPr>
+        <p:style>
+          <a:lnRef idx="1">
+            <a:schemeClr val="accent1"/>
+          </a:lnRef>
+          <a:fillRef idx="3">
+            <a:schemeClr val="accent1"/>
+          </a:fillRef>
+          <a:effectRef idx="2">
+            <a:schemeClr val="accent1"/>
+          </a:effectRef>
+          <a:fontRef idx="minor">
+            <a:schemeClr val="lt1"/>
+          </a:fontRef>
+        </p:style>
+        <p:txBody>
+          <a:bodyPr rtlCol="0" anchor="ctr"/>
+          <a:lstStyle/>
+          <a:p>
+            <a:pPr algn="ctr"/>
+          </a:p>
+        </p:txBody>
+      </p:sp>
+      <p:sp>
+        <p:nvSpPr>
+          <p:cNvPr id="10" name="Rectangle 9"/>
+          <p:cNvSpPr/>
+          <p:nvPr/>
+        </p:nvSpPr>
+        <p:spPr>
+          <a:xfrm>
+            <a:off x="685800" y="2240280"/>
+            <a:ext cx="45720" cy="3429000"/>
           </a:xfrm>
           <a:prstGeom prst="rect">
             <a:avLst/>
@@ -7091,604 +7936,314 @@
       </p:sp>
       <p:sp>
         <p:nvSpPr>
-          <p:cNvPr id="9" name="TextBox 8"/>
-          <p:cNvSpPr txBox="1"/>
-          <p:nvPr/>
-        </p:nvSpPr>
-        <p:spPr>
-          <a:xfrm>
-            <a:off x="1069848" y="1965960"/>
-            <a:ext cx="10405872" cy="365760"/>
-          </a:xfrm>
-          <a:prstGeom prst="rect">
-            <a:avLst/>
-          </a:prstGeom>
-          <a:noFill/>
-        </p:spPr>
-        <p:txBody>
-          <a:bodyPr wrap="square" lIns="0" rIns="0" tIns="0" bIns="0" anchor="t">
-            <a:spAutoFit/>
-          </a:bodyPr>
-          <a:lstStyle/>
-          <a:p>
-            <a:pPr algn="l">
-              <a:lnSpc>
-                <a:spcPct val="115000"/>
-              </a:lnSpc>
-            </a:pPr>
-            <a:r>
-              <a:rPr sz="1650" b="1">
+          <p:cNvPr id="11" name="TextBox 10"/>
+          <p:cNvSpPr txBox="1"/>
+          <p:nvPr/>
+        </p:nvSpPr>
+        <p:spPr>
+          <a:xfrm>
+            <a:off x="932688" y="2432304"/>
+            <a:ext cx="6766560" cy="3108960"/>
+          </a:xfrm>
+          <a:prstGeom prst="rect">
+            <a:avLst/>
+          </a:prstGeom>
+          <a:noFill/>
+        </p:spPr>
+        <p:txBody>
+          <a:bodyPr wrap="square" lIns="0" rIns="0" tIns="0" bIns="0" anchor="t">
+            <a:spAutoFit/>
+          </a:bodyPr>
+          <a:lstStyle/>
+          <a:p>
+            <a:pPr algn="l">
+              <a:lnSpc>
+                <a:spcPct val="115000"/>
+              </a:lnSpc>
+              <a:spcBef>
+                <a:spcPts val="0"/>
+              </a:spcBef>
+            </a:pPr>
+            <a:r>
+              <a:rPr sz="1200" b="0">
+                <a:solidFill>
+                  <a:srgbClr val="5A9CFF"/>
+                </a:solidFill>
+                <a:latin typeface="Consolas"/>
+                <a:ea typeface="Consolas"/>
+                <a:cs typeface="Consolas"/>
+              </a:rPr>
+              <a:t>[1] 분류 정확도</a:t>
+            </a:r>
+          </a:p>
+          <a:p>
+            <a:pPr algn="l">
+              <a:lnSpc>
+                <a:spcPct val="115000"/>
+              </a:lnSpc>
+              <a:spcBef>
+                <a:spcPts val="200"/>
+              </a:spcBef>
+            </a:pPr>
+            <a:r>
+              <a:rPr sz="1200" b="0">
+                <a:solidFill>
+                  <a:srgbClr val="36D399"/>
+                </a:solidFill>
+                <a:latin typeface="Consolas"/>
+                <a:ea typeface="Consolas"/>
+                <a:cs typeface="Consolas"/>
+              </a:rPr>
+              <a:t>  PASS  결제 모듈 아키텍처 설계 트레이드오프 정리해줘  → reasoning</a:t>
+            </a:r>
+          </a:p>
+          <a:p>
+            <a:pPr algn="l">
+              <a:lnSpc>
+                <a:spcPct val="115000"/>
+              </a:lnSpc>
+              <a:spcBef>
+                <a:spcPts val="200"/>
+              </a:spcBef>
+            </a:pPr>
+            <a:r>
+              <a:rPr sz="1200" b="0">
+                <a:solidFill>
+                  <a:srgbClr val="36D399"/>
+                </a:solidFill>
+                <a:latin typeface="Consolas"/>
+                <a:ea typeface="Consolas"/>
+                <a:cs typeface="Consolas"/>
+              </a:rPr>
+              <a:t>  PASS  스펙대로 핸들러 구현해줘                    → implement</a:t>
+            </a:r>
+          </a:p>
+          <a:p>
+            <a:pPr algn="l">
+              <a:lnSpc>
+                <a:spcPct val="115000"/>
+              </a:lnSpc>
+              <a:spcBef>
+                <a:spcPts val="200"/>
+              </a:spcBef>
+            </a:pPr>
+            <a:r>
+              <a:rPr sz="1200" b="0">
+                <a:solidFill>
+                  <a:srgbClr val="36D399"/>
+                </a:solidFill>
+                <a:latin typeface="Consolas"/>
+                <a:ea typeface="Consolas"/>
+                <a:cs typeface="Consolas"/>
+              </a:rPr>
+              <a:t>  PASS  방금 짠 코드 설명해줘                       → explain</a:t>
+            </a:r>
+          </a:p>
+          <a:p>
+            <a:pPr algn="l">
+              <a:lnSpc>
+                <a:spcPct val="115000"/>
+              </a:lnSpc>
+              <a:spcBef>
+                <a:spcPts val="200"/>
+              </a:spcBef>
+            </a:pPr>
+            <a:r>
+              <a:rPr sz="1200" b="0">
+                <a:solidFill>
+                  <a:srgbClr val="36D399"/>
+                </a:solidFill>
+                <a:latin typeface="Consolas"/>
+                <a:ea typeface="Consolas"/>
+                <a:cs typeface="Consolas"/>
+              </a:rPr>
+              <a:t>  PASS  src 밑에서 TODO 전부 grep 해줘             → tool</a:t>
+            </a:r>
+          </a:p>
+          <a:p>
+            <a:pPr algn="l">
+              <a:lnSpc>
+                <a:spcPct val="115000"/>
+              </a:lnSpc>
+              <a:spcBef>
+                <a:spcPts val="200"/>
+              </a:spcBef>
+            </a:pPr>
+            <a:r>
+              <a:rPr sz="1200" b="0">
+                <a:solidFill>
+                  <a:srgbClr val="36D399"/>
+                </a:solidFill>
+                <a:latin typeface="Consolas"/>
+                <a:ea typeface="Consolas"/>
+                <a:cs typeface="Consolas"/>
+              </a:rPr>
+              <a:t>  PASS  경쟁사 40개 가격 페이지 조사해서 정규화해줘   → bulk</a:t>
+            </a:r>
+          </a:p>
+          <a:p>
+            <a:pPr algn="l">
+              <a:lnSpc>
+                <a:spcPct val="115000"/>
+              </a:lnSpc>
+              <a:spcBef>
+                <a:spcPts val="200"/>
+              </a:spcBef>
+            </a:pPr>
+            <a:r>
+              <a:rPr sz="1200" b="0">
                 <a:solidFill>
                   <a:srgbClr val="ECF1F6"/>
                 </a:solidFill>
-                <a:latin typeface="맑은 고딕"/>
-                <a:ea typeface="맑은 고딕"/>
-                <a:cs typeface="맑은 고딕"/>
-              </a:rPr>
-              <a:t>작은 모델은 답을 만드는 게 아니라 교통을 정리한다</a:t>
-            </a:r>
-          </a:p>
-        </p:txBody>
-      </p:sp>
-      <p:sp>
-        <p:nvSpPr>
-          <p:cNvPr id="10" name="TextBox 9"/>
-          <p:cNvSpPr txBox="1"/>
-          <p:nvPr/>
-        </p:nvSpPr>
-        <p:spPr>
-          <a:xfrm>
-            <a:off x="1069848" y="2240279"/>
-            <a:ext cx="10405872" cy="365760"/>
-          </a:xfrm>
-          <a:prstGeom prst="rect">
-            <a:avLst/>
-          </a:prstGeom>
-          <a:noFill/>
-        </p:spPr>
-        <p:txBody>
-          <a:bodyPr wrap="square" lIns="0" rIns="0" tIns="0" bIns="0" anchor="t">
-            <a:spAutoFit/>
-          </a:bodyPr>
-          <a:lstStyle/>
-          <a:p>
-            <a:pPr algn="l">
-              <a:lnSpc>
-                <a:spcPct val="115000"/>
-              </a:lnSpc>
-            </a:pPr>
-            <a:r>
-              <a:rPr sz="1350" b="0">
-                <a:solidFill>
-                  <a:srgbClr val="93A4B5"/>
-                </a:solidFill>
-                <a:latin typeface="맑은 고딕"/>
-                <a:ea typeface="맑은 고딕"/>
-                <a:cs typeface="맑은 고딕"/>
-              </a:rPr>
-              <a:t>분류에 드는 수십 토큰이 상위 모델 호출 하나를 막으면 즉시 회수된다.</a:t>
-            </a:r>
-          </a:p>
-        </p:txBody>
-      </p:sp>
-      <p:sp>
-        <p:nvSpPr>
-          <p:cNvPr id="11" name="Rectangle 10"/>
+                <a:latin typeface="Consolas"/>
+                <a:ea typeface="Consolas"/>
+                <a:cs typeface="Consolas"/>
+              </a:rPr>
+              <a:t> </a:t>
+            </a:r>
+          </a:p>
+          <a:p>
+            <a:pPr algn="l">
+              <a:lnSpc>
+                <a:spcPct val="115000"/>
+              </a:lnSpc>
+              <a:spcBef>
+                <a:spcPts val="200"/>
+              </a:spcBef>
+            </a:pPr>
+            <a:r>
+              <a:rPr sz="1200" b="0">
+                <a:solidFill>
+                  <a:srgbClr val="5A9CFF"/>
+                </a:solidFill>
+                <a:latin typeface="Consolas"/>
+                <a:ea typeface="Consolas"/>
+                <a:cs typeface="Consolas"/>
+              </a:rPr>
+              <a:t>[2] 라우팅 티어      [3] 설명 3줄 강제</a:t>
+            </a:r>
+          </a:p>
+          <a:p>
+            <a:pPr algn="l">
+              <a:lnSpc>
+                <a:spcPct val="115000"/>
+              </a:lnSpc>
+              <a:spcBef>
+                <a:spcPts val="200"/>
+              </a:spcBef>
+            </a:pPr>
+            <a:r>
+              <a:rPr sz="1200" b="0">
+                <a:solidFill>
+                  <a:srgbClr val="5A9CFF"/>
+                </a:solidFill>
+                <a:latin typeface="Consolas"/>
+                <a:ea typeface="Consolas"/>
+                <a:cs typeface="Consolas"/>
+              </a:rPr>
+              <a:t>[4] 세션 리셋 트리거  [5] 비용 산식</a:t>
+            </a:r>
+          </a:p>
+          <a:p>
+            <a:pPr algn="l">
+              <a:lnSpc>
+                <a:spcPct val="115000"/>
+              </a:lnSpc>
+              <a:spcBef>
+                <a:spcPts val="200"/>
+              </a:spcBef>
+            </a:pPr>
+            <a:r>
+              <a:rPr sz="1200" b="0">
+                <a:solidFill>
+                  <a:srgbClr val="ECF1F6"/>
+                </a:solidFill>
+                <a:latin typeface="Consolas"/>
+                <a:ea typeface="Consolas"/>
+                <a:cs typeface="Consolas"/>
+              </a:rPr>
+              <a:t> </a:t>
+            </a:r>
+          </a:p>
+          <a:p>
+            <a:pPr algn="l">
+              <a:lnSpc>
+                <a:spcPct val="115000"/>
+              </a:lnSpc>
+              <a:spcBef>
+                <a:spcPts val="200"/>
+              </a:spcBef>
+            </a:pPr>
+            <a:r>
+              <a:rPr sz="1200" b="0">
+                <a:solidFill>
+                  <a:srgbClr val="FFB04D"/>
+                </a:solidFill>
+                <a:latin typeface="Consolas"/>
+                <a:ea typeface="Consolas"/>
+                <a:cs typeface="Consolas"/>
+              </a:rPr>
+              <a:t>        기준선 $0.6500 → 라우팅 $0.0437  (93.3% 절감)</a:t>
+            </a:r>
+          </a:p>
+          <a:p>
+            <a:pPr algn="l">
+              <a:lnSpc>
+                <a:spcPct val="115000"/>
+              </a:lnSpc>
+              <a:spcBef>
+                <a:spcPts val="200"/>
+              </a:spcBef>
+            </a:pPr>
+            <a:r>
+              <a:rPr sz="1200" b="0">
+                <a:solidFill>
+                  <a:srgbClr val="ECF1F6"/>
+                </a:solidFill>
+                <a:latin typeface="Consolas"/>
+                <a:ea typeface="Consolas"/>
+                <a:cs typeface="Consolas"/>
+              </a:rPr>
+              <a:t> </a:t>
+            </a:r>
+          </a:p>
+          <a:p>
+            <a:pPr algn="l">
+              <a:lnSpc>
+                <a:spcPct val="115000"/>
+              </a:lnSpc>
+              <a:spcBef>
+                <a:spcPts val="200"/>
+              </a:spcBef>
+            </a:pPr>
+            <a:r>
+              <a:rPr sz="1200" b="0">
+                <a:solidFill>
+                  <a:srgbClr val="FFB04D"/>
+                </a:solidFill>
+                <a:latin typeface="Consolas"/>
+                <a:ea typeface="Consolas"/>
+                <a:cs typeface="Consolas"/>
+              </a:rPr>
+              <a:t>  32건 중 32 PASS / 0 FAIL</a:t>
+            </a:r>
+          </a:p>
+        </p:txBody>
+      </p:sp>
+      <p:sp>
+        <p:nvSpPr>
+          <p:cNvPr id="12" name="Rounded Rectangle 11"/>
           <p:cNvSpPr/>
           <p:nvPr/>
         </p:nvSpPr>
         <p:spPr>
           <a:xfrm>
-            <a:off x="777240" y="2724912"/>
-            <a:ext cx="109728" cy="109728"/>
-          </a:xfrm>
-          <a:prstGeom prst="rect">
-            <a:avLst/>
-          </a:prstGeom>
-          <a:solidFill>
-            <a:srgbClr val="36D399"/>
-          </a:solidFill>
-          <a:ln>
-            <a:noFill/>
-          </a:ln>
-          <a:effectLst/>
-        </p:spPr>
-        <p:style>
-          <a:lnRef idx="1">
-            <a:schemeClr val="accent1"/>
-          </a:lnRef>
-          <a:fillRef idx="3">
-            <a:schemeClr val="accent1"/>
-          </a:fillRef>
-          <a:effectRef idx="2">
-            <a:schemeClr val="accent1"/>
-          </a:effectRef>
-          <a:fontRef idx="minor">
-            <a:schemeClr val="lt1"/>
-          </a:fontRef>
-        </p:style>
-        <p:txBody>
-          <a:bodyPr rtlCol="0" anchor="ctr"/>
-          <a:lstStyle/>
-          <a:p>
-            <a:pPr algn="ctr"/>
-          </a:p>
-        </p:txBody>
-      </p:sp>
-      <p:sp>
-        <p:nvSpPr>
-          <p:cNvPr id="12" name="TextBox 11"/>
-          <p:cNvSpPr txBox="1"/>
-          <p:nvPr/>
-        </p:nvSpPr>
-        <p:spPr>
-          <a:xfrm>
-            <a:off x="1069848" y="2624328"/>
-            <a:ext cx="10405872" cy="365760"/>
-          </a:xfrm>
-          <a:prstGeom prst="rect">
-            <a:avLst/>
-          </a:prstGeom>
-          <a:noFill/>
-        </p:spPr>
-        <p:txBody>
-          <a:bodyPr wrap="square" lIns="0" rIns="0" tIns="0" bIns="0" anchor="t">
-            <a:spAutoFit/>
-          </a:bodyPr>
-          <a:lstStyle/>
-          <a:p>
-            <a:pPr algn="l">
-              <a:lnSpc>
-                <a:spcPct val="115000"/>
-              </a:lnSpc>
-            </a:pPr>
-            <a:r>
-              <a:rPr sz="1650" b="1">
-                <a:solidFill>
-                  <a:srgbClr val="ECF1F6"/>
-                </a:solidFill>
-                <a:latin typeface="맑은 고딕"/>
-                <a:ea typeface="맑은 고딕"/>
-                <a:cs typeface="맑은 고딕"/>
-              </a:rPr>
-              <a:t>당신이 만든 것은 워크플로우 컨트롤이다</a:t>
-            </a:r>
-          </a:p>
-        </p:txBody>
-      </p:sp>
-      <p:sp>
-        <p:nvSpPr>
-          <p:cNvPr id="13" name="TextBox 12"/>
-          <p:cNvSpPr txBox="1"/>
-          <p:nvPr/>
-        </p:nvSpPr>
-        <p:spPr>
-          <a:xfrm>
-            <a:off x="1069848" y="2898648"/>
-            <a:ext cx="10405872" cy="365760"/>
-          </a:xfrm>
-          <a:prstGeom prst="rect">
-            <a:avLst/>
-          </a:prstGeom>
-          <a:noFill/>
-        </p:spPr>
-        <p:txBody>
-          <a:bodyPr wrap="square" lIns="0" rIns="0" tIns="0" bIns="0" anchor="t">
-            <a:spAutoFit/>
-          </a:bodyPr>
-          <a:lstStyle/>
-          <a:p>
-            <a:pPr algn="l">
-              <a:lnSpc>
-                <a:spcPct val="115000"/>
-              </a:lnSpc>
-            </a:pPr>
-            <a:r>
-              <a:rPr sz="1350" b="0">
-                <a:solidFill>
-                  <a:srgbClr val="93A4B5"/>
-                </a:solidFill>
-                <a:latin typeface="맑은 고딕"/>
-                <a:ea typeface="맑은 고딕"/>
-                <a:cs typeface="맑은 고딕"/>
-              </a:rPr>
-              <a:t>라우팅은 그 안의 수단이고, 리워크는 그것이 줄이려는 대상이다.</a:t>
-            </a:r>
-          </a:p>
-        </p:txBody>
-      </p:sp>
-      <p:sp>
-        <p:nvSpPr>
-          <p:cNvPr id="14" name="Rectangle 13"/>
-          <p:cNvSpPr/>
-          <p:nvPr/>
-        </p:nvSpPr>
-        <p:spPr>
-          <a:xfrm>
-            <a:off x="777240" y="3383279"/>
-            <a:ext cx="109728" cy="109728"/>
-          </a:xfrm>
-          <a:prstGeom prst="rect">
-            <a:avLst/>
-          </a:prstGeom>
-          <a:solidFill>
-            <a:srgbClr val="36D399"/>
-          </a:solidFill>
-          <a:ln>
-            <a:noFill/>
-          </a:ln>
-          <a:effectLst/>
-        </p:spPr>
-        <p:style>
-          <a:lnRef idx="1">
-            <a:schemeClr val="accent1"/>
-          </a:lnRef>
-          <a:fillRef idx="3">
-            <a:schemeClr val="accent1"/>
-          </a:fillRef>
-          <a:effectRef idx="2">
-            <a:schemeClr val="accent1"/>
-          </a:effectRef>
-          <a:fontRef idx="minor">
-            <a:schemeClr val="lt1"/>
-          </a:fontRef>
-        </p:style>
-        <p:txBody>
-          <a:bodyPr rtlCol="0" anchor="ctr"/>
-          <a:lstStyle/>
-          <a:p>
-            <a:pPr algn="ctr"/>
-          </a:p>
-        </p:txBody>
-      </p:sp>
-      <p:sp>
-        <p:nvSpPr>
-          <p:cNvPr id="15" name="TextBox 14"/>
-          <p:cNvSpPr txBox="1"/>
-          <p:nvPr/>
-        </p:nvSpPr>
-        <p:spPr>
-          <a:xfrm>
-            <a:off x="1069848" y="3282696"/>
-            <a:ext cx="10405872" cy="365760"/>
-          </a:xfrm>
-          <a:prstGeom prst="rect">
-            <a:avLst/>
-          </a:prstGeom>
-          <a:noFill/>
-        </p:spPr>
-        <p:txBody>
-          <a:bodyPr wrap="square" lIns="0" rIns="0" tIns="0" bIns="0" anchor="t">
-            <a:spAutoFit/>
-          </a:bodyPr>
-          <a:lstStyle/>
-          <a:p>
-            <a:pPr algn="l">
-              <a:lnSpc>
-                <a:spcPct val="115000"/>
-              </a:lnSpc>
-            </a:pPr>
-            <a:r>
-              <a:rPr sz="1650" b="1">
-                <a:solidFill>
-                  <a:srgbClr val="ECF1F6"/>
-                </a:solidFill>
-                <a:latin typeface="맑은 고딕"/>
-                <a:ea typeface="맑은 고딕"/>
-                <a:cs typeface="맑은 고딕"/>
-              </a:rPr>
-              <a:t>"성능차 없음"이 아니라 "조건부 격차 축소"다</a:t>
-            </a:r>
-          </a:p>
-        </p:txBody>
-      </p:sp>
-      <p:sp>
-        <p:nvSpPr>
-          <p:cNvPr id="16" name="TextBox 15"/>
-          <p:cNvSpPr txBox="1"/>
-          <p:nvPr/>
-        </p:nvSpPr>
-        <p:spPr>
-          <a:xfrm>
-            <a:off x="1069848" y="3557015"/>
-            <a:ext cx="10405872" cy="365760"/>
-          </a:xfrm>
-          <a:prstGeom prst="rect">
-            <a:avLst/>
-          </a:prstGeom>
-          <a:noFill/>
-        </p:spPr>
-        <p:txBody>
-          <a:bodyPr wrap="square" lIns="0" rIns="0" tIns="0" bIns="0" anchor="t">
-            <a:spAutoFit/>
-          </a:bodyPr>
-          <a:lstStyle/>
-          <a:p>
-            <a:pPr algn="l">
-              <a:lnSpc>
-                <a:spcPct val="115000"/>
-              </a:lnSpc>
-            </a:pPr>
-            <a:r>
-              <a:rPr sz="1350" b="0">
-                <a:solidFill>
-                  <a:srgbClr val="93A4B5"/>
-                </a:solidFill>
-                <a:latin typeface="맑은 고딕"/>
-                <a:ea typeface="맑은 고딕"/>
-                <a:cs typeface="맑은 고딕"/>
-              </a:rPr>
-              <a:t>스펙 확정 · 검증 수단 · 임계 크기 — 셋이 모일 때만 중간 모델로 내려도 안전하다.</a:t>
-            </a:r>
-          </a:p>
-        </p:txBody>
-      </p:sp>
-      <p:sp>
-        <p:nvSpPr>
-          <p:cNvPr id="17" name="Rectangle 16"/>
-          <p:cNvSpPr/>
-          <p:nvPr/>
-        </p:nvSpPr>
-        <p:spPr>
-          <a:xfrm>
-            <a:off x="777240" y="4041648"/>
-            <a:ext cx="109728" cy="109728"/>
-          </a:xfrm>
-          <a:prstGeom prst="rect">
-            <a:avLst/>
-          </a:prstGeom>
-          <a:solidFill>
-            <a:srgbClr val="36D399"/>
-          </a:solidFill>
-          <a:ln>
-            <a:noFill/>
-          </a:ln>
-          <a:effectLst/>
-        </p:spPr>
-        <p:style>
-          <a:lnRef idx="1">
-            <a:schemeClr val="accent1"/>
-          </a:lnRef>
-          <a:fillRef idx="3">
-            <a:schemeClr val="accent1"/>
-          </a:fillRef>
-          <a:effectRef idx="2">
-            <a:schemeClr val="accent1"/>
-          </a:effectRef>
-          <a:fontRef idx="minor">
-            <a:schemeClr val="lt1"/>
-          </a:fontRef>
-        </p:style>
-        <p:txBody>
-          <a:bodyPr rtlCol="0" anchor="ctr"/>
-          <a:lstStyle/>
-          <a:p>
-            <a:pPr algn="ctr"/>
-          </a:p>
-        </p:txBody>
-      </p:sp>
-      <p:sp>
-        <p:nvSpPr>
-          <p:cNvPr id="18" name="TextBox 17"/>
-          <p:cNvSpPr txBox="1"/>
-          <p:nvPr/>
-        </p:nvSpPr>
-        <p:spPr>
-          <a:xfrm>
-            <a:off x="1069848" y="3941064"/>
-            <a:ext cx="10405872" cy="365760"/>
-          </a:xfrm>
-          <a:prstGeom prst="rect">
-            <a:avLst/>
-          </a:prstGeom>
-          <a:noFill/>
-        </p:spPr>
-        <p:txBody>
-          <a:bodyPr wrap="square" lIns="0" rIns="0" tIns="0" bIns="0" anchor="t">
-            <a:spAutoFit/>
-          </a:bodyPr>
-          <a:lstStyle/>
-          <a:p>
-            <a:pPr algn="l">
-              <a:lnSpc>
-                <a:spcPct val="115000"/>
-              </a:lnSpc>
-            </a:pPr>
-            <a:r>
-              <a:rPr sz="1650" b="1">
-                <a:solidFill>
-                  <a:srgbClr val="ECF1F6"/>
-                </a:solidFill>
-                <a:latin typeface="맑은 고딕"/>
-                <a:ea typeface="맑은 고딕"/>
-                <a:cs typeface="맑은 고딕"/>
-              </a:rPr>
-              <a:t>배치는 단가를 반으로 줄이지만 시간은 약속하지 않는다</a:t>
-            </a:r>
-          </a:p>
-        </p:txBody>
-      </p:sp>
-      <p:sp>
-        <p:nvSpPr>
-          <p:cNvPr id="19" name="TextBox 18"/>
-          <p:cNvSpPr txBox="1"/>
-          <p:nvPr/>
-        </p:nvSpPr>
-        <p:spPr>
-          <a:xfrm>
-            <a:off x="1069848" y="4215384"/>
-            <a:ext cx="10405872" cy="365760"/>
-          </a:xfrm>
-          <a:prstGeom prst="rect">
-            <a:avLst/>
-          </a:prstGeom>
-          <a:noFill/>
-        </p:spPr>
-        <p:txBody>
-          <a:bodyPr wrap="square" lIns="0" rIns="0" tIns="0" bIns="0" anchor="t">
-            <a:spAutoFit/>
-          </a:bodyPr>
-          <a:lstStyle/>
-          <a:p>
-            <a:pPr algn="l">
-              <a:lnSpc>
-                <a:spcPct val="115000"/>
-              </a:lnSpc>
-            </a:pPr>
-            <a:r>
-              <a:rPr sz="1350" b="0">
-                <a:solidFill>
-                  <a:srgbClr val="93A4B5"/>
-                </a:solidFill>
-                <a:latin typeface="맑은 고딕"/>
-                <a:ea typeface="맑은 고딕"/>
-                <a:cs typeface="맑은 고딕"/>
-              </a:rPr>
-              <a:t>expired가 실제로 난다. 폴백 없는 배치는 파이프라인을 멈춘다.</a:t>
-            </a:r>
-          </a:p>
-        </p:txBody>
-      </p:sp>
-      <p:sp>
-        <p:nvSpPr>
-          <p:cNvPr id="20" name="Rectangle 19"/>
-          <p:cNvSpPr/>
-          <p:nvPr/>
-        </p:nvSpPr>
-        <p:spPr>
-          <a:xfrm>
-            <a:off x="777240" y="4700016"/>
-            <a:ext cx="109728" cy="109728"/>
-          </a:xfrm>
-          <a:prstGeom prst="rect">
-            <a:avLst/>
-          </a:prstGeom>
-          <a:solidFill>
-            <a:srgbClr val="36D399"/>
-          </a:solidFill>
-          <a:ln>
-            <a:noFill/>
-          </a:ln>
-          <a:effectLst/>
-        </p:spPr>
-        <p:style>
-          <a:lnRef idx="1">
-            <a:schemeClr val="accent1"/>
-          </a:lnRef>
-          <a:fillRef idx="3">
-            <a:schemeClr val="accent1"/>
-          </a:fillRef>
-          <a:effectRef idx="2">
-            <a:schemeClr val="accent1"/>
-          </a:effectRef>
-          <a:fontRef idx="minor">
-            <a:schemeClr val="lt1"/>
-          </a:fontRef>
-        </p:style>
-        <p:txBody>
-          <a:bodyPr rtlCol="0" anchor="ctr"/>
-          <a:lstStyle/>
-          <a:p>
-            <a:pPr algn="ctr"/>
-          </a:p>
-        </p:txBody>
-      </p:sp>
-      <p:sp>
-        <p:nvSpPr>
-          <p:cNvPr id="21" name="TextBox 20"/>
-          <p:cNvSpPr txBox="1"/>
-          <p:nvPr/>
-        </p:nvSpPr>
-        <p:spPr>
-          <a:xfrm>
-            <a:off x="1069848" y="4599431"/>
-            <a:ext cx="10405872" cy="365760"/>
-          </a:xfrm>
-          <a:prstGeom prst="rect">
-            <a:avLst/>
-          </a:prstGeom>
-          <a:noFill/>
-        </p:spPr>
-        <p:txBody>
-          <a:bodyPr wrap="square" lIns="0" rIns="0" tIns="0" bIns="0" anchor="t">
-            <a:spAutoFit/>
-          </a:bodyPr>
-          <a:lstStyle/>
-          <a:p>
-            <a:pPr algn="l">
-              <a:lnSpc>
-                <a:spcPct val="115000"/>
-              </a:lnSpc>
-            </a:pPr>
-            <a:r>
-              <a:rPr sz="1650" b="1">
-                <a:solidFill>
-                  <a:srgbClr val="ECF1F6"/>
-                </a:solidFill>
-                <a:latin typeface="맑은 고딕"/>
-                <a:ea typeface="맑은 고딕"/>
-                <a:cs typeface="맑은 고딕"/>
-              </a:rPr>
-              <a:t>밸브는 프롬프트가 아니라 코드로 잠근다</a:t>
-            </a:r>
-          </a:p>
-        </p:txBody>
-      </p:sp>
-      <p:sp>
-        <p:nvSpPr>
-          <p:cNvPr id="22" name="TextBox 21"/>
-          <p:cNvSpPr txBox="1"/>
-          <p:nvPr/>
-        </p:nvSpPr>
-        <p:spPr>
-          <a:xfrm>
-            <a:off x="1069848" y="4873751"/>
-            <a:ext cx="10405872" cy="365760"/>
-          </a:xfrm>
-          <a:prstGeom prst="rect">
-            <a:avLst/>
-          </a:prstGeom>
-          <a:noFill/>
-        </p:spPr>
-        <p:txBody>
-          <a:bodyPr wrap="square" lIns="0" rIns="0" tIns="0" bIns="0" anchor="t">
-            <a:spAutoFit/>
-          </a:bodyPr>
-          <a:lstStyle/>
-          <a:p>
-            <a:pPr algn="l">
-              <a:lnSpc>
-                <a:spcPct val="115000"/>
-              </a:lnSpc>
-            </a:pPr>
-            <a:r>
-              <a:rPr sz="1350" b="0">
-                <a:solidFill>
-                  <a:srgbClr val="93A4B5"/>
-                </a:solidFill>
-                <a:latin typeface="맑은 고딕"/>
-                <a:ea typeface="맑은 고딕"/>
-                <a:cs typeface="맑은 고딕"/>
-              </a:rPr>
-              <a:t>3줄 상한과 세션 리셋은 부탁이 아니라 후처리로 강제해야 지켜진다.</a:t>
-            </a:r>
-          </a:p>
-        </p:txBody>
-      </p:sp>
-      <p:sp>
-        <p:nvSpPr>
-          <p:cNvPr id="23" name="Rounded Rectangle 22"/>
-          <p:cNvSpPr/>
-          <p:nvPr/>
-        </p:nvSpPr>
-        <p:spPr>
-          <a:xfrm>
-            <a:off x="685800" y="5440680"/>
-            <a:ext cx="10835640" cy="822960"/>
+            <a:off x="8001000" y="2240280"/>
+            <a:ext cx="3520440" cy="1783080"/>
           </a:xfrm>
           <a:prstGeom prst="roundRect">
             <a:avLst>
-              <a:gd name="adj" fmla="val 5000"/>
+              <a:gd name="adj" fmla="val 6000"/>
             </a:avLst>
           </a:prstGeom>
           <a:solidFill>
@@ -7723,14 +8278,14 @@
       </p:sp>
       <p:sp>
         <p:nvSpPr>
-          <p:cNvPr id="24" name="Rectangle 23"/>
+          <p:cNvPr id="13" name="Rectangle 12"/>
           <p:cNvSpPr/>
           <p:nvPr/>
         </p:nvSpPr>
         <p:spPr>
           <a:xfrm>
-            <a:off x="685800" y="5440680"/>
-            <a:ext cx="50292" cy="822960"/>
+            <a:off x="8001000" y="2240280"/>
+            <a:ext cx="50292" cy="1783080"/>
           </a:xfrm>
           <a:prstGeom prst="rect">
             <a:avLst/>
@@ -7767,54 +8322,357 @@
       </p:sp>
       <p:sp>
         <p:nvSpPr>
-          <p:cNvPr id="25" name="TextBox 24"/>
-          <p:cNvSpPr txBox="1"/>
-          <p:nvPr/>
-        </p:nvSpPr>
-        <p:spPr>
-          <a:xfrm>
-            <a:off x="960120" y="5596128"/>
-            <a:ext cx="10424160" cy="594360"/>
-          </a:xfrm>
-          <a:prstGeom prst="rect">
-            <a:avLst/>
-          </a:prstGeom>
-          <a:noFill/>
-        </p:spPr>
-        <p:txBody>
-          <a:bodyPr wrap="square" lIns="0" rIns="0" tIns="0" bIns="0" anchor="t">
-            <a:spAutoFit/>
-          </a:bodyPr>
-          <a:lstStyle/>
-          <a:p>
-            <a:pPr algn="l">
-              <a:lnSpc>
-                <a:spcPct val="115000"/>
-              </a:lnSpc>
-            </a:pPr>
-            <a:r>
-              <a:rPr sz="1550" b="1">
-                <a:solidFill>
-                  <a:srgbClr val="5A9CFF"/>
-                </a:solidFill>
-                <a:latin typeface="맑은 고딕"/>
-                <a:ea typeface="맑은 고딕"/>
-                <a:cs typeface="맑은 고딕"/>
-              </a:rPr>
-              <a:t>세 덱을 관통하는 한 문장 — AI가 나쁜 게 아니라 우리가 견적서를 안 읽은 것이다.</a:t>
-            </a:r>
-          </a:p>
-        </p:txBody>
-      </p:sp>
-      <p:sp>
-        <p:nvSpPr>
-          <p:cNvPr id="26" name="TextBox 25"/>
-          <p:cNvSpPr txBox="1"/>
-          <p:nvPr/>
-        </p:nvSpPr>
-        <p:spPr>
-          <a:xfrm>
-            <a:off x="685800" y="6419088"/>
+          <p:cNvPr id="14" name="TextBox 13"/>
+          <p:cNvSpPr txBox="1"/>
+          <p:nvPr/>
+        </p:nvSpPr>
+        <p:spPr>
+          <a:xfrm>
+            <a:off x="8311896" y="2478024"/>
+            <a:ext cx="2971800" cy="365760"/>
+          </a:xfrm>
+          <a:prstGeom prst="rect">
+            <a:avLst/>
+          </a:prstGeom>
+          <a:noFill/>
+        </p:spPr>
+        <p:txBody>
+          <a:bodyPr wrap="square" lIns="0" rIns="0" tIns="0" bIns="0" anchor="t">
+            <a:spAutoFit/>
+          </a:bodyPr>
+          <a:lstStyle/>
+          <a:p>
+            <a:pPr algn="l">
+              <a:lnSpc>
+                <a:spcPct val="115000"/>
+              </a:lnSpc>
+            </a:pPr>
+            <a:r>
+              <a:rPr sz="1500" b="1">
+                <a:solidFill>
+                  <a:srgbClr val="ECF1F6"/>
+                </a:solidFill>
+                <a:latin typeface="맑은 고딕"/>
+                <a:ea typeface="맑은 고딕"/>
+                <a:cs typeface="맑은 고딕"/>
+              </a:rPr>
+              <a:t>시연 순서</a:t>
+            </a:r>
+          </a:p>
+        </p:txBody>
+      </p:sp>
+      <p:sp>
+        <p:nvSpPr>
+          <p:cNvPr id="15" name="TextBox 14"/>
+          <p:cNvSpPr txBox="1"/>
+          <p:nvPr/>
+        </p:nvSpPr>
+        <p:spPr>
+          <a:xfrm>
+            <a:off x="8311896" y="3017520"/>
+            <a:ext cx="2971800" cy="868680"/>
+          </a:xfrm>
+          <a:prstGeom prst="rect">
+            <a:avLst/>
+          </a:prstGeom>
+          <a:noFill/>
+        </p:spPr>
+        <p:txBody>
+          <a:bodyPr wrap="square" lIns="0" rIns="0" tIns="0" bIns="0" anchor="t">
+            <a:spAutoFit/>
+          </a:bodyPr>
+          <a:lstStyle/>
+          <a:p>
+            <a:pPr algn="l">
+              <a:lnSpc>
+                <a:spcPct val="135000"/>
+              </a:lnSpc>
+              <a:spcBef>
+                <a:spcPts val="0"/>
+              </a:spcBef>
+            </a:pPr>
+            <a:r>
+              <a:rPr sz="1200" b="0">
+                <a:solidFill>
+                  <a:srgbClr val="93A4B5"/>
+                </a:solidFill>
+                <a:latin typeface="맑은 고딕"/>
+                <a:ea typeface="맑은 고딕"/>
+                <a:cs typeface="맑은 고딕"/>
+              </a:rPr>
+              <a:t>1. router.py — 5개 요청의 행선지</a:t>
+            </a:r>
+          </a:p>
+          <a:p>
+            <a:pPr algn="l">
+              <a:lnSpc>
+                <a:spcPct val="135000"/>
+              </a:lnSpc>
+              <a:spcBef>
+                <a:spcPts val="600"/>
+              </a:spcBef>
+            </a:pPr>
+            <a:r>
+              <a:rPr sz="1200" b="0">
+                <a:solidFill>
+                  <a:srgbClr val="93A4B5"/>
+                </a:solidFill>
+                <a:latin typeface="맑은 고딕"/>
+                <a:ea typeface="맑은 고딕"/>
+                <a:cs typeface="맑은 고딕"/>
+              </a:rPr>
+              <a:t>2. test_router.py — 32건 검증</a:t>
+            </a:r>
+          </a:p>
+          <a:p>
+            <a:pPr algn="l">
+              <a:lnSpc>
+                <a:spcPct val="135000"/>
+              </a:lnSpc>
+              <a:spcBef>
+                <a:spcPts val="600"/>
+              </a:spcBef>
+            </a:pPr>
+            <a:r>
+              <a:rPr sz="1200" b="0">
+                <a:solidFill>
+                  <a:srgbClr val="93A4B5"/>
+                </a:solidFill>
+                <a:latin typeface="맑은 고딕"/>
+                <a:ea typeface="맑은 고딕"/>
+                <a:cs typeface="맑은 고딕"/>
+              </a:rPr>
+              <a:t>3. 규칙 하나를 깨뜨려 FAIL 재현</a:t>
+            </a:r>
+          </a:p>
+        </p:txBody>
+      </p:sp>
+      <p:sp>
+        <p:nvSpPr>
+          <p:cNvPr id="16" name="Rounded Rectangle 15"/>
+          <p:cNvSpPr/>
+          <p:nvPr/>
+        </p:nvSpPr>
+        <p:spPr>
+          <a:xfrm>
+            <a:off x="8001000" y="4160520"/>
+            <a:ext cx="3520440" cy="1783080"/>
+          </a:xfrm>
+          <a:prstGeom prst="roundRect">
+            <a:avLst>
+              <a:gd name="adj" fmla="val 6000"/>
+            </a:avLst>
+          </a:prstGeom>
+          <a:solidFill>
+            <a:srgbClr val="18222E"/>
+          </a:solidFill>
+          <a:ln>
+            <a:noFill/>
+          </a:ln>
+          <a:effectLst/>
+        </p:spPr>
+        <p:style>
+          <a:lnRef idx="1">
+            <a:schemeClr val="accent1"/>
+          </a:lnRef>
+          <a:fillRef idx="3">
+            <a:schemeClr val="accent1"/>
+          </a:fillRef>
+          <a:effectRef idx="2">
+            <a:schemeClr val="accent1"/>
+          </a:effectRef>
+          <a:fontRef idx="minor">
+            <a:schemeClr val="lt1"/>
+          </a:fontRef>
+        </p:style>
+        <p:txBody>
+          <a:bodyPr rtlCol="0" anchor="ctr"/>
+          <a:lstStyle/>
+          <a:p>
+            <a:pPr algn="ctr"/>
+          </a:p>
+        </p:txBody>
+      </p:sp>
+      <p:sp>
+        <p:nvSpPr>
+          <p:cNvPr id="17" name="Rectangle 16"/>
+          <p:cNvSpPr/>
+          <p:nvPr/>
+        </p:nvSpPr>
+        <p:spPr>
+          <a:xfrm>
+            <a:off x="8001000" y="4160520"/>
+            <a:ext cx="50292" cy="1783080"/>
+          </a:xfrm>
+          <a:prstGeom prst="rect">
+            <a:avLst/>
+          </a:prstGeom>
+          <a:solidFill>
+            <a:srgbClr val="FFB04D"/>
+          </a:solidFill>
+          <a:ln>
+            <a:noFill/>
+          </a:ln>
+          <a:effectLst/>
+        </p:spPr>
+        <p:style>
+          <a:lnRef idx="1">
+            <a:schemeClr val="accent1"/>
+          </a:lnRef>
+          <a:fillRef idx="3">
+            <a:schemeClr val="accent1"/>
+          </a:fillRef>
+          <a:effectRef idx="2">
+            <a:schemeClr val="accent1"/>
+          </a:effectRef>
+          <a:fontRef idx="minor">
+            <a:schemeClr val="lt1"/>
+          </a:fontRef>
+        </p:style>
+        <p:txBody>
+          <a:bodyPr rtlCol="0" anchor="ctr"/>
+          <a:lstStyle/>
+          <a:p>
+            <a:pPr algn="ctr"/>
+          </a:p>
+        </p:txBody>
+      </p:sp>
+      <p:sp>
+        <p:nvSpPr>
+          <p:cNvPr id="18" name="TextBox 17"/>
+          <p:cNvSpPr txBox="1"/>
+          <p:nvPr/>
+        </p:nvSpPr>
+        <p:spPr>
+          <a:xfrm>
+            <a:off x="8311896" y="4398264"/>
+            <a:ext cx="2971800" cy="365760"/>
+          </a:xfrm>
+          <a:prstGeom prst="rect">
+            <a:avLst/>
+          </a:prstGeom>
+          <a:noFill/>
+        </p:spPr>
+        <p:txBody>
+          <a:bodyPr wrap="square" lIns="0" rIns="0" tIns="0" bIns="0" anchor="t">
+            <a:spAutoFit/>
+          </a:bodyPr>
+          <a:lstStyle/>
+          <a:p>
+            <a:pPr algn="l">
+              <a:lnSpc>
+                <a:spcPct val="115000"/>
+              </a:lnSpc>
+            </a:pPr>
+            <a:r>
+              <a:rPr sz="1500" b="1">
+                <a:solidFill>
+                  <a:srgbClr val="ECF1F6"/>
+                </a:solidFill>
+                <a:latin typeface="맑은 고딕"/>
+                <a:ea typeface="맑은 고딕"/>
+                <a:cs typeface="맑은 고딕"/>
+              </a:rPr>
+              <a:t>숫자를 읽는 법</a:t>
+            </a:r>
+          </a:p>
+        </p:txBody>
+      </p:sp>
+      <p:sp>
+        <p:nvSpPr>
+          <p:cNvPr id="19" name="TextBox 18"/>
+          <p:cNvSpPr txBox="1"/>
+          <p:nvPr/>
+        </p:nvSpPr>
+        <p:spPr>
+          <a:xfrm>
+            <a:off x="8311896" y="4937759"/>
+            <a:ext cx="2971800" cy="868680"/>
+          </a:xfrm>
+          <a:prstGeom prst="rect">
+            <a:avLst/>
+          </a:prstGeom>
+          <a:noFill/>
+        </p:spPr>
+        <p:txBody>
+          <a:bodyPr wrap="square" lIns="0" rIns="0" tIns="0" bIns="0" anchor="t">
+            <a:spAutoFit/>
+          </a:bodyPr>
+          <a:lstStyle/>
+          <a:p>
+            <a:pPr algn="l">
+              <a:lnSpc>
+                <a:spcPct val="135000"/>
+              </a:lnSpc>
+              <a:spcBef>
+                <a:spcPts val="0"/>
+              </a:spcBef>
+            </a:pPr>
+            <a:r>
+              <a:rPr sz="1200" b="0">
+                <a:solidFill>
+                  <a:srgbClr val="93A4B5"/>
+                </a:solidFill>
+                <a:latin typeface="맑은 고딕"/>
+                <a:ea typeface="맑은 고딕"/>
+                <a:cs typeface="맑은 고딕"/>
+              </a:rPr>
+              <a:t>93.3%는 "전부 상위 모델" 대비 추정치다.</a:t>
+            </a:r>
+          </a:p>
+          <a:p>
+            <a:pPr algn="l">
+              <a:lnSpc>
+                <a:spcPct val="135000"/>
+              </a:lnSpc>
+              <a:spcBef>
+                <a:spcPts val="600"/>
+              </a:spcBef>
+            </a:pPr>
+            <a:r>
+              <a:rPr sz="1200" b="0">
+                <a:solidFill>
+                  <a:srgbClr val="93A4B5"/>
+                </a:solidFill>
+                <a:latin typeface="맑은 고딕"/>
+                <a:ea typeface="맑은 고딕"/>
+                <a:cs typeface="맑은 고딕"/>
+              </a:rPr>
+              <a:t>실제 절감폭은 요청 구성비에 따라 달라진다.</a:t>
+            </a:r>
+          </a:p>
+          <a:p>
+            <a:pPr algn="l">
+              <a:lnSpc>
+                <a:spcPct val="135000"/>
+              </a:lnSpc>
+              <a:spcBef>
+                <a:spcPts val="600"/>
+              </a:spcBef>
+            </a:pPr>
+            <a:r>
+              <a:rPr sz="1200" b="0">
+                <a:solidFill>
+                  <a:srgbClr val="93A4B5"/>
+                </a:solidFill>
+                <a:latin typeface="맑은 고딕"/>
+                <a:ea typeface="맑은 고딕"/>
+                <a:cs typeface="맑은 고딕"/>
+              </a:rPr>
+              <a:t>PRICES 상수를 각자 단가로 바꿔 다시 재라.</a:t>
+            </a:r>
+          </a:p>
+        </p:txBody>
+      </p:sp>
+      <p:sp>
+        <p:nvSpPr>
+          <p:cNvPr id="20" name="TextBox 19"/>
+          <p:cNvSpPr txBox="1"/>
+          <p:nvPr/>
+        </p:nvSpPr>
+        <p:spPr>
+          <a:xfrm>
+            <a:off x="685800" y="5943600"/>
             <a:ext cx="10789920" cy="320040"/>
           </a:xfrm>
           <a:prstGeom prst="rect">
@@ -7842,7 +8700,7 @@
                 <a:ea typeface="맑은 고딕"/>
                 <a:cs typeface="맑은 고딕"/>
               </a:rPr>
-              <a:t>본편(22장) · 보너스(10장) · 후속(12장) — 각각 독립 발표 가능합니다.</a:t>
+              <a:t>agent_setup/router.py (라우터) · agent_setup/test_router.py (검증 32건) — 저장소에 그대로 들어 있습니다.</a:t>
             </a:r>
           </a:p>
         </p:txBody>
@@ -7989,7 +8847,7 @@
                 <a:ea typeface="맑은 고딕"/>
                 <a:cs typeface="맑은 고딕"/>
               </a:rPr>
-              <a:t>FOLLOW-UP</a:t>
+              <a:t>FOLLOW-UP · 도입 순서</a:t>
             </a:r>
           </a:p>
         </p:txBody>
@@ -8030,7 +8888,7 @@
                 <a:ea typeface="맑은 고딕"/>
                 <a:cs typeface="맑은 고딕"/>
               </a:rPr>
-              <a:t>Q &amp; A</a:t>
+              <a:t>내일부터 뭘 켜나</a:t>
             </a:r>
           </a:p>
         </p:txBody>
@@ -8116,6 +8974,3199 @@
                 <a:cs typeface="맑은 고딕"/>
               </a:rPr>
               <a:t>13</a:t>
+            </a:r>
+          </a:p>
+        </p:txBody>
+      </p:sp>
+      <p:sp>
+        <p:nvSpPr>
+          <p:cNvPr id="8" name="TextBox 7"/>
+          <p:cNvSpPr txBox="1"/>
+          <p:nvPr/>
+        </p:nvSpPr>
+        <p:spPr>
+          <a:xfrm>
+            <a:off x="685800" y="1737360"/>
+            <a:ext cx="10881360" cy="365760"/>
+          </a:xfrm>
+          <a:prstGeom prst="rect">
+            <a:avLst/>
+          </a:prstGeom>
+          <a:noFill/>
+        </p:spPr>
+        <p:txBody>
+          <a:bodyPr wrap="square" lIns="0" rIns="0" tIns="0" bIns="0" anchor="t">
+            <a:spAutoFit/>
+          </a:bodyPr>
+          <a:lstStyle/>
+          <a:p>
+            <a:pPr algn="l">
+              <a:lnSpc>
+                <a:spcPct val="115000"/>
+              </a:lnSpc>
+            </a:pPr>
+            <a:r>
+              <a:rPr sz="1450" b="0">
+                <a:solidFill>
+                  <a:srgbClr val="93A4B5"/>
+                </a:solidFill>
+                <a:latin typeface="맑은 고딕"/>
+                <a:ea typeface="맑은 고딕"/>
+                <a:cs typeface="맑은 고딕"/>
+              </a:rPr>
+              <a:t>전부 한 번에 켜지 않는다. 위험이 낮고 효과가 즉시 보이는 것부터.</a:t>
+            </a:r>
+          </a:p>
+        </p:txBody>
+      </p:sp>
+      <p:sp>
+        <p:nvSpPr>
+          <p:cNvPr id="9" name="Rectangle 8"/>
+          <p:cNvSpPr/>
+          <p:nvPr/>
+        </p:nvSpPr>
+        <p:spPr>
+          <a:xfrm>
+            <a:off x="685800" y="2286000"/>
+            <a:ext cx="10835640" cy="384048"/>
+          </a:xfrm>
+          <a:prstGeom prst="rect">
+            <a:avLst/>
+          </a:prstGeom>
+          <a:solidFill>
+            <a:srgbClr val="18222E"/>
+          </a:solidFill>
+          <a:ln>
+            <a:noFill/>
+          </a:ln>
+          <a:effectLst/>
+        </p:spPr>
+        <p:style>
+          <a:lnRef idx="1">
+            <a:schemeClr val="accent1"/>
+          </a:lnRef>
+          <a:fillRef idx="3">
+            <a:schemeClr val="accent1"/>
+          </a:fillRef>
+          <a:effectRef idx="2">
+            <a:schemeClr val="accent1"/>
+          </a:effectRef>
+          <a:fontRef idx="minor">
+            <a:schemeClr val="lt1"/>
+          </a:fontRef>
+        </p:style>
+        <p:txBody>
+          <a:bodyPr rtlCol="0" anchor="ctr"/>
+          <a:lstStyle/>
+          <a:p>
+            <a:pPr algn="ctr"/>
+          </a:p>
+        </p:txBody>
+      </p:sp>
+      <p:sp>
+        <p:nvSpPr>
+          <p:cNvPr id="10" name="TextBox 9"/>
+          <p:cNvSpPr txBox="1"/>
+          <p:nvPr/>
+        </p:nvSpPr>
+        <p:spPr>
+          <a:xfrm>
+            <a:off x="813816" y="2368296"/>
+            <a:ext cx="868680" cy="384048"/>
+          </a:xfrm>
+          <a:prstGeom prst="rect">
+            <a:avLst/>
+          </a:prstGeom>
+          <a:noFill/>
+        </p:spPr>
+        <p:txBody>
+          <a:bodyPr wrap="square" lIns="0" rIns="0" tIns="0" bIns="0" anchor="t">
+            <a:spAutoFit/>
+          </a:bodyPr>
+          <a:lstStyle/>
+          <a:p>
+            <a:pPr algn="l">
+              <a:lnSpc>
+                <a:spcPct val="115000"/>
+              </a:lnSpc>
+            </a:pPr>
+            <a:r>
+              <a:rPr sz="1300" b="1">
+                <a:solidFill>
+                  <a:srgbClr val="36D399"/>
+                </a:solidFill>
+                <a:latin typeface="맑은 고딕"/>
+                <a:ea typeface="맑은 고딕"/>
+                <a:cs typeface="맑은 고딕"/>
+              </a:rPr>
+              <a:t>시점</a:t>
+            </a:r>
+          </a:p>
+        </p:txBody>
+      </p:sp>
+      <p:sp>
+        <p:nvSpPr>
+          <p:cNvPr id="11" name="TextBox 10"/>
+          <p:cNvSpPr txBox="1"/>
+          <p:nvPr/>
+        </p:nvSpPr>
+        <p:spPr>
+          <a:xfrm>
+            <a:off x="1865376" y="2368296"/>
+            <a:ext cx="2194560" cy="384048"/>
+          </a:xfrm>
+          <a:prstGeom prst="rect">
+            <a:avLst/>
+          </a:prstGeom>
+          <a:noFill/>
+        </p:spPr>
+        <p:txBody>
+          <a:bodyPr wrap="square" lIns="0" rIns="0" tIns="0" bIns="0" anchor="t">
+            <a:spAutoFit/>
+          </a:bodyPr>
+          <a:lstStyle/>
+          <a:p>
+            <a:pPr algn="l">
+              <a:lnSpc>
+                <a:spcPct val="115000"/>
+              </a:lnSpc>
+            </a:pPr>
+            <a:r>
+              <a:rPr sz="1300" b="1">
+                <a:solidFill>
+                  <a:srgbClr val="36D399"/>
+                </a:solidFill>
+                <a:latin typeface="맑은 고딕"/>
+                <a:ea typeface="맑은 고딕"/>
+                <a:cs typeface="맑은 고딕"/>
+              </a:rPr>
+              <a:t>무엇을</a:t>
+            </a:r>
+          </a:p>
+        </p:txBody>
+      </p:sp>
+      <p:sp>
+        <p:nvSpPr>
+          <p:cNvPr id="12" name="TextBox 11"/>
+          <p:cNvSpPr txBox="1"/>
+          <p:nvPr/>
+        </p:nvSpPr>
+        <p:spPr>
+          <a:xfrm>
+            <a:off x="4242816" y="2368296"/>
+            <a:ext cx="3017520" cy="384048"/>
+          </a:xfrm>
+          <a:prstGeom prst="rect">
+            <a:avLst/>
+          </a:prstGeom>
+          <a:noFill/>
+        </p:spPr>
+        <p:txBody>
+          <a:bodyPr wrap="square" lIns="0" rIns="0" tIns="0" bIns="0" anchor="t">
+            <a:spAutoFit/>
+          </a:bodyPr>
+          <a:lstStyle/>
+          <a:p>
+            <a:pPr algn="l">
+              <a:lnSpc>
+                <a:spcPct val="115000"/>
+              </a:lnSpc>
+            </a:pPr>
+            <a:r>
+              <a:rPr sz="1300" b="1">
+                <a:solidFill>
+                  <a:srgbClr val="36D399"/>
+                </a:solidFill>
+                <a:latin typeface="맑은 고딕"/>
+                <a:ea typeface="맑은 고딕"/>
+                <a:cs typeface="맑은 고딕"/>
+              </a:rPr>
+              <a:t>어떻게</a:t>
+            </a:r>
+          </a:p>
+        </p:txBody>
+      </p:sp>
+      <p:sp>
+        <p:nvSpPr>
+          <p:cNvPr id="13" name="TextBox 12"/>
+          <p:cNvSpPr txBox="1"/>
+          <p:nvPr/>
+        </p:nvSpPr>
+        <p:spPr>
+          <a:xfrm>
+            <a:off x="7443216" y="2368296"/>
+            <a:ext cx="2286000" cy="384048"/>
+          </a:xfrm>
+          <a:prstGeom prst="rect">
+            <a:avLst/>
+          </a:prstGeom>
+          <a:noFill/>
+        </p:spPr>
+        <p:txBody>
+          <a:bodyPr wrap="square" lIns="0" rIns="0" tIns="0" bIns="0" anchor="t">
+            <a:spAutoFit/>
+          </a:bodyPr>
+          <a:lstStyle/>
+          <a:p>
+            <a:pPr algn="l">
+              <a:lnSpc>
+                <a:spcPct val="115000"/>
+              </a:lnSpc>
+            </a:pPr>
+            <a:r>
+              <a:rPr sz="1300" b="1">
+                <a:solidFill>
+                  <a:srgbClr val="36D399"/>
+                </a:solidFill>
+                <a:latin typeface="맑은 고딕"/>
+                <a:ea typeface="맑은 고딕"/>
+                <a:cs typeface="맑은 고딕"/>
+              </a:rPr>
+              <a:t>기대 효과</a:t>
+            </a:r>
+          </a:p>
+        </p:txBody>
+      </p:sp>
+      <p:sp>
+        <p:nvSpPr>
+          <p:cNvPr id="14" name="TextBox 13"/>
+          <p:cNvSpPr txBox="1"/>
+          <p:nvPr/>
+        </p:nvSpPr>
+        <p:spPr>
+          <a:xfrm>
+            <a:off x="9912096" y="2368296"/>
+            <a:ext cx="1554480" cy="384048"/>
+          </a:xfrm>
+          <a:prstGeom prst="rect">
+            <a:avLst/>
+          </a:prstGeom>
+          <a:noFill/>
+        </p:spPr>
+        <p:txBody>
+          <a:bodyPr wrap="square" lIns="0" rIns="0" tIns="0" bIns="0" anchor="t">
+            <a:spAutoFit/>
+          </a:bodyPr>
+          <a:lstStyle/>
+          <a:p>
+            <a:pPr algn="l">
+              <a:lnSpc>
+                <a:spcPct val="115000"/>
+              </a:lnSpc>
+            </a:pPr>
+            <a:r>
+              <a:rPr sz="1300" b="1">
+                <a:solidFill>
+                  <a:srgbClr val="36D399"/>
+                </a:solidFill>
+                <a:latin typeface="맑은 고딕"/>
+                <a:ea typeface="맑은 고딕"/>
+                <a:cs typeface="맑은 고딕"/>
+              </a:rPr>
+              <a:t>주의</a:t>
+            </a:r>
+          </a:p>
+        </p:txBody>
+      </p:sp>
+      <p:sp>
+        <p:nvSpPr>
+          <p:cNvPr id="15" name="Rectangle 14"/>
+          <p:cNvSpPr/>
+          <p:nvPr/>
+        </p:nvSpPr>
+        <p:spPr>
+          <a:xfrm>
+            <a:off x="685800" y="2670048"/>
+            <a:ext cx="10835640" cy="384048"/>
+          </a:xfrm>
+          <a:prstGeom prst="rect">
+            <a:avLst/>
+          </a:prstGeom>
+          <a:solidFill>
+            <a:srgbClr val="111A24"/>
+          </a:solidFill>
+          <a:ln>
+            <a:noFill/>
+          </a:ln>
+          <a:effectLst/>
+        </p:spPr>
+        <p:style>
+          <a:lnRef idx="1">
+            <a:schemeClr val="accent1"/>
+          </a:lnRef>
+          <a:fillRef idx="3">
+            <a:schemeClr val="accent1"/>
+          </a:fillRef>
+          <a:effectRef idx="2">
+            <a:schemeClr val="accent1"/>
+          </a:effectRef>
+          <a:fontRef idx="minor">
+            <a:schemeClr val="lt1"/>
+          </a:fontRef>
+        </p:style>
+        <p:txBody>
+          <a:bodyPr rtlCol="0" anchor="ctr"/>
+          <a:lstStyle/>
+          <a:p>
+            <a:pPr algn="ctr"/>
+          </a:p>
+        </p:txBody>
+      </p:sp>
+      <p:sp>
+        <p:nvSpPr>
+          <p:cNvPr id="16" name="TextBox 15"/>
+          <p:cNvSpPr txBox="1"/>
+          <p:nvPr/>
+        </p:nvSpPr>
+        <p:spPr>
+          <a:xfrm>
+            <a:off x="813816" y="2752344"/>
+            <a:ext cx="868680" cy="384048"/>
+          </a:xfrm>
+          <a:prstGeom prst="rect">
+            <a:avLst/>
+          </a:prstGeom>
+          <a:noFill/>
+        </p:spPr>
+        <p:txBody>
+          <a:bodyPr wrap="square" lIns="0" rIns="0" tIns="0" bIns="0" anchor="t">
+            <a:spAutoFit/>
+          </a:bodyPr>
+          <a:lstStyle/>
+          <a:p>
+            <a:pPr algn="l">
+              <a:lnSpc>
+                <a:spcPct val="115000"/>
+              </a:lnSpc>
+            </a:pPr>
+            <a:r>
+              <a:rPr sz="1250" b="0">
+                <a:solidFill>
+                  <a:srgbClr val="ECF1F6"/>
+                </a:solidFill>
+                <a:latin typeface="맑은 고딕"/>
+                <a:ea typeface="맑은 고딕"/>
+                <a:cs typeface="맑은 고딕"/>
+              </a:rPr>
+              <a:t>1일차</a:t>
+            </a:r>
+          </a:p>
+        </p:txBody>
+      </p:sp>
+      <p:sp>
+        <p:nvSpPr>
+          <p:cNvPr id="17" name="TextBox 16"/>
+          <p:cNvSpPr txBox="1"/>
+          <p:nvPr/>
+        </p:nvSpPr>
+        <p:spPr>
+          <a:xfrm>
+            <a:off x="1865376" y="2752344"/>
+            <a:ext cx="2194560" cy="384048"/>
+          </a:xfrm>
+          <a:prstGeom prst="rect">
+            <a:avLst/>
+          </a:prstGeom>
+          <a:noFill/>
+        </p:spPr>
+        <p:txBody>
+          <a:bodyPr wrap="square" lIns="0" rIns="0" tIns="0" bIns="0" anchor="t">
+            <a:spAutoFit/>
+          </a:bodyPr>
+          <a:lstStyle/>
+          <a:p>
+            <a:pPr algn="l">
+              <a:lnSpc>
+                <a:spcPct val="115000"/>
+              </a:lnSpc>
+            </a:pPr>
+            <a:r>
+              <a:rPr sz="1250" b="0">
+                <a:solidFill>
+                  <a:srgbClr val="ECF1F6"/>
+                </a:solidFill>
+                <a:latin typeface="맑은 고딕"/>
+                <a:ea typeface="맑은 고딕"/>
+                <a:cs typeface="맑은 고딕"/>
+              </a:rPr>
+              <a:t>설명 3줄 상한</a:t>
+            </a:r>
+          </a:p>
+        </p:txBody>
+      </p:sp>
+      <p:sp>
+        <p:nvSpPr>
+          <p:cNvPr id="18" name="TextBox 17"/>
+          <p:cNvSpPr txBox="1"/>
+          <p:nvPr/>
+        </p:nvSpPr>
+        <p:spPr>
+          <a:xfrm>
+            <a:off x="4242816" y="2752344"/>
+            <a:ext cx="3017520" cy="384048"/>
+          </a:xfrm>
+          <a:prstGeom prst="rect">
+            <a:avLst/>
+          </a:prstGeom>
+          <a:noFill/>
+        </p:spPr>
+        <p:txBody>
+          <a:bodyPr wrap="square" lIns="0" rIns="0" tIns="0" bIns="0" anchor="t">
+            <a:spAutoFit/>
+          </a:bodyPr>
+          <a:lstStyle/>
+          <a:p>
+            <a:pPr algn="l">
+              <a:lnSpc>
+                <a:spcPct val="115000"/>
+              </a:lnSpc>
+            </a:pPr>
+            <a:r>
+              <a:rPr sz="1250" b="0">
+                <a:solidFill>
+                  <a:srgbClr val="ECF1F6"/>
+                </a:solidFill>
+                <a:latin typeface="맑은 고딕"/>
+                <a:ea typeface="맑은 고딕"/>
+                <a:cs typeface="맑은 고딕"/>
+              </a:rPr>
+              <a:t>프롬프트 + 후처리 컷</a:t>
+            </a:r>
+          </a:p>
+        </p:txBody>
+      </p:sp>
+      <p:sp>
+        <p:nvSpPr>
+          <p:cNvPr id="19" name="TextBox 18"/>
+          <p:cNvSpPr txBox="1"/>
+          <p:nvPr/>
+        </p:nvSpPr>
+        <p:spPr>
+          <a:xfrm>
+            <a:off x="7443216" y="2752344"/>
+            <a:ext cx="2286000" cy="384048"/>
+          </a:xfrm>
+          <a:prstGeom prst="rect">
+            <a:avLst/>
+          </a:prstGeom>
+          <a:noFill/>
+        </p:spPr>
+        <p:txBody>
+          <a:bodyPr wrap="square" lIns="0" rIns="0" tIns="0" bIns="0" anchor="t">
+            <a:spAutoFit/>
+          </a:bodyPr>
+          <a:lstStyle/>
+          <a:p>
+            <a:pPr algn="l">
+              <a:lnSpc>
+                <a:spcPct val="115000"/>
+              </a:lnSpc>
+            </a:pPr>
+            <a:r>
+              <a:rPr sz="1250" b="1">
+                <a:solidFill>
+                  <a:srgbClr val="36D399"/>
+                </a:solidFill>
+                <a:latin typeface="맑은 고딕"/>
+                <a:ea typeface="맑은 고딕"/>
+                <a:cs typeface="맑은 고딕"/>
+              </a:rPr>
+              <a:t>즉시 −40~60% 출력</a:t>
+            </a:r>
+          </a:p>
+        </p:txBody>
+      </p:sp>
+      <p:sp>
+        <p:nvSpPr>
+          <p:cNvPr id="20" name="TextBox 19"/>
+          <p:cNvSpPr txBox="1"/>
+          <p:nvPr/>
+        </p:nvSpPr>
+        <p:spPr>
+          <a:xfrm>
+            <a:off x="9912096" y="2752344"/>
+            <a:ext cx="1554480" cy="384048"/>
+          </a:xfrm>
+          <a:prstGeom prst="rect">
+            <a:avLst/>
+          </a:prstGeom>
+          <a:noFill/>
+        </p:spPr>
+        <p:txBody>
+          <a:bodyPr wrap="square" lIns="0" rIns="0" tIns="0" bIns="0" anchor="t">
+            <a:spAutoFit/>
+          </a:bodyPr>
+          <a:lstStyle/>
+          <a:p>
+            <a:pPr algn="l">
+              <a:lnSpc>
+                <a:spcPct val="115000"/>
+              </a:lnSpc>
+            </a:pPr>
+            <a:r>
+              <a:rPr sz="1250" b="0">
+                <a:solidFill>
+                  <a:srgbClr val="ECF1F6"/>
+                </a:solidFill>
+                <a:latin typeface="맑은 고딕"/>
+                <a:ea typeface="맑은 고딕"/>
+                <a:cs typeface="맑은 고딕"/>
+              </a:rPr>
+              <a:t>없음</a:t>
+            </a:r>
+          </a:p>
+        </p:txBody>
+      </p:sp>
+      <p:sp>
+        <p:nvSpPr>
+          <p:cNvPr id="21" name="TextBox 20"/>
+          <p:cNvSpPr txBox="1"/>
+          <p:nvPr/>
+        </p:nvSpPr>
+        <p:spPr>
+          <a:xfrm>
+            <a:off x="813816" y="3136391"/>
+            <a:ext cx="868680" cy="384048"/>
+          </a:xfrm>
+          <a:prstGeom prst="rect">
+            <a:avLst/>
+          </a:prstGeom>
+          <a:noFill/>
+        </p:spPr>
+        <p:txBody>
+          <a:bodyPr wrap="square" lIns="0" rIns="0" tIns="0" bIns="0" anchor="t">
+            <a:spAutoFit/>
+          </a:bodyPr>
+          <a:lstStyle/>
+          <a:p>
+            <a:pPr algn="l">
+              <a:lnSpc>
+                <a:spcPct val="115000"/>
+              </a:lnSpc>
+            </a:pPr>
+            <a:r>
+              <a:rPr sz="1250" b="0">
+                <a:solidFill>
+                  <a:srgbClr val="ECF1F6"/>
+                </a:solidFill>
+                <a:latin typeface="맑은 고딕"/>
+                <a:ea typeface="맑은 고딕"/>
+                <a:cs typeface="맑은 고딕"/>
+              </a:rPr>
+              <a:t>1주차</a:t>
+            </a:r>
+          </a:p>
+        </p:txBody>
+      </p:sp>
+      <p:sp>
+        <p:nvSpPr>
+          <p:cNvPr id="22" name="TextBox 21"/>
+          <p:cNvSpPr txBox="1"/>
+          <p:nvPr/>
+        </p:nvSpPr>
+        <p:spPr>
+          <a:xfrm>
+            <a:off x="1865376" y="3136391"/>
+            <a:ext cx="2194560" cy="384048"/>
+          </a:xfrm>
+          <a:prstGeom prst="rect">
+            <a:avLst/>
+          </a:prstGeom>
+          <a:noFill/>
+        </p:spPr>
+        <p:txBody>
+          <a:bodyPr wrap="square" lIns="0" rIns="0" tIns="0" bIns="0" anchor="t">
+            <a:spAutoFit/>
+          </a:bodyPr>
+          <a:lstStyle/>
+          <a:p>
+            <a:pPr algn="l">
+              <a:lnSpc>
+                <a:spcPct val="115000"/>
+              </a:lnSpc>
+            </a:pPr>
+            <a:r>
+              <a:rPr sz="1250" b="0">
+                <a:solidFill>
+                  <a:srgbClr val="ECF1F6"/>
+                </a:solidFill>
+                <a:latin typeface="맑은 고딕"/>
+                <a:ea typeface="맑은 고딕"/>
+                <a:cs typeface="맑은 고딕"/>
+              </a:rPr>
+              <a:t>규칙 기반 라우팅</a:t>
+            </a:r>
+          </a:p>
+        </p:txBody>
+      </p:sp>
+      <p:sp>
+        <p:nvSpPr>
+          <p:cNvPr id="23" name="TextBox 22"/>
+          <p:cNvSpPr txBox="1"/>
+          <p:nvPr/>
+        </p:nvSpPr>
+        <p:spPr>
+          <a:xfrm>
+            <a:off x="4242816" y="3136391"/>
+            <a:ext cx="3017520" cy="384048"/>
+          </a:xfrm>
+          <a:prstGeom prst="rect">
+            <a:avLst/>
+          </a:prstGeom>
+          <a:noFill/>
+        </p:spPr>
+        <p:txBody>
+          <a:bodyPr wrap="square" lIns="0" rIns="0" tIns="0" bIns="0" anchor="t">
+            <a:spAutoFit/>
+          </a:bodyPr>
+          <a:lstStyle/>
+          <a:p>
+            <a:pPr algn="l">
+              <a:lnSpc>
+                <a:spcPct val="115000"/>
+              </a:lnSpc>
+            </a:pPr>
+            <a:r>
+              <a:rPr sz="1250" b="0">
+                <a:solidFill>
+                  <a:srgbClr val="ECF1F6"/>
+                </a:solidFill>
+                <a:latin typeface="맑은 고딕"/>
+                <a:ea typeface="맑은 고딕"/>
+                <a:cs typeface="맑은 고딕"/>
+              </a:rPr>
+              <a:t>route() 붙이고 로그만 남김</a:t>
+            </a:r>
+          </a:p>
+        </p:txBody>
+      </p:sp>
+      <p:sp>
+        <p:nvSpPr>
+          <p:cNvPr id="24" name="TextBox 23"/>
+          <p:cNvSpPr txBox="1"/>
+          <p:nvPr/>
+        </p:nvSpPr>
+        <p:spPr>
+          <a:xfrm>
+            <a:off x="7443216" y="3136391"/>
+            <a:ext cx="2286000" cy="384048"/>
+          </a:xfrm>
+          <a:prstGeom prst="rect">
+            <a:avLst/>
+          </a:prstGeom>
+          <a:noFill/>
+        </p:spPr>
+        <p:txBody>
+          <a:bodyPr wrap="square" lIns="0" rIns="0" tIns="0" bIns="0" anchor="t">
+            <a:spAutoFit/>
+          </a:bodyPr>
+          <a:lstStyle/>
+          <a:p>
+            <a:pPr algn="l">
+              <a:lnSpc>
+                <a:spcPct val="115000"/>
+              </a:lnSpc>
+            </a:pPr>
+            <a:r>
+              <a:rPr sz="1250" b="1">
+                <a:solidFill>
+                  <a:srgbClr val="5A9CFF"/>
+                </a:solidFill>
+                <a:latin typeface="맑은 고딕"/>
+                <a:ea typeface="맑은 고딕"/>
+                <a:cs typeface="맑은 고딕"/>
+              </a:rPr>
+              <a:t>측정 먼저</a:t>
+            </a:r>
+          </a:p>
+        </p:txBody>
+      </p:sp>
+      <p:sp>
+        <p:nvSpPr>
+          <p:cNvPr id="25" name="TextBox 24"/>
+          <p:cNvSpPr txBox="1"/>
+          <p:nvPr/>
+        </p:nvSpPr>
+        <p:spPr>
+          <a:xfrm>
+            <a:off x="9912096" y="3136391"/>
+            <a:ext cx="1554480" cy="384048"/>
+          </a:xfrm>
+          <a:prstGeom prst="rect">
+            <a:avLst/>
+          </a:prstGeom>
+          <a:noFill/>
+        </p:spPr>
+        <p:txBody>
+          <a:bodyPr wrap="square" lIns="0" rIns="0" tIns="0" bIns="0" anchor="t">
+            <a:spAutoFit/>
+          </a:bodyPr>
+          <a:lstStyle/>
+          <a:p>
+            <a:pPr algn="l">
+              <a:lnSpc>
+                <a:spcPct val="115000"/>
+              </a:lnSpc>
+            </a:pPr>
+            <a:r>
+              <a:rPr sz="1250" b="0">
+                <a:solidFill>
+                  <a:srgbClr val="ECF1F6"/>
+                </a:solidFill>
+                <a:latin typeface="맑은 고딕"/>
+                <a:ea typeface="맑은 고딕"/>
+                <a:cs typeface="맑은 고딕"/>
+              </a:rPr>
+              <a:t>오분류</a:t>
+            </a:r>
+          </a:p>
+        </p:txBody>
+      </p:sp>
+      <p:sp>
+        <p:nvSpPr>
+          <p:cNvPr id="26" name="Rectangle 25"/>
+          <p:cNvSpPr/>
+          <p:nvPr/>
+        </p:nvSpPr>
+        <p:spPr>
+          <a:xfrm>
+            <a:off x="685800" y="3438144"/>
+            <a:ext cx="10835640" cy="384048"/>
+          </a:xfrm>
+          <a:prstGeom prst="rect">
+            <a:avLst/>
+          </a:prstGeom>
+          <a:solidFill>
+            <a:srgbClr val="111A24"/>
+          </a:solidFill>
+          <a:ln>
+            <a:noFill/>
+          </a:ln>
+          <a:effectLst/>
+        </p:spPr>
+        <p:style>
+          <a:lnRef idx="1">
+            <a:schemeClr val="accent1"/>
+          </a:lnRef>
+          <a:fillRef idx="3">
+            <a:schemeClr val="accent1"/>
+          </a:fillRef>
+          <a:effectRef idx="2">
+            <a:schemeClr val="accent1"/>
+          </a:effectRef>
+          <a:fontRef idx="minor">
+            <a:schemeClr val="lt1"/>
+          </a:fontRef>
+        </p:style>
+        <p:txBody>
+          <a:bodyPr rtlCol="0" anchor="ctr"/>
+          <a:lstStyle/>
+          <a:p>
+            <a:pPr algn="ctr"/>
+          </a:p>
+        </p:txBody>
+      </p:sp>
+      <p:sp>
+        <p:nvSpPr>
+          <p:cNvPr id="27" name="TextBox 26"/>
+          <p:cNvSpPr txBox="1"/>
+          <p:nvPr/>
+        </p:nvSpPr>
+        <p:spPr>
+          <a:xfrm>
+            <a:off x="813816" y="3520439"/>
+            <a:ext cx="868680" cy="384048"/>
+          </a:xfrm>
+          <a:prstGeom prst="rect">
+            <a:avLst/>
+          </a:prstGeom>
+          <a:noFill/>
+        </p:spPr>
+        <p:txBody>
+          <a:bodyPr wrap="square" lIns="0" rIns="0" tIns="0" bIns="0" anchor="t">
+            <a:spAutoFit/>
+          </a:bodyPr>
+          <a:lstStyle/>
+          <a:p>
+            <a:pPr algn="l">
+              <a:lnSpc>
+                <a:spcPct val="115000"/>
+              </a:lnSpc>
+            </a:pPr>
+            <a:r>
+              <a:rPr sz="1250" b="0">
+                <a:solidFill>
+                  <a:srgbClr val="ECF1F6"/>
+                </a:solidFill>
+                <a:latin typeface="맑은 고딕"/>
+                <a:ea typeface="맑은 고딕"/>
+                <a:cs typeface="맑은 고딕"/>
+              </a:rPr>
+              <a:t>2주차</a:t>
+            </a:r>
+          </a:p>
+        </p:txBody>
+      </p:sp>
+      <p:sp>
+        <p:nvSpPr>
+          <p:cNvPr id="28" name="TextBox 27"/>
+          <p:cNvSpPr txBox="1"/>
+          <p:nvPr/>
+        </p:nvSpPr>
+        <p:spPr>
+          <a:xfrm>
+            <a:off x="1865376" y="3520439"/>
+            <a:ext cx="2194560" cy="384048"/>
+          </a:xfrm>
+          <a:prstGeom prst="rect">
+            <a:avLst/>
+          </a:prstGeom>
+          <a:noFill/>
+        </p:spPr>
+        <p:txBody>
+          <a:bodyPr wrap="square" lIns="0" rIns="0" tIns="0" bIns="0" anchor="t">
+            <a:spAutoFit/>
+          </a:bodyPr>
+          <a:lstStyle/>
+          <a:p>
+            <a:pPr algn="l">
+              <a:lnSpc>
+                <a:spcPct val="115000"/>
+              </a:lnSpc>
+            </a:pPr>
+            <a:r>
+              <a:rPr sz="1250" b="0">
+                <a:solidFill>
+                  <a:srgbClr val="ECF1F6"/>
+                </a:solidFill>
+                <a:latin typeface="맑은 고딕"/>
+                <a:ea typeface="맑은 고딕"/>
+                <a:cs typeface="맑은 고딕"/>
+              </a:rPr>
+              <a:t>라우팅 실제 적용</a:t>
+            </a:r>
+          </a:p>
+        </p:txBody>
+      </p:sp>
+      <p:sp>
+        <p:nvSpPr>
+          <p:cNvPr id="29" name="TextBox 28"/>
+          <p:cNvSpPr txBox="1"/>
+          <p:nvPr/>
+        </p:nvSpPr>
+        <p:spPr>
+          <a:xfrm>
+            <a:off x="4242816" y="3520439"/>
+            <a:ext cx="3017520" cy="384048"/>
+          </a:xfrm>
+          <a:prstGeom prst="rect">
+            <a:avLst/>
+          </a:prstGeom>
+          <a:noFill/>
+        </p:spPr>
+        <p:txBody>
+          <a:bodyPr wrap="square" lIns="0" rIns="0" tIns="0" bIns="0" anchor="t">
+            <a:spAutoFit/>
+          </a:bodyPr>
+          <a:lstStyle/>
+          <a:p>
+            <a:pPr algn="l">
+              <a:lnSpc>
+                <a:spcPct val="115000"/>
+              </a:lnSpc>
+            </a:pPr>
+            <a:r>
+              <a:rPr sz="1250" b="0">
+                <a:solidFill>
+                  <a:srgbClr val="ECF1F6"/>
+                </a:solidFill>
+                <a:latin typeface="맑은 고딕"/>
+                <a:ea typeface="맑은 고딕"/>
+                <a:cs typeface="맑은 고딕"/>
+              </a:rPr>
+              <a:t>툴·설명부터 소형으로</a:t>
+            </a:r>
+          </a:p>
+        </p:txBody>
+      </p:sp>
+      <p:sp>
+        <p:nvSpPr>
+          <p:cNvPr id="30" name="TextBox 29"/>
+          <p:cNvSpPr txBox="1"/>
+          <p:nvPr/>
+        </p:nvSpPr>
+        <p:spPr>
+          <a:xfrm>
+            <a:off x="7443216" y="3520439"/>
+            <a:ext cx="2286000" cy="384048"/>
+          </a:xfrm>
+          <a:prstGeom prst="rect">
+            <a:avLst/>
+          </a:prstGeom>
+          <a:noFill/>
+        </p:spPr>
+        <p:txBody>
+          <a:bodyPr wrap="square" lIns="0" rIns="0" tIns="0" bIns="0" anchor="t">
+            <a:spAutoFit/>
+          </a:bodyPr>
+          <a:lstStyle/>
+          <a:p>
+            <a:pPr algn="l">
+              <a:lnSpc>
+                <a:spcPct val="115000"/>
+              </a:lnSpc>
+            </a:pPr>
+            <a:r>
+              <a:rPr sz="1250" b="1">
+                <a:solidFill>
+                  <a:srgbClr val="36D399"/>
+                </a:solidFill>
+                <a:latin typeface="맑은 고딕"/>
+                <a:ea typeface="맑은 고딕"/>
+                <a:cs typeface="맑은 고딕"/>
+              </a:rPr>
+              <a:t>−49~84%</a:t>
+            </a:r>
+          </a:p>
+        </p:txBody>
+      </p:sp>
+      <p:sp>
+        <p:nvSpPr>
+          <p:cNvPr id="31" name="TextBox 30"/>
+          <p:cNvSpPr txBox="1"/>
+          <p:nvPr/>
+        </p:nvSpPr>
+        <p:spPr>
+          <a:xfrm>
+            <a:off x="9912096" y="3520439"/>
+            <a:ext cx="1554480" cy="384048"/>
+          </a:xfrm>
+          <a:prstGeom prst="rect">
+            <a:avLst/>
+          </a:prstGeom>
+          <a:noFill/>
+        </p:spPr>
+        <p:txBody>
+          <a:bodyPr wrap="square" lIns="0" rIns="0" tIns="0" bIns="0" anchor="t">
+            <a:spAutoFit/>
+          </a:bodyPr>
+          <a:lstStyle/>
+          <a:p>
+            <a:pPr algn="l">
+              <a:lnSpc>
+                <a:spcPct val="115000"/>
+              </a:lnSpc>
+            </a:pPr>
+            <a:r>
+              <a:rPr sz="1250" b="0">
+                <a:solidFill>
+                  <a:srgbClr val="ECF1F6"/>
+                </a:solidFill>
+                <a:latin typeface="맑은 고딕"/>
+                <a:ea typeface="맑은 고딕"/>
+                <a:cs typeface="맑은 고딕"/>
+              </a:rPr>
+              <a:t>품질 회귀</a:t>
+            </a:r>
+          </a:p>
+        </p:txBody>
+      </p:sp>
+      <p:sp>
+        <p:nvSpPr>
+          <p:cNvPr id="32" name="TextBox 31"/>
+          <p:cNvSpPr txBox="1"/>
+          <p:nvPr/>
+        </p:nvSpPr>
+        <p:spPr>
+          <a:xfrm>
+            <a:off x="813816" y="3904487"/>
+            <a:ext cx="868680" cy="384048"/>
+          </a:xfrm>
+          <a:prstGeom prst="rect">
+            <a:avLst/>
+          </a:prstGeom>
+          <a:noFill/>
+        </p:spPr>
+        <p:txBody>
+          <a:bodyPr wrap="square" lIns="0" rIns="0" tIns="0" bIns="0" anchor="t">
+            <a:spAutoFit/>
+          </a:bodyPr>
+          <a:lstStyle/>
+          <a:p>
+            <a:pPr algn="l">
+              <a:lnSpc>
+                <a:spcPct val="115000"/>
+              </a:lnSpc>
+            </a:pPr>
+            <a:r>
+              <a:rPr sz="1250" b="0">
+                <a:solidFill>
+                  <a:srgbClr val="ECF1F6"/>
+                </a:solidFill>
+                <a:latin typeface="맑은 고딕"/>
+                <a:ea typeface="맑은 고딕"/>
+                <a:cs typeface="맑은 고딕"/>
+              </a:rPr>
+              <a:t>3주차</a:t>
+            </a:r>
+          </a:p>
+        </p:txBody>
+      </p:sp>
+      <p:sp>
+        <p:nvSpPr>
+          <p:cNvPr id="33" name="TextBox 32"/>
+          <p:cNvSpPr txBox="1"/>
+          <p:nvPr/>
+        </p:nvSpPr>
+        <p:spPr>
+          <a:xfrm>
+            <a:off x="1865376" y="3904487"/>
+            <a:ext cx="2194560" cy="384048"/>
+          </a:xfrm>
+          <a:prstGeom prst="rect">
+            <a:avLst/>
+          </a:prstGeom>
+          <a:noFill/>
+        </p:spPr>
+        <p:txBody>
+          <a:bodyPr wrap="square" lIns="0" rIns="0" tIns="0" bIns="0" anchor="t">
+            <a:spAutoFit/>
+          </a:bodyPr>
+          <a:lstStyle/>
+          <a:p>
+            <a:pPr algn="l">
+              <a:lnSpc>
+                <a:spcPct val="115000"/>
+              </a:lnSpc>
+            </a:pPr>
+            <a:r>
+              <a:rPr sz="1250" b="0">
+                <a:solidFill>
+                  <a:srgbClr val="ECF1F6"/>
+                </a:solidFill>
+                <a:latin typeface="맑은 고딕"/>
+                <a:ea typeface="맑은 고딕"/>
+                <a:cs typeface="맑은 고딕"/>
+              </a:rPr>
+              <a:t>세션 리셋 자동화</a:t>
+            </a:r>
+          </a:p>
+        </p:txBody>
+      </p:sp>
+      <p:sp>
+        <p:nvSpPr>
+          <p:cNvPr id="34" name="TextBox 33"/>
+          <p:cNvSpPr txBox="1"/>
+          <p:nvPr/>
+        </p:nvSpPr>
+        <p:spPr>
+          <a:xfrm>
+            <a:off x="4242816" y="3904487"/>
+            <a:ext cx="3017520" cy="384048"/>
+          </a:xfrm>
+          <a:prstGeom prst="rect">
+            <a:avLst/>
+          </a:prstGeom>
+          <a:noFill/>
+        </p:spPr>
+        <p:txBody>
+          <a:bodyPr wrap="square" lIns="0" rIns="0" tIns="0" bIns="0" anchor="t">
+            <a:spAutoFit/>
+          </a:bodyPr>
+          <a:lstStyle/>
+          <a:p>
+            <a:pPr algn="l">
+              <a:lnSpc>
+                <a:spcPct val="115000"/>
+              </a:lnSpc>
+            </a:pPr>
+            <a:r>
+              <a:rPr sz="1250" b="0">
+                <a:solidFill>
+                  <a:srgbClr val="ECF1F6"/>
+                </a:solidFill>
+                <a:latin typeface="맑은 고딕"/>
+                <a:ea typeface="맑은 고딕"/>
+                <a:cs typeface="맑은 고딕"/>
+              </a:rPr>
+              <a:t>반복 감지 → 커밋 → 재시작</a:t>
+            </a:r>
+          </a:p>
+        </p:txBody>
+      </p:sp>
+      <p:sp>
+        <p:nvSpPr>
+          <p:cNvPr id="35" name="TextBox 34"/>
+          <p:cNvSpPr txBox="1"/>
+          <p:nvPr/>
+        </p:nvSpPr>
+        <p:spPr>
+          <a:xfrm>
+            <a:off x="7443216" y="3904487"/>
+            <a:ext cx="2286000" cy="384048"/>
+          </a:xfrm>
+          <a:prstGeom prst="rect">
+            <a:avLst/>
+          </a:prstGeom>
+          <a:noFill/>
+        </p:spPr>
+        <p:txBody>
+          <a:bodyPr wrap="square" lIns="0" rIns="0" tIns="0" bIns="0" anchor="t">
+            <a:spAutoFit/>
+          </a:bodyPr>
+          <a:lstStyle/>
+          <a:p>
+            <a:pPr algn="l">
+              <a:lnSpc>
+                <a:spcPct val="115000"/>
+              </a:lnSpc>
+            </a:pPr>
+            <a:r>
+              <a:rPr sz="1250" b="1">
+                <a:solidFill>
+                  <a:srgbClr val="36D399"/>
+                </a:solidFill>
+                <a:latin typeface="맑은 고딕"/>
+                <a:ea typeface="맑은 고딕"/>
+                <a:cs typeface="맑은 고딕"/>
+              </a:rPr>
+              <a:t>컨텍스트 단가 억제</a:t>
+            </a:r>
+          </a:p>
+        </p:txBody>
+      </p:sp>
+      <p:sp>
+        <p:nvSpPr>
+          <p:cNvPr id="36" name="TextBox 35"/>
+          <p:cNvSpPr txBox="1"/>
+          <p:nvPr/>
+        </p:nvSpPr>
+        <p:spPr>
+          <a:xfrm>
+            <a:off x="9912096" y="3904487"/>
+            <a:ext cx="1554480" cy="384048"/>
+          </a:xfrm>
+          <a:prstGeom prst="rect">
+            <a:avLst/>
+          </a:prstGeom>
+          <a:noFill/>
+        </p:spPr>
+        <p:txBody>
+          <a:bodyPr wrap="square" lIns="0" rIns="0" tIns="0" bIns="0" anchor="t">
+            <a:spAutoFit/>
+          </a:bodyPr>
+          <a:lstStyle/>
+          <a:p>
+            <a:pPr algn="l">
+              <a:lnSpc>
+                <a:spcPct val="115000"/>
+              </a:lnSpc>
+            </a:pPr>
+            <a:r>
+              <a:rPr sz="1250" b="0">
+                <a:solidFill>
+                  <a:srgbClr val="ECF1F6"/>
+                </a:solidFill>
+                <a:latin typeface="맑은 고딕"/>
+                <a:ea typeface="맑은 고딕"/>
+                <a:cs typeface="맑은 고딕"/>
+              </a:rPr>
+              <a:t>맥락 유실</a:t>
+            </a:r>
+          </a:p>
+        </p:txBody>
+      </p:sp>
+      <p:sp>
+        <p:nvSpPr>
+          <p:cNvPr id="37" name="Rectangle 36"/>
+          <p:cNvSpPr/>
+          <p:nvPr/>
+        </p:nvSpPr>
+        <p:spPr>
+          <a:xfrm>
+            <a:off x="685800" y="4206240"/>
+            <a:ext cx="10835640" cy="384048"/>
+          </a:xfrm>
+          <a:prstGeom prst="rect">
+            <a:avLst/>
+          </a:prstGeom>
+          <a:solidFill>
+            <a:srgbClr val="111A24"/>
+          </a:solidFill>
+          <a:ln>
+            <a:noFill/>
+          </a:ln>
+          <a:effectLst/>
+        </p:spPr>
+        <p:style>
+          <a:lnRef idx="1">
+            <a:schemeClr val="accent1"/>
+          </a:lnRef>
+          <a:fillRef idx="3">
+            <a:schemeClr val="accent1"/>
+          </a:fillRef>
+          <a:effectRef idx="2">
+            <a:schemeClr val="accent1"/>
+          </a:effectRef>
+          <a:fontRef idx="minor">
+            <a:schemeClr val="lt1"/>
+          </a:fontRef>
+        </p:style>
+        <p:txBody>
+          <a:bodyPr rtlCol="0" anchor="ctr"/>
+          <a:lstStyle/>
+          <a:p>
+            <a:pPr algn="ctr"/>
+          </a:p>
+        </p:txBody>
+      </p:sp>
+      <p:sp>
+        <p:nvSpPr>
+          <p:cNvPr id="38" name="TextBox 37"/>
+          <p:cNvSpPr txBox="1"/>
+          <p:nvPr/>
+        </p:nvSpPr>
+        <p:spPr>
+          <a:xfrm>
+            <a:off x="813816" y="4288536"/>
+            <a:ext cx="868680" cy="384048"/>
+          </a:xfrm>
+          <a:prstGeom prst="rect">
+            <a:avLst/>
+          </a:prstGeom>
+          <a:noFill/>
+        </p:spPr>
+        <p:txBody>
+          <a:bodyPr wrap="square" lIns="0" rIns="0" tIns="0" bIns="0" anchor="t">
+            <a:spAutoFit/>
+          </a:bodyPr>
+          <a:lstStyle/>
+          <a:p>
+            <a:pPr algn="l">
+              <a:lnSpc>
+                <a:spcPct val="115000"/>
+              </a:lnSpc>
+            </a:pPr>
+            <a:r>
+              <a:rPr sz="1250" b="0">
+                <a:solidFill>
+                  <a:srgbClr val="ECF1F6"/>
+                </a:solidFill>
+                <a:latin typeface="맑은 고딕"/>
+                <a:ea typeface="맑은 고딕"/>
+                <a:cs typeface="맑은 고딕"/>
+              </a:rPr>
+              <a:t>4주차</a:t>
+            </a:r>
+          </a:p>
+        </p:txBody>
+      </p:sp>
+      <p:sp>
+        <p:nvSpPr>
+          <p:cNvPr id="39" name="TextBox 38"/>
+          <p:cNvSpPr txBox="1"/>
+          <p:nvPr/>
+        </p:nvSpPr>
+        <p:spPr>
+          <a:xfrm>
+            <a:off x="1865376" y="4288536"/>
+            <a:ext cx="2194560" cy="384048"/>
+          </a:xfrm>
+          <a:prstGeom prst="rect">
+            <a:avLst/>
+          </a:prstGeom>
+          <a:noFill/>
+        </p:spPr>
+        <p:txBody>
+          <a:bodyPr wrap="square" lIns="0" rIns="0" tIns="0" bIns="0" anchor="t">
+            <a:spAutoFit/>
+          </a:bodyPr>
+          <a:lstStyle/>
+          <a:p>
+            <a:pPr algn="l">
+              <a:lnSpc>
+                <a:spcPct val="115000"/>
+              </a:lnSpc>
+            </a:pPr>
+            <a:r>
+              <a:rPr sz="1250" b="0">
+                <a:solidFill>
+                  <a:srgbClr val="ECF1F6"/>
+                </a:solidFill>
+                <a:latin typeface="맑은 고딕"/>
+                <a:ea typeface="맑은 고딕"/>
+                <a:cs typeface="맑은 고딕"/>
+              </a:rPr>
+              <a:t>배치 도입</a:t>
+            </a:r>
+          </a:p>
+        </p:txBody>
+      </p:sp>
+      <p:sp>
+        <p:nvSpPr>
+          <p:cNvPr id="40" name="TextBox 39"/>
+          <p:cNvSpPr txBox="1"/>
+          <p:nvPr/>
+        </p:nvSpPr>
+        <p:spPr>
+          <a:xfrm>
+            <a:off x="4242816" y="4288536"/>
+            <a:ext cx="3017520" cy="384048"/>
+          </a:xfrm>
+          <a:prstGeom prst="rect">
+            <a:avLst/>
+          </a:prstGeom>
+          <a:noFill/>
+        </p:spPr>
+        <p:txBody>
+          <a:bodyPr wrap="square" lIns="0" rIns="0" tIns="0" bIns="0" anchor="t">
+            <a:spAutoFit/>
+          </a:bodyPr>
+          <a:lstStyle/>
+          <a:p>
+            <a:pPr algn="l">
+              <a:lnSpc>
+                <a:spcPct val="115000"/>
+              </a:lnSpc>
+            </a:pPr>
+            <a:r>
+              <a:rPr sz="1250" b="0">
+                <a:solidFill>
+                  <a:srgbClr val="ECF1F6"/>
+                </a:solidFill>
+                <a:latin typeface="맑은 고딕"/>
+                <a:ea typeface="맑은 고딕"/>
+                <a:cs typeface="맑은 고딕"/>
+              </a:rPr>
+              <a:t>마감 없는 대량 작업만</a:t>
+            </a:r>
+          </a:p>
+        </p:txBody>
+      </p:sp>
+      <p:sp>
+        <p:nvSpPr>
+          <p:cNvPr id="41" name="TextBox 40"/>
+          <p:cNvSpPr txBox="1"/>
+          <p:nvPr/>
+        </p:nvSpPr>
+        <p:spPr>
+          <a:xfrm>
+            <a:off x="7443216" y="4288536"/>
+            <a:ext cx="2286000" cy="384048"/>
+          </a:xfrm>
+          <a:prstGeom prst="rect">
+            <a:avLst/>
+          </a:prstGeom>
+          <a:noFill/>
+        </p:spPr>
+        <p:txBody>
+          <a:bodyPr wrap="square" lIns="0" rIns="0" tIns="0" bIns="0" anchor="t">
+            <a:spAutoFit/>
+          </a:bodyPr>
+          <a:lstStyle/>
+          <a:p>
+            <a:pPr algn="l">
+              <a:lnSpc>
+                <a:spcPct val="115000"/>
+              </a:lnSpc>
+            </a:pPr>
+            <a:r>
+              <a:rPr sz="1250" b="1">
+                <a:solidFill>
+                  <a:srgbClr val="36D399"/>
+                </a:solidFill>
+                <a:latin typeface="맑은 고딕"/>
+                <a:ea typeface="맑은 고딕"/>
+                <a:cs typeface="맑은 고딕"/>
+              </a:rPr>
+              <a:t>−50%</a:t>
+            </a:r>
+          </a:p>
+        </p:txBody>
+      </p:sp>
+      <p:sp>
+        <p:nvSpPr>
+          <p:cNvPr id="42" name="TextBox 41"/>
+          <p:cNvSpPr txBox="1"/>
+          <p:nvPr/>
+        </p:nvSpPr>
+        <p:spPr>
+          <a:xfrm>
+            <a:off x="9912096" y="4288536"/>
+            <a:ext cx="1554480" cy="384048"/>
+          </a:xfrm>
+          <a:prstGeom prst="rect">
+            <a:avLst/>
+          </a:prstGeom>
+          <a:noFill/>
+        </p:spPr>
+        <p:txBody>
+          <a:bodyPr wrap="square" lIns="0" rIns="0" tIns="0" bIns="0" anchor="t">
+            <a:spAutoFit/>
+          </a:bodyPr>
+          <a:lstStyle/>
+          <a:p>
+            <a:pPr algn="l">
+              <a:lnSpc>
+                <a:spcPct val="115000"/>
+              </a:lnSpc>
+            </a:pPr>
+            <a:r>
+              <a:rPr sz="1250" b="0">
+                <a:solidFill>
+                  <a:srgbClr val="ECF1F6"/>
+                </a:solidFill>
+                <a:latin typeface="맑은 고딕"/>
+                <a:ea typeface="맑은 고딕"/>
+                <a:cs typeface="맑은 고딕"/>
+              </a:rPr>
+              <a:t>expired</a:t>
+            </a:r>
+          </a:p>
+        </p:txBody>
+      </p:sp>
+      <p:sp>
+        <p:nvSpPr>
+          <p:cNvPr id="43" name="TextBox 42"/>
+          <p:cNvSpPr txBox="1"/>
+          <p:nvPr/>
+        </p:nvSpPr>
+        <p:spPr>
+          <a:xfrm>
+            <a:off x="813816" y="4672583"/>
+            <a:ext cx="868680" cy="384048"/>
+          </a:xfrm>
+          <a:prstGeom prst="rect">
+            <a:avLst/>
+          </a:prstGeom>
+          <a:noFill/>
+        </p:spPr>
+        <p:txBody>
+          <a:bodyPr wrap="square" lIns="0" rIns="0" tIns="0" bIns="0" anchor="t">
+            <a:spAutoFit/>
+          </a:bodyPr>
+          <a:lstStyle/>
+          <a:p>
+            <a:pPr algn="l">
+              <a:lnSpc>
+                <a:spcPct val="115000"/>
+              </a:lnSpc>
+            </a:pPr>
+            <a:r>
+              <a:rPr sz="1250" b="0">
+                <a:solidFill>
+                  <a:srgbClr val="ECF1F6"/>
+                </a:solidFill>
+                <a:latin typeface="맑은 고딕"/>
+                <a:ea typeface="맑은 고딕"/>
+                <a:cs typeface="맑은 고딕"/>
+              </a:rPr>
+              <a:t>보류</a:t>
+            </a:r>
+          </a:p>
+        </p:txBody>
+      </p:sp>
+      <p:sp>
+        <p:nvSpPr>
+          <p:cNvPr id="44" name="TextBox 43"/>
+          <p:cNvSpPr txBox="1"/>
+          <p:nvPr/>
+        </p:nvSpPr>
+        <p:spPr>
+          <a:xfrm>
+            <a:off x="1865376" y="4672583"/>
+            <a:ext cx="2194560" cy="384048"/>
+          </a:xfrm>
+          <a:prstGeom prst="rect">
+            <a:avLst/>
+          </a:prstGeom>
+          <a:noFill/>
+        </p:spPr>
+        <p:txBody>
+          <a:bodyPr wrap="square" lIns="0" rIns="0" tIns="0" bIns="0" anchor="t">
+            <a:spAutoFit/>
+          </a:bodyPr>
+          <a:lstStyle/>
+          <a:p>
+            <a:pPr algn="l">
+              <a:lnSpc>
+                <a:spcPct val="115000"/>
+              </a:lnSpc>
+            </a:pPr>
+            <a:r>
+              <a:rPr sz="1250" b="0">
+                <a:solidFill>
+                  <a:srgbClr val="ECF1F6"/>
+                </a:solidFill>
+                <a:latin typeface="맑은 고딕"/>
+                <a:ea typeface="맑은 고딕"/>
+                <a:cs typeface="맑은 고딕"/>
+              </a:rPr>
+              <a:t>웹 세션 자동 조작</a:t>
+            </a:r>
+          </a:p>
+        </p:txBody>
+      </p:sp>
+      <p:sp>
+        <p:nvSpPr>
+          <p:cNvPr id="45" name="TextBox 44"/>
+          <p:cNvSpPr txBox="1"/>
+          <p:nvPr/>
+        </p:nvSpPr>
+        <p:spPr>
+          <a:xfrm>
+            <a:off x="4242816" y="4672583"/>
+            <a:ext cx="3017520" cy="384048"/>
+          </a:xfrm>
+          <a:prstGeom prst="rect">
+            <a:avLst/>
+          </a:prstGeom>
+          <a:noFill/>
+        </p:spPr>
+        <p:txBody>
+          <a:bodyPr wrap="square" lIns="0" rIns="0" tIns="0" bIns="0" anchor="t">
+            <a:spAutoFit/>
+          </a:bodyPr>
+          <a:lstStyle/>
+          <a:p>
+            <a:pPr algn="l">
+              <a:lnSpc>
+                <a:spcPct val="115000"/>
+              </a:lnSpc>
+            </a:pPr>
+            <a:r>
+              <a:rPr sz="1250" b="0">
+                <a:solidFill>
+                  <a:srgbClr val="ECF1F6"/>
+                </a:solidFill>
+                <a:latin typeface="맑은 고딕"/>
+                <a:ea typeface="맑은 고딕"/>
+                <a:cs typeface="맑은 고딕"/>
+              </a:rPr>
+              <a:t>법무 확인 전까지 수동</a:t>
+            </a:r>
+          </a:p>
+        </p:txBody>
+      </p:sp>
+      <p:sp>
+        <p:nvSpPr>
+          <p:cNvPr id="46" name="TextBox 45"/>
+          <p:cNvSpPr txBox="1"/>
+          <p:nvPr/>
+        </p:nvSpPr>
+        <p:spPr>
+          <a:xfrm>
+            <a:off x="7443216" y="4672583"/>
+            <a:ext cx="2286000" cy="384048"/>
+          </a:xfrm>
+          <a:prstGeom prst="rect">
+            <a:avLst/>
+          </a:prstGeom>
+          <a:noFill/>
+        </p:spPr>
+        <p:txBody>
+          <a:bodyPr wrap="square" lIns="0" rIns="0" tIns="0" bIns="0" anchor="t">
+            <a:spAutoFit/>
+          </a:bodyPr>
+          <a:lstStyle/>
+          <a:p>
+            <a:pPr algn="l">
+              <a:lnSpc>
+                <a:spcPct val="115000"/>
+              </a:lnSpc>
+            </a:pPr>
+            <a:r>
+              <a:rPr sz="1250" b="1">
+                <a:solidFill>
+                  <a:srgbClr val="FFB04D"/>
+                </a:solidFill>
+                <a:latin typeface="맑은 고딕"/>
+                <a:ea typeface="맑은 고딕"/>
+                <a:cs typeface="맑은 고딕"/>
+              </a:rPr>
+              <a:t>종량 0원</a:t>
+            </a:r>
+          </a:p>
+        </p:txBody>
+      </p:sp>
+      <p:sp>
+        <p:nvSpPr>
+          <p:cNvPr id="47" name="TextBox 46"/>
+          <p:cNvSpPr txBox="1"/>
+          <p:nvPr/>
+        </p:nvSpPr>
+        <p:spPr>
+          <a:xfrm>
+            <a:off x="9912096" y="4672583"/>
+            <a:ext cx="1554480" cy="384048"/>
+          </a:xfrm>
+          <a:prstGeom prst="rect">
+            <a:avLst/>
+          </a:prstGeom>
+          <a:noFill/>
+        </p:spPr>
+        <p:txBody>
+          <a:bodyPr wrap="square" lIns="0" rIns="0" tIns="0" bIns="0" anchor="t">
+            <a:spAutoFit/>
+          </a:bodyPr>
+          <a:lstStyle/>
+          <a:p>
+            <a:pPr algn="l">
+              <a:lnSpc>
+                <a:spcPct val="115000"/>
+              </a:lnSpc>
+            </a:pPr>
+            <a:r>
+              <a:rPr sz="1250" b="0">
+                <a:solidFill>
+                  <a:srgbClr val="ECF1F6"/>
+                </a:solidFill>
+                <a:latin typeface="맑은 고딕"/>
+                <a:ea typeface="맑은 고딕"/>
+                <a:cs typeface="맑은 고딕"/>
+              </a:rPr>
+              <a:t>약관</a:t>
+            </a:r>
+          </a:p>
+        </p:txBody>
+      </p:sp>
+      <p:sp>
+        <p:nvSpPr>
+          <p:cNvPr id="48" name="Rounded Rectangle 47"/>
+          <p:cNvSpPr/>
+          <p:nvPr/>
+        </p:nvSpPr>
+        <p:spPr>
+          <a:xfrm>
+            <a:off x="685800" y="5212080"/>
+            <a:ext cx="10835640" cy="868680"/>
+          </a:xfrm>
+          <a:prstGeom prst="roundRect">
+            <a:avLst>
+              <a:gd name="adj" fmla="val 5000"/>
+            </a:avLst>
+          </a:prstGeom>
+          <a:solidFill>
+            <a:srgbClr val="18222E"/>
+          </a:solidFill>
+          <a:ln>
+            <a:noFill/>
+          </a:ln>
+          <a:effectLst/>
+        </p:spPr>
+        <p:style>
+          <a:lnRef idx="1">
+            <a:schemeClr val="accent1"/>
+          </a:lnRef>
+          <a:fillRef idx="3">
+            <a:schemeClr val="accent1"/>
+          </a:fillRef>
+          <a:effectRef idx="2">
+            <a:schemeClr val="accent1"/>
+          </a:effectRef>
+          <a:fontRef idx="minor">
+            <a:schemeClr val="lt1"/>
+          </a:fontRef>
+        </p:style>
+        <p:txBody>
+          <a:bodyPr rtlCol="0" anchor="ctr"/>
+          <a:lstStyle/>
+          <a:p>
+            <a:pPr algn="ctr"/>
+          </a:p>
+        </p:txBody>
+      </p:sp>
+      <p:sp>
+        <p:nvSpPr>
+          <p:cNvPr id="49" name="Rectangle 48"/>
+          <p:cNvSpPr/>
+          <p:nvPr/>
+        </p:nvSpPr>
+        <p:spPr>
+          <a:xfrm>
+            <a:off x="685800" y="5212080"/>
+            <a:ext cx="50292" cy="868680"/>
+          </a:xfrm>
+          <a:prstGeom prst="rect">
+            <a:avLst/>
+          </a:prstGeom>
+          <a:solidFill>
+            <a:srgbClr val="36D399"/>
+          </a:solidFill>
+          <a:ln>
+            <a:noFill/>
+          </a:ln>
+          <a:effectLst/>
+        </p:spPr>
+        <p:style>
+          <a:lnRef idx="1">
+            <a:schemeClr val="accent1"/>
+          </a:lnRef>
+          <a:fillRef idx="3">
+            <a:schemeClr val="accent1"/>
+          </a:fillRef>
+          <a:effectRef idx="2">
+            <a:schemeClr val="accent1"/>
+          </a:effectRef>
+          <a:fontRef idx="minor">
+            <a:schemeClr val="lt1"/>
+          </a:fontRef>
+        </p:style>
+        <p:txBody>
+          <a:bodyPr rtlCol="0" anchor="ctr"/>
+          <a:lstStyle/>
+          <a:p>
+            <a:pPr algn="ctr"/>
+          </a:p>
+        </p:txBody>
+      </p:sp>
+      <p:sp>
+        <p:nvSpPr>
+          <p:cNvPr id="50" name="TextBox 49"/>
+          <p:cNvSpPr txBox="1"/>
+          <p:nvPr/>
+        </p:nvSpPr>
+        <p:spPr>
+          <a:xfrm>
+            <a:off x="960120" y="5358384"/>
+            <a:ext cx="10424160" cy="640080"/>
+          </a:xfrm>
+          <a:prstGeom prst="rect">
+            <a:avLst/>
+          </a:prstGeom>
+          <a:noFill/>
+        </p:spPr>
+        <p:txBody>
+          <a:bodyPr wrap="square" lIns="0" rIns="0" tIns="0" bIns="0" anchor="t">
+            <a:spAutoFit/>
+          </a:bodyPr>
+          <a:lstStyle/>
+          <a:p>
+            <a:pPr algn="l">
+              <a:lnSpc>
+                <a:spcPct val="115000"/>
+              </a:lnSpc>
+            </a:pPr>
+            <a:r>
+              <a:rPr sz="1500" b="1">
+                <a:solidFill>
+                  <a:srgbClr val="36D399"/>
+                </a:solidFill>
+                <a:latin typeface="맑은 고딕"/>
+                <a:ea typeface="맑은 고딕"/>
+                <a:cs typeface="맑은 고딕"/>
+              </a:rPr>
+              <a:t>측정 없이 켜지 마라.</a:t>
+            </a:r>
+          </a:p>
+          <a:p>
+            <a:pPr algn="l">
+              <a:lnSpc>
+                <a:spcPct val="115000"/>
+              </a:lnSpc>
+              <a:spcBef>
+                <a:spcPts val="500"/>
+              </a:spcBef>
+            </a:pPr>
+            <a:r>
+              <a:rPr sz="1300" b="0">
+                <a:solidFill>
+                  <a:srgbClr val="93A4B5"/>
+                </a:solidFill>
+                <a:latin typeface="맑은 고딕"/>
+                <a:ea typeface="맑은 고딕"/>
+                <a:cs typeface="맑은 고딕"/>
+              </a:rPr>
+              <a:t>1주차에 로그만 남기는 이유가 이것이다. 라우팅 전후의 요청당 비용과 리워크 턴 수를 같이 재야, 절감이 진짜인지 품질을 팔아 산 것인지 구분된다.</a:t>
+            </a:r>
+          </a:p>
+        </p:txBody>
+      </p:sp>
+      <p:sp>
+        <p:nvSpPr>
+          <p:cNvPr id="51" name="TextBox 50"/>
+          <p:cNvSpPr txBox="1"/>
+          <p:nvPr/>
+        </p:nvSpPr>
+        <p:spPr>
+          <a:xfrm>
+            <a:off x="685800" y="6263640"/>
+            <a:ext cx="10789920" cy="320040"/>
+          </a:xfrm>
+          <a:prstGeom prst="rect">
+            <a:avLst/>
+          </a:prstGeom>
+          <a:noFill/>
+        </p:spPr>
+        <p:txBody>
+          <a:bodyPr wrap="square" lIns="0" rIns="0" tIns="0" bIns="0" anchor="t">
+            <a:spAutoFit/>
+          </a:bodyPr>
+          <a:lstStyle/>
+          <a:p>
+            <a:pPr algn="l">
+              <a:lnSpc>
+                <a:spcPct val="115000"/>
+              </a:lnSpc>
+            </a:pPr>
+            <a:r>
+              <a:rPr sz="1100" b="0">
+                <a:solidFill>
+                  <a:srgbClr val="93A4B5"/>
+                </a:solidFill>
+                <a:latin typeface="맑은 고딕"/>
+                <a:ea typeface="맑은 고딕"/>
+                <a:cs typeface="맑은 고딕"/>
+              </a:rPr>
+              <a:t>되돌릴 수 있게 만들어라 — route()가 항상 상위 모델을 반환하도록 하는 킬 스위치 하나면 롤백이 끝난다.</a:t>
+            </a:r>
+          </a:p>
+        </p:txBody>
+      </p:sp>
+    </p:spTree>
+  </p:cSld>
+  <p:clrMapOvr>
+    <a:masterClrMapping/>
+  </p:clrMapOvr>
+</p:sld>
+</file>
+
+<file path=ppt/slides/slide14.xml><?xml version="1.0" encoding="utf-8"?>
+<p:sld xmlns:a="http://schemas.openxmlformats.org/drawingml/2006/main" xmlns:p="http://schemas.openxmlformats.org/presentationml/2006/main" xmlns:r="http://schemas.openxmlformats.org/officeDocument/2006/relationships">
+  <p:cSld>
+    <p:spTree>
+      <p:nvGrpSpPr>
+        <p:cNvPr id="1" name=""/>
+        <p:cNvGrpSpPr/>
+        <p:nvPr/>
+      </p:nvGrpSpPr>
+      <p:grpSpPr/>
+      <p:sp>
+        <p:nvSpPr>
+          <p:cNvPr id="2" name="Rectangle 1"/>
+          <p:cNvSpPr/>
+          <p:nvPr/>
+        </p:nvSpPr>
+        <p:spPr>
+          <a:xfrm>
+            <a:off x="0" y="0"/>
+            <a:ext cx="12191695" cy="6858000"/>
+          </a:xfrm>
+          <a:prstGeom prst="rect">
+            <a:avLst/>
+          </a:prstGeom>
+          <a:solidFill>
+            <a:srgbClr val="0E141B"/>
+          </a:solidFill>
+          <a:ln>
+            <a:noFill/>
+          </a:ln>
+          <a:effectLst/>
+        </p:spPr>
+        <p:style>
+          <a:lnRef idx="1">
+            <a:schemeClr val="accent1"/>
+          </a:lnRef>
+          <a:fillRef idx="3">
+            <a:schemeClr val="accent1"/>
+          </a:fillRef>
+          <a:effectRef idx="2">
+            <a:schemeClr val="accent1"/>
+          </a:effectRef>
+          <a:fontRef idx="minor">
+            <a:schemeClr val="lt1"/>
+          </a:fontRef>
+        </p:style>
+        <p:txBody>
+          <a:bodyPr rtlCol="0" anchor="ctr"/>
+          <a:lstStyle/>
+          <a:p>
+            <a:pPr algn="ctr"/>
+          </a:p>
+        </p:txBody>
+      </p:sp>
+      <p:sp>
+        <p:nvSpPr>
+          <p:cNvPr id="3" name="Rectangle 2"/>
+          <p:cNvSpPr/>
+          <p:nvPr/>
+        </p:nvSpPr>
+        <p:spPr>
+          <a:xfrm>
+            <a:off x="0" y="0"/>
+            <a:ext cx="118872" cy="6858000"/>
+          </a:xfrm>
+          <a:prstGeom prst="rect">
+            <a:avLst/>
+          </a:prstGeom>
+          <a:solidFill>
+            <a:srgbClr val="36D399"/>
+          </a:solidFill>
+          <a:ln>
+            <a:noFill/>
+          </a:ln>
+          <a:effectLst/>
+        </p:spPr>
+        <p:style>
+          <a:lnRef idx="1">
+            <a:schemeClr val="accent1"/>
+          </a:lnRef>
+          <a:fillRef idx="3">
+            <a:schemeClr val="accent1"/>
+          </a:fillRef>
+          <a:effectRef idx="2">
+            <a:schemeClr val="accent1"/>
+          </a:effectRef>
+          <a:fontRef idx="minor">
+            <a:schemeClr val="lt1"/>
+          </a:fontRef>
+        </p:style>
+        <p:txBody>
+          <a:bodyPr rtlCol="0" anchor="ctr"/>
+          <a:lstStyle/>
+          <a:p>
+            <a:pPr algn="ctr"/>
+          </a:p>
+        </p:txBody>
+      </p:sp>
+      <p:sp>
+        <p:nvSpPr>
+          <p:cNvPr id="4" name="TextBox 3"/>
+          <p:cNvSpPr txBox="1"/>
+          <p:nvPr/>
+        </p:nvSpPr>
+        <p:spPr>
+          <a:xfrm>
+            <a:off x="685800" y="384048"/>
+            <a:ext cx="9144000" cy="292608"/>
+          </a:xfrm>
+          <a:prstGeom prst="rect">
+            <a:avLst/>
+          </a:prstGeom>
+          <a:noFill/>
+        </p:spPr>
+        <p:txBody>
+          <a:bodyPr wrap="square" lIns="0" rIns="0" tIns="0" bIns="0" anchor="t">
+            <a:spAutoFit/>
+          </a:bodyPr>
+          <a:lstStyle/>
+          <a:p>
+            <a:pPr algn="l">
+              <a:lnSpc>
+                <a:spcPct val="115000"/>
+              </a:lnSpc>
+            </a:pPr>
+            <a:r>
+              <a:rPr sz="1300" b="1">
+                <a:solidFill>
+                  <a:srgbClr val="36D399"/>
+                </a:solidFill>
+                <a:latin typeface="맑은 고딕"/>
+                <a:ea typeface="맑은 고딕"/>
+                <a:cs typeface="맑은 고딕"/>
+              </a:rPr>
+              <a:t>FOLLOW-UP · 마무리</a:t>
+            </a:r>
+          </a:p>
+        </p:txBody>
+      </p:sp>
+      <p:sp>
+        <p:nvSpPr>
+          <p:cNvPr id="5" name="TextBox 4"/>
+          <p:cNvSpPr txBox="1"/>
+          <p:nvPr/>
+        </p:nvSpPr>
+        <p:spPr>
+          <a:xfrm>
+            <a:off x="685800" y="685800"/>
+            <a:ext cx="10881360" cy="822960"/>
+          </a:xfrm>
+          <a:prstGeom prst="rect">
+            <a:avLst/>
+          </a:prstGeom>
+          <a:noFill/>
+        </p:spPr>
+        <p:txBody>
+          <a:bodyPr wrap="square" lIns="0" rIns="0" tIns="0" bIns="0" anchor="t">
+            <a:spAutoFit/>
+          </a:bodyPr>
+          <a:lstStyle/>
+          <a:p>
+            <a:pPr algn="l">
+              <a:lnSpc>
+                <a:spcPct val="115000"/>
+              </a:lnSpc>
+            </a:pPr>
+            <a:r>
+              <a:rPr sz="3200" b="1">
+                <a:solidFill>
+                  <a:srgbClr val="ECF1F6"/>
+                </a:solidFill>
+                <a:latin typeface="맑은 고딕"/>
+                <a:ea typeface="맑은 고딕"/>
+                <a:cs typeface="맑은 고딕"/>
+              </a:rPr>
+              <a:t>정리</a:t>
+            </a:r>
+          </a:p>
+        </p:txBody>
+      </p:sp>
+      <p:sp>
+        <p:nvSpPr>
+          <p:cNvPr id="6" name="Rectangle 5"/>
+          <p:cNvSpPr/>
+          <p:nvPr/>
+        </p:nvSpPr>
+        <p:spPr>
+          <a:xfrm>
+            <a:off x="685800" y="1572768"/>
+            <a:ext cx="1371600" cy="41148"/>
+          </a:xfrm>
+          <a:prstGeom prst="rect">
+            <a:avLst/>
+          </a:prstGeom>
+          <a:solidFill>
+            <a:srgbClr val="36D399"/>
+          </a:solidFill>
+          <a:ln>
+            <a:noFill/>
+          </a:ln>
+          <a:effectLst/>
+        </p:spPr>
+        <p:style>
+          <a:lnRef idx="1">
+            <a:schemeClr val="accent1"/>
+          </a:lnRef>
+          <a:fillRef idx="3">
+            <a:schemeClr val="accent1"/>
+          </a:fillRef>
+          <a:effectRef idx="2">
+            <a:schemeClr val="accent1"/>
+          </a:effectRef>
+          <a:fontRef idx="minor">
+            <a:schemeClr val="lt1"/>
+          </a:fontRef>
+        </p:style>
+        <p:txBody>
+          <a:bodyPr rtlCol="0" anchor="ctr"/>
+          <a:lstStyle/>
+          <a:p>
+            <a:pPr algn="ctr"/>
+          </a:p>
+        </p:txBody>
+      </p:sp>
+      <p:sp>
+        <p:nvSpPr>
+          <p:cNvPr id="7" name="TextBox 6"/>
+          <p:cNvSpPr txBox="1"/>
+          <p:nvPr/>
+        </p:nvSpPr>
+        <p:spPr>
+          <a:xfrm>
+            <a:off x="11155680" y="6355080"/>
+            <a:ext cx="822960" cy="274320"/>
+          </a:xfrm>
+          <a:prstGeom prst="rect">
+            <a:avLst/>
+          </a:prstGeom>
+          <a:noFill/>
+        </p:spPr>
+        <p:txBody>
+          <a:bodyPr wrap="square" lIns="0" rIns="0" tIns="0" bIns="0" anchor="t">
+            <a:spAutoFit/>
+          </a:bodyPr>
+          <a:lstStyle/>
+          <a:p>
+            <a:pPr algn="r">
+              <a:lnSpc>
+                <a:spcPct val="115000"/>
+              </a:lnSpc>
+            </a:pPr>
+            <a:r>
+              <a:rPr sz="1100" b="0">
+                <a:solidFill>
+                  <a:srgbClr val="93A4B5"/>
+                </a:solidFill>
+                <a:latin typeface="맑은 고딕"/>
+                <a:ea typeface="맑은 고딕"/>
+                <a:cs typeface="맑은 고딕"/>
+              </a:rPr>
+              <a:t>14</a:t>
+            </a:r>
+          </a:p>
+        </p:txBody>
+      </p:sp>
+      <p:sp>
+        <p:nvSpPr>
+          <p:cNvPr id="8" name="Rectangle 7"/>
+          <p:cNvSpPr/>
+          <p:nvPr/>
+        </p:nvSpPr>
+        <p:spPr>
+          <a:xfrm>
+            <a:off x="777240" y="2066543"/>
+            <a:ext cx="109728" cy="109728"/>
+          </a:xfrm>
+          <a:prstGeom prst="rect">
+            <a:avLst/>
+          </a:prstGeom>
+          <a:solidFill>
+            <a:srgbClr val="36D399"/>
+          </a:solidFill>
+          <a:ln>
+            <a:noFill/>
+          </a:ln>
+          <a:effectLst/>
+        </p:spPr>
+        <p:style>
+          <a:lnRef idx="1">
+            <a:schemeClr val="accent1"/>
+          </a:lnRef>
+          <a:fillRef idx="3">
+            <a:schemeClr val="accent1"/>
+          </a:fillRef>
+          <a:effectRef idx="2">
+            <a:schemeClr val="accent1"/>
+          </a:effectRef>
+          <a:fontRef idx="minor">
+            <a:schemeClr val="lt1"/>
+          </a:fontRef>
+        </p:style>
+        <p:txBody>
+          <a:bodyPr rtlCol="0" anchor="ctr"/>
+          <a:lstStyle/>
+          <a:p>
+            <a:pPr algn="ctr"/>
+          </a:p>
+        </p:txBody>
+      </p:sp>
+      <p:sp>
+        <p:nvSpPr>
+          <p:cNvPr id="9" name="TextBox 8"/>
+          <p:cNvSpPr txBox="1"/>
+          <p:nvPr/>
+        </p:nvSpPr>
+        <p:spPr>
+          <a:xfrm>
+            <a:off x="1069848" y="1965960"/>
+            <a:ext cx="10405872" cy="365760"/>
+          </a:xfrm>
+          <a:prstGeom prst="rect">
+            <a:avLst/>
+          </a:prstGeom>
+          <a:noFill/>
+        </p:spPr>
+        <p:txBody>
+          <a:bodyPr wrap="square" lIns="0" rIns="0" tIns="0" bIns="0" anchor="t">
+            <a:spAutoFit/>
+          </a:bodyPr>
+          <a:lstStyle/>
+          <a:p>
+            <a:pPr algn="l">
+              <a:lnSpc>
+                <a:spcPct val="115000"/>
+              </a:lnSpc>
+            </a:pPr>
+            <a:r>
+              <a:rPr sz="1650" b="1">
+                <a:solidFill>
+                  <a:srgbClr val="ECF1F6"/>
+                </a:solidFill>
+                <a:latin typeface="맑은 고딕"/>
+                <a:ea typeface="맑은 고딕"/>
+                <a:cs typeface="맑은 고딕"/>
+              </a:rPr>
+              <a:t>작은 모델은 답을 만드는 게 아니라 교통을 정리한다</a:t>
+            </a:r>
+          </a:p>
+        </p:txBody>
+      </p:sp>
+      <p:sp>
+        <p:nvSpPr>
+          <p:cNvPr id="10" name="TextBox 9"/>
+          <p:cNvSpPr txBox="1"/>
+          <p:nvPr/>
+        </p:nvSpPr>
+        <p:spPr>
+          <a:xfrm>
+            <a:off x="1069848" y="2240279"/>
+            <a:ext cx="10405872" cy="365760"/>
+          </a:xfrm>
+          <a:prstGeom prst="rect">
+            <a:avLst/>
+          </a:prstGeom>
+          <a:noFill/>
+        </p:spPr>
+        <p:txBody>
+          <a:bodyPr wrap="square" lIns="0" rIns="0" tIns="0" bIns="0" anchor="t">
+            <a:spAutoFit/>
+          </a:bodyPr>
+          <a:lstStyle/>
+          <a:p>
+            <a:pPr algn="l">
+              <a:lnSpc>
+                <a:spcPct val="115000"/>
+              </a:lnSpc>
+            </a:pPr>
+            <a:r>
+              <a:rPr sz="1350" b="0">
+                <a:solidFill>
+                  <a:srgbClr val="93A4B5"/>
+                </a:solidFill>
+                <a:latin typeface="맑은 고딕"/>
+                <a:ea typeface="맑은 고딕"/>
+                <a:cs typeface="맑은 고딕"/>
+              </a:rPr>
+              <a:t>분류에 드는 수십 토큰이 상위 모델 호출 하나를 막으면 즉시 회수된다.</a:t>
+            </a:r>
+          </a:p>
+        </p:txBody>
+      </p:sp>
+      <p:sp>
+        <p:nvSpPr>
+          <p:cNvPr id="11" name="Rectangle 10"/>
+          <p:cNvSpPr/>
+          <p:nvPr/>
+        </p:nvSpPr>
+        <p:spPr>
+          <a:xfrm>
+            <a:off x="777240" y="2724912"/>
+            <a:ext cx="109728" cy="109728"/>
+          </a:xfrm>
+          <a:prstGeom prst="rect">
+            <a:avLst/>
+          </a:prstGeom>
+          <a:solidFill>
+            <a:srgbClr val="36D399"/>
+          </a:solidFill>
+          <a:ln>
+            <a:noFill/>
+          </a:ln>
+          <a:effectLst/>
+        </p:spPr>
+        <p:style>
+          <a:lnRef idx="1">
+            <a:schemeClr val="accent1"/>
+          </a:lnRef>
+          <a:fillRef idx="3">
+            <a:schemeClr val="accent1"/>
+          </a:fillRef>
+          <a:effectRef idx="2">
+            <a:schemeClr val="accent1"/>
+          </a:effectRef>
+          <a:fontRef idx="minor">
+            <a:schemeClr val="lt1"/>
+          </a:fontRef>
+        </p:style>
+        <p:txBody>
+          <a:bodyPr rtlCol="0" anchor="ctr"/>
+          <a:lstStyle/>
+          <a:p>
+            <a:pPr algn="ctr"/>
+          </a:p>
+        </p:txBody>
+      </p:sp>
+      <p:sp>
+        <p:nvSpPr>
+          <p:cNvPr id="12" name="TextBox 11"/>
+          <p:cNvSpPr txBox="1"/>
+          <p:nvPr/>
+        </p:nvSpPr>
+        <p:spPr>
+          <a:xfrm>
+            <a:off x="1069848" y="2624328"/>
+            <a:ext cx="10405872" cy="365760"/>
+          </a:xfrm>
+          <a:prstGeom prst="rect">
+            <a:avLst/>
+          </a:prstGeom>
+          <a:noFill/>
+        </p:spPr>
+        <p:txBody>
+          <a:bodyPr wrap="square" lIns="0" rIns="0" tIns="0" bIns="0" anchor="t">
+            <a:spAutoFit/>
+          </a:bodyPr>
+          <a:lstStyle/>
+          <a:p>
+            <a:pPr algn="l">
+              <a:lnSpc>
+                <a:spcPct val="115000"/>
+              </a:lnSpc>
+            </a:pPr>
+            <a:r>
+              <a:rPr sz="1650" b="1">
+                <a:solidFill>
+                  <a:srgbClr val="ECF1F6"/>
+                </a:solidFill>
+                <a:latin typeface="맑은 고딕"/>
+                <a:ea typeface="맑은 고딕"/>
+                <a:cs typeface="맑은 고딕"/>
+              </a:rPr>
+              <a:t>당신이 만든 것은 워크플로우 컨트롤이다</a:t>
+            </a:r>
+          </a:p>
+        </p:txBody>
+      </p:sp>
+      <p:sp>
+        <p:nvSpPr>
+          <p:cNvPr id="13" name="TextBox 12"/>
+          <p:cNvSpPr txBox="1"/>
+          <p:nvPr/>
+        </p:nvSpPr>
+        <p:spPr>
+          <a:xfrm>
+            <a:off x="1069848" y="2898648"/>
+            <a:ext cx="10405872" cy="365760"/>
+          </a:xfrm>
+          <a:prstGeom prst="rect">
+            <a:avLst/>
+          </a:prstGeom>
+          <a:noFill/>
+        </p:spPr>
+        <p:txBody>
+          <a:bodyPr wrap="square" lIns="0" rIns="0" tIns="0" bIns="0" anchor="t">
+            <a:spAutoFit/>
+          </a:bodyPr>
+          <a:lstStyle/>
+          <a:p>
+            <a:pPr algn="l">
+              <a:lnSpc>
+                <a:spcPct val="115000"/>
+              </a:lnSpc>
+            </a:pPr>
+            <a:r>
+              <a:rPr sz="1350" b="0">
+                <a:solidFill>
+                  <a:srgbClr val="93A4B5"/>
+                </a:solidFill>
+                <a:latin typeface="맑은 고딕"/>
+                <a:ea typeface="맑은 고딕"/>
+                <a:cs typeface="맑은 고딕"/>
+              </a:rPr>
+              <a:t>라우팅은 그 안의 수단이고, 리워크는 그것이 줄이려는 대상이다.</a:t>
+            </a:r>
+          </a:p>
+        </p:txBody>
+      </p:sp>
+      <p:sp>
+        <p:nvSpPr>
+          <p:cNvPr id="14" name="Rectangle 13"/>
+          <p:cNvSpPr/>
+          <p:nvPr/>
+        </p:nvSpPr>
+        <p:spPr>
+          <a:xfrm>
+            <a:off x="777240" y="3383279"/>
+            <a:ext cx="109728" cy="109728"/>
+          </a:xfrm>
+          <a:prstGeom prst="rect">
+            <a:avLst/>
+          </a:prstGeom>
+          <a:solidFill>
+            <a:srgbClr val="36D399"/>
+          </a:solidFill>
+          <a:ln>
+            <a:noFill/>
+          </a:ln>
+          <a:effectLst/>
+        </p:spPr>
+        <p:style>
+          <a:lnRef idx="1">
+            <a:schemeClr val="accent1"/>
+          </a:lnRef>
+          <a:fillRef idx="3">
+            <a:schemeClr val="accent1"/>
+          </a:fillRef>
+          <a:effectRef idx="2">
+            <a:schemeClr val="accent1"/>
+          </a:effectRef>
+          <a:fontRef idx="minor">
+            <a:schemeClr val="lt1"/>
+          </a:fontRef>
+        </p:style>
+        <p:txBody>
+          <a:bodyPr rtlCol="0" anchor="ctr"/>
+          <a:lstStyle/>
+          <a:p>
+            <a:pPr algn="ctr"/>
+          </a:p>
+        </p:txBody>
+      </p:sp>
+      <p:sp>
+        <p:nvSpPr>
+          <p:cNvPr id="15" name="TextBox 14"/>
+          <p:cNvSpPr txBox="1"/>
+          <p:nvPr/>
+        </p:nvSpPr>
+        <p:spPr>
+          <a:xfrm>
+            <a:off x="1069848" y="3282696"/>
+            <a:ext cx="10405872" cy="365760"/>
+          </a:xfrm>
+          <a:prstGeom prst="rect">
+            <a:avLst/>
+          </a:prstGeom>
+          <a:noFill/>
+        </p:spPr>
+        <p:txBody>
+          <a:bodyPr wrap="square" lIns="0" rIns="0" tIns="0" bIns="0" anchor="t">
+            <a:spAutoFit/>
+          </a:bodyPr>
+          <a:lstStyle/>
+          <a:p>
+            <a:pPr algn="l">
+              <a:lnSpc>
+                <a:spcPct val="115000"/>
+              </a:lnSpc>
+            </a:pPr>
+            <a:r>
+              <a:rPr sz="1650" b="1">
+                <a:solidFill>
+                  <a:srgbClr val="ECF1F6"/>
+                </a:solidFill>
+                <a:latin typeface="맑은 고딕"/>
+                <a:ea typeface="맑은 고딕"/>
+                <a:cs typeface="맑은 고딕"/>
+              </a:rPr>
+              <a:t>"성능차 없음"이 아니라 "조건부 격차 축소"다</a:t>
+            </a:r>
+          </a:p>
+        </p:txBody>
+      </p:sp>
+      <p:sp>
+        <p:nvSpPr>
+          <p:cNvPr id="16" name="TextBox 15"/>
+          <p:cNvSpPr txBox="1"/>
+          <p:nvPr/>
+        </p:nvSpPr>
+        <p:spPr>
+          <a:xfrm>
+            <a:off x="1069848" y="3557015"/>
+            <a:ext cx="10405872" cy="365760"/>
+          </a:xfrm>
+          <a:prstGeom prst="rect">
+            <a:avLst/>
+          </a:prstGeom>
+          <a:noFill/>
+        </p:spPr>
+        <p:txBody>
+          <a:bodyPr wrap="square" lIns="0" rIns="0" tIns="0" bIns="0" anchor="t">
+            <a:spAutoFit/>
+          </a:bodyPr>
+          <a:lstStyle/>
+          <a:p>
+            <a:pPr algn="l">
+              <a:lnSpc>
+                <a:spcPct val="115000"/>
+              </a:lnSpc>
+            </a:pPr>
+            <a:r>
+              <a:rPr sz="1350" b="0">
+                <a:solidFill>
+                  <a:srgbClr val="93A4B5"/>
+                </a:solidFill>
+                <a:latin typeface="맑은 고딕"/>
+                <a:ea typeface="맑은 고딕"/>
+                <a:cs typeface="맑은 고딕"/>
+              </a:rPr>
+              <a:t>스펙 확정 · 검증 수단 · 임계 크기 — 셋이 모일 때만 중간 모델로 내려도 안전하다.</a:t>
+            </a:r>
+          </a:p>
+        </p:txBody>
+      </p:sp>
+      <p:sp>
+        <p:nvSpPr>
+          <p:cNvPr id="17" name="Rectangle 16"/>
+          <p:cNvSpPr/>
+          <p:nvPr/>
+        </p:nvSpPr>
+        <p:spPr>
+          <a:xfrm>
+            <a:off x="777240" y="4041648"/>
+            <a:ext cx="109728" cy="109728"/>
+          </a:xfrm>
+          <a:prstGeom prst="rect">
+            <a:avLst/>
+          </a:prstGeom>
+          <a:solidFill>
+            <a:srgbClr val="36D399"/>
+          </a:solidFill>
+          <a:ln>
+            <a:noFill/>
+          </a:ln>
+          <a:effectLst/>
+        </p:spPr>
+        <p:style>
+          <a:lnRef idx="1">
+            <a:schemeClr val="accent1"/>
+          </a:lnRef>
+          <a:fillRef idx="3">
+            <a:schemeClr val="accent1"/>
+          </a:fillRef>
+          <a:effectRef idx="2">
+            <a:schemeClr val="accent1"/>
+          </a:effectRef>
+          <a:fontRef idx="minor">
+            <a:schemeClr val="lt1"/>
+          </a:fontRef>
+        </p:style>
+        <p:txBody>
+          <a:bodyPr rtlCol="0" anchor="ctr"/>
+          <a:lstStyle/>
+          <a:p>
+            <a:pPr algn="ctr"/>
+          </a:p>
+        </p:txBody>
+      </p:sp>
+      <p:sp>
+        <p:nvSpPr>
+          <p:cNvPr id="18" name="TextBox 17"/>
+          <p:cNvSpPr txBox="1"/>
+          <p:nvPr/>
+        </p:nvSpPr>
+        <p:spPr>
+          <a:xfrm>
+            <a:off x="1069848" y="3941064"/>
+            <a:ext cx="10405872" cy="365760"/>
+          </a:xfrm>
+          <a:prstGeom prst="rect">
+            <a:avLst/>
+          </a:prstGeom>
+          <a:noFill/>
+        </p:spPr>
+        <p:txBody>
+          <a:bodyPr wrap="square" lIns="0" rIns="0" tIns="0" bIns="0" anchor="t">
+            <a:spAutoFit/>
+          </a:bodyPr>
+          <a:lstStyle/>
+          <a:p>
+            <a:pPr algn="l">
+              <a:lnSpc>
+                <a:spcPct val="115000"/>
+              </a:lnSpc>
+            </a:pPr>
+            <a:r>
+              <a:rPr sz="1650" b="1">
+                <a:solidFill>
+                  <a:srgbClr val="ECF1F6"/>
+                </a:solidFill>
+                <a:latin typeface="맑은 고딕"/>
+                <a:ea typeface="맑은 고딕"/>
+                <a:cs typeface="맑은 고딕"/>
+              </a:rPr>
+              <a:t>배치는 단가를 반으로 줄이지만 시간은 약속하지 않는다</a:t>
+            </a:r>
+          </a:p>
+        </p:txBody>
+      </p:sp>
+      <p:sp>
+        <p:nvSpPr>
+          <p:cNvPr id="19" name="TextBox 18"/>
+          <p:cNvSpPr txBox="1"/>
+          <p:nvPr/>
+        </p:nvSpPr>
+        <p:spPr>
+          <a:xfrm>
+            <a:off x="1069848" y="4215384"/>
+            <a:ext cx="10405872" cy="365760"/>
+          </a:xfrm>
+          <a:prstGeom prst="rect">
+            <a:avLst/>
+          </a:prstGeom>
+          <a:noFill/>
+        </p:spPr>
+        <p:txBody>
+          <a:bodyPr wrap="square" lIns="0" rIns="0" tIns="0" bIns="0" anchor="t">
+            <a:spAutoFit/>
+          </a:bodyPr>
+          <a:lstStyle/>
+          <a:p>
+            <a:pPr algn="l">
+              <a:lnSpc>
+                <a:spcPct val="115000"/>
+              </a:lnSpc>
+            </a:pPr>
+            <a:r>
+              <a:rPr sz="1350" b="0">
+                <a:solidFill>
+                  <a:srgbClr val="93A4B5"/>
+                </a:solidFill>
+                <a:latin typeface="맑은 고딕"/>
+                <a:ea typeface="맑은 고딕"/>
+                <a:cs typeface="맑은 고딕"/>
+              </a:rPr>
+              <a:t>expired가 실제로 난다. 폴백 없는 배치는 파이프라인을 멈춘다.</a:t>
+            </a:r>
+          </a:p>
+        </p:txBody>
+      </p:sp>
+      <p:sp>
+        <p:nvSpPr>
+          <p:cNvPr id="20" name="Rectangle 19"/>
+          <p:cNvSpPr/>
+          <p:nvPr/>
+        </p:nvSpPr>
+        <p:spPr>
+          <a:xfrm>
+            <a:off x="777240" y="4700016"/>
+            <a:ext cx="109728" cy="109728"/>
+          </a:xfrm>
+          <a:prstGeom prst="rect">
+            <a:avLst/>
+          </a:prstGeom>
+          <a:solidFill>
+            <a:srgbClr val="36D399"/>
+          </a:solidFill>
+          <a:ln>
+            <a:noFill/>
+          </a:ln>
+          <a:effectLst/>
+        </p:spPr>
+        <p:style>
+          <a:lnRef idx="1">
+            <a:schemeClr val="accent1"/>
+          </a:lnRef>
+          <a:fillRef idx="3">
+            <a:schemeClr val="accent1"/>
+          </a:fillRef>
+          <a:effectRef idx="2">
+            <a:schemeClr val="accent1"/>
+          </a:effectRef>
+          <a:fontRef idx="minor">
+            <a:schemeClr val="lt1"/>
+          </a:fontRef>
+        </p:style>
+        <p:txBody>
+          <a:bodyPr rtlCol="0" anchor="ctr"/>
+          <a:lstStyle/>
+          <a:p>
+            <a:pPr algn="ctr"/>
+          </a:p>
+        </p:txBody>
+      </p:sp>
+      <p:sp>
+        <p:nvSpPr>
+          <p:cNvPr id="21" name="TextBox 20"/>
+          <p:cNvSpPr txBox="1"/>
+          <p:nvPr/>
+        </p:nvSpPr>
+        <p:spPr>
+          <a:xfrm>
+            <a:off x="1069848" y="4599431"/>
+            <a:ext cx="10405872" cy="365760"/>
+          </a:xfrm>
+          <a:prstGeom prst="rect">
+            <a:avLst/>
+          </a:prstGeom>
+          <a:noFill/>
+        </p:spPr>
+        <p:txBody>
+          <a:bodyPr wrap="square" lIns="0" rIns="0" tIns="0" bIns="0" anchor="t">
+            <a:spAutoFit/>
+          </a:bodyPr>
+          <a:lstStyle/>
+          <a:p>
+            <a:pPr algn="l">
+              <a:lnSpc>
+                <a:spcPct val="115000"/>
+              </a:lnSpc>
+            </a:pPr>
+            <a:r>
+              <a:rPr sz="1650" b="1">
+                <a:solidFill>
+                  <a:srgbClr val="ECF1F6"/>
+                </a:solidFill>
+                <a:latin typeface="맑은 고딕"/>
+                <a:ea typeface="맑은 고딕"/>
+                <a:cs typeface="맑은 고딕"/>
+              </a:rPr>
+              <a:t>밸브는 프롬프트가 아니라 코드로 잠근다</a:t>
+            </a:r>
+          </a:p>
+        </p:txBody>
+      </p:sp>
+      <p:sp>
+        <p:nvSpPr>
+          <p:cNvPr id="22" name="TextBox 21"/>
+          <p:cNvSpPr txBox="1"/>
+          <p:nvPr/>
+        </p:nvSpPr>
+        <p:spPr>
+          <a:xfrm>
+            <a:off x="1069848" y="4873751"/>
+            <a:ext cx="10405872" cy="365760"/>
+          </a:xfrm>
+          <a:prstGeom prst="rect">
+            <a:avLst/>
+          </a:prstGeom>
+          <a:noFill/>
+        </p:spPr>
+        <p:txBody>
+          <a:bodyPr wrap="square" lIns="0" rIns="0" tIns="0" bIns="0" anchor="t">
+            <a:spAutoFit/>
+          </a:bodyPr>
+          <a:lstStyle/>
+          <a:p>
+            <a:pPr algn="l">
+              <a:lnSpc>
+                <a:spcPct val="115000"/>
+              </a:lnSpc>
+            </a:pPr>
+            <a:r>
+              <a:rPr sz="1350" b="0">
+                <a:solidFill>
+                  <a:srgbClr val="93A4B5"/>
+                </a:solidFill>
+                <a:latin typeface="맑은 고딕"/>
+                <a:ea typeface="맑은 고딕"/>
+                <a:cs typeface="맑은 고딕"/>
+              </a:rPr>
+              <a:t>3줄 상한과 세션 리셋은 부탁이 아니라 후처리로 강제해야 지켜진다.</a:t>
+            </a:r>
+          </a:p>
+        </p:txBody>
+      </p:sp>
+      <p:sp>
+        <p:nvSpPr>
+          <p:cNvPr id="23" name="Rounded Rectangle 22"/>
+          <p:cNvSpPr/>
+          <p:nvPr/>
+        </p:nvSpPr>
+        <p:spPr>
+          <a:xfrm>
+            <a:off x="685800" y="5440680"/>
+            <a:ext cx="10835640" cy="822960"/>
+          </a:xfrm>
+          <a:prstGeom prst="roundRect">
+            <a:avLst>
+              <a:gd name="adj" fmla="val 5000"/>
+            </a:avLst>
+          </a:prstGeom>
+          <a:solidFill>
+            <a:srgbClr val="18222E"/>
+          </a:solidFill>
+          <a:ln>
+            <a:noFill/>
+          </a:ln>
+          <a:effectLst/>
+        </p:spPr>
+        <p:style>
+          <a:lnRef idx="1">
+            <a:schemeClr val="accent1"/>
+          </a:lnRef>
+          <a:fillRef idx="3">
+            <a:schemeClr val="accent1"/>
+          </a:fillRef>
+          <a:effectRef idx="2">
+            <a:schemeClr val="accent1"/>
+          </a:effectRef>
+          <a:fontRef idx="minor">
+            <a:schemeClr val="lt1"/>
+          </a:fontRef>
+        </p:style>
+        <p:txBody>
+          <a:bodyPr rtlCol="0" anchor="ctr"/>
+          <a:lstStyle/>
+          <a:p>
+            <a:pPr algn="ctr"/>
+          </a:p>
+        </p:txBody>
+      </p:sp>
+      <p:sp>
+        <p:nvSpPr>
+          <p:cNvPr id="24" name="Rectangle 23"/>
+          <p:cNvSpPr/>
+          <p:nvPr/>
+        </p:nvSpPr>
+        <p:spPr>
+          <a:xfrm>
+            <a:off x="685800" y="5440680"/>
+            <a:ext cx="50292" cy="822960"/>
+          </a:xfrm>
+          <a:prstGeom prst="rect">
+            <a:avLst/>
+          </a:prstGeom>
+          <a:solidFill>
+            <a:srgbClr val="5A9CFF"/>
+          </a:solidFill>
+          <a:ln>
+            <a:noFill/>
+          </a:ln>
+          <a:effectLst/>
+        </p:spPr>
+        <p:style>
+          <a:lnRef idx="1">
+            <a:schemeClr val="accent1"/>
+          </a:lnRef>
+          <a:fillRef idx="3">
+            <a:schemeClr val="accent1"/>
+          </a:fillRef>
+          <a:effectRef idx="2">
+            <a:schemeClr val="accent1"/>
+          </a:effectRef>
+          <a:fontRef idx="minor">
+            <a:schemeClr val="lt1"/>
+          </a:fontRef>
+        </p:style>
+        <p:txBody>
+          <a:bodyPr rtlCol="0" anchor="ctr"/>
+          <a:lstStyle/>
+          <a:p>
+            <a:pPr algn="ctr"/>
+          </a:p>
+        </p:txBody>
+      </p:sp>
+      <p:sp>
+        <p:nvSpPr>
+          <p:cNvPr id="25" name="TextBox 24"/>
+          <p:cNvSpPr txBox="1"/>
+          <p:nvPr/>
+        </p:nvSpPr>
+        <p:spPr>
+          <a:xfrm>
+            <a:off x="960120" y="5596128"/>
+            <a:ext cx="10424160" cy="594360"/>
+          </a:xfrm>
+          <a:prstGeom prst="rect">
+            <a:avLst/>
+          </a:prstGeom>
+          <a:noFill/>
+        </p:spPr>
+        <p:txBody>
+          <a:bodyPr wrap="square" lIns="0" rIns="0" tIns="0" bIns="0" anchor="t">
+            <a:spAutoFit/>
+          </a:bodyPr>
+          <a:lstStyle/>
+          <a:p>
+            <a:pPr algn="l">
+              <a:lnSpc>
+                <a:spcPct val="115000"/>
+              </a:lnSpc>
+            </a:pPr>
+            <a:r>
+              <a:rPr sz="1550" b="1">
+                <a:solidFill>
+                  <a:srgbClr val="5A9CFF"/>
+                </a:solidFill>
+                <a:latin typeface="맑은 고딕"/>
+                <a:ea typeface="맑은 고딕"/>
+                <a:cs typeface="맑은 고딕"/>
+              </a:rPr>
+              <a:t>세 덱을 관통하는 한 문장 — AI가 나쁜 게 아니라 우리가 견적서를 안 읽은 것이다.</a:t>
+            </a:r>
+          </a:p>
+        </p:txBody>
+      </p:sp>
+      <p:sp>
+        <p:nvSpPr>
+          <p:cNvPr id="26" name="TextBox 25"/>
+          <p:cNvSpPr txBox="1"/>
+          <p:nvPr/>
+        </p:nvSpPr>
+        <p:spPr>
+          <a:xfrm>
+            <a:off x="685800" y="6419088"/>
+            <a:ext cx="10789920" cy="320040"/>
+          </a:xfrm>
+          <a:prstGeom prst="rect">
+            <a:avLst/>
+          </a:prstGeom>
+          <a:noFill/>
+        </p:spPr>
+        <p:txBody>
+          <a:bodyPr wrap="square" lIns="0" rIns="0" tIns="0" bIns="0" anchor="t">
+            <a:spAutoFit/>
+          </a:bodyPr>
+          <a:lstStyle/>
+          <a:p>
+            <a:pPr algn="l">
+              <a:lnSpc>
+                <a:spcPct val="115000"/>
+              </a:lnSpc>
+            </a:pPr>
+            <a:r>
+              <a:rPr sz="1100" b="0">
+                <a:solidFill>
+                  <a:srgbClr val="93A4B5"/>
+                </a:solidFill>
+                <a:latin typeface="맑은 고딕"/>
+                <a:ea typeface="맑은 고딕"/>
+                <a:cs typeface="맑은 고딕"/>
+              </a:rPr>
+              <a:t>본편(22장) · 보너스(10장) · 후속(12장) — 각각 독립 발표 가능합니다.</a:t>
+            </a:r>
+          </a:p>
+        </p:txBody>
+      </p:sp>
+    </p:spTree>
+  </p:cSld>
+  <p:clrMapOvr>
+    <a:masterClrMapping/>
+  </p:clrMapOvr>
+</p:sld>
+</file>
+
+<file path=ppt/slides/slide15.xml><?xml version="1.0" encoding="utf-8"?>
+<p:sld xmlns:a="http://schemas.openxmlformats.org/drawingml/2006/main" xmlns:p="http://schemas.openxmlformats.org/presentationml/2006/main" xmlns:r="http://schemas.openxmlformats.org/officeDocument/2006/relationships">
+  <p:cSld>
+    <p:spTree>
+      <p:nvGrpSpPr>
+        <p:cNvPr id="1" name=""/>
+        <p:cNvGrpSpPr/>
+        <p:nvPr/>
+      </p:nvGrpSpPr>
+      <p:grpSpPr/>
+      <p:sp>
+        <p:nvSpPr>
+          <p:cNvPr id="2" name="Rectangle 1"/>
+          <p:cNvSpPr/>
+          <p:nvPr/>
+        </p:nvSpPr>
+        <p:spPr>
+          <a:xfrm>
+            <a:off x="0" y="0"/>
+            <a:ext cx="12191695" cy="6858000"/>
+          </a:xfrm>
+          <a:prstGeom prst="rect">
+            <a:avLst/>
+          </a:prstGeom>
+          <a:solidFill>
+            <a:srgbClr val="0E141B"/>
+          </a:solidFill>
+          <a:ln>
+            <a:noFill/>
+          </a:ln>
+          <a:effectLst/>
+        </p:spPr>
+        <p:style>
+          <a:lnRef idx="1">
+            <a:schemeClr val="accent1"/>
+          </a:lnRef>
+          <a:fillRef idx="3">
+            <a:schemeClr val="accent1"/>
+          </a:fillRef>
+          <a:effectRef idx="2">
+            <a:schemeClr val="accent1"/>
+          </a:effectRef>
+          <a:fontRef idx="minor">
+            <a:schemeClr val="lt1"/>
+          </a:fontRef>
+        </p:style>
+        <p:txBody>
+          <a:bodyPr rtlCol="0" anchor="ctr"/>
+          <a:lstStyle/>
+          <a:p>
+            <a:pPr algn="ctr"/>
+          </a:p>
+        </p:txBody>
+      </p:sp>
+      <p:sp>
+        <p:nvSpPr>
+          <p:cNvPr id="3" name="Rectangle 2"/>
+          <p:cNvSpPr/>
+          <p:nvPr/>
+        </p:nvSpPr>
+        <p:spPr>
+          <a:xfrm>
+            <a:off x="0" y="0"/>
+            <a:ext cx="118872" cy="6858000"/>
+          </a:xfrm>
+          <a:prstGeom prst="rect">
+            <a:avLst/>
+          </a:prstGeom>
+          <a:solidFill>
+            <a:srgbClr val="36D399"/>
+          </a:solidFill>
+          <a:ln>
+            <a:noFill/>
+          </a:ln>
+          <a:effectLst/>
+        </p:spPr>
+        <p:style>
+          <a:lnRef idx="1">
+            <a:schemeClr val="accent1"/>
+          </a:lnRef>
+          <a:fillRef idx="3">
+            <a:schemeClr val="accent1"/>
+          </a:fillRef>
+          <a:effectRef idx="2">
+            <a:schemeClr val="accent1"/>
+          </a:effectRef>
+          <a:fontRef idx="minor">
+            <a:schemeClr val="lt1"/>
+          </a:fontRef>
+        </p:style>
+        <p:txBody>
+          <a:bodyPr rtlCol="0" anchor="ctr"/>
+          <a:lstStyle/>
+          <a:p>
+            <a:pPr algn="ctr"/>
+          </a:p>
+        </p:txBody>
+      </p:sp>
+      <p:sp>
+        <p:nvSpPr>
+          <p:cNvPr id="4" name="TextBox 3"/>
+          <p:cNvSpPr txBox="1"/>
+          <p:nvPr/>
+        </p:nvSpPr>
+        <p:spPr>
+          <a:xfrm>
+            <a:off x="685800" y="384048"/>
+            <a:ext cx="9144000" cy="292608"/>
+          </a:xfrm>
+          <a:prstGeom prst="rect">
+            <a:avLst/>
+          </a:prstGeom>
+          <a:noFill/>
+        </p:spPr>
+        <p:txBody>
+          <a:bodyPr wrap="square" lIns="0" rIns="0" tIns="0" bIns="0" anchor="t">
+            <a:spAutoFit/>
+          </a:bodyPr>
+          <a:lstStyle/>
+          <a:p>
+            <a:pPr algn="l">
+              <a:lnSpc>
+                <a:spcPct val="115000"/>
+              </a:lnSpc>
+            </a:pPr>
+            <a:r>
+              <a:rPr sz="1300" b="1">
+                <a:solidFill>
+                  <a:srgbClr val="36D399"/>
+                </a:solidFill>
+                <a:latin typeface="맑은 고딕"/>
+                <a:ea typeface="맑은 고딕"/>
+                <a:cs typeface="맑은 고딕"/>
+              </a:rPr>
+              <a:t>FOLLOW-UP</a:t>
+            </a:r>
+          </a:p>
+        </p:txBody>
+      </p:sp>
+      <p:sp>
+        <p:nvSpPr>
+          <p:cNvPr id="5" name="TextBox 4"/>
+          <p:cNvSpPr txBox="1"/>
+          <p:nvPr/>
+        </p:nvSpPr>
+        <p:spPr>
+          <a:xfrm>
+            <a:off x="685800" y="685800"/>
+            <a:ext cx="10881360" cy="822960"/>
+          </a:xfrm>
+          <a:prstGeom prst="rect">
+            <a:avLst/>
+          </a:prstGeom>
+          <a:noFill/>
+        </p:spPr>
+        <p:txBody>
+          <a:bodyPr wrap="square" lIns="0" rIns="0" tIns="0" bIns="0" anchor="t">
+            <a:spAutoFit/>
+          </a:bodyPr>
+          <a:lstStyle/>
+          <a:p>
+            <a:pPr algn="l">
+              <a:lnSpc>
+                <a:spcPct val="115000"/>
+              </a:lnSpc>
+            </a:pPr>
+            <a:r>
+              <a:rPr sz="3200" b="1">
+                <a:solidFill>
+                  <a:srgbClr val="ECF1F6"/>
+                </a:solidFill>
+                <a:latin typeface="맑은 고딕"/>
+                <a:ea typeface="맑은 고딕"/>
+                <a:cs typeface="맑은 고딕"/>
+              </a:rPr>
+              <a:t>Q &amp; A</a:t>
+            </a:r>
+          </a:p>
+        </p:txBody>
+      </p:sp>
+      <p:sp>
+        <p:nvSpPr>
+          <p:cNvPr id="6" name="Rectangle 5"/>
+          <p:cNvSpPr/>
+          <p:nvPr/>
+        </p:nvSpPr>
+        <p:spPr>
+          <a:xfrm>
+            <a:off x="685800" y="1572768"/>
+            <a:ext cx="1371600" cy="41148"/>
+          </a:xfrm>
+          <a:prstGeom prst="rect">
+            <a:avLst/>
+          </a:prstGeom>
+          <a:solidFill>
+            <a:srgbClr val="36D399"/>
+          </a:solidFill>
+          <a:ln>
+            <a:noFill/>
+          </a:ln>
+          <a:effectLst/>
+        </p:spPr>
+        <p:style>
+          <a:lnRef idx="1">
+            <a:schemeClr val="accent1"/>
+          </a:lnRef>
+          <a:fillRef idx="3">
+            <a:schemeClr val="accent1"/>
+          </a:fillRef>
+          <a:effectRef idx="2">
+            <a:schemeClr val="accent1"/>
+          </a:effectRef>
+          <a:fontRef idx="minor">
+            <a:schemeClr val="lt1"/>
+          </a:fontRef>
+        </p:style>
+        <p:txBody>
+          <a:bodyPr rtlCol="0" anchor="ctr"/>
+          <a:lstStyle/>
+          <a:p>
+            <a:pPr algn="ctr"/>
+          </a:p>
+        </p:txBody>
+      </p:sp>
+      <p:sp>
+        <p:nvSpPr>
+          <p:cNvPr id="7" name="TextBox 6"/>
+          <p:cNvSpPr txBox="1"/>
+          <p:nvPr/>
+        </p:nvSpPr>
+        <p:spPr>
+          <a:xfrm>
+            <a:off x="11155680" y="6355080"/>
+            <a:ext cx="822960" cy="274320"/>
+          </a:xfrm>
+          <a:prstGeom prst="rect">
+            <a:avLst/>
+          </a:prstGeom>
+          <a:noFill/>
+        </p:spPr>
+        <p:txBody>
+          <a:bodyPr wrap="square" lIns="0" rIns="0" tIns="0" bIns="0" anchor="t">
+            <a:spAutoFit/>
+          </a:bodyPr>
+          <a:lstStyle/>
+          <a:p>
+            <a:pPr algn="r">
+              <a:lnSpc>
+                <a:spcPct val="115000"/>
+              </a:lnSpc>
+            </a:pPr>
+            <a:r>
+              <a:rPr sz="1100" b="0">
+                <a:solidFill>
+                  <a:srgbClr val="93A4B5"/>
+                </a:solidFill>
+                <a:latin typeface="맑은 고딕"/>
+                <a:ea typeface="맑은 고딕"/>
+                <a:cs typeface="맑은 고딕"/>
+              </a:rPr>
+              <a:t>15</a:t>
             </a:r>
           </a:p>
         </p:txBody>

--- a/presentation/토큰_절약_발표_후속_에이전트셋팅.pptx
+++ b/presentation/토큰_절약_발표_후속_에이전트셋팅.pptx
@@ -3435,7 +3435,7 @@
                 <a:ea typeface="맑은 고딕"/>
                 <a:cs typeface="맑은 고딕"/>
               </a:rPr>
-              <a:t>이 덱의 모든 슬라이드는 agent_setup/router.py 에 대응 코드가 있습니다. 검증 32/32 PASS.</a:t>
+              <a:t>이 덱의 모든 슬라이드는 agent_setup/router.py 에 대응 코드가 있습니다. 검증 56/56 PASS.</a:t>
             </a:r>
           </a:p>
         </p:txBody>
@@ -7853,7 +7853,7 @@
         <p:spPr>
           <a:xfrm>
             <a:off x="685800" y="2240280"/>
-            <a:ext cx="7086600" cy="3429000"/>
+            <a:ext cx="7086600" cy="3639312"/>
           </a:xfrm>
           <a:prstGeom prst="roundRect">
             <a:avLst>
@@ -7899,7 +7899,7 @@
         <p:spPr>
           <a:xfrm>
             <a:off x="685800" y="2240280"/>
-            <a:ext cx="45720" cy="3429000"/>
+            <a:ext cx="45720" cy="3639312"/>
           </a:xfrm>
           <a:prstGeom prst="rect">
             <a:avLst/>
@@ -7942,8 +7942,8 @@
         </p:nvSpPr>
         <p:spPr>
           <a:xfrm>
-            <a:off x="932688" y="2432304"/>
-            <a:ext cx="6766560" cy="3108960"/>
+            <a:off x="932688" y="2395728"/>
+            <a:ext cx="6766560" cy="3291840"/>
           </a:xfrm>
           <a:prstGeom prst="rect">
             <a:avLst/>
@@ -7965,7 +7965,7 @@
               </a:spcBef>
             </a:pPr>
             <a:r>
-              <a:rPr sz="1200" b="0">
+              <a:rPr sz="1150" b="0">
                 <a:solidFill>
                   <a:srgbClr val="5A9CFF"/>
                 </a:solidFill>
@@ -7982,11 +7982,11 @@
                 <a:spcPct val="115000"/>
               </a:lnSpc>
               <a:spcBef>
-                <a:spcPts val="200"/>
+                <a:spcPts val="100"/>
               </a:spcBef>
             </a:pPr>
             <a:r>
-              <a:rPr sz="1200" b="0">
+              <a:rPr sz="1150" b="0">
                 <a:solidFill>
                   <a:srgbClr val="36D399"/>
                 </a:solidFill>
@@ -8003,11 +8003,11 @@
                 <a:spcPct val="115000"/>
               </a:lnSpc>
               <a:spcBef>
-                <a:spcPts val="200"/>
+                <a:spcPts val="100"/>
               </a:spcBef>
             </a:pPr>
             <a:r>
-              <a:rPr sz="1200" b="0">
+              <a:rPr sz="1150" b="0">
                 <a:solidFill>
                   <a:srgbClr val="36D399"/>
                 </a:solidFill>
@@ -8024,11 +8024,11 @@
                 <a:spcPct val="115000"/>
               </a:lnSpc>
               <a:spcBef>
-                <a:spcPts val="200"/>
+                <a:spcPts val="100"/>
               </a:spcBef>
             </a:pPr>
             <a:r>
-              <a:rPr sz="1200" b="0">
+              <a:rPr sz="1150" b="0">
                 <a:solidFill>
                   <a:srgbClr val="36D399"/>
                 </a:solidFill>
@@ -8045,11 +8045,11 @@
                 <a:spcPct val="115000"/>
               </a:lnSpc>
               <a:spcBef>
-                <a:spcPts val="200"/>
+                <a:spcPts val="100"/>
               </a:spcBef>
             </a:pPr>
             <a:r>
-              <a:rPr sz="1200" b="0">
+              <a:rPr sz="1150" b="0">
                 <a:solidFill>
                   <a:srgbClr val="36D399"/>
                 </a:solidFill>
@@ -8066,11 +8066,11 @@
                 <a:spcPct val="115000"/>
               </a:lnSpc>
               <a:spcBef>
-                <a:spcPts val="200"/>
+                <a:spcPts val="100"/>
               </a:spcBef>
             </a:pPr>
             <a:r>
-              <a:rPr sz="1200" b="0">
+              <a:rPr sz="1150" b="0">
                 <a:solidFill>
                   <a:srgbClr val="36D399"/>
                 </a:solidFill>
@@ -8087,11 +8087,11 @@
                 <a:spcPct val="115000"/>
               </a:lnSpc>
               <a:spcBef>
-                <a:spcPts val="200"/>
+                <a:spcPts val="100"/>
               </a:spcBef>
             </a:pPr>
             <a:r>
-              <a:rPr sz="1200" b="0">
+              <a:rPr sz="1150" b="0">
                 <a:solidFill>
                   <a:srgbClr val="ECF1F6"/>
                 </a:solidFill>
@@ -8108,11 +8108,11 @@
                 <a:spcPct val="115000"/>
               </a:lnSpc>
               <a:spcBef>
-                <a:spcPts val="200"/>
+                <a:spcPts val="100"/>
               </a:spcBef>
             </a:pPr>
             <a:r>
-              <a:rPr sz="1200" b="0">
+              <a:rPr sz="1150" b="0">
                 <a:solidFill>
                   <a:srgbClr val="5A9CFF"/>
                 </a:solidFill>
@@ -8129,11 +8129,11 @@
                 <a:spcPct val="115000"/>
               </a:lnSpc>
               <a:spcBef>
-                <a:spcPts val="200"/>
+                <a:spcPts val="100"/>
               </a:spcBef>
             </a:pPr>
             <a:r>
-              <a:rPr sz="1200" b="0">
+              <a:rPr sz="1150" b="0">
                 <a:solidFill>
                   <a:srgbClr val="5A9CFF"/>
                 </a:solidFill>
@@ -8150,19 +8150,19 @@
                 <a:spcPct val="115000"/>
               </a:lnSpc>
               <a:spcBef>
-                <a:spcPts val="200"/>
+                <a:spcPts val="100"/>
               </a:spcBef>
             </a:pPr>
             <a:r>
-              <a:rPr sz="1200" b="0">
-                <a:solidFill>
-                  <a:srgbClr val="ECF1F6"/>
+              <a:rPr sz="1150" b="0">
+                <a:solidFill>
+                  <a:srgbClr val="5A9CFF"/>
                 </a:solidFill>
                 <a:latin typeface="Consolas"/>
                 <a:ea typeface="Consolas"/>
                 <a:cs typeface="Consolas"/>
               </a:rPr>
-              <a:t> </a:t>
+              <a:t>[6] 리워크 에스컬레이션  [7] 손익분기</a:t>
             </a:r>
           </a:p>
           <a:p>
@@ -8171,19 +8171,19 @@
                 <a:spcPct val="115000"/>
               </a:lnSpc>
               <a:spcBef>
-                <a:spcPts val="200"/>
+                <a:spcPts val="100"/>
               </a:spcBef>
             </a:pPr>
             <a:r>
-              <a:rPr sz="1200" b="0">
-                <a:solidFill>
-                  <a:srgbClr val="FFB04D"/>
+              <a:rPr sz="1150" b="0">
+                <a:solidFill>
+                  <a:srgbClr val="ECF1F6"/>
                 </a:solidFill>
                 <a:latin typeface="Consolas"/>
                 <a:ea typeface="Consolas"/>
                 <a:cs typeface="Consolas"/>
               </a:rPr>
-              <a:t>        기준선 $0.6500 → 라우팅 $0.0437  (93.3% 절감)</a:t>
+              <a:t> </a:t>
             </a:r>
           </a:p>
           <a:p>
@@ -8192,19 +8192,19 @@
                 <a:spcPct val="115000"/>
               </a:lnSpc>
               <a:spcBef>
-                <a:spcPts val="200"/>
+                <a:spcPts val="100"/>
               </a:spcBef>
             </a:pPr>
             <a:r>
-              <a:rPr sz="1200" b="0">
-                <a:solidFill>
-                  <a:srgbClr val="ECF1F6"/>
+              <a:rPr sz="1150" b="0">
+                <a:solidFill>
+                  <a:srgbClr val="FFB04D"/>
                 </a:solidFill>
                 <a:latin typeface="Consolas"/>
                 <a:ea typeface="Consolas"/>
                 <a:cs typeface="Consolas"/>
               </a:rPr>
-              <a:t> </a:t>
+              <a:t>        기준선 $0.6500 → 라우팅 $0.0437  (93.3% 절감)</a:t>
             </a:r>
           </a:p>
           <a:p>
@@ -8213,19 +8213,61 @@
                 <a:spcPct val="115000"/>
               </a:lnSpc>
               <a:spcBef>
-                <a:spcPts val="200"/>
+                <a:spcPts val="100"/>
               </a:spcBef>
             </a:pPr>
             <a:r>
-              <a:rPr sz="1200" b="0">
-                <a:solidFill>
-                  <a:srgbClr val="FFB04D"/>
+              <a:rPr sz="1150" b="0">
+                <a:solidFill>
+                  <a:srgbClr val="ECF1F6"/>
                 </a:solidFill>
                 <a:latin typeface="Consolas"/>
                 <a:ea typeface="Consolas"/>
                 <a:cs typeface="Consolas"/>
               </a:rPr>
-              <a:t>  32건 중 32 PASS / 0 FAIL</a:t>
+              <a:t>        에스컬 3턴 $0.2132 = 제자리 8턴 $0.2180</a:t>
+            </a:r>
+          </a:p>
+          <a:p>
+            <a:pPr algn="l">
+              <a:lnSpc>
+                <a:spcPct val="115000"/>
+              </a:lnSpc>
+              <a:spcBef>
+                <a:spcPts val="100"/>
+              </a:spcBef>
+            </a:pPr>
+            <a:r>
+              <a:rPr sz="1150" b="0">
+                <a:solidFill>
+                  <a:srgbClr val="ECF1F6"/>
+                </a:solidFill>
+                <a:latin typeface="Consolas"/>
+                <a:ea typeface="Consolas"/>
+                <a:cs typeface="Consolas"/>
+              </a:rPr>
+              <a:t> </a:t>
+            </a:r>
+          </a:p>
+          <a:p>
+            <a:pPr algn="l">
+              <a:lnSpc>
+                <a:spcPct val="115000"/>
+              </a:lnSpc>
+              <a:spcBef>
+                <a:spcPts val="100"/>
+              </a:spcBef>
+            </a:pPr>
+            <a:r>
+              <a:rPr sz="1150" b="0">
+                <a:solidFill>
+                  <a:srgbClr val="FFB04D"/>
+                </a:solidFill>
+                <a:latin typeface="Consolas"/>
+                <a:ea typeface="Consolas"/>
+                <a:cs typeface="Consolas"/>
+              </a:rPr>
+              <a:t>  56건 중 56 PASS / 0 FAIL</a:t>
             </a:r>
           </a:p>
         </p:txBody>
@@ -8421,7 +8463,7 @@
                 <a:ea typeface="맑은 고딕"/>
                 <a:cs typeface="맑은 고딕"/>
               </a:rPr>
-              <a:t>2. test_router.py — 32건 검증</a:t>
+              <a:t>2. 같은 작업을 3번 실패시켜 에스컬레이션</a:t>
             </a:r>
           </a:p>
           <a:p>
@@ -8672,7 +8714,7 @@
         </p:nvSpPr>
         <p:spPr>
           <a:xfrm>
-            <a:off x="685800" y="5943600"/>
+            <a:off x="685800" y="6053328"/>
             <a:ext cx="10789920" cy="320040"/>
           </a:xfrm>
           <a:prstGeom prst="rect">
@@ -8700,7 +8742,7 @@
                 <a:ea typeface="맑은 고딕"/>
                 <a:cs typeface="맑은 고딕"/>
               </a:rPr>
-              <a:t>agent_setup/router.py (라우터) · agent_setup/test_router.py (검증 32건) — 저장소에 그대로 들어 있습니다.</a:t>
+              <a:t>agent_setup/router.py (라우터) · agent_setup/test_router.py (검증 56건) — 저장소에 그대로 들어 있습니다.</a:t>
             </a:r>
           </a:p>
         </p:txBody>
@@ -11428,7 +11470,7 @@
                 <a:ea typeface="맑은 고딕"/>
                 <a:cs typeface="맑은 고딕"/>
               </a:rPr>
-              <a:t>"성능차 없음"이 아니라 "조건부 격차 축소"다</a:t>
+              <a:t>구현 티어는 조건을 확인하고 내린다</a:t>
             </a:r>
           </a:p>
         </p:txBody>
@@ -11893,7 +11935,7 @@
                 <a:ea typeface="맑은 고딕"/>
                 <a:cs typeface="맑은 고딕"/>
               </a:rPr>
-              <a:t>본편(22장) · 보너스(10장) · 후속(12장) — 각각 독립 발표 가능합니다.</a:t>
+              <a:t>본편(22장) · 보너스(10장) · 후속(15장) — 각각 독립 발표 가능합니다.</a:t>
             </a:r>
           </a:p>
         </p:txBody>
@@ -12269,7 +12311,7 @@
                 <a:ea typeface="맑은 고딕"/>
                 <a:cs typeface="맑은 고딕"/>
               </a:rPr>
-              <a:t>agent_setup/test_router.py — 검증 32건 (32/32 PASS)</a:t>
+              <a:t>agent_setup/test_router.py — 검증 56건 (56/56 PASS)</a:t>
             </a:r>
           </a:p>
           <a:p>
@@ -12290,7 +12332,7 @@
                 <a:ea typeface="맑은 고딕"/>
                 <a:cs typeface="맑은 고딕"/>
               </a:rPr>
-              <a:t>presentation/build/ — 이 덱들을 만든 빌드 스크립트 전부</a:t>
+              <a:t>presentation/deckgen/ — 이 덱들을 만든 빌드 스크립트 전부</a:t>
             </a:r>
           </a:p>
           <a:p>
@@ -20265,7 +20307,7 @@
                 <a:ea typeface="맑은 고딕"/>
                 <a:cs typeface="맑은 고딕"/>
               </a:rPr>
-              <a:t>FOLLOW-UP · 검증</a:t>
+              <a:t>FOLLOW-UP · 구현 티어</a:t>
             </a:r>
           </a:p>
         </p:txBody>
@@ -20306,7 +20348,7 @@
                 <a:ea typeface="맑은 고딕"/>
                 <a:cs typeface="맑은 고딕"/>
               </a:rPr>
-              <a:t>"결정된 사항은 성능차가 없다"— 절반만 맞다</a:t>
+              <a:t>구현은 중간 모델로 내려도 되나</a:t>
             </a:r>
           </a:p>
         </p:txBody>
@@ -20432,7 +20474,7 @@
                 <a:ea typeface="맑은 고딕"/>
                 <a:cs typeface="맑은 고딕"/>
               </a:rPr>
-              <a:t>원안의 주장을 그대로 싣지 않았다. 논문 4편을 확인한 결과, 조건을 붙여야 참이 된다.</a:t>
+              <a:t>스펙이 정해진 구현은 상위 모델을 덜 탄다. 다만 무조건은 아니다.</a:t>
             </a:r>
           </a:p>
         </p:txBody>
@@ -20563,7 +20605,7 @@
                 <a:ea typeface="맑은 고딕"/>
                 <a:cs typeface="맑은 고딕"/>
               </a:rPr>
-              <a:t>원안 (✗)</a:t>
+              <a:t>이렇게 내리면 사고가 난다 (✗)</a:t>
             </a:r>
           </a:p>
           <a:p>
@@ -20584,7 +20626,7 @@
                 <a:ea typeface="맑은 고딕"/>
                 <a:cs typeface="맑은 고딕"/>
               </a:rPr>
-              <a:t>"코딩은 이미 결정된 사항에서는 성능차가 없다"</a:t>
+              <a:t>"스펙만 정해졌으면 아무 모델이나 된다"</a:t>
             </a:r>
           </a:p>
         </p:txBody>
@@ -20715,7 +20757,7 @@
                 <a:ea typeface="맑은 고딕"/>
                 <a:cs typeface="맑은 고딕"/>
               </a:rPr>
-              <a:t>정밀화 (○)</a:t>
+              <a:t>내려도 되는 기준 (○)</a:t>
             </a:r>
           </a:p>
           <a:p>
@@ -21245,7 +21287,7 @@
                 <a:ea typeface="맑은 고딕"/>
                 <a:cs typeface="맑은 고딕"/>
               </a:rPr>
-              <a:t>반대 근거도 같이 본다 — pass@1을 10% 올리려면 VRAM 약 4배가 필요하고, Rosetta Code 번역에서는 파라미터 수에 따라 성능이 계속 스케일한다. 스펙이 모호하거나 다단계 추론이 필요하면 격차는 그대로 남는다.</a:t>
+              <a:t>반대 방향 근거 — pass@1을 10% 올리려면 VRAM 약 4배가 필요하고, Rosetta Code 번역에서는 파라미터 수에 따라 성능이 계속 스케일한다. 스펙이 모호하거나 다단계 추론이 필요하면 격차는 그대로 남는다.</a:t>
             </a:r>
           </a:p>
         </p:txBody>
@@ -21433,7 +21475,7 @@
                 <a:ea typeface="맑은 고딕"/>
                 <a:cs typeface="맑은 고딕"/>
               </a:rPr>
-              <a:t>FOLLOW-UP · 검증</a:t>
+              <a:t>FOLLOW-UP · 비동기 처리</a:t>
             </a:r>
           </a:p>
         </p:txBody>
@@ -21600,7 +21642,7 @@
                 <a:ea typeface="맑은 고딕"/>
                 <a:cs typeface="맑은 고딕"/>
               </a:rPr>
-              <a:t>"24시간이라지만 보통 10분 이내 시작"— 이 부분도 확인이 필요했다.</a:t>
+              <a:t>반값은 사실이다. 문제는 언제 끝나는지를 아무도 약속하지 않는다는 것이다.</a:t>
             </a:r>
           </a:p>
         </p:txBody>
@@ -22683,7 +22725,7 @@
                 <a:ea typeface="맑은 고딕"/>
                 <a:cs typeface="맑은 고딕"/>
               </a:rPr>
-              <a:t>실제로 벌어진 일</a:t>
+              <a:t>실제로 깨진 사례</a:t>
             </a:r>
           </a:p>
         </p:txBody>

--- a/presentation/토큰_절약_발표_후속_에이전트셋팅.pptx
+++ b/presentation/토큰_절약_발표_후속_에이전트셋팅.pptx
@@ -3664,7 +3664,7 @@
                 <a:ea typeface="맑은 고딕"/>
                 <a:cs typeface="맑은 고딕"/>
               </a:rPr>
-              <a:t>실패하면 — 모델만 올리지 않는다</a:t>
+              <a:t>실패하면 — 한 칸에 하나씩만 올린다</a:t>
             </a:r>
           </a:p>
         </p:txBody>
@@ -3803,8 +3803,8 @@
         </p:nvSpPr>
         <p:spPr>
           <a:xfrm>
-            <a:off x="685800" y="2194560"/>
-            <a:ext cx="5394960" cy="914400"/>
+            <a:off x="685800" y="2148840"/>
+            <a:ext cx="5394960" cy="868680"/>
           </a:xfrm>
           <a:prstGeom prst="roundRect">
             <a:avLst>
@@ -3849,8 +3849,8 @@
         </p:nvSpPr>
         <p:spPr>
           <a:xfrm>
-            <a:off x="685800" y="2194560"/>
-            <a:ext cx="50292" cy="914400"/>
+            <a:off x="685800" y="2148840"/>
+            <a:ext cx="50292" cy="868680"/>
           </a:xfrm>
           <a:prstGeom prst="rect">
             <a:avLst/>
@@ -3893,8 +3893,8 @@
         </p:nvSpPr>
         <p:spPr>
           <a:xfrm>
-            <a:off x="960120" y="2340864"/>
-            <a:ext cx="5029200" cy="731520"/>
+            <a:off x="960120" y="2276856"/>
+            <a:ext cx="5029200" cy="713232"/>
           </a:xfrm>
           <a:prstGeom prst="rect">
             <a:avLst/>
@@ -3942,7 +3942,7 @@
                 <a:ea typeface="맑은 고딕"/>
                 <a:cs typeface="맑은 고딕"/>
               </a:rPr>
-              <a:t>같은 범위에 더 비싼 모델을 다시 넣는다.</a:t>
+              <a:t>첫 실패에 곧바로 모델을 올리고 세션까지 새로 연다. 싸게 끝날 일을 비싸게 만든다.</a:t>
             </a:r>
           </a:p>
         </p:txBody>
@@ -3955,8 +3955,8 @@
         </p:nvSpPr>
         <p:spPr>
           <a:xfrm>
-            <a:off x="6172200" y="2194560"/>
-            <a:ext cx="5349240" cy="914400"/>
+            <a:off x="6172200" y="2148840"/>
+            <a:ext cx="5349240" cy="868680"/>
           </a:xfrm>
           <a:prstGeom prst="roundRect">
             <a:avLst>
@@ -4001,8 +4001,8 @@
         </p:nvSpPr>
         <p:spPr>
           <a:xfrm>
-            <a:off x="6172200" y="2194560"/>
-            <a:ext cx="50292" cy="914400"/>
+            <a:off x="6172200" y="2148840"/>
+            <a:ext cx="50292" cy="868680"/>
           </a:xfrm>
           <a:prstGeom prst="rect">
             <a:avLst/>
@@ -4045,8 +4045,8 @@
         </p:nvSpPr>
         <p:spPr>
           <a:xfrm>
-            <a:off x="6446520" y="2340864"/>
-            <a:ext cx="4983480" cy="731520"/>
+            <a:off x="6446520" y="2276856"/>
+            <a:ext cx="4983480" cy="713232"/>
           </a:xfrm>
           <a:prstGeom prst="rect">
             <a:avLst/>
@@ -4094,7 +4094,7 @@
                 <a:ea typeface="맑은 고딕"/>
                 <a:cs typeface="맑은 고딕"/>
               </a:rPr>
-              <a:t>범위와 티어를 같이 올린다. 2회 이상 실패는 범위가 잘못 잘린 신호다.</a:t>
+              <a:t>축은 셋 — 재시도 · 범위 · 모델. 한 칸에 하나씩만 움직인다.</a:t>
             </a:r>
           </a:p>
         </p:txBody>
@@ -4107,8 +4107,8 @@
         </p:nvSpPr>
         <p:spPr>
           <a:xfrm>
-            <a:off x="685800" y="3310128"/>
-            <a:ext cx="10835640" cy="384048"/>
+            <a:off x="685800" y="3154680"/>
+            <a:ext cx="10835640" cy="347472"/>
           </a:xfrm>
           <a:prstGeom prst="rect">
             <a:avLst/>
@@ -4151,8 +4151,8 @@
         </p:nvSpPr>
         <p:spPr>
           <a:xfrm>
-            <a:off x="813816" y="3392424"/>
-            <a:ext cx="1005840" cy="384048"/>
+            <a:off x="813816" y="3236976"/>
+            <a:ext cx="868680" cy="347472"/>
           </a:xfrm>
           <a:prstGeom prst="rect">
             <a:avLst/>
@@ -4192,8 +4192,8 @@
         </p:nvSpPr>
         <p:spPr>
           <a:xfrm>
-            <a:off x="2002536" y="3392424"/>
-            <a:ext cx="1371600" cy="384048"/>
+            <a:off x="1865376" y="3236976"/>
+            <a:ext cx="960120" cy="347472"/>
           </a:xfrm>
           <a:prstGeom prst="rect">
             <a:avLst/>
@@ -4233,8 +4233,8 @@
         </p:nvSpPr>
         <p:spPr>
           <a:xfrm>
-            <a:off x="3557016" y="3392424"/>
-            <a:ext cx="3794759" cy="384048"/>
+            <a:off x="3008376" y="3236976"/>
+            <a:ext cx="3108960" cy="347472"/>
           </a:xfrm>
           <a:prstGeom prst="rect">
             <a:avLst/>
@@ -4274,8 +4274,8 @@
         </p:nvSpPr>
         <p:spPr>
           <a:xfrm>
-            <a:off x="7534656" y="3392424"/>
-            <a:ext cx="3931920" cy="384048"/>
+            <a:off x="6300216" y="3236976"/>
+            <a:ext cx="731520" cy="347472"/>
           </a:xfrm>
           <a:prstGeom prst="rect">
             <a:avLst/>
@@ -4302,21 +4302,62 @@
                 <a:ea typeface="맑은 고딕"/>
                 <a:cs typeface="맑은 고딕"/>
               </a:rPr>
-              <a:t>이번에 바뀌는 것</a:t>
-            </a:r>
-          </a:p>
-        </p:txBody>
-      </p:sp>
-      <p:sp>
-        <p:nvSpPr>
-          <p:cNvPr id="20" name="Rectangle 19"/>
+              <a:t>세션</a:t>
+            </a:r>
+          </a:p>
+        </p:txBody>
+      </p:sp>
+      <p:sp>
+        <p:nvSpPr>
+          <p:cNvPr id="20" name="TextBox 19"/>
+          <p:cNvSpPr txBox="1"/>
+          <p:nvPr/>
+        </p:nvSpPr>
+        <p:spPr>
+          <a:xfrm>
+            <a:off x="7214616" y="3236976"/>
+            <a:ext cx="4251959" cy="347472"/>
+          </a:xfrm>
+          <a:prstGeom prst="rect">
+            <a:avLst/>
+          </a:prstGeom>
+          <a:noFill/>
+        </p:spPr>
+        <p:txBody>
+          <a:bodyPr wrap="square" lIns="0" rIns="0" tIns="0" bIns="0" anchor="t">
+            <a:spAutoFit/>
+          </a:bodyPr>
+          <a:lstStyle/>
+          <a:p>
+            <a:pPr algn="l">
+              <a:lnSpc>
+                <a:spcPct val="115000"/>
+              </a:lnSpc>
+            </a:pPr>
+            <a:r>
+              <a:rPr sz="1300" b="1">
+                <a:solidFill>
+                  <a:srgbClr val="36D399"/>
+                </a:solidFill>
+                <a:latin typeface="맑은 고딕"/>
+                <a:ea typeface="맑은 고딕"/>
+                <a:cs typeface="맑은 고딕"/>
+              </a:rPr>
+              <a:t>이번에 올리는 축</a:t>
+            </a:r>
+          </a:p>
+        </p:txBody>
+      </p:sp>
+      <p:sp>
+        <p:nvSpPr>
+          <p:cNvPr id="21" name="Rectangle 20"/>
           <p:cNvSpPr/>
           <p:nvPr/>
         </p:nvSpPr>
         <p:spPr>
           <a:xfrm>
-            <a:off x="685800" y="3694176"/>
-            <a:ext cx="10835640" cy="384048"/>
+            <a:off x="685800" y="3502152"/>
+            <a:ext cx="10835640" cy="347472"/>
           </a:xfrm>
           <a:prstGeom prst="rect">
             <a:avLst/>
@@ -4353,33 +4394,33 @@
       </p:sp>
       <p:sp>
         <p:nvSpPr>
-          <p:cNvPr id="21" name="TextBox 20"/>
-          <p:cNvSpPr txBox="1"/>
-          <p:nvPr/>
-        </p:nvSpPr>
-        <p:spPr>
-          <a:xfrm>
-            <a:off x="813816" y="3776472"/>
-            <a:ext cx="1005840" cy="384048"/>
-          </a:xfrm>
-          <a:prstGeom prst="rect">
-            <a:avLst/>
-          </a:prstGeom>
-          <a:noFill/>
-        </p:spPr>
-        <p:txBody>
-          <a:bodyPr wrap="square" lIns="0" rIns="0" tIns="0" bIns="0" anchor="t">
-            <a:spAutoFit/>
-          </a:bodyPr>
-          <a:lstStyle/>
-          <a:p>
-            <a:pPr algn="l">
-              <a:lnSpc>
-                <a:spcPct val="115000"/>
-              </a:lnSpc>
-            </a:pPr>
-            <a:r>
-              <a:rPr sz="1250" b="0">
+          <p:cNvPr id="22" name="TextBox 21"/>
+          <p:cNvSpPr txBox="1"/>
+          <p:nvPr/>
+        </p:nvSpPr>
+        <p:spPr>
+          <a:xfrm>
+            <a:off x="813816" y="3584448"/>
+            <a:ext cx="868680" cy="347472"/>
+          </a:xfrm>
+          <a:prstGeom prst="rect">
+            <a:avLst/>
+          </a:prstGeom>
+          <a:noFill/>
+        </p:spPr>
+        <p:txBody>
+          <a:bodyPr wrap="square" lIns="0" rIns="0" tIns="0" bIns="0" anchor="t">
+            <a:spAutoFit/>
+          </a:bodyPr>
+          <a:lstStyle/>
+          <a:p>
+            <a:pPr algn="l">
+              <a:lnSpc>
+                <a:spcPct val="115000"/>
+              </a:lnSpc>
+            </a:pPr>
+            <a:r>
+              <a:rPr sz="1150" b="0">
                 <a:solidFill>
                   <a:srgbClr val="ECF1F6"/>
                 </a:solidFill>
@@ -4394,33 +4435,33 @@
       </p:sp>
       <p:sp>
         <p:nvSpPr>
-          <p:cNvPr id="22" name="TextBox 21"/>
-          <p:cNvSpPr txBox="1"/>
-          <p:nvPr/>
-        </p:nvSpPr>
-        <p:spPr>
-          <a:xfrm>
-            <a:off x="2002536" y="3776472"/>
-            <a:ext cx="1371600" cy="384048"/>
-          </a:xfrm>
-          <a:prstGeom prst="rect">
-            <a:avLst/>
-          </a:prstGeom>
-          <a:noFill/>
-        </p:spPr>
-        <p:txBody>
-          <a:bodyPr wrap="square" lIns="0" rIns="0" tIns="0" bIns="0" anchor="t">
-            <a:spAutoFit/>
-          </a:bodyPr>
-          <a:lstStyle/>
-          <a:p>
-            <a:pPr algn="l">
-              <a:lnSpc>
-                <a:spcPct val="115000"/>
-              </a:lnSpc>
-            </a:pPr>
-            <a:r>
-              <a:rPr sz="1250" b="0">
+          <p:cNvPr id="23" name="TextBox 22"/>
+          <p:cNvSpPr txBox="1"/>
+          <p:nvPr/>
+        </p:nvSpPr>
+        <p:spPr>
+          <a:xfrm>
+            <a:off x="1865376" y="3584448"/>
+            <a:ext cx="960120" cy="347472"/>
+          </a:xfrm>
+          <a:prstGeom prst="rect">
+            <a:avLst/>
+          </a:prstGeom>
+          <a:noFill/>
+        </p:spPr>
+        <p:txBody>
+          <a:bodyPr wrap="square" lIns="0" rIns="0" tIns="0" bIns="0" anchor="t">
+            <a:spAutoFit/>
+          </a:bodyPr>
+          <a:lstStyle/>
+          <a:p>
+            <a:pPr algn="l">
+              <a:lnSpc>
+                <a:spcPct val="115000"/>
+              </a:lnSpc>
+            </a:pPr>
+            <a:r>
+              <a:rPr sz="1150" b="0">
                 <a:solidFill>
                   <a:srgbClr val="ECF1F6"/>
                 </a:solidFill>
@@ -4435,33 +4476,33 @@
       </p:sp>
       <p:sp>
         <p:nvSpPr>
-          <p:cNvPr id="23" name="TextBox 22"/>
-          <p:cNvSpPr txBox="1"/>
-          <p:nvPr/>
-        </p:nvSpPr>
-        <p:spPr>
-          <a:xfrm>
-            <a:off x="3557016" y="3776472"/>
-            <a:ext cx="3794759" cy="384048"/>
-          </a:xfrm>
-          <a:prstGeom prst="rect">
-            <a:avLst/>
-          </a:prstGeom>
-          <a:noFill/>
-        </p:spPr>
-        <p:txBody>
-          <a:bodyPr wrap="square" lIns="0" rIns="0" tIns="0" bIns="0" anchor="t">
-            <a:spAutoFit/>
-          </a:bodyPr>
-          <a:lstStyle/>
-          <a:p>
-            <a:pPr algn="l">
-              <a:lnSpc>
-                <a:spcPct val="115000"/>
-              </a:lnSpc>
-            </a:pPr>
-            <a:r>
-              <a:rPr sz="1250" b="0">
+          <p:cNvPr id="24" name="TextBox 23"/>
+          <p:cNvSpPr txBox="1"/>
+          <p:nvPr/>
+        </p:nvSpPr>
+        <p:spPr>
+          <a:xfrm>
+            <a:off x="3008376" y="3584448"/>
+            <a:ext cx="3108960" cy="347472"/>
+          </a:xfrm>
+          <a:prstGeom prst="rect">
+            <a:avLst/>
+          </a:prstGeom>
+          <a:noFill/>
+        </p:spPr>
+        <p:txBody>
+          <a:bodyPr wrap="square" lIns="0" rIns="0" tIns="0" bIns="0" anchor="t">
+            <a:spAutoFit/>
+          </a:bodyPr>
+          <a:lstStyle/>
+          <a:p>
+            <a:pPr algn="l">
+              <a:lnSpc>
+                <a:spcPct val="115000"/>
+              </a:lnSpc>
+            </a:pPr>
+            <a:r>
+              <a:rPr sz="1150" b="0">
                 <a:solidFill>
                   <a:srgbClr val="ECF1F6"/>
                 </a:solidFill>
@@ -4476,33 +4517,33 @@
       </p:sp>
       <p:sp>
         <p:nvSpPr>
-          <p:cNvPr id="24" name="TextBox 23"/>
-          <p:cNvSpPr txBox="1"/>
-          <p:nvPr/>
-        </p:nvSpPr>
-        <p:spPr>
-          <a:xfrm>
-            <a:off x="7534656" y="3776472"/>
-            <a:ext cx="3931920" cy="384048"/>
-          </a:xfrm>
-          <a:prstGeom prst="rect">
-            <a:avLst/>
-          </a:prstGeom>
-          <a:noFill/>
-        </p:spPr>
-        <p:txBody>
-          <a:bodyPr wrap="square" lIns="0" rIns="0" tIns="0" bIns="0" anchor="t">
-            <a:spAutoFit/>
-          </a:bodyPr>
-          <a:lstStyle/>
-          <a:p>
-            <a:pPr algn="l">
-              <a:lnSpc>
-                <a:spcPct val="115000"/>
-              </a:lnSpc>
-            </a:pPr>
-            <a:r>
-              <a:rPr sz="1250" b="0">
+          <p:cNvPr id="25" name="TextBox 24"/>
+          <p:cNvSpPr txBox="1"/>
+          <p:nvPr/>
+        </p:nvSpPr>
+        <p:spPr>
+          <a:xfrm>
+            <a:off x="6300216" y="3584448"/>
+            <a:ext cx="731520" cy="347472"/>
+          </a:xfrm>
+          <a:prstGeom prst="rect">
+            <a:avLst/>
+          </a:prstGeom>
+          <a:noFill/>
+        </p:spPr>
+        <p:txBody>
+          <a:bodyPr wrap="square" lIns="0" rIns="0" tIns="0" bIns="0" anchor="t">
+            <a:spAutoFit/>
+          </a:bodyPr>
+          <a:lstStyle/>
+          <a:p>
+            <a:pPr algn="l">
+              <a:lnSpc>
+                <a:spcPct val="115000"/>
+              </a:lnSpc>
+            </a:pPr>
+            <a:r>
+              <a:rPr sz="1150" b="0">
                 <a:solidFill>
                   <a:srgbClr val="ECF1F6"/>
                 </a:solidFill>
@@ -4510,6 +4551,47 @@
                 <a:ea typeface="맑은 고딕"/>
                 <a:cs typeface="맑은 고딕"/>
               </a:rPr>
+              <a:t>유지</a:t>
+            </a:r>
+          </a:p>
+        </p:txBody>
+      </p:sp>
+      <p:sp>
+        <p:nvSpPr>
+          <p:cNvPr id="26" name="TextBox 25"/>
+          <p:cNvSpPr txBox="1"/>
+          <p:nvPr/>
+        </p:nvSpPr>
+        <p:spPr>
+          <a:xfrm>
+            <a:off x="7214616" y="3584448"/>
+            <a:ext cx="4251959" cy="347472"/>
+          </a:xfrm>
+          <a:prstGeom prst="rect">
+            <a:avLst/>
+          </a:prstGeom>
+          <a:noFill/>
+        </p:spPr>
+        <p:txBody>
+          <a:bodyPr wrap="square" lIns="0" rIns="0" tIns="0" bIns="0" anchor="t">
+            <a:spAutoFit/>
+          </a:bodyPr>
+          <a:lstStyle/>
+          <a:p>
+            <a:pPr algn="l">
+              <a:lnSpc>
+                <a:spcPct val="115000"/>
+              </a:lnSpc>
+            </a:pPr>
+            <a:r>
+              <a:rPr sz="1150" b="0">
+                <a:solidFill>
+                  <a:srgbClr val="ECF1F6"/>
+                </a:solidFill>
+                <a:latin typeface="맑은 고딕"/>
+                <a:ea typeface="맑은 고딕"/>
+                <a:cs typeface="맑은 고딕"/>
+              </a:rPr>
               <a:t>첫 배정</a:t>
             </a:r>
           </a:p>
@@ -4517,33 +4599,33 @@
       </p:sp>
       <p:sp>
         <p:nvSpPr>
-          <p:cNvPr id="25" name="TextBox 24"/>
-          <p:cNvSpPr txBox="1"/>
-          <p:nvPr/>
-        </p:nvSpPr>
-        <p:spPr>
-          <a:xfrm>
-            <a:off x="813816" y="4160520"/>
-            <a:ext cx="1005840" cy="384048"/>
-          </a:xfrm>
-          <a:prstGeom prst="rect">
-            <a:avLst/>
-          </a:prstGeom>
-          <a:noFill/>
-        </p:spPr>
-        <p:txBody>
-          <a:bodyPr wrap="square" lIns="0" rIns="0" tIns="0" bIns="0" anchor="t">
-            <a:spAutoFit/>
-          </a:bodyPr>
-          <a:lstStyle/>
-          <a:p>
-            <a:pPr algn="l">
-              <a:lnSpc>
-                <a:spcPct val="115000"/>
-              </a:lnSpc>
-            </a:pPr>
-            <a:r>
-              <a:rPr sz="1250" b="0">
+          <p:cNvPr id="27" name="TextBox 26"/>
+          <p:cNvSpPr txBox="1"/>
+          <p:nvPr/>
+        </p:nvSpPr>
+        <p:spPr>
+          <a:xfrm>
+            <a:off x="813816" y="3931920"/>
+            <a:ext cx="868680" cy="347472"/>
+          </a:xfrm>
+          <a:prstGeom prst="rect">
+            <a:avLst/>
+          </a:prstGeom>
+          <a:noFill/>
+        </p:spPr>
+        <p:txBody>
+          <a:bodyPr wrap="square" lIns="0" rIns="0" tIns="0" bIns="0" anchor="t">
+            <a:spAutoFit/>
+          </a:bodyPr>
+          <a:lstStyle/>
+          <a:p>
+            <a:pPr algn="l">
+              <a:lnSpc>
+                <a:spcPct val="115000"/>
+              </a:lnSpc>
+            </a:pPr>
+            <a:r>
+              <a:rPr sz="1150" b="0">
                 <a:solidFill>
                   <a:srgbClr val="ECF1F6"/>
                 </a:solidFill>
@@ -4558,33 +4640,33 @@
       </p:sp>
       <p:sp>
         <p:nvSpPr>
-          <p:cNvPr id="26" name="TextBox 25"/>
-          <p:cNvSpPr txBox="1"/>
-          <p:nvPr/>
-        </p:nvSpPr>
-        <p:spPr>
-          <a:xfrm>
-            <a:off x="2002536" y="4160520"/>
-            <a:ext cx="1371600" cy="384048"/>
-          </a:xfrm>
-          <a:prstGeom prst="rect">
-            <a:avLst/>
-          </a:prstGeom>
-          <a:noFill/>
-        </p:spPr>
-        <p:txBody>
-          <a:bodyPr wrap="square" lIns="0" rIns="0" tIns="0" bIns="0" anchor="t">
-            <a:spAutoFit/>
-          </a:bodyPr>
-          <a:lstStyle/>
-          <a:p>
-            <a:pPr algn="l">
-              <a:lnSpc>
-                <a:spcPct val="115000"/>
-              </a:lnSpc>
-            </a:pPr>
-            <a:r>
-              <a:rPr sz="1250" b="0">
+          <p:cNvPr id="28" name="TextBox 27"/>
+          <p:cNvSpPr txBox="1"/>
+          <p:nvPr/>
+        </p:nvSpPr>
+        <p:spPr>
+          <a:xfrm>
+            <a:off x="1865376" y="3931920"/>
+            <a:ext cx="960120" cy="347472"/>
+          </a:xfrm>
+          <a:prstGeom prst="rect">
+            <a:avLst/>
+          </a:prstGeom>
+          <a:noFill/>
+        </p:spPr>
+        <p:txBody>
+          <a:bodyPr wrap="square" lIns="0" rIns="0" tIns="0" bIns="0" anchor="t">
+            <a:spAutoFit/>
+          </a:bodyPr>
+          <a:lstStyle/>
+          <a:p>
+            <a:pPr algn="l">
+              <a:lnSpc>
+                <a:spcPct val="115000"/>
+              </a:lnSpc>
+            </a:pPr>
+            <a:r>
+              <a:rPr sz="1150" b="0">
                 <a:solidFill>
                   <a:srgbClr val="ECF1F6"/>
                 </a:solidFill>
@@ -4592,40 +4674,40 @@
                 <a:ea typeface="맑은 고딕"/>
                 <a:cs typeface="맑은 고딕"/>
               </a:rPr>
-              <a:t>LARGE</a:t>
-            </a:r>
-          </a:p>
-        </p:txBody>
-      </p:sp>
-      <p:sp>
-        <p:nvSpPr>
-          <p:cNvPr id="27" name="TextBox 26"/>
-          <p:cNvSpPr txBox="1"/>
-          <p:nvPr/>
-        </p:nvSpPr>
-        <p:spPr>
-          <a:xfrm>
-            <a:off x="3557016" y="4160520"/>
-            <a:ext cx="3794759" cy="384048"/>
-          </a:xfrm>
-          <a:prstGeom prst="rect">
-            <a:avLst/>
-          </a:prstGeom>
-          <a:noFill/>
-        </p:spPr>
-        <p:txBody>
-          <a:bodyPr wrap="square" lIns="0" rIns="0" tIns="0" bIns="0" anchor="t">
-            <a:spAutoFit/>
-          </a:bodyPr>
-          <a:lstStyle/>
-          <a:p>
-            <a:pPr algn="l">
-              <a:lnSpc>
-                <a:spcPct val="115000"/>
-              </a:lnSpc>
-            </a:pPr>
-            <a:r>
-              <a:rPr sz="1250" b="0">
+              <a:t>MID</a:t>
+            </a:r>
+          </a:p>
+        </p:txBody>
+      </p:sp>
+      <p:sp>
+        <p:nvSpPr>
+          <p:cNvPr id="29" name="TextBox 28"/>
+          <p:cNvSpPr txBox="1"/>
+          <p:nvPr/>
+        </p:nvSpPr>
+        <p:spPr>
+          <a:xfrm>
+            <a:off x="3008376" y="3931920"/>
+            <a:ext cx="3108960" cy="347472"/>
+          </a:xfrm>
+          <a:prstGeom prst="rect">
+            <a:avLst/>
+          </a:prstGeom>
+          <a:noFill/>
+        </p:spPr>
+        <p:txBody>
+          <a:bodyPr wrap="square" lIns="0" rIns="0" tIns="0" bIns="0" anchor="t">
+            <a:spAutoFit/>
+          </a:bodyPr>
+          <a:lstStyle/>
+          <a:p>
+            <a:pPr algn="l">
+              <a:lnSpc>
+                <a:spcPct val="115000"/>
+              </a:lnSpc>
+            </a:pPr>
+            <a:r>
+              <a:rPr sz="1150" b="0">
                 <a:solidFill>
                   <a:srgbClr val="ECF1F6"/>
                 </a:solidFill>
@@ -4633,40 +4715,81 @@
                 <a:ea typeface="맑은 고딕"/>
                 <a:cs typeface="맑은 고딕"/>
               </a:rPr>
-              <a:t>파일 전체 + 호출부</a:t>
-            </a:r>
-          </a:p>
-        </p:txBody>
-      </p:sp>
-      <p:sp>
-        <p:nvSpPr>
-          <p:cNvPr id="28" name="TextBox 27"/>
-          <p:cNvSpPr txBox="1"/>
-          <p:nvPr/>
-        </p:nvSpPr>
-        <p:spPr>
-          <a:xfrm>
-            <a:off x="7534656" y="4160520"/>
-            <a:ext cx="3931920" cy="384048"/>
-          </a:xfrm>
-          <a:prstGeom prst="rect">
-            <a:avLst/>
-          </a:prstGeom>
-          <a:noFill/>
-        </p:spPr>
-        <p:txBody>
-          <a:bodyPr wrap="square" lIns="0" rIns="0" tIns="0" bIns="0" anchor="t">
-            <a:spAutoFit/>
-          </a:bodyPr>
-          <a:lstStyle/>
-          <a:p>
-            <a:pPr algn="l">
-              <a:lnSpc>
-                <a:spcPct val="115000"/>
-              </a:lnSpc>
-            </a:pPr>
-            <a:r>
-              <a:rPr sz="1250" b="1">
+              <a:t>실패한 함수/블록만</a:t>
+            </a:r>
+          </a:p>
+        </p:txBody>
+      </p:sp>
+      <p:sp>
+        <p:nvSpPr>
+          <p:cNvPr id="30" name="TextBox 29"/>
+          <p:cNvSpPr txBox="1"/>
+          <p:nvPr/>
+        </p:nvSpPr>
+        <p:spPr>
+          <a:xfrm>
+            <a:off x="6300216" y="3931920"/>
+            <a:ext cx="731520" cy="347472"/>
+          </a:xfrm>
+          <a:prstGeom prst="rect">
+            <a:avLst/>
+          </a:prstGeom>
+          <a:noFill/>
+        </p:spPr>
+        <p:txBody>
+          <a:bodyPr wrap="square" lIns="0" rIns="0" tIns="0" bIns="0" anchor="t">
+            <a:spAutoFit/>
+          </a:bodyPr>
+          <a:lstStyle/>
+          <a:p>
+            <a:pPr algn="l">
+              <a:lnSpc>
+                <a:spcPct val="115000"/>
+              </a:lnSpc>
+            </a:pPr>
+            <a:r>
+              <a:rPr sz="1150" b="0">
+                <a:solidFill>
+                  <a:srgbClr val="ECF1F6"/>
+                </a:solidFill>
+                <a:latin typeface="맑은 고딕"/>
+                <a:ea typeface="맑은 고딕"/>
+                <a:cs typeface="맑은 고딕"/>
+              </a:rPr>
+              <a:t>유지</a:t>
+            </a:r>
+          </a:p>
+        </p:txBody>
+      </p:sp>
+      <p:sp>
+        <p:nvSpPr>
+          <p:cNvPr id="31" name="TextBox 30"/>
+          <p:cNvSpPr txBox="1"/>
+          <p:nvPr/>
+        </p:nvSpPr>
+        <p:spPr>
+          <a:xfrm>
+            <a:off x="7214616" y="3931920"/>
+            <a:ext cx="4251959" cy="347472"/>
+          </a:xfrm>
+          <a:prstGeom prst="rect">
+            <a:avLst/>
+          </a:prstGeom>
+          <a:noFill/>
+        </p:spPr>
+        <p:txBody>
+          <a:bodyPr wrap="square" lIns="0" rIns="0" tIns="0" bIns="0" anchor="t">
+            <a:spAutoFit/>
+          </a:bodyPr>
+          <a:lstStyle/>
+          <a:p>
+            <a:pPr algn="l">
+              <a:lnSpc>
+                <a:spcPct val="115000"/>
+              </a:lnSpc>
+            </a:pPr>
+            <a:r>
+              <a:rPr sz="1150" b="1">
                 <a:solidFill>
                   <a:srgbClr val="5A9CFF"/>
                 </a:solidFill>
@@ -4674,21 +4797,21 @@
                 <a:ea typeface="맑은 고딕"/>
                 <a:cs typeface="맑은 고딕"/>
               </a:rPr>
-              <a:t>실패 로그·diff 첨부</a:t>
-            </a:r>
-          </a:p>
-        </p:txBody>
-      </p:sp>
-      <p:sp>
-        <p:nvSpPr>
-          <p:cNvPr id="29" name="Rectangle 28"/>
+              <a:t>재시도 — 실패 로그·diff만 추가</a:t>
+            </a:r>
+          </a:p>
+        </p:txBody>
+      </p:sp>
+      <p:sp>
+        <p:nvSpPr>
+          <p:cNvPr id="32" name="Rectangle 31"/>
           <p:cNvSpPr/>
           <p:nvPr/>
         </p:nvSpPr>
         <p:spPr>
           <a:xfrm>
-            <a:off x="685800" y="4462272"/>
-            <a:ext cx="10835640" cy="384048"/>
+            <a:off x="685800" y="4197096"/>
+            <a:ext cx="10835640" cy="347472"/>
           </a:xfrm>
           <a:prstGeom prst="rect">
             <a:avLst/>
@@ -4725,33 +4848,33 @@
       </p:sp>
       <p:sp>
         <p:nvSpPr>
-          <p:cNvPr id="30" name="TextBox 29"/>
-          <p:cNvSpPr txBox="1"/>
-          <p:nvPr/>
-        </p:nvSpPr>
-        <p:spPr>
-          <a:xfrm>
-            <a:off x="813816" y="4544568"/>
-            <a:ext cx="1005840" cy="384048"/>
-          </a:xfrm>
-          <a:prstGeom prst="rect">
-            <a:avLst/>
-          </a:prstGeom>
-          <a:noFill/>
-        </p:spPr>
-        <p:txBody>
-          <a:bodyPr wrap="square" lIns="0" rIns="0" tIns="0" bIns="0" anchor="t">
-            <a:spAutoFit/>
-          </a:bodyPr>
-          <a:lstStyle/>
-          <a:p>
-            <a:pPr algn="l">
-              <a:lnSpc>
-                <a:spcPct val="115000"/>
-              </a:lnSpc>
-            </a:pPr>
-            <a:r>
-              <a:rPr sz="1250" b="0">
+          <p:cNvPr id="33" name="TextBox 32"/>
+          <p:cNvSpPr txBox="1"/>
+          <p:nvPr/>
+        </p:nvSpPr>
+        <p:spPr>
+          <a:xfrm>
+            <a:off x="813816" y="4279392"/>
+            <a:ext cx="868680" cy="347472"/>
+          </a:xfrm>
+          <a:prstGeom prst="rect">
+            <a:avLst/>
+          </a:prstGeom>
+          <a:noFill/>
+        </p:spPr>
+        <p:txBody>
+          <a:bodyPr wrap="square" lIns="0" rIns="0" tIns="0" bIns="0" anchor="t">
+            <a:spAutoFit/>
+          </a:bodyPr>
+          <a:lstStyle/>
+          <a:p>
+            <a:pPr algn="l">
+              <a:lnSpc>
+                <a:spcPct val="115000"/>
+              </a:lnSpc>
+            </a:pPr>
+            <a:r>
+              <a:rPr sz="1150" b="0">
                 <a:solidFill>
                   <a:srgbClr val="ECF1F6"/>
                 </a:solidFill>
@@ -4766,33 +4889,33 @@
       </p:sp>
       <p:sp>
         <p:nvSpPr>
-          <p:cNvPr id="31" name="TextBox 30"/>
-          <p:cNvSpPr txBox="1"/>
-          <p:nvPr/>
-        </p:nvSpPr>
-        <p:spPr>
-          <a:xfrm>
-            <a:off x="2002536" y="4544568"/>
-            <a:ext cx="1371600" cy="384048"/>
-          </a:xfrm>
-          <a:prstGeom prst="rect">
-            <a:avLst/>
-          </a:prstGeom>
-          <a:noFill/>
-        </p:spPr>
-        <p:txBody>
-          <a:bodyPr wrap="square" lIns="0" rIns="0" tIns="0" bIns="0" anchor="t">
-            <a:spAutoFit/>
-          </a:bodyPr>
-          <a:lstStyle/>
-          <a:p>
-            <a:pPr algn="l">
-              <a:lnSpc>
-                <a:spcPct val="115000"/>
-              </a:lnSpc>
-            </a:pPr>
-            <a:r>
-              <a:rPr sz="1250" b="0">
+          <p:cNvPr id="34" name="TextBox 33"/>
+          <p:cNvSpPr txBox="1"/>
+          <p:nvPr/>
+        </p:nvSpPr>
+        <p:spPr>
+          <a:xfrm>
+            <a:off x="1865376" y="4279392"/>
+            <a:ext cx="960120" cy="347472"/>
+          </a:xfrm>
+          <a:prstGeom prst="rect">
+            <a:avLst/>
+          </a:prstGeom>
+          <a:noFill/>
+        </p:spPr>
+        <p:txBody>
+          <a:bodyPr wrap="square" lIns="0" rIns="0" tIns="0" bIns="0" anchor="t">
+            <a:spAutoFit/>
+          </a:bodyPr>
+          <a:lstStyle/>
+          <a:p>
+            <a:pPr algn="l">
+              <a:lnSpc>
+                <a:spcPct val="115000"/>
+              </a:lnSpc>
+            </a:pPr>
+            <a:r>
+              <a:rPr sz="1150" b="0">
                 <a:solidFill>
                   <a:srgbClr val="ECF1F6"/>
                 </a:solidFill>
@@ -4800,6 +4923,211 @@
                 <a:ea typeface="맑은 고딕"/>
                 <a:cs typeface="맑은 고딕"/>
               </a:rPr>
+              <a:t>MID</a:t>
+            </a:r>
+          </a:p>
+        </p:txBody>
+      </p:sp>
+      <p:sp>
+        <p:nvSpPr>
+          <p:cNvPr id="35" name="TextBox 34"/>
+          <p:cNvSpPr txBox="1"/>
+          <p:nvPr/>
+        </p:nvSpPr>
+        <p:spPr>
+          <a:xfrm>
+            <a:off x="3008376" y="4279392"/>
+            <a:ext cx="3108960" cy="347472"/>
+          </a:xfrm>
+          <a:prstGeom prst="rect">
+            <a:avLst/>
+          </a:prstGeom>
+          <a:noFill/>
+        </p:spPr>
+        <p:txBody>
+          <a:bodyPr wrap="square" lIns="0" rIns="0" tIns="0" bIns="0" anchor="t">
+            <a:spAutoFit/>
+          </a:bodyPr>
+          <a:lstStyle/>
+          <a:p>
+            <a:pPr algn="l">
+              <a:lnSpc>
+                <a:spcPct val="115000"/>
+              </a:lnSpc>
+            </a:pPr>
+            <a:r>
+              <a:rPr sz="1150" b="0">
+                <a:solidFill>
+                  <a:srgbClr val="ECF1F6"/>
+                </a:solidFill>
+                <a:latin typeface="맑은 고딕"/>
+                <a:ea typeface="맑은 고딕"/>
+                <a:cs typeface="맑은 고딕"/>
+              </a:rPr>
+              <a:t>파일 전체 + 호출부</a:t>
+            </a:r>
+          </a:p>
+        </p:txBody>
+      </p:sp>
+      <p:sp>
+        <p:nvSpPr>
+          <p:cNvPr id="36" name="TextBox 35"/>
+          <p:cNvSpPr txBox="1"/>
+          <p:nvPr/>
+        </p:nvSpPr>
+        <p:spPr>
+          <a:xfrm>
+            <a:off x="6300216" y="4279392"/>
+            <a:ext cx="731520" cy="347472"/>
+          </a:xfrm>
+          <a:prstGeom prst="rect">
+            <a:avLst/>
+          </a:prstGeom>
+          <a:noFill/>
+        </p:spPr>
+        <p:txBody>
+          <a:bodyPr wrap="square" lIns="0" rIns="0" tIns="0" bIns="0" anchor="t">
+            <a:spAutoFit/>
+          </a:bodyPr>
+          <a:lstStyle/>
+          <a:p>
+            <a:pPr algn="l">
+              <a:lnSpc>
+                <a:spcPct val="115000"/>
+              </a:lnSpc>
+            </a:pPr>
+            <a:r>
+              <a:rPr sz="1150" b="1">
+                <a:solidFill>
+                  <a:srgbClr val="FFB04D"/>
+                </a:solidFill>
+                <a:latin typeface="맑은 고딕"/>
+                <a:ea typeface="맑은 고딕"/>
+                <a:cs typeface="맑은 고딕"/>
+              </a:rPr>
+              <a:t>새 세션</a:t>
+            </a:r>
+          </a:p>
+        </p:txBody>
+      </p:sp>
+      <p:sp>
+        <p:nvSpPr>
+          <p:cNvPr id="37" name="TextBox 36"/>
+          <p:cNvSpPr txBox="1"/>
+          <p:nvPr/>
+        </p:nvSpPr>
+        <p:spPr>
+          <a:xfrm>
+            <a:off x="7214616" y="4279392"/>
+            <a:ext cx="4251959" cy="347472"/>
+          </a:xfrm>
+          <a:prstGeom prst="rect">
+            <a:avLst/>
+          </a:prstGeom>
+          <a:noFill/>
+        </p:spPr>
+        <p:txBody>
+          <a:bodyPr wrap="square" lIns="0" rIns="0" tIns="0" bIns="0" anchor="t">
+            <a:spAutoFit/>
+          </a:bodyPr>
+          <a:lstStyle/>
+          <a:p>
+            <a:pPr algn="l">
+              <a:lnSpc>
+                <a:spcPct val="115000"/>
+              </a:lnSpc>
+            </a:pPr>
+            <a:r>
+              <a:rPr sz="1150" b="1">
+                <a:solidFill>
+                  <a:srgbClr val="5A9CFF"/>
+                </a:solidFill>
+                <a:latin typeface="맑은 고딕"/>
+                <a:ea typeface="맑은 고딕"/>
+                <a:cs typeface="맑은 고딕"/>
+              </a:rPr>
+              <a:t>범위 ↑  (모델은 그대로)</a:t>
+            </a:r>
+          </a:p>
+        </p:txBody>
+      </p:sp>
+      <p:sp>
+        <p:nvSpPr>
+          <p:cNvPr id="38" name="TextBox 37"/>
+          <p:cNvSpPr txBox="1"/>
+          <p:nvPr/>
+        </p:nvSpPr>
+        <p:spPr>
+          <a:xfrm>
+            <a:off x="813816" y="4626864"/>
+            <a:ext cx="868680" cy="347472"/>
+          </a:xfrm>
+          <a:prstGeom prst="rect">
+            <a:avLst/>
+          </a:prstGeom>
+          <a:noFill/>
+        </p:spPr>
+        <p:txBody>
+          <a:bodyPr wrap="square" lIns="0" rIns="0" tIns="0" bIns="0" anchor="t">
+            <a:spAutoFit/>
+          </a:bodyPr>
+          <a:lstStyle/>
+          <a:p>
+            <a:pPr algn="l">
+              <a:lnSpc>
+                <a:spcPct val="115000"/>
+              </a:lnSpc>
+            </a:pPr>
+            <a:r>
+              <a:rPr sz="1150" b="0">
+                <a:solidFill>
+                  <a:srgbClr val="ECF1F6"/>
+                </a:solidFill>
+                <a:latin typeface="맑은 고딕"/>
+                <a:ea typeface="맑은 고딕"/>
+                <a:cs typeface="맑은 고딕"/>
+              </a:rPr>
+              <a:t>4회차</a:t>
+            </a:r>
+          </a:p>
+        </p:txBody>
+      </p:sp>
+      <p:sp>
+        <p:nvSpPr>
+          <p:cNvPr id="39" name="TextBox 38"/>
+          <p:cNvSpPr txBox="1"/>
+          <p:nvPr/>
+        </p:nvSpPr>
+        <p:spPr>
+          <a:xfrm>
+            <a:off x="1865376" y="4626864"/>
+            <a:ext cx="960120" cy="347472"/>
+          </a:xfrm>
+          <a:prstGeom prst="rect">
+            <a:avLst/>
+          </a:prstGeom>
+          <a:noFill/>
+        </p:spPr>
+        <p:txBody>
+          <a:bodyPr wrap="square" lIns="0" rIns="0" tIns="0" bIns="0" anchor="t">
+            <a:spAutoFit/>
+          </a:bodyPr>
+          <a:lstStyle/>
+          <a:p>
+            <a:pPr algn="l">
+              <a:lnSpc>
+                <a:spcPct val="115000"/>
+              </a:lnSpc>
+            </a:pPr>
+            <a:r>
+              <a:rPr sz="1150" b="1">
+                <a:solidFill>
+                  <a:srgbClr val="FFB04D"/>
+                </a:solidFill>
+                <a:latin typeface="맑은 고딕"/>
+                <a:ea typeface="맑은 고딕"/>
+                <a:cs typeface="맑은 고딕"/>
+              </a:rPr>
               <a:t>LARGE</a:t>
             </a:r>
           </a:p>
@@ -4807,33 +5135,33 @@
       </p:sp>
       <p:sp>
         <p:nvSpPr>
-          <p:cNvPr id="32" name="TextBox 31"/>
-          <p:cNvSpPr txBox="1"/>
-          <p:nvPr/>
-        </p:nvSpPr>
-        <p:spPr>
-          <a:xfrm>
-            <a:off x="3557016" y="4544568"/>
-            <a:ext cx="3794759" cy="384048"/>
-          </a:xfrm>
-          <a:prstGeom prst="rect">
-            <a:avLst/>
-          </a:prstGeom>
-          <a:noFill/>
-        </p:spPr>
-        <p:txBody>
-          <a:bodyPr wrap="square" lIns="0" rIns="0" tIns="0" bIns="0" anchor="t">
-            <a:spAutoFit/>
-          </a:bodyPr>
-          <a:lstStyle/>
-          <a:p>
-            <a:pPr algn="l">
-              <a:lnSpc>
-                <a:spcPct val="115000"/>
-              </a:lnSpc>
-            </a:pPr>
-            <a:r>
-              <a:rPr sz="1250" b="0">
+          <p:cNvPr id="40" name="TextBox 39"/>
+          <p:cNvSpPr txBox="1"/>
+          <p:nvPr/>
+        </p:nvSpPr>
+        <p:spPr>
+          <a:xfrm>
+            <a:off x="3008376" y="4626864"/>
+            <a:ext cx="3108960" cy="347472"/>
+          </a:xfrm>
+          <a:prstGeom prst="rect">
+            <a:avLst/>
+          </a:prstGeom>
+          <a:noFill/>
+        </p:spPr>
+        <p:txBody>
+          <a:bodyPr wrap="square" lIns="0" rIns="0" tIns="0" bIns="0" anchor="t">
+            <a:spAutoFit/>
+          </a:bodyPr>
+          <a:lstStyle/>
+          <a:p>
+            <a:pPr algn="l">
+              <a:lnSpc>
+                <a:spcPct val="115000"/>
+              </a:lnSpc>
+            </a:pPr>
+            <a:r>
+              <a:rPr sz="1150" b="0">
                 <a:solidFill>
                   <a:srgbClr val="ECF1F6"/>
                 </a:solidFill>
@@ -4841,81 +5169,166 @@
                 <a:ea typeface="맑은 고딕"/>
                 <a:cs typeface="맑은 고딕"/>
               </a:rPr>
-              <a:t>모듈 + 인접 계약</a:t>
-            </a:r>
-          </a:p>
-        </p:txBody>
-      </p:sp>
-      <p:sp>
-        <p:nvSpPr>
-          <p:cNvPr id="33" name="TextBox 32"/>
-          <p:cNvSpPr txBox="1"/>
-          <p:nvPr/>
-        </p:nvSpPr>
-        <p:spPr>
-          <a:xfrm>
-            <a:off x="7534656" y="4544568"/>
-            <a:ext cx="3931920" cy="384048"/>
-          </a:xfrm>
-          <a:prstGeom prst="rect">
-            <a:avLst/>
-          </a:prstGeom>
-          <a:noFill/>
-        </p:spPr>
-        <p:txBody>
-          <a:bodyPr wrap="square" lIns="0" rIns="0" tIns="0" bIns="0" anchor="t">
-            <a:spAutoFit/>
-          </a:bodyPr>
-          <a:lstStyle/>
-          <a:p>
-            <a:pPr algn="l">
-              <a:lnSpc>
-                <a:spcPct val="115000"/>
-              </a:lnSpc>
-            </a:pPr>
-            <a:r>
-              <a:rPr sz="1250" b="1">
-                <a:solidFill>
-                  <a:srgbClr val="5A9CFF"/>
-                </a:solidFill>
-                <a:latin typeface="맑은 고딕"/>
-                <a:ea typeface="맑은 고딕"/>
-                <a:cs typeface="맑은 고딕"/>
-              </a:rPr>
-              <a:t>테스트 먼저 작성 강제</a:t>
-            </a:r>
-          </a:p>
-        </p:txBody>
-      </p:sp>
-      <p:sp>
-        <p:nvSpPr>
-          <p:cNvPr id="34" name="TextBox 33"/>
-          <p:cNvSpPr txBox="1"/>
-          <p:nvPr/>
-        </p:nvSpPr>
-        <p:spPr>
-          <a:xfrm>
-            <a:off x="813816" y="4928616"/>
-            <a:ext cx="1005840" cy="384048"/>
-          </a:xfrm>
-          <a:prstGeom prst="rect">
-            <a:avLst/>
-          </a:prstGeom>
-          <a:noFill/>
-        </p:spPr>
-        <p:txBody>
-          <a:bodyPr wrap="square" lIns="0" rIns="0" tIns="0" bIns="0" anchor="t">
-            <a:spAutoFit/>
-          </a:bodyPr>
-          <a:lstStyle/>
-          <a:p>
-            <a:pPr algn="l">
-              <a:lnSpc>
-                <a:spcPct val="115000"/>
-              </a:lnSpc>
-            </a:pPr>
-            <a:r>
-              <a:rPr sz="1250" b="0">
+              <a:t>파일 전체 + 호출부</a:t>
+            </a:r>
+          </a:p>
+        </p:txBody>
+      </p:sp>
+      <p:sp>
+        <p:nvSpPr>
+          <p:cNvPr id="41" name="TextBox 40"/>
+          <p:cNvSpPr txBox="1"/>
+          <p:nvPr/>
+        </p:nvSpPr>
+        <p:spPr>
+          <a:xfrm>
+            <a:off x="6300216" y="4626864"/>
+            <a:ext cx="731520" cy="347472"/>
+          </a:xfrm>
+          <a:prstGeom prst="rect">
+            <a:avLst/>
+          </a:prstGeom>
+          <a:noFill/>
+        </p:spPr>
+        <p:txBody>
+          <a:bodyPr wrap="square" lIns="0" rIns="0" tIns="0" bIns="0" anchor="t">
+            <a:spAutoFit/>
+          </a:bodyPr>
+          <a:lstStyle/>
+          <a:p>
+            <a:pPr algn="l">
+              <a:lnSpc>
+                <a:spcPct val="115000"/>
+              </a:lnSpc>
+            </a:pPr>
+            <a:r>
+              <a:rPr sz="1150" b="1">
+                <a:solidFill>
+                  <a:srgbClr val="FFB04D"/>
+                </a:solidFill>
+                <a:latin typeface="맑은 고딕"/>
+                <a:ea typeface="맑은 고딕"/>
+                <a:cs typeface="맑은 고딕"/>
+              </a:rPr>
+              <a:t>새 세션</a:t>
+            </a:r>
+          </a:p>
+        </p:txBody>
+      </p:sp>
+      <p:sp>
+        <p:nvSpPr>
+          <p:cNvPr id="42" name="TextBox 41"/>
+          <p:cNvSpPr txBox="1"/>
+          <p:nvPr/>
+        </p:nvSpPr>
+        <p:spPr>
+          <a:xfrm>
+            <a:off x="7214616" y="4626864"/>
+            <a:ext cx="4251959" cy="347472"/>
+          </a:xfrm>
+          <a:prstGeom prst="rect">
+            <a:avLst/>
+          </a:prstGeom>
+          <a:noFill/>
+        </p:spPr>
+        <p:txBody>
+          <a:bodyPr wrap="square" lIns="0" rIns="0" tIns="0" bIns="0" anchor="t">
+            <a:spAutoFit/>
+          </a:bodyPr>
+          <a:lstStyle/>
+          <a:p>
+            <a:pPr algn="l">
+              <a:lnSpc>
+                <a:spcPct val="115000"/>
+              </a:lnSpc>
+            </a:pPr>
+            <a:r>
+              <a:rPr sz="1150" b="1">
+                <a:solidFill>
+                  <a:srgbClr val="FFB04D"/>
+                </a:solidFill>
+                <a:latin typeface="맑은 고딕"/>
+                <a:ea typeface="맑은 고딕"/>
+                <a:cs typeface="맑은 고딕"/>
+              </a:rPr>
+              <a:t>모델 ↑  (범위는 그대로)</a:t>
+            </a:r>
+          </a:p>
+        </p:txBody>
+      </p:sp>
+      <p:sp>
+        <p:nvSpPr>
+          <p:cNvPr id="43" name="Rectangle 42"/>
+          <p:cNvSpPr/>
+          <p:nvPr/>
+        </p:nvSpPr>
+        <p:spPr>
+          <a:xfrm>
+            <a:off x="685800" y="4892040"/>
+            <a:ext cx="10835640" cy="347472"/>
+          </a:xfrm>
+          <a:prstGeom prst="rect">
+            <a:avLst/>
+          </a:prstGeom>
+          <a:solidFill>
+            <a:srgbClr val="111A24"/>
+          </a:solidFill>
+          <a:ln>
+            <a:noFill/>
+          </a:ln>
+          <a:effectLst/>
+        </p:spPr>
+        <p:style>
+          <a:lnRef idx="1">
+            <a:schemeClr val="accent1"/>
+          </a:lnRef>
+          <a:fillRef idx="3">
+            <a:schemeClr val="accent1"/>
+          </a:fillRef>
+          <a:effectRef idx="2">
+            <a:schemeClr val="accent1"/>
+          </a:effectRef>
+          <a:fontRef idx="minor">
+            <a:schemeClr val="lt1"/>
+          </a:fontRef>
+        </p:style>
+        <p:txBody>
+          <a:bodyPr rtlCol="0" anchor="ctr"/>
+          <a:lstStyle/>
+          <a:p>
+            <a:pPr algn="ctr"/>
+          </a:p>
+        </p:txBody>
+      </p:sp>
+      <p:sp>
+        <p:nvSpPr>
+          <p:cNvPr id="44" name="TextBox 43"/>
+          <p:cNvSpPr txBox="1"/>
+          <p:nvPr/>
+        </p:nvSpPr>
+        <p:spPr>
+          <a:xfrm>
+            <a:off x="813816" y="4974336"/>
+            <a:ext cx="868680" cy="347472"/>
+          </a:xfrm>
+          <a:prstGeom prst="rect">
+            <a:avLst/>
+          </a:prstGeom>
+          <a:noFill/>
+        </p:spPr>
+        <p:txBody>
+          <a:bodyPr wrap="square" lIns="0" rIns="0" tIns="0" bIns="0" anchor="t">
+            <a:spAutoFit/>
+          </a:bodyPr>
+          <a:lstStyle/>
+          <a:p>
+            <a:pPr algn="l">
+              <a:lnSpc>
+                <a:spcPct val="115000"/>
+              </a:lnSpc>
+            </a:pPr>
+            <a:r>
+              <a:rPr sz="1150" b="0">
                 <a:solidFill>
                   <a:srgbClr val="ECF1F6"/>
                 </a:solidFill>
@@ -4923,40 +5336,40 @@
                 <a:ea typeface="맑은 고딕"/>
                 <a:cs typeface="맑은 고딕"/>
               </a:rPr>
-              <a:t>4회차</a:t>
-            </a:r>
-          </a:p>
-        </p:txBody>
-      </p:sp>
-      <p:sp>
-        <p:nvSpPr>
-          <p:cNvPr id="35" name="TextBox 34"/>
-          <p:cNvSpPr txBox="1"/>
-          <p:nvPr/>
-        </p:nvSpPr>
-        <p:spPr>
-          <a:xfrm>
-            <a:off x="2002536" y="4928616"/>
-            <a:ext cx="1371600" cy="384048"/>
-          </a:xfrm>
-          <a:prstGeom prst="rect">
-            <a:avLst/>
-          </a:prstGeom>
-          <a:noFill/>
-        </p:spPr>
-        <p:txBody>
-          <a:bodyPr wrap="square" lIns="0" rIns="0" tIns="0" bIns="0" anchor="t">
-            <a:spAutoFit/>
-          </a:bodyPr>
-          <a:lstStyle/>
-          <a:p>
-            <a:pPr algn="l">
-              <a:lnSpc>
-                <a:spcPct val="115000"/>
-              </a:lnSpc>
-            </a:pPr>
-            <a:r>
-              <a:rPr sz="1250" b="1">
+              <a:t>5회차</a:t>
+            </a:r>
+          </a:p>
+        </p:txBody>
+      </p:sp>
+      <p:sp>
+        <p:nvSpPr>
+          <p:cNvPr id="45" name="TextBox 44"/>
+          <p:cNvSpPr txBox="1"/>
+          <p:nvPr/>
+        </p:nvSpPr>
+        <p:spPr>
+          <a:xfrm>
+            <a:off x="1865376" y="4974336"/>
+            <a:ext cx="960120" cy="347472"/>
+          </a:xfrm>
+          <a:prstGeom prst="rect">
+            <a:avLst/>
+          </a:prstGeom>
+          <a:noFill/>
+        </p:spPr>
+        <p:txBody>
+          <a:bodyPr wrap="square" lIns="0" rIns="0" tIns="0" bIns="0" anchor="t">
+            <a:spAutoFit/>
+          </a:bodyPr>
+          <a:lstStyle/>
+          <a:p>
+            <a:pPr algn="l">
+              <a:lnSpc>
+                <a:spcPct val="115000"/>
+              </a:lnSpc>
+            </a:pPr>
+            <a:r>
+              <a:rPr sz="1150" b="1">
                 <a:solidFill>
                   <a:srgbClr val="FF6B6B"/>
                 </a:solidFill>
@@ -4971,33 +5384,33 @@
       </p:sp>
       <p:sp>
         <p:nvSpPr>
-          <p:cNvPr id="36" name="TextBox 35"/>
-          <p:cNvSpPr txBox="1"/>
-          <p:nvPr/>
-        </p:nvSpPr>
-        <p:spPr>
-          <a:xfrm>
-            <a:off x="3557016" y="4928616"/>
-            <a:ext cx="3794759" cy="384048"/>
-          </a:xfrm>
-          <a:prstGeom prst="rect">
-            <a:avLst/>
-          </a:prstGeom>
-          <a:noFill/>
-        </p:spPr>
-        <p:txBody>
-          <a:bodyPr wrap="square" lIns="0" rIns="0" tIns="0" bIns="0" anchor="t">
-            <a:spAutoFit/>
-          </a:bodyPr>
-          <a:lstStyle/>
-          <a:p>
-            <a:pPr algn="l">
-              <a:lnSpc>
-                <a:spcPct val="115000"/>
-              </a:lnSpc>
-            </a:pPr>
-            <a:r>
-              <a:rPr sz="1250" b="1">
+          <p:cNvPr id="46" name="TextBox 45"/>
+          <p:cNvSpPr txBox="1"/>
+          <p:nvPr/>
+        </p:nvSpPr>
+        <p:spPr>
+          <a:xfrm>
+            <a:off x="3008376" y="4974336"/>
+            <a:ext cx="3108960" cy="347472"/>
+          </a:xfrm>
+          <a:prstGeom prst="rect">
+            <a:avLst/>
+          </a:prstGeom>
+          <a:noFill/>
+        </p:spPr>
+        <p:txBody>
+          <a:bodyPr wrap="square" lIns="0" rIns="0" tIns="0" bIns="0" anchor="t">
+            <a:spAutoFit/>
+          </a:bodyPr>
+          <a:lstStyle/>
+          <a:p>
+            <a:pPr algn="l">
+              <a:lnSpc>
+                <a:spcPct val="115000"/>
+              </a:lnSpc>
+            </a:pPr>
+            <a:r>
+              <a:rPr sz="1150" b="1">
                 <a:solidFill>
                   <a:srgbClr val="FF6B6B"/>
                 </a:solidFill>
@@ -5012,33 +5425,33 @@
       </p:sp>
       <p:sp>
         <p:nvSpPr>
-          <p:cNvPr id="37" name="TextBox 36"/>
-          <p:cNvSpPr txBox="1"/>
-          <p:nvPr/>
-        </p:nvSpPr>
-        <p:spPr>
-          <a:xfrm>
-            <a:off x="7534656" y="4928616"/>
-            <a:ext cx="3931920" cy="384048"/>
-          </a:xfrm>
-          <a:prstGeom prst="rect">
-            <a:avLst/>
-          </a:prstGeom>
-          <a:noFill/>
-        </p:spPr>
-        <p:txBody>
-          <a:bodyPr wrap="square" lIns="0" rIns="0" tIns="0" bIns="0" anchor="t">
-            <a:spAutoFit/>
-          </a:bodyPr>
-          <a:lstStyle/>
-          <a:p>
-            <a:pPr algn="l">
-              <a:lnSpc>
-                <a:spcPct val="115000"/>
-              </a:lnSpc>
-            </a:pPr>
-            <a:r>
-              <a:rPr sz="1250" b="1">
+          <p:cNvPr id="47" name="TextBox 46"/>
+          <p:cNvSpPr txBox="1"/>
+          <p:nvPr/>
+        </p:nvSpPr>
+        <p:spPr>
+          <a:xfrm>
+            <a:off x="6300216" y="4974336"/>
+            <a:ext cx="731520" cy="347472"/>
+          </a:xfrm>
+          <a:prstGeom prst="rect">
+            <a:avLst/>
+          </a:prstGeom>
+          <a:noFill/>
+        </p:spPr>
+        <p:txBody>
+          <a:bodyPr wrap="square" lIns="0" rIns="0" tIns="0" bIns="0" anchor="t">
+            <a:spAutoFit/>
+          </a:bodyPr>
+          <a:lstStyle/>
+          <a:p>
+            <a:pPr algn="l">
+              <a:lnSpc>
+                <a:spcPct val="115000"/>
+              </a:lnSpc>
+            </a:pPr>
+            <a:r>
+              <a:rPr sz="1150" b="1">
                 <a:solidFill>
                   <a:srgbClr val="FF6B6B"/>
                 </a:solidFill>
@@ -5046,21 +5459,62 @@
                 <a:ea typeface="맑은 고딕"/>
                 <a:cs typeface="맑은 고딕"/>
               </a:rPr>
-              <a:t>모델을 더 올리지 않는다</a:t>
-            </a:r>
-          </a:p>
-        </p:txBody>
-      </p:sp>
-      <p:sp>
-        <p:nvSpPr>
-          <p:cNvPr id="38" name="Rounded Rectangle 37"/>
+              <a:t>새 세션</a:t>
+            </a:r>
+          </a:p>
+        </p:txBody>
+      </p:sp>
+      <p:sp>
+        <p:nvSpPr>
+          <p:cNvPr id="48" name="TextBox 47"/>
+          <p:cNvSpPr txBox="1"/>
+          <p:nvPr/>
+        </p:nvSpPr>
+        <p:spPr>
+          <a:xfrm>
+            <a:off x="7214616" y="4974336"/>
+            <a:ext cx="4251959" cy="347472"/>
+          </a:xfrm>
+          <a:prstGeom prst="rect">
+            <a:avLst/>
+          </a:prstGeom>
+          <a:noFill/>
+        </p:spPr>
+        <p:txBody>
+          <a:bodyPr wrap="square" lIns="0" rIns="0" tIns="0" bIns="0" anchor="t">
+            <a:spAutoFit/>
+          </a:bodyPr>
+          <a:lstStyle/>
+          <a:p>
+            <a:pPr algn="l">
+              <a:lnSpc>
+                <a:spcPct val="115000"/>
+              </a:lnSpc>
+            </a:pPr>
+            <a:r>
+              <a:rPr sz="1150" b="1">
+                <a:solidFill>
+                  <a:srgbClr val="FF6B6B"/>
+                </a:solidFill>
+                <a:latin typeface="맑은 고딕"/>
+                <a:ea typeface="맑은 고딕"/>
+                <a:cs typeface="맑은 고딕"/>
+              </a:rPr>
+              <a:t>구현을 더 시키지 않는다</a:t>
+            </a:r>
+          </a:p>
+        </p:txBody>
+      </p:sp>
+      <p:sp>
+        <p:nvSpPr>
+          <p:cNvPr id="49" name="Rounded Rectangle 48"/>
           <p:cNvSpPr/>
           <p:nvPr/>
         </p:nvSpPr>
         <p:spPr>
           <a:xfrm>
-            <a:off x="685800" y="5230368"/>
-            <a:ext cx="10835640" cy="868680"/>
+            <a:off x="685800" y="5349240"/>
+            <a:ext cx="10835640" cy="749808"/>
           </a:xfrm>
           <a:prstGeom prst="roundRect">
             <a:avLst>
@@ -5099,14 +5553,14 @@
       </p:sp>
       <p:sp>
         <p:nvSpPr>
-          <p:cNvPr id="39" name="Rectangle 38"/>
+          <p:cNvPr id="50" name="Rectangle 49"/>
           <p:cNvSpPr/>
           <p:nvPr/>
         </p:nvSpPr>
         <p:spPr>
           <a:xfrm>
-            <a:off x="685800" y="5230368"/>
-            <a:ext cx="50292" cy="868680"/>
+            <a:off x="685800" y="5349240"/>
+            <a:ext cx="50292" cy="749808"/>
           </a:xfrm>
           <a:prstGeom prst="rect">
             <a:avLst/>
@@ -5143,14 +5597,14 @@
       </p:sp>
       <p:sp>
         <p:nvSpPr>
-          <p:cNvPr id="40" name="TextBox 39"/>
-          <p:cNvSpPr txBox="1"/>
-          <p:nvPr/>
-        </p:nvSpPr>
-        <p:spPr>
-          <a:xfrm>
-            <a:off x="960120" y="5358384"/>
-            <a:ext cx="10424160" cy="685800"/>
+          <p:cNvPr id="51" name="TextBox 50"/>
+          <p:cNvSpPr txBox="1"/>
+          <p:nvPr/>
+        </p:nvSpPr>
+        <p:spPr>
+          <a:xfrm>
+            <a:off x="960120" y="5458968"/>
+            <a:ext cx="10424160" cy="603504"/>
           </a:xfrm>
           <a:prstGeom prst="rect">
             <a:avLst/>
@@ -5177,7 +5631,7 @@
                 <a:ea typeface="맑은 고딕"/>
                 <a:cs typeface="맑은 고딕"/>
               </a:rPr>
-              <a:t>솔직히 — 이건 절감책이 아니라 보험이다</a:t>
+              <a:t>짧은 리워크에는 값을 물리지 않는다</a:t>
             </a:r>
           </a:p>
           <a:p>
@@ -5198,14 +5652,14 @@
                 <a:ea typeface="맑은 고딕"/>
                 <a:cs typeface="맑은 고딕"/>
               </a:rPr>
-              <a:t>턴당 단가는 오른다(2회차 3.28배). 대신 4회차에서 구현을 멈추므로 총비용이 $0.21에서 상한이 걸린다. 제자리 재시도는 상한이 없다.</a:t>
-            </a:r>
-          </a:p>
-        </p:txBody>
-      </p:sp>
-      <p:sp>
-        <p:nvSpPr>
-          <p:cNvPr id="41" name="TextBox 40"/>
+              <a:t>1회 실패로 끝나면 사다리 비용은 제자리 재시도와 정확히 같다($0.0545). 리셋은 3회차부터라 맥락 재장전 입력도 그때 처음 붙는다.</a:t>
+            </a:r>
+          </a:p>
+        </p:txBody>
+      </p:sp>
+      <p:sp>
+        <p:nvSpPr>
+          <p:cNvPr id="52" name="TextBox 51"/>
           <p:cNvSpPr txBox="1"/>
           <p:nvPr/>
         </p:nvSpPr>
@@ -5239,7 +5693,7 @@
                 <a:ea typeface="맑은 고딕"/>
                 <a:cs typeface="맑은 고딕"/>
               </a:rPr>
-              <a:t>측정 지표는 비용이 아니라 같은 작업이 몇 번 돌아왔는가다 — exp09-C의 48턴 리워크(16.6배)가 그 경고다.</a:t>
+              <a:t>세션 리셋은 실패 횟수가 아니라 방향이 어긋났을 때 건다 — 검증 실패는 결함이고, 결함은 같은 맥락 안에서 고치는 편이 싸다.</a:t>
             </a:r>
           </a:p>
         </p:txBody>
@@ -5427,7 +5881,7 @@
                 <a:ea typeface="맑은 고딕"/>
                 <a:cs typeface="맑은 고딕"/>
               </a:rPr>
-              <a:t>에스컬레이션은 비싸질까 — 숫자로</a:t>
+              <a:t>사다리는 비싸질까 — 숫자로</a:t>
             </a:r>
           </a:p>
         </p:txBody>
@@ -5553,7 +6007,7 @@
                 <a:ea typeface="맑은 고딕"/>
                 <a:cs typeface="맑은 고딕"/>
               </a:rPr>
-              <a:t>"비싼 모델로 올리면 비용이 폭발하지 않나" — 정당한 우려다. 세 가지로 나눠 답한다.</a:t>
+              <a:t>"단계를 밟다 보면 비용이 폭발하지 않나" — 정당한 우려다. 측정해서 답한다.</a:t>
             </a:r>
           </a:p>
         </p:txBody>
@@ -5567,7 +6021,7 @@
         <p:spPr>
           <a:xfrm>
             <a:off x="685800" y="2240280"/>
-            <a:ext cx="6858000" cy="338328"/>
+            <a:ext cx="6858000" cy="310896"/>
           </a:xfrm>
           <a:prstGeom prst="rect">
             <a:avLst/>
@@ -5611,7 +6065,7 @@
         <p:spPr>
           <a:xfrm>
             <a:off x="813816" y="2322576"/>
-            <a:ext cx="1737360" cy="338328"/>
+            <a:ext cx="1737360" cy="310896"/>
           </a:xfrm>
           <a:prstGeom prst="rect">
             <a:avLst/>
@@ -5652,7 +6106,7 @@
         <p:spPr>
           <a:xfrm>
             <a:off x="2734056" y="2322576"/>
-            <a:ext cx="1508760" cy="338328"/>
+            <a:ext cx="1508760" cy="310896"/>
           </a:xfrm>
           <a:prstGeom prst="rect">
             <a:avLst/>
@@ -5693,7 +6147,7 @@
         <p:spPr>
           <a:xfrm>
             <a:off x="4425696" y="2322576"/>
-            <a:ext cx="1508760" cy="338328"/>
+            <a:ext cx="1508760" cy="310896"/>
           </a:xfrm>
           <a:prstGeom prst="rect">
             <a:avLst/>
@@ -5720,7 +6174,7 @@
                 <a:ea typeface="맑은 고딕"/>
                 <a:cs typeface="맑은 고딕"/>
               </a:rPr>
-              <a:t>에스컬레이션</a:t>
+              <a:t>사다리</a:t>
             </a:r>
           </a:p>
         </p:txBody>
@@ -5734,7 +6188,7 @@
         <p:spPr>
           <a:xfrm>
             <a:off x="6117336" y="2322576"/>
-            <a:ext cx="1371600" cy="338328"/>
+            <a:ext cx="1371600" cy="310896"/>
           </a:xfrm>
           <a:prstGeom prst="rect">
             <a:avLst/>
@@ -5774,8 +6228,8 @@
         </p:nvSpPr>
         <p:spPr>
           <a:xfrm>
-            <a:off x="685800" y="2578608"/>
-            <a:ext cx="6858000" cy="338328"/>
+            <a:off x="685800" y="2551176"/>
+            <a:ext cx="6858000" cy="310896"/>
           </a:xfrm>
           <a:prstGeom prst="rect">
             <a:avLst/>
@@ -5818,8 +6272,8 @@
         </p:nvSpPr>
         <p:spPr>
           <a:xfrm>
-            <a:off x="813816" y="2660904"/>
-            <a:ext cx="1737360" cy="338328"/>
+            <a:off x="813816" y="2633472"/>
+            <a:ext cx="1737360" cy="310896"/>
           </a:xfrm>
           <a:prstGeom prst="rect">
             <a:avLst/>
@@ -5859,8 +6313,8 @@
         </p:nvSpPr>
         <p:spPr>
           <a:xfrm>
-            <a:off x="2734056" y="2660904"/>
-            <a:ext cx="1508760" cy="338328"/>
+            <a:off x="2734056" y="2633472"/>
+            <a:ext cx="1508760" cy="310896"/>
           </a:xfrm>
           <a:prstGeom prst="rect">
             <a:avLst/>
@@ -5900,8 +6354,8 @@
         </p:nvSpPr>
         <p:spPr>
           <a:xfrm>
-            <a:off x="4425696" y="2660904"/>
-            <a:ext cx="1508760" cy="338328"/>
+            <a:off x="4425696" y="2633472"/>
+            <a:ext cx="1508760" cy="310896"/>
           </a:xfrm>
           <a:prstGeom prst="rect">
             <a:avLst/>
@@ -5941,8 +6395,8 @@
         </p:nvSpPr>
         <p:spPr>
           <a:xfrm>
-            <a:off x="6117336" y="2660904"/>
-            <a:ext cx="1371600" cy="338328"/>
+            <a:off x="6117336" y="2633472"/>
+            <a:ext cx="1371600" cy="310896"/>
           </a:xfrm>
           <a:prstGeom prst="rect">
             <a:avLst/>
@@ -5982,8 +6436,8 @@
         </p:nvSpPr>
         <p:spPr>
           <a:xfrm>
-            <a:off x="813816" y="2999232"/>
-            <a:ext cx="1737360" cy="338328"/>
+            <a:off x="813816" y="2944368"/>
+            <a:ext cx="1737360" cy="310896"/>
           </a:xfrm>
           <a:prstGeom prst="rect">
             <a:avLst/>
@@ -6023,8 +6477,8 @@
         </p:nvSpPr>
         <p:spPr>
           <a:xfrm>
-            <a:off x="2734056" y="2999232"/>
-            <a:ext cx="1508760" cy="338328"/>
+            <a:off x="2734056" y="2944368"/>
+            <a:ext cx="1508760" cy="310896"/>
           </a:xfrm>
           <a:prstGeom prst="rect">
             <a:avLst/>
@@ -6064,8 +6518,8 @@
         </p:nvSpPr>
         <p:spPr>
           <a:xfrm>
-            <a:off x="4425696" y="2999232"/>
-            <a:ext cx="1508760" cy="338328"/>
+            <a:off x="4425696" y="2944368"/>
+            <a:ext cx="1508760" cy="310896"/>
           </a:xfrm>
           <a:prstGeom prst="rect">
             <a:avLst/>
@@ -6092,7 +6546,7 @@
                 <a:ea typeface="맑은 고딕"/>
                 <a:cs typeface="맑은 고딕"/>
               </a:rPr>
-              <a:t>$0.1166</a:t>
+              <a:t>$0.0545</a:t>
             </a:r>
           </a:p>
         </p:txBody>
@@ -6105,8 +6559,8 @@
         </p:nvSpPr>
         <p:spPr>
           <a:xfrm>
-            <a:off x="6117336" y="2999232"/>
-            <a:ext cx="1371600" cy="338328"/>
+            <a:off x="6117336" y="2944368"/>
+            <a:ext cx="1371600" cy="310896"/>
           </a:xfrm>
           <a:prstGeom prst="rect">
             <a:avLst/>
@@ -6127,13 +6581,13 @@
             <a:r>
               <a:rPr sz="1150" b="1">
                 <a:solidFill>
-                  <a:srgbClr val="FF6B6B"/>
-                </a:solidFill>
-                <a:latin typeface="맑은 고딕"/>
-                <a:ea typeface="맑은 고딕"/>
-                <a:cs typeface="맑은 고딕"/>
-              </a:rPr>
-              <a:t>2.14배</a:t>
+                  <a:srgbClr val="36D399"/>
+                </a:solidFill>
+                <a:latin typeface="맑은 고딕"/>
+                <a:ea typeface="맑은 고딕"/>
+                <a:cs typeface="맑은 고딕"/>
+              </a:rPr>
+              <a:t>동일 ← 차액 없음</a:t>
             </a:r>
           </a:p>
         </p:txBody>
@@ -6146,8 +6600,8 @@
         </p:nvSpPr>
         <p:spPr>
           <a:xfrm>
-            <a:off x="685800" y="3255264"/>
-            <a:ext cx="6858000" cy="338328"/>
+            <a:off x="685800" y="3172968"/>
+            <a:ext cx="6858000" cy="310896"/>
           </a:xfrm>
           <a:prstGeom prst="rect">
             <a:avLst/>
@@ -6190,8 +6644,8 @@
         </p:nvSpPr>
         <p:spPr>
           <a:xfrm>
-            <a:off x="813816" y="3337560"/>
-            <a:ext cx="1737360" cy="338328"/>
+            <a:off x="813816" y="3255264"/>
+            <a:ext cx="1737360" cy="310896"/>
           </a:xfrm>
           <a:prstGeom prst="rect">
             <a:avLst/>
@@ -6231,8 +6685,8 @@
         </p:nvSpPr>
         <p:spPr>
           <a:xfrm>
-            <a:off x="2734056" y="3337560"/>
-            <a:ext cx="1508760" cy="338328"/>
+            <a:off x="2734056" y="3255264"/>
+            <a:ext cx="1508760" cy="310896"/>
           </a:xfrm>
           <a:prstGeom prst="rect">
             <a:avLst/>
@@ -6272,8 +6726,8 @@
         </p:nvSpPr>
         <p:spPr>
           <a:xfrm>
-            <a:off x="4425696" y="3337560"/>
-            <a:ext cx="1508760" cy="338328"/>
+            <a:off x="4425696" y="3255264"/>
+            <a:ext cx="1508760" cy="310896"/>
           </a:xfrm>
           <a:prstGeom prst="rect">
             <a:avLst/>
@@ -6300,7 +6754,7 @@
                 <a:ea typeface="맑은 고딕"/>
                 <a:cs typeface="맑은 고딕"/>
               </a:rPr>
-              <a:t>$0.2132</a:t>
+              <a:t>$0.0839</a:t>
             </a:r>
           </a:p>
         </p:txBody>
@@ -6313,8 +6767,8 @@
         </p:nvSpPr>
         <p:spPr>
           <a:xfrm>
-            <a:off x="6117336" y="3337560"/>
-            <a:ext cx="1371600" cy="338328"/>
+            <a:off x="6117336" y="3255264"/>
+            <a:ext cx="1371600" cy="310896"/>
           </a:xfrm>
           <a:prstGeom prst="rect">
             <a:avLst/>
@@ -6335,177 +6789,177 @@
             <a:r>
               <a:rPr sz="1150" b="1">
                 <a:solidFill>
+                  <a:srgbClr val="93A4B5"/>
+                </a:solidFill>
+                <a:latin typeface="맑은 고딕"/>
+                <a:ea typeface="맑은 고딕"/>
+                <a:cs typeface="맑은 고딕"/>
+              </a:rPr>
+              <a:t>1.03배</a:t>
+            </a:r>
+          </a:p>
+        </p:txBody>
+      </p:sp>
+      <p:sp>
+        <p:nvSpPr>
+          <p:cNvPr id="28" name="TextBox 27"/>
+          <p:cNvSpPr txBox="1"/>
+          <p:nvPr/>
+        </p:nvSpPr>
+        <p:spPr>
+          <a:xfrm>
+            <a:off x="813816" y="3566160"/>
+            <a:ext cx="1737360" cy="310896"/>
+          </a:xfrm>
+          <a:prstGeom prst="rect">
+            <a:avLst/>
+          </a:prstGeom>
+          <a:noFill/>
+        </p:spPr>
+        <p:txBody>
+          <a:bodyPr wrap="square" lIns="0" rIns="0" tIns="0" bIns="0" anchor="t">
+            <a:spAutoFit/>
+          </a:bodyPr>
+          <a:lstStyle/>
+          <a:p>
+            <a:pPr algn="l">
+              <a:lnSpc>
+                <a:spcPct val="115000"/>
+              </a:lnSpc>
+            </a:pPr>
+            <a:r>
+              <a:rPr sz="1150" b="0">
+                <a:solidFill>
+                  <a:srgbClr val="ECF1F6"/>
+                </a:solidFill>
+                <a:latin typeface="맑은 고딕"/>
+                <a:ea typeface="맑은 고딕"/>
+                <a:cs typeface="맑은 고딕"/>
+              </a:rPr>
+              <a:t>3회</a:t>
+            </a:r>
+          </a:p>
+        </p:txBody>
+      </p:sp>
+      <p:sp>
+        <p:nvSpPr>
+          <p:cNvPr id="29" name="TextBox 28"/>
+          <p:cNvSpPr txBox="1"/>
+          <p:nvPr/>
+        </p:nvSpPr>
+        <p:spPr>
+          <a:xfrm>
+            <a:off x="2734056" y="3566160"/>
+            <a:ext cx="1508760" cy="310896"/>
+          </a:xfrm>
+          <a:prstGeom prst="rect">
+            <a:avLst/>
+          </a:prstGeom>
+          <a:noFill/>
+        </p:spPr>
+        <p:txBody>
+          <a:bodyPr wrap="square" lIns="0" rIns="0" tIns="0" bIns="0" anchor="t">
+            <a:spAutoFit/>
+          </a:bodyPr>
+          <a:lstStyle/>
+          <a:p>
+            <a:pPr algn="l">
+              <a:lnSpc>
+                <a:spcPct val="115000"/>
+              </a:lnSpc>
+            </a:pPr>
+            <a:r>
+              <a:rPr sz="1150" b="0">
+                <a:solidFill>
+                  <a:srgbClr val="ECF1F6"/>
+                </a:solidFill>
+                <a:latin typeface="맑은 고딕"/>
+                <a:ea typeface="맑은 고딕"/>
+                <a:cs typeface="맑은 고딕"/>
+              </a:rPr>
+              <a:t>$0.1090</a:t>
+            </a:r>
+          </a:p>
+        </p:txBody>
+      </p:sp>
+      <p:sp>
+        <p:nvSpPr>
+          <p:cNvPr id="30" name="TextBox 29"/>
+          <p:cNvSpPr txBox="1"/>
+          <p:nvPr/>
+        </p:nvSpPr>
+        <p:spPr>
+          <a:xfrm>
+            <a:off x="4425696" y="3566160"/>
+            <a:ext cx="1508760" cy="310896"/>
+          </a:xfrm>
+          <a:prstGeom prst="rect">
+            <a:avLst/>
+          </a:prstGeom>
+          <a:noFill/>
+        </p:spPr>
+        <p:txBody>
+          <a:bodyPr wrap="square" lIns="0" rIns="0" tIns="0" bIns="0" anchor="t">
+            <a:spAutoFit/>
+          </a:bodyPr>
+          <a:lstStyle/>
+          <a:p>
+            <a:pPr algn="l">
+              <a:lnSpc>
+                <a:spcPct val="115000"/>
+              </a:lnSpc>
+            </a:pPr>
+            <a:r>
+              <a:rPr sz="1150" b="0">
+                <a:solidFill>
+                  <a:srgbClr val="ECF1F6"/>
+                </a:solidFill>
+                <a:latin typeface="맑은 고딕"/>
+                <a:ea typeface="맑은 고딕"/>
+                <a:cs typeface="맑은 고딕"/>
+              </a:rPr>
+              <a:t>$0.1763</a:t>
+            </a:r>
+          </a:p>
+        </p:txBody>
+      </p:sp>
+      <p:sp>
+        <p:nvSpPr>
+          <p:cNvPr id="31" name="TextBox 30"/>
+          <p:cNvSpPr txBox="1"/>
+          <p:nvPr/>
+        </p:nvSpPr>
+        <p:spPr>
+          <a:xfrm>
+            <a:off x="6117336" y="3566160"/>
+            <a:ext cx="1371600" cy="310896"/>
+          </a:xfrm>
+          <a:prstGeom prst="rect">
+            <a:avLst/>
+          </a:prstGeom>
+          <a:noFill/>
+        </p:spPr>
+        <p:txBody>
+          <a:bodyPr wrap="square" lIns="0" rIns="0" tIns="0" bIns="0" anchor="t">
+            <a:spAutoFit/>
+          </a:bodyPr>
+          <a:lstStyle/>
+          <a:p>
+            <a:pPr algn="l">
+              <a:lnSpc>
+                <a:spcPct val="115000"/>
+              </a:lnSpc>
+            </a:pPr>
+            <a:r>
+              <a:rPr sz="1150" b="1">
+                <a:solidFill>
                   <a:srgbClr val="FF6B6B"/>
                 </a:solidFill>
                 <a:latin typeface="맑은 고딕"/>
                 <a:ea typeface="맑은 고딕"/>
                 <a:cs typeface="맑은 고딕"/>
               </a:rPr>
-              <a:t>2.61배 ← 최악</a:t>
-            </a:r>
-          </a:p>
-        </p:txBody>
-      </p:sp>
-      <p:sp>
-        <p:nvSpPr>
-          <p:cNvPr id="28" name="TextBox 27"/>
-          <p:cNvSpPr txBox="1"/>
-          <p:nvPr/>
-        </p:nvSpPr>
-        <p:spPr>
-          <a:xfrm>
-            <a:off x="813816" y="3675888"/>
-            <a:ext cx="1737360" cy="338328"/>
-          </a:xfrm>
-          <a:prstGeom prst="rect">
-            <a:avLst/>
-          </a:prstGeom>
-          <a:noFill/>
-        </p:spPr>
-        <p:txBody>
-          <a:bodyPr wrap="square" lIns="0" rIns="0" tIns="0" bIns="0" anchor="t">
-            <a:spAutoFit/>
-          </a:bodyPr>
-          <a:lstStyle/>
-          <a:p>
-            <a:pPr algn="l">
-              <a:lnSpc>
-                <a:spcPct val="115000"/>
-              </a:lnSpc>
-            </a:pPr>
-            <a:r>
-              <a:rPr sz="1150" b="0">
-                <a:solidFill>
-                  <a:srgbClr val="ECF1F6"/>
-                </a:solidFill>
-                <a:latin typeface="맑은 고딕"/>
-                <a:ea typeface="맑은 고딕"/>
-                <a:cs typeface="맑은 고딕"/>
-              </a:rPr>
-              <a:t>3회</a:t>
-            </a:r>
-          </a:p>
-        </p:txBody>
-      </p:sp>
-      <p:sp>
-        <p:nvSpPr>
-          <p:cNvPr id="29" name="TextBox 28"/>
-          <p:cNvSpPr txBox="1"/>
-          <p:nvPr/>
-        </p:nvSpPr>
-        <p:spPr>
-          <a:xfrm>
-            <a:off x="2734056" y="3675888"/>
-            <a:ext cx="1508760" cy="338328"/>
-          </a:xfrm>
-          <a:prstGeom prst="rect">
-            <a:avLst/>
-          </a:prstGeom>
-          <a:noFill/>
-        </p:spPr>
-        <p:txBody>
-          <a:bodyPr wrap="square" lIns="0" rIns="0" tIns="0" bIns="0" anchor="t">
-            <a:spAutoFit/>
-          </a:bodyPr>
-          <a:lstStyle/>
-          <a:p>
-            <a:pPr algn="l">
-              <a:lnSpc>
-                <a:spcPct val="115000"/>
-              </a:lnSpc>
-            </a:pPr>
-            <a:r>
-              <a:rPr sz="1150" b="0">
-                <a:solidFill>
-                  <a:srgbClr val="ECF1F6"/>
-                </a:solidFill>
-                <a:latin typeface="맑은 고딕"/>
-                <a:ea typeface="맑은 고딕"/>
-                <a:cs typeface="맑은 고딕"/>
-              </a:rPr>
-              <a:t>$0.1090</a:t>
-            </a:r>
-          </a:p>
-        </p:txBody>
-      </p:sp>
-      <p:sp>
-        <p:nvSpPr>
-          <p:cNvPr id="30" name="TextBox 29"/>
-          <p:cNvSpPr txBox="1"/>
-          <p:nvPr/>
-        </p:nvSpPr>
-        <p:spPr>
-          <a:xfrm>
-            <a:off x="4425696" y="3675888"/>
-            <a:ext cx="1508760" cy="338328"/>
-          </a:xfrm>
-          <a:prstGeom prst="rect">
-            <a:avLst/>
-          </a:prstGeom>
-          <a:noFill/>
-        </p:spPr>
-        <p:txBody>
-          <a:bodyPr wrap="square" lIns="0" rIns="0" tIns="0" bIns="0" anchor="t">
-            <a:spAutoFit/>
-          </a:bodyPr>
-          <a:lstStyle/>
-          <a:p>
-            <a:pPr algn="l">
-              <a:lnSpc>
-                <a:spcPct val="115000"/>
-              </a:lnSpc>
-            </a:pPr>
-            <a:r>
-              <a:rPr sz="1150" b="0">
-                <a:solidFill>
-                  <a:srgbClr val="ECF1F6"/>
-                </a:solidFill>
-                <a:latin typeface="맑은 고딕"/>
-                <a:ea typeface="맑은 고딕"/>
-                <a:cs typeface="맑은 고딕"/>
-              </a:rPr>
-              <a:t>$0.2132</a:t>
-            </a:r>
-          </a:p>
-        </p:txBody>
-      </p:sp>
-      <p:sp>
-        <p:nvSpPr>
-          <p:cNvPr id="31" name="TextBox 30"/>
-          <p:cNvSpPr txBox="1"/>
-          <p:nvPr/>
-        </p:nvSpPr>
-        <p:spPr>
-          <a:xfrm>
-            <a:off x="6117336" y="3675888"/>
-            <a:ext cx="1371600" cy="338328"/>
-          </a:xfrm>
-          <a:prstGeom prst="rect">
-            <a:avLst/>
-          </a:prstGeom>
-          <a:noFill/>
-        </p:spPr>
-        <p:txBody>
-          <a:bodyPr wrap="square" lIns="0" rIns="0" tIns="0" bIns="0" anchor="t">
-            <a:spAutoFit/>
-          </a:bodyPr>
-          <a:lstStyle/>
-          <a:p>
-            <a:pPr algn="l">
-              <a:lnSpc>
-                <a:spcPct val="115000"/>
-              </a:lnSpc>
-            </a:pPr>
-            <a:r>
-              <a:rPr sz="1150" b="1">
-                <a:solidFill>
-                  <a:srgbClr val="FFB04D"/>
-                </a:solidFill>
-                <a:latin typeface="맑은 고딕"/>
-                <a:ea typeface="맑은 고딕"/>
-                <a:cs typeface="맑은 고딕"/>
-              </a:rPr>
-              <a:t>1.96배</a:t>
+              <a:t>1.62배 ← 최악</a:t>
             </a:r>
           </a:p>
         </p:txBody>
@@ -6518,8 +6972,8 @@
         </p:nvSpPr>
         <p:spPr>
           <a:xfrm>
-            <a:off x="685800" y="3931920"/>
-            <a:ext cx="6858000" cy="338328"/>
+            <a:off x="685800" y="3794760"/>
+            <a:ext cx="6858000" cy="310896"/>
           </a:xfrm>
           <a:prstGeom prst="rect">
             <a:avLst/>
@@ -6562,8 +7016,8 @@
         </p:nvSpPr>
         <p:spPr>
           <a:xfrm>
-            <a:off x="813816" y="4014216"/>
-            <a:ext cx="1737360" cy="338328"/>
+            <a:off x="813816" y="3877056"/>
+            <a:ext cx="1737360" cy="310896"/>
           </a:xfrm>
           <a:prstGeom prst="rect">
             <a:avLst/>
@@ -6590,6 +7044,170 @@
                 <a:ea typeface="맑은 고딕"/>
                 <a:cs typeface="맑은 고딕"/>
               </a:rPr>
+              <a:t>4회</a:t>
+            </a:r>
+          </a:p>
+        </p:txBody>
+      </p:sp>
+      <p:sp>
+        <p:nvSpPr>
+          <p:cNvPr id="34" name="TextBox 33"/>
+          <p:cNvSpPr txBox="1"/>
+          <p:nvPr/>
+        </p:nvSpPr>
+        <p:spPr>
+          <a:xfrm>
+            <a:off x="2734056" y="3877056"/>
+            <a:ext cx="1508760" cy="310896"/>
+          </a:xfrm>
+          <a:prstGeom prst="rect">
+            <a:avLst/>
+          </a:prstGeom>
+          <a:noFill/>
+        </p:spPr>
+        <p:txBody>
+          <a:bodyPr wrap="square" lIns="0" rIns="0" tIns="0" bIns="0" anchor="t">
+            <a:spAutoFit/>
+          </a:bodyPr>
+          <a:lstStyle/>
+          <a:p>
+            <a:pPr algn="l">
+              <a:lnSpc>
+                <a:spcPct val="115000"/>
+              </a:lnSpc>
+            </a:pPr>
+            <a:r>
+              <a:rPr sz="1150" b="0">
+                <a:solidFill>
+                  <a:srgbClr val="ECF1F6"/>
+                </a:solidFill>
+                <a:latin typeface="맑은 고딕"/>
+                <a:ea typeface="맑은 고딕"/>
+                <a:cs typeface="맑은 고딕"/>
+              </a:rPr>
+              <a:t>$0.1363</a:t>
+            </a:r>
+          </a:p>
+        </p:txBody>
+      </p:sp>
+      <p:sp>
+        <p:nvSpPr>
+          <p:cNvPr id="35" name="TextBox 34"/>
+          <p:cNvSpPr txBox="1"/>
+          <p:nvPr/>
+        </p:nvSpPr>
+        <p:spPr>
+          <a:xfrm>
+            <a:off x="4425696" y="3877056"/>
+            <a:ext cx="1508760" cy="310896"/>
+          </a:xfrm>
+          <a:prstGeom prst="rect">
+            <a:avLst/>
+          </a:prstGeom>
+          <a:noFill/>
+        </p:spPr>
+        <p:txBody>
+          <a:bodyPr wrap="square" lIns="0" rIns="0" tIns="0" bIns="0" anchor="t">
+            <a:spAutoFit/>
+          </a:bodyPr>
+          <a:lstStyle/>
+          <a:p>
+            <a:pPr algn="l">
+              <a:lnSpc>
+                <a:spcPct val="115000"/>
+              </a:lnSpc>
+            </a:pPr>
+            <a:r>
+              <a:rPr sz="1150" b="0">
+                <a:solidFill>
+                  <a:srgbClr val="ECF1F6"/>
+                </a:solidFill>
+                <a:latin typeface="맑은 고딕"/>
+                <a:ea typeface="맑은 고딕"/>
+                <a:cs typeface="맑은 고딕"/>
+              </a:rPr>
+              <a:t>$0.1763</a:t>
+            </a:r>
+          </a:p>
+        </p:txBody>
+      </p:sp>
+      <p:sp>
+        <p:nvSpPr>
+          <p:cNvPr id="36" name="TextBox 35"/>
+          <p:cNvSpPr txBox="1"/>
+          <p:nvPr/>
+        </p:nvSpPr>
+        <p:spPr>
+          <a:xfrm>
+            <a:off x="6117336" y="3877056"/>
+            <a:ext cx="1371600" cy="310896"/>
+          </a:xfrm>
+          <a:prstGeom prst="rect">
+            <a:avLst/>
+          </a:prstGeom>
+          <a:noFill/>
+        </p:spPr>
+        <p:txBody>
+          <a:bodyPr wrap="square" lIns="0" rIns="0" tIns="0" bIns="0" anchor="t">
+            <a:spAutoFit/>
+          </a:bodyPr>
+          <a:lstStyle/>
+          <a:p>
+            <a:pPr algn="l">
+              <a:lnSpc>
+                <a:spcPct val="115000"/>
+              </a:lnSpc>
+            </a:pPr>
+            <a:r>
+              <a:rPr sz="1150" b="1">
+                <a:solidFill>
+                  <a:srgbClr val="FFB04D"/>
+                </a:solidFill>
+                <a:latin typeface="맑은 고딕"/>
+                <a:ea typeface="맑은 고딕"/>
+                <a:cs typeface="맑은 고딕"/>
+              </a:rPr>
+              <a:t>1.29배</a:t>
+            </a:r>
+          </a:p>
+        </p:txBody>
+      </p:sp>
+      <p:sp>
+        <p:nvSpPr>
+          <p:cNvPr id="37" name="TextBox 36"/>
+          <p:cNvSpPr txBox="1"/>
+          <p:nvPr/>
+        </p:nvSpPr>
+        <p:spPr>
+          <a:xfrm>
+            <a:off x="813816" y="4187952"/>
+            <a:ext cx="1737360" cy="310896"/>
+          </a:xfrm>
+          <a:prstGeom prst="rect">
+            <a:avLst/>
+          </a:prstGeom>
+          <a:noFill/>
+        </p:spPr>
+        <p:txBody>
+          <a:bodyPr wrap="square" lIns="0" rIns="0" tIns="0" bIns="0" anchor="t">
+            <a:spAutoFit/>
+          </a:bodyPr>
+          <a:lstStyle/>
+          <a:p>
+            <a:pPr algn="l">
+              <a:lnSpc>
+                <a:spcPct val="115000"/>
+              </a:lnSpc>
+            </a:pPr>
+            <a:r>
+              <a:rPr sz="1150" b="0">
+                <a:solidFill>
+                  <a:srgbClr val="ECF1F6"/>
+                </a:solidFill>
+                <a:latin typeface="맑은 고딕"/>
+                <a:ea typeface="맑은 고딕"/>
+                <a:cs typeface="맑은 고딕"/>
+              </a:rPr>
               <a:t>10회</a:t>
             </a:r>
           </a:p>
@@ -6597,14 +7215,14 @@
       </p:sp>
       <p:sp>
         <p:nvSpPr>
-          <p:cNvPr id="34" name="TextBox 33"/>
-          <p:cNvSpPr txBox="1"/>
-          <p:nvPr/>
-        </p:nvSpPr>
-        <p:spPr>
-          <a:xfrm>
-            <a:off x="2734056" y="4014216"/>
-            <a:ext cx="1508760" cy="338328"/>
+          <p:cNvPr id="38" name="TextBox 37"/>
+          <p:cNvSpPr txBox="1"/>
+          <p:nvPr/>
+        </p:nvSpPr>
+        <p:spPr>
+          <a:xfrm>
+            <a:off x="2734056" y="4187952"/>
+            <a:ext cx="1508760" cy="310896"/>
           </a:xfrm>
           <a:prstGeom prst="rect">
             <a:avLst/>
@@ -6638,14 +7256,14 @@
       </p:sp>
       <p:sp>
         <p:nvSpPr>
-          <p:cNvPr id="35" name="TextBox 34"/>
-          <p:cNvSpPr txBox="1"/>
-          <p:nvPr/>
-        </p:nvSpPr>
-        <p:spPr>
-          <a:xfrm>
-            <a:off x="4425696" y="4014216"/>
-            <a:ext cx="1508760" cy="338328"/>
+          <p:cNvPr id="39" name="TextBox 38"/>
+          <p:cNvSpPr txBox="1"/>
+          <p:nvPr/>
+        </p:nvSpPr>
+        <p:spPr>
+          <a:xfrm>
+            <a:off x="4425696" y="4187952"/>
+            <a:ext cx="1508760" cy="310896"/>
           </a:xfrm>
           <a:prstGeom prst="rect">
             <a:avLst/>
@@ -6672,21 +7290,21 @@
                 <a:ea typeface="맑은 고딕"/>
                 <a:cs typeface="맑은 고딕"/>
               </a:rPr>
-              <a:t>$0.2132</a:t>
-            </a:r>
-          </a:p>
-        </p:txBody>
-      </p:sp>
-      <p:sp>
-        <p:nvSpPr>
-          <p:cNvPr id="36" name="TextBox 35"/>
-          <p:cNvSpPr txBox="1"/>
-          <p:nvPr/>
-        </p:nvSpPr>
-        <p:spPr>
-          <a:xfrm>
-            <a:off x="6117336" y="4014216"/>
-            <a:ext cx="1371600" cy="338328"/>
+              <a:t>$0.1763</a:t>
+            </a:r>
+          </a:p>
+        </p:txBody>
+      </p:sp>
+      <p:sp>
+        <p:nvSpPr>
+          <p:cNvPr id="40" name="TextBox 39"/>
+          <p:cNvSpPr txBox="1"/>
+          <p:nvPr/>
+        </p:nvSpPr>
+        <p:spPr>
+          <a:xfrm>
+            <a:off x="6117336" y="4187952"/>
+            <a:ext cx="1371600" cy="310896"/>
           </a:xfrm>
           <a:prstGeom prst="rect">
             <a:avLst/>
@@ -6713,21 +7331,65 @@
                 <a:ea typeface="맑은 고딕"/>
                 <a:cs typeface="맑은 고딕"/>
               </a:rPr>
-              <a:t>0.71배 ← 역전</a:t>
-            </a:r>
-          </a:p>
-        </p:txBody>
-      </p:sp>
-      <p:sp>
-        <p:nvSpPr>
-          <p:cNvPr id="37" name="TextBox 36"/>
-          <p:cNvSpPr txBox="1"/>
-          <p:nvPr/>
-        </p:nvSpPr>
-        <p:spPr>
-          <a:xfrm>
-            <a:off x="813816" y="4352544"/>
-            <a:ext cx="1737360" cy="338328"/>
+              <a:t>0.59배 ← 역전</a:t>
+            </a:r>
+          </a:p>
+        </p:txBody>
+      </p:sp>
+      <p:sp>
+        <p:nvSpPr>
+          <p:cNvPr id="41" name="Rectangle 40"/>
+          <p:cNvSpPr/>
+          <p:nvPr/>
+        </p:nvSpPr>
+        <p:spPr>
+          <a:xfrm>
+            <a:off x="685800" y="4416552"/>
+            <a:ext cx="6858000" cy="310896"/>
+          </a:xfrm>
+          <a:prstGeom prst="rect">
+            <a:avLst/>
+          </a:prstGeom>
+          <a:solidFill>
+            <a:srgbClr val="111A24"/>
+          </a:solidFill>
+          <a:ln>
+            <a:noFill/>
+          </a:ln>
+          <a:effectLst/>
+        </p:spPr>
+        <p:style>
+          <a:lnRef idx="1">
+            <a:schemeClr val="accent1"/>
+          </a:lnRef>
+          <a:fillRef idx="3">
+            <a:schemeClr val="accent1"/>
+          </a:fillRef>
+          <a:effectRef idx="2">
+            <a:schemeClr val="accent1"/>
+          </a:effectRef>
+          <a:fontRef idx="minor">
+            <a:schemeClr val="lt1"/>
+          </a:fontRef>
+        </p:style>
+        <p:txBody>
+          <a:bodyPr rtlCol="0" anchor="ctr"/>
+          <a:lstStyle/>
+          <a:p>
+            <a:pPr algn="ctr"/>
+          </a:p>
+        </p:txBody>
+      </p:sp>
+      <p:sp>
+        <p:nvSpPr>
+          <p:cNvPr id="42" name="TextBox 41"/>
+          <p:cNvSpPr txBox="1"/>
+          <p:nvPr/>
+        </p:nvSpPr>
+        <p:spPr>
+          <a:xfrm>
+            <a:off x="813816" y="4498848"/>
+            <a:ext cx="1737360" cy="310896"/>
           </a:xfrm>
           <a:prstGeom prst="rect">
             <a:avLst/>
@@ -6761,14 +7423,14 @@
       </p:sp>
       <p:sp>
         <p:nvSpPr>
-          <p:cNvPr id="38" name="TextBox 37"/>
-          <p:cNvSpPr txBox="1"/>
-          <p:nvPr/>
-        </p:nvSpPr>
-        <p:spPr>
-          <a:xfrm>
-            <a:off x="2734056" y="4352544"/>
-            <a:ext cx="1508760" cy="338328"/>
+          <p:cNvPr id="43" name="TextBox 42"/>
+          <p:cNvSpPr txBox="1"/>
+          <p:nvPr/>
+        </p:nvSpPr>
+        <p:spPr>
+          <a:xfrm>
+            <a:off x="2734056" y="4498848"/>
+            <a:ext cx="1508760" cy="310896"/>
           </a:xfrm>
           <a:prstGeom prst="rect">
             <a:avLst/>
@@ -6802,14 +7464,14 @@
       </p:sp>
       <p:sp>
         <p:nvSpPr>
-          <p:cNvPr id="39" name="TextBox 38"/>
-          <p:cNvSpPr txBox="1"/>
-          <p:nvPr/>
-        </p:nvSpPr>
-        <p:spPr>
-          <a:xfrm>
-            <a:off x="4425696" y="4352544"/>
-            <a:ext cx="1508760" cy="338328"/>
+          <p:cNvPr id="44" name="TextBox 43"/>
+          <p:cNvSpPr txBox="1"/>
+          <p:nvPr/>
+        </p:nvSpPr>
+        <p:spPr>
+          <a:xfrm>
+            <a:off x="4425696" y="4498848"/>
+            <a:ext cx="1508760" cy="310896"/>
           </a:xfrm>
           <a:prstGeom prst="rect">
             <a:avLst/>
@@ -6836,21 +7498,21 @@
                 <a:ea typeface="맑은 고딕"/>
                 <a:cs typeface="맑은 고딕"/>
               </a:rPr>
-              <a:t>$0.2132</a:t>
-            </a:r>
-          </a:p>
-        </p:txBody>
-      </p:sp>
-      <p:sp>
-        <p:nvSpPr>
-          <p:cNvPr id="40" name="TextBox 39"/>
-          <p:cNvSpPr txBox="1"/>
-          <p:nvPr/>
-        </p:nvSpPr>
-        <p:spPr>
-          <a:xfrm>
-            <a:off x="6117336" y="4352544"/>
-            <a:ext cx="1371600" cy="338328"/>
+              <a:t>$0.1763</a:t>
+            </a:r>
+          </a:p>
+        </p:txBody>
+      </p:sp>
+      <p:sp>
+        <p:nvSpPr>
+          <p:cNvPr id="45" name="TextBox 44"/>
+          <p:cNvSpPr txBox="1"/>
+          <p:nvPr/>
+        </p:nvSpPr>
+        <p:spPr>
+          <a:xfrm>
+            <a:off x="6117336" y="4498848"/>
+            <a:ext cx="1371600" cy="310896"/>
           </a:xfrm>
           <a:prstGeom prst="rect">
             <a:avLst/>
@@ -6877,21 +7539,21 @@
                 <a:ea typeface="맑은 고딕"/>
                 <a:cs typeface="맑은 고딕"/>
               </a:rPr>
-              <a:t>0.16배</a:t>
-            </a:r>
-          </a:p>
-        </p:txBody>
-      </p:sp>
-      <p:sp>
-        <p:nvSpPr>
-          <p:cNvPr id="41" name="Rounded Rectangle 40"/>
+              <a:t>0.13배</a:t>
+            </a:r>
+          </a:p>
+        </p:txBody>
+      </p:sp>
+      <p:sp>
+        <p:nvSpPr>
+          <p:cNvPr id="46" name="Rounded Rectangle 45"/>
           <p:cNvSpPr/>
           <p:nvPr/>
         </p:nvSpPr>
         <p:spPr>
           <a:xfrm>
             <a:off x="7818120" y="2240280"/>
-            <a:ext cx="3703320" cy="1325880"/>
+            <a:ext cx="3703320" cy="1170432"/>
           </a:xfrm>
           <a:prstGeom prst="roundRect">
             <a:avLst>
@@ -6930,20 +7592,20 @@
       </p:sp>
       <p:sp>
         <p:nvSpPr>
-          <p:cNvPr id="42" name="Rectangle 41"/>
+          <p:cNvPr id="47" name="Rectangle 46"/>
           <p:cNvSpPr/>
           <p:nvPr/>
         </p:nvSpPr>
         <p:spPr>
           <a:xfrm>
             <a:off x="7818120" y="2240280"/>
-            <a:ext cx="50292" cy="1325880"/>
+            <a:ext cx="50292" cy="1170432"/>
           </a:xfrm>
           <a:prstGeom prst="rect">
             <a:avLst/>
           </a:prstGeom>
           <a:solidFill>
-            <a:srgbClr val="FF6B6B"/>
+            <a:srgbClr val="36D399"/>
           </a:solidFill>
           <a:ln>
             <a:noFill/>
@@ -6974,7 +7636,7 @@
       </p:sp>
       <p:sp>
         <p:nvSpPr>
-          <p:cNvPr id="43" name="TextBox 42"/>
+          <p:cNvPr id="48" name="TextBox 47"/>
           <p:cNvSpPr txBox="1"/>
           <p:nvPr/>
         </p:nvSpPr>
@@ -7008,21 +7670,21 @@
                 <a:ea typeface="맑은 고딕"/>
                 <a:cs typeface="맑은 고딕"/>
               </a:rPr>
-              <a:t>① 최악은 2.6배</a:t>
-            </a:r>
-          </a:p>
-        </p:txBody>
-      </p:sp>
-      <p:sp>
-        <p:nvSpPr>
-          <p:cNvPr id="44" name="TextBox 43"/>
+              <a:t>① 짧으면 차액이 없다</a:t>
+            </a:r>
+          </a:p>
+        </p:txBody>
+      </p:sp>
+      <p:sp>
+        <p:nvSpPr>
+          <p:cNvPr id="49" name="TextBox 48"/>
           <p:cNvSpPr txBox="1"/>
           <p:nvPr/>
         </p:nvSpPr>
         <p:spPr>
           <a:xfrm>
             <a:off x="8129016" y="3017520"/>
-            <a:ext cx="3154679" cy="411479"/>
+            <a:ext cx="3154679" cy="256032"/>
           </a:xfrm>
           <a:prstGeom prst="rect">
             <a:avLst/>
@@ -7052,42 +7714,21 @@
                 <a:ea typeface="맑은 고딕"/>
                 <a:cs typeface="맑은 고딕"/>
               </a:rPr>
-              <a:t>실패 2회 구간이 가장 불리.</a:t>
-            </a:r>
-          </a:p>
-          <a:p>
-            <a:pPr algn="l">
-              <a:lnSpc>
-                <a:spcPct val="135000"/>
-              </a:lnSpc>
-              <a:spcBef>
-                <a:spcPts val="600"/>
-              </a:spcBef>
-            </a:pPr>
-            <a:r>
-              <a:rPr sz="1400" b="0">
-                <a:solidFill>
-                  <a:srgbClr val="93A4B5"/>
-                </a:solidFill>
-                <a:latin typeface="맑은 고딕"/>
-                <a:ea typeface="맑은 고딕"/>
-                <a:cs typeface="맑은 고딕"/>
-              </a:rPr>
-              <a:t>절대값 $0.08 → $0.21 (13센트).</a:t>
-            </a:r>
-          </a:p>
-        </p:txBody>
-      </p:sp>
-      <p:sp>
-        <p:nvSpPr>
-          <p:cNvPr id="45" name="Rounded Rectangle 44"/>
+              <a:t>1회 실패까지 비용이 같다.</a:t>
+            </a:r>
+          </a:p>
+        </p:txBody>
+      </p:sp>
+      <p:sp>
+        <p:nvSpPr>
+          <p:cNvPr id="50" name="Rounded Rectangle 49"/>
           <p:cNvSpPr/>
           <p:nvPr/>
         </p:nvSpPr>
         <p:spPr>
           <a:xfrm>
-            <a:off x="7818120" y="3675887"/>
-            <a:ext cx="3703320" cy="1737360"/>
+            <a:off x="7818120" y="3566160"/>
+            <a:ext cx="3703320" cy="1170432"/>
           </a:xfrm>
           <a:prstGeom prst="roundRect">
             <a:avLst>
@@ -7126,20 +7767,20 @@
       </p:sp>
       <p:sp>
         <p:nvSpPr>
-          <p:cNvPr id="46" name="Rectangle 45"/>
+          <p:cNvPr id="51" name="Rectangle 50"/>
           <p:cNvSpPr/>
           <p:nvPr/>
         </p:nvSpPr>
         <p:spPr>
           <a:xfrm>
-            <a:off x="7818120" y="3675887"/>
-            <a:ext cx="50292" cy="1737360"/>
+            <a:off x="7818120" y="3566160"/>
+            <a:ext cx="50292" cy="1170432"/>
           </a:xfrm>
           <a:prstGeom prst="rect">
             <a:avLst/>
           </a:prstGeom>
           <a:solidFill>
-            <a:srgbClr val="36D399"/>
+            <a:srgbClr val="FFB04D"/>
           </a:solidFill>
           <a:ln>
             <a:noFill/>
@@ -7170,13 +7811,13 @@
       </p:sp>
       <p:sp>
         <p:nvSpPr>
-          <p:cNvPr id="47" name="TextBox 46"/>
-          <p:cNvSpPr txBox="1"/>
-          <p:nvPr/>
-        </p:nvSpPr>
-        <p:spPr>
-          <a:xfrm>
-            <a:off x="8129016" y="3913631"/>
+          <p:cNvPr id="52" name="TextBox 51"/>
+          <p:cNvSpPr txBox="1"/>
+          <p:nvPr/>
+        </p:nvSpPr>
+        <p:spPr>
+          <a:xfrm>
+            <a:off x="8129016" y="3803904"/>
             <a:ext cx="3154679" cy="365760"/>
           </a:xfrm>
           <a:prstGeom prst="rect">
@@ -7211,14 +7852,14 @@
       </p:sp>
       <p:sp>
         <p:nvSpPr>
-          <p:cNvPr id="48" name="TextBox 47"/>
-          <p:cNvSpPr txBox="1"/>
-          <p:nvPr/>
-        </p:nvSpPr>
-        <p:spPr>
-          <a:xfrm>
-            <a:off x="8129016" y="4453127"/>
-            <a:ext cx="3154679" cy="822959"/>
+          <p:cNvPr id="53" name="TextBox 52"/>
+          <p:cNvSpPr txBox="1"/>
+          <p:nvPr/>
+        </p:nvSpPr>
+        <p:spPr>
+          <a:xfrm>
+            <a:off x="8129016" y="4343400"/>
+            <a:ext cx="3154679" cy="256032"/>
           </a:xfrm>
           <a:prstGeom prst="rect">
             <a:avLst/>
@@ -7248,63 +7889,21 @@
                 <a:ea typeface="맑은 고딕"/>
                 <a:cs typeface="맑은 고딕"/>
               </a:rPr>
-              <a:t>4회차에 구현을 멈춘다.</a:t>
-            </a:r>
-          </a:p>
-          <a:p>
-            <a:pPr algn="l">
-              <a:lnSpc>
-                <a:spcPct val="135000"/>
-              </a:lnSpc>
-              <a:spcBef>
-                <a:spcPts val="600"/>
-              </a:spcBef>
-            </a:pPr>
-            <a:r>
-              <a:rPr sz="1400" b="0">
-                <a:solidFill>
-                  <a:srgbClr val="93A4B5"/>
-                </a:solidFill>
-                <a:latin typeface="맑은 고딕"/>
-                <a:ea typeface="맑은 고딕"/>
-                <a:cs typeface="맑은 고딕"/>
-              </a:rPr>
-              <a:t>$0.2132에서 정지.</a:t>
-            </a:r>
-          </a:p>
-          <a:p>
-            <a:pPr algn="l">
-              <a:lnSpc>
-                <a:spcPct val="135000"/>
-              </a:lnSpc>
-              <a:spcBef>
-                <a:spcPts val="600"/>
-              </a:spcBef>
-            </a:pPr>
-            <a:r>
-              <a:rPr sz="1400" b="0">
-                <a:solidFill>
-                  <a:srgbClr val="93A4B5"/>
-                </a:solidFill>
-                <a:latin typeface="맑은 고딕"/>
-                <a:ea typeface="맑은 고딕"/>
-                <a:cs typeface="맑은 고딕"/>
-              </a:rPr>
-              <a:t>제자리는 선형으로 계속 오른다.</a:t>
-            </a:r>
-          </a:p>
-        </p:txBody>
-      </p:sp>
-      <p:sp>
-        <p:nvSpPr>
-          <p:cNvPr id="49" name="Rounded Rectangle 48"/>
+              <a:t>5회차에 멈춰 $0.1763에서 정지.</a:t>
+            </a:r>
+          </a:p>
+        </p:txBody>
+      </p:sp>
+      <p:sp>
+        <p:nvSpPr>
+          <p:cNvPr id="54" name="Rounded Rectangle 53"/>
           <p:cNvSpPr/>
           <p:nvPr/>
         </p:nvSpPr>
         <p:spPr>
           <a:xfrm>
-            <a:off x="685800" y="4736592"/>
-            <a:ext cx="6858000" cy="1371600"/>
+            <a:off x="685800" y="4846320"/>
+            <a:ext cx="10835640" cy="1234440"/>
           </a:xfrm>
           <a:prstGeom prst="roundRect">
             <a:avLst>
@@ -7343,14 +7942,14 @@
       </p:sp>
       <p:sp>
         <p:nvSpPr>
-          <p:cNvPr id="50" name="Rectangle 49"/>
+          <p:cNvPr id="55" name="Rectangle 54"/>
           <p:cNvSpPr/>
           <p:nvPr/>
         </p:nvSpPr>
         <p:spPr>
           <a:xfrm>
-            <a:off x="685800" y="4736592"/>
-            <a:ext cx="50292" cy="1371600"/>
+            <a:off x="685800" y="4846320"/>
+            <a:ext cx="50292" cy="1234440"/>
           </a:xfrm>
           <a:prstGeom prst="rect">
             <a:avLst/>
@@ -7387,14 +7986,14 @@
       </p:sp>
       <p:sp>
         <p:nvSpPr>
-          <p:cNvPr id="51" name="TextBox 50"/>
-          <p:cNvSpPr txBox="1"/>
-          <p:nvPr/>
-        </p:nvSpPr>
-        <p:spPr>
-          <a:xfrm>
-            <a:off x="960120" y="4855464"/>
-            <a:ext cx="6492240" cy="1207008"/>
+          <p:cNvPr id="56" name="TextBox 55"/>
+          <p:cNvSpPr txBox="1"/>
+          <p:nvPr/>
+        </p:nvSpPr>
+        <p:spPr>
+          <a:xfrm>
+            <a:off x="960120" y="4956048"/>
+            <a:ext cx="10424160" cy="1097280"/>
           </a:xfrm>
           <a:prstGeom prst="rect">
             <a:avLst/>
@@ -7421,7 +8020,7 @@
                 <a:ea typeface="맑은 고딕"/>
                 <a:cs typeface="맑은 고딕"/>
               </a:rPr>
-              <a:t>③ 진짜 비용은 미해결 잔여다 (난제 시나리오, 4턴 소진 후)</a:t>
+              <a:t>③ 진짜 비용은 미해결 잔여다 (난제 시나리오, 5턴 소진 후)</a:t>
             </a:r>
           </a:p>
           <a:p>
@@ -7442,7 +8041,7 @@
                 <a:ea typeface="맑은 고딕"/>
                 <a:cs typeface="맑은 고딕"/>
               </a:rPr>
-              <a:t>제자리 재시도  기대 $0.0804  —  41.0% 확률로 여전히 미해결</a:t>
+              <a:t>제자리 재시도  기대 $0.0756  —  16.8% 확률로 여전히 미해결</a:t>
             </a:r>
           </a:p>
           <a:p>
@@ -7463,7 +8062,7 @@
                 <a:ea typeface="맑은 고딕"/>
                 <a:cs typeface="맑은 고딕"/>
               </a:rPr>
-              <a:t>에스컬레이션   기대 $0.1335  —   1.4% 미해결, 스펙 문서가 남음</a:t>
+              <a:t>사다리        기대 $0.0719  —   0.4% 미해결, 스펙 문서가 남음</a:t>
             </a:r>
           </a:p>
           <a:p>
@@ -7484,14 +8083,14 @@
                 <a:ea typeface="맑은 고딕"/>
                 <a:cs typeface="맑은 고딕"/>
               </a:rPr>
-              <a:t>개발자 1시간 $50 기준 41% × 1h = $20.5 기대손실. 토큰 5센트를 아끼려다 $20를 태운다.</a:t>
-            </a:r>
-          </a:p>
-        </p:txBody>
-      </p:sp>
-      <p:sp>
-        <p:nvSpPr>
-          <p:cNvPr id="52" name="TextBox 51"/>
+              <a:t>축을 하나씩 올리면 비싼 칸에 닿기 전에 끝나는 경우가 많다 — 그래서 더 싸면서 더 많이 해결한다. 남는 16.4%p는 개발자 1시간 $50 기준 $8.2의 기대손실이다.</a:t>
+            </a:r>
+          </a:p>
+        </p:txBody>
+      </p:sp>
+      <p:sp>
+        <p:nvSpPr>
+          <p:cNvPr id="57" name="TextBox 56"/>
           <p:cNvSpPr txBox="1"/>
           <p:nvPr/>
         </p:nvSpPr>
@@ -7525,7 +8124,7 @@
                 <a:ea typeface="맑은 고딕"/>
                 <a:cs typeface="맑은 고딕"/>
               </a:rPr>
-              <a:t>결론 — 에스컬레이션은 평균 비용을 낮추는 장치가 아니라 꼬리 위험을 자르는 장치다. 절감은 라우팅이, 사고 방지는 이쪽이 한다.</a:t>
+              <a:t>사다리의 값어치는 평균 비용을 낮추는 데 있지 않다 — 꼬리 위험을 자르는 데 있다. 절감은 라우팅이, 사고 방지는 이쪽이 한다.</a:t>
             </a:r>
           </a:p>
         </p:txBody>
@@ -23943,7 +24542,7 @@
                 <a:ea typeface="맑은 고딕"/>
                 <a:cs typeface="맑은 고딕"/>
               </a:rPr>
-              <a:t>밸브 2 — 세션 리셋 트리거</a:t>
+              <a:t>밸브 2 — 세션 위생 (리셋은 마지막 수단)</a:t>
             </a:r>
           </a:p>
           <a:p>
@@ -23964,7 +24563,7 @@
                 <a:ea typeface="맑은 고딕"/>
                 <a:cs typeface="맑은 고딕"/>
               </a:rPr>
-              <a:t>답변을 정규화(공백·문장부호 제거)해 해시로 기록.</a:t>
+              <a:t>같은 설명이 반복되면 → 컴팩션. 세션은 살려두고 결론만 남긴다.</a:t>
             </a:r>
           </a:p>
           <a:p>
@@ -23979,13 +24578,13 @@
             <a:r>
               <a:rPr sz="1250" b="0">
                 <a:solidFill>
-                  <a:srgbClr val="93A4B5"/>
-                </a:solidFill>
-                <a:latin typeface="맑은 고딕"/>
-                <a:ea typeface="맑은 고딕"/>
-                <a:cs typeface="맑은 고딕"/>
-              </a:rPr>
-              <a:t>같은 해시가 2회 등장 = 메모리에 있는 내용을 다시 생성 중.</a:t>
+                  <a:srgbClr val="36D399"/>
+                </a:solidFill>
+                <a:latin typeface="맑은 고딕"/>
+                <a:ea typeface="맑은 고딕"/>
+                <a:cs typeface="맑은 고딕"/>
+              </a:rPr>
+              <a:t>리셋은 완료된 결과가 원하던 방향이 아닐 때만 건다.</a:t>
             </a:r>
           </a:p>
           <a:p>
@@ -24000,13 +24599,13 @@
             <a:r>
               <a:rPr sz="1250" b="0">
                 <a:solidFill>
-                  <a:srgbClr val="36D399"/>
-                </a:solidFill>
-                <a:latin typeface="맑은 고딕"/>
-                <a:ea typeface="맑은 고딕"/>
-                <a:cs typeface="맑은 고딕"/>
-              </a:rPr>
-              <a:t>→ 결론을 파일로 커밋하고 새 세션 시작. 이월 대상은 specs/*.md와 마지막 결정 사항뿐.</a:t>
+                  <a:srgbClr val="93A4B5"/>
+                </a:solidFill>
+                <a:latin typeface="맑은 고딕"/>
+                <a:ea typeface="맑은 고딕"/>
+                <a:cs typeface="맑은 고딕"/>
+              </a:rPr>
+              <a:t>검증 실패는 방향 문제가 아니다 → 리셋 말고 리워크.</a:t>
             </a:r>
           </a:p>
           <a:p>
@@ -24027,7 +24626,7 @@
                 <a:ea typeface="맑은 고딕"/>
                 <a:cs typeface="맑은 고딕"/>
               </a:rPr>
-              <a:t>표기만 바꾼 재설명도 잡힌다 — "검증합니다." vs "검증합니다!!" 동일 판정.</a:t>
+              <a:t>반복을 곧바로 리셋으로 처리하면 아직 쓸모 있는 맥락까지 버린다.</a:t>
             </a:r>
           </a:p>
         </p:txBody>
@@ -24242,7 +24841,7 @@
                 <a:ea typeface="맑은 고딕"/>
                 <a:cs typeface="맑은 고딕"/>
               </a:rPr>
-              <a:t>2회</a:t>
+              <a:t>3회</a:t>
             </a:r>
           </a:p>
         </p:txBody>
@@ -24283,7 +24882,7 @@
                 <a:ea typeface="맑은 고딕"/>
                 <a:cs typeface="맑은 고딕"/>
               </a:rPr>
-              <a:t>동일 설명 반복 시 리셋 발동</a:t>
+              <a:t>동일 설명 반복 시 컴팩션 (리셋 아님)</a:t>
             </a:r>
           </a:p>
         </p:txBody>
@@ -24452,7 +25051,7 @@
                 <a:ea typeface="맑은 고딕"/>
                 <a:cs typeface="맑은 고딕"/>
               </a:rPr>
-              <a:t>리셋을 미루면 손해가 복리로 붙는다 — 재생성한 출력이 다시 입력이 되어 이후 모든 턴의 단가를 올린다.</a:t>
+              <a:t>재생성한 출력은 다시 입력이 되어 이후 모든 턴의 단가를 올린다. 그렇다고 세션을 통째로 버리면 맥락 재장전 비용을 또 문다 — 그래서 컴팩션이 먼저다.</a:t>
             </a:r>
           </a:p>
         </p:txBody>

--- a/presentation/토큰_절약_발표_후속_에이전트셋팅.pptx
+++ b/presentation/토큰_절약_발표_후속_에이전트셋팅.pptx
@@ -6546,7 +6546,7 @@
                 <a:ea typeface="맑은 고딕"/>
                 <a:cs typeface="맑은 고딕"/>
               </a:rPr>
-              <a:t>$0.0545</a:t>
+              <a:t>$0.0385</a:t>
             </a:r>
           </a:p>
         </p:txBody>
@@ -6587,7 +6587,7 @@
                 <a:ea typeface="맑은 고딕"/>
                 <a:cs typeface="맑은 고딕"/>
               </a:rPr>
-              <a:t>동일 ← 차액 없음</a:t>
+              <a:t>0.71배</a:t>
             </a:r>
           </a:p>
         </p:txBody>
@@ -6754,7 +6754,7 @@
                 <a:ea typeface="맑은 고딕"/>
                 <a:cs typeface="맑은 고딕"/>
               </a:rPr>
-              <a:t>$0.0839</a:t>
+              <a:t>$0.0519</a:t>
             </a:r>
           </a:p>
         </p:txBody>
@@ -6789,13 +6789,13 @@
             <a:r>
               <a:rPr sz="1150" b="1">
                 <a:solidFill>
-                  <a:srgbClr val="93A4B5"/>
-                </a:solidFill>
-                <a:latin typeface="맑은 고딕"/>
-                <a:ea typeface="맑은 고딕"/>
-                <a:cs typeface="맑은 고딕"/>
-              </a:rPr>
-              <a:t>1.03배</a:t>
+                  <a:srgbClr val="36D399"/>
+                </a:solidFill>
+                <a:latin typeface="맑은 고딕"/>
+                <a:ea typeface="맑은 고딕"/>
+                <a:cs typeface="맑은 고딕"/>
+              </a:rPr>
+              <a:t>0.63배</a:t>
             </a:r>
           </a:p>
         </p:txBody>
@@ -6918,7 +6918,7 @@
                 <a:ea typeface="맑은 고딕"/>
                 <a:cs typeface="맑은 고딕"/>
               </a:rPr>
-              <a:t>$0.1763</a:t>
+              <a:t>$0.1106</a:t>
             </a:r>
           </a:p>
         </p:txBody>
@@ -6953,13 +6953,13 @@
             <a:r>
               <a:rPr sz="1150" b="1">
                 <a:solidFill>
-                  <a:srgbClr val="FF6B6B"/>
-                </a:solidFill>
-                <a:latin typeface="맑은 고딕"/>
-                <a:ea typeface="맑은 고딕"/>
-                <a:cs typeface="맑은 고딕"/>
-              </a:rPr>
-              <a:t>1.62배 ← 최악</a:t>
+                  <a:srgbClr val="FFB04D"/>
+                </a:solidFill>
+                <a:latin typeface="맑은 고딕"/>
+                <a:ea typeface="맑은 고딕"/>
+                <a:cs typeface="맑은 고딕"/>
+              </a:rPr>
+              <a:t>1.01배 ← 최악</a:t>
             </a:r>
           </a:p>
         </p:txBody>
@@ -7126,7 +7126,7 @@
                 <a:ea typeface="맑은 고딕"/>
                 <a:cs typeface="맑은 고딕"/>
               </a:rPr>
-              <a:t>$0.1763</a:t>
+              <a:t>$0.1106</a:t>
             </a:r>
           </a:p>
         </p:txBody>
@@ -7161,13 +7161,13 @@
             <a:r>
               <a:rPr sz="1150" b="1">
                 <a:solidFill>
-                  <a:srgbClr val="FFB04D"/>
-                </a:solidFill>
-                <a:latin typeface="맑은 고딕"/>
-                <a:ea typeface="맑은 고딕"/>
-                <a:cs typeface="맑은 고딕"/>
-              </a:rPr>
-              <a:t>1.29배</a:t>
+                  <a:srgbClr val="36D399"/>
+                </a:solidFill>
+                <a:latin typeface="맑은 고딕"/>
+                <a:ea typeface="맑은 고딕"/>
+                <a:cs typeface="맑은 고딕"/>
+              </a:rPr>
+              <a:t>0.81배</a:t>
             </a:r>
           </a:p>
         </p:txBody>
@@ -7290,7 +7290,7 @@
                 <a:ea typeface="맑은 고딕"/>
                 <a:cs typeface="맑은 고딕"/>
               </a:rPr>
-              <a:t>$0.1763</a:t>
+              <a:t>$0.1106</a:t>
             </a:r>
           </a:p>
         </p:txBody>
@@ -7331,7 +7331,7 @@
                 <a:ea typeface="맑은 고딕"/>
                 <a:cs typeface="맑은 고딕"/>
               </a:rPr>
-              <a:t>0.59배 ← 역전</a:t>
+              <a:t>0.37배</a:t>
             </a:r>
           </a:p>
         </p:txBody>
@@ -7498,7 +7498,7 @@
                 <a:ea typeface="맑은 고딕"/>
                 <a:cs typeface="맑은 고딕"/>
               </a:rPr>
-              <a:t>$0.1763</a:t>
+              <a:t>$0.1106</a:t>
             </a:r>
           </a:p>
         </p:txBody>
@@ -7539,7 +7539,7 @@
                 <a:ea typeface="맑은 고딕"/>
                 <a:cs typeface="맑은 고딕"/>
               </a:rPr>
-              <a:t>0.13배</a:t>
+              <a:t>0.08배</a:t>
             </a:r>
           </a:p>
         </p:txBody>
@@ -7670,7 +7670,7 @@
                 <a:ea typeface="맑은 고딕"/>
                 <a:cs typeface="맑은 고딕"/>
               </a:rPr>
-              <a:t>① 짧으면 차액이 없다</a:t>
+              <a:t>① 리워크 턴은 짧게</a:t>
             </a:r>
           </a:p>
         </p:txBody>
@@ -7714,7 +7714,7 @@
                 <a:ea typeface="맑은 고딕"/>
                 <a:cs typeface="맑은 고딕"/>
               </a:rPr>
-              <a:t>1회 실패까지 비용이 같다.</a:t>
+              <a:t>진단+패치 900토큰 상한.</a:t>
             </a:r>
           </a:p>
         </p:txBody>
@@ -7889,7 +7889,7 @@
                 <a:ea typeface="맑은 고딕"/>
                 <a:cs typeface="맑은 고딕"/>
               </a:rPr>
-              <a:t>5회차에 멈춰 $0.1763에서 정지.</a:t>
+              <a:t>5회차에 멈춰 $0.1106에서 정지.</a:t>
             </a:r>
           </a:p>
         </p:txBody>
@@ -8020,7 +8020,7 @@
                 <a:ea typeface="맑은 고딕"/>
                 <a:cs typeface="맑은 고딕"/>
               </a:rPr>
-              <a:t>③ 진짜 비용은 미해결 잔여다 (난제 시나리오, 5턴 소진 후)</a:t>
+              <a:t>③ 공정하게 비교하면 — 출력 상한은 제자리 재시도에도 걸 수 있다</a:t>
             </a:r>
           </a:p>
           <a:p>
@@ -8041,7 +8041,7 @@
                 <a:ea typeface="맑은 고딕"/>
                 <a:cs typeface="맑은 고딕"/>
               </a:rPr>
-              <a:t>제자리 재시도  기대 $0.0756  —  16.8% 확률로 여전히 미해결</a:t>
+              <a:t>48회 기준   제자리 $1.3353  →  제자리+출력상한 $0.5673  →  사다리 $0.1106</a:t>
             </a:r>
           </a:p>
           <a:p>
@@ -8062,7 +8062,7 @@
                 <a:ea typeface="맑은 고딕"/>
                 <a:cs typeface="맑은 고딕"/>
               </a:rPr>
-              <a:t>사다리        기대 $0.0719  —   0.4% 미해결, 스펙 문서가 남음</a:t>
+              <a:t>난제 시나리오 기대비용   제자리 $0.0661 (미해결 7.1%)  vs  사다리 $0.0475 (미해결 0.7%)</a:t>
             </a:r>
           </a:p>
           <a:p>
@@ -8075,48 +8075,7 @@
               </a:spcBef>
             </a:pPr>
             <a:r>
-              <a:rPr sz="1200" b="0">
-                <a:solidFill>
-                  <a:srgbClr val="FFB04D"/>
-                </a:solidFill>
-                <a:latin typeface="맑은 고딕"/>
-                <a:ea typeface="맑은 고딕"/>
-                <a:cs typeface="맑은 고딕"/>
-              </a:rPr>
-              <a:t>축을 하나씩 올리면 비싼 칸에 닿기 전에 끝나는 경우가 많다 — 그래서 더 싸면서 더 많이 해결한다. 남는 16.4%p는 개발자 1시간 $50 기준 $8.2의 기대손실이다.</a:t>
-            </a:r>
-          </a:p>
-        </p:txBody>
-      </p:sp>
-      <p:sp>
-        <p:nvSpPr>
-          <p:cNvPr id="57" name="TextBox 56"/>
-          <p:cNvSpPr txBox="1"/>
-          <p:nvPr/>
-        </p:nvSpPr>
-        <p:spPr>
-          <a:xfrm>
-            <a:off x="685800" y="6263640"/>
-            <a:ext cx="10789920" cy="320040"/>
-          </a:xfrm>
-          <a:prstGeom prst="rect">
-            <a:avLst/>
-          </a:prstGeom>
-          <a:noFill/>
-        </p:spPr>
-        <p:txBody>
-          <a:bodyPr wrap="square" lIns="0" rIns="0" tIns="0" bIns="0" anchor="t">
-            <a:spAutoFit/>
-          </a:bodyPr>
-          <a:lstStyle/>
-          <a:p>
-            <a:pPr algn="l">
-              <a:lnSpc>
-                <a:spcPct val="115000"/>
-              </a:lnSpc>
-            </a:pPr>
-            <a:r>
-              <a:rPr sz="1100" b="0">
+              <a:rPr sz="1150" b="0">
                 <a:solidFill>
                   <a:srgbClr val="93A4B5"/>
                 </a:solidFill>
@@ -8124,7 +8083,7 @@
                 <a:ea typeface="맑은 고딕"/>
                 <a:cs typeface="맑은 고딕"/>
               </a:rPr>
-              <a:t>사다리의 값어치는 평균 비용을 낮추는 데 있지 않다 — 꼬리 위험을 자르는 데 있다. 절감은 라우팅이, 사고 방지는 이쪽이 한다.</a:t>
+              <a:t>절감의 대부분은 “출력을 짧게”에서 나오고, 사다리가 따로 기여하는 것은 멈출 지점을 정해 꼬리를 자르는 일이다.</a:t>
             </a:r>
           </a:p>
         </p:txBody>

--- a/presentation/토큰_절약_발표_후속_에이전트셋팅.pptx
+++ b/presentation/토큰_절약_발표_후속_에이전트셋팅.pptx
@@ -20,6 +20,8 @@
     <p:sldId id="268" r:id="rId19"/>
     <p:sldId id="269" r:id="rId20"/>
     <p:sldId id="270" r:id="rId21"/>
+    <p:sldId id="271" r:id="rId22"/>
+    <p:sldId id="272" r:id="rId23"/>
   </p:sldIdLst>
   <p:sldSz cx="12191695" cy="6858000" type="screen4x3"/>
   <p:notesSz cx="6858000" cy="9144000"/>
@@ -3435,7 +3437,7 @@
                 <a:ea typeface="맑은 고딕"/>
                 <a:cs typeface="맑은 고딕"/>
               </a:rPr>
-              <a:t>이 덱의 모든 슬라이드는 agent_setup/router.py 에 대응 코드가 있습니다. 검증 56/56 PASS.</a:t>
+              <a:t>이 덱의 모든 슬라이드는 agent_setup/ 에 대응 코드가 있고, IDE에 바로 붙습니다. 검증 159건 전부 PASS.</a:t>
             </a:r>
           </a:p>
         </p:txBody>
@@ -8762,7 +8764,7 @@
                 <a:ea typeface="Consolas"/>
                 <a:cs typeface="Consolas"/>
               </a:rPr>
-              <a:t>        기준선 $0.6500 → 라우팅 $0.0437  (93.3% 절감)</a:t>
+              <a:t>        전부 LARGE $0.4845 → 라우팅 $0.0559  (88.5% 절감)</a:t>
             </a:r>
           </a:p>
           <a:p>
@@ -8783,7 +8785,7 @@
                 <a:ea typeface="Consolas"/>
                 <a:cs typeface="Consolas"/>
               </a:rPr>
-              <a:t>        에스컬 3턴 $0.2132 = 제자리 8턴 $0.2180</a:t>
+              <a:t>        사다리 3턴 $0.0519 = 제자리 2턴 $0.0545</a:t>
             </a:r>
           </a:p>
           <a:p>
@@ -8825,7 +8827,7 @@
                 <a:ea typeface="Consolas"/>
                 <a:cs typeface="Consolas"/>
               </a:rPr>
-              <a:t>  56건 중 56 PASS / 0 FAIL</a:t>
+              <a:t>  98건 중 98 PASS / 0 FAIL</a:t>
             </a:r>
           </a:p>
         </p:txBody>
@@ -9021,7 +9023,7 @@
                 <a:ea typeface="맑은 고딕"/>
                 <a:cs typeface="맑은 고딕"/>
               </a:rPr>
-              <a:t>2. 같은 작업을 3번 실패시켜 에스컬레이션</a:t>
+              <a:t>2. 같은 작업을 3번 실패시켜 사다리 관찰</a:t>
             </a:r>
           </a:p>
           <a:p>
@@ -9042,7 +9044,7 @@
                 <a:ea typeface="맑은 고딕"/>
                 <a:cs typeface="맑은 고딕"/>
               </a:rPr>
-              <a:t>3. 규칙 하나를 깨뜨려 FAIL 재현</a:t>
+              <a:t>3. IDE에서 같은 판단이 나오는지 확인</a:t>
             </a:r>
           </a:p>
         </p:txBody>
@@ -9217,7 +9219,7 @@
                 <a:ea typeface="맑은 고딕"/>
                 <a:cs typeface="맑은 고딕"/>
               </a:rPr>
-              <a:t>93.3%는 "전부 상위 모델" 대비 추정치다.</a:t>
+              <a:t>88.5%는 "전부 상위 모델" 대비 추정치다.</a:t>
             </a:r>
           </a:p>
           <a:p>
@@ -9300,7 +9302,7 @@
                 <a:ea typeface="맑은 고딕"/>
                 <a:cs typeface="맑은 고딕"/>
               </a:rPr>
-              <a:t>agent_setup/router.py (라우터) · agent_setup/test_router.py (검증 56건) — 저장소에 그대로 들어 있습니다.</a:t>
+              <a:t>agent_setup/router.py (라우터) · test_router.py (98건) · mcp_server.py + test_mcp.py (61건) — 저장소에 그대로 들어 있습니다.</a:t>
             </a:r>
           </a:p>
         </p:txBody>
@@ -9447,7 +9449,7 @@
                 <a:ea typeface="맑은 고딕"/>
                 <a:cs typeface="맑은 고딕"/>
               </a:rPr>
-              <a:t>FOLLOW-UP · 도입 순서</a:t>
+              <a:t>FOLLOW-UP · 연동</a:t>
             </a:r>
           </a:p>
         </p:txBody>
@@ -9488,7 +9490,7 @@
                 <a:ea typeface="맑은 고딕"/>
                 <a:cs typeface="맑은 고딕"/>
               </a:rPr>
-              <a:t>내일부터 뭘 켜나</a:t>
+              <a:t>실제 IDE에 붙이기 — MCP</a:t>
             </a:r>
           </a:p>
         </p:txBody>
@@ -9614,24 +9616,26 @@
                 <a:ea typeface="맑은 고딕"/>
                 <a:cs typeface="맑은 고딕"/>
               </a:rPr>
-              <a:t>전부 한 번에 켜지 않는다. 위험이 낮고 효과가 즉시 보이는 것부터.</a:t>
-            </a:r>
-          </a:p>
-        </p:txBody>
-      </p:sp>
-      <p:sp>
-        <p:nvSpPr>
-          <p:cNvPr id="9" name="Rectangle 8"/>
+              <a:t>지금까지는 라이브러리였습니다. 에이전트가 스스로 부르게 하려면 배선이 필요합니다.</a:t>
+            </a:r>
+          </a:p>
+        </p:txBody>
+      </p:sp>
+      <p:sp>
+        <p:nvSpPr>
+          <p:cNvPr id="9" name="Rounded Rectangle 8"/>
           <p:cNvSpPr/>
           <p:nvPr/>
         </p:nvSpPr>
         <p:spPr>
           <a:xfrm>
-            <a:off x="685800" y="2286000"/>
-            <a:ext cx="10835640" cy="384048"/>
-          </a:xfrm>
-          <a:prstGeom prst="rect">
-            <a:avLst/>
+            <a:off x="685800" y="2240280"/>
+            <a:ext cx="5440680" cy="1810512"/>
+          </a:xfrm>
+          <a:prstGeom prst="roundRect">
+            <a:avLst>
+              <a:gd name="adj" fmla="val 6000"/>
+            </a:avLst>
           </a:prstGeom>
           <a:solidFill>
             <a:srgbClr val="18222E"/>
@@ -9665,42 +9669,45 @@
       </p:sp>
       <p:sp>
         <p:nvSpPr>
-          <p:cNvPr id="10" name="TextBox 9"/>
-          <p:cNvSpPr txBox="1"/>
-          <p:nvPr/>
-        </p:nvSpPr>
-        <p:spPr>
-          <a:xfrm>
-            <a:off x="813816" y="2368296"/>
-            <a:ext cx="868680" cy="384048"/>
-          </a:xfrm>
-          <a:prstGeom prst="rect">
-            <a:avLst/>
-          </a:prstGeom>
-          <a:noFill/>
-        </p:spPr>
-        <p:txBody>
-          <a:bodyPr wrap="square" lIns="0" rIns="0" tIns="0" bIns="0" anchor="t">
-            <a:spAutoFit/>
-          </a:bodyPr>
-          <a:lstStyle/>
-          <a:p>
-            <a:pPr algn="l">
-              <a:lnSpc>
-                <a:spcPct val="115000"/>
-              </a:lnSpc>
-            </a:pPr>
-            <a:r>
-              <a:rPr sz="1300" b="1">
-                <a:solidFill>
-                  <a:srgbClr val="36D399"/>
-                </a:solidFill>
-                <a:latin typeface="맑은 고딕"/>
-                <a:ea typeface="맑은 고딕"/>
-                <a:cs typeface="맑은 고딕"/>
-              </a:rPr>
-              <a:t>시점</a:t>
-            </a:r>
+          <p:cNvPr id="10" name="Rectangle 9"/>
+          <p:cNvSpPr/>
+          <p:nvPr/>
+        </p:nvSpPr>
+        <p:spPr>
+          <a:xfrm>
+            <a:off x="685800" y="2240280"/>
+            <a:ext cx="50292" cy="1810512"/>
+          </a:xfrm>
+          <a:prstGeom prst="rect">
+            <a:avLst/>
+          </a:prstGeom>
+          <a:solidFill>
+            <a:srgbClr val="5A9CFF"/>
+          </a:solidFill>
+          <a:ln>
+            <a:noFill/>
+          </a:ln>
+          <a:effectLst/>
+        </p:spPr>
+        <p:style>
+          <a:lnRef idx="1">
+            <a:schemeClr val="accent1"/>
+          </a:lnRef>
+          <a:fillRef idx="3">
+            <a:schemeClr val="accent1"/>
+          </a:fillRef>
+          <a:effectRef idx="2">
+            <a:schemeClr val="accent1"/>
+          </a:effectRef>
+          <a:fontRef idx="minor">
+            <a:schemeClr val="lt1"/>
+          </a:fontRef>
+        </p:style>
+        <p:txBody>
+          <a:bodyPr rtlCol="0" anchor="ctr"/>
+          <a:lstStyle/>
+          <a:p>
+            <a:pPr algn="ctr"/>
           </a:p>
         </p:txBody>
       </p:sp>
@@ -9712,35 +9719,35 @@
         </p:nvSpPr>
         <p:spPr>
           <a:xfrm>
-            <a:off x="1865376" y="2368296"/>
-            <a:ext cx="2194560" cy="384048"/>
-          </a:xfrm>
-          <a:prstGeom prst="rect">
-            <a:avLst/>
-          </a:prstGeom>
-          <a:noFill/>
-        </p:spPr>
-        <p:txBody>
-          <a:bodyPr wrap="square" lIns="0" rIns="0" tIns="0" bIns="0" anchor="t">
-            <a:spAutoFit/>
-          </a:bodyPr>
-          <a:lstStyle/>
-          <a:p>
-            <a:pPr algn="l">
-              <a:lnSpc>
-                <a:spcPct val="115000"/>
-              </a:lnSpc>
-            </a:pPr>
-            <a:r>
-              <a:rPr sz="1300" b="1">
-                <a:solidFill>
-                  <a:srgbClr val="36D399"/>
-                </a:solidFill>
-                <a:latin typeface="맑은 고딕"/>
-                <a:ea typeface="맑은 고딕"/>
-                <a:cs typeface="맑은 고딕"/>
-              </a:rPr>
-              <a:t>무엇을</a:t>
+            <a:off x="996696" y="2478024"/>
+            <a:ext cx="4892040" cy="365760"/>
+          </a:xfrm>
+          <a:prstGeom prst="rect">
+            <a:avLst/>
+          </a:prstGeom>
+          <a:noFill/>
+        </p:spPr>
+        <p:txBody>
+          <a:bodyPr wrap="square" lIns="0" rIns="0" tIns="0" bIns="0" anchor="t">
+            <a:spAutoFit/>
+          </a:bodyPr>
+          <a:lstStyle/>
+          <a:p>
+            <a:pPr algn="l">
+              <a:lnSpc>
+                <a:spcPct val="115000"/>
+              </a:lnSpc>
+            </a:pPr>
+            <a:r>
+              <a:rPr sz="1600" b="1">
+                <a:solidFill>
+                  <a:srgbClr val="ECF1F6"/>
+                </a:solidFill>
+                <a:latin typeface="맑은 고딕"/>
+                <a:ea typeface="맑은 고딕"/>
+                <a:cs typeface="맑은 고딕"/>
+              </a:rPr>
+              <a:t>왜 MCP인가</a:t>
             </a:r>
           </a:p>
         </p:txBody>
@@ -9753,134 +9760,316 @@
         </p:nvSpPr>
         <p:spPr>
           <a:xfrm>
-            <a:off x="4242816" y="2368296"/>
-            <a:ext cx="3017520" cy="384048"/>
-          </a:xfrm>
-          <a:prstGeom prst="rect">
-            <a:avLst/>
-          </a:prstGeom>
-          <a:noFill/>
-        </p:spPr>
-        <p:txBody>
-          <a:bodyPr wrap="square" lIns="0" rIns="0" tIns="0" bIns="0" anchor="t">
-            <a:spAutoFit/>
-          </a:bodyPr>
-          <a:lstStyle/>
-          <a:p>
-            <a:pPr algn="l">
-              <a:lnSpc>
-                <a:spcPct val="115000"/>
-              </a:lnSpc>
-            </a:pPr>
-            <a:r>
-              <a:rPr sz="1300" b="1">
-                <a:solidFill>
-                  <a:srgbClr val="36D399"/>
-                </a:solidFill>
-                <a:latin typeface="맑은 고딕"/>
-                <a:ea typeface="맑은 고딕"/>
-                <a:cs typeface="맑은 고딕"/>
-              </a:rPr>
-              <a:t>어떻게</a:t>
-            </a:r>
-          </a:p>
-        </p:txBody>
-      </p:sp>
-      <p:sp>
-        <p:nvSpPr>
-          <p:cNvPr id="13" name="TextBox 12"/>
-          <p:cNvSpPr txBox="1"/>
-          <p:nvPr/>
-        </p:nvSpPr>
-        <p:spPr>
-          <a:xfrm>
-            <a:off x="7443216" y="2368296"/>
-            <a:ext cx="2286000" cy="384048"/>
-          </a:xfrm>
-          <a:prstGeom prst="rect">
-            <a:avLst/>
-          </a:prstGeom>
-          <a:noFill/>
-        </p:spPr>
-        <p:txBody>
-          <a:bodyPr wrap="square" lIns="0" rIns="0" tIns="0" bIns="0" anchor="t">
-            <a:spAutoFit/>
-          </a:bodyPr>
-          <a:lstStyle/>
-          <a:p>
-            <a:pPr algn="l">
-              <a:lnSpc>
-                <a:spcPct val="115000"/>
-              </a:lnSpc>
-            </a:pPr>
-            <a:r>
-              <a:rPr sz="1300" b="1">
-                <a:solidFill>
-                  <a:srgbClr val="36D399"/>
-                </a:solidFill>
-                <a:latin typeface="맑은 고딕"/>
-                <a:ea typeface="맑은 고딕"/>
-                <a:cs typeface="맑은 고딕"/>
-              </a:rPr>
-              <a:t>기대 효과</a:t>
-            </a:r>
-          </a:p>
-        </p:txBody>
-      </p:sp>
-      <p:sp>
-        <p:nvSpPr>
-          <p:cNvPr id="14" name="TextBox 13"/>
-          <p:cNvSpPr txBox="1"/>
-          <p:nvPr/>
-        </p:nvSpPr>
-        <p:spPr>
-          <a:xfrm>
-            <a:off x="9912096" y="2368296"/>
-            <a:ext cx="1554480" cy="384048"/>
-          </a:xfrm>
-          <a:prstGeom prst="rect">
-            <a:avLst/>
-          </a:prstGeom>
-          <a:noFill/>
-        </p:spPr>
-        <p:txBody>
-          <a:bodyPr wrap="square" lIns="0" rIns="0" tIns="0" bIns="0" anchor="t">
-            <a:spAutoFit/>
-          </a:bodyPr>
-          <a:lstStyle/>
-          <a:p>
-            <a:pPr algn="l">
-              <a:lnSpc>
-                <a:spcPct val="115000"/>
-              </a:lnSpc>
-            </a:pPr>
-            <a:r>
-              <a:rPr sz="1300" b="1">
-                <a:solidFill>
-                  <a:srgbClr val="36D399"/>
-                </a:solidFill>
-                <a:latin typeface="맑은 고딕"/>
-                <a:ea typeface="맑은 고딕"/>
-                <a:cs typeface="맑은 고딕"/>
-              </a:rPr>
-              <a:t>주의</a:t>
-            </a:r>
-          </a:p>
-        </p:txBody>
-      </p:sp>
-      <p:sp>
-        <p:nvSpPr>
-          <p:cNvPr id="15" name="Rectangle 14"/>
+            <a:off x="996696" y="3017520"/>
+            <a:ext cx="4892040" cy="896112"/>
+          </a:xfrm>
+          <a:prstGeom prst="rect">
+            <a:avLst/>
+          </a:prstGeom>
+          <a:noFill/>
+        </p:spPr>
+        <p:txBody>
+          <a:bodyPr wrap="square" lIns="0" rIns="0" tIns="0" bIns="0" anchor="t">
+            <a:spAutoFit/>
+          </a:bodyPr>
+          <a:lstStyle/>
+          <a:p>
+            <a:pPr algn="l">
+              <a:lnSpc>
+                <a:spcPct val="135000"/>
+              </a:lnSpc>
+              <a:spcBef>
+                <a:spcPts val="0"/>
+              </a:spcBef>
+            </a:pPr>
+            <a:r>
+              <a:rPr sz="1200" b="0">
+                <a:solidFill>
+                  <a:srgbClr val="93A4B5"/>
+                </a:solidFill>
+                <a:latin typeface="맑은 고딕"/>
+                <a:ea typeface="맑은 고딕"/>
+                <a:cs typeface="맑은 고딕"/>
+              </a:rPr>
+              <a:t>Antigravity가 외부 로직을 받아들이는 표면은 MCP 하나다.</a:t>
+            </a:r>
+          </a:p>
+          <a:p>
+            <a:pPr algn="l">
+              <a:lnSpc>
+                <a:spcPct val="135000"/>
+              </a:lnSpc>
+              <a:spcBef>
+                <a:spcPts val="600"/>
+              </a:spcBef>
+            </a:pPr>
+            <a:r>
+              <a:rPr sz="1200" b="0">
+                <a:solidFill>
+                  <a:srgbClr val="93A4B5"/>
+                </a:solidFill>
+                <a:latin typeface="맑은 고딕"/>
+                <a:ea typeface="맑은 고딕"/>
+                <a:cs typeface="맑은 고딕"/>
+              </a:rPr>
+              <a:t>모델 선택을 가로채는 훅은 공개돼 있지 않다.</a:t>
+            </a:r>
+          </a:p>
+          <a:p>
+            <a:pPr algn="l">
+              <a:lnSpc>
+                <a:spcPct val="135000"/>
+              </a:lnSpc>
+              <a:spcBef>
+                <a:spcPts val="600"/>
+              </a:spcBef>
+            </a:pPr>
+            <a:r>
+              <a:rPr sz="1200" b="0">
+                <a:solidFill>
+                  <a:srgbClr val="93A4B5"/>
+                </a:solidFill>
+                <a:latin typeface="맑은 고딕"/>
+                <a:ea typeface="맑은 고딕"/>
+                <a:cs typeface="맑은 고딕"/>
+              </a:rPr>
+              <a:t>그래서 라우터를 "도구"로 노출해 에이전트가 묻게 만든다.</a:t>
+            </a:r>
+          </a:p>
+        </p:txBody>
+      </p:sp>
+      <p:sp>
+        <p:nvSpPr>
+          <p:cNvPr id="13" name="Rounded Rectangle 12"/>
           <p:cNvSpPr/>
           <p:nvPr/>
         </p:nvSpPr>
         <p:spPr>
           <a:xfrm>
-            <a:off x="685800" y="2670048"/>
-            <a:ext cx="10835640" cy="384048"/>
-          </a:xfrm>
-          <a:prstGeom prst="rect">
-            <a:avLst/>
+            <a:off x="6309360" y="2240280"/>
+            <a:ext cx="5212080" cy="1810512"/>
+          </a:xfrm>
+          <a:prstGeom prst="roundRect">
+            <a:avLst>
+              <a:gd name="adj" fmla="val 6000"/>
+            </a:avLst>
+          </a:prstGeom>
+          <a:solidFill>
+            <a:srgbClr val="18222E"/>
+          </a:solidFill>
+          <a:ln>
+            <a:noFill/>
+          </a:ln>
+          <a:effectLst/>
+        </p:spPr>
+        <p:style>
+          <a:lnRef idx="1">
+            <a:schemeClr val="accent1"/>
+          </a:lnRef>
+          <a:fillRef idx="3">
+            <a:schemeClr val="accent1"/>
+          </a:fillRef>
+          <a:effectRef idx="2">
+            <a:schemeClr val="accent1"/>
+          </a:effectRef>
+          <a:fontRef idx="minor">
+            <a:schemeClr val="lt1"/>
+          </a:fontRef>
+        </p:style>
+        <p:txBody>
+          <a:bodyPr rtlCol="0" anchor="ctr"/>
+          <a:lstStyle/>
+          <a:p>
+            <a:pPr algn="ctr"/>
+          </a:p>
+        </p:txBody>
+      </p:sp>
+      <p:sp>
+        <p:nvSpPr>
+          <p:cNvPr id="14" name="Rectangle 13"/>
+          <p:cNvSpPr/>
+          <p:nvPr/>
+        </p:nvSpPr>
+        <p:spPr>
+          <a:xfrm>
+            <a:off x="6309360" y="2240280"/>
+            <a:ext cx="50292" cy="1810512"/>
+          </a:xfrm>
+          <a:prstGeom prst="rect">
+            <a:avLst/>
+          </a:prstGeom>
+          <a:solidFill>
+            <a:srgbClr val="36D399"/>
+          </a:solidFill>
+          <a:ln>
+            <a:noFill/>
+          </a:ln>
+          <a:effectLst/>
+        </p:spPr>
+        <p:style>
+          <a:lnRef idx="1">
+            <a:schemeClr val="accent1"/>
+          </a:lnRef>
+          <a:fillRef idx="3">
+            <a:schemeClr val="accent1"/>
+          </a:fillRef>
+          <a:effectRef idx="2">
+            <a:schemeClr val="accent1"/>
+          </a:effectRef>
+          <a:fontRef idx="minor">
+            <a:schemeClr val="lt1"/>
+          </a:fontRef>
+        </p:style>
+        <p:txBody>
+          <a:bodyPr rtlCol="0" anchor="ctr"/>
+          <a:lstStyle/>
+          <a:p>
+            <a:pPr algn="ctr"/>
+          </a:p>
+        </p:txBody>
+      </p:sp>
+      <p:sp>
+        <p:nvSpPr>
+          <p:cNvPr id="15" name="TextBox 14"/>
+          <p:cNvSpPr txBox="1"/>
+          <p:nvPr/>
+        </p:nvSpPr>
+        <p:spPr>
+          <a:xfrm>
+            <a:off x="6620256" y="2478024"/>
+            <a:ext cx="4663440" cy="365760"/>
+          </a:xfrm>
+          <a:prstGeom prst="rect">
+            <a:avLst/>
+          </a:prstGeom>
+          <a:noFill/>
+        </p:spPr>
+        <p:txBody>
+          <a:bodyPr wrap="square" lIns="0" rIns="0" tIns="0" bIns="0" anchor="t">
+            <a:spAutoFit/>
+          </a:bodyPr>
+          <a:lstStyle/>
+          <a:p>
+            <a:pPr algn="l">
+              <a:lnSpc>
+                <a:spcPct val="115000"/>
+              </a:lnSpc>
+            </a:pPr>
+            <a:r>
+              <a:rPr sz="1600" b="1">
+                <a:solidFill>
+                  <a:srgbClr val="ECF1F6"/>
+                </a:solidFill>
+                <a:latin typeface="맑은 고딕"/>
+                <a:ea typeface="맑은 고딕"/>
+                <a:cs typeface="맑은 고딕"/>
+              </a:rPr>
+              <a:t>API 키가 필요 없다</a:t>
+            </a:r>
+          </a:p>
+        </p:txBody>
+      </p:sp>
+      <p:sp>
+        <p:nvSpPr>
+          <p:cNvPr id="16" name="TextBox 15"/>
+          <p:cNvSpPr txBox="1"/>
+          <p:nvPr/>
+        </p:nvSpPr>
+        <p:spPr>
+          <a:xfrm>
+            <a:off x="6620256" y="3017520"/>
+            <a:ext cx="4663440" cy="896112"/>
+          </a:xfrm>
+          <a:prstGeom prst="rect">
+            <a:avLst/>
+          </a:prstGeom>
+          <a:noFill/>
+        </p:spPr>
+        <p:txBody>
+          <a:bodyPr wrap="square" lIns="0" rIns="0" tIns="0" bIns="0" anchor="t">
+            <a:spAutoFit/>
+          </a:bodyPr>
+          <a:lstStyle/>
+          <a:p>
+            <a:pPr algn="l">
+              <a:lnSpc>
+                <a:spcPct val="135000"/>
+              </a:lnSpc>
+              <a:spcBef>
+                <a:spcPts val="0"/>
+              </a:spcBef>
+            </a:pPr>
+            <a:r>
+              <a:rPr sz="1200" b="0">
+                <a:solidFill>
+                  <a:srgbClr val="93A4B5"/>
+                </a:solidFill>
+                <a:latin typeface="맑은 고딕"/>
+                <a:ea typeface="맑은 고딕"/>
+                <a:cs typeface="맑은 고딕"/>
+              </a:rPr>
+              <a:t>이 서버는 모델을 호출하지 않는다. 판단만 돌려준다.</a:t>
+            </a:r>
+          </a:p>
+          <a:p>
+            <a:pPr algn="l">
+              <a:lnSpc>
+                <a:spcPct val="135000"/>
+              </a:lnSpc>
+              <a:spcBef>
+                <a:spcPts val="600"/>
+              </a:spcBef>
+            </a:pPr>
+            <a:r>
+              <a:rPr sz="1200" b="0">
+                <a:solidFill>
+                  <a:srgbClr val="93A4B5"/>
+                </a:solidFill>
+                <a:latin typeface="맑은 고딕"/>
+                <a:ea typeface="맑은 고딕"/>
+                <a:cs typeface="맑은 고딕"/>
+              </a:rPr>
+              <a:t>어디로 보낼지 · 몇 토큰까지 쓸지 · 지금 리셋할지.</a:t>
+            </a:r>
+          </a:p>
+          <a:p>
+            <a:pPr algn="l">
+              <a:lnSpc>
+                <a:spcPct val="135000"/>
+              </a:lnSpc>
+              <a:spcBef>
+                <a:spcPts val="600"/>
+              </a:spcBef>
+            </a:pPr>
+            <a:r>
+              <a:rPr sz="1200" b="0">
+                <a:solidFill>
+                  <a:srgbClr val="93A4B5"/>
+                </a:solidFill>
+                <a:latin typeface="맑은 고딕"/>
+                <a:ea typeface="맑은 고딕"/>
+                <a:cs typeface="맑은 고딕"/>
+              </a:rPr>
+              <a:t>실제 호출은 이미 구독 중인 에이전트가 한다.</a:t>
+            </a:r>
+          </a:p>
+        </p:txBody>
+      </p:sp>
+      <p:sp>
+        <p:nvSpPr>
+          <p:cNvPr id="17" name="Rounded Rectangle 16"/>
+          <p:cNvSpPr/>
+          <p:nvPr/>
+        </p:nvSpPr>
+        <p:spPr>
+          <a:xfrm>
+            <a:off x="685800" y="4206240"/>
+            <a:ext cx="5440680" cy="1481328"/>
+          </a:xfrm>
+          <a:prstGeom prst="roundRect">
+            <a:avLst>
+              <a:gd name="adj" fmla="val 5000"/>
+            </a:avLst>
           </a:prstGeom>
           <a:solidFill>
             <a:srgbClr val="111A24"/>
@@ -9914,156 +10103,291 @@
       </p:sp>
       <p:sp>
         <p:nvSpPr>
-          <p:cNvPr id="16" name="TextBox 15"/>
-          <p:cNvSpPr txBox="1"/>
-          <p:nvPr/>
-        </p:nvSpPr>
-        <p:spPr>
-          <a:xfrm>
-            <a:off x="813816" y="2752344"/>
-            <a:ext cx="868680" cy="384048"/>
-          </a:xfrm>
-          <a:prstGeom prst="rect">
-            <a:avLst/>
-          </a:prstGeom>
-          <a:noFill/>
-        </p:spPr>
-        <p:txBody>
-          <a:bodyPr wrap="square" lIns="0" rIns="0" tIns="0" bIns="0" anchor="t">
-            <a:spAutoFit/>
-          </a:bodyPr>
-          <a:lstStyle/>
-          <a:p>
-            <a:pPr algn="l">
-              <a:lnSpc>
-                <a:spcPct val="115000"/>
-              </a:lnSpc>
-            </a:pPr>
-            <a:r>
-              <a:rPr sz="1250" b="0">
+          <p:cNvPr id="18" name="Rectangle 17"/>
+          <p:cNvSpPr/>
+          <p:nvPr/>
+        </p:nvSpPr>
+        <p:spPr>
+          <a:xfrm>
+            <a:off x="685800" y="4206240"/>
+            <a:ext cx="45720" cy="1481328"/>
+          </a:xfrm>
+          <a:prstGeom prst="rect">
+            <a:avLst/>
+          </a:prstGeom>
+          <a:solidFill>
+            <a:srgbClr val="36D399"/>
+          </a:solidFill>
+          <a:ln>
+            <a:noFill/>
+          </a:ln>
+          <a:effectLst/>
+        </p:spPr>
+        <p:style>
+          <a:lnRef idx="1">
+            <a:schemeClr val="accent1"/>
+          </a:lnRef>
+          <a:fillRef idx="3">
+            <a:schemeClr val="accent1"/>
+          </a:fillRef>
+          <a:effectRef idx="2">
+            <a:schemeClr val="accent1"/>
+          </a:effectRef>
+          <a:fontRef idx="minor">
+            <a:schemeClr val="lt1"/>
+          </a:fontRef>
+        </p:style>
+        <p:txBody>
+          <a:bodyPr rtlCol="0" anchor="ctr"/>
+          <a:lstStyle/>
+          <a:p>
+            <a:pPr algn="ctr"/>
+          </a:p>
+        </p:txBody>
+      </p:sp>
+      <p:sp>
+        <p:nvSpPr>
+          <p:cNvPr id="19" name="TextBox 18"/>
+          <p:cNvSpPr txBox="1"/>
+          <p:nvPr/>
+        </p:nvSpPr>
+        <p:spPr>
+          <a:xfrm>
+            <a:off x="914400" y="4334256"/>
+            <a:ext cx="5120640" cy="1280160"/>
+          </a:xfrm>
+          <a:prstGeom prst="rect">
+            <a:avLst/>
+          </a:prstGeom>
+          <a:noFill/>
+        </p:spPr>
+        <p:txBody>
+          <a:bodyPr wrap="square" lIns="0" rIns="0" tIns="0" bIns="0" anchor="t">
+            <a:spAutoFit/>
+          </a:bodyPr>
+          <a:lstStyle/>
+          <a:p>
+            <a:pPr algn="l">
+              <a:lnSpc>
+                <a:spcPct val="115000"/>
+              </a:lnSpc>
+              <a:spcBef>
+                <a:spcPts val="0"/>
+              </a:spcBef>
+            </a:pPr>
+            <a:r>
+              <a:rPr sz="1100" b="0">
+                <a:solidFill>
+                  <a:srgbClr val="93A4B5"/>
+                </a:solidFill>
+                <a:latin typeface="Consolas"/>
+                <a:ea typeface="Consolas"/>
+                <a:cs typeface="Consolas"/>
+              </a:rPr>
+              <a:t>// &lt;프로젝트&gt;/.agents/mcp_config.json</a:t>
+            </a:r>
+          </a:p>
+          <a:p>
+            <a:pPr algn="l">
+              <a:lnSpc>
+                <a:spcPct val="115000"/>
+              </a:lnSpc>
+              <a:spcBef>
+                <a:spcPts val="100"/>
+              </a:spcBef>
+            </a:pPr>
+            <a:r>
+              <a:rPr sz="1100" b="0">
+                <a:solidFill>
+                  <a:srgbClr val="5A9CFF"/>
+                </a:solidFill>
+                <a:latin typeface="Consolas"/>
+                <a:ea typeface="Consolas"/>
+                <a:cs typeface="Consolas"/>
+              </a:rPr>
+              <a:t>{ "mcpServers": {</a:t>
+            </a:r>
+          </a:p>
+          <a:p>
+            <a:pPr algn="l">
+              <a:lnSpc>
+                <a:spcPct val="115000"/>
+              </a:lnSpc>
+              <a:spcBef>
+                <a:spcPts val="100"/>
+              </a:spcBef>
+            </a:pPr>
+            <a:r>
+              <a:rPr sz="1100" b="0">
+                <a:solidFill>
+                  <a:srgbClr val="5A9CFF"/>
+                </a:solidFill>
+                <a:latin typeface="Consolas"/>
+                <a:ea typeface="Consolas"/>
+                <a:cs typeface="Consolas"/>
+              </a:rPr>
+              <a:t>    "token-router": {</a:t>
+            </a:r>
+          </a:p>
+          <a:p>
+            <a:pPr algn="l">
+              <a:lnSpc>
+                <a:spcPct val="115000"/>
+              </a:lnSpc>
+              <a:spcBef>
+                <a:spcPts val="100"/>
+              </a:spcBef>
+            </a:pPr>
+            <a:r>
+              <a:rPr sz="1100" b="0">
+                <a:solidFill>
+                  <a:srgbClr val="5A9CFF"/>
+                </a:solidFill>
+                <a:latin typeface="Consolas"/>
+                <a:ea typeface="Consolas"/>
+                <a:cs typeface="Consolas"/>
+              </a:rPr>
+              <a:t>      "command": "python3",</a:t>
+            </a:r>
+          </a:p>
+          <a:p>
+            <a:pPr algn="l">
+              <a:lnSpc>
+                <a:spcPct val="115000"/>
+              </a:lnSpc>
+              <a:spcBef>
+                <a:spcPts val="100"/>
+              </a:spcBef>
+            </a:pPr>
+            <a:r>
+              <a:rPr sz="1100" b="0">
+                <a:solidFill>
+                  <a:srgbClr val="5A9CFF"/>
+                </a:solidFill>
+                <a:latin typeface="Consolas"/>
+                <a:ea typeface="Consolas"/>
+                <a:cs typeface="Consolas"/>
+              </a:rPr>
+              <a:t>      "args": ["/abs/path/mcp_server.py"]</a:t>
+            </a:r>
+          </a:p>
+          <a:p>
+            <a:pPr algn="l">
+              <a:lnSpc>
+                <a:spcPct val="115000"/>
+              </a:lnSpc>
+              <a:spcBef>
+                <a:spcPts val="100"/>
+              </a:spcBef>
+            </a:pPr>
+            <a:r>
+              <a:rPr sz="1100" b="0">
                 <a:solidFill>
                   <a:srgbClr val="ECF1F6"/>
                 </a:solidFill>
-                <a:latin typeface="맑은 고딕"/>
-                <a:ea typeface="맑은 고딕"/>
-                <a:cs typeface="맑은 고딕"/>
-              </a:rPr>
-              <a:t>1일차</a:t>
-            </a:r>
-          </a:p>
-        </p:txBody>
-      </p:sp>
-      <p:sp>
-        <p:nvSpPr>
-          <p:cNvPr id="17" name="TextBox 16"/>
-          <p:cNvSpPr txBox="1"/>
-          <p:nvPr/>
-        </p:nvSpPr>
-        <p:spPr>
-          <a:xfrm>
-            <a:off x="1865376" y="2752344"/>
-            <a:ext cx="2194560" cy="384048"/>
-          </a:xfrm>
-          <a:prstGeom prst="rect">
-            <a:avLst/>
-          </a:prstGeom>
-          <a:noFill/>
-        </p:spPr>
-        <p:txBody>
-          <a:bodyPr wrap="square" lIns="0" rIns="0" tIns="0" bIns="0" anchor="t">
-            <a:spAutoFit/>
-          </a:bodyPr>
-          <a:lstStyle/>
-          <a:p>
-            <a:pPr algn="l">
-              <a:lnSpc>
-                <a:spcPct val="115000"/>
-              </a:lnSpc>
-            </a:pPr>
-            <a:r>
-              <a:rPr sz="1250" b="0">
+                <a:latin typeface="Consolas"/>
+                <a:ea typeface="Consolas"/>
+                <a:cs typeface="Consolas"/>
+              </a:rPr>
+              <a:t>    }</a:t>
+            </a:r>
+          </a:p>
+          <a:p>
+            <a:pPr algn="l">
+              <a:lnSpc>
+                <a:spcPct val="115000"/>
+              </a:lnSpc>
+              <a:spcBef>
+                <a:spcPts val="100"/>
+              </a:spcBef>
+            </a:pPr>
+            <a:r>
+              <a:rPr sz="1100" b="0">
                 <a:solidFill>
                   <a:srgbClr val="ECF1F6"/>
                 </a:solidFill>
-                <a:latin typeface="맑은 고딕"/>
-                <a:ea typeface="맑은 고딕"/>
-                <a:cs typeface="맑은 고딕"/>
-              </a:rPr>
-              <a:t>설명 3줄 상한</a:t>
-            </a:r>
-          </a:p>
-        </p:txBody>
-      </p:sp>
-      <p:sp>
-        <p:nvSpPr>
-          <p:cNvPr id="18" name="TextBox 17"/>
-          <p:cNvSpPr txBox="1"/>
-          <p:nvPr/>
-        </p:nvSpPr>
-        <p:spPr>
-          <a:xfrm>
-            <a:off x="4242816" y="2752344"/>
-            <a:ext cx="3017520" cy="384048"/>
-          </a:xfrm>
-          <a:prstGeom prst="rect">
-            <a:avLst/>
-          </a:prstGeom>
-          <a:noFill/>
-        </p:spPr>
-        <p:txBody>
-          <a:bodyPr wrap="square" lIns="0" rIns="0" tIns="0" bIns="0" anchor="t">
-            <a:spAutoFit/>
-          </a:bodyPr>
-          <a:lstStyle/>
-          <a:p>
-            <a:pPr algn="l">
-              <a:lnSpc>
-                <a:spcPct val="115000"/>
-              </a:lnSpc>
-            </a:pPr>
-            <a:r>
-              <a:rPr sz="1250" b="0">
-                <a:solidFill>
-                  <a:srgbClr val="ECF1F6"/>
-                </a:solidFill>
-                <a:latin typeface="맑은 고딕"/>
-                <a:ea typeface="맑은 고딕"/>
-                <a:cs typeface="맑은 고딕"/>
-              </a:rPr>
-              <a:t>프롬프트 + 후처리 컷</a:t>
-            </a:r>
-          </a:p>
-        </p:txBody>
-      </p:sp>
-      <p:sp>
-        <p:nvSpPr>
-          <p:cNvPr id="19" name="TextBox 18"/>
-          <p:cNvSpPr txBox="1"/>
-          <p:nvPr/>
-        </p:nvSpPr>
-        <p:spPr>
-          <a:xfrm>
-            <a:off x="7443216" y="2752344"/>
-            <a:ext cx="2286000" cy="384048"/>
-          </a:xfrm>
-          <a:prstGeom prst="rect">
-            <a:avLst/>
-          </a:prstGeom>
-          <a:noFill/>
-        </p:spPr>
-        <p:txBody>
-          <a:bodyPr wrap="square" lIns="0" rIns="0" tIns="0" bIns="0" anchor="t">
-            <a:spAutoFit/>
-          </a:bodyPr>
-          <a:lstStyle/>
-          <a:p>
-            <a:pPr algn="l">
-              <a:lnSpc>
-                <a:spcPct val="115000"/>
-              </a:lnSpc>
-            </a:pPr>
-            <a:r>
-              <a:rPr sz="1250" b="1">
+                <a:latin typeface="Consolas"/>
+                <a:ea typeface="Consolas"/>
+                <a:cs typeface="Consolas"/>
+              </a:rPr>
+              <a:t>} }</a:t>
+            </a:r>
+          </a:p>
+        </p:txBody>
+      </p:sp>
+      <p:sp>
+        <p:nvSpPr>
+          <p:cNvPr id="20" name="Rectangle 19"/>
+          <p:cNvSpPr/>
+          <p:nvPr/>
+        </p:nvSpPr>
+        <p:spPr>
+          <a:xfrm>
+            <a:off x="6309360" y="4206240"/>
+            <a:ext cx="5212080" cy="320040"/>
+          </a:xfrm>
+          <a:prstGeom prst="rect">
+            <a:avLst/>
+          </a:prstGeom>
+          <a:solidFill>
+            <a:srgbClr val="18222E"/>
+          </a:solidFill>
+          <a:ln>
+            <a:noFill/>
+          </a:ln>
+          <a:effectLst/>
+        </p:spPr>
+        <p:style>
+          <a:lnRef idx="1">
+            <a:schemeClr val="accent1"/>
+          </a:lnRef>
+          <a:fillRef idx="3">
+            <a:schemeClr val="accent1"/>
+          </a:fillRef>
+          <a:effectRef idx="2">
+            <a:schemeClr val="accent1"/>
+          </a:effectRef>
+          <a:fontRef idx="minor">
+            <a:schemeClr val="lt1"/>
+          </a:fontRef>
+        </p:style>
+        <p:txBody>
+          <a:bodyPr rtlCol="0" anchor="ctr"/>
+          <a:lstStyle/>
+          <a:p>
+            <a:pPr algn="ctr"/>
+          </a:p>
+        </p:txBody>
+      </p:sp>
+      <p:sp>
+        <p:nvSpPr>
+          <p:cNvPr id="21" name="TextBox 20"/>
+          <p:cNvSpPr txBox="1"/>
+          <p:nvPr/>
+        </p:nvSpPr>
+        <p:spPr>
+          <a:xfrm>
+            <a:off x="6437376" y="4288536"/>
+            <a:ext cx="1325880" cy="320040"/>
+          </a:xfrm>
+          <a:prstGeom prst="rect">
+            <a:avLst/>
+          </a:prstGeom>
+          <a:noFill/>
+        </p:spPr>
+        <p:txBody>
+          <a:bodyPr wrap="square" lIns="0" rIns="0" tIns="0" bIns="0" anchor="t">
+            <a:spAutoFit/>
+          </a:bodyPr>
+          <a:lstStyle/>
+          <a:p>
+            <a:pPr algn="l">
+              <a:lnSpc>
+                <a:spcPct val="115000"/>
+              </a:lnSpc>
+            </a:pPr>
+            <a:r>
+              <a:rPr sz="1300" b="1">
                 <a:solidFill>
                   <a:srgbClr val="36D399"/>
                 </a:solidFill>
@@ -10071,89 +10395,7 @@
                 <a:ea typeface="맑은 고딕"/>
                 <a:cs typeface="맑은 고딕"/>
               </a:rPr>
-              <a:t>즉시 −40~60% 출력</a:t>
-            </a:r>
-          </a:p>
-        </p:txBody>
-      </p:sp>
-      <p:sp>
-        <p:nvSpPr>
-          <p:cNvPr id="20" name="TextBox 19"/>
-          <p:cNvSpPr txBox="1"/>
-          <p:nvPr/>
-        </p:nvSpPr>
-        <p:spPr>
-          <a:xfrm>
-            <a:off x="9912096" y="2752344"/>
-            <a:ext cx="1554480" cy="384048"/>
-          </a:xfrm>
-          <a:prstGeom prst="rect">
-            <a:avLst/>
-          </a:prstGeom>
-          <a:noFill/>
-        </p:spPr>
-        <p:txBody>
-          <a:bodyPr wrap="square" lIns="0" rIns="0" tIns="0" bIns="0" anchor="t">
-            <a:spAutoFit/>
-          </a:bodyPr>
-          <a:lstStyle/>
-          <a:p>
-            <a:pPr algn="l">
-              <a:lnSpc>
-                <a:spcPct val="115000"/>
-              </a:lnSpc>
-            </a:pPr>
-            <a:r>
-              <a:rPr sz="1250" b="0">
-                <a:solidFill>
-                  <a:srgbClr val="ECF1F6"/>
-                </a:solidFill>
-                <a:latin typeface="맑은 고딕"/>
-                <a:ea typeface="맑은 고딕"/>
-                <a:cs typeface="맑은 고딕"/>
-              </a:rPr>
-              <a:t>없음</a:t>
-            </a:r>
-          </a:p>
-        </p:txBody>
-      </p:sp>
-      <p:sp>
-        <p:nvSpPr>
-          <p:cNvPr id="21" name="TextBox 20"/>
-          <p:cNvSpPr txBox="1"/>
-          <p:nvPr/>
-        </p:nvSpPr>
-        <p:spPr>
-          <a:xfrm>
-            <a:off x="813816" y="3136391"/>
-            <a:ext cx="868680" cy="384048"/>
-          </a:xfrm>
-          <a:prstGeom prst="rect">
-            <a:avLst/>
-          </a:prstGeom>
-          <a:noFill/>
-        </p:spPr>
-        <p:txBody>
-          <a:bodyPr wrap="square" lIns="0" rIns="0" tIns="0" bIns="0" anchor="t">
-            <a:spAutoFit/>
-          </a:bodyPr>
-          <a:lstStyle/>
-          <a:p>
-            <a:pPr algn="l">
-              <a:lnSpc>
-                <a:spcPct val="115000"/>
-              </a:lnSpc>
-            </a:pPr>
-            <a:r>
-              <a:rPr sz="1250" b="0">
-                <a:solidFill>
-                  <a:srgbClr val="ECF1F6"/>
-                </a:solidFill>
-                <a:latin typeface="맑은 고딕"/>
-                <a:ea typeface="맑은 고딕"/>
-                <a:cs typeface="맑은 고딕"/>
-              </a:rPr>
-              <a:t>1주차</a:t>
+              <a:t>위치</a:t>
             </a:r>
           </a:p>
         </p:txBody>
@@ -10166,35 +10408,35 @@
         </p:nvSpPr>
         <p:spPr>
           <a:xfrm>
-            <a:off x="1865376" y="3136391"/>
-            <a:ext cx="2194560" cy="384048"/>
-          </a:xfrm>
-          <a:prstGeom prst="rect">
-            <a:avLst/>
-          </a:prstGeom>
-          <a:noFill/>
-        </p:spPr>
-        <p:txBody>
-          <a:bodyPr wrap="square" lIns="0" rIns="0" tIns="0" bIns="0" anchor="t">
-            <a:spAutoFit/>
-          </a:bodyPr>
-          <a:lstStyle/>
-          <a:p>
-            <a:pPr algn="l">
-              <a:lnSpc>
-                <a:spcPct val="115000"/>
-              </a:lnSpc>
-            </a:pPr>
-            <a:r>
-              <a:rPr sz="1250" b="0">
-                <a:solidFill>
-                  <a:srgbClr val="ECF1F6"/>
-                </a:solidFill>
-                <a:latin typeface="맑은 고딕"/>
-                <a:ea typeface="맑은 고딕"/>
-                <a:cs typeface="맑은 고딕"/>
-              </a:rPr>
-              <a:t>규칙 기반 라우팅</a:t>
+            <a:off x="7946136" y="4288536"/>
+            <a:ext cx="2240279" cy="320040"/>
+          </a:xfrm>
+          <a:prstGeom prst="rect">
+            <a:avLst/>
+          </a:prstGeom>
+          <a:noFill/>
+        </p:spPr>
+        <p:txBody>
+          <a:bodyPr wrap="square" lIns="0" rIns="0" tIns="0" bIns="0" anchor="t">
+            <a:spAutoFit/>
+          </a:bodyPr>
+          <a:lstStyle/>
+          <a:p>
+            <a:pPr algn="l">
+              <a:lnSpc>
+                <a:spcPct val="115000"/>
+              </a:lnSpc>
+            </a:pPr>
+            <a:r>
+              <a:rPr sz="1300" b="1">
+                <a:solidFill>
+                  <a:srgbClr val="36D399"/>
+                </a:solidFill>
+                <a:latin typeface="맑은 고딕"/>
+                <a:ea typeface="맑은 고딕"/>
+                <a:cs typeface="맑은 고딕"/>
+              </a:rPr>
+              <a:t>경로</a:t>
             </a:r>
           </a:p>
         </p:txBody>
@@ -10207,131 +10449,49 @@
         </p:nvSpPr>
         <p:spPr>
           <a:xfrm>
-            <a:off x="4242816" y="3136391"/>
-            <a:ext cx="3017520" cy="384048"/>
-          </a:xfrm>
-          <a:prstGeom prst="rect">
-            <a:avLst/>
-          </a:prstGeom>
-          <a:noFill/>
-        </p:spPr>
-        <p:txBody>
-          <a:bodyPr wrap="square" lIns="0" rIns="0" tIns="0" bIns="0" anchor="t">
-            <a:spAutoFit/>
-          </a:bodyPr>
-          <a:lstStyle/>
-          <a:p>
-            <a:pPr algn="l">
-              <a:lnSpc>
-                <a:spcPct val="115000"/>
-              </a:lnSpc>
-            </a:pPr>
-            <a:r>
-              <a:rPr sz="1250" b="0">
-                <a:solidFill>
-                  <a:srgbClr val="ECF1F6"/>
-                </a:solidFill>
-                <a:latin typeface="맑은 고딕"/>
-                <a:ea typeface="맑은 고딕"/>
-                <a:cs typeface="맑은 고딕"/>
-              </a:rPr>
-              <a:t>route() 붙이고 로그만 남김</a:t>
-            </a:r>
-          </a:p>
-        </p:txBody>
-      </p:sp>
-      <p:sp>
-        <p:nvSpPr>
-          <p:cNvPr id="24" name="TextBox 23"/>
-          <p:cNvSpPr txBox="1"/>
-          <p:nvPr/>
-        </p:nvSpPr>
-        <p:spPr>
-          <a:xfrm>
-            <a:off x="7443216" y="3136391"/>
-            <a:ext cx="2286000" cy="384048"/>
-          </a:xfrm>
-          <a:prstGeom prst="rect">
-            <a:avLst/>
-          </a:prstGeom>
-          <a:noFill/>
-        </p:spPr>
-        <p:txBody>
-          <a:bodyPr wrap="square" lIns="0" rIns="0" tIns="0" bIns="0" anchor="t">
-            <a:spAutoFit/>
-          </a:bodyPr>
-          <a:lstStyle/>
-          <a:p>
-            <a:pPr algn="l">
-              <a:lnSpc>
-                <a:spcPct val="115000"/>
-              </a:lnSpc>
-            </a:pPr>
-            <a:r>
-              <a:rPr sz="1250" b="1">
-                <a:solidFill>
-                  <a:srgbClr val="5A9CFF"/>
-                </a:solidFill>
-                <a:latin typeface="맑은 고딕"/>
-                <a:ea typeface="맑은 고딕"/>
-                <a:cs typeface="맑은 고딕"/>
-              </a:rPr>
-              <a:t>측정 먼저</a:t>
-            </a:r>
-          </a:p>
-        </p:txBody>
-      </p:sp>
-      <p:sp>
-        <p:nvSpPr>
-          <p:cNvPr id="25" name="TextBox 24"/>
-          <p:cNvSpPr txBox="1"/>
-          <p:nvPr/>
-        </p:nvSpPr>
-        <p:spPr>
-          <a:xfrm>
-            <a:off x="9912096" y="3136391"/>
-            <a:ext cx="1554480" cy="384048"/>
-          </a:xfrm>
-          <a:prstGeom prst="rect">
-            <a:avLst/>
-          </a:prstGeom>
-          <a:noFill/>
-        </p:spPr>
-        <p:txBody>
-          <a:bodyPr wrap="square" lIns="0" rIns="0" tIns="0" bIns="0" anchor="t">
-            <a:spAutoFit/>
-          </a:bodyPr>
-          <a:lstStyle/>
-          <a:p>
-            <a:pPr algn="l">
-              <a:lnSpc>
-                <a:spcPct val="115000"/>
-              </a:lnSpc>
-            </a:pPr>
-            <a:r>
-              <a:rPr sz="1250" b="0">
-                <a:solidFill>
-                  <a:srgbClr val="ECF1F6"/>
-                </a:solidFill>
-                <a:latin typeface="맑은 고딕"/>
-                <a:ea typeface="맑은 고딕"/>
-                <a:cs typeface="맑은 고딕"/>
-              </a:rPr>
-              <a:t>오분류</a:t>
-            </a:r>
-          </a:p>
-        </p:txBody>
-      </p:sp>
-      <p:sp>
-        <p:nvSpPr>
-          <p:cNvPr id="26" name="Rectangle 25"/>
+            <a:off x="10369296" y="4288536"/>
+            <a:ext cx="1097280" cy="320040"/>
+          </a:xfrm>
+          <a:prstGeom prst="rect">
+            <a:avLst/>
+          </a:prstGeom>
+          <a:noFill/>
+        </p:spPr>
+        <p:txBody>
+          <a:bodyPr wrap="square" lIns="0" rIns="0" tIns="0" bIns="0" anchor="t">
+            <a:spAutoFit/>
+          </a:bodyPr>
+          <a:lstStyle/>
+          <a:p>
+            <a:pPr algn="l">
+              <a:lnSpc>
+                <a:spcPct val="115000"/>
+              </a:lnSpc>
+            </a:pPr>
+            <a:r>
+              <a:rPr sz="1300" b="1">
+                <a:solidFill>
+                  <a:srgbClr val="36D399"/>
+                </a:solidFill>
+                <a:latin typeface="맑은 고딕"/>
+                <a:ea typeface="맑은 고딕"/>
+                <a:cs typeface="맑은 고딕"/>
+              </a:rPr>
+              <a:t>비고</a:t>
+            </a:r>
+          </a:p>
+        </p:txBody>
+      </p:sp>
+      <p:sp>
+        <p:nvSpPr>
+          <p:cNvPr id="24" name="Rectangle 23"/>
           <p:cNvSpPr/>
           <p:nvPr/>
         </p:nvSpPr>
         <p:spPr>
           <a:xfrm>
-            <a:off x="685800" y="3438144"/>
-            <a:ext cx="10835640" cy="384048"/>
+            <a:off x="6309360" y="4526279"/>
+            <a:ext cx="5212080" cy="320040"/>
           </a:xfrm>
           <a:prstGeom prst="rect">
             <a:avLst/>
@@ -10368,33 +10528,156 @@
       </p:sp>
       <p:sp>
         <p:nvSpPr>
+          <p:cNvPr id="25" name="TextBox 24"/>
+          <p:cNvSpPr txBox="1"/>
+          <p:nvPr/>
+        </p:nvSpPr>
+        <p:spPr>
+          <a:xfrm>
+            <a:off x="6437376" y="4608575"/>
+            <a:ext cx="1325880" cy="320040"/>
+          </a:xfrm>
+          <a:prstGeom prst="rect">
+            <a:avLst/>
+          </a:prstGeom>
+          <a:noFill/>
+        </p:spPr>
+        <p:txBody>
+          <a:bodyPr wrap="square" lIns="0" rIns="0" tIns="0" bIns="0" anchor="t">
+            <a:spAutoFit/>
+          </a:bodyPr>
+          <a:lstStyle/>
+          <a:p>
+            <a:pPr algn="l">
+              <a:lnSpc>
+                <a:spcPct val="115000"/>
+              </a:lnSpc>
+            </a:pPr>
+            <a:r>
+              <a:rPr sz="1150" b="0">
+                <a:solidFill>
+                  <a:srgbClr val="ECF1F6"/>
+                </a:solidFill>
+                <a:latin typeface="맑은 고딕"/>
+                <a:ea typeface="맑은 고딕"/>
+                <a:cs typeface="맑은 고딕"/>
+              </a:rPr>
+              <a:t>전역 (2.0)</a:t>
+            </a:r>
+          </a:p>
+        </p:txBody>
+      </p:sp>
+      <p:sp>
+        <p:nvSpPr>
+          <p:cNvPr id="26" name="TextBox 25"/>
+          <p:cNvSpPr txBox="1"/>
+          <p:nvPr/>
+        </p:nvSpPr>
+        <p:spPr>
+          <a:xfrm>
+            <a:off x="7946136" y="4608575"/>
+            <a:ext cx="2240279" cy="320040"/>
+          </a:xfrm>
+          <a:prstGeom prst="rect">
+            <a:avLst/>
+          </a:prstGeom>
+          <a:noFill/>
+        </p:spPr>
+        <p:txBody>
+          <a:bodyPr wrap="square" lIns="0" rIns="0" tIns="0" bIns="0" anchor="t">
+            <a:spAutoFit/>
+          </a:bodyPr>
+          <a:lstStyle/>
+          <a:p>
+            <a:pPr algn="l">
+              <a:lnSpc>
+                <a:spcPct val="115000"/>
+              </a:lnSpc>
+            </a:pPr>
+            <a:r>
+              <a:rPr sz="1150" b="0">
+                <a:solidFill>
+                  <a:srgbClr val="ECF1F6"/>
+                </a:solidFill>
+                <a:latin typeface="맑은 고딕"/>
+                <a:ea typeface="맑은 고딕"/>
+                <a:cs typeface="맑은 고딕"/>
+              </a:rPr>
+              <a:t>~/.gemini/config/</a:t>
+            </a:r>
+          </a:p>
+        </p:txBody>
+      </p:sp>
+      <p:sp>
+        <p:nvSpPr>
           <p:cNvPr id="27" name="TextBox 26"/>
           <p:cNvSpPr txBox="1"/>
           <p:nvPr/>
         </p:nvSpPr>
         <p:spPr>
           <a:xfrm>
-            <a:off x="813816" y="3520439"/>
-            <a:ext cx="868680" cy="384048"/>
-          </a:xfrm>
-          <a:prstGeom prst="rect">
-            <a:avLst/>
-          </a:prstGeom>
-          <a:noFill/>
-        </p:spPr>
-        <p:txBody>
-          <a:bodyPr wrap="square" lIns="0" rIns="0" tIns="0" bIns="0" anchor="t">
-            <a:spAutoFit/>
-          </a:bodyPr>
-          <a:lstStyle/>
-          <a:p>
-            <a:pPr algn="l">
-              <a:lnSpc>
-                <a:spcPct val="115000"/>
-              </a:lnSpc>
-            </a:pPr>
-            <a:r>
-              <a:rPr sz="1250" b="0">
+            <a:off x="10369296" y="4608575"/>
+            <a:ext cx="1097280" cy="320040"/>
+          </a:xfrm>
+          <a:prstGeom prst="rect">
+            <a:avLst/>
+          </a:prstGeom>
+          <a:noFill/>
+        </p:spPr>
+        <p:txBody>
+          <a:bodyPr wrap="square" lIns="0" rIns="0" tIns="0" bIns="0" anchor="t">
+            <a:spAutoFit/>
+          </a:bodyPr>
+          <a:lstStyle/>
+          <a:p>
+            <a:pPr algn="l">
+              <a:lnSpc>
+                <a:spcPct val="115000"/>
+              </a:lnSpc>
+            </a:pPr>
+            <a:r>
+              <a:rPr sz="1150" b="1">
+                <a:solidFill>
+                  <a:srgbClr val="36D399"/>
+                </a:solidFill>
+                <a:latin typeface="맑은 고딕"/>
+                <a:ea typeface="맑은 고딕"/>
+                <a:cs typeface="맑은 고딕"/>
+              </a:rPr>
+              <a:t>권장</a:t>
+            </a:r>
+          </a:p>
+        </p:txBody>
+      </p:sp>
+      <p:sp>
+        <p:nvSpPr>
+          <p:cNvPr id="28" name="TextBox 27"/>
+          <p:cNvSpPr txBox="1"/>
+          <p:nvPr/>
+        </p:nvSpPr>
+        <p:spPr>
+          <a:xfrm>
+            <a:off x="6437376" y="4928615"/>
+            <a:ext cx="1325880" cy="320040"/>
+          </a:xfrm>
+          <a:prstGeom prst="rect">
+            <a:avLst/>
+          </a:prstGeom>
+          <a:noFill/>
+        </p:spPr>
+        <p:txBody>
+          <a:bodyPr wrap="square" lIns="0" rIns="0" tIns="0" bIns="0" anchor="t">
+            <a:spAutoFit/>
+          </a:bodyPr>
+          <a:lstStyle/>
+          <a:p>
+            <a:pPr algn="l">
+              <a:lnSpc>
+                <a:spcPct val="115000"/>
+              </a:lnSpc>
+            </a:pPr>
+            <a:r>
+              <a:rPr sz="1150" b="0">
                 <a:solidFill>
                   <a:srgbClr val="ECF1F6"/>
                 </a:solidFill>
@@ -10402,40 +10685,40 @@
                 <a:ea typeface="맑은 고딕"/>
                 <a:cs typeface="맑은 고딕"/>
               </a:rPr>
-              <a:t>2주차</a:t>
-            </a:r>
-          </a:p>
-        </p:txBody>
-      </p:sp>
-      <p:sp>
-        <p:nvSpPr>
-          <p:cNvPr id="28" name="TextBox 27"/>
-          <p:cNvSpPr txBox="1"/>
-          <p:nvPr/>
-        </p:nvSpPr>
-        <p:spPr>
-          <a:xfrm>
-            <a:off x="1865376" y="3520439"/>
-            <a:ext cx="2194560" cy="384048"/>
-          </a:xfrm>
-          <a:prstGeom prst="rect">
-            <a:avLst/>
-          </a:prstGeom>
-          <a:noFill/>
-        </p:spPr>
-        <p:txBody>
-          <a:bodyPr wrap="square" lIns="0" rIns="0" tIns="0" bIns="0" anchor="t">
-            <a:spAutoFit/>
-          </a:bodyPr>
-          <a:lstStyle/>
-          <a:p>
-            <a:pPr algn="l">
-              <a:lnSpc>
-                <a:spcPct val="115000"/>
-              </a:lnSpc>
-            </a:pPr>
-            <a:r>
-              <a:rPr sz="1250" b="0">
+              <a:t>워크스페이스</a:t>
+            </a:r>
+          </a:p>
+        </p:txBody>
+      </p:sp>
+      <p:sp>
+        <p:nvSpPr>
+          <p:cNvPr id="29" name="TextBox 28"/>
+          <p:cNvSpPr txBox="1"/>
+          <p:nvPr/>
+        </p:nvSpPr>
+        <p:spPr>
+          <a:xfrm>
+            <a:off x="7946136" y="4928615"/>
+            <a:ext cx="2240279" cy="320040"/>
+          </a:xfrm>
+          <a:prstGeom prst="rect">
+            <a:avLst/>
+          </a:prstGeom>
+          <a:noFill/>
+        </p:spPr>
+        <p:txBody>
+          <a:bodyPr wrap="square" lIns="0" rIns="0" tIns="0" bIns="0" anchor="t">
+            <a:spAutoFit/>
+          </a:bodyPr>
+          <a:lstStyle/>
+          <a:p>
+            <a:pPr algn="l">
+              <a:lnSpc>
+                <a:spcPct val="115000"/>
+              </a:lnSpc>
+            </a:pPr>
+            <a:r>
+              <a:rPr sz="1150" b="0">
                 <a:solidFill>
                   <a:srgbClr val="ECF1F6"/>
                 </a:solidFill>
@@ -10443,48 +10726,7 @@
                 <a:ea typeface="맑은 고딕"/>
                 <a:cs typeface="맑은 고딕"/>
               </a:rPr>
-              <a:t>라우팅 실제 적용</a:t>
-            </a:r>
-          </a:p>
-        </p:txBody>
-      </p:sp>
-      <p:sp>
-        <p:nvSpPr>
-          <p:cNvPr id="29" name="TextBox 28"/>
-          <p:cNvSpPr txBox="1"/>
-          <p:nvPr/>
-        </p:nvSpPr>
-        <p:spPr>
-          <a:xfrm>
-            <a:off x="4242816" y="3520439"/>
-            <a:ext cx="3017520" cy="384048"/>
-          </a:xfrm>
-          <a:prstGeom prst="rect">
-            <a:avLst/>
-          </a:prstGeom>
-          <a:noFill/>
-        </p:spPr>
-        <p:txBody>
-          <a:bodyPr wrap="square" lIns="0" rIns="0" tIns="0" bIns="0" anchor="t">
-            <a:spAutoFit/>
-          </a:bodyPr>
-          <a:lstStyle/>
-          <a:p>
-            <a:pPr algn="l">
-              <a:lnSpc>
-                <a:spcPct val="115000"/>
-              </a:lnSpc>
-            </a:pPr>
-            <a:r>
-              <a:rPr sz="1250" b="0">
-                <a:solidFill>
-                  <a:srgbClr val="ECF1F6"/>
-                </a:solidFill>
-                <a:latin typeface="맑은 고딕"/>
-                <a:ea typeface="맑은 고딕"/>
-                <a:cs typeface="맑은 고딕"/>
-              </a:rPr>
-              <a:t>툴·설명부터 소형으로</a:t>
+              <a:t>&lt;프로젝트&gt;/.agents/</a:t>
             </a:r>
           </a:p>
         </p:txBody>
@@ -10497,27 +10739,27 @@
         </p:nvSpPr>
         <p:spPr>
           <a:xfrm>
-            <a:off x="7443216" y="3520439"/>
-            <a:ext cx="2286000" cy="384048"/>
-          </a:xfrm>
-          <a:prstGeom prst="rect">
-            <a:avLst/>
-          </a:prstGeom>
-          <a:noFill/>
-        </p:spPr>
-        <p:txBody>
-          <a:bodyPr wrap="square" lIns="0" rIns="0" tIns="0" bIns="0" anchor="t">
-            <a:spAutoFit/>
-          </a:bodyPr>
-          <a:lstStyle/>
-          <a:p>
-            <a:pPr algn="l">
-              <a:lnSpc>
-                <a:spcPct val="115000"/>
-              </a:lnSpc>
-            </a:pPr>
-            <a:r>
-              <a:rPr sz="1250" b="1">
+            <a:off x="10369296" y="4928615"/>
+            <a:ext cx="1097280" cy="320040"/>
+          </a:xfrm>
+          <a:prstGeom prst="rect">
+            <a:avLst/>
+          </a:prstGeom>
+          <a:noFill/>
+        </p:spPr>
+        <p:txBody>
+          <a:bodyPr wrap="square" lIns="0" rIns="0" tIns="0" bIns="0" anchor="t">
+            <a:spAutoFit/>
+          </a:bodyPr>
+          <a:lstStyle/>
+          <a:p>
+            <a:pPr algn="l">
+              <a:lnSpc>
+                <a:spcPct val="115000"/>
+              </a:lnSpc>
+            </a:pPr>
+            <a:r>
+              <a:rPr sz="1150" b="1">
                 <a:solidFill>
                   <a:srgbClr val="36D399"/>
                 </a:solidFill>
@@ -10525,267 +10767,21 @@
                 <a:ea typeface="맑은 고딕"/>
                 <a:cs typeface="맑은 고딕"/>
               </a:rPr>
-              <a:t>−49~84%</a:t>
-            </a:r>
-          </a:p>
-        </p:txBody>
-      </p:sp>
-      <p:sp>
-        <p:nvSpPr>
-          <p:cNvPr id="31" name="TextBox 30"/>
-          <p:cNvSpPr txBox="1"/>
-          <p:nvPr/>
-        </p:nvSpPr>
-        <p:spPr>
-          <a:xfrm>
-            <a:off x="9912096" y="3520439"/>
-            <a:ext cx="1554480" cy="384048"/>
-          </a:xfrm>
-          <a:prstGeom prst="rect">
-            <a:avLst/>
-          </a:prstGeom>
-          <a:noFill/>
-        </p:spPr>
-        <p:txBody>
-          <a:bodyPr wrap="square" lIns="0" rIns="0" tIns="0" bIns="0" anchor="t">
-            <a:spAutoFit/>
-          </a:bodyPr>
-          <a:lstStyle/>
-          <a:p>
-            <a:pPr algn="l">
-              <a:lnSpc>
-                <a:spcPct val="115000"/>
-              </a:lnSpc>
-            </a:pPr>
-            <a:r>
-              <a:rPr sz="1250" b="0">
-                <a:solidFill>
-                  <a:srgbClr val="ECF1F6"/>
-                </a:solidFill>
-                <a:latin typeface="맑은 고딕"/>
-                <a:ea typeface="맑은 고딕"/>
-                <a:cs typeface="맑은 고딕"/>
-              </a:rPr>
-              <a:t>품질 회귀</a:t>
-            </a:r>
-          </a:p>
-        </p:txBody>
-      </p:sp>
-      <p:sp>
-        <p:nvSpPr>
-          <p:cNvPr id="32" name="TextBox 31"/>
-          <p:cNvSpPr txBox="1"/>
-          <p:nvPr/>
-        </p:nvSpPr>
-        <p:spPr>
-          <a:xfrm>
-            <a:off x="813816" y="3904487"/>
-            <a:ext cx="868680" cy="384048"/>
-          </a:xfrm>
-          <a:prstGeom prst="rect">
-            <a:avLst/>
-          </a:prstGeom>
-          <a:noFill/>
-        </p:spPr>
-        <p:txBody>
-          <a:bodyPr wrap="square" lIns="0" rIns="0" tIns="0" bIns="0" anchor="t">
-            <a:spAutoFit/>
-          </a:bodyPr>
-          <a:lstStyle/>
-          <a:p>
-            <a:pPr algn="l">
-              <a:lnSpc>
-                <a:spcPct val="115000"/>
-              </a:lnSpc>
-            </a:pPr>
-            <a:r>
-              <a:rPr sz="1250" b="0">
-                <a:solidFill>
-                  <a:srgbClr val="ECF1F6"/>
-                </a:solidFill>
-                <a:latin typeface="맑은 고딕"/>
-                <a:ea typeface="맑은 고딕"/>
-                <a:cs typeface="맑은 고딕"/>
-              </a:rPr>
-              <a:t>3주차</a:t>
-            </a:r>
-          </a:p>
-        </p:txBody>
-      </p:sp>
-      <p:sp>
-        <p:nvSpPr>
-          <p:cNvPr id="33" name="TextBox 32"/>
-          <p:cNvSpPr txBox="1"/>
-          <p:nvPr/>
-        </p:nvSpPr>
-        <p:spPr>
-          <a:xfrm>
-            <a:off x="1865376" y="3904487"/>
-            <a:ext cx="2194560" cy="384048"/>
-          </a:xfrm>
-          <a:prstGeom prst="rect">
-            <a:avLst/>
-          </a:prstGeom>
-          <a:noFill/>
-        </p:spPr>
-        <p:txBody>
-          <a:bodyPr wrap="square" lIns="0" rIns="0" tIns="0" bIns="0" anchor="t">
-            <a:spAutoFit/>
-          </a:bodyPr>
-          <a:lstStyle/>
-          <a:p>
-            <a:pPr algn="l">
-              <a:lnSpc>
-                <a:spcPct val="115000"/>
-              </a:lnSpc>
-            </a:pPr>
-            <a:r>
-              <a:rPr sz="1250" b="0">
-                <a:solidFill>
-                  <a:srgbClr val="ECF1F6"/>
-                </a:solidFill>
-                <a:latin typeface="맑은 고딕"/>
-                <a:ea typeface="맑은 고딕"/>
-                <a:cs typeface="맑은 고딕"/>
-              </a:rPr>
-              <a:t>세션 리셋 자동화</a:t>
-            </a:r>
-          </a:p>
-        </p:txBody>
-      </p:sp>
-      <p:sp>
-        <p:nvSpPr>
-          <p:cNvPr id="34" name="TextBox 33"/>
-          <p:cNvSpPr txBox="1"/>
-          <p:nvPr/>
-        </p:nvSpPr>
-        <p:spPr>
-          <a:xfrm>
-            <a:off x="4242816" y="3904487"/>
-            <a:ext cx="3017520" cy="384048"/>
-          </a:xfrm>
-          <a:prstGeom prst="rect">
-            <a:avLst/>
-          </a:prstGeom>
-          <a:noFill/>
-        </p:spPr>
-        <p:txBody>
-          <a:bodyPr wrap="square" lIns="0" rIns="0" tIns="0" bIns="0" anchor="t">
-            <a:spAutoFit/>
-          </a:bodyPr>
-          <a:lstStyle/>
-          <a:p>
-            <a:pPr algn="l">
-              <a:lnSpc>
-                <a:spcPct val="115000"/>
-              </a:lnSpc>
-            </a:pPr>
-            <a:r>
-              <a:rPr sz="1250" b="0">
-                <a:solidFill>
-                  <a:srgbClr val="ECF1F6"/>
-                </a:solidFill>
-                <a:latin typeface="맑은 고딕"/>
-                <a:ea typeface="맑은 고딕"/>
-                <a:cs typeface="맑은 고딕"/>
-              </a:rPr>
-              <a:t>반복 감지 → 커밋 → 재시작</a:t>
-            </a:r>
-          </a:p>
-        </p:txBody>
-      </p:sp>
-      <p:sp>
-        <p:nvSpPr>
-          <p:cNvPr id="35" name="TextBox 34"/>
-          <p:cNvSpPr txBox="1"/>
-          <p:nvPr/>
-        </p:nvSpPr>
-        <p:spPr>
-          <a:xfrm>
-            <a:off x="7443216" y="3904487"/>
-            <a:ext cx="2286000" cy="384048"/>
-          </a:xfrm>
-          <a:prstGeom prst="rect">
-            <a:avLst/>
-          </a:prstGeom>
-          <a:noFill/>
-        </p:spPr>
-        <p:txBody>
-          <a:bodyPr wrap="square" lIns="0" rIns="0" tIns="0" bIns="0" anchor="t">
-            <a:spAutoFit/>
-          </a:bodyPr>
-          <a:lstStyle/>
-          <a:p>
-            <a:pPr algn="l">
-              <a:lnSpc>
-                <a:spcPct val="115000"/>
-              </a:lnSpc>
-            </a:pPr>
-            <a:r>
-              <a:rPr sz="1250" b="1">
-                <a:solidFill>
-                  <a:srgbClr val="36D399"/>
-                </a:solidFill>
-                <a:latin typeface="맑은 고딕"/>
-                <a:ea typeface="맑은 고딕"/>
-                <a:cs typeface="맑은 고딕"/>
-              </a:rPr>
-              <a:t>컨텍스트 단가 억제</a:t>
-            </a:r>
-          </a:p>
-        </p:txBody>
-      </p:sp>
-      <p:sp>
-        <p:nvSpPr>
-          <p:cNvPr id="36" name="TextBox 35"/>
-          <p:cNvSpPr txBox="1"/>
-          <p:nvPr/>
-        </p:nvSpPr>
-        <p:spPr>
-          <a:xfrm>
-            <a:off x="9912096" y="3904487"/>
-            <a:ext cx="1554480" cy="384048"/>
-          </a:xfrm>
-          <a:prstGeom prst="rect">
-            <a:avLst/>
-          </a:prstGeom>
-          <a:noFill/>
-        </p:spPr>
-        <p:txBody>
-          <a:bodyPr wrap="square" lIns="0" rIns="0" tIns="0" bIns="0" anchor="t">
-            <a:spAutoFit/>
-          </a:bodyPr>
-          <a:lstStyle/>
-          <a:p>
-            <a:pPr algn="l">
-              <a:lnSpc>
-                <a:spcPct val="115000"/>
-              </a:lnSpc>
-            </a:pPr>
-            <a:r>
-              <a:rPr sz="1250" b="0">
-                <a:solidFill>
-                  <a:srgbClr val="ECF1F6"/>
-                </a:solidFill>
-                <a:latin typeface="맑은 고딕"/>
-                <a:ea typeface="맑은 고딕"/>
-                <a:cs typeface="맑은 고딕"/>
-              </a:rPr>
-              <a:t>맥락 유실</a:t>
-            </a:r>
-          </a:p>
-        </p:txBody>
-      </p:sp>
-      <p:sp>
-        <p:nvSpPr>
-          <p:cNvPr id="37" name="Rectangle 36"/>
+              <a:t>팀 공유</a:t>
+            </a:r>
+          </a:p>
+        </p:txBody>
+      </p:sp>
+      <p:sp>
+        <p:nvSpPr>
+          <p:cNvPr id="31" name="Rectangle 30"/>
           <p:cNvSpPr/>
           <p:nvPr/>
         </p:nvSpPr>
         <p:spPr>
           <a:xfrm>
-            <a:off x="685800" y="4206240"/>
-            <a:ext cx="10835640" cy="384048"/>
+            <a:off x="6309360" y="5166359"/>
+            <a:ext cx="5212080" cy="320040"/>
           </a:xfrm>
           <a:prstGeom prst="rect">
             <a:avLst/>
@@ -10822,33 +10818,33 @@
       </p:sp>
       <p:sp>
         <p:nvSpPr>
-          <p:cNvPr id="38" name="TextBox 37"/>
-          <p:cNvSpPr txBox="1"/>
-          <p:nvPr/>
-        </p:nvSpPr>
-        <p:spPr>
-          <a:xfrm>
-            <a:off x="813816" y="4288536"/>
-            <a:ext cx="868680" cy="384048"/>
-          </a:xfrm>
-          <a:prstGeom prst="rect">
-            <a:avLst/>
-          </a:prstGeom>
-          <a:noFill/>
-        </p:spPr>
-        <p:txBody>
-          <a:bodyPr wrap="square" lIns="0" rIns="0" tIns="0" bIns="0" anchor="t">
-            <a:spAutoFit/>
-          </a:bodyPr>
-          <a:lstStyle/>
-          <a:p>
-            <a:pPr algn="l">
-              <a:lnSpc>
-                <a:spcPct val="115000"/>
-              </a:lnSpc>
-            </a:pPr>
-            <a:r>
-              <a:rPr sz="1250" b="0">
+          <p:cNvPr id="32" name="TextBox 31"/>
+          <p:cNvSpPr txBox="1"/>
+          <p:nvPr/>
+        </p:nvSpPr>
+        <p:spPr>
+          <a:xfrm>
+            <a:off x="6437376" y="5248655"/>
+            <a:ext cx="1325880" cy="320040"/>
+          </a:xfrm>
+          <a:prstGeom prst="rect">
+            <a:avLst/>
+          </a:prstGeom>
+          <a:noFill/>
+        </p:spPr>
+        <p:txBody>
+          <a:bodyPr wrap="square" lIns="0" rIns="0" tIns="0" bIns="0" anchor="t">
+            <a:spAutoFit/>
+          </a:bodyPr>
+          <a:lstStyle/>
+          <a:p>
+            <a:pPr algn="l">
+              <a:lnSpc>
+                <a:spcPct val="115000"/>
+              </a:lnSpc>
+            </a:pPr>
+            <a:r>
+              <a:rPr sz="1150" b="0">
                 <a:solidFill>
                   <a:srgbClr val="ECF1F6"/>
                 </a:solidFill>
@@ -10856,40 +10852,40 @@
                 <a:ea typeface="맑은 고딕"/>
                 <a:cs typeface="맑은 고딕"/>
               </a:rPr>
-              <a:t>4주차</a:t>
-            </a:r>
-          </a:p>
-        </p:txBody>
-      </p:sp>
-      <p:sp>
-        <p:nvSpPr>
-          <p:cNvPr id="39" name="TextBox 38"/>
-          <p:cNvSpPr txBox="1"/>
-          <p:nvPr/>
-        </p:nvSpPr>
-        <p:spPr>
-          <a:xfrm>
-            <a:off x="1865376" y="4288536"/>
-            <a:ext cx="2194560" cy="384048"/>
-          </a:xfrm>
-          <a:prstGeom prst="rect">
-            <a:avLst/>
-          </a:prstGeom>
-          <a:noFill/>
-        </p:spPr>
-        <p:txBody>
-          <a:bodyPr wrap="square" lIns="0" rIns="0" tIns="0" bIns="0" anchor="t">
-            <a:spAutoFit/>
-          </a:bodyPr>
-          <a:lstStyle/>
-          <a:p>
-            <a:pPr algn="l">
-              <a:lnSpc>
-                <a:spcPct val="115000"/>
-              </a:lnSpc>
-            </a:pPr>
-            <a:r>
-              <a:rPr sz="1250" b="0">
+              <a:t>레거시 1.x</a:t>
+            </a:r>
+          </a:p>
+        </p:txBody>
+      </p:sp>
+      <p:sp>
+        <p:nvSpPr>
+          <p:cNvPr id="33" name="TextBox 32"/>
+          <p:cNvSpPr txBox="1"/>
+          <p:nvPr/>
+        </p:nvSpPr>
+        <p:spPr>
+          <a:xfrm>
+            <a:off x="7946136" y="5248655"/>
+            <a:ext cx="2240279" cy="320040"/>
+          </a:xfrm>
+          <a:prstGeom prst="rect">
+            <a:avLst/>
+          </a:prstGeom>
+          <a:noFill/>
+        </p:spPr>
+        <p:txBody>
+          <a:bodyPr wrap="square" lIns="0" rIns="0" tIns="0" bIns="0" anchor="t">
+            <a:spAutoFit/>
+          </a:bodyPr>
+          <a:lstStyle/>
+          <a:p>
+            <a:pPr algn="l">
+              <a:lnSpc>
+                <a:spcPct val="115000"/>
+              </a:lnSpc>
+            </a:pPr>
+            <a:r>
+              <a:rPr sz="1150" b="0">
                 <a:solidFill>
                   <a:srgbClr val="ECF1F6"/>
                 </a:solidFill>
@@ -10897,62 +10893,62 @@
                 <a:ea typeface="맑은 고딕"/>
                 <a:cs typeface="맑은 고딕"/>
               </a:rPr>
-              <a:t>배치 도입</a:t>
-            </a:r>
-          </a:p>
-        </p:txBody>
-      </p:sp>
-      <p:sp>
-        <p:nvSpPr>
-          <p:cNvPr id="40" name="TextBox 39"/>
-          <p:cNvSpPr txBox="1"/>
-          <p:nvPr/>
-        </p:nvSpPr>
-        <p:spPr>
-          <a:xfrm>
-            <a:off x="4242816" y="4288536"/>
-            <a:ext cx="3017520" cy="384048"/>
-          </a:xfrm>
-          <a:prstGeom prst="rect">
-            <a:avLst/>
-          </a:prstGeom>
-          <a:noFill/>
-        </p:spPr>
-        <p:txBody>
-          <a:bodyPr wrap="square" lIns="0" rIns="0" tIns="0" bIns="0" anchor="t">
-            <a:spAutoFit/>
-          </a:bodyPr>
-          <a:lstStyle/>
-          <a:p>
-            <a:pPr algn="l">
-              <a:lnSpc>
-                <a:spcPct val="115000"/>
-              </a:lnSpc>
-            </a:pPr>
-            <a:r>
-              <a:rPr sz="1250" b="0">
-                <a:solidFill>
-                  <a:srgbClr val="ECF1F6"/>
-                </a:solidFill>
-                <a:latin typeface="맑은 고딕"/>
-                <a:ea typeface="맑은 고딕"/>
-                <a:cs typeface="맑은 고딕"/>
-              </a:rPr>
-              <a:t>마감 없는 대량 작업만</a:t>
-            </a:r>
-          </a:p>
-        </p:txBody>
-      </p:sp>
-      <p:sp>
-        <p:nvSpPr>
-          <p:cNvPr id="41" name="TextBox 40"/>
-          <p:cNvSpPr txBox="1"/>
-          <p:nvPr/>
-        </p:nvSpPr>
-        <p:spPr>
-          <a:xfrm>
-            <a:off x="7443216" y="4288536"/>
-            <a:ext cx="2286000" cy="384048"/>
+              <a:t>~/.gemini/antigravity/</a:t>
+            </a:r>
+          </a:p>
+        </p:txBody>
+      </p:sp>
+      <p:sp>
+        <p:nvSpPr>
+          <p:cNvPr id="34" name="TextBox 33"/>
+          <p:cNvSpPr txBox="1"/>
+          <p:nvPr/>
+        </p:nvSpPr>
+        <p:spPr>
+          <a:xfrm>
+            <a:off x="10369296" y="5248655"/>
+            <a:ext cx="1097280" cy="320040"/>
+          </a:xfrm>
+          <a:prstGeom prst="rect">
+            <a:avLst/>
+          </a:prstGeom>
+          <a:noFill/>
+        </p:spPr>
+        <p:txBody>
+          <a:bodyPr wrap="square" lIns="0" rIns="0" tIns="0" bIns="0" anchor="t">
+            <a:spAutoFit/>
+          </a:bodyPr>
+          <a:lstStyle/>
+          <a:p>
+            <a:pPr algn="l">
+              <a:lnSpc>
+                <a:spcPct val="115000"/>
+              </a:lnSpc>
+            </a:pPr>
+            <a:r>
+              <a:rPr sz="1150" b="1">
+                <a:solidFill>
+                  <a:srgbClr val="FF6B6B"/>
+                </a:solidFill>
+                <a:latin typeface="맑은 고딕"/>
+                <a:ea typeface="맑은 고딕"/>
+                <a:cs typeface="맑은 고딕"/>
+              </a:rPr>
+              <a:t>조용히 무시됨</a:t>
+            </a:r>
+          </a:p>
+        </p:txBody>
+      </p:sp>
+      <p:sp>
+        <p:nvSpPr>
+          <p:cNvPr id="35" name="TextBox 34"/>
+          <p:cNvSpPr txBox="1"/>
+          <p:nvPr/>
+        </p:nvSpPr>
+        <p:spPr>
+          <a:xfrm>
+            <a:off x="6309360" y="5559552"/>
+            <a:ext cx="5212080" cy="457200"/>
           </a:xfrm>
           <a:prstGeom prst="rect">
             <a:avLst/>
@@ -10973,390 +10969,13 @@
             <a:r>
               <a:rPr sz="1250" b="1">
                 <a:solidFill>
-                  <a:srgbClr val="36D399"/>
-                </a:solidFill>
-                <a:latin typeface="맑은 고딕"/>
-                <a:ea typeface="맑은 고딕"/>
-                <a:cs typeface="맑은 고딕"/>
-              </a:rPr>
-              <a:t>−50%</a:t>
-            </a:r>
-          </a:p>
-        </p:txBody>
-      </p:sp>
-      <p:sp>
-        <p:nvSpPr>
-          <p:cNvPr id="42" name="TextBox 41"/>
-          <p:cNvSpPr txBox="1"/>
-          <p:nvPr/>
-        </p:nvSpPr>
-        <p:spPr>
-          <a:xfrm>
-            <a:off x="9912096" y="4288536"/>
-            <a:ext cx="1554480" cy="384048"/>
-          </a:xfrm>
-          <a:prstGeom prst="rect">
-            <a:avLst/>
-          </a:prstGeom>
-          <a:noFill/>
-        </p:spPr>
-        <p:txBody>
-          <a:bodyPr wrap="square" lIns="0" rIns="0" tIns="0" bIns="0" anchor="t">
-            <a:spAutoFit/>
-          </a:bodyPr>
-          <a:lstStyle/>
-          <a:p>
-            <a:pPr algn="l">
-              <a:lnSpc>
-                <a:spcPct val="115000"/>
-              </a:lnSpc>
-            </a:pPr>
-            <a:r>
-              <a:rPr sz="1250" b="0">
-                <a:solidFill>
-                  <a:srgbClr val="ECF1F6"/>
-                </a:solidFill>
-                <a:latin typeface="맑은 고딕"/>
-                <a:ea typeface="맑은 고딕"/>
-                <a:cs typeface="맑은 고딕"/>
-              </a:rPr>
-              <a:t>expired</a:t>
-            </a:r>
-          </a:p>
-        </p:txBody>
-      </p:sp>
-      <p:sp>
-        <p:nvSpPr>
-          <p:cNvPr id="43" name="TextBox 42"/>
-          <p:cNvSpPr txBox="1"/>
-          <p:nvPr/>
-        </p:nvSpPr>
-        <p:spPr>
-          <a:xfrm>
-            <a:off x="813816" y="4672583"/>
-            <a:ext cx="868680" cy="384048"/>
-          </a:xfrm>
-          <a:prstGeom prst="rect">
-            <a:avLst/>
-          </a:prstGeom>
-          <a:noFill/>
-        </p:spPr>
-        <p:txBody>
-          <a:bodyPr wrap="square" lIns="0" rIns="0" tIns="0" bIns="0" anchor="t">
-            <a:spAutoFit/>
-          </a:bodyPr>
-          <a:lstStyle/>
-          <a:p>
-            <a:pPr algn="l">
-              <a:lnSpc>
-                <a:spcPct val="115000"/>
-              </a:lnSpc>
-            </a:pPr>
-            <a:r>
-              <a:rPr sz="1250" b="0">
-                <a:solidFill>
-                  <a:srgbClr val="ECF1F6"/>
-                </a:solidFill>
-                <a:latin typeface="맑은 고딕"/>
-                <a:ea typeface="맑은 고딕"/>
-                <a:cs typeface="맑은 고딕"/>
-              </a:rPr>
-              <a:t>보류</a:t>
-            </a:r>
-          </a:p>
-        </p:txBody>
-      </p:sp>
-      <p:sp>
-        <p:nvSpPr>
-          <p:cNvPr id="44" name="TextBox 43"/>
-          <p:cNvSpPr txBox="1"/>
-          <p:nvPr/>
-        </p:nvSpPr>
-        <p:spPr>
-          <a:xfrm>
-            <a:off x="1865376" y="4672583"/>
-            <a:ext cx="2194560" cy="384048"/>
-          </a:xfrm>
-          <a:prstGeom prst="rect">
-            <a:avLst/>
-          </a:prstGeom>
-          <a:noFill/>
-        </p:spPr>
-        <p:txBody>
-          <a:bodyPr wrap="square" lIns="0" rIns="0" tIns="0" bIns="0" anchor="t">
-            <a:spAutoFit/>
-          </a:bodyPr>
-          <a:lstStyle/>
-          <a:p>
-            <a:pPr algn="l">
-              <a:lnSpc>
-                <a:spcPct val="115000"/>
-              </a:lnSpc>
-            </a:pPr>
-            <a:r>
-              <a:rPr sz="1250" b="0">
-                <a:solidFill>
-                  <a:srgbClr val="ECF1F6"/>
-                </a:solidFill>
-                <a:latin typeface="맑은 고딕"/>
-                <a:ea typeface="맑은 고딕"/>
-                <a:cs typeface="맑은 고딕"/>
-              </a:rPr>
-              <a:t>웹 세션 자동 조작</a:t>
-            </a:r>
-          </a:p>
-        </p:txBody>
-      </p:sp>
-      <p:sp>
-        <p:nvSpPr>
-          <p:cNvPr id="45" name="TextBox 44"/>
-          <p:cNvSpPr txBox="1"/>
-          <p:nvPr/>
-        </p:nvSpPr>
-        <p:spPr>
-          <a:xfrm>
-            <a:off x="4242816" y="4672583"/>
-            <a:ext cx="3017520" cy="384048"/>
-          </a:xfrm>
-          <a:prstGeom prst="rect">
-            <a:avLst/>
-          </a:prstGeom>
-          <a:noFill/>
-        </p:spPr>
-        <p:txBody>
-          <a:bodyPr wrap="square" lIns="0" rIns="0" tIns="0" bIns="0" anchor="t">
-            <a:spAutoFit/>
-          </a:bodyPr>
-          <a:lstStyle/>
-          <a:p>
-            <a:pPr algn="l">
-              <a:lnSpc>
-                <a:spcPct val="115000"/>
-              </a:lnSpc>
-            </a:pPr>
-            <a:r>
-              <a:rPr sz="1250" b="0">
-                <a:solidFill>
-                  <a:srgbClr val="ECF1F6"/>
-                </a:solidFill>
-                <a:latin typeface="맑은 고딕"/>
-                <a:ea typeface="맑은 고딕"/>
-                <a:cs typeface="맑은 고딕"/>
-              </a:rPr>
-              <a:t>법무 확인 전까지 수동</a:t>
-            </a:r>
-          </a:p>
-        </p:txBody>
-      </p:sp>
-      <p:sp>
-        <p:nvSpPr>
-          <p:cNvPr id="46" name="TextBox 45"/>
-          <p:cNvSpPr txBox="1"/>
-          <p:nvPr/>
-        </p:nvSpPr>
-        <p:spPr>
-          <a:xfrm>
-            <a:off x="7443216" y="4672583"/>
-            <a:ext cx="2286000" cy="384048"/>
-          </a:xfrm>
-          <a:prstGeom prst="rect">
-            <a:avLst/>
-          </a:prstGeom>
-          <a:noFill/>
-        </p:spPr>
-        <p:txBody>
-          <a:bodyPr wrap="square" lIns="0" rIns="0" tIns="0" bIns="0" anchor="t">
-            <a:spAutoFit/>
-          </a:bodyPr>
-          <a:lstStyle/>
-          <a:p>
-            <a:pPr algn="l">
-              <a:lnSpc>
-                <a:spcPct val="115000"/>
-              </a:lnSpc>
-            </a:pPr>
-            <a:r>
-              <a:rPr sz="1250" b="1">
-                <a:solidFill>
                   <a:srgbClr val="FFB04D"/>
                 </a:solidFill>
                 <a:latin typeface="맑은 고딕"/>
                 <a:ea typeface="맑은 고딕"/>
                 <a:cs typeface="맑은 고딕"/>
               </a:rPr>
-              <a:t>종량 0원</a:t>
-            </a:r>
-          </a:p>
-        </p:txBody>
-      </p:sp>
-      <p:sp>
-        <p:nvSpPr>
-          <p:cNvPr id="47" name="TextBox 46"/>
-          <p:cNvSpPr txBox="1"/>
-          <p:nvPr/>
-        </p:nvSpPr>
-        <p:spPr>
-          <a:xfrm>
-            <a:off x="9912096" y="4672583"/>
-            <a:ext cx="1554480" cy="384048"/>
-          </a:xfrm>
-          <a:prstGeom prst="rect">
-            <a:avLst/>
-          </a:prstGeom>
-          <a:noFill/>
-        </p:spPr>
-        <p:txBody>
-          <a:bodyPr wrap="square" lIns="0" rIns="0" tIns="0" bIns="0" anchor="t">
-            <a:spAutoFit/>
-          </a:bodyPr>
-          <a:lstStyle/>
-          <a:p>
-            <a:pPr algn="l">
-              <a:lnSpc>
-                <a:spcPct val="115000"/>
-              </a:lnSpc>
-            </a:pPr>
-            <a:r>
-              <a:rPr sz="1250" b="0">
-                <a:solidFill>
-                  <a:srgbClr val="ECF1F6"/>
-                </a:solidFill>
-                <a:latin typeface="맑은 고딕"/>
-                <a:ea typeface="맑은 고딕"/>
-                <a:cs typeface="맑은 고딕"/>
-              </a:rPr>
-              <a:t>약관</a:t>
-            </a:r>
-          </a:p>
-        </p:txBody>
-      </p:sp>
-      <p:sp>
-        <p:nvSpPr>
-          <p:cNvPr id="48" name="Rounded Rectangle 47"/>
-          <p:cNvSpPr/>
-          <p:nvPr/>
-        </p:nvSpPr>
-        <p:spPr>
-          <a:xfrm>
-            <a:off x="685800" y="5212080"/>
-            <a:ext cx="10835640" cy="868680"/>
-          </a:xfrm>
-          <a:prstGeom prst="roundRect">
-            <a:avLst>
-              <a:gd name="adj" fmla="val 5000"/>
-            </a:avLst>
-          </a:prstGeom>
-          <a:solidFill>
-            <a:srgbClr val="18222E"/>
-          </a:solidFill>
-          <a:ln>
-            <a:noFill/>
-          </a:ln>
-          <a:effectLst/>
-        </p:spPr>
-        <p:style>
-          <a:lnRef idx="1">
-            <a:schemeClr val="accent1"/>
-          </a:lnRef>
-          <a:fillRef idx="3">
-            <a:schemeClr val="accent1"/>
-          </a:fillRef>
-          <a:effectRef idx="2">
-            <a:schemeClr val="accent1"/>
-          </a:effectRef>
-          <a:fontRef idx="minor">
-            <a:schemeClr val="lt1"/>
-          </a:fontRef>
-        </p:style>
-        <p:txBody>
-          <a:bodyPr rtlCol="0" anchor="ctr"/>
-          <a:lstStyle/>
-          <a:p>
-            <a:pPr algn="ctr"/>
-          </a:p>
-        </p:txBody>
-      </p:sp>
-      <p:sp>
-        <p:nvSpPr>
-          <p:cNvPr id="49" name="Rectangle 48"/>
-          <p:cNvSpPr/>
-          <p:nvPr/>
-        </p:nvSpPr>
-        <p:spPr>
-          <a:xfrm>
-            <a:off x="685800" y="5212080"/>
-            <a:ext cx="50292" cy="868680"/>
-          </a:xfrm>
-          <a:prstGeom prst="rect">
-            <a:avLst/>
-          </a:prstGeom>
-          <a:solidFill>
-            <a:srgbClr val="36D399"/>
-          </a:solidFill>
-          <a:ln>
-            <a:noFill/>
-          </a:ln>
-          <a:effectLst/>
-        </p:spPr>
-        <p:style>
-          <a:lnRef idx="1">
-            <a:schemeClr val="accent1"/>
-          </a:lnRef>
-          <a:fillRef idx="3">
-            <a:schemeClr val="accent1"/>
-          </a:fillRef>
-          <a:effectRef idx="2">
-            <a:schemeClr val="accent1"/>
-          </a:effectRef>
-          <a:fontRef idx="minor">
-            <a:schemeClr val="lt1"/>
-          </a:fontRef>
-        </p:style>
-        <p:txBody>
-          <a:bodyPr rtlCol="0" anchor="ctr"/>
-          <a:lstStyle/>
-          <a:p>
-            <a:pPr algn="ctr"/>
-          </a:p>
-        </p:txBody>
-      </p:sp>
-      <p:sp>
-        <p:nvSpPr>
-          <p:cNvPr id="50" name="TextBox 49"/>
-          <p:cNvSpPr txBox="1"/>
-          <p:nvPr/>
-        </p:nvSpPr>
-        <p:spPr>
-          <a:xfrm>
-            <a:off x="960120" y="5358384"/>
-            <a:ext cx="10424160" cy="640080"/>
-          </a:xfrm>
-          <a:prstGeom prst="rect">
-            <a:avLst/>
-          </a:prstGeom>
-          <a:noFill/>
-        </p:spPr>
-        <p:txBody>
-          <a:bodyPr wrap="square" lIns="0" rIns="0" tIns="0" bIns="0" anchor="t">
-            <a:spAutoFit/>
-          </a:bodyPr>
-          <a:lstStyle/>
-          <a:p>
-            <a:pPr algn="l">
-              <a:lnSpc>
-                <a:spcPct val="115000"/>
-              </a:lnSpc>
-            </a:pPr>
-            <a:r>
-              <a:rPr sz="1500" b="1">
-                <a:solidFill>
-                  <a:srgbClr val="36D399"/>
-                </a:solidFill>
-                <a:latin typeface="맑은 고딕"/>
-                <a:ea typeface="맑은 고딕"/>
-                <a:cs typeface="맑은 고딕"/>
-              </a:rPr>
-              <a:t>측정 없이 켜지 마라.</a:t>
+              <a:t>원격 서버는 키가 serverUrl 이다.</a:t>
             </a:r>
           </a:p>
           <a:p>
@@ -11365,11 +10984,11 @@
                 <a:spcPct val="115000"/>
               </a:lnSpc>
               <a:spcBef>
-                <a:spcPts val="500"/>
+                <a:spcPts val="300"/>
               </a:spcBef>
             </a:pPr>
             <a:r>
-              <a:rPr sz="1300" b="0">
+              <a:rPr sz="1150" b="0">
                 <a:solidFill>
                   <a:srgbClr val="93A4B5"/>
                 </a:solidFill>
@@ -11377,20 +10996,20 @@
                 <a:ea typeface="맑은 고딕"/>
                 <a:cs typeface="맑은 고딕"/>
               </a:rPr>
-              <a:t>1주차에 로그만 남기는 이유가 이것이다. 라우팅 전후의 요청당 비용과 리워크 턴 수를 같이 재야, 절감이 진짜인지 품질을 팔아 산 것인지 구분된다.</a:t>
-            </a:r>
-          </a:p>
-        </p:txBody>
-      </p:sp>
-      <p:sp>
-        <p:nvSpPr>
-          <p:cNvPr id="51" name="TextBox 50"/>
-          <p:cNvSpPr txBox="1"/>
-          <p:nvPr/>
-        </p:nvSpPr>
-        <p:spPr>
-          <a:xfrm>
-            <a:off x="685800" y="6263640"/>
+              <a:t>url · httpUrl 은 안 먹는다. 다른 IDE 예제를 그대로 붙이면 여기서 막힌다.</a:t>
+            </a:r>
+          </a:p>
+        </p:txBody>
+      </p:sp>
+      <p:sp>
+        <p:nvSpPr>
+          <p:cNvPr id="36" name="TextBox 35"/>
+          <p:cNvSpPr txBox="1"/>
+          <p:nvPr/>
+        </p:nvSpPr>
+        <p:spPr>
+          <a:xfrm>
+            <a:off x="685800" y="6053328"/>
             <a:ext cx="10789920" cy="320040"/>
           </a:xfrm>
           <a:prstGeom prst="rect">
@@ -11418,7 +11037,7 @@
                 <a:ea typeface="맑은 고딕"/>
                 <a:cs typeface="맑은 고딕"/>
               </a:rPr>
-              <a:t>되돌릴 수 있게 만들어라 — route()가 항상 상위 모델을 반환하도록 하는 킬 스위치 하나면 롤백이 끝난다.</a:t>
+              <a:t>python3 agent_setup/install_antigravity.py — 설정 파일을 찾아 병합해 등록합니다. 기존 서버는 보존, 재실행해도 안전. 저장 후 에디터 재시작.</a:t>
             </a:r>
           </a:p>
         </p:txBody>
@@ -11565,7 +11184,7 @@
                 <a:ea typeface="맑은 고딕"/>
                 <a:cs typeface="맑은 고딕"/>
               </a:rPr>
-              <a:t>FOLLOW-UP · 마무리</a:t>
+              <a:t>FOLLOW-UP · 연동</a:t>
             </a:r>
           </a:p>
         </p:txBody>
@@ -11606,7 +11225,7 @@
                 <a:ea typeface="맑은 고딕"/>
                 <a:cs typeface="맑은 고딕"/>
               </a:rPr>
-              <a:t>정리</a:t>
+              <a:t>붙이면 무엇이 달라지나</a:t>
             </a:r>
           </a:p>
         </p:txBody>
@@ -11698,649 +11317,58 @@
       </p:sp>
       <p:sp>
         <p:nvSpPr>
-          <p:cNvPr id="8" name="Rectangle 7"/>
+          <p:cNvPr id="8" name="TextBox 7"/>
+          <p:cNvSpPr txBox="1"/>
+          <p:nvPr/>
+        </p:nvSpPr>
+        <p:spPr>
+          <a:xfrm>
+            <a:off x="685800" y="1737360"/>
+            <a:ext cx="10881360" cy="365760"/>
+          </a:xfrm>
+          <a:prstGeom prst="rect">
+            <a:avLst/>
+          </a:prstGeom>
+          <a:noFill/>
+        </p:spPr>
+        <p:txBody>
+          <a:bodyPr wrap="square" lIns="0" rIns="0" tIns="0" bIns="0" anchor="t">
+            <a:spAutoFit/>
+          </a:bodyPr>
+          <a:lstStyle/>
+          <a:p>
+            <a:pPr algn="l">
+              <a:lnSpc>
+                <a:spcPct val="115000"/>
+              </a:lnSpc>
+            </a:pPr>
+            <a:r>
+              <a:rPr sz="1450" b="0">
+                <a:solidFill>
+                  <a:srgbClr val="93A4B5"/>
+                </a:solidFill>
+                <a:latin typeface="맑은 고딕"/>
+                <a:ea typeface="맑은 고딕"/>
+                <a:cs typeface="맑은 고딕"/>
+              </a:rPr>
+              <a:t>에이전트가 매 작업마다 라우터에게 먼저 묻고, 그 답을 지킵니다.</a:t>
+            </a:r>
+          </a:p>
+        </p:txBody>
+      </p:sp>
+      <p:sp>
+        <p:nvSpPr>
+          <p:cNvPr id="9" name="Rectangle 8"/>
           <p:cNvSpPr/>
           <p:nvPr/>
         </p:nvSpPr>
         <p:spPr>
           <a:xfrm>
-            <a:off x="777240" y="2066543"/>
-            <a:ext cx="109728" cy="109728"/>
-          </a:xfrm>
-          <a:prstGeom prst="rect">
-            <a:avLst/>
-          </a:prstGeom>
-          <a:solidFill>
-            <a:srgbClr val="36D399"/>
-          </a:solidFill>
-          <a:ln>
-            <a:noFill/>
-          </a:ln>
-          <a:effectLst/>
-        </p:spPr>
-        <p:style>
-          <a:lnRef idx="1">
-            <a:schemeClr val="accent1"/>
-          </a:lnRef>
-          <a:fillRef idx="3">
-            <a:schemeClr val="accent1"/>
-          </a:fillRef>
-          <a:effectRef idx="2">
-            <a:schemeClr val="accent1"/>
-          </a:effectRef>
-          <a:fontRef idx="minor">
-            <a:schemeClr val="lt1"/>
-          </a:fontRef>
-        </p:style>
-        <p:txBody>
-          <a:bodyPr rtlCol="0" anchor="ctr"/>
-          <a:lstStyle/>
-          <a:p>
-            <a:pPr algn="ctr"/>
-          </a:p>
-        </p:txBody>
-      </p:sp>
-      <p:sp>
-        <p:nvSpPr>
-          <p:cNvPr id="9" name="TextBox 8"/>
-          <p:cNvSpPr txBox="1"/>
-          <p:nvPr/>
-        </p:nvSpPr>
-        <p:spPr>
-          <a:xfrm>
-            <a:off x="1069848" y="1965960"/>
-            <a:ext cx="10405872" cy="365760"/>
-          </a:xfrm>
-          <a:prstGeom prst="rect">
-            <a:avLst/>
-          </a:prstGeom>
-          <a:noFill/>
-        </p:spPr>
-        <p:txBody>
-          <a:bodyPr wrap="square" lIns="0" rIns="0" tIns="0" bIns="0" anchor="t">
-            <a:spAutoFit/>
-          </a:bodyPr>
-          <a:lstStyle/>
-          <a:p>
-            <a:pPr algn="l">
-              <a:lnSpc>
-                <a:spcPct val="115000"/>
-              </a:lnSpc>
-            </a:pPr>
-            <a:r>
-              <a:rPr sz="1650" b="1">
-                <a:solidFill>
-                  <a:srgbClr val="ECF1F6"/>
-                </a:solidFill>
-                <a:latin typeface="맑은 고딕"/>
-                <a:ea typeface="맑은 고딕"/>
-                <a:cs typeface="맑은 고딕"/>
-              </a:rPr>
-              <a:t>작은 모델은 답을 만드는 게 아니라 교통을 정리한다</a:t>
-            </a:r>
-          </a:p>
-        </p:txBody>
-      </p:sp>
-      <p:sp>
-        <p:nvSpPr>
-          <p:cNvPr id="10" name="TextBox 9"/>
-          <p:cNvSpPr txBox="1"/>
-          <p:nvPr/>
-        </p:nvSpPr>
-        <p:spPr>
-          <a:xfrm>
-            <a:off x="1069848" y="2240279"/>
-            <a:ext cx="10405872" cy="365760"/>
-          </a:xfrm>
-          <a:prstGeom prst="rect">
-            <a:avLst/>
-          </a:prstGeom>
-          <a:noFill/>
-        </p:spPr>
-        <p:txBody>
-          <a:bodyPr wrap="square" lIns="0" rIns="0" tIns="0" bIns="0" anchor="t">
-            <a:spAutoFit/>
-          </a:bodyPr>
-          <a:lstStyle/>
-          <a:p>
-            <a:pPr algn="l">
-              <a:lnSpc>
-                <a:spcPct val="115000"/>
-              </a:lnSpc>
-            </a:pPr>
-            <a:r>
-              <a:rPr sz="1350" b="0">
-                <a:solidFill>
-                  <a:srgbClr val="93A4B5"/>
-                </a:solidFill>
-                <a:latin typeface="맑은 고딕"/>
-                <a:ea typeface="맑은 고딕"/>
-                <a:cs typeface="맑은 고딕"/>
-              </a:rPr>
-              <a:t>분류에 드는 수십 토큰이 상위 모델 호출 하나를 막으면 즉시 회수된다.</a:t>
-            </a:r>
-          </a:p>
-        </p:txBody>
-      </p:sp>
-      <p:sp>
-        <p:nvSpPr>
-          <p:cNvPr id="11" name="Rectangle 10"/>
-          <p:cNvSpPr/>
-          <p:nvPr/>
-        </p:nvSpPr>
-        <p:spPr>
-          <a:xfrm>
-            <a:off x="777240" y="2724912"/>
-            <a:ext cx="109728" cy="109728"/>
-          </a:xfrm>
-          <a:prstGeom prst="rect">
-            <a:avLst/>
-          </a:prstGeom>
-          <a:solidFill>
-            <a:srgbClr val="36D399"/>
-          </a:solidFill>
-          <a:ln>
-            <a:noFill/>
-          </a:ln>
-          <a:effectLst/>
-        </p:spPr>
-        <p:style>
-          <a:lnRef idx="1">
-            <a:schemeClr val="accent1"/>
-          </a:lnRef>
-          <a:fillRef idx="3">
-            <a:schemeClr val="accent1"/>
-          </a:fillRef>
-          <a:effectRef idx="2">
-            <a:schemeClr val="accent1"/>
-          </a:effectRef>
-          <a:fontRef idx="minor">
-            <a:schemeClr val="lt1"/>
-          </a:fontRef>
-        </p:style>
-        <p:txBody>
-          <a:bodyPr rtlCol="0" anchor="ctr"/>
-          <a:lstStyle/>
-          <a:p>
-            <a:pPr algn="ctr"/>
-          </a:p>
-        </p:txBody>
-      </p:sp>
-      <p:sp>
-        <p:nvSpPr>
-          <p:cNvPr id="12" name="TextBox 11"/>
-          <p:cNvSpPr txBox="1"/>
-          <p:nvPr/>
-        </p:nvSpPr>
-        <p:spPr>
-          <a:xfrm>
-            <a:off x="1069848" y="2624328"/>
-            <a:ext cx="10405872" cy="365760"/>
-          </a:xfrm>
-          <a:prstGeom prst="rect">
-            <a:avLst/>
-          </a:prstGeom>
-          <a:noFill/>
-        </p:spPr>
-        <p:txBody>
-          <a:bodyPr wrap="square" lIns="0" rIns="0" tIns="0" bIns="0" anchor="t">
-            <a:spAutoFit/>
-          </a:bodyPr>
-          <a:lstStyle/>
-          <a:p>
-            <a:pPr algn="l">
-              <a:lnSpc>
-                <a:spcPct val="115000"/>
-              </a:lnSpc>
-            </a:pPr>
-            <a:r>
-              <a:rPr sz="1650" b="1">
-                <a:solidFill>
-                  <a:srgbClr val="ECF1F6"/>
-                </a:solidFill>
-                <a:latin typeface="맑은 고딕"/>
-                <a:ea typeface="맑은 고딕"/>
-                <a:cs typeface="맑은 고딕"/>
-              </a:rPr>
-              <a:t>당신이 만든 것은 워크플로우 컨트롤이다</a:t>
-            </a:r>
-          </a:p>
-        </p:txBody>
-      </p:sp>
-      <p:sp>
-        <p:nvSpPr>
-          <p:cNvPr id="13" name="TextBox 12"/>
-          <p:cNvSpPr txBox="1"/>
-          <p:nvPr/>
-        </p:nvSpPr>
-        <p:spPr>
-          <a:xfrm>
-            <a:off x="1069848" y="2898648"/>
-            <a:ext cx="10405872" cy="365760"/>
-          </a:xfrm>
-          <a:prstGeom prst="rect">
-            <a:avLst/>
-          </a:prstGeom>
-          <a:noFill/>
-        </p:spPr>
-        <p:txBody>
-          <a:bodyPr wrap="square" lIns="0" rIns="0" tIns="0" bIns="0" anchor="t">
-            <a:spAutoFit/>
-          </a:bodyPr>
-          <a:lstStyle/>
-          <a:p>
-            <a:pPr algn="l">
-              <a:lnSpc>
-                <a:spcPct val="115000"/>
-              </a:lnSpc>
-            </a:pPr>
-            <a:r>
-              <a:rPr sz="1350" b="0">
-                <a:solidFill>
-                  <a:srgbClr val="93A4B5"/>
-                </a:solidFill>
-                <a:latin typeface="맑은 고딕"/>
-                <a:ea typeface="맑은 고딕"/>
-                <a:cs typeface="맑은 고딕"/>
-              </a:rPr>
-              <a:t>라우팅은 그 안의 수단이고, 리워크는 그것이 줄이려는 대상이다.</a:t>
-            </a:r>
-          </a:p>
-        </p:txBody>
-      </p:sp>
-      <p:sp>
-        <p:nvSpPr>
-          <p:cNvPr id="14" name="Rectangle 13"/>
-          <p:cNvSpPr/>
-          <p:nvPr/>
-        </p:nvSpPr>
-        <p:spPr>
-          <a:xfrm>
-            <a:off x="777240" y="3383279"/>
-            <a:ext cx="109728" cy="109728"/>
-          </a:xfrm>
-          <a:prstGeom prst="rect">
-            <a:avLst/>
-          </a:prstGeom>
-          <a:solidFill>
-            <a:srgbClr val="36D399"/>
-          </a:solidFill>
-          <a:ln>
-            <a:noFill/>
-          </a:ln>
-          <a:effectLst/>
-        </p:spPr>
-        <p:style>
-          <a:lnRef idx="1">
-            <a:schemeClr val="accent1"/>
-          </a:lnRef>
-          <a:fillRef idx="3">
-            <a:schemeClr val="accent1"/>
-          </a:fillRef>
-          <a:effectRef idx="2">
-            <a:schemeClr val="accent1"/>
-          </a:effectRef>
-          <a:fontRef idx="minor">
-            <a:schemeClr val="lt1"/>
-          </a:fontRef>
-        </p:style>
-        <p:txBody>
-          <a:bodyPr rtlCol="0" anchor="ctr"/>
-          <a:lstStyle/>
-          <a:p>
-            <a:pPr algn="ctr"/>
-          </a:p>
-        </p:txBody>
-      </p:sp>
-      <p:sp>
-        <p:nvSpPr>
-          <p:cNvPr id="15" name="TextBox 14"/>
-          <p:cNvSpPr txBox="1"/>
-          <p:nvPr/>
-        </p:nvSpPr>
-        <p:spPr>
-          <a:xfrm>
-            <a:off x="1069848" y="3282696"/>
-            <a:ext cx="10405872" cy="365760"/>
-          </a:xfrm>
-          <a:prstGeom prst="rect">
-            <a:avLst/>
-          </a:prstGeom>
-          <a:noFill/>
-        </p:spPr>
-        <p:txBody>
-          <a:bodyPr wrap="square" lIns="0" rIns="0" tIns="0" bIns="0" anchor="t">
-            <a:spAutoFit/>
-          </a:bodyPr>
-          <a:lstStyle/>
-          <a:p>
-            <a:pPr algn="l">
-              <a:lnSpc>
-                <a:spcPct val="115000"/>
-              </a:lnSpc>
-            </a:pPr>
-            <a:r>
-              <a:rPr sz="1650" b="1">
-                <a:solidFill>
-                  <a:srgbClr val="ECF1F6"/>
-                </a:solidFill>
-                <a:latin typeface="맑은 고딕"/>
-                <a:ea typeface="맑은 고딕"/>
-                <a:cs typeface="맑은 고딕"/>
-              </a:rPr>
-              <a:t>구현 티어는 조건을 확인하고 내린다</a:t>
-            </a:r>
-          </a:p>
-        </p:txBody>
-      </p:sp>
-      <p:sp>
-        <p:nvSpPr>
-          <p:cNvPr id="16" name="TextBox 15"/>
-          <p:cNvSpPr txBox="1"/>
-          <p:nvPr/>
-        </p:nvSpPr>
-        <p:spPr>
-          <a:xfrm>
-            <a:off x="1069848" y="3557015"/>
-            <a:ext cx="10405872" cy="365760"/>
-          </a:xfrm>
-          <a:prstGeom prst="rect">
-            <a:avLst/>
-          </a:prstGeom>
-          <a:noFill/>
-        </p:spPr>
-        <p:txBody>
-          <a:bodyPr wrap="square" lIns="0" rIns="0" tIns="0" bIns="0" anchor="t">
-            <a:spAutoFit/>
-          </a:bodyPr>
-          <a:lstStyle/>
-          <a:p>
-            <a:pPr algn="l">
-              <a:lnSpc>
-                <a:spcPct val="115000"/>
-              </a:lnSpc>
-            </a:pPr>
-            <a:r>
-              <a:rPr sz="1350" b="0">
-                <a:solidFill>
-                  <a:srgbClr val="93A4B5"/>
-                </a:solidFill>
-                <a:latin typeface="맑은 고딕"/>
-                <a:ea typeface="맑은 고딕"/>
-                <a:cs typeface="맑은 고딕"/>
-              </a:rPr>
-              <a:t>스펙 확정 · 검증 수단 · 임계 크기 — 셋이 모일 때만 중간 모델로 내려도 안전하다.</a:t>
-            </a:r>
-          </a:p>
-        </p:txBody>
-      </p:sp>
-      <p:sp>
-        <p:nvSpPr>
-          <p:cNvPr id="17" name="Rectangle 16"/>
-          <p:cNvSpPr/>
-          <p:nvPr/>
-        </p:nvSpPr>
-        <p:spPr>
-          <a:xfrm>
-            <a:off x="777240" y="4041648"/>
-            <a:ext cx="109728" cy="109728"/>
-          </a:xfrm>
-          <a:prstGeom prst="rect">
-            <a:avLst/>
-          </a:prstGeom>
-          <a:solidFill>
-            <a:srgbClr val="36D399"/>
-          </a:solidFill>
-          <a:ln>
-            <a:noFill/>
-          </a:ln>
-          <a:effectLst/>
-        </p:spPr>
-        <p:style>
-          <a:lnRef idx="1">
-            <a:schemeClr val="accent1"/>
-          </a:lnRef>
-          <a:fillRef idx="3">
-            <a:schemeClr val="accent1"/>
-          </a:fillRef>
-          <a:effectRef idx="2">
-            <a:schemeClr val="accent1"/>
-          </a:effectRef>
-          <a:fontRef idx="minor">
-            <a:schemeClr val="lt1"/>
-          </a:fontRef>
-        </p:style>
-        <p:txBody>
-          <a:bodyPr rtlCol="0" anchor="ctr"/>
-          <a:lstStyle/>
-          <a:p>
-            <a:pPr algn="ctr"/>
-          </a:p>
-        </p:txBody>
-      </p:sp>
-      <p:sp>
-        <p:nvSpPr>
-          <p:cNvPr id="18" name="TextBox 17"/>
-          <p:cNvSpPr txBox="1"/>
-          <p:nvPr/>
-        </p:nvSpPr>
-        <p:spPr>
-          <a:xfrm>
-            <a:off x="1069848" y="3941064"/>
-            <a:ext cx="10405872" cy="365760"/>
-          </a:xfrm>
-          <a:prstGeom prst="rect">
-            <a:avLst/>
-          </a:prstGeom>
-          <a:noFill/>
-        </p:spPr>
-        <p:txBody>
-          <a:bodyPr wrap="square" lIns="0" rIns="0" tIns="0" bIns="0" anchor="t">
-            <a:spAutoFit/>
-          </a:bodyPr>
-          <a:lstStyle/>
-          <a:p>
-            <a:pPr algn="l">
-              <a:lnSpc>
-                <a:spcPct val="115000"/>
-              </a:lnSpc>
-            </a:pPr>
-            <a:r>
-              <a:rPr sz="1650" b="1">
-                <a:solidFill>
-                  <a:srgbClr val="ECF1F6"/>
-                </a:solidFill>
-                <a:latin typeface="맑은 고딕"/>
-                <a:ea typeface="맑은 고딕"/>
-                <a:cs typeface="맑은 고딕"/>
-              </a:rPr>
-              <a:t>배치는 단가를 반으로 줄이지만 시간은 약속하지 않는다</a:t>
-            </a:r>
-          </a:p>
-        </p:txBody>
-      </p:sp>
-      <p:sp>
-        <p:nvSpPr>
-          <p:cNvPr id="19" name="TextBox 18"/>
-          <p:cNvSpPr txBox="1"/>
-          <p:nvPr/>
-        </p:nvSpPr>
-        <p:spPr>
-          <a:xfrm>
-            <a:off x="1069848" y="4215384"/>
-            <a:ext cx="10405872" cy="365760"/>
-          </a:xfrm>
-          <a:prstGeom prst="rect">
-            <a:avLst/>
-          </a:prstGeom>
-          <a:noFill/>
-        </p:spPr>
-        <p:txBody>
-          <a:bodyPr wrap="square" lIns="0" rIns="0" tIns="0" bIns="0" anchor="t">
-            <a:spAutoFit/>
-          </a:bodyPr>
-          <a:lstStyle/>
-          <a:p>
-            <a:pPr algn="l">
-              <a:lnSpc>
-                <a:spcPct val="115000"/>
-              </a:lnSpc>
-            </a:pPr>
-            <a:r>
-              <a:rPr sz="1350" b="0">
-                <a:solidFill>
-                  <a:srgbClr val="93A4B5"/>
-                </a:solidFill>
-                <a:latin typeface="맑은 고딕"/>
-                <a:ea typeface="맑은 고딕"/>
-                <a:cs typeface="맑은 고딕"/>
-              </a:rPr>
-              <a:t>expired가 실제로 난다. 폴백 없는 배치는 파이프라인을 멈춘다.</a:t>
-            </a:r>
-          </a:p>
-        </p:txBody>
-      </p:sp>
-      <p:sp>
-        <p:nvSpPr>
-          <p:cNvPr id="20" name="Rectangle 19"/>
-          <p:cNvSpPr/>
-          <p:nvPr/>
-        </p:nvSpPr>
-        <p:spPr>
-          <a:xfrm>
-            <a:off x="777240" y="4700016"/>
-            <a:ext cx="109728" cy="109728"/>
-          </a:xfrm>
-          <a:prstGeom prst="rect">
-            <a:avLst/>
-          </a:prstGeom>
-          <a:solidFill>
-            <a:srgbClr val="36D399"/>
-          </a:solidFill>
-          <a:ln>
-            <a:noFill/>
-          </a:ln>
-          <a:effectLst/>
-        </p:spPr>
-        <p:style>
-          <a:lnRef idx="1">
-            <a:schemeClr val="accent1"/>
-          </a:lnRef>
-          <a:fillRef idx="3">
-            <a:schemeClr val="accent1"/>
-          </a:fillRef>
-          <a:effectRef idx="2">
-            <a:schemeClr val="accent1"/>
-          </a:effectRef>
-          <a:fontRef idx="minor">
-            <a:schemeClr val="lt1"/>
-          </a:fontRef>
-        </p:style>
-        <p:txBody>
-          <a:bodyPr rtlCol="0" anchor="ctr"/>
-          <a:lstStyle/>
-          <a:p>
-            <a:pPr algn="ctr"/>
-          </a:p>
-        </p:txBody>
-      </p:sp>
-      <p:sp>
-        <p:nvSpPr>
-          <p:cNvPr id="21" name="TextBox 20"/>
-          <p:cNvSpPr txBox="1"/>
-          <p:nvPr/>
-        </p:nvSpPr>
-        <p:spPr>
-          <a:xfrm>
-            <a:off x="1069848" y="4599431"/>
-            <a:ext cx="10405872" cy="365760"/>
-          </a:xfrm>
-          <a:prstGeom prst="rect">
-            <a:avLst/>
-          </a:prstGeom>
-          <a:noFill/>
-        </p:spPr>
-        <p:txBody>
-          <a:bodyPr wrap="square" lIns="0" rIns="0" tIns="0" bIns="0" anchor="t">
-            <a:spAutoFit/>
-          </a:bodyPr>
-          <a:lstStyle/>
-          <a:p>
-            <a:pPr algn="l">
-              <a:lnSpc>
-                <a:spcPct val="115000"/>
-              </a:lnSpc>
-            </a:pPr>
-            <a:r>
-              <a:rPr sz="1650" b="1">
-                <a:solidFill>
-                  <a:srgbClr val="ECF1F6"/>
-                </a:solidFill>
-                <a:latin typeface="맑은 고딕"/>
-                <a:ea typeface="맑은 고딕"/>
-                <a:cs typeface="맑은 고딕"/>
-              </a:rPr>
-              <a:t>밸브는 프롬프트가 아니라 코드로 잠근다</a:t>
-            </a:r>
-          </a:p>
-        </p:txBody>
-      </p:sp>
-      <p:sp>
-        <p:nvSpPr>
-          <p:cNvPr id="22" name="TextBox 21"/>
-          <p:cNvSpPr txBox="1"/>
-          <p:nvPr/>
-        </p:nvSpPr>
-        <p:spPr>
-          <a:xfrm>
-            <a:off x="1069848" y="4873751"/>
-            <a:ext cx="10405872" cy="365760"/>
-          </a:xfrm>
-          <a:prstGeom prst="rect">
-            <a:avLst/>
-          </a:prstGeom>
-          <a:noFill/>
-        </p:spPr>
-        <p:txBody>
-          <a:bodyPr wrap="square" lIns="0" rIns="0" tIns="0" bIns="0" anchor="t">
-            <a:spAutoFit/>
-          </a:bodyPr>
-          <a:lstStyle/>
-          <a:p>
-            <a:pPr algn="l">
-              <a:lnSpc>
-                <a:spcPct val="115000"/>
-              </a:lnSpc>
-            </a:pPr>
-            <a:r>
-              <a:rPr sz="1350" b="0">
-                <a:solidFill>
-                  <a:srgbClr val="93A4B5"/>
-                </a:solidFill>
-                <a:latin typeface="맑은 고딕"/>
-                <a:ea typeface="맑은 고딕"/>
-                <a:cs typeface="맑은 고딕"/>
-              </a:rPr>
-              <a:t>3줄 상한과 세션 리셋은 부탁이 아니라 후처리로 강제해야 지켜진다.</a:t>
-            </a:r>
-          </a:p>
-        </p:txBody>
-      </p:sp>
-      <p:sp>
-        <p:nvSpPr>
-          <p:cNvPr id="23" name="Rounded Rectangle 22"/>
-          <p:cNvSpPr/>
-          <p:nvPr/>
-        </p:nvSpPr>
-        <p:spPr>
-          <a:xfrm>
-            <a:off x="685800" y="5440680"/>
-            <a:ext cx="10835640" cy="822960"/>
-          </a:xfrm>
-          <a:prstGeom prst="roundRect">
-            <a:avLst>
-              <a:gd name="adj" fmla="val 5000"/>
-            </a:avLst>
+            <a:off x="685800" y="2286000"/>
+            <a:ext cx="10835640" cy="384048"/>
+          </a:xfrm>
+          <a:prstGeom prst="rect">
+            <a:avLst/>
           </a:prstGeom>
           <a:solidFill>
             <a:srgbClr val="18222E"/>
@@ -12374,14 +11402,1176 @@
       </p:sp>
       <p:sp>
         <p:nvSpPr>
-          <p:cNvPr id="24" name="Rectangle 23"/>
+          <p:cNvPr id="10" name="TextBox 9"/>
+          <p:cNvSpPr txBox="1"/>
+          <p:nvPr/>
+        </p:nvSpPr>
+        <p:spPr>
+          <a:xfrm>
+            <a:off x="813816" y="2368296"/>
+            <a:ext cx="1645920" cy="384048"/>
+          </a:xfrm>
+          <a:prstGeom prst="rect">
+            <a:avLst/>
+          </a:prstGeom>
+          <a:noFill/>
+        </p:spPr>
+        <p:txBody>
+          <a:bodyPr wrap="square" lIns="0" rIns="0" tIns="0" bIns="0" anchor="t">
+            <a:spAutoFit/>
+          </a:bodyPr>
+          <a:lstStyle/>
+          <a:p>
+            <a:pPr algn="l">
+              <a:lnSpc>
+                <a:spcPct val="115000"/>
+              </a:lnSpc>
+            </a:pPr>
+            <a:r>
+              <a:rPr sz="1300" b="1">
+                <a:solidFill>
+                  <a:srgbClr val="36D399"/>
+                </a:solidFill>
+                <a:latin typeface="맑은 고딕"/>
+                <a:ea typeface="맑은 고딕"/>
+                <a:cs typeface="맑은 고딕"/>
+              </a:rPr>
+              <a:t>언제</a:t>
+            </a:r>
+          </a:p>
+        </p:txBody>
+      </p:sp>
+      <p:sp>
+        <p:nvSpPr>
+          <p:cNvPr id="11" name="TextBox 10"/>
+          <p:cNvSpPr txBox="1"/>
+          <p:nvPr/>
+        </p:nvSpPr>
+        <p:spPr>
+          <a:xfrm>
+            <a:off x="2642616" y="2368296"/>
+            <a:ext cx="2103120" cy="384048"/>
+          </a:xfrm>
+          <a:prstGeom prst="rect">
+            <a:avLst/>
+          </a:prstGeom>
+          <a:noFill/>
+        </p:spPr>
+        <p:txBody>
+          <a:bodyPr wrap="square" lIns="0" rIns="0" tIns="0" bIns="0" anchor="t">
+            <a:spAutoFit/>
+          </a:bodyPr>
+          <a:lstStyle/>
+          <a:p>
+            <a:pPr algn="l">
+              <a:lnSpc>
+                <a:spcPct val="115000"/>
+              </a:lnSpc>
+            </a:pPr>
+            <a:r>
+              <a:rPr sz="1300" b="1">
+                <a:solidFill>
+                  <a:srgbClr val="36D399"/>
+                </a:solidFill>
+                <a:latin typeface="맑은 고딕"/>
+                <a:ea typeface="맑은 고딕"/>
+                <a:cs typeface="맑은 고딕"/>
+              </a:rPr>
+              <a:t>도구</a:t>
+            </a:r>
+          </a:p>
+        </p:txBody>
+      </p:sp>
+      <p:sp>
+        <p:nvSpPr>
+          <p:cNvPr id="12" name="TextBox 11"/>
+          <p:cNvSpPr txBox="1"/>
+          <p:nvPr/>
+        </p:nvSpPr>
+        <p:spPr>
+          <a:xfrm>
+            <a:off x="4928616" y="2368296"/>
+            <a:ext cx="4160520" cy="384048"/>
+          </a:xfrm>
+          <a:prstGeom prst="rect">
+            <a:avLst/>
+          </a:prstGeom>
+          <a:noFill/>
+        </p:spPr>
+        <p:txBody>
+          <a:bodyPr wrap="square" lIns="0" rIns="0" tIns="0" bIns="0" anchor="t">
+            <a:spAutoFit/>
+          </a:bodyPr>
+          <a:lstStyle/>
+          <a:p>
+            <a:pPr algn="l">
+              <a:lnSpc>
+                <a:spcPct val="115000"/>
+              </a:lnSpc>
+            </a:pPr>
+            <a:r>
+              <a:rPr sz="1300" b="1">
+                <a:solidFill>
+                  <a:srgbClr val="36D399"/>
+                </a:solidFill>
+                <a:latin typeface="맑은 고딕"/>
+                <a:ea typeface="맑은 고딕"/>
+                <a:cs typeface="맑은 고딕"/>
+              </a:rPr>
+              <a:t>무슨 답이 오나</a:t>
+            </a:r>
+          </a:p>
+        </p:txBody>
+      </p:sp>
+      <p:sp>
+        <p:nvSpPr>
+          <p:cNvPr id="13" name="TextBox 12"/>
+          <p:cNvSpPr txBox="1"/>
+          <p:nvPr/>
+        </p:nvSpPr>
+        <p:spPr>
+          <a:xfrm>
+            <a:off x="9272016" y="2368296"/>
+            <a:ext cx="2194560" cy="384048"/>
+          </a:xfrm>
+          <a:prstGeom prst="rect">
+            <a:avLst/>
+          </a:prstGeom>
+          <a:noFill/>
+        </p:spPr>
+        <p:txBody>
+          <a:bodyPr wrap="square" lIns="0" rIns="0" tIns="0" bIns="0" anchor="t">
+            <a:spAutoFit/>
+          </a:bodyPr>
+          <a:lstStyle/>
+          <a:p>
+            <a:pPr algn="l">
+              <a:lnSpc>
+                <a:spcPct val="115000"/>
+              </a:lnSpc>
+            </a:pPr>
+            <a:r>
+              <a:rPr sz="1300" b="1">
+                <a:solidFill>
+                  <a:srgbClr val="36D399"/>
+                </a:solidFill>
+                <a:latin typeface="맑은 고딕"/>
+                <a:ea typeface="맑은 고딕"/>
+                <a:cs typeface="맑은 고딕"/>
+              </a:rPr>
+              <a:t>역할</a:t>
+            </a:r>
+          </a:p>
+        </p:txBody>
+      </p:sp>
+      <p:sp>
+        <p:nvSpPr>
+          <p:cNvPr id="14" name="Rectangle 13"/>
           <p:cNvSpPr/>
           <p:nvPr/>
         </p:nvSpPr>
         <p:spPr>
           <a:xfrm>
-            <a:off x="685800" y="5440680"/>
-            <a:ext cx="50292" cy="822960"/>
+            <a:off x="685800" y="2670048"/>
+            <a:ext cx="10835640" cy="384048"/>
+          </a:xfrm>
+          <a:prstGeom prst="rect">
+            <a:avLst/>
+          </a:prstGeom>
+          <a:solidFill>
+            <a:srgbClr val="111A24"/>
+          </a:solidFill>
+          <a:ln>
+            <a:noFill/>
+          </a:ln>
+          <a:effectLst/>
+        </p:spPr>
+        <p:style>
+          <a:lnRef idx="1">
+            <a:schemeClr val="accent1"/>
+          </a:lnRef>
+          <a:fillRef idx="3">
+            <a:schemeClr val="accent1"/>
+          </a:fillRef>
+          <a:effectRef idx="2">
+            <a:schemeClr val="accent1"/>
+          </a:effectRef>
+          <a:fontRef idx="minor">
+            <a:schemeClr val="lt1"/>
+          </a:fontRef>
+        </p:style>
+        <p:txBody>
+          <a:bodyPr rtlCol="0" anchor="ctr"/>
+          <a:lstStyle/>
+          <a:p>
+            <a:pPr algn="ctr"/>
+          </a:p>
+        </p:txBody>
+      </p:sp>
+      <p:sp>
+        <p:nvSpPr>
+          <p:cNvPr id="15" name="TextBox 14"/>
+          <p:cNvSpPr txBox="1"/>
+          <p:nvPr/>
+        </p:nvSpPr>
+        <p:spPr>
+          <a:xfrm>
+            <a:off x="813816" y="2752344"/>
+            <a:ext cx="1645920" cy="384048"/>
+          </a:xfrm>
+          <a:prstGeom prst="rect">
+            <a:avLst/>
+          </a:prstGeom>
+          <a:noFill/>
+        </p:spPr>
+        <p:txBody>
+          <a:bodyPr wrap="square" lIns="0" rIns="0" tIns="0" bIns="0" anchor="t">
+            <a:spAutoFit/>
+          </a:bodyPr>
+          <a:lstStyle/>
+          <a:p>
+            <a:pPr algn="l">
+              <a:lnSpc>
+                <a:spcPct val="115000"/>
+              </a:lnSpc>
+            </a:pPr>
+            <a:r>
+              <a:rPr sz="1250" b="0">
+                <a:solidFill>
+                  <a:srgbClr val="ECF1F6"/>
+                </a:solidFill>
+                <a:latin typeface="맑은 고딕"/>
+                <a:ea typeface="맑은 고딕"/>
+                <a:cs typeface="맑은 고딕"/>
+              </a:rPr>
+              <a:t>작업 시작</a:t>
+            </a:r>
+          </a:p>
+        </p:txBody>
+      </p:sp>
+      <p:sp>
+        <p:nvSpPr>
+          <p:cNvPr id="16" name="TextBox 15"/>
+          <p:cNvSpPr txBox="1"/>
+          <p:nvPr/>
+        </p:nvSpPr>
+        <p:spPr>
+          <a:xfrm>
+            <a:off x="2642616" y="2752344"/>
+            <a:ext cx="2103120" cy="384048"/>
+          </a:xfrm>
+          <a:prstGeom prst="rect">
+            <a:avLst/>
+          </a:prstGeom>
+          <a:noFill/>
+        </p:spPr>
+        <p:txBody>
+          <a:bodyPr wrap="square" lIns="0" rIns="0" tIns="0" bIns="0" anchor="t">
+            <a:spAutoFit/>
+          </a:bodyPr>
+          <a:lstStyle/>
+          <a:p>
+            <a:pPr algn="l">
+              <a:lnSpc>
+                <a:spcPct val="115000"/>
+              </a:lnSpc>
+            </a:pPr>
+            <a:r>
+              <a:rPr sz="1250" b="0">
+                <a:solidFill>
+                  <a:srgbClr val="ECF1F6"/>
+                </a:solidFill>
+                <a:latin typeface="맑은 고딕"/>
+                <a:ea typeface="맑은 고딕"/>
+                <a:cs typeface="맑은 고딕"/>
+              </a:rPr>
+              <a:t>route_task</a:t>
+            </a:r>
+          </a:p>
+        </p:txBody>
+      </p:sp>
+      <p:sp>
+        <p:nvSpPr>
+          <p:cNvPr id="17" name="TextBox 16"/>
+          <p:cNvSpPr txBox="1"/>
+          <p:nvPr/>
+        </p:nvSpPr>
+        <p:spPr>
+          <a:xfrm>
+            <a:off x="4928616" y="2752344"/>
+            <a:ext cx="4160520" cy="384048"/>
+          </a:xfrm>
+          <a:prstGeom prst="rect">
+            <a:avLst/>
+          </a:prstGeom>
+          <a:noFill/>
+        </p:spPr>
+        <p:txBody>
+          <a:bodyPr wrap="square" lIns="0" rIns="0" tIns="0" bIns="0" anchor="t">
+            <a:spAutoFit/>
+          </a:bodyPr>
+          <a:lstStyle/>
+          <a:p>
+            <a:pPr algn="l">
+              <a:lnSpc>
+                <a:spcPct val="115000"/>
+              </a:lnSpc>
+            </a:pPr>
+            <a:r>
+              <a:rPr sz="1250" b="0">
+                <a:solidFill>
+                  <a:srgbClr val="ECF1F6"/>
+                </a:solidFill>
+                <a:latin typeface="맑은 고딕"/>
+                <a:ea typeface="맑은 고딕"/>
+                <a:cs typeface="맑은 고딕"/>
+              </a:rPr>
+              <a:t>어느 티어로 · 출력 몇 토큰까지</a:t>
+            </a:r>
+          </a:p>
+        </p:txBody>
+      </p:sp>
+      <p:sp>
+        <p:nvSpPr>
+          <p:cNvPr id="18" name="TextBox 17"/>
+          <p:cNvSpPr txBox="1"/>
+          <p:nvPr/>
+        </p:nvSpPr>
+        <p:spPr>
+          <a:xfrm>
+            <a:off x="9272016" y="2752344"/>
+            <a:ext cx="2194560" cy="384048"/>
+          </a:xfrm>
+          <a:prstGeom prst="rect">
+            <a:avLst/>
+          </a:prstGeom>
+          <a:noFill/>
+        </p:spPr>
+        <p:txBody>
+          <a:bodyPr wrap="square" lIns="0" rIns="0" tIns="0" bIns="0" anchor="t">
+            <a:spAutoFit/>
+          </a:bodyPr>
+          <a:lstStyle/>
+          <a:p>
+            <a:pPr algn="l">
+              <a:lnSpc>
+                <a:spcPct val="115000"/>
+              </a:lnSpc>
+            </a:pPr>
+            <a:r>
+              <a:rPr sz="1250" b="1">
+                <a:solidFill>
+                  <a:srgbClr val="36D399"/>
+                </a:solidFill>
+                <a:latin typeface="맑은 고딕"/>
+                <a:ea typeface="맑은 고딕"/>
+                <a:cs typeface="맑은 고딕"/>
+              </a:rPr>
+              <a:t>배정</a:t>
+            </a:r>
+          </a:p>
+        </p:txBody>
+      </p:sp>
+      <p:sp>
+        <p:nvSpPr>
+          <p:cNvPr id="19" name="TextBox 18"/>
+          <p:cNvSpPr txBox="1"/>
+          <p:nvPr/>
+        </p:nvSpPr>
+        <p:spPr>
+          <a:xfrm>
+            <a:off x="813816" y="3136391"/>
+            <a:ext cx="1645920" cy="384048"/>
+          </a:xfrm>
+          <a:prstGeom prst="rect">
+            <a:avLst/>
+          </a:prstGeom>
+          <a:noFill/>
+        </p:spPr>
+        <p:txBody>
+          <a:bodyPr wrap="square" lIns="0" rIns="0" tIns="0" bIns="0" anchor="t">
+            <a:spAutoFit/>
+          </a:bodyPr>
+          <a:lstStyle/>
+          <a:p>
+            <a:pPr algn="l">
+              <a:lnSpc>
+                <a:spcPct val="115000"/>
+              </a:lnSpc>
+            </a:pPr>
+            <a:r>
+              <a:rPr sz="1250" b="0">
+                <a:solidFill>
+                  <a:srgbClr val="ECF1F6"/>
+                </a:solidFill>
+                <a:latin typeface="맑은 고딕"/>
+                <a:ea typeface="맑은 고딕"/>
+                <a:cs typeface="맑은 고딕"/>
+              </a:rPr>
+              <a:t>실패했을 때</a:t>
+            </a:r>
+          </a:p>
+        </p:txBody>
+      </p:sp>
+      <p:sp>
+        <p:nvSpPr>
+          <p:cNvPr id="20" name="TextBox 19"/>
+          <p:cNvSpPr txBox="1"/>
+          <p:nvPr/>
+        </p:nvSpPr>
+        <p:spPr>
+          <a:xfrm>
+            <a:off x="2642616" y="3136391"/>
+            <a:ext cx="2103120" cy="384048"/>
+          </a:xfrm>
+          <a:prstGeom prst="rect">
+            <a:avLst/>
+          </a:prstGeom>
+          <a:noFill/>
+        </p:spPr>
+        <p:txBody>
+          <a:bodyPr wrap="square" lIns="0" rIns="0" tIns="0" bIns="0" anchor="t">
+            <a:spAutoFit/>
+          </a:bodyPr>
+          <a:lstStyle/>
+          <a:p>
+            <a:pPr algn="l">
+              <a:lnSpc>
+                <a:spcPct val="115000"/>
+              </a:lnSpc>
+            </a:pPr>
+            <a:r>
+              <a:rPr sz="1250" b="0">
+                <a:solidFill>
+                  <a:srgbClr val="ECF1F6"/>
+                </a:solidFill>
+                <a:latin typeface="맑은 고딕"/>
+                <a:ea typeface="맑은 고딕"/>
+                <a:cs typeface="맑은 고딕"/>
+              </a:rPr>
+              <a:t>rework_next</a:t>
+            </a:r>
+          </a:p>
+        </p:txBody>
+      </p:sp>
+      <p:sp>
+        <p:nvSpPr>
+          <p:cNvPr id="21" name="TextBox 20"/>
+          <p:cNvSpPr txBox="1"/>
+          <p:nvPr/>
+        </p:nvSpPr>
+        <p:spPr>
+          <a:xfrm>
+            <a:off x="4928616" y="3136391"/>
+            <a:ext cx="4160520" cy="384048"/>
+          </a:xfrm>
+          <a:prstGeom prst="rect">
+            <a:avLst/>
+          </a:prstGeom>
+          <a:noFill/>
+        </p:spPr>
+        <p:txBody>
+          <a:bodyPr wrap="square" lIns="0" rIns="0" tIns="0" bIns="0" anchor="t">
+            <a:spAutoFit/>
+          </a:bodyPr>
+          <a:lstStyle/>
+          <a:p>
+            <a:pPr algn="l">
+              <a:lnSpc>
+                <a:spcPct val="115000"/>
+              </a:lnSpc>
+            </a:pPr>
+            <a:r>
+              <a:rPr sz="1250" b="0">
+                <a:solidFill>
+                  <a:srgbClr val="ECF1F6"/>
+                </a:solidFill>
+                <a:latin typeface="맑은 고딕"/>
+                <a:ea typeface="맑은 고딕"/>
+                <a:cs typeface="맑은 고딕"/>
+              </a:rPr>
+              <a:t>사다리에서 다음 한 칸만</a:t>
+            </a:r>
+          </a:p>
+        </p:txBody>
+      </p:sp>
+      <p:sp>
+        <p:nvSpPr>
+          <p:cNvPr id="22" name="TextBox 21"/>
+          <p:cNvSpPr txBox="1"/>
+          <p:nvPr/>
+        </p:nvSpPr>
+        <p:spPr>
+          <a:xfrm>
+            <a:off x="9272016" y="3136391"/>
+            <a:ext cx="2194560" cy="384048"/>
+          </a:xfrm>
+          <a:prstGeom prst="rect">
+            <a:avLst/>
+          </a:prstGeom>
+          <a:noFill/>
+        </p:spPr>
+        <p:txBody>
+          <a:bodyPr wrap="square" lIns="0" rIns="0" tIns="0" bIns="0" anchor="t">
+            <a:spAutoFit/>
+          </a:bodyPr>
+          <a:lstStyle/>
+          <a:p>
+            <a:pPr algn="l">
+              <a:lnSpc>
+                <a:spcPct val="115000"/>
+              </a:lnSpc>
+            </a:pPr>
+            <a:r>
+              <a:rPr sz="1250" b="1">
+                <a:solidFill>
+                  <a:srgbClr val="5A9CFF"/>
+                </a:solidFill>
+                <a:latin typeface="맑은 고딕"/>
+                <a:ea typeface="맑은 고딕"/>
+                <a:cs typeface="맑은 고딕"/>
+              </a:rPr>
+              <a:t>에스컬레이션</a:t>
+            </a:r>
+          </a:p>
+        </p:txBody>
+      </p:sp>
+      <p:sp>
+        <p:nvSpPr>
+          <p:cNvPr id="23" name="Rectangle 22"/>
+          <p:cNvSpPr/>
+          <p:nvPr/>
+        </p:nvSpPr>
+        <p:spPr>
+          <a:xfrm>
+            <a:off x="685800" y="3438144"/>
+            <a:ext cx="10835640" cy="384048"/>
+          </a:xfrm>
+          <a:prstGeom prst="rect">
+            <a:avLst/>
+          </a:prstGeom>
+          <a:solidFill>
+            <a:srgbClr val="111A24"/>
+          </a:solidFill>
+          <a:ln>
+            <a:noFill/>
+          </a:ln>
+          <a:effectLst/>
+        </p:spPr>
+        <p:style>
+          <a:lnRef idx="1">
+            <a:schemeClr val="accent1"/>
+          </a:lnRef>
+          <a:fillRef idx="3">
+            <a:schemeClr val="accent1"/>
+          </a:fillRef>
+          <a:effectRef idx="2">
+            <a:schemeClr val="accent1"/>
+          </a:effectRef>
+          <a:fontRef idx="minor">
+            <a:schemeClr val="lt1"/>
+          </a:fontRef>
+        </p:style>
+        <p:txBody>
+          <a:bodyPr rtlCol="0" anchor="ctr"/>
+          <a:lstStyle/>
+          <a:p>
+            <a:pPr algn="ctr"/>
+          </a:p>
+        </p:txBody>
+      </p:sp>
+      <p:sp>
+        <p:nvSpPr>
+          <p:cNvPr id="24" name="TextBox 23"/>
+          <p:cNvSpPr txBox="1"/>
+          <p:nvPr/>
+        </p:nvSpPr>
+        <p:spPr>
+          <a:xfrm>
+            <a:off x="813816" y="3520439"/>
+            <a:ext cx="1645920" cy="384048"/>
+          </a:xfrm>
+          <a:prstGeom prst="rect">
+            <a:avLst/>
+          </a:prstGeom>
+          <a:noFill/>
+        </p:spPr>
+        <p:txBody>
+          <a:bodyPr wrap="square" lIns="0" rIns="0" tIns="0" bIns="0" anchor="t">
+            <a:spAutoFit/>
+          </a:bodyPr>
+          <a:lstStyle/>
+          <a:p>
+            <a:pPr algn="l">
+              <a:lnSpc>
+                <a:spcPct val="115000"/>
+              </a:lnSpc>
+            </a:pPr>
+            <a:r>
+              <a:rPr sz="1250" b="0">
+                <a:solidFill>
+                  <a:srgbClr val="ECF1F6"/>
+                </a:solidFill>
+                <a:latin typeface="맑은 고딕"/>
+                <a:ea typeface="맑은 고딕"/>
+                <a:cs typeface="맑은 고딕"/>
+              </a:rPr>
+              <a:t>매 턴 끝</a:t>
+            </a:r>
+          </a:p>
+        </p:txBody>
+      </p:sp>
+      <p:sp>
+        <p:nvSpPr>
+          <p:cNvPr id="25" name="TextBox 24"/>
+          <p:cNvSpPr txBox="1"/>
+          <p:nvPr/>
+        </p:nvSpPr>
+        <p:spPr>
+          <a:xfrm>
+            <a:off x="2642616" y="3520439"/>
+            <a:ext cx="2103120" cy="384048"/>
+          </a:xfrm>
+          <a:prstGeom prst="rect">
+            <a:avLst/>
+          </a:prstGeom>
+          <a:noFill/>
+        </p:spPr>
+        <p:txBody>
+          <a:bodyPr wrap="square" lIns="0" rIns="0" tIns="0" bIns="0" anchor="t">
+            <a:spAutoFit/>
+          </a:bodyPr>
+          <a:lstStyle/>
+          <a:p>
+            <a:pPr algn="l">
+              <a:lnSpc>
+                <a:spcPct val="115000"/>
+              </a:lnSpc>
+            </a:pPr>
+            <a:r>
+              <a:rPr sz="1250" b="0">
+                <a:solidFill>
+                  <a:srgbClr val="ECF1F6"/>
+                </a:solidFill>
+                <a:latin typeface="맑은 고딕"/>
+                <a:ea typeface="맑은 고딕"/>
+                <a:cs typeface="맑은 고딕"/>
+              </a:rPr>
+              <a:t>session_check</a:t>
+            </a:r>
+          </a:p>
+        </p:txBody>
+      </p:sp>
+      <p:sp>
+        <p:nvSpPr>
+          <p:cNvPr id="26" name="TextBox 25"/>
+          <p:cNvSpPr txBox="1"/>
+          <p:nvPr/>
+        </p:nvSpPr>
+        <p:spPr>
+          <a:xfrm>
+            <a:off x="4928616" y="3520439"/>
+            <a:ext cx="4160520" cy="384048"/>
+          </a:xfrm>
+          <a:prstGeom prst="rect">
+            <a:avLst/>
+          </a:prstGeom>
+          <a:noFill/>
+        </p:spPr>
+        <p:txBody>
+          <a:bodyPr wrap="square" lIns="0" rIns="0" tIns="0" bIns="0" anchor="t">
+            <a:spAutoFit/>
+          </a:bodyPr>
+          <a:lstStyle/>
+          <a:p>
+            <a:pPr algn="l">
+              <a:lnSpc>
+                <a:spcPct val="115000"/>
+              </a:lnSpc>
+            </a:pPr>
+            <a:r>
+              <a:rPr sz="1250" b="0">
+                <a:solidFill>
+                  <a:srgbClr val="ECF1F6"/>
+                </a:solidFill>
+                <a:latin typeface="맑은 고딕"/>
+                <a:ea typeface="맑은 고딕"/>
+                <a:cs typeface="맑은 고딕"/>
+              </a:rPr>
+              <a:t>continue / compact / reset</a:t>
+            </a:r>
+          </a:p>
+        </p:txBody>
+      </p:sp>
+      <p:sp>
+        <p:nvSpPr>
+          <p:cNvPr id="27" name="TextBox 26"/>
+          <p:cNvSpPr txBox="1"/>
+          <p:nvPr/>
+        </p:nvSpPr>
+        <p:spPr>
+          <a:xfrm>
+            <a:off x="9272016" y="3520439"/>
+            <a:ext cx="2194560" cy="384048"/>
+          </a:xfrm>
+          <a:prstGeom prst="rect">
+            <a:avLst/>
+          </a:prstGeom>
+          <a:noFill/>
+        </p:spPr>
+        <p:txBody>
+          <a:bodyPr wrap="square" lIns="0" rIns="0" tIns="0" bIns="0" anchor="t">
+            <a:spAutoFit/>
+          </a:bodyPr>
+          <a:lstStyle/>
+          <a:p>
+            <a:pPr algn="l">
+              <a:lnSpc>
+                <a:spcPct val="115000"/>
+              </a:lnSpc>
+            </a:pPr>
+            <a:r>
+              <a:rPr sz="1250" b="1">
+                <a:solidFill>
+                  <a:srgbClr val="36D399"/>
+                </a:solidFill>
+                <a:latin typeface="맑은 고딕"/>
+                <a:ea typeface="맑은 고딕"/>
+                <a:cs typeface="맑은 고딕"/>
+              </a:rPr>
+              <a:t>세션 위생</a:t>
+            </a:r>
+          </a:p>
+        </p:txBody>
+      </p:sp>
+      <p:sp>
+        <p:nvSpPr>
+          <p:cNvPr id="28" name="TextBox 27"/>
+          <p:cNvSpPr txBox="1"/>
+          <p:nvPr/>
+        </p:nvSpPr>
+        <p:spPr>
+          <a:xfrm>
+            <a:off x="813816" y="3904487"/>
+            <a:ext cx="1645920" cy="384048"/>
+          </a:xfrm>
+          <a:prstGeom prst="rect">
+            <a:avLst/>
+          </a:prstGeom>
+          <a:noFill/>
+        </p:spPr>
+        <p:txBody>
+          <a:bodyPr wrap="square" lIns="0" rIns="0" tIns="0" bIns="0" anchor="t">
+            <a:spAutoFit/>
+          </a:bodyPr>
+          <a:lstStyle/>
+          <a:p>
+            <a:pPr algn="l">
+              <a:lnSpc>
+                <a:spcPct val="115000"/>
+              </a:lnSpc>
+            </a:pPr>
+            <a:r>
+              <a:rPr sz="1250" b="0">
+                <a:solidFill>
+                  <a:srgbClr val="ECF1F6"/>
+                </a:solidFill>
+                <a:latin typeface="맑은 고딕"/>
+                <a:ea typeface="맑은 고딕"/>
+                <a:cs typeface="맑은 고딕"/>
+              </a:rPr>
+              <a:t>설명할 때</a:t>
+            </a:r>
+          </a:p>
+        </p:txBody>
+      </p:sp>
+      <p:sp>
+        <p:nvSpPr>
+          <p:cNvPr id="29" name="TextBox 28"/>
+          <p:cNvSpPr txBox="1"/>
+          <p:nvPr/>
+        </p:nvSpPr>
+        <p:spPr>
+          <a:xfrm>
+            <a:off x="2642616" y="3904487"/>
+            <a:ext cx="2103120" cy="384048"/>
+          </a:xfrm>
+          <a:prstGeom prst="rect">
+            <a:avLst/>
+          </a:prstGeom>
+          <a:noFill/>
+        </p:spPr>
+        <p:txBody>
+          <a:bodyPr wrap="square" lIns="0" rIns="0" tIns="0" bIns="0" anchor="t">
+            <a:spAutoFit/>
+          </a:bodyPr>
+          <a:lstStyle/>
+          <a:p>
+            <a:pPr algn="l">
+              <a:lnSpc>
+                <a:spcPct val="115000"/>
+              </a:lnSpc>
+            </a:pPr>
+            <a:r>
+              <a:rPr sz="1250" b="0">
+                <a:solidFill>
+                  <a:srgbClr val="ECF1F6"/>
+                </a:solidFill>
+                <a:latin typeface="맑은 고딕"/>
+                <a:ea typeface="맑은 고딕"/>
+                <a:cs typeface="맑은 고딕"/>
+              </a:rPr>
+              <a:t>trim_explain</a:t>
+            </a:r>
+          </a:p>
+        </p:txBody>
+      </p:sp>
+      <p:sp>
+        <p:nvSpPr>
+          <p:cNvPr id="30" name="TextBox 29"/>
+          <p:cNvSpPr txBox="1"/>
+          <p:nvPr/>
+        </p:nvSpPr>
+        <p:spPr>
+          <a:xfrm>
+            <a:off x="4928616" y="3904487"/>
+            <a:ext cx="4160520" cy="384048"/>
+          </a:xfrm>
+          <a:prstGeom prst="rect">
+            <a:avLst/>
+          </a:prstGeom>
+          <a:noFill/>
+        </p:spPr>
+        <p:txBody>
+          <a:bodyPr wrap="square" lIns="0" rIns="0" tIns="0" bIns="0" anchor="t">
+            <a:spAutoFit/>
+          </a:bodyPr>
+          <a:lstStyle/>
+          <a:p>
+            <a:pPr algn="l">
+              <a:lnSpc>
+                <a:spcPct val="115000"/>
+              </a:lnSpc>
+            </a:pPr>
+            <a:r>
+              <a:rPr sz="1250" b="0">
+                <a:solidFill>
+                  <a:srgbClr val="ECF1F6"/>
+                </a:solidFill>
+                <a:latin typeface="맑은 고딕"/>
+                <a:ea typeface="맑은 고딕"/>
+                <a:cs typeface="맑은 고딕"/>
+              </a:rPr>
+              <a:t>요청 없으면 3줄로 자름</a:t>
+            </a:r>
+          </a:p>
+        </p:txBody>
+      </p:sp>
+      <p:sp>
+        <p:nvSpPr>
+          <p:cNvPr id="31" name="TextBox 30"/>
+          <p:cNvSpPr txBox="1"/>
+          <p:nvPr/>
+        </p:nvSpPr>
+        <p:spPr>
+          <a:xfrm>
+            <a:off x="9272016" y="3904487"/>
+            <a:ext cx="2194560" cy="384048"/>
+          </a:xfrm>
+          <a:prstGeom prst="rect">
+            <a:avLst/>
+          </a:prstGeom>
+          <a:noFill/>
+        </p:spPr>
+        <p:txBody>
+          <a:bodyPr wrap="square" lIns="0" rIns="0" tIns="0" bIns="0" anchor="t">
+            <a:spAutoFit/>
+          </a:bodyPr>
+          <a:lstStyle/>
+          <a:p>
+            <a:pPr algn="l">
+              <a:lnSpc>
+                <a:spcPct val="115000"/>
+              </a:lnSpc>
+            </a:pPr>
+            <a:r>
+              <a:rPr sz="1250" b="1">
+                <a:solidFill>
+                  <a:srgbClr val="36D399"/>
+                </a:solidFill>
+                <a:latin typeface="맑은 고딕"/>
+                <a:ea typeface="맑은 고딕"/>
+                <a:cs typeface="맑은 고딕"/>
+              </a:rPr>
+              <a:t>출력 상한</a:t>
+            </a:r>
+          </a:p>
+        </p:txBody>
+      </p:sp>
+      <p:sp>
+        <p:nvSpPr>
+          <p:cNvPr id="32" name="Rectangle 31"/>
+          <p:cNvSpPr/>
+          <p:nvPr/>
+        </p:nvSpPr>
+        <p:spPr>
+          <a:xfrm>
+            <a:off x="685800" y="4206240"/>
+            <a:ext cx="10835640" cy="384048"/>
+          </a:xfrm>
+          <a:prstGeom prst="rect">
+            <a:avLst/>
+          </a:prstGeom>
+          <a:solidFill>
+            <a:srgbClr val="111A24"/>
+          </a:solidFill>
+          <a:ln>
+            <a:noFill/>
+          </a:ln>
+          <a:effectLst/>
+        </p:spPr>
+        <p:style>
+          <a:lnRef idx="1">
+            <a:schemeClr val="accent1"/>
+          </a:lnRef>
+          <a:fillRef idx="3">
+            <a:schemeClr val="accent1"/>
+          </a:fillRef>
+          <a:effectRef idx="2">
+            <a:schemeClr val="accent1"/>
+          </a:effectRef>
+          <a:fontRef idx="minor">
+            <a:schemeClr val="lt1"/>
+          </a:fontRef>
+        </p:style>
+        <p:txBody>
+          <a:bodyPr rtlCol="0" anchor="ctr"/>
+          <a:lstStyle/>
+          <a:p>
+            <a:pPr algn="ctr"/>
+          </a:p>
+        </p:txBody>
+      </p:sp>
+      <p:sp>
+        <p:nvSpPr>
+          <p:cNvPr id="33" name="TextBox 32"/>
+          <p:cNvSpPr txBox="1"/>
+          <p:nvPr/>
+        </p:nvSpPr>
+        <p:spPr>
+          <a:xfrm>
+            <a:off x="813816" y="4288536"/>
+            <a:ext cx="1645920" cy="384048"/>
+          </a:xfrm>
+          <a:prstGeom prst="rect">
+            <a:avLst/>
+          </a:prstGeom>
+          <a:noFill/>
+        </p:spPr>
+        <p:txBody>
+          <a:bodyPr wrap="square" lIns="0" rIns="0" tIns="0" bIns="0" anchor="t">
+            <a:spAutoFit/>
+          </a:bodyPr>
+          <a:lstStyle/>
+          <a:p>
+            <a:pPr algn="l">
+              <a:lnSpc>
+                <a:spcPct val="115000"/>
+              </a:lnSpc>
+            </a:pPr>
+            <a:r>
+              <a:rPr sz="1250" b="0">
+                <a:solidFill>
+                  <a:srgbClr val="ECF1F6"/>
+                </a:solidFill>
+                <a:latin typeface="맑은 고딕"/>
+                <a:ea typeface="맑은 고딕"/>
+                <a:cs typeface="맑은 고딕"/>
+              </a:rPr>
+              <a:t>회고</a:t>
+            </a:r>
+          </a:p>
+        </p:txBody>
+      </p:sp>
+      <p:sp>
+        <p:nvSpPr>
+          <p:cNvPr id="34" name="TextBox 33"/>
+          <p:cNvSpPr txBox="1"/>
+          <p:nvPr/>
+        </p:nvSpPr>
+        <p:spPr>
+          <a:xfrm>
+            <a:off x="2642616" y="4288536"/>
+            <a:ext cx="2103120" cy="384048"/>
+          </a:xfrm>
+          <a:prstGeom prst="rect">
+            <a:avLst/>
+          </a:prstGeom>
+          <a:noFill/>
+        </p:spPr>
+        <p:txBody>
+          <a:bodyPr wrap="square" lIns="0" rIns="0" tIns="0" bIns="0" anchor="t">
+            <a:spAutoFit/>
+          </a:bodyPr>
+          <a:lstStyle/>
+          <a:p>
+            <a:pPr algn="l">
+              <a:lnSpc>
+                <a:spcPct val="115000"/>
+              </a:lnSpc>
+            </a:pPr>
+            <a:r>
+              <a:rPr sz="1250" b="0">
+                <a:solidFill>
+                  <a:srgbClr val="ECF1F6"/>
+                </a:solidFill>
+                <a:latin typeface="맑은 고딕"/>
+                <a:ea typeface="맑은 고딕"/>
+                <a:cs typeface="맑은 고딕"/>
+              </a:rPr>
+              <a:t>cost_report</a:t>
+            </a:r>
+          </a:p>
+        </p:txBody>
+      </p:sp>
+      <p:sp>
+        <p:nvSpPr>
+          <p:cNvPr id="35" name="TextBox 34"/>
+          <p:cNvSpPr txBox="1"/>
+          <p:nvPr/>
+        </p:nvSpPr>
+        <p:spPr>
+          <a:xfrm>
+            <a:off x="4928616" y="4288536"/>
+            <a:ext cx="4160520" cy="384048"/>
+          </a:xfrm>
+          <a:prstGeom prst="rect">
+            <a:avLst/>
+          </a:prstGeom>
+          <a:noFill/>
+        </p:spPr>
+        <p:txBody>
+          <a:bodyPr wrap="square" lIns="0" rIns="0" tIns="0" bIns="0" anchor="t">
+            <a:spAutoFit/>
+          </a:bodyPr>
+          <a:lstStyle/>
+          <a:p>
+            <a:pPr algn="l">
+              <a:lnSpc>
+                <a:spcPct val="115000"/>
+              </a:lnSpc>
+            </a:pPr>
+            <a:r>
+              <a:rPr sz="1250" b="0">
+                <a:solidFill>
+                  <a:srgbClr val="ECF1F6"/>
+                </a:solidFill>
+                <a:latin typeface="맑은 고딕"/>
+                <a:ea typeface="맑은 고딕"/>
+                <a:cs typeface="맑은 고딕"/>
+              </a:rPr>
+              <a:t>무엇을 아꼈는지 집계</a:t>
+            </a:r>
+          </a:p>
+        </p:txBody>
+      </p:sp>
+      <p:sp>
+        <p:nvSpPr>
+          <p:cNvPr id="36" name="TextBox 35"/>
+          <p:cNvSpPr txBox="1"/>
+          <p:nvPr/>
+        </p:nvSpPr>
+        <p:spPr>
+          <a:xfrm>
+            <a:off x="9272016" y="4288536"/>
+            <a:ext cx="2194560" cy="384048"/>
+          </a:xfrm>
+          <a:prstGeom prst="rect">
+            <a:avLst/>
+          </a:prstGeom>
+          <a:noFill/>
+        </p:spPr>
+        <p:txBody>
+          <a:bodyPr wrap="square" lIns="0" rIns="0" tIns="0" bIns="0" anchor="t">
+            <a:spAutoFit/>
+          </a:bodyPr>
+          <a:lstStyle/>
+          <a:p>
+            <a:pPr algn="l">
+              <a:lnSpc>
+                <a:spcPct val="115000"/>
+              </a:lnSpc>
+            </a:pPr>
+            <a:r>
+              <a:rPr sz="1250" b="1">
+                <a:solidFill>
+                  <a:srgbClr val="5A9CFF"/>
+                </a:solidFill>
+                <a:latin typeface="맑은 고딕"/>
+                <a:ea typeface="맑은 고딕"/>
+                <a:cs typeface="맑은 고딕"/>
+              </a:rPr>
+              <a:t>측정</a:t>
+            </a:r>
+          </a:p>
+        </p:txBody>
+      </p:sp>
+      <p:sp>
+        <p:nvSpPr>
+          <p:cNvPr id="37" name="Rounded Rectangle 36"/>
+          <p:cNvSpPr/>
+          <p:nvPr/>
+        </p:nvSpPr>
+        <p:spPr>
+          <a:xfrm>
+            <a:off x="685800" y="4663440"/>
+            <a:ext cx="5440680" cy="1207008"/>
+          </a:xfrm>
+          <a:prstGeom prst="roundRect">
+            <a:avLst>
+              <a:gd name="adj" fmla="val 6000"/>
+            </a:avLst>
+          </a:prstGeom>
+          <a:solidFill>
+            <a:srgbClr val="18222E"/>
+          </a:solidFill>
+          <a:ln>
+            <a:noFill/>
+          </a:ln>
+          <a:effectLst/>
+        </p:spPr>
+        <p:style>
+          <a:lnRef idx="1">
+            <a:schemeClr val="accent1"/>
+          </a:lnRef>
+          <a:fillRef idx="3">
+            <a:schemeClr val="accent1"/>
+          </a:fillRef>
+          <a:effectRef idx="2">
+            <a:schemeClr val="accent1"/>
+          </a:effectRef>
+          <a:fontRef idx="minor">
+            <a:schemeClr val="lt1"/>
+          </a:fontRef>
+        </p:style>
+        <p:txBody>
+          <a:bodyPr rtlCol="0" anchor="ctr"/>
+          <a:lstStyle/>
+          <a:p>
+            <a:pPr algn="ctr"/>
+          </a:p>
+        </p:txBody>
+      </p:sp>
+      <p:sp>
+        <p:nvSpPr>
+          <p:cNvPr id="38" name="Rectangle 37"/>
+          <p:cNvSpPr/>
+          <p:nvPr/>
+        </p:nvSpPr>
+        <p:spPr>
+          <a:xfrm>
+            <a:off x="685800" y="4663440"/>
+            <a:ext cx="50292" cy="1207008"/>
           </a:xfrm>
           <a:prstGeom prst="rect">
             <a:avLst/>
@@ -12418,54 +12608,273 @@
       </p:sp>
       <p:sp>
         <p:nvSpPr>
-          <p:cNvPr id="25" name="TextBox 24"/>
-          <p:cNvSpPr txBox="1"/>
-          <p:nvPr/>
-        </p:nvSpPr>
-        <p:spPr>
-          <a:xfrm>
-            <a:off x="960120" y="5596128"/>
-            <a:ext cx="10424160" cy="594360"/>
-          </a:xfrm>
-          <a:prstGeom prst="rect">
-            <a:avLst/>
-          </a:prstGeom>
-          <a:noFill/>
-        </p:spPr>
-        <p:txBody>
-          <a:bodyPr wrap="square" lIns="0" rIns="0" tIns="0" bIns="0" anchor="t">
-            <a:spAutoFit/>
-          </a:bodyPr>
-          <a:lstStyle/>
-          <a:p>
-            <a:pPr algn="l">
-              <a:lnSpc>
-                <a:spcPct val="115000"/>
-              </a:lnSpc>
-            </a:pPr>
-            <a:r>
-              <a:rPr sz="1550" b="1">
-                <a:solidFill>
-                  <a:srgbClr val="5A9CFF"/>
-                </a:solidFill>
-                <a:latin typeface="맑은 고딕"/>
-                <a:ea typeface="맑은 고딕"/>
-                <a:cs typeface="맑은 고딕"/>
-              </a:rPr>
-              <a:t>세 덱을 관통하는 한 문장 — AI가 나쁜 게 아니라 우리가 견적서를 안 읽은 것이다.</a:t>
-            </a:r>
-          </a:p>
-        </p:txBody>
-      </p:sp>
-      <p:sp>
-        <p:nvSpPr>
-          <p:cNvPr id="26" name="TextBox 25"/>
-          <p:cNvSpPr txBox="1"/>
-          <p:nvPr/>
-        </p:nvSpPr>
-        <p:spPr>
-          <a:xfrm>
-            <a:off x="685800" y="6419088"/>
+          <p:cNvPr id="39" name="TextBox 38"/>
+          <p:cNvSpPr txBox="1"/>
+          <p:nvPr/>
+        </p:nvSpPr>
+        <p:spPr>
+          <a:xfrm>
+            <a:off x="996696" y="4901183"/>
+            <a:ext cx="4892040" cy="365760"/>
+          </a:xfrm>
+          <a:prstGeom prst="rect">
+            <a:avLst/>
+          </a:prstGeom>
+          <a:noFill/>
+        </p:spPr>
+        <p:txBody>
+          <a:bodyPr wrap="square" lIns="0" rIns="0" tIns="0" bIns="0" anchor="t">
+            <a:spAutoFit/>
+          </a:bodyPr>
+          <a:lstStyle/>
+          <a:p>
+            <a:pPr algn="l">
+              <a:lnSpc>
+                <a:spcPct val="115000"/>
+              </a:lnSpc>
+            </a:pPr>
+            <a:r>
+              <a:rPr sz="1500" b="1">
+                <a:solidFill>
+                  <a:srgbClr val="ECF1F6"/>
+                </a:solidFill>
+                <a:latin typeface="맑은 고딕"/>
+                <a:ea typeface="맑은 고딕"/>
+                <a:cs typeface="맑은 고딕"/>
+              </a:rPr>
+              <a:t>규칙을 문서로도 준다</a:t>
+            </a:r>
+          </a:p>
+        </p:txBody>
+      </p:sp>
+      <p:sp>
+        <p:nvSpPr>
+          <p:cNvPr id="40" name="TextBox 39"/>
+          <p:cNvSpPr txBox="1"/>
+          <p:nvPr/>
+        </p:nvSpPr>
+        <p:spPr>
+          <a:xfrm>
+            <a:off x="996696" y="5440679"/>
+            <a:ext cx="4892040" cy="292608"/>
+          </a:xfrm>
+          <a:prstGeom prst="rect">
+            <a:avLst/>
+          </a:prstGeom>
+          <a:noFill/>
+        </p:spPr>
+        <p:txBody>
+          <a:bodyPr wrap="square" lIns="0" rIns="0" tIns="0" bIns="0" anchor="t">
+            <a:spAutoFit/>
+          </a:bodyPr>
+          <a:lstStyle/>
+          <a:p>
+            <a:pPr algn="l">
+              <a:lnSpc>
+                <a:spcPct val="135000"/>
+              </a:lnSpc>
+              <a:spcBef>
+                <a:spcPts val="0"/>
+              </a:spcBef>
+            </a:pPr>
+            <a:r>
+              <a:rPr sz="1200" b="0">
+                <a:solidFill>
+                  <a:srgbClr val="93A4B5"/>
+                </a:solidFill>
+                <a:latin typeface="맑은 고딕"/>
+                <a:ea typeface="맑은 고딕"/>
+                <a:cs typeface="맑은 고딕"/>
+              </a:rPr>
+              <a:t>AGENTS.md를 워크스페이스에 두면 도구를 언제 부를지까지 지킨다.</a:t>
+            </a:r>
+          </a:p>
+        </p:txBody>
+      </p:sp>
+      <p:sp>
+        <p:nvSpPr>
+          <p:cNvPr id="41" name="Rounded Rectangle 40"/>
+          <p:cNvSpPr/>
+          <p:nvPr/>
+        </p:nvSpPr>
+        <p:spPr>
+          <a:xfrm>
+            <a:off x="6309360" y="4663440"/>
+            <a:ext cx="5212080" cy="1207008"/>
+          </a:xfrm>
+          <a:prstGeom prst="roundRect">
+            <a:avLst>
+              <a:gd name="adj" fmla="val 6000"/>
+            </a:avLst>
+          </a:prstGeom>
+          <a:solidFill>
+            <a:srgbClr val="18222E"/>
+          </a:solidFill>
+          <a:ln>
+            <a:noFill/>
+          </a:ln>
+          <a:effectLst/>
+        </p:spPr>
+        <p:style>
+          <a:lnRef idx="1">
+            <a:schemeClr val="accent1"/>
+          </a:lnRef>
+          <a:fillRef idx="3">
+            <a:schemeClr val="accent1"/>
+          </a:fillRef>
+          <a:effectRef idx="2">
+            <a:schemeClr val="accent1"/>
+          </a:effectRef>
+          <a:fontRef idx="minor">
+            <a:schemeClr val="lt1"/>
+          </a:fontRef>
+        </p:style>
+        <p:txBody>
+          <a:bodyPr rtlCol="0" anchor="ctr"/>
+          <a:lstStyle/>
+          <a:p>
+            <a:pPr algn="ctr"/>
+          </a:p>
+        </p:txBody>
+      </p:sp>
+      <p:sp>
+        <p:nvSpPr>
+          <p:cNvPr id="42" name="Rectangle 41"/>
+          <p:cNvSpPr/>
+          <p:nvPr/>
+        </p:nvSpPr>
+        <p:spPr>
+          <a:xfrm>
+            <a:off x="6309360" y="4663440"/>
+            <a:ext cx="50292" cy="1207008"/>
+          </a:xfrm>
+          <a:prstGeom prst="rect">
+            <a:avLst/>
+          </a:prstGeom>
+          <a:solidFill>
+            <a:srgbClr val="FFB04D"/>
+          </a:solidFill>
+          <a:ln>
+            <a:noFill/>
+          </a:ln>
+          <a:effectLst/>
+        </p:spPr>
+        <p:style>
+          <a:lnRef idx="1">
+            <a:schemeClr val="accent1"/>
+          </a:lnRef>
+          <a:fillRef idx="3">
+            <a:schemeClr val="accent1"/>
+          </a:fillRef>
+          <a:effectRef idx="2">
+            <a:schemeClr val="accent1"/>
+          </a:effectRef>
+          <a:fontRef idx="minor">
+            <a:schemeClr val="lt1"/>
+          </a:fontRef>
+        </p:style>
+        <p:txBody>
+          <a:bodyPr rtlCol="0" anchor="ctr"/>
+          <a:lstStyle/>
+          <a:p>
+            <a:pPr algn="ctr"/>
+          </a:p>
+        </p:txBody>
+      </p:sp>
+      <p:sp>
+        <p:nvSpPr>
+          <p:cNvPr id="43" name="TextBox 42"/>
+          <p:cNvSpPr txBox="1"/>
+          <p:nvPr/>
+        </p:nvSpPr>
+        <p:spPr>
+          <a:xfrm>
+            <a:off x="6620256" y="4901183"/>
+            <a:ext cx="4663440" cy="365760"/>
+          </a:xfrm>
+          <a:prstGeom prst="rect">
+            <a:avLst/>
+          </a:prstGeom>
+          <a:noFill/>
+        </p:spPr>
+        <p:txBody>
+          <a:bodyPr wrap="square" lIns="0" rIns="0" tIns="0" bIns="0" anchor="t">
+            <a:spAutoFit/>
+          </a:bodyPr>
+          <a:lstStyle/>
+          <a:p>
+            <a:pPr algn="l">
+              <a:lnSpc>
+                <a:spcPct val="115000"/>
+              </a:lnSpc>
+            </a:pPr>
+            <a:r>
+              <a:rPr sz="1500" b="1">
+                <a:solidFill>
+                  <a:srgbClr val="ECF1F6"/>
+                </a:solidFill>
+                <a:latin typeface="맑은 고딕"/>
+                <a:ea typeface="맑은 고딕"/>
+                <a:cs typeface="맑은 고딕"/>
+              </a:rPr>
+              <a:t>디버깅은 각오할 것</a:t>
+            </a:r>
+          </a:p>
+        </p:txBody>
+      </p:sp>
+      <p:sp>
+        <p:nvSpPr>
+          <p:cNvPr id="44" name="TextBox 43"/>
+          <p:cNvSpPr txBox="1"/>
+          <p:nvPr/>
+        </p:nvSpPr>
+        <p:spPr>
+          <a:xfrm>
+            <a:off x="6620256" y="5440679"/>
+            <a:ext cx="4663440" cy="292608"/>
+          </a:xfrm>
+          <a:prstGeom prst="rect">
+            <a:avLst/>
+          </a:prstGeom>
+          <a:noFill/>
+        </p:spPr>
+        <p:txBody>
+          <a:bodyPr wrap="square" lIns="0" rIns="0" tIns="0" bIns="0" anchor="t">
+            <a:spAutoFit/>
+          </a:bodyPr>
+          <a:lstStyle/>
+          <a:p>
+            <a:pPr algn="l">
+              <a:lnSpc>
+                <a:spcPct val="135000"/>
+              </a:lnSpc>
+              <a:spcBef>
+                <a:spcPts val="0"/>
+              </a:spcBef>
+            </a:pPr>
+            <a:r>
+              <a:rPr sz="1200" b="0">
+                <a:solidFill>
+                  <a:srgbClr val="93A4B5"/>
+                </a:solidFill>
+                <a:latin typeface="맑은 고딕"/>
+                <a:ea typeface="맑은 고딕"/>
+                <a:cs typeface="맑은 고딕"/>
+              </a:rPr>
+              <a:t>MCP 연결 실패가 UI에 잘 안 뜬다. 로그는 stderr로 직접 확인.</a:t>
+            </a:r>
+          </a:p>
+        </p:txBody>
+      </p:sp>
+      <p:sp>
+        <p:nvSpPr>
+          <p:cNvPr id="45" name="TextBox 44"/>
+          <p:cNvSpPr txBox="1"/>
+          <p:nvPr/>
+        </p:nvSpPr>
+        <p:spPr>
+          <a:xfrm>
+            <a:off x="685800" y="6053328"/>
             <a:ext cx="10789920" cy="320040"/>
           </a:xfrm>
           <a:prstGeom prst="rect">
@@ -12493,7 +12902,7 @@
                 <a:ea typeface="맑은 고딕"/>
                 <a:cs typeface="맑은 고딕"/>
               </a:rPr>
-              <a:t>본편(22장) · 보너스(10장) · 후속(15장) — 각각 독립 발표 가능합니다.</a:t>
+              <a:t>python3 agent_setup/test_mcp.py — 서버를 실제 프로세스로 띄워 프로토콜 왕복까지 검사합니다 (61/61 PASS).</a:t>
             </a:r>
           </a:p>
         </p:txBody>
@@ -12640,7 +13049,7 @@
                 <a:ea typeface="맑은 고딕"/>
                 <a:cs typeface="맑은 고딕"/>
               </a:rPr>
-              <a:t>FOLLOW-UP</a:t>
+              <a:t>FOLLOW-UP · 도입 순서</a:t>
             </a:r>
           </a:p>
         </p:txBody>
@@ -12681,7 +13090,7 @@
                 <a:ea typeface="맑은 고딕"/>
                 <a:cs typeface="맑은 고딕"/>
               </a:rPr>
-              <a:t>Q &amp; A</a:t>
+              <a:t>내일부터 뭘 켜나</a:t>
             </a:r>
           </a:p>
         </p:txBody>
@@ -12779,6 +13188,3199 @@
         </p:nvSpPr>
         <p:spPr>
           <a:xfrm>
+            <a:off x="685800" y="1737360"/>
+            <a:ext cx="10881360" cy="365760"/>
+          </a:xfrm>
+          <a:prstGeom prst="rect">
+            <a:avLst/>
+          </a:prstGeom>
+          <a:noFill/>
+        </p:spPr>
+        <p:txBody>
+          <a:bodyPr wrap="square" lIns="0" rIns="0" tIns="0" bIns="0" anchor="t">
+            <a:spAutoFit/>
+          </a:bodyPr>
+          <a:lstStyle/>
+          <a:p>
+            <a:pPr algn="l">
+              <a:lnSpc>
+                <a:spcPct val="115000"/>
+              </a:lnSpc>
+            </a:pPr>
+            <a:r>
+              <a:rPr sz="1450" b="0">
+                <a:solidFill>
+                  <a:srgbClr val="93A4B5"/>
+                </a:solidFill>
+                <a:latin typeface="맑은 고딕"/>
+                <a:ea typeface="맑은 고딕"/>
+                <a:cs typeface="맑은 고딕"/>
+              </a:rPr>
+              <a:t>전부 한 번에 켜지 않는다. 위험이 낮고 효과가 즉시 보이는 것부터.</a:t>
+            </a:r>
+          </a:p>
+        </p:txBody>
+      </p:sp>
+      <p:sp>
+        <p:nvSpPr>
+          <p:cNvPr id="9" name="Rectangle 8"/>
+          <p:cNvSpPr/>
+          <p:nvPr/>
+        </p:nvSpPr>
+        <p:spPr>
+          <a:xfrm>
+            <a:off x="685800" y="2286000"/>
+            <a:ext cx="10835640" cy="384048"/>
+          </a:xfrm>
+          <a:prstGeom prst="rect">
+            <a:avLst/>
+          </a:prstGeom>
+          <a:solidFill>
+            <a:srgbClr val="18222E"/>
+          </a:solidFill>
+          <a:ln>
+            <a:noFill/>
+          </a:ln>
+          <a:effectLst/>
+        </p:spPr>
+        <p:style>
+          <a:lnRef idx="1">
+            <a:schemeClr val="accent1"/>
+          </a:lnRef>
+          <a:fillRef idx="3">
+            <a:schemeClr val="accent1"/>
+          </a:fillRef>
+          <a:effectRef idx="2">
+            <a:schemeClr val="accent1"/>
+          </a:effectRef>
+          <a:fontRef idx="minor">
+            <a:schemeClr val="lt1"/>
+          </a:fontRef>
+        </p:style>
+        <p:txBody>
+          <a:bodyPr rtlCol="0" anchor="ctr"/>
+          <a:lstStyle/>
+          <a:p>
+            <a:pPr algn="ctr"/>
+          </a:p>
+        </p:txBody>
+      </p:sp>
+      <p:sp>
+        <p:nvSpPr>
+          <p:cNvPr id="10" name="TextBox 9"/>
+          <p:cNvSpPr txBox="1"/>
+          <p:nvPr/>
+        </p:nvSpPr>
+        <p:spPr>
+          <a:xfrm>
+            <a:off x="813816" y="2368296"/>
+            <a:ext cx="868680" cy="384048"/>
+          </a:xfrm>
+          <a:prstGeom prst="rect">
+            <a:avLst/>
+          </a:prstGeom>
+          <a:noFill/>
+        </p:spPr>
+        <p:txBody>
+          <a:bodyPr wrap="square" lIns="0" rIns="0" tIns="0" bIns="0" anchor="t">
+            <a:spAutoFit/>
+          </a:bodyPr>
+          <a:lstStyle/>
+          <a:p>
+            <a:pPr algn="l">
+              <a:lnSpc>
+                <a:spcPct val="115000"/>
+              </a:lnSpc>
+            </a:pPr>
+            <a:r>
+              <a:rPr sz="1300" b="1">
+                <a:solidFill>
+                  <a:srgbClr val="36D399"/>
+                </a:solidFill>
+                <a:latin typeface="맑은 고딕"/>
+                <a:ea typeface="맑은 고딕"/>
+                <a:cs typeface="맑은 고딕"/>
+              </a:rPr>
+              <a:t>시점</a:t>
+            </a:r>
+          </a:p>
+        </p:txBody>
+      </p:sp>
+      <p:sp>
+        <p:nvSpPr>
+          <p:cNvPr id="11" name="TextBox 10"/>
+          <p:cNvSpPr txBox="1"/>
+          <p:nvPr/>
+        </p:nvSpPr>
+        <p:spPr>
+          <a:xfrm>
+            <a:off x="1865376" y="2368296"/>
+            <a:ext cx="2194560" cy="384048"/>
+          </a:xfrm>
+          <a:prstGeom prst="rect">
+            <a:avLst/>
+          </a:prstGeom>
+          <a:noFill/>
+        </p:spPr>
+        <p:txBody>
+          <a:bodyPr wrap="square" lIns="0" rIns="0" tIns="0" bIns="0" anchor="t">
+            <a:spAutoFit/>
+          </a:bodyPr>
+          <a:lstStyle/>
+          <a:p>
+            <a:pPr algn="l">
+              <a:lnSpc>
+                <a:spcPct val="115000"/>
+              </a:lnSpc>
+            </a:pPr>
+            <a:r>
+              <a:rPr sz="1300" b="1">
+                <a:solidFill>
+                  <a:srgbClr val="36D399"/>
+                </a:solidFill>
+                <a:latin typeface="맑은 고딕"/>
+                <a:ea typeface="맑은 고딕"/>
+                <a:cs typeface="맑은 고딕"/>
+              </a:rPr>
+              <a:t>무엇을</a:t>
+            </a:r>
+          </a:p>
+        </p:txBody>
+      </p:sp>
+      <p:sp>
+        <p:nvSpPr>
+          <p:cNvPr id="12" name="TextBox 11"/>
+          <p:cNvSpPr txBox="1"/>
+          <p:nvPr/>
+        </p:nvSpPr>
+        <p:spPr>
+          <a:xfrm>
+            <a:off x="4242816" y="2368296"/>
+            <a:ext cx="3017520" cy="384048"/>
+          </a:xfrm>
+          <a:prstGeom prst="rect">
+            <a:avLst/>
+          </a:prstGeom>
+          <a:noFill/>
+        </p:spPr>
+        <p:txBody>
+          <a:bodyPr wrap="square" lIns="0" rIns="0" tIns="0" bIns="0" anchor="t">
+            <a:spAutoFit/>
+          </a:bodyPr>
+          <a:lstStyle/>
+          <a:p>
+            <a:pPr algn="l">
+              <a:lnSpc>
+                <a:spcPct val="115000"/>
+              </a:lnSpc>
+            </a:pPr>
+            <a:r>
+              <a:rPr sz="1300" b="1">
+                <a:solidFill>
+                  <a:srgbClr val="36D399"/>
+                </a:solidFill>
+                <a:latin typeface="맑은 고딕"/>
+                <a:ea typeface="맑은 고딕"/>
+                <a:cs typeface="맑은 고딕"/>
+              </a:rPr>
+              <a:t>어떻게</a:t>
+            </a:r>
+          </a:p>
+        </p:txBody>
+      </p:sp>
+      <p:sp>
+        <p:nvSpPr>
+          <p:cNvPr id="13" name="TextBox 12"/>
+          <p:cNvSpPr txBox="1"/>
+          <p:nvPr/>
+        </p:nvSpPr>
+        <p:spPr>
+          <a:xfrm>
+            <a:off x="7443216" y="2368296"/>
+            <a:ext cx="2286000" cy="384048"/>
+          </a:xfrm>
+          <a:prstGeom prst="rect">
+            <a:avLst/>
+          </a:prstGeom>
+          <a:noFill/>
+        </p:spPr>
+        <p:txBody>
+          <a:bodyPr wrap="square" lIns="0" rIns="0" tIns="0" bIns="0" anchor="t">
+            <a:spAutoFit/>
+          </a:bodyPr>
+          <a:lstStyle/>
+          <a:p>
+            <a:pPr algn="l">
+              <a:lnSpc>
+                <a:spcPct val="115000"/>
+              </a:lnSpc>
+            </a:pPr>
+            <a:r>
+              <a:rPr sz="1300" b="1">
+                <a:solidFill>
+                  <a:srgbClr val="36D399"/>
+                </a:solidFill>
+                <a:latin typeface="맑은 고딕"/>
+                <a:ea typeface="맑은 고딕"/>
+                <a:cs typeface="맑은 고딕"/>
+              </a:rPr>
+              <a:t>기대 효과</a:t>
+            </a:r>
+          </a:p>
+        </p:txBody>
+      </p:sp>
+      <p:sp>
+        <p:nvSpPr>
+          <p:cNvPr id="14" name="TextBox 13"/>
+          <p:cNvSpPr txBox="1"/>
+          <p:nvPr/>
+        </p:nvSpPr>
+        <p:spPr>
+          <a:xfrm>
+            <a:off x="9912096" y="2368296"/>
+            <a:ext cx="1554480" cy="384048"/>
+          </a:xfrm>
+          <a:prstGeom prst="rect">
+            <a:avLst/>
+          </a:prstGeom>
+          <a:noFill/>
+        </p:spPr>
+        <p:txBody>
+          <a:bodyPr wrap="square" lIns="0" rIns="0" tIns="0" bIns="0" anchor="t">
+            <a:spAutoFit/>
+          </a:bodyPr>
+          <a:lstStyle/>
+          <a:p>
+            <a:pPr algn="l">
+              <a:lnSpc>
+                <a:spcPct val="115000"/>
+              </a:lnSpc>
+            </a:pPr>
+            <a:r>
+              <a:rPr sz="1300" b="1">
+                <a:solidFill>
+                  <a:srgbClr val="36D399"/>
+                </a:solidFill>
+                <a:latin typeface="맑은 고딕"/>
+                <a:ea typeface="맑은 고딕"/>
+                <a:cs typeface="맑은 고딕"/>
+              </a:rPr>
+              <a:t>주의</a:t>
+            </a:r>
+          </a:p>
+        </p:txBody>
+      </p:sp>
+      <p:sp>
+        <p:nvSpPr>
+          <p:cNvPr id="15" name="Rectangle 14"/>
+          <p:cNvSpPr/>
+          <p:nvPr/>
+        </p:nvSpPr>
+        <p:spPr>
+          <a:xfrm>
+            <a:off x="685800" y="2670048"/>
+            <a:ext cx="10835640" cy="384048"/>
+          </a:xfrm>
+          <a:prstGeom prst="rect">
+            <a:avLst/>
+          </a:prstGeom>
+          <a:solidFill>
+            <a:srgbClr val="111A24"/>
+          </a:solidFill>
+          <a:ln>
+            <a:noFill/>
+          </a:ln>
+          <a:effectLst/>
+        </p:spPr>
+        <p:style>
+          <a:lnRef idx="1">
+            <a:schemeClr val="accent1"/>
+          </a:lnRef>
+          <a:fillRef idx="3">
+            <a:schemeClr val="accent1"/>
+          </a:fillRef>
+          <a:effectRef idx="2">
+            <a:schemeClr val="accent1"/>
+          </a:effectRef>
+          <a:fontRef idx="minor">
+            <a:schemeClr val="lt1"/>
+          </a:fontRef>
+        </p:style>
+        <p:txBody>
+          <a:bodyPr rtlCol="0" anchor="ctr"/>
+          <a:lstStyle/>
+          <a:p>
+            <a:pPr algn="ctr"/>
+          </a:p>
+        </p:txBody>
+      </p:sp>
+      <p:sp>
+        <p:nvSpPr>
+          <p:cNvPr id="16" name="TextBox 15"/>
+          <p:cNvSpPr txBox="1"/>
+          <p:nvPr/>
+        </p:nvSpPr>
+        <p:spPr>
+          <a:xfrm>
+            <a:off x="813816" y="2752344"/>
+            <a:ext cx="868680" cy="384048"/>
+          </a:xfrm>
+          <a:prstGeom prst="rect">
+            <a:avLst/>
+          </a:prstGeom>
+          <a:noFill/>
+        </p:spPr>
+        <p:txBody>
+          <a:bodyPr wrap="square" lIns="0" rIns="0" tIns="0" bIns="0" anchor="t">
+            <a:spAutoFit/>
+          </a:bodyPr>
+          <a:lstStyle/>
+          <a:p>
+            <a:pPr algn="l">
+              <a:lnSpc>
+                <a:spcPct val="115000"/>
+              </a:lnSpc>
+            </a:pPr>
+            <a:r>
+              <a:rPr sz="1250" b="0">
+                <a:solidFill>
+                  <a:srgbClr val="ECF1F6"/>
+                </a:solidFill>
+                <a:latin typeface="맑은 고딕"/>
+                <a:ea typeface="맑은 고딕"/>
+                <a:cs typeface="맑은 고딕"/>
+              </a:rPr>
+              <a:t>1일차</a:t>
+            </a:r>
+          </a:p>
+        </p:txBody>
+      </p:sp>
+      <p:sp>
+        <p:nvSpPr>
+          <p:cNvPr id="17" name="TextBox 16"/>
+          <p:cNvSpPr txBox="1"/>
+          <p:nvPr/>
+        </p:nvSpPr>
+        <p:spPr>
+          <a:xfrm>
+            <a:off x="1865376" y="2752344"/>
+            <a:ext cx="2194560" cy="384048"/>
+          </a:xfrm>
+          <a:prstGeom prst="rect">
+            <a:avLst/>
+          </a:prstGeom>
+          <a:noFill/>
+        </p:spPr>
+        <p:txBody>
+          <a:bodyPr wrap="square" lIns="0" rIns="0" tIns="0" bIns="0" anchor="t">
+            <a:spAutoFit/>
+          </a:bodyPr>
+          <a:lstStyle/>
+          <a:p>
+            <a:pPr algn="l">
+              <a:lnSpc>
+                <a:spcPct val="115000"/>
+              </a:lnSpc>
+            </a:pPr>
+            <a:r>
+              <a:rPr sz="1250" b="0">
+                <a:solidFill>
+                  <a:srgbClr val="ECF1F6"/>
+                </a:solidFill>
+                <a:latin typeface="맑은 고딕"/>
+                <a:ea typeface="맑은 고딕"/>
+                <a:cs typeface="맑은 고딕"/>
+              </a:rPr>
+              <a:t>설명 3줄 상한</a:t>
+            </a:r>
+          </a:p>
+        </p:txBody>
+      </p:sp>
+      <p:sp>
+        <p:nvSpPr>
+          <p:cNvPr id="18" name="TextBox 17"/>
+          <p:cNvSpPr txBox="1"/>
+          <p:nvPr/>
+        </p:nvSpPr>
+        <p:spPr>
+          <a:xfrm>
+            <a:off x="4242816" y="2752344"/>
+            <a:ext cx="3017520" cy="384048"/>
+          </a:xfrm>
+          <a:prstGeom prst="rect">
+            <a:avLst/>
+          </a:prstGeom>
+          <a:noFill/>
+        </p:spPr>
+        <p:txBody>
+          <a:bodyPr wrap="square" lIns="0" rIns="0" tIns="0" bIns="0" anchor="t">
+            <a:spAutoFit/>
+          </a:bodyPr>
+          <a:lstStyle/>
+          <a:p>
+            <a:pPr algn="l">
+              <a:lnSpc>
+                <a:spcPct val="115000"/>
+              </a:lnSpc>
+            </a:pPr>
+            <a:r>
+              <a:rPr sz="1250" b="0">
+                <a:solidFill>
+                  <a:srgbClr val="ECF1F6"/>
+                </a:solidFill>
+                <a:latin typeface="맑은 고딕"/>
+                <a:ea typeface="맑은 고딕"/>
+                <a:cs typeface="맑은 고딕"/>
+              </a:rPr>
+              <a:t>프롬프트 + 후처리 컷</a:t>
+            </a:r>
+          </a:p>
+        </p:txBody>
+      </p:sp>
+      <p:sp>
+        <p:nvSpPr>
+          <p:cNvPr id="19" name="TextBox 18"/>
+          <p:cNvSpPr txBox="1"/>
+          <p:nvPr/>
+        </p:nvSpPr>
+        <p:spPr>
+          <a:xfrm>
+            <a:off x="7443216" y="2752344"/>
+            <a:ext cx="2286000" cy="384048"/>
+          </a:xfrm>
+          <a:prstGeom prst="rect">
+            <a:avLst/>
+          </a:prstGeom>
+          <a:noFill/>
+        </p:spPr>
+        <p:txBody>
+          <a:bodyPr wrap="square" lIns="0" rIns="0" tIns="0" bIns="0" anchor="t">
+            <a:spAutoFit/>
+          </a:bodyPr>
+          <a:lstStyle/>
+          <a:p>
+            <a:pPr algn="l">
+              <a:lnSpc>
+                <a:spcPct val="115000"/>
+              </a:lnSpc>
+            </a:pPr>
+            <a:r>
+              <a:rPr sz="1250" b="1">
+                <a:solidFill>
+                  <a:srgbClr val="36D399"/>
+                </a:solidFill>
+                <a:latin typeface="맑은 고딕"/>
+                <a:ea typeface="맑은 고딕"/>
+                <a:cs typeface="맑은 고딕"/>
+              </a:rPr>
+              <a:t>즉시 −40~60% 출력</a:t>
+            </a:r>
+          </a:p>
+        </p:txBody>
+      </p:sp>
+      <p:sp>
+        <p:nvSpPr>
+          <p:cNvPr id="20" name="TextBox 19"/>
+          <p:cNvSpPr txBox="1"/>
+          <p:nvPr/>
+        </p:nvSpPr>
+        <p:spPr>
+          <a:xfrm>
+            <a:off x="9912096" y="2752344"/>
+            <a:ext cx="1554480" cy="384048"/>
+          </a:xfrm>
+          <a:prstGeom prst="rect">
+            <a:avLst/>
+          </a:prstGeom>
+          <a:noFill/>
+        </p:spPr>
+        <p:txBody>
+          <a:bodyPr wrap="square" lIns="0" rIns="0" tIns="0" bIns="0" anchor="t">
+            <a:spAutoFit/>
+          </a:bodyPr>
+          <a:lstStyle/>
+          <a:p>
+            <a:pPr algn="l">
+              <a:lnSpc>
+                <a:spcPct val="115000"/>
+              </a:lnSpc>
+            </a:pPr>
+            <a:r>
+              <a:rPr sz="1250" b="0">
+                <a:solidFill>
+                  <a:srgbClr val="ECF1F6"/>
+                </a:solidFill>
+                <a:latin typeface="맑은 고딕"/>
+                <a:ea typeface="맑은 고딕"/>
+                <a:cs typeface="맑은 고딕"/>
+              </a:rPr>
+              <a:t>없음</a:t>
+            </a:r>
+          </a:p>
+        </p:txBody>
+      </p:sp>
+      <p:sp>
+        <p:nvSpPr>
+          <p:cNvPr id="21" name="TextBox 20"/>
+          <p:cNvSpPr txBox="1"/>
+          <p:nvPr/>
+        </p:nvSpPr>
+        <p:spPr>
+          <a:xfrm>
+            <a:off x="813816" y="3136391"/>
+            <a:ext cx="868680" cy="384048"/>
+          </a:xfrm>
+          <a:prstGeom prst="rect">
+            <a:avLst/>
+          </a:prstGeom>
+          <a:noFill/>
+        </p:spPr>
+        <p:txBody>
+          <a:bodyPr wrap="square" lIns="0" rIns="0" tIns="0" bIns="0" anchor="t">
+            <a:spAutoFit/>
+          </a:bodyPr>
+          <a:lstStyle/>
+          <a:p>
+            <a:pPr algn="l">
+              <a:lnSpc>
+                <a:spcPct val="115000"/>
+              </a:lnSpc>
+            </a:pPr>
+            <a:r>
+              <a:rPr sz="1250" b="0">
+                <a:solidFill>
+                  <a:srgbClr val="ECF1F6"/>
+                </a:solidFill>
+                <a:latin typeface="맑은 고딕"/>
+                <a:ea typeface="맑은 고딕"/>
+                <a:cs typeface="맑은 고딕"/>
+              </a:rPr>
+              <a:t>1주차</a:t>
+            </a:r>
+          </a:p>
+        </p:txBody>
+      </p:sp>
+      <p:sp>
+        <p:nvSpPr>
+          <p:cNvPr id="22" name="TextBox 21"/>
+          <p:cNvSpPr txBox="1"/>
+          <p:nvPr/>
+        </p:nvSpPr>
+        <p:spPr>
+          <a:xfrm>
+            <a:off x="1865376" y="3136391"/>
+            <a:ext cx="2194560" cy="384048"/>
+          </a:xfrm>
+          <a:prstGeom prst="rect">
+            <a:avLst/>
+          </a:prstGeom>
+          <a:noFill/>
+        </p:spPr>
+        <p:txBody>
+          <a:bodyPr wrap="square" lIns="0" rIns="0" tIns="0" bIns="0" anchor="t">
+            <a:spAutoFit/>
+          </a:bodyPr>
+          <a:lstStyle/>
+          <a:p>
+            <a:pPr algn="l">
+              <a:lnSpc>
+                <a:spcPct val="115000"/>
+              </a:lnSpc>
+            </a:pPr>
+            <a:r>
+              <a:rPr sz="1250" b="0">
+                <a:solidFill>
+                  <a:srgbClr val="ECF1F6"/>
+                </a:solidFill>
+                <a:latin typeface="맑은 고딕"/>
+                <a:ea typeface="맑은 고딕"/>
+                <a:cs typeface="맑은 고딕"/>
+              </a:rPr>
+              <a:t>규칙 기반 라우팅</a:t>
+            </a:r>
+          </a:p>
+        </p:txBody>
+      </p:sp>
+      <p:sp>
+        <p:nvSpPr>
+          <p:cNvPr id="23" name="TextBox 22"/>
+          <p:cNvSpPr txBox="1"/>
+          <p:nvPr/>
+        </p:nvSpPr>
+        <p:spPr>
+          <a:xfrm>
+            <a:off x="4242816" y="3136391"/>
+            <a:ext cx="3017520" cy="384048"/>
+          </a:xfrm>
+          <a:prstGeom prst="rect">
+            <a:avLst/>
+          </a:prstGeom>
+          <a:noFill/>
+        </p:spPr>
+        <p:txBody>
+          <a:bodyPr wrap="square" lIns="0" rIns="0" tIns="0" bIns="0" anchor="t">
+            <a:spAutoFit/>
+          </a:bodyPr>
+          <a:lstStyle/>
+          <a:p>
+            <a:pPr algn="l">
+              <a:lnSpc>
+                <a:spcPct val="115000"/>
+              </a:lnSpc>
+            </a:pPr>
+            <a:r>
+              <a:rPr sz="1250" b="0">
+                <a:solidFill>
+                  <a:srgbClr val="ECF1F6"/>
+                </a:solidFill>
+                <a:latin typeface="맑은 고딕"/>
+                <a:ea typeface="맑은 고딕"/>
+                <a:cs typeface="맑은 고딕"/>
+              </a:rPr>
+              <a:t>route() 붙이고 로그만 남김</a:t>
+            </a:r>
+          </a:p>
+        </p:txBody>
+      </p:sp>
+      <p:sp>
+        <p:nvSpPr>
+          <p:cNvPr id="24" name="TextBox 23"/>
+          <p:cNvSpPr txBox="1"/>
+          <p:nvPr/>
+        </p:nvSpPr>
+        <p:spPr>
+          <a:xfrm>
+            <a:off x="7443216" y="3136391"/>
+            <a:ext cx="2286000" cy="384048"/>
+          </a:xfrm>
+          <a:prstGeom prst="rect">
+            <a:avLst/>
+          </a:prstGeom>
+          <a:noFill/>
+        </p:spPr>
+        <p:txBody>
+          <a:bodyPr wrap="square" lIns="0" rIns="0" tIns="0" bIns="0" anchor="t">
+            <a:spAutoFit/>
+          </a:bodyPr>
+          <a:lstStyle/>
+          <a:p>
+            <a:pPr algn="l">
+              <a:lnSpc>
+                <a:spcPct val="115000"/>
+              </a:lnSpc>
+            </a:pPr>
+            <a:r>
+              <a:rPr sz="1250" b="1">
+                <a:solidFill>
+                  <a:srgbClr val="5A9CFF"/>
+                </a:solidFill>
+                <a:latin typeface="맑은 고딕"/>
+                <a:ea typeface="맑은 고딕"/>
+                <a:cs typeface="맑은 고딕"/>
+              </a:rPr>
+              <a:t>측정 먼저</a:t>
+            </a:r>
+          </a:p>
+        </p:txBody>
+      </p:sp>
+      <p:sp>
+        <p:nvSpPr>
+          <p:cNvPr id="25" name="TextBox 24"/>
+          <p:cNvSpPr txBox="1"/>
+          <p:nvPr/>
+        </p:nvSpPr>
+        <p:spPr>
+          <a:xfrm>
+            <a:off x="9912096" y="3136391"/>
+            <a:ext cx="1554480" cy="384048"/>
+          </a:xfrm>
+          <a:prstGeom prst="rect">
+            <a:avLst/>
+          </a:prstGeom>
+          <a:noFill/>
+        </p:spPr>
+        <p:txBody>
+          <a:bodyPr wrap="square" lIns="0" rIns="0" tIns="0" bIns="0" anchor="t">
+            <a:spAutoFit/>
+          </a:bodyPr>
+          <a:lstStyle/>
+          <a:p>
+            <a:pPr algn="l">
+              <a:lnSpc>
+                <a:spcPct val="115000"/>
+              </a:lnSpc>
+            </a:pPr>
+            <a:r>
+              <a:rPr sz="1250" b="0">
+                <a:solidFill>
+                  <a:srgbClr val="ECF1F6"/>
+                </a:solidFill>
+                <a:latin typeface="맑은 고딕"/>
+                <a:ea typeface="맑은 고딕"/>
+                <a:cs typeface="맑은 고딕"/>
+              </a:rPr>
+              <a:t>오분류</a:t>
+            </a:r>
+          </a:p>
+        </p:txBody>
+      </p:sp>
+      <p:sp>
+        <p:nvSpPr>
+          <p:cNvPr id="26" name="Rectangle 25"/>
+          <p:cNvSpPr/>
+          <p:nvPr/>
+        </p:nvSpPr>
+        <p:spPr>
+          <a:xfrm>
+            <a:off x="685800" y="3438144"/>
+            <a:ext cx="10835640" cy="384048"/>
+          </a:xfrm>
+          <a:prstGeom prst="rect">
+            <a:avLst/>
+          </a:prstGeom>
+          <a:solidFill>
+            <a:srgbClr val="111A24"/>
+          </a:solidFill>
+          <a:ln>
+            <a:noFill/>
+          </a:ln>
+          <a:effectLst/>
+        </p:spPr>
+        <p:style>
+          <a:lnRef idx="1">
+            <a:schemeClr val="accent1"/>
+          </a:lnRef>
+          <a:fillRef idx="3">
+            <a:schemeClr val="accent1"/>
+          </a:fillRef>
+          <a:effectRef idx="2">
+            <a:schemeClr val="accent1"/>
+          </a:effectRef>
+          <a:fontRef idx="minor">
+            <a:schemeClr val="lt1"/>
+          </a:fontRef>
+        </p:style>
+        <p:txBody>
+          <a:bodyPr rtlCol="0" anchor="ctr"/>
+          <a:lstStyle/>
+          <a:p>
+            <a:pPr algn="ctr"/>
+          </a:p>
+        </p:txBody>
+      </p:sp>
+      <p:sp>
+        <p:nvSpPr>
+          <p:cNvPr id="27" name="TextBox 26"/>
+          <p:cNvSpPr txBox="1"/>
+          <p:nvPr/>
+        </p:nvSpPr>
+        <p:spPr>
+          <a:xfrm>
+            <a:off x="813816" y="3520439"/>
+            <a:ext cx="868680" cy="384048"/>
+          </a:xfrm>
+          <a:prstGeom prst="rect">
+            <a:avLst/>
+          </a:prstGeom>
+          <a:noFill/>
+        </p:spPr>
+        <p:txBody>
+          <a:bodyPr wrap="square" lIns="0" rIns="0" tIns="0" bIns="0" anchor="t">
+            <a:spAutoFit/>
+          </a:bodyPr>
+          <a:lstStyle/>
+          <a:p>
+            <a:pPr algn="l">
+              <a:lnSpc>
+                <a:spcPct val="115000"/>
+              </a:lnSpc>
+            </a:pPr>
+            <a:r>
+              <a:rPr sz="1250" b="0">
+                <a:solidFill>
+                  <a:srgbClr val="ECF1F6"/>
+                </a:solidFill>
+                <a:latin typeface="맑은 고딕"/>
+                <a:ea typeface="맑은 고딕"/>
+                <a:cs typeface="맑은 고딕"/>
+              </a:rPr>
+              <a:t>2주차</a:t>
+            </a:r>
+          </a:p>
+        </p:txBody>
+      </p:sp>
+      <p:sp>
+        <p:nvSpPr>
+          <p:cNvPr id="28" name="TextBox 27"/>
+          <p:cNvSpPr txBox="1"/>
+          <p:nvPr/>
+        </p:nvSpPr>
+        <p:spPr>
+          <a:xfrm>
+            <a:off x="1865376" y="3520439"/>
+            <a:ext cx="2194560" cy="384048"/>
+          </a:xfrm>
+          <a:prstGeom prst="rect">
+            <a:avLst/>
+          </a:prstGeom>
+          <a:noFill/>
+        </p:spPr>
+        <p:txBody>
+          <a:bodyPr wrap="square" lIns="0" rIns="0" tIns="0" bIns="0" anchor="t">
+            <a:spAutoFit/>
+          </a:bodyPr>
+          <a:lstStyle/>
+          <a:p>
+            <a:pPr algn="l">
+              <a:lnSpc>
+                <a:spcPct val="115000"/>
+              </a:lnSpc>
+            </a:pPr>
+            <a:r>
+              <a:rPr sz="1250" b="0">
+                <a:solidFill>
+                  <a:srgbClr val="ECF1F6"/>
+                </a:solidFill>
+                <a:latin typeface="맑은 고딕"/>
+                <a:ea typeface="맑은 고딕"/>
+                <a:cs typeface="맑은 고딕"/>
+              </a:rPr>
+              <a:t>라우팅 실제 적용</a:t>
+            </a:r>
+          </a:p>
+        </p:txBody>
+      </p:sp>
+      <p:sp>
+        <p:nvSpPr>
+          <p:cNvPr id="29" name="TextBox 28"/>
+          <p:cNvSpPr txBox="1"/>
+          <p:nvPr/>
+        </p:nvSpPr>
+        <p:spPr>
+          <a:xfrm>
+            <a:off x="4242816" y="3520439"/>
+            <a:ext cx="3017520" cy="384048"/>
+          </a:xfrm>
+          <a:prstGeom prst="rect">
+            <a:avLst/>
+          </a:prstGeom>
+          <a:noFill/>
+        </p:spPr>
+        <p:txBody>
+          <a:bodyPr wrap="square" lIns="0" rIns="0" tIns="0" bIns="0" anchor="t">
+            <a:spAutoFit/>
+          </a:bodyPr>
+          <a:lstStyle/>
+          <a:p>
+            <a:pPr algn="l">
+              <a:lnSpc>
+                <a:spcPct val="115000"/>
+              </a:lnSpc>
+            </a:pPr>
+            <a:r>
+              <a:rPr sz="1250" b="0">
+                <a:solidFill>
+                  <a:srgbClr val="ECF1F6"/>
+                </a:solidFill>
+                <a:latin typeface="맑은 고딕"/>
+                <a:ea typeface="맑은 고딕"/>
+                <a:cs typeface="맑은 고딕"/>
+              </a:rPr>
+              <a:t>툴·설명부터 소형으로</a:t>
+            </a:r>
+          </a:p>
+        </p:txBody>
+      </p:sp>
+      <p:sp>
+        <p:nvSpPr>
+          <p:cNvPr id="30" name="TextBox 29"/>
+          <p:cNvSpPr txBox="1"/>
+          <p:nvPr/>
+        </p:nvSpPr>
+        <p:spPr>
+          <a:xfrm>
+            <a:off x="7443216" y="3520439"/>
+            <a:ext cx="2286000" cy="384048"/>
+          </a:xfrm>
+          <a:prstGeom prst="rect">
+            <a:avLst/>
+          </a:prstGeom>
+          <a:noFill/>
+        </p:spPr>
+        <p:txBody>
+          <a:bodyPr wrap="square" lIns="0" rIns="0" tIns="0" bIns="0" anchor="t">
+            <a:spAutoFit/>
+          </a:bodyPr>
+          <a:lstStyle/>
+          <a:p>
+            <a:pPr algn="l">
+              <a:lnSpc>
+                <a:spcPct val="115000"/>
+              </a:lnSpc>
+            </a:pPr>
+            <a:r>
+              <a:rPr sz="1250" b="1">
+                <a:solidFill>
+                  <a:srgbClr val="36D399"/>
+                </a:solidFill>
+                <a:latin typeface="맑은 고딕"/>
+                <a:ea typeface="맑은 고딕"/>
+                <a:cs typeface="맑은 고딕"/>
+              </a:rPr>
+              <a:t>−49~84%</a:t>
+            </a:r>
+          </a:p>
+        </p:txBody>
+      </p:sp>
+      <p:sp>
+        <p:nvSpPr>
+          <p:cNvPr id="31" name="TextBox 30"/>
+          <p:cNvSpPr txBox="1"/>
+          <p:nvPr/>
+        </p:nvSpPr>
+        <p:spPr>
+          <a:xfrm>
+            <a:off x="9912096" y="3520439"/>
+            <a:ext cx="1554480" cy="384048"/>
+          </a:xfrm>
+          <a:prstGeom prst="rect">
+            <a:avLst/>
+          </a:prstGeom>
+          <a:noFill/>
+        </p:spPr>
+        <p:txBody>
+          <a:bodyPr wrap="square" lIns="0" rIns="0" tIns="0" bIns="0" anchor="t">
+            <a:spAutoFit/>
+          </a:bodyPr>
+          <a:lstStyle/>
+          <a:p>
+            <a:pPr algn="l">
+              <a:lnSpc>
+                <a:spcPct val="115000"/>
+              </a:lnSpc>
+            </a:pPr>
+            <a:r>
+              <a:rPr sz="1250" b="0">
+                <a:solidFill>
+                  <a:srgbClr val="ECF1F6"/>
+                </a:solidFill>
+                <a:latin typeface="맑은 고딕"/>
+                <a:ea typeface="맑은 고딕"/>
+                <a:cs typeface="맑은 고딕"/>
+              </a:rPr>
+              <a:t>품질 회귀</a:t>
+            </a:r>
+          </a:p>
+        </p:txBody>
+      </p:sp>
+      <p:sp>
+        <p:nvSpPr>
+          <p:cNvPr id="32" name="TextBox 31"/>
+          <p:cNvSpPr txBox="1"/>
+          <p:nvPr/>
+        </p:nvSpPr>
+        <p:spPr>
+          <a:xfrm>
+            <a:off x="813816" y="3904487"/>
+            <a:ext cx="868680" cy="384048"/>
+          </a:xfrm>
+          <a:prstGeom prst="rect">
+            <a:avLst/>
+          </a:prstGeom>
+          <a:noFill/>
+        </p:spPr>
+        <p:txBody>
+          <a:bodyPr wrap="square" lIns="0" rIns="0" tIns="0" bIns="0" anchor="t">
+            <a:spAutoFit/>
+          </a:bodyPr>
+          <a:lstStyle/>
+          <a:p>
+            <a:pPr algn="l">
+              <a:lnSpc>
+                <a:spcPct val="115000"/>
+              </a:lnSpc>
+            </a:pPr>
+            <a:r>
+              <a:rPr sz="1250" b="0">
+                <a:solidFill>
+                  <a:srgbClr val="ECF1F6"/>
+                </a:solidFill>
+                <a:latin typeface="맑은 고딕"/>
+                <a:ea typeface="맑은 고딕"/>
+                <a:cs typeface="맑은 고딕"/>
+              </a:rPr>
+              <a:t>3주차</a:t>
+            </a:r>
+          </a:p>
+        </p:txBody>
+      </p:sp>
+      <p:sp>
+        <p:nvSpPr>
+          <p:cNvPr id="33" name="TextBox 32"/>
+          <p:cNvSpPr txBox="1"/>
+          <p:nvPr/>
+        </p:nvSpPr>
+        <p:spPr>
+          <a:xfrm>
+            <a:off x="1865376" y="3904487"/>
+            <a:ext cx="2194560" cy="384048"/>
+          </a:xfrm>
+          <a:prstGeom prst="rect">
+            <a:avLst/>
+          </a:prstGeom>
+          <a:noFill/>
+        </p:spPr>
+        <p:txBody>
+          <a:bodyPr wrap="square" lIns="0" rIns="0" tIns="0" bIns="0" anchor="t">
+            <a:spAutoFit/>
+          </a:bodyPr>
+          <a:lstStyle/>
+          <a:p>
+            <a:pPr algn="l">
+              <a:lnSpc>
+                <a:spcPct val="115000"/>
+              </a:lnSpc>
+            </a:pPr>
+            <a:r>
+              <a:rPr sz="1250" b="0">
+                <a:solidFill>
+                  <a:srgbClr val="ECF1F6"/>
+                </a:solidFill>
+                <a:latin typeface="맑은 고딕"/>
+                <a:ea typeface="맑은 고딕"/>
+                <a:cs typeface="맑은 고딕"/>
+              </a:rPr>
+              <a:t>세션 리셋 자동화</a:t>
+            </a:r>
+          </a:p>
+        </p:txBody>
+      </p:sp>
+      <p:sp>
+        <p:nvSpPr>
+          <p:cNvPr id="34" name="TextBox 33"/>
+          <p:cNvSpPr txBox="1"/>
+          <p:nvPr/>
+        </p:nvSpPr>
+        <p:spPr>
+          <a:xfrm>
+            <a:off x="4242816" y="3904487"/>
+            <a:ext cx="3017520" cy="384048"/>
+          </a:xfrm>
+          <a:prstGeom prst="rect">
+            <a:avLst/>
+          </a:prstGeom>
+          <a:noFill/>
+        </p:spPr>
+        <p:txBody>
+          <a:bodyPr wrap="square" lIns="0" rIns="0" tIns="0" bIns="0" anchor="t">
+            <a:spAutoFit/>
+          </a:bodyPr>
+          <a:lstStyle/>
+          <a:p>
+            <a:pPr algn="l">
+              <a:lnSpc>
+                <a:spcPct val="115000"/>
+              </a:lnSpc>
+            </a:pPr>
+            <a:r>
+              <a:rPr sz="1250" b="0">
+                <a:solidFill>
+                  <a:srgbClr val="ECF1F6"/>
+                </a:solidFill>
+                <a:latin typeface="맑은 고딕"/>
+                <a:ea typeface="맑은 고딕"/>
+                <a:cs typeface="맑은 고딕"/>
+              </a:rPr>
+              <a:t>반복 감지 → 커밋 → 재시작</a:t>
+            </a:r>
+          </a:p>
+        </p:txBody>
+      </p:sp>
+      <p:sp>
+        <p:nvSpPr>
+          <p:cNvPr id="35" name="TextBox 34"/>
+          <p:cNvSpPr txBox="1"/>
+          <p:nvPr/>
+        </p:nvSpPr>
+        <p:spPr>
+          <a:xfrm>
+            <a:off x="7443216" y="3904487"/>
+            <a:ext cx="2286000" cy="384048"/>
+          </a:xfrm>
+          <a:prstGeom prst="rect">
+            <a:avLst/>
+          </a:prstGeom>
+          <a:noFill/>
+        </p:spPr>
+        <p:txBody>
+          <a:bodyPr wrap="square" lIns="0" rIns="0" tIns="0" bIns="0" anchor="t">
+            <a:spAutoFit/>
+          </a:bodyPr>
+          <a:lstStyle/>
+          <a:p>
+            <a:pPr algn="l">
+              <a:lnSpc>
+                <a:spcPct val="115000"/>
+              </a:lnSpc>
+            </a:pPr>
+            <a:r>
+              <a:rPr sz="1250" b="1">
+                <a:solidFill>
+                  <a:srgbClr val="36D399"/>
+                </a:solidFill>
+                <a:latin typeface="맑은 고딕"/>
+                <a:ea typeface="맑은 고딕"/>
+                <a:cs typeface="맑은 고딕"/>
+              </a:rPr>
+              <a:t>컨텍스트 단가 억제</a:t>
+            </a:r>
+          </a:p>
+        </p:txBody>
+      </p:sp>
+      <p:sp>
+        <p:nvSpPr>
+          <p:cNvPr id="36" name="TextBox 35"/>
+          <p:cNvSpPr txBox="1"/>
+          <p:nvPr/>
+        </p:nvSpPr>
+        <p:spPr>
+          <a:xfrm>
+            <a:off x="9912096" y="3904487"/>
+            <a:ext cx="1554480" cy="384048"/>
+          </a:xfrm>
+          <a:prstGeom prst="rect">
+            <a:avLst/>
+          </a:prstGeom>
+          <a:noFill/>
+        </p:spPr>
+        <p:txBody>
+          <a:bodyPr wrap="square" lIns="0" rIns="0" tIns="0" bIns="0" anchor="t">
+            <a:spAutoFit/>
+          </a:bodyPr>
+          <a:lstStyle/>
+          <a:p>
+            <a:pPr algn="l">
+              <a:lnSpc>
+                <a:spcPct val="115000"/>
+              </a:lnSpc>
+            </a:pPr>
+            <a:r>
+              <a:rPr sz="1250" b="0">
+                <a:solidFill>
+                  <a:srgbClr val="ECF1F6"/>
+                </a:solidFill>
+                <a:latin typeface="맑은 고딕"/>
+                <a:ea typeface="맑은 고딕"/>
+                <a:cs typeface="맑은 고딕"/>
+              </a:rPr>
+              <a:t>맥락 유실</a:t>
+            </a:r>
+          </a:p>
+        </p:txBody>
+      </p:sp>
+      <p:sp>
+        <p:nvSpPr>
+          <p:cNvPr id="37" name="Rectangle 36"/>
+          <p:cNvSpPr/>
+          <p:nvPr/>
+        </p:nvSpPr>
+        <p:spPr>
+          <a:xfrm>
+            <a:off x="685800" y="4206240"/>
+            <a:ext cx="10835640" cy="384048"/>
+          </a:xfrm>
+          <a:prstGeom prst="rect">
+            <a:avLst/>
+          </a:prstGeom>
+          <a:solidFill>
+            <a:srgbClr val="111A24"/>
+          </a:solidFill>
+          <a:ln>
+            <a:noFill/>
+          </a:ln>
+          <a:effectLst/>
+        </p:spPr>
+        <p:style>
+          <a:lnRef idx="1">
+            <a:schemeClr val="accent1"/>
+          </a:lnRef>
+          <a:fillRef idx="3">
+            <a:schemeClr val="accent1"/>
+          </a:fillRef>
+          <a:effectRef idx="2">
+            <a:schemeClr val="accent1"/>
+          </a:effectRef>
+          <a:fontRef idx="minor">
+            <a:schemeClr val="lt1"/>
+          </a:fontRef>
+        </p:style>
+        <p:txBody>
+          <a:bodyPr rtlCol="0" anchor="ctr"/>
+          <a:lstStyle/>
+          <a:p>
+            <a:pPr algn="ctr"/>
+          </a:p>
+        </p:txBody>
+      </p:sp>
+      <p:sp>
+        <p:nvSpPr>
+          <p:cNvPr id="38" name="TextBox 37"/>
+          <p:cNvSpPr txBox="1"/>
+          <p:nvPr/>
+        </p:nvSpPr>
+        <p:spPr>
+          <a:xfrm>
+            <a:off x="813816" y="4288536"/>
+            <a:ext cx="868680" cy="384048"/>
+          </a:xfrm>
+          <a:prstGeom prst="rect">
+            <a:avLst/>
+          </a:prstGeom>
+          <a:noFill/>
+        </p:spPr>
+        <p:txBody>
+          <a:bodyPr wrap="square" lIns="0" rIns="0" tIns="0" bIns="0" anchor="t">
+            <a:spAutoFit/>
+          </a:bodyPr>
+          <a:lstStyle/>
+          <a:p>
+            <a:pPr algn="l">
+              <a:lnSpc>
+                <a:spcPct val="115000"/>
+              </a:lnSpc>
+            </a:pPr>
+            <a:r>
+              <a:rPr sz="1250" b="0">
+                <a:solidFill>
+                  <a:srgbClr val="ECF1F6"/>
+                </a:solidFill>
+                <a:latin typeface="맑은 고딕"/>
+                <a:ea typeface="맑은 고딕"/>
+                <a:cs typeface="맑은 고딕"/>
+              </a:rPr>
+              <a:t>4주차</a:t>
+            </a:r>
+          </a:p>
+        </p:txBody>
+      </p:sp>
+      <p:sp>
+        <p:nvSpPr>
+          <p:cNvPr id="39" name="TextBox 38"/>
+          <p:cNvSpPr txBox="1"/>
+          <p:nvPr/>
+        </p:nvSpPr>
+        <p:spPr>
+          <a:xfrm>
+            <a:off x="1865376" y="4288536"/>
+            <a:ext cx="2194560" cy="384048"/>
+          </a:xfrm>
+          <a:prstGeom prst="rect">
+            <a:avLst/>
+          </a:prstGeom>
+          <a:noFill/>
+        </p:spPr>
+        <p:txBody>
+          <a:bodyPr wrap="square" lIns="0" rIns="0" tIns="0" bIns="0" anchor="t">
+            <a:spAutoFit/>
+          </a:bodyPr>
+          <a:lstStyle/>
+          <a:p>
+            <a:pPr algn="l">
+              <a:lnSpc>
+                <a:spcPct val="115000"/>
+              </a:lnSpc>
+            </a:pPr>
+            <a:r>
+              <a:rPr sz="1250" b="0">
+                <a:solidFill>
+                  <a:srgbClr val="ECF1F6"/>
+                </a:solidFill>
+                <a:latin typeface="맑은 고딕"/>
+                <a:ea typeface="맑은 고딕"/>
+                <a:cs typeface="맑은 고딕"/>
+              </a:rPr>
+              <a:t>배치 도입</a:t>
+            </a:r>
+          </a:p>
+        </p:txBody>
+      </p:sp>
+      <p:sp>
+        <p:nvSpPr>
+          <p:cNvPr id="40" name="TextBox 39"/>
+          <p:cNvSpPr txBox="1"/>
+          <p:nvPr/>
+        </p:nvSpPr>
+        <p:spPr>
+          <a:xfrm>
+            <a:off x="4242816" y="4288536"/>
+            <a:ext cx="3017520" cy="384048"/>
+          </a:xfrm>
+          <a:prstGeom prst="rect">
+            <a:avLst/>
+          </a:prstGeom>
+          <a:noFill/>
+        </p:spPr>
+        <p:txBody>
+          <a:bodyPr wrap="square" lIns="0" rIns="0" tIns="0" bIns="0" anchor="t">
+            <a:spAutoFit/>
+          </a:bodyPr>
+          <a:lstStyle/>
+          <a:p>
+            <a:pPr algn="l">
+              <a:lnSpc>
+                <a:spcPct val="115000"/>
+              </a:lnSpc>
+            </a:pPr>
+            <a:r>
+              <a:rPr sz="1250" b="0">
+                <a:solidFill>
+                  <a:srgbClr val="ECF1F6"/>
+                </a:solidFill>
+                <a:latin typeface="맑은 고딕"/>
+                <a:ea typeface="맑은 고딕"/>
+                <a:cs typeface="맑은 고딕"/>
+              </a:rPr>
+              <a:t>마감 없는 대량 작업만</a:t>
+            </a:r>
+          </a:p>
+        </p:txBody>
+      </p:sp>
+      <p:sp>
+        <p:nvSpPr>
+          <p:cNvPr id="41" name="TextBox 40"/>
+          <p:cNvSpPr txBox="1"/>
+          <p:nvPr/>
+        </p:nvSpPr>
+        <p:spPr>
+          <a:xfrm>
+            <a:off x="7443216" y="4288536"/>
+            <a:ext cx="2286000" cy="384048"/>
+          </a:xfrm>
+          <a:prstGeom prst="rect">
+            <a:avLst/>
+          </a:prstGeom>
+          <a:noFill/>
+        </p:spPr>
+        <p:txBody>
+          <a:bodyPr wrap="square" lIns="0" rIns="0" tIns="0" bIns="0" anchor="t">
+            <a:spAutoFit/>
+          </a:bodyPr>
+          <a:lstStyle/>
+          <a:p>
+            <a:pPr algn="l">
+              <a:lnSpc>
+                <a:spcPct val="115000"/>
+              </a:lnSpc>
+            </a:pPr>
+            <a:r>
+              <a:rPr sz="1250" b="1">
+                <a:solidFill>
+                  <a:srgbClr val="36D399"/>
+                </a:solidFill>
+                <a:latin typeface="맑은 고딕"/>
+                <a:ea typeface="맑은 고딕"/>
+                <a:cs typeface="맑은 고딕"/>
+              </a:rPr>
+              <a:t>−50%</a:t>
+            </a:r>
+          </a:p>
+        </p:txBody>
+      </p:sp>
+      <p:sp>
+        <p:nvSpPr>
+          <p:cNvPr id="42" name="TextBox 41"/>
+          <p:cNvSpPr txBox="1"/>
+          <p:nvPr/>
+        </p:nvSpPr>
+        <p:spPr>
+          <a:xfrm>
+            <a:off x="9912096" y="4288536"/>
+            <a:ext cx="1554480" cy="384048"/>
+          </a:xfrm>
+          <a:prstGeom prst="rect">
+            <a:avLst/>
+          </a:prstGeom>
+          <a:noFill/>
+        </p:spPr>
+        <p:txBody>
+          <a:bodyPr wrap="square" lIns="0" rIns="0" tIns="0" bIns="0" anchor="t">
+            <a:spAutoFit/>
+          </a:bodyPr>
+          <a:lstStyle/>
+          <a:p>
+            <a:pPr algn="l">
+              <a:lnSpc>
+                <a:spcPct val="115000"/>
+              </a:lnSpc>
+            </a:pPr>
+            <a:r>
+              <a:rPr sz="1250" b="0">
+                <a:solidFill>
+                  <a:srgbClr val="ECF1F6"/>
+                </a:solidFill>
+                <a:latin typeface="맑은 고딕"/>
+                <a:ea typeface="맑은 고딕"/>
+                <a:cs typeface="맑은 고딕"/>
+              </a:rPr>
+              <a:t>expired</a:t>
+            </a:r>
+          </a:p>
+        </p:txBody>
+      </p:sp>
+      <p:sp>
+        <p:nvSpPr>
+          <p:cNvPr id="43" name="TextBox 42"/>
+          <p:cNvSpPr txBox="1"/>
+          <p:nvPr/>
+        </p:nvSpPr>
+        <p:spPr>
+          <a:xfrm>
+            <a:off x="813816" y="4672583"/>
+            <a:ext cx="868680" cy="384048"/>
+          </a:xfrm>
+          <a:prstGeom prst="rect">
+            <a:avLst/>
+          </a:prstGeom>
+          <a:noFill/>
+        </p:spPr>
+        <p:txBody>
+          <a:bodyPr wrap="square" lIns="0" rIns="0" tIns="0" bIns="0" anchor="t">
+            <a:spAutoFit/>
+          </a:bodyPr>
+          <a:lstStyle/>
+          <a:p>
+            <a:pPr algn="l">
+              <a:lnSpc>
+                <a:spcPct val="115000"/>
+              </a:lnSpc>
+            </a:pPr>
+            <a:r>
+              <a:rPr sz="1250" b="0">
+                <a:solidFill>
+                  <a:srgbClr val="ECF1F6"/>
+                </a:solidFill>
+                <a:latin typeface="맑은 고딕"/>
+                <a:ea typeface="맑은 고딕"/>
+                <a:cs typeface="맑은 고딕"/>
+              </a:rPr>
+              <a:t>보류</a:t>
+            </a:r>
+          </a:p>
+        </p:txBody>
+      </p:sp>
+      <p:sp>
+        <p:nvSpPr>
+          <p:cNvPr id="44" name="TextBox 43"/>
+          <p:cNvSpPr txBox="1"/>
+          <p:nvPr/>
+        </p:nvSpPr>
+        <p:spPr>
+          <a:xfrm>
+            <a:off x="1865376" y="4672583"/>
+            <a:ext cx="2194560" cy="384048"/>
+          </a:xfrm>
+          <a:prstGeom prst="rect">
+            <a:avLst/>
+          </a:prstGeom>
+          <a:noFill/>
+        </p:spPr>
+        <p:txBody>
+          <a:bodyPr wrap="square" lIns="0" rIns="0" tIns="0" bIns="0" anchor="t">
+            <a:spAutoFit/>
+          </a:bodyPr>
+          <a:lstStyle/>
+          <a:p>
+            <a:pPr algn="l">
+              <a:lnSpc>
+                <a:spcPct val="115000"/>
+              </a:lnSpc>
+            </a:pPr>
+            <a:r>
+              <a:rPr sz="1250" b="0">
+                <a:solidFill>
+                  <a:srgbClr val="ECF1F6"/>
+                </a:solidFill>
+                <a:latin typeface="맑은 고딕"/>
+                <a:ea typeface="맑은 고딕"/>
+                <a:cs typeface="맑은 고딕"/>
+              </a:rPr>
+              <a:t>웹 세션 자동 조작</a:t>
+            </a:r>
+          </a:p>
+        </p:txBody>
+      </p:sp>
+      <p:sp>
+        <p:nvSpPr>
+          <p:cNvPr id="45" name="TextBox 44"/>
+          <p:cNvSpPr txBox="1"/>
+          <p:nvPr/>
+        </p:nvSpPr>
+        <p:spPr>
+          <a:xfrm>
+            <a:off x="4242816" y="4672583"/>
+            <a:ext cx="3017520" cy="384048"/>
+          </a:xfrm>
+          <a:prstGeom prst="rect">
+            <a:avLst/>
+          </a:prstGeom>
+          <a:noFill/>
+        </p:spPr>
+        <p:txBody>
+          <a:bodyPr wrap="square" lIns="0" rIns="0" tIns="0" bIns="0" anchor="t">
+            <a:spAutoFit/>
+          </a:bodyPr>
+          <a:lstStyle/>
+          <a:p>
+            <a:pPr algn="l">
+              <a:lnSpc>
+                <a:spcPct val="115000"/>
+              </a:lnSpc>
+            </a:pPr>
+            <a:r>
+              <a:rPr sz="1250" b="0">
+                <a:solidFill>
+                  <a:srgbClr val="ECF1F6"/>
+                </a:solidFill>
+                <a:latin typeface="맑은 고딕"/>
+                <a:ea typeface="맑은 고딕"/>
+                <a:cs typeface="맑은 고딕"/>
+              </a:rPr>
+              <a:t>법무 확인 전까지 수동</a:t>
+            </a:r>
+          </a:p>
+        </p:txBody>
+      </p:sp>
+      <p:sp>
+        <p:nvSpPr>
+          <p:cNvPr id="46" name="TextBox 45"/>
+          <p:cNvSpPr txBox="1"/>
+          <p:nvPr/>
+        </p:nvSpPr>
+        <p:spPr>
+          <a:xfrm>
+            <a:off x="7443216" y="4672583"/>
+            <a:ext cx="2286000" cy="384048"/>
+          </a:xfrm>
+          <a:prstGeom prst="rect">
+            <a:avLst/>
+          </a:prstGeom>
+          <a:noFill/>
+        </p:spPr>
+        <p:txBody>
+          <a:bodyPr wrap="square" lIns="0" rIns="0" tIns="0" bIns="0" anchor="t">
+            <a:spAutoFit/>
+          </a:bodyPr>
+          <a:lstStyle/>
+          <a:p>
+            <a:pPr algn="l">
+              <a:lnSpc>
+                <a:spcPct val="115000"/>
+              </a:lnSpc>
+            </a:pPr>
+            <a:r>
+              <a:rPr sz="1250" b="1">
+                <a:solidFill>
+                  <a:srgbClr val="FFB04D"/>
+                </a:solidFill>
+                <a:latin typeface="맑은 고딕"/>
+                <a:ea typeface="맑은 고딕"/>
+                <a:cs typeface="맑은 고딕"/>
+              </a:rPr>
+              <a:t>종량 0원</a:t>
+            </a:r>
+          </a:p>
+        </p:txBody>
+      </p:sp>
+      <p:sp>
+        <p:nvSpPr>
+          <p:cNvPr id="47" name="TextBox 46"/>
+          <p:cNvSpPr txBox="1"/>
+          <p:nvPr/>
+        </p:nvSpPr>
+        <p:spPr>
+          <a:xfrm>
+            <a:off x="9912096" y="4672583"/>
+            <a:ext cx="1554480" cy="384048"/>
+          </a:xfrm>
+          <a:prstGeom prst="rect">
+            <a:avLst/>
+          </a:prstGeom>
+          <a:noFill/>
+        </p:spPr>
+        <p:txBody>
+          <a:bodyPr wrap="square" lIns="0" rIns="0" tIns="0" bIns="0" anchor="t">
+            <a:spAutoFit/>
+          </a:bodyPr>
+          <a:lstStyle/>
+          <a:p>
+            <a:pPr algn="l">
+              <a:lnSpc>
+                <a:spcPct val="115000"/>
+              </a:lnSpc>
+            </a:pPr>
+            <a:r>
+              <a:rPr sz="1250" b="0">
+                <a:solidFill>
+                  <a:srgbClr val="ECF1F6"/>
+                </a:solidFill>
+                <a:latin typeface="맑은 고딕"/>
+                <a:ea typeface="맑은 고딕"/>
+                <a:cs typeface="맑은 고딕"/>
+              </a:rPr>
+              <a:t>약관</a:t>
+            </a:r>
+          </a:p>
+        </p:txBody>
+      </p:sp>
+      <p:sp>
+        <p:nvSpPr>
+          <p:cNvPr id="48" name="Rounded Rectangle 47"/>
+          <p:cNvSpPr/>
+          <p:nvPr/>
+        </p:nvSpPr>
+        <p:spPr>
+          <a:xfrm>
+            <a:off x="685800" y="5212080"/>
+            <a:ext cx="10835640" cy="868680"/>
+          </a:xfrm>
+          <a:prstGeom prst="roundRect">
+            <a:avLst>
+              <a:gd name="adj" fmla="val 5000"/>
+            </a:avLst>
+          </a:prstGeom>
+          <a:solidFill>
+            <a:srgbClr val="18222E"/>
+          </a:solidFill>
+          <a:ln>
+            <a:noFill/>
+          </a:ln>
+          <a:effectLst/>
+        </p:spPr>
+        <p:style>
+          <a:lnRef idx="1">
+            <a:schemeClr val="accent1"/>
+          </a:lnRef>
+          <a:fillRef idx="3">
+            <a:schemeClr val="accent1"/>
+          </a:fillRef>
+          <a:effectRef idx="2">
+            <a:schemeClr val="accent1"/>
+          </a:effectRef>
+          <a:fontRef idx="minor">
+            <a:schemeClr val="lt1"/>
+          </a:fontRef>
+        </p:style>
+        <p:txBody>
+          <a:bodyPr rtlCol="0" anchor="ctr"/>
+          <a:lstStyle/>
+          <a:p>
+            <a:pPr algn="ctr"/>
+          </a:p>
+        </p:txBody>
+      </p:sp>
+      <p:sp>
+        <p:nvSpPr>
+          <p:cNvPr id="49" name="Rectangle 48"/>
+          <p:cNvSpPr/>
+          <p:nvPr/>
+        </p:nvSpPr>
+        <p:spPr>
+          <a:xfrm>
+            <a:off x="685800" y="5212080"/>
+            <a:ext cx="50292" cy="868680"/>
+          </a:xfrm>
+          <a:prstGeom prst="rect">
+            <a:avLst/>
+          </a:prstGeom>
+          <a:solidFill>
+            <a:srgbClr val="36D399"/>
+          </a:solidFill>
+          <a:ln>
+            <a:noFill/>
+          </a:ln>
+          <a:effectLst/>
+        </p:spPr>
+        <p:style>
+          <a:lnRef idx="1">
+            <a:schemeClr val="accent1"/>
+          </a:lnRef>
+          <a:fillRef idx="3">
+            <a:schemeClr val="accent1"/>
+          </a:fillRef>
+          <a:effectRef idx="2">
+            <a:schemeClr val="accent1"/>
+          </a:effectRef>
+          <a:fontRef idx="minor">
+            <a:schemeClr val="lt1"/>
+          </a:fontRef>
+        </p:style>
+        <p:txBody>
+          <a:bodyPr rtlCol="0" anchor="ctr"/>
+          <a:lstStyle/>
+          <a:p>
+            <a:pPr algn="ctr"/>
+          </a:p>
+        </p:txBody>
+      </p:sp>
+      <p:sp>
+        <p:nvSpPr>
+          <p:cNvPr id="50" name="TextBox 49"/>
+          <p:cNvSpPr txBox="1"/>
+          <p:nvPr/>
+        </p:nvSpPr>
+        <p:spPr>
+          <a:xfrm>
+            <a:off x="960120" y="5358384"/>
+            <a:ext cx="10424160" cy="640080"/>
+          </a:xfrm>
+          <a:prstGeom prst="rect">
+            <a:avLst/>
+          </a:prstGeom>
+          <a:noFill/>
+        </p:spPr>
+        <p:txBody>
+          <a:bodyPr wrap="square" lIns="0" rIns="0" tIns="0" bIns="0" anchor="t">
+            <a:spAutoFit/>
+          </a:bodyPr>
+          <a:lstStyle/>
+          <a:p>
+            <a:pPr algn="l">
+              <a:lnSpc>
+                <a:spcPct val="115000"/>
+              </a:lnSpc>
+            </a:pPr>
+            <a:r>
+              <a:rPr sz="1500" b="1">
+                <a:solidFill>
+                  <a:srgbClr val="36D399"/>
+                </a:solidFill>
+                <a:latin typeface="맑은 고딕"/>
+                <a:ea typeface="맑은 고딕"/>
+                <a:cs typeface="맑은 고딕"/>
+              </a:rPr>
+              <a:t>측정 없이 켜지 마라.</a:t>
+            </a:r>
+          </a:p>
+          <a:p>
+            <a:pPr algn="l">
+              <a:lnSpc>
+                <a:spcPct val="115000"/>
+              </a:lnSpc>
+              <a:spcBef>
+                <a:spcPts val="500"/>
+              </a:spcBef>
+            </a:pPr>
+            <a:r>
+              <a:rPr sz="1300" b="0">
+                <a:solidFill>
+                  <a:srgbClr val="93A4B5"/>
+                </a:solidFill>
+                <a:latin typeface="맑은 고딕"/>
+                <a:ea typeface="맑은 고딕"/>
+                <a:cs typeface="맑은 고딕"/>
+              </a:rPr>
+              <a:t>1주차에 로그만 남기는 이유가 이것이다. 라우팅 전후의 요청당 비용과 리워크 턴 수를 같이 재야, 절감이 진짜인지 품질을 팔아 산 것인지 구분된다.</a:t>
+            </a:r>
+          </a:p>
+        </p:txBody>
+      </p:sp>
+      <p:sp>
+        <p:nvSpPr>
+          <p:cNvPr id="51" name="TextBox 50"/>
+          <p:cNvSpPr txBox="1"/>
+          <p:nvPr/>
+        </p:nvSpPr>
+        <p:spPr>
+          <a:xfrm>
+            <a:off x="685800" y="6263640"/>
+            <a:ext cx="10789920" cy="320040"/>
+          </a:xfrm>
+          <a:prstGeom prst="rect">
+            <a:avLst/>
+          </a:prstGeom>
+          <a:noFill/>
+        </p:spPr>
+        <p:txBody>
+          <a:bodyPr wrap="square" lIns="0" rIns="0" tIns="0" bIns="0" anchor="t">
+            <a:spAutoFit/>
+          </a:bodyPr>
+          <a:lstStyle/>
+          <a:p>
+            <a:pPr algn="l">
+              <a:lnSpc>
+                <a:spcPct val="115000"/>
+              </a:lnSpc>
+            </a:pPr>
+            <a:r>
+              <a:rPr sz="1100" b="0">
+                <a:solidFill>
+                  <a:srgbClr val="93A4B5"/>
+                </a:solidFill>
+                <a:latin typeface="맑은 고딕"/>
+                <a:ea typeface="맑은 고딕"/>
+                <a:cs typeface="맑은 고딕"/>
+              </a:rPr>
+              <a:t>되돌릴 수 있게 만들어라 — route()가 항상 상위 모델을 반환하도록 하는 킬 스위치 하나면 롤백이 끝난다.</a:t>
+            </a:r>
+          </a:p>
+        </p:txBody>
+      </p:sp>
+    </p:spTree>
+  </p:cSld>
+  <p:clrMapOvr>
+    <a:masterClrMapping/>
+  </p:clrMapOvr>
+</p:sld>
+</file>
+
+<file path=ppt/slides/slide16.xml><?xml version="1.0" encoding="utf-8"?>
+<p:sld xmlns:a="http://schemas.openxmlformats.org/drawingml/2006/main" xmlns:p="http://schemas.openxmlformats.org/presentationml/2006/main" xmlns:r="http://schemas.openxmlformats.org/officeDocument/2006/relationships">
+  <p:cSld>
+    <p:spTree>
+      <p:nvGrpSpPr>
+        <p:cNvPr id="1" name=""/>
+        <p:cNvGrpSpPr/>
+        <p:nvPr/>
+      </p:nvGrpSpPr>
+      <p:grpSpPr/>
+      <p:sp>
+        <p:nvSpPr>
+          <p:cNvPr id="2" name="Rectangle 1"/>
+          <p:cNvSpPr/>
+          <p:nvPr/>
+        </p:nvSpPr>
+        <p:spPr>
+          <a:xfrm>
+            <a:off x="0" y="0"/>
+            <a:ext cx="12191695" cy="6858000"/>
+          </a:xfrm>
+          <a:prstGeom prst="rect">
+            <a:avLst/>
+          </a:prstGeom>
+          <a:solidFill>
+            <a:srgbClr val="0E141B"/>
+          </a:solidFill>
+          <a:ln>
+            <a:noFill/>
+          </a:ln>
+          <a:effectLst/>
+        </p:spPr>
+        <p:style>
+          <a:lnRef idx="1">
+            <a:schemeClr val="accent1"/>
+          </a:lnRef>
+          <a:fillRef idx="3">
+            <a:schemeClr val="accent1"/>
+          </a:fillRef>
+          <a:effectRef idx="2">
+            <a:schemeClr val="accent1"/>
+          </a:effectRef>
+          <a:fontRef idx="minor">
+            <a:schemeClr val="lt1"/>
+          </a:fontRef>
+        </p:style>
+        <p:txBody>
+          <a:bodyPr rtlCol="0" anchor="ctr"/>
+          <a:lstStyle/>
+          <a:p>
+            <a:pPr algn="ctr"/>
+          </a:p>
+        </p:txBody>
+      </p:sp>
+      <p:sp>
+        <p:nvSpPr>
+          <p:cNvPr id="3" name="Rectangle 2"/>
+          <p:cNvSpPr/>
+          <p:nvPr/>
+        </p:nvSpPr>
+        <p:spPr>
+          <a:xfrm>
+            <a:off x="0" y="0"/>
+            <a:ext cx="118872" cy="6858000"/>
+          </a:xfrm>
+          <a:prstGeom prst="rect">
+            <a:avLst/>
+          </a:prstGeom>
+          <a:solidFill>
+            <a:srgbClr val="36D399"/>
+          </a:solidFill>
+          <a:ln>
+            <a:noFill/>
+          </a:ln>
+          <a:effectLst/>
+        </p:spPr>
+        <p:style>
+          <a:lnRef idx="1">
+            <a:schemeClr val="accent1"/>
+          </a:lnRef>
+          <a:fillRef idx="3">
+            <a:schemeClr val="accent1"/>
+          </a:fillRef>
+          <a:effectRef idx="2">
+            <a:schemeClr val="accent1"/>
+          </a:effectRef>
+          <a:fontRef idx="minor">
+            <a:schemeClr val="lt1"/>
+          </a:fontRef>
+        </p:style>
+        <p:txBody>
+          <a:bodyPr rtlCol="0" anchor="ctr"/>
+          <a:lstStyle/>
+          <a:p>
+            <a:pPr algn="ctr"/>
+          </a:p>
+        </p:txBody>
+      </p:sp>
+      <p:sp>
+        <p:nvSpPr>
+          <p:cNvPr id="4" name="TextBox 3"/>
+          <p:cNvSpPr txBox="1"/>
+          <p:nvPr/>
+        </p:nvSpPr>
+        <p:spPr>
+          <a:xfrm>
+            <a:off x="685800" y="384048"/>
+            <a:ext cx="9144000" cy="292608"/>
+          </a:xfrm>
+          <a:prstGeom prst="rect">
+            <a:avLst/>
+          </a:prstGeom>
+          <a:noFill/>
+        </p:spPr>
+        <p:txBody>
+          <a:bodyPr wrap="square" lIns="0" rIns="0" tIns="0" bIns="0" anchor="t">
+            <a:spAutoFit/>
+          </a:bodyPr>
+          <a:lstStyle/>
+          <a:p>
+            <a:pPr algn="l">
+              <a:lnSpc>
+                <a:spcPct val="115000"/>
+              </a:lnSpc>
+            </a:pPr>
+            <a:r>
+              <a:rPr sz="1300" b="1">
+                <a:solidFill>
+                  <a:srgbClr val="36D399"/>
+                </a:solidFill>
+                <a:latin typeface="맑은 고딕"/>
+                <a:ea typeface="맑은 고딕"/>
+                <a:cs typeface="맑은 고딕"/>
+              </a:rPr>
+              <a:t>FOLLOW-UP · 마무리</a:t>
+            </a:r>
+          </a:p>
+        </p:txBody>
+      </p:sp>
+      <p:sp>
+        <p:nvSpPr>
+          <p:cNvPr id="5" name="TextBox 4"/>
+          <p:cNvSpPr txBox="1"/>
+          <p:nvPr/>
+        </p:nvSpPr>
+        <p:spPr>
+          <a:xfrm>
+            <a:off x="685800" y="685800"/>
+            <a:ext cx="10881360" cy="822960"/>
+          </a:xfrm>
+          <a:prstGeom prst="rect">
+            <a:avLst/>
+          </a:prstGeom>
+          <a:noFill/>
+        </p:spPr>
+        <p:txBody>
+          <a:bodyPr wrap="square" lIns="0" rIns="0" tIns="0" bIns="0" anchor="t">
+            <a:spAutoFit/>
+          </a:bodyPr>
+          <a:lstStyle/>
+          <a:p>
+            <a:pPr algn="l">
+              <a:lnSpc>
+                <a:spcPct val="115000"/>
+              </a:lnSpc>
+            </a:pPr>
+            <a:r>
+              <a:rPr sz="3200" b="1">
+                <a:solidFill>
+                  <a:srgbClr val="ECF1F6"/>
+                </a:solidFill>
+                <a:latin typeface="맑은 고딕"/>
+                <a:ea typeface="맑은 고딕"/>
+                <a:cs typeface="맑은 고딕"/>
+              </a:rPr>
+              <a:t>정리</a:t>
+            </a:r>
+          </a:p>
+        </p:txBody>
+      </p:sp>
+      <p:sp>
+        <p:nvSpPr>
+          <p:cNvPr id="6" name="Rectangle 5"/>
+          <p:cNvSpPr/>
+          <p:nvPr/>
+        </p:nvSpPr>
+        <p:spPr>
+          <a:xfrm>
+            <a:off x="685800" y="1572768"/>
+            <a:ext cx="1371600" cy="41148"/>
+          </a:xfrm>
+          <a:prstGeom prst="rect">
+            <a:avLst/>
+          </a:prstGeom>
+          <a:solidFill>
+            <a:srgbClr val="36D399"/>
+          </a:solidFill>
+          <a:ln>
+            <a:noFill/>
+          </a:ln>
+          <a:effectLst/>
+        </p:spPr>
+        <p:style>
+          <a:lnRef idx="1">
+            <a:schemeClr val="accent1"/>
+          </a:lnRef>
+          <a:fillRef idx="3">
+            <a:schemeClr val="accent1"/>
+          </a:fillRef>
+          <a:effectRef idx="2">
+            <a:schemeClr val="accent1"/>
+          </a:effectRef>
+          <a:fontRef idx="minor">
+            <a:schemeClr val="lt1"/>
+          </a:fontRef>
+        </p:style>
+        <p:txBody>
+          <a:bodyPr rtlCol="0" anchor="ctr"/>
+          <a:lstStyle/>
+          <a:p>
+            <a:pPr algn="ctr"/>
+          </a:p>
+        </p:txBody>
+      </p:sp>
+      <p:sp>
+        <p:nvSpPr>
+          <p:cNvPr id="7" name="TextBox 6"/>
+          <p:cNvSpPr txBox="1"/>
+          <p:nvPr/>
+        </p:nvSpPr>
+        <p:spPr>
+          <a:xfrm>
+            <a:off x="11155680" y="6355080"/>
+            <a:ext cx="822960" cy="274320"/>
+          </a:xfrm>
+          <a:prstGeom prst="rect">
+            <a:avLst/>
+          </a:prstGeom>
+          <a:noFill/>
+        </p:spPr>
+        <p:txBody>
+          <a:bodyPr wrap="square" lIns="0" rIns="0" tIns="0" bIns="0" anchor="t">
+            <a:spAutoFit/>
+          </a:bodyPr>
+          <a:lstStyle/>
+          <a:p>
+            <a:pPr algn="r">
+              <a:lnSpc>
+                <a:spcPct val="115000"/>
+              </a:lnSpc>
+            </a:pPr>
+            <a:r>
+              <a:rPr sz="1100" b="0">
+                <a:solidFill>
+                  <a:srgbClr val="93A4B5"/>
+                </a:solidFill>
+                <a:latin typeface="맑은 고딕"/>
+                <a:ea typeface="맑은 고딕"/>
+                <a:cs typeface="맑은 고딕"/>
+              </a:rPr>
+              <a:t>16</a:t>
+            </a:r>
+          </a:p>
+        </p:txBody>
+      </p:sp>
+      <p:sp>
+        <p:nvSpPr>
+          <p:cNvPr id="8" name="Rectangle 7"/>
+          <p:cNvSpPr/>
+          <p:nvPr/>
+        </p:nvSpPr>
+        <p:spPr>
+          <a:xfrm>
+            <a:off x="777240" y="2066543"/>
+            <a:ext cx="109728" cy="109728"/>
+          </a:xfrm>
+          <a:prstGeom prst="rect">
+            <a:avLst/>
+          </a:prstGeom>
+          <a:solidFill>
+            <a:srgbClr val="36D399"/>
+          </a:solidFill>
+          <a:ln>
+            <a:noFill/>
+          </a:ln>
+          <a:effectLst/>
+        </p:spPr>
+        <p:style>
+          <a:lnRef idx="1">
+            <a:schemeClr val="accent1"/>
+          </a:lnRef>
+          <a:fillRef idx="3">
+            <a:schemeClr val="accent1"/>
+          </a:fillRef>
+          <a:effectRef idx="2">
+            <a:schemeClr val="accent1"/>
+          </a:effectRef>
+          <a:fontRef idx="minor">
+            <a:schemeClr val="lt1"/>
+          </a:fontRef>
+        </p:style>
+        <p:txBody>
+          <a:bodyPr rtlCol="0" anchor="ctr"/>
+          <a:lstStyle/>
+          <a:p>
+            <a:pPr algn="ctr"/>
+          </a:p>
+        </p:txBody>
+      </p:sp>
+      <p:sp>
+        <p:nvSpPr>
+          <p:cNvPr id="9" name="TextBox 8"/>
+          <p:cNvSpPr txBox="1"/>
+          <p:nvPr/>
+        </p:nvSpPr>
+        <p:spPr>
+          <a:xfrm>
+            <a:off x="1069848" y="1965960"/>
+            <a:ext cx="10405872" cy="365760"/>
+          </a:xfrm>
+          <a:prstGeom prst="rect">
+            <a:avLst/>
+          </a:prstGeom>
+          <a:noFill/>
+        </p:spPr>
+        <p:txBody>
+          <a:bodyPr wrap="square" lIns="0" rIns="0" tIns="0" bIns="0" anchor="t">
+            <a:spAutoFit/>
+          </a:bodyPr>
+          <a:lstStyle/>
+          <a:p>
+            <a:pPr algn="l">
+              <a:lnSpc>
+                <a:spcPct val="115000"/>
+              </a:lnSpc>
+            </a:pPr>
+            <a:r>
+              <a:rPr sz="1650" b="1">
+                <a:solidFill>
+                  <a:srgbClr val="ECF1F6"/>
+                </a:solidFill>
+                <a:latin typeface="맑은 고딕"/>
+                <a:ea typeface="맑은 고딕"/>
+                <a:cs typeface="맑은 고딕"/>
+              </a:rPr>
+              <a:t>작은 모델은 답을 만드는 게 아니라 교통을 정리한다</a:t>
+            </a:r>
+          </a:p>
+        </p:txBody>
+      </p:sp>
+      <p:sp>
+        <p:nvSpPr>
+          <p:cNvPr id="10" name="TextBox 9"/>
+          <p:cNvSpPr txBox="1"/>
+          <p:nvPr/>
+        </p:nvSpPr>
+        <p:spPr>
+          <a:xfrm>
+            <a:off x="1069848" y="2240279"/>
+            <a:ext cx="10405872" cy="365760"/>
+          </a:xfrm>
+          <a:prstGeom prst="rect">
+            <a:avLst/>
+          </a:prstGeom>
+          <a:noFill/>
+        </p:spPr>
+        <p:txBody>
+          <a:bodyPr wrap="square" lIns="0" rIns="0" tIns="0" bIns="0" anchor="t">
+            <a:spAutoFit/>
+          </a:bodyPr>
+          <a:lstStyle/>
+          <a:p>
+            <a:pPr algn="l">
+              <a:lnSpc>
+                <a:spcPct val="115000"/>
+              </a:lnSpc>
+            </a:pPr>
+            <a:r>
+              <a:rPr sz="1350" b="0">
+                <a:solidFill>
+                  <a:srgbClr val="93A4B5"/>
+                </a:solidFill>
+                <a:latin typeface="맑은 고딕"/>
+                <a:ea typeface="맑은 고딕"/>
+                <a:cs typeface="맑은 고딕"/>
+              </a:rPr>
+              <a:t>분류에 드는 수십 토큰이 상위 모델 호출 하나를 막으면 즉시 회수된다.</a:t>
+            </a:r>
+          </a:p>
+        </p:txBody>
+      </p:sp>
+      <p:sp>
+        <p:nvSpPr>
+          <p:cNvPr id="11" name="Rectangle 10"/>
+          <p:cNvSpPr/>
+          <p:nvPr/>
+        </p:nvSpPr>
+        <p:spPr>
+          <a:xfrm>
+            <a:off x="777240" y="2724912"/>
+            <a:ext cx="109728" cy="109728"/>
+          </a:xfrm>
+          <a:prstGeom prst="rect">
+            <a:avLst/>
+          </a:prstGeom>
+          <a:solidFill>
+            <a:srgbClr val="36D399"/>
+          </a:solidFill>
+          <a:ln>
+            <a:noFill/>
+          </a:ln>
+          <a:effectLst/>
+        </p:spPr>
+        <p:style>
+          <a:lnRef idx="1">
+            <a:schemeClr val="accent1"/>
+          </a:lnRef>
+          <a:fillRef idx="3">
+            <a:schemeClr val="accent1"/>
+          </a:fillRef>
+          <a:effectRef idx="2">
+            <a:schemeClr val="accent1"/>
+          </a:effectRef>
+          <a:fontRef idx="minor">
+            <a:schemeClr val="lt1"/>
+          </a:fontRef>
+        </p:style>
+        <p:txBody>
+          <a:bodyPr rtlCol="0" anchor="ctr"/>
+          <a:lstStyle/>
+          <a:p>
+            <a:pPr algn="ctr"/>
+          </a:p>
+        </p:txBody>
+      </p:sp>
+      <p:sp>
+        <p:nvSpPr>
+          <p:cNvPr id="12" name="TextBox 11"/>
+          <p:cNvSpPr txBox="1"/>
+          <p:nvPr/>
+        </p:nvSpPr>
+        <p:spPr>
+          <a:xfrm>
+            <a:off x="1069848" y="2624328"/>
+            <a:ext cx="10405872" cy="365760"/>
+          </a:xfrm>
+          <a:prstGeom prst="rect">
+            <a:avLst/>
+          </a:prstGeom>
+          <a:noFill/>
+        </p:spPr>
+        <p:txBody>
+          <a:bodyPr wrap="square" lIns="0" rIns="0" tIns="0" bIns="0" anchor="t">
+            <a:spAutoFit/>
+          </a:bodyPr>
+          <a:lstStyle/>
+          <a:p>
+            <a:pPr algn="l">
+              <a:lnSpc>
+                <a:spcPct val="115000"/>
+              </a:lnSpc>
+            </a:pPr>
+            <a:r>
+              <a:rPr sz="1650" b="1">
+                <a:solidFill>
+                  <a:srgbClr val="ECF1F6"/>
+                </a:solidFill>
+                <a:latin typeface="맑은 고딕"/>
+                <a:ea typeface="맑은 고딕"/>
+                <a:cs typeface="맑은 고딕"/>
+              </a:rPr>
+              <a:t>당신이 만든 것은 워크플로우 컨트롤이다</a:t>
+            </a:r>
+          </a:p>
+        </p:txBody>
+      </p:sp>
+      <p:sp>
+        <p:nvSpPr>
+          <p:cNvPr id="13" name="TextBox 12"/>
+          <p:cNvSpPr txBox="1"/>
+          <p:nvPr/>
+        </p:nvSpPr>
+        <p:spPr>
+          <a:xfrm>
+            <a:off x="1069848" y="2898648"/>
+            <a:ext cx="10405872" cy="365760"/>
+          </a:xfrm>
+          <a:prstGeom prst="rect">
+            <a:avLst/>
+          </a:prstGeom>
+          <a:noFill/>
+        </p:spPr>
+        <p:txBody>
+          <a:bodyPr wrap="square" lIns="0" rIns="0" tIns="0" bIns="0" anchor="t">
+            <a:spAutoFit/>
+          </a:bodyPr>
+          <a:lstStyle/>
+          <a:p>
+            <a:pPr algn="l">
+              <a:lnSpc>
+                <a:spcPct val="115000"/>
+              </a:lnSpc>
+            </a:pPr>
+            <a:r>
+              <a:rPr sz="1350" b="0">
+                <a:solidFill>
+                  <a:srgbClr val="93A4B5"/>
+                </a:solidFill>
+                <a:latin typeface="맑은 고딕"/>
+                <a:ea typeface="맑은 고딕"/>
+                <a:cs typeface="맑은 고딕"/>
+              </a:rPr>
+              <a:t>라우팅은 그 안의 수단이고, 리워크는 그것이 줄이려는 대상이다.</a:t>
+            </a:r>
+          </a:p>
+        </p:txBody>
+      </p:sp>
+      <p:sp>
+        <p:nvSpPr>
+          <p:cNvPr id="14" name="Rectangle 13"/>
+          <p:cNvSpPr/>
+          <p:nvPr/>
+        </p:nvSpPr>
+        <p:spPr>
+          <a:xfrm>
+            <a:off x="777240" y="3383279"/>
+            <a:ext cx="109728" cy="109728"/>
+          </a:xfrm>
+          <a:prstGeom prst="rect">
+            <a:avLst/>
+          </a:prstGeom>
+          <a:solidFill>
+            <a:srgbClr val="36D399"/>
+          </a:solidFill>
+          <a:ln>
+            <a:noFill/>
+          </a:ln>
+          <a:effectLst/>
+        </p:spPr>
+        <p:style>
+          <a:lnRef idx="1">
+            <a:schemeClr val="accent1"/>
+          </a:lnRef>
+          <a:fillRef idx="3">
+            <a:schemeClr val="accent1"/>
+          </a:fillRef>
+          <a:effectRef idx="2">
+            <a:schemeClr val="accent1"/>
+          </a:effectRef>
+          <a:fontRef idx="minor">
+            <a:schemeClr val="lt1"/>
+          </a:fontRef>
+        </p:style>
+        <p:txBody>
+          <a:bodyPr rtlCol="0" anchor="ctr"/>
+          <a:lstStyle/>
+          <a:p>
+            <a:pPr algn="ctr"/>
+          </a:p>
+        </p:txBody>
+      </p:sp>
+      <p:sp>
+        <p:nvSpPr>
+          <p:cNvPr id="15" name="TextBox 14"/>
+          <p:cNvSpPr txBox="1"/>
+          <p:nvPr/>
+        </p:nvSpPr>
+        <p:spPr>
+          <a:xfrm>
+            <a:off x="1069848" y="3282696"/>
+            <a:ext cx="10405872" cy="365760"/>
+          </a:xfrm>
+          <a:prstGeom prst="rect">
+            <a:avLst/>
+          </a:prstGeom>
+          <a:noFill/>
+        </p:spPr>
+        <p:txBody>
+          <a:bodyPr wrap="square" lIns="0" rIns="0" tIns="0" bIns="0" anchor="t">
+            <a:spAutoFit/>
+          </a:bodyPr>
+          <a:lstStyle/>
+          <a:p>
+            <a:pPr algn="l">
+              <a:lnSpc>
+                <a:spcPct val="115000"/>
+              </a:lnSpc>
+            </a:pPr>
+            <a:r>
+              <a:rPr sz="1650" b="1">
+                <a:solidFill>
+                  <a:srgbClr val="ECF1F6"/>
+                </a:solidFill>
+                <a:latin typeface="맑은 고딕"/>
+                <a:ea typeface="맑은 고딕"/>
+                <a:cs typeface="맑은 고딕"/>
+              </a:rPr>
+              <a:t>구현 티어는 조건을 확인하고 내린다</a:t>
+            </a:r>
+          </a:p>
+        </p:txBody>
+      </p:sp>
+      <p:sp>
+        <p:nvSpPr>
+          <p:cNvPr id="16" name="TextBox 15"/>
+          <p:cNvSpPr txBox="1"/>
+          <p:nvPr/>
+        </p:nvSpPr>
+        <p:spPr>
+          <a:xfrm>
+            <a:off x="1069848" y="3557015"/>
+            <a:ext cx="10405872" cy="365760"/>
+          </a:xfrm>
+          <a:prstGeom prst="rect">
+            <a:avLst/>
+          </a:prstGeom>
+          <a:noFill/>
+        </p:spPr>
+        <p:txBody>
+          <a:bodyPr wrap="square" lIns="0" rIns="0" tIns="0" bIns="0" anchor="t">
+            <a:spAutoFit/>
+          </a:bodyPr>
+          <a:lstStyle/>
+          <a:p>
+            <a:pPr algn="l">
+              <a:lnSpc>
+                <a:spcPct val="115000"/>
+              </a:lnSpc>
+            </a:pPr>
+            <a:r>
+              <a:rPr sz="1350" b="0">
+                <a:solidFill>
+                  <a:srgbClr val="93A4B5"/>
+                </a:solidFill>
+                <a:latin typeface="맑은 고딕"/>
+                <a:ea typeface="맑은 고딕"/>
+                <a:cs typeface="맑은 고딕"/>
+              </a:rPr>
+              <a:t>스펙 확정 · 검증 수단 · 임계 크기 — 셋이 모일 때만 중간 모델로 내려도 안전하다.</a:t>
+            </a:r>
+          </a:p>
+        </p:txBody>
+      </p:sp>
+      <p:sp>
+        <p:nvSpPr>
+          <p:cNvPr id="17" name="Rectangle 16"/>
+          <p:cNvSpPr/>
+          <p:nvPr/>
+        </p:nvSpPr>
+        <p:spPr>
+          <a:xfrm>
+            <a:off x="777240" y="4041648"/>
+            <a:ext cx="109728" cy="109728"/>
+          </a:xfrm>
+          <a:prstGeom prst="rect">
+            <a:avLst/>
+          </a:prstGeom>
+          <a:solidFill>
+            <a:srgbClr val="36D399"/>
+          </a:solidFill>
+          <a:ln>
+            <a:noFill/>
+          </a:ln>
+          <a:effectLst/>
+        </p:spPr>
+        <p:style>
+          <a:lnRef idx="1">
+            <a:schemeClr val="accent1"/>
+          </a:lnRef>
+          <a:fillRef idx="3">
+            <a:schemeClr val="accent1"/>
+          </a:fillRef>
+          <a:effectRef idx="2">
+            <a:schemeClr val="accent1"/>
+          </a:effectRef>
+          <a:fontRef idx="minor">
+            <a:schemeClr val="lt1"/>
+          </a:fontRef>
+        </p:style>
+        <p:txBody>
+          <a:bodyPr rtlCol="0" anchor="ctr"/>
+          <a:lstStyle/>
+          <a:p>
+            <a:pPr algn="ctr"/>
+          </a:p>
+        </p:txBody>
+      </p:sp>
+      <p:sp>
+        <p:nvSpPr>
+          <p:cNvPr id="18" name="TextBox 17"/>
+          <p:cNvSpPr txBox="1"/>
+          <p:nvPr/>
+        </p:nvSpPr>
+        <p:spPr>
+          <a:xfrm>
+            <a:off x="1069848" y="3941064"/>
+            <a:ext cx="10405872" cy="365760"/>
+          </a:xfrm>
+          <a:prstGeom prst="rect">
+            <a:avLst/>
+          </a:prstGeom>
+          <a:noFill/>
+        </p:spPr>
+        <p:txBody>
+          <a:bodyPr wrap="square" lIns="0" rIns="0" tIns="0" bIns="0" anchor="t">
+            <a:spAutoFit/>
+          </a:bodyPr>
+          <a:lstStyle/>
+          <a:p>
+            <a:pPr algn="l">
+              <a:lnSpc>
+                <a:spcPct val="115000"/>
+              </a:lnSpc>
+            </a:pPr>
+            <a:r>
+              <a:rPr sz="1650" b="1">
+                <a:solidFill>
+                  <a:srgbClr val="ECF1F6"/>
+                </a:solidFill>
+                <a:latin typeface="맑은 고딕"/>
+                <a:ea typeface="맑은 고딕"/>
+                <a:cs typeface="맑은 고딕"/>
+              </a:rPr>
+              <a:t>배치는 단가를 반으로 줄이지만 시간은 약속하지 않는다</a:t>
+            </a:r>
+          </a:p>
+        </p:txBody>
+      </p:sp>
+      <p:sp>
+        <p:nvSpPr>
+          <p:cNvPr id="19" name="TextBox 18"/>
+          <p:cNvSpPr txBox="1"/>
+          <p:nvPr/>
+        </p:nvSpPr>
+        <p:spPr>
+          <a:xfrm>
+            <a:off x="1069848" y="4215384"/>
+            <a:ext cx="10405872" cy="365760"/>
+          </a:xfrm>
+          <a:prstGeom prst="rect">
+            <a:avLst/>
+          </a:prstGeom>
+          <a:noFill/>
+        </p:spPr>
+        <p:txBody>
+          <a:bodyPr wrap="square" lIns="0" rIns="0" tIns="0" bIns="0" anchor="t">
+            <a:spAutoFit/>
+          </a:bodyPr>
+          <a:lstStyle/>
+          <a:p>
+            <a:pPr algn="l">
+              <a:lnSpc>
+                <a:spcPct val="115000"/>
+              </a:lnSpc>
+            </a:pPr>
+            <a:r>
+              <a:rPr sz="1350" b="0">
+                <a:solidFill>
+                  <a:srgbClr val="93A4B5"/>
+                </a:solidFill>
+                <a:latin typeface="맑은 고딕"/>
+                <a:ea typeface="맑은 고딕"/>
+                <a:cs typeface="맑은 고딕"/>
+              </a:rPr>
+              <a:t>expired가 실제로 난다. 폴백 없는 배치는 파이프라인을 멈춘다.</a:t>
+            </a:r>
+          </a:p>
+        </p:txBody>
+      </p:sp>
+      <p:sp>
+        <p:nvSpPr>
+          <p:cNvPr id="20" name="Rectangle 19"/>
+          <p:cNvSpPr/>
+          <p:nvPr/>
+        </p:nvSpPr>
+        <p:spPr>
+          <a:xfrm>
+            <a:off x="777240" y="4700016"/>
+            <a:ext cx="109728" cy="109728"/>
+          </a:xfrm>
+          <a:prstGeom prst="rect">
+            <a:avLst/>
+          </a:prstGeom>
+          <a:solidFill>
+            <a:srgbClr val="36D399"/>
+          </a:solidFill>
+          <a:ln>
+            <a:noFill/>
+          </a:ln>
+          <a:effectLst/>
+        </p:spPr>
+        <p:style>
+          <a:lnRef idx="1">
+            <a:schemeClr val="accent1"/>
+          </a:lnRef>
+          <a:fillRef idx="3">
+            <a:schemeClr val="accent1"/>
+          </a:fillRef>
+          <a:effectRef idx="2">
+            <a:schemeClr val="accent1"/>
+          </a:effectRef>
+          <a:fontRef idx="minor">
+            <a:schemeClr val="lt1"/>
+          </a:fontRef>
+        </p:style>
+        <p:txBody>
+          <a:bodyPr rtlCol="0" anchor="ctr"/>
+          <a:lstStyle/>
+          <a:p>
+            <a:pPr algn="ctr"/>
+          </a:p>
+        </p:txBody>
+      </p:sp>
+      <p:sp>
+        <p:nvSpPr>
+          <p:cNvPr id="21" name="TextBox 20"/>
+          <p:cNvSpPr txBox="1"/>
+          <p:nvPr/>
+        </p:nvSpPr>
+        <p:spPr>
+          <a:xfrm>
+            <a:off x="1069848" y="4599431"/>
+            <a:ext cx="10405872" cy="365760"/>
+          </a:xfrm>
+          <a:prstGeom prst="rect">
+            <a:avLst/>
+          </a:prstGeom>
+          <a:noFill/>
+        </p:spPr>
+        <p:txBody>
+          <a:bodyPr wrap="square" lIns="0" rIns="0" tIns="0" bIns="0" anchor="t">
+            <a:spAutoFit/>
+          </a:bodyPr>
+          <a:lstStyle/>
+          <a:p>
+            <a:pPr algn="l">
+              <a:lnSpc>
+                <a:spcPct val="115000"/>
+              </a:lnSpc>
+            </a:pPr>
+            <a:r>
+              <a:rPr sz="1650" b="1">
+                <a:solidFill>
+                  <a:srgbClr val="ECF1F6"/>
+                </a:solidFill>
+                <a:latin typeface="맑은 고딕"/>
+                <a:ea typeface="맑은 고딕"/>
+                <a:cs typeface="맑은 고딕"/>
+              </a:rPr>
+              <a:t>밸브는 프롬프트가 아니라 코드로 잠근다</a:t>
+            </a:r>
+          </a:p>
+        </p:txBody>
+      </p:sp>
+      <p:sp>
+        <p:nvSpPr>
+          <p:cNvPr id="22" name="TextBox 21"/>
+          <p:cNvSpPr txBox="1"/>
+          <p:nvPr/>
+        </p:nvSpPr>
+        <p:spPr>
+          <a:xfrm>
+            <a:off x="1069848" y="4873751"/>
+            <a:ext cx="10405872" cy="365760"/>
+          </a:xfrm>
+          <a:prstGeom prst="rect">
+            <a:avLst/>
+          </a:prstGeom>
+          <a:noFill/>
+        </p:spPr>
+        <p:txBody>
+          <a:bodyPr wrap="square" lIns="0" rIns="0" tIns="0" bIns="0" anchor="t">
+            <a:spAutoFit/>
+          </a:bodyPr>
+          <a:lstStyle/>
+          <a:p>
+            <a:pPr algn="l">
+              <a:lnSpc>
+                <a:spcPct val="115000"/>
+              </a:lnSpc>
+            </a:pPr>
+            <a:r>
+              <a:rPr sz="1350" b="0">
+                <a:solidFill>
+                  <a:srgbClr val="93A4B5"/>
+                </a:solidFill>
+                <a:latin typeface="맑은 고딕"/>
+                <a:ea typeface="맑은 고딕"/>
+                <a:cs typeface="맑은 고딕"/>
+              </a:rPr>
+              <a:t>3줄 상한과 세션 리셋은 부탁이 아니라 후처리로 강제해야 지켜진다.</a:t>
+            </a:r>
+          </a:p>
+        </p:txBody>
+      </p:sp>
+      <p:sp>
+        <p:nvSpPr>
+          <p:cNvPr id="23" name="Rounded Rectangle 22"/>
+          <p:cNvSpPr/>
+          <p:nvPr/>
+        </p:nvSpPr>
+        <p:spPr>
+          <a:xfrm>
+            <a:off x="685800" y="5440680"/>
+            <a:ext cx="10835640" cy="822960"/>
+          </a:xfrm>
+          <a:prstGeom prst="roundRect">
+            <a:avLst>
+              <a:gd name="adj" fmla="val 5000"/>
+            </a:avLst>
+          </a:prstGeom>
+          <a:solidFill>
+            <a:srgbClr val="18222E"/>
+          </a:solidFill>
+          <a:ln>
+            <a:noFill/>
+          </a:ln>
+          <a:effectLst/>
+        </p:spPr>
+        <p:style>
+          <a:lnRef idx="1">
+            <a:schemeClr val="accent1"/>
+          </a:lnRef>
+          <a:fillRef idx="3">
+            <a:schemeClr val="accent1"/>
+          </a:fillRef>
+          <a:effectRef idx="2">
+            <a:schemeClr val="accent1"/>
+          </a:effectRef>
+          <a:fontRef idx="minor">
+            <a:schemeClr val="lt1"/>
+          </a:fontRef>
+        </p:style>
+        <p:txBody>
+          <a:bodyPr rtlCol="0" anchor="ctr"/>
+          <a:lstStyle/>
+          <a:p>
+            <a:pPr algn="ctr"/>
+          </a:p>
+        </p:txBody>
+      </p:sp>
+      <p:sp>
+        <p:nvSpPr>
+          <p:cNvPr id="24" name="Rectangle 23"/>
+          <p:cNvSpPr/>
+          <p:nvPr/>
+        </p:nvSpPr>
+        <p:spPr>
+          <a:xfrm>
+            <a:off x="685800" y="5440680"/>
+            <a:ext cx="50292" cy="822960"/>
+          </a:xfrm>
+          <a:prstGeom prst="rect">
+            <a:avLst/>
+          </a:prstGeom>
+          <a:solidFill>
+            <a:srgbClr val="5A9CFF"/>
+          </a:solidFill>
+          <a:ln>
+            <a:noFill/>
+          </a:ln>
+          <a:effectLst/>
+        </p:spPr>
+        <p:style>
+          <a:lnRef idx="1">
+            <a:schemeClr val="accent1"/>
+          </a:lnRef>
+          <a:fillRef idx="3">
+            <a:schemeClr val="accent1"/>
+          </a:fillRef>
+          <a:effectRef idx="2">
+            <a:schemeClr val="accent1"/>
+          </a:effectRef>
+          <a:fontRef idx="minor">
+            <a:schemeClr val="lt1"/>
+          </a:fontRef>
+        </p:style>
+        <p:txBody>
+          <a:bodyPr rtlCol="0" anchor="ctr"/>
+          <a:lstStyle/>
+          <a:p>
+            <a:pPr algn="ctr"/>
+          </a:p>
+        </p:txBody>
+      </p:sp>
+      <p:sp>
+        <p:nvSpPr>
+          <p:cNvPr id="25" name="TextBox 24"/>
+          <p:cNvSpPr txBox="1"/>
+          <p:nvPr/>
+        </p:nvSpPr>
+        <p:spPr>
+          <a:xfrm>
+            <a:off x="960120" y="5596128"/>
+            <a:ext cx="10424160" cy="594360"/>
+          </a:xfrm>
+          <a:prstGeom prst="rect">
+            <a:avLst/>
+          </a:prstGeom>
+          <a:noFill/>
+        </p:spPr>
+        <p:txBody>
+          <a:bodyPr wrap="square" lIns="0" rIns="0" tIns="0" bIns="0" anchor="t">
+            <a:spAutoFit/>
+          </a:bodyPr>
+          <a:lstStyle/>
+          <a:p>
+            <a:pPr algn="l">
+              <a:lnSpc>
+                <a:spcPct val="115000"/>
+              </a:lnSpc>
+            </a:pPr>
+            <a:r>
+              <a:rPr sz="1550" b="1">
+                <a:solidFill>
+                  <a:srgbClr val="5A9CFF"/>
+                </a:solidFill>
+                <a:latin typeface="맑은 고딕"/>
+                <a:ea typeface="맑은 고딕"/>
+                <a:cs typeface="맑은 고딕"/>
+              </a:rPr>
+              <a:t>세 덱을 관통하는 한 문장 — AI가 나쁜 게 아니라 우리가 견적서를 안 읽은 것이다.</a:t>
+            </a:r>
+          </a:p>
+        </p:txBody>
+      </p:sp>
+      <p:sp>
+        <p:nvSpPr>
+          <p:cNvPr id="26" name="TextBox 25"/>
+          <p:cNvSpPr txBox="1"/>
+          <p:nvPr/>
+        </p:nvSpPr>
+        <p:spPr>
+          <a:xfrm>
+            <a:off x="685800" y="6419088"/>
+            <a:ext cx="10789920" cy="320040"/>
+          </a:xfrm>
+          <a:prstGeom prst="rect">
+            <a:avLst/>
+          </a:prstGeom>
+          <a:noFill/>
+        </p:spPr>
+        <p:txBody>
+          <a:bodyPr wrap="square" lIns="0" rIns="0" tIns="0" bIns="0" anchor="t">
+            <a:spAutoFit/>
+          </a:bodyPr>
+          <a:lstStyle/>
+          <a:p>
+            <a:pPr algn="l">
+              <a:lnSpc>
+                <a:spcPct val="115000"/>
+              </a:lnSpc>
+            </a:pPr>
+            <a:r>
+              <a:rPr sz="1100" b="0">
+                <a:solidFill>
+                  <a:srgbClr val="93A4B5"/>
+                </a:solidFill>
+                <a:latin typeface="맑은 고딕"/>
+                <a:ea typeface="맑은 고딕"/>
+                <a:cs typeface="맑은 고딕"/>
+              </a:rPr>
+              <a:t>본편(22장) · 보너스(10장) · 후속(15장) — 각각 독립 발표 가능합니다.</a:t>
+            </a:r>
+          </a:p>
+        </p:txBody>
+      </p:sp>
+    </p:spTree>
+  </p:cSld>
+  <p:clrMapOvr>
+    <a:masterClrMapping/>
+  </p:clrMapOvr>
+</p:sld>
+</file>
+
+<file path=ppt/slides/slide17.xml><?xml version="1.0" encoding="utf-8"?>
+<p:sld xmlns:a="http://schemas.openxmlformats.org/drawingml/2006/main" xmlns:p="http://schemas.openxmlformats.org/presentationml/2006/main" xmlns:r="http://schemas.openxmlformats.org/officeDocument/2006/relationships">
+  <p:cSld>
+    <p:spTree>
+      <p:nvGrpSpPr>
+        <p:cNvPr id="1" name=""/>
+        <p:cNvGrpSpPr/>
+        <p:nvPr/>
+      </p:nvGrpSpPr>
+      <p:grpSpPr/>
+      <p:sp>
+        <p:nvSpPr>
+          <p:cNvPr id="2" name="Rectangle 1"/>
+          <p:cNvSpPr/>
+          <p:nvPr/>
+        </p:nvSpPr>
+        <p:spPr>
+          <a:xfrm>
+            <a:off x="0" y="0"/>
+            <a:ext cx="12191695" cy="6858000"/>
+          </a:xfrm>
+          <a:prstGeom prst="rect">
+            <a:avLst/>
+          </a:prstGeom>
+          <a:solidFill>
+            <a:srgbClr val="0E141B"/>
+          </a:solidFill>
+          <a:ln>
+            <a:noFill/>
+          </a:ln>
+          <a:effectLst/>
+        </p:spPr>
+        <p:style>
+          <a:lnRef idx="1">
+            <a:schemeClr val="accent1"/>
+          </a:lnRef>
+          <a:fillRef idx="3">
+            <a:schemeClr val="accent1"/>
+          </a:fillRef>
+          <a:effectRef idx="2">
+            <a:schemeClr val="accent1"/>
+          </a:effectRef>
+          <a:fontRef idx="minor">
+            <a:schemeClr val="lt1"/>
+          </a:fontRef>
+        </p:style>
+        <p:txBody>
+          <a:bodyPr rtlCol="0" anchor="ctr"/>
+          <a:lstStyle/>
+          <a:p>
+            <a:pPr algn="ctr"/>
+          </a:p>
+        </p:txBody>
+      </p:sp>
+      <p:sp>
+        <p:nvSpPr>
+          <p:cNvPr id="3" name="Rectangle 2"/>
+          <p:cNvSpPr/>
+          <p:nvPr/>
+        </p:nvSpPr>
+        <p:spPr>
+          <a:xfrm>
+            <a:off x="0" y="0"/>
+            <a:ext cx="118872" cy="6858000"/>
+          </a:xfrm>
+          <a:prstGeom prst="rect">
+            <a:avLst/>
+          </a:prstGeom>
+          <a:solidFill>
+            <a:srgbClr val="36D399"/>
+          </a:solidFill>
+          <a:ln>
+            <a:noFill/>
+          </a:ln>
+          <a:effectLst/>
+        </p:spPr>
+        <p:style>
+          <a:lnRef idx="1">
+            <a:schemeClr val="accent1"/>
+          </a:lnRef>
+          <a:fillRef idx="3">
+            <a:schemeClr val="accent1"/>
+          </a:fillRef>
+          <a:effectRef idx="2">
+            <a:schemeClr val="accent1"/>
+          </a:effectRef>
+          <a:fontRef idx="minor">
+            <a:schemeClr val="lt1"/>
+          </a:fontRef>
+        </p:style>
+        <p:txBody>
+          <a:bodyPr rtlCol="0" anchor="ctr"/>
+          <a:lstStyle/>
+          <a:p>
+            <a:pPr algn="ctr"/>
+          </a:p>
+        </p:txBody>
+      </p:sp>
+      <p:sp>
+        <p:nvSpPr>
+          <p:cNvPr id="4" name="TextBox 3"/>
+          <p:cNvSpPr txBox="1"/>
+          <p:nvPr/>
+        </p:nvSpPr>
+        <p:spPr>
+          <a:xfrm>
+            <a:off x="685800" y="384048"/>
+            <a:ext cx="9144000" cy="292608"/>
+          </a:xfrm>
+          <a:prstGeom prst="rect">
+            <a:avLst/>
+          </a:prstGeom>
+          <a:noFill/>
+        </p:spPr>
+        <p:txBody>
+          <a:bodyPr wrap="square" lIns="0" rIns="0" tIns="0" bIns="0" anchor="t">
+            <a:spAutoFit/>
+          </a:bodyPr>
+          <a:lstStyle/>
+          <a:p>
+            <a:pPr algn="l">
+              <a:lnSpc>
+                <a:spcPct val="115000"/>
+              </a:lnSpc>
+            </a:pPr>
+            <a:r>
+              <a:rPr sz="1300" b="1">
+                <a:solidFill>
+                  <a:srgbClr val="36D399"/>
+                </a:solidFill>
+                <a:latin typeface="맑은 고딕"/>
+                <a:ea typeface="맑은 고딕"/>
+                <a:cs typeface="맑은 고딕"/>
+              </a:rPr>
+              <a:t>FOLLOW-UP</a:t>
+            </a:r>
+          </a:p>
+        </p:txBody>
+      </p:sp>
+      <p:sp>
+        <p:nvSpPr>
+          <p:cNvPr id="5" name="TextBox 4"/>
+          <p:cNvSpPr txBox="1"/>
+          <p:nvPr/>
+        </p:nvSpPr>
+        <p:spPr>
+          <a:xfrm>
+            <a:off x="685800" y="685800"/>
+            <a:ext cx="10881360" cy="822960"/>
+          </a:xfrm>
+          <a:prstGeom prst="rect">
+            <a:avLst/>
+          </a:prstGeom>
+          <a:noFill/>
+        </p:spPr>
+        <p:txBody>
+          <a:bodyPr wrap="square" lIns="0" rIns="0" tIns="0" bIns="0" anchor="t">
+            <a:spAutoFit/>
+          </a:bodyPr>
+          <a:lstStyle/>
+          <a:p>
+            <a:pPr algn="l">
+              <a:lnSpc>
+                <a:spcPct val="115000"/>
+              </a:lnSpc>
+            </a:pPr>
+            <a:r>
+              <a:rPr sz="3200" b="1">
+                <a:solidFill>
+                  <a:srgbClr val="ECF1F6"/>
+                </a:solidFill>
+                <a:latin typeface="맑은 고딕"/>
+                <a:ea typeface="맑은 고딕"/>
+                <a:cs typeface="맑은 고딕"/>
+              </a:rPr>
+              <a:t>Q &amp; A</a:t>
+            </a:r>
+          </a:p>
+        </p:txBody>
+      </p:sp>
+      <p:sp>
+        <p:nvSpPr>
+          <p:cNvPr id="6" name="Rectangle 5"/>
+          <p:cNvSpPr/>
+          <p:nvPr/>
+        </p:nvSpPr>
+        <p:spPr>
+          <a:xfrm>
+            <a:off x="685800" y="1572768"/>
+            <a:ext cx="1371600" cy="41148"/>
+          </a:xfrm>
+          <a:prstGeom prst="rect">
+            <a:avLst/>
+          </a:prstGeom>
+          <a:solidFill>
+            <a:srgbClr val="36D399"/>
+          </a:solidFill>
+          <a:ln>
+            <a:noFill/>
+          </a:ln>
+          <a:effectLst/>
+        </p:spPr>
+        <p:style>
+          <a:lnRef idx="1">
+            <a:schemeClr val="accent1"/>
+          </a:lnRef>
+          <a:fillRef idx="3">
+            <a:schemeClr val="accent1"/>
+          </a:fillRef>
+          <a:effectRef idx="2">
+            <a:schemeClr val="accent1"/>
+          </a:effectRef>
+          <a:fontRef idx="minor">
+            <a:schemeClr val="lt1"/>
+          </a:fontRef>
+        </p:style>
+        <p:txBody>
+          <a:bodyPr rtlCol="0" anchor="ctr"/>
+          <a:lstStyle/>
+          <a:p>
+            <a:pPr algn="ctr"/>
+          </a:p>
+        </p:txBody>
+      </p:sp>
+      <p:sp>
+        <p:nvSpPr>
+          <p:cNvPr id="7" name="TextBox 6"/>
+          <p:cNvSpPr txBox="1"/>
+          <p:nvPr/>
+        </p:nvSpPr>
+        <p:spPr>
+          <a:xfrm>
+            <a:off x="11155680" y="6355080"/>
+            <a:ext cx="822960" cy="274320"/>
+          </a:xfrm>
+          <a:prstGeom prst="rect">
+            <a:avLst/>
+          </a:prstGeom>
+          <a:noFill/>
+        </p:spPr>
+        <p:txBody>
+          <a:bodyPr wrap="square" lIns="0" rIns="0" tIns="0" bIns="0" anchor="t">
+            <a:spAutoFit/>
+          </a:bodyPr>
+          <a:lstStyle/>
+          <a:p>
+            <a:pPr algn="r">
+              <a:lnSpc>
+                <a:spcPct val="115000"/>
+              </a:lnSpc>
+            </a:pPr>
+            <a:r>
+              <a:rPr sz="1100" b="0">
+                <a:solidFill>
+                  <a:srgbClr val="93A4B5"/>
+                </a:solidFill>
+                <a:latin typeface="맑은 고딕"/>
+                <a:ea typeface="맑은 고딕"/>
+                <a:cs typeface="맑은 고딕"/>
+              </a:rPr>
+              <a:t>17</a:t>
+            </a:r>
+          </a:p>
+        </p:txBody>
+      </p:sp>
+      <p:sp>
+        <p:nvSpPr>
+          <p:cNvPr id="8" name="TextBox 7"/>
+          <p:cNvSpPr txBox="1"/>
+          <p:nvPr/>
+        </p:nvSpPr>
+        <p:spPr>
+          <a:xfrm>
             <a:off x="685800" y="1920240"/>
             <a:ext cx="6949440" cy="548640"/>
           </a:xfrm>
@@ -12869,7 +16471,28 @@
                 <a:ea typeface="맑은 고딕"/>
                 <a:cs typeface="맑은 고딕"/>
               </a:rPr>
-              <a:t>agent_setup/test_router.py — 검증 56건 (56/56 PASS)</a:t>
+              <a:t>agent_setup/mcp_server.py — 이 라우터를 MCP 도구 5개로 노출 (의존성 0)</a:t>
+            </a:r>
+          </a:p>
+          <a:p>
+            <a:pPr algn="l">
+              <a:lnSpc>
+                <a:spcPct val="115000"/>
+              </a:lnSpc>
+              <a:spcBef>
+                <a:spcPts val="600"/>
+              </a:spcBef>
+            </a:pPr>
+            <a:r>
+              <a:rPr sz="1400" b="0">
+                <a:solidFill>
+                  <a:srgbClr val="93A4B5"/>
+                </a:solidFill>
+                <a:latin typeface="맑은 고딕"/>
+                <a:ea typeface="맑은 고딕"/>
+                <a:cs typeface="맑은 고딕"/>
+              </a:rPr>
+              <a:t>test_router.py 98건 · test_mcp.py 61건 — 전부 PASS</a:t>
             </a:r>
           </a:p>
           <a:p>

--- a/presentation/토큰_절약_발표_후속_에이전트셋팅.pptx
+++ b/presentation/토큰_절약_발표_후속_에이전트셋팅.pptx
@@ -3437,7 +3437,7 @@
                 <a:ea typeface="맑은 고딕"/>
                 <a:cs typeface="맑은 고딕"/>
               </a:rPr>
-              <a:t>이 덱의 모든 슬라이드는 agent_setup/ 에 대응 코드가 있고, IDE에 바로 붙습니다. 검증 159건 전부 PASS.</a:t>
+              <a:t>이 덱의 모든 슬라이드는 agent_setup/ 에 대응 코드가 있고, IDE에 바로 붙습니다. 검증 181건 전부 PASS.</a:t>
             </a:r>
           </a:p>
         </p:txBody>
@@ -12524,12 +12524,12 @@
         </p:nvSpPr>
         <p:spPr>
           <a:xfrm>
-            <a:off x="685800" y="4663440"/>
-            <a:ext cx="5440680" cy="1207008"/>
+            <a:off x="685800" y="4617720"/>
+            <a:ext cx="6720840" cy="1280160"/>
           </a:xfrm>
           <a:prstGeom prst="roundRect">
             <a:avLst>
-              <a:gd name="adj" fmla="val 6000"/>
+              <a:gd name="adj" fmla="val 5000"/>
             </a:avLst>
           </a:prstGeom>
           <a:solidFill>
@@ -12570,14 +12570,14 @@
         </p:nvSpPr>
         <p:spPr>
           <a:xfrm>
-            <a:off x="685800" y="4663440"/>
-            <a:ext cx="50292" cy="1207008"/>
+            <a:off x="685800" y="4617720"/>
+            <a:ext cx="50292" cy="1280160"/>
           </a:xfrm>
           <a:prstGeom prst="rect">
             <a:avLst/>
           </a:prstGeom>
           <a:solidFill>
-            <a:srgbClr val="5A9CFF"/>
+            <a:srgbClr val="36D399"/>
           </a:solidFill>
           <a:ln>
             <a:noFill/>
@@ -12614,27 +12614,27 @@
         </p:nvSpPr>
         <p:spPr>
           <a:xfrm>
-            <a:off x="996696" y="4901183"/>
-            <a:ext cx="4892040" cy="365760"/>
-          </a:xfrm>
-          <a:prstGeom prst="rect">
-            <a:avLst/>
-          </a:prstGeom>
-          <a:noFill/>
-        </p:spPr>
-        <p:txBody>
-          <a:bodyPr wrap="square" lIns="0" rIns="0" tIns="0" bIns="0" anchor="t">
-            <a:spAutoFit/>
-          </a:bodyPr>
-          <a:lstStyle/>
-          <a:p>
-            <a:pPr algn="l">
-              <a:lnSpc>
-                <a:spcPct val="115000"/>
-              </a:lnSpc>
-            </a:pPr>
-            <a:r>
-              <a:rPr sz="1500" b="1">
+            <a:off x="960120" y="4754880"/>
+            <a:ext cx="6309360" cy="320040"/>
+          </a:xfrm>
+          <a:prstGeom prst="rect">
+            <a:avLst/>
+          </a:prstGeom>
+          <a:noFill/>
+        </p:spPr>
+        <p:txBody>
+          <a:bodyPr wrap="square" lIns="0" rIns="0" tIns="0" bIns="0" anchor="t">
+            <a:spAutoFit/>
+          </a:bodyPr>
+          <a:lstStyle/>
+          <a:p>
+            <a:pPr algn="l">
+              <a:lnSpc>
+                <a:spcPct val="115000"/>
+              </a:lnSpc>
+            </a:pPr>
+            <a:r>
+              <a:rPr sz="1400" b="1">
                 <a:solidFill>
                   <a:srgbClr val="ECF1F6"/>
                 </a:solidFill>
@@ -12642,7 +12642,7 @@
                 <a:ea typeface="맑은 고딕"/>
                 <a:cs typeface="맑은 고딕"/>
               </a:rPr>
-              <a:t>규칙을 문서로도 준다</a:t>
+              <a:t>"규격에 맞다"고 말하려면 남의 구현이 붙어야 한다</a:t>
             </a:r>
           </a:p>
         </p:txBody>
@@ -12655,23 +12655,23 @@
         </p:nvSpPr>
         <p:spPr>
           <a:xfrm>
-            <a:off x="996696" y="5440679"/>
-            <a:ext cx="4892040" cy="292608"/>
-          </a:xfrm>
-          <a:prstGeom prst="rect">
-            <a:avLst/>
-          </a:prstGeom>
-          <a:noFill/>
-        </p:spPr>
-        <p:txBody>
-          <a:bodyPr wrap="square" lIns="0" rIns="0" tIns="0" bIns="0" anchor="t">
-            <a:spAutoFit/>
-          </a:bodyPr>
-          <a:lstStyle/>
-          <a:p>
-            <a:pPr algn="l">
-              <a:lnSpc>
-                <a:spcPct val="135000"/>
+            <a:off x="960120" y="5138928"/>
+            <a:ext cx="4297680" cy="731520"/>
+          </a:xfrm>
+          <a:prstGeom prst="rect">
+            <a:avLst/>
+          </a:prstGeom>
+          <a:noFill/>
+        </p:spPr>
+        <p:txBody>
+          <a:bodyPr wrap="square" lIns="0" rIns="0" tIns="0" bIns="0" anchor="t">
+            <a:spAutoFit/>
+          </a:bodyPr>
+          <a:lstStyle/>
+          <a:p>
+            <a:pPr algn="l">
+              <a:lnSpc>
+                <a:spcPct val="115000"/>
               </a:lnSpc>
               <a:spcBef>
                 <a:spcPts val="0"/>
@@ -12686,21 +12686,149 @@
                 <a:ea typeface="맑은 고딕"/>
                 <a:cs typeface="맑은 고딕"/>
               </a:rPr>
-              <a:t>AGENTS.md를 워크스페이스에 두면 도구를 언제 부를지까지 지킨다.</a:t>
-            </a:r>
-          </a:p>
-        </p:txBody>
-      </p:sp>
-      <p:sp>
-        <p:nvSpPr>
-          <p:cNvPr id="41" name="Rounded Rectangle 40"/>
+              <a:t>1층  자체 프로토콜 왕복</a:t>
+            </a:r>
+          </a:p>
+          <a:p>
+            <a:pPr algn="l">
+              <a:lnSpc>
+                <a:spcPct val="115000"/>
+              </a:lnSpc>
+              <a:spcBef>
+                <a:spcPts val="400"/>
+              </a:spcBef>
+            </a:pPr>
+            <a:r>
+              <a:rPr sz="1200" b="0">
+                <a:solidFill>
+                  <a:srgbClr val="93A4B5"/>
+                </a:solidFill>
+                <a:latin typeface="맑은 고딕"/>
+                <a:ea typeface="맑은 고딕"/>
+                <a:cs typeface="맑은 고딕"/>
+              </a:rPr>
+              <a:t>2층  공식 MCP SDK 클라이언트</a:t>
+            </a:r>
+          </a:p>
+          <a:p>
+            <a:pPr algn="l">
+              <a:lnSpc>
+                <a:spcPct val="115000"/>
+              </a:lnSpc>
+              <a:spcBef>
+                <a:spcPts val="400"/>
+              </a:spcBef>
+            </a:pPr>
+            <a:r>
+              <a:rPr sz="1200" b="0">
+                <a:solidFill>
+                  <a:srgbClr val="93A4B5"/>
+                </a:solidFill>
+                <a:latin typeface="맑은 고딕"/>
+                <a:ea typeface="맑은 고딕"/>
+                <a:cs typeface="맑은 고딕"/>
+              </a:rPr>
+              <a:t>3층  공식 Inspector (IDE 경로)</a:t>
+            </a:r>
+          </a:p>
+        </p:txBody>
+      </p:sp>
+      <p:sp>
+        <p:nvSpPr>
+          <p:cNvPr id="41" name="TextBox 40"/>
+          <p:cNvSpPr txBox="1"/>
+          <p:nvPr/>
+        </p:nvSpPr>
+        <p:spPr>
+          <a:xfrm>
+            <a:off x="5486400" y="5138928"/>
+            <a:ext cx="1828800" cy="731520"/>
+          </a:xfrm>
+          <a:prstGeom prst="rect">
+            <a:avLst/>
+          </a:prstGeom>
+          <a:noFill/>
+        </p:spPr>
+        <p:txBody>
+          <a:bodyPr wrap="square" lIns="0" rIns="0" tIns="0" bIns="0" anchor="t">
+            <a:spAutoFit/>
+          </a:bodyPr>
+          <a:lstStyle/>
+          <a:p>
+            <a:pPr algn="l">
+              <a:lnSpc>
+                <a:spcPct val="115000"/>
+              </a:lnSpc>
+              <a:spcBef>
+                <a:spcPts val="0"/>
+              </a:spcBef>
+            </a:pPr>
+            <a:r>
+              <a:rPr sz="1200" b="1">
+                <a:solidFill>
+                  <a:srgbClr val="36D399"/>
+                </a:solidFill>
+                <a:latin typeface="맑은 고딕"/>
+                <a:ea typeface="맑은 고딕"/>
+                <a:cs typeface="맑은 고딕"/>
+              </a:rPr>
+              <a:t>61/61</a:t>
+            </a:r>
+          </a:p>
+          <a:p>
+            <a:pPr algn="l">
+              <a:lnSpc>
+                <a:spcPct val="115000"/>
+              </a:lnSpc>
+              <a:spcBef>
+                <a:spcPts val="400"/>
+              </a:spcBef>
+            </a:pPr>
+            <a:r>
+              <a:rPr sz="1200" b="1">
+                <a:solidFill>
+                  <a:srgbClr val="36D399"/>
+                </a:solidFill>
+                <a:latin typeface="맑은 고딕"/>
+                <a:ea typeface="맑은 고딕"/>
+                <a:cs typeface="맑은 고딕"/>
+              </a:rPr>
+              <a:t>22/22</a:t>
+            </a:r>
+          </a:p>
+          <a:p>
+            <a:pPr algn="l">
+              <a:lnSpc>
+                <a:spcPct val="115000"/>
+              </a:lnSpc>
+              <a:spcBef>
+                <a:spcPts val="400"/>
+              </a:spcBef>
+            </a:pPr>
+            <a:r>
+              <a:rPr sz="1200" b="1">
+                <a:solidFill>
+                  <a:srgbClr val="36D399"/>
+                </a:solidFill>
+                <a:latin typeface="맑은 고딕"/>
+                <a:ea typeface="맑은 고딕"/>
+                <a:cs typeface="맑은 고딕"/>
+              </a:rPr>
+              <a:t>도구 5개 인식</a:t>
+            </a:r>
+          </a:p>
+        </p:txBody>
+      </p:sp>
+      <p:sp>
+        <p:nvSpPr>
+          <p:cNvPr id="42" name="Rounded Rectangle 41"/>
           <p:cNvSpPr/>
           <p:nvPr/>
         </p:nvSpPr>
         <p:spPr>
           <a:xfrm>
-            <a:off x="6309360" y="4663440"/>
-            <a:ext cx="5212080" cy="1207008"/>
+            <a:off x="7635240" y="4617720"/>
+            <a:ext cx="3886200" cy="1280160"/>
           </a:xfrm>
           <a:prstGeom prst="roundRect">
             <a:avLst>
@@ -12739,14 +12867,14 @@
       </p:sp>
       <p:sp>
         <p:nvSpPr>
-          <p:cNvPr id="42" name="Rectangle 41"/>
+          <p:cNvPr id="43" name="Rectangle 42"/>
           <p:cNvSpPr/>
           <p:nvPr/>
         </p:nvSpPr>
         <p:spPr>
           <a:xfrm>
-            <a:off x="6309360" y="4663440"/>
-            <a:ext cx="50292" cy="1207008"/>
+            <a:off x="7635240" y="4617720"/>
+            <a:ext cx="50292" cy="1280160"/>
           </a:xfrm>
           <a:prstGeom prst="rect">
             <a:avLst/>
@@ -12783,33 +12911,33 @@
       </p:sp>
       <p:sp>
         <p:nvSpPr>
-          <p:cNvPr id="43" name="TextBox 42"/>
-          <p:cNvSpPr txBox="1"/>
-          <p:nvPr/>
-        </p:nvSpPr>
-        <p:spPr>
-          <a:xfrm>
-            <a:off x="6620256" y="4901183"/>
-            <a:ext cx="4663440" cy="365760"/>
-          </a:xfrm>
-          <a:prstGeom prst="rect">
-            <a:avLst/>
-          </a:prstGeom>
-          <a:noFill/>
-        </p:spPr>
-        <p:txBody>
-          <a:bodyPr wrap="square" lIns="0" rIns="0" tIns="0" bIns="0" anchor="t">
-            <a:spAutoFit/>
-          </a:bodyPr>
-          <a:lstStyle/>
-          <a:p>
-            <a:pPr algn="l">
-              <a:lnSpc>
-                <a:spcPct val="115000"/>
-              </a:lnSpc>
-            </a:pPr>
-            <a:r>
-              <a:rPr sz="1500" b="1">
+          <p:cNvPr id="44" name="TextBox 43"/>
+          <p:cNvSpPr txBox="1"/>
+          <p:nvPr/>
+        </p:nvSpPr>
+        <p:spPr>
+          <a:xfrm>
+            <a:off x="7946136" y="4855464"/>
+            <a:ext cx="3337560" cy="365760"/>
+          </a:xfrm>
+          <a:prstGeom prst="rect">
+            <a:avLst/>
+          </a:prstGeom>
+          <a:noFill/>
+        </p:spPr>
+        <p:txBody>
+          <a:bodyPr wrap="square" lIns="0" rIns="0" tIns="0" bIns="0" anchor="t">
+            <a:spAutoFit/>
+          </a:bodyPr>
+          <a:lstStyle/>
+          <a:p>
+            <a:pPr algn="l">
+              <a:lnSpc>
+                <a:spcPct val="115000"/>
+              </a:lnSpc>
+            </a:pPr>
+            <a:r>
+              <a:rPr sz="1400" b="1">
                 <a:solidFill>
                   <a:srgbClr val="ECF1F6"/>
                 </a:solidFill>
@@ -12824,14 +12952,14 @@
       </p:sp>
       <p:sp>
         <p:nvSpPr>
-          <p:cNvPr id="44" name="TextBox 43"/>
-          <p:cNvSpPr txBox="1"/>
-          <p:nvPr/>
-        </p:nvSpPr>
-        <p:spPr>
-          <a:xfrm>
-            <a:off x="6620256" y="5440679"/>
-            <a:ext cx="4663440" cy="292608"/>
+          <p:cNvPr id="45" name="TextBox 44"/>
+          <p:cNvSpPr txBox="1"/>
+          <p:nvPr/>
+        </p:nvSpPr>
+        <p:spPr>
+          <a:xfrm>
+            <a:off x="7946136" y="5394959"/>
+            <a:ext cx="3337560" cy="365759"/>
           </a:xfrm>
           <a:prstGeom prst="rect">
             <a:avLst/>
@@ -12853,7 +12981,7 @@
               </a:spcBef>
             </a:pPr>
             <a:r>
-              <a:rPr sz="1200" b="0">
+              <a:rPr sz="1150" b="0">
                 <a:solidFill>
                   <a:srgbClr val="93A4B5"/>
                 </a:solidFill>
@@ -12861,14 +12989,14 @@
                 <a:ea typeface="맑은 고딕"/>
                 <a:cs typeface="맑은 고딕"/>
               </a:rPr>
-              <a:t>MCP 연결 실패가 UI에 잘 안 뜬다. 로그는 stderr로 직접 확인.</a:t>
-            </a:r>
-          </a:p>
-        </p:txBody>
-      </p:sp>
-      <p:sp>
-        <p:nvSpPr>
-          <p:cNvPr id="45" name="TextBox 44"/>
+              <a:t>연결 실패가 UI에 안 뜬다. 로그는 stderr.</a:t>
+            </a:r>
+          </a:p>
+        </p:txBody>
+      </p:sp>
+      <p:sp>
+        <p:nvSpPr>
+          <p:cNvPr id="46" name="TextBox 45"/>
           <p:cNvSpPr txBox="1"/>
           <p:nvPr/>
         </p:nvSpPr>
@@ -12902,7 +13030,7 @@
                 <a:ea typeface="맑은 고딕"/>
                 <a:cs typeface="맑은 고딕"/>
               </a:rPr>
-              <a:t>python3 agent_setup/test_mcp.py — 서버를 실제 프로세스로 띄워 프로토콜 왕복까지 검사합니다 (61/61 PASS).</a:t>
+              <a:t>bash agent_setup/verify_all.sh — 세 층위를 한 번에 돌립니다. AGENTS.md를 워크스페이스에 두면 도구 호출 시점까지 강제됩니다.</a:t>
             </a:r>
           </a:p>
         </p:txBody>

--- a/presentation/토큰_절약_발표_후속_에이전트셋팅.pptx
+++ b/presentation/토큰_절약_발표_후속_에이전트셋팅.pptx
@@ -11364,8 +11364,8 @@
         </p:nvSpPr>
         <p:spPr>
           <a:xfrm>
-            <a:off x="685800" y="2286000"/>
-            <a:ext cx="10835640" cy="384048"/>
+            <a:off x="685800" y="2212848"/>
+            <a:ext cx="10835640" cy="329184"/>
           </a:xfrm>
           <a:prstGeom prst="rect">
             <a:avLst/>
@@ -11408,8 +11408,8 @@
         </p:nvSpPr>
         <p:spPr>
           <a:xfrm>
-            <a:off x="813816" y="2368296"/>
-            <a:ext cx="1645920" cy="384048"/>
+            <a:off x="813816" y="2295144"/>
+            <a:ext cx="1645920" cy="329184"/>
           </a:xfrm>
           <a:prstGeom prst="rect">
             <a:avLst/>
@@ -11449,8 +11449,8 @@
         </p:nvSpPr>
         <p:spPr>
           <a:xfrm>
-            <a:off x="2642616" y="2368296"/>
-            <a:ext cx="2103120" cy="384048"/>
+            <a:off x="2642616" y="2295144"/>
+            <a:ext cx="2103120" cy="329184"/>
           </a:xfrm>
           <a:prstGeom prst="rect">
             <a:avLst/>
@@ -11490,8 +11490,8 @@
         </p:nvSpPr>
         <p:spPr>
           <a:xfrm>
-            <a:off x="4928616" y="2368296"/>
-            <a:ext cx="4160520" cy="384048"/>
+            <a:off x="4928616" y="2295144"/>
+            <a:ext cx="4160520" cy="329184"/>
           </a:xfrm>
           <a:prstGeom prst="rect">
             <a:avLst/>
@@ -11531,8 +11531,8 @@
         </p:nvSpPr>
         <p:spPr>
           <a:xfrm>
-            <a:off x="9272016" y="2368296"/>
-            <a:ext cx="2194560" cy="384048"/>
+            <a:off x="9272016" y="2295144"/>
+            <a:ext cx="2194560" cy="329184"/>
           </a:xfrm>
           <a:prstGeom prst="rect">
             <a:avLst/>
@@ -11572,8 +11572,8 @@
         </p:nvSpPr>
         <p:spPr>
           <a:xfrm>
-            <a:off x="685800" y="2670048"/>
-            <a:ext cx="10835640" cy="384048"/>
+            <a:off x="685800" y="2542032"/>
+            <a:ext cx="10835640" cy="329184"/>
           </a:xfrm>
           <a:prstGeom prst="rect">
             <a:avLst/>
@@ -11616,27 +11616,27 @@
         </p:nvSpPr>
         <p:spPr>
           <a:xfrm>
-            <a:off x="813816" y="2752344"/>
-            <a:ext cx="1645920" cy="384048"/>
-          </a:xfrm>
-          <a:prstGeom prst="rect">
-            <a:avLst/>
-          </a:prstGeom>
-          <a:noFill/>
-        </p:spPr>
-        <p:txBody>
-          <a:bodyPr wrap="square" lIns="0" rIns="0" tIns="0" bIns="0" anchor="t">
-            <a:spAutoFit/>
-          </a:bodyPr>
-          <a:lstStyle/>
-          <a:p>
-            <a:pPr algn="l">
-              <a:lnSpc>
-                <a:spcPct val="115000"/>
-              </a:lnSpc>
-            </a:pPr>
-            <a:r>
-              <a:rPr sz="1250" b="0">
+            <a:off x="813816" y="2624327"/>
+            <a:ext cx="1645920" cy="329184"/>
+          </a:xfrm>
+          <a:prstGeom prst="rect">
+            <a:avLst/>
+          </a:prstGeom>
+          <a:noFill/>
+        </p:spPr>
+        <p:txBody>
+          <a:bodyPr wrap="square" lIns="0" rIns="0" tIns="0" bIns="0" anchor="t">
+            <a:spAutoFit/>
+          </a:bodyPr>
+          <a:lstStyle/>
+          <a:p>
+            <a:pPr algn="l">
+              <a:lnSpc>
+                <a:spcPct val="115000"/>
+              </a:lnSpc>
+            </a:pPr>
+            <a:r>
+              <a:rPr sz="1200" b="0">
                 <a:solidFill>
                   <a:srgbClr val="ECF1F6"/>
                 </a:solidFill>
@@ -11657,27 +11657,27 @@
         </p:nvSpPr>
         <p:spPr>
           <a:xfrm>
-            <a:off x="2642616" y="2752344"/>
-            <a:ext cx="2103120" cy="384048"/>
-          </a:xfrm>
-          <a:prstGeom prst="rect">
-            <a:avLst/>
-          </a:prstGeom>
-          <a:noFill/>
-        </p:spPr>
-        <p:txBody>
-          <a:bodyPr wrap="square" lIns="0" rIns="0" tIns="0" bIns="0" anchor="t">
-            <a:spAutoFit/>
-          </a:bodyPr>
-          <a:lstStyle/>
-          <a:p>
-            <a:pPr algn="l">
-              <a:lnSpc>
-                <a:spcPct val="115000"/>
-              </a:lnSpc>
-            </a:pPr>
-            <a:r>
-              <a:rPr sz="1250" b="0">
+            <a:off x="2642616" y="2624327"/>
+            <a:ext cx="2103120" cy="329184"/>
+          </a:xfrm>
+          <a:prstGeom prst="rect">
+            <a:avLst/>
+          </a:prstGeom>
+          <a:noFill/>
+        </p:spPr>
+        <p:txBody>
+          <a:bodyPr wrap="square" lIns="0" rIns="0" tIns="0" bIns="0" anchor="t">
+            <a:spAutoFit/>
+          </a:bodyPr>
+          <a:lstStyle/>
+          <a:p>
+            <a:pPr algn="l">
+              <a:lnSpc>
+                <a:spcPct val="115000"/>
+              </a:lnSpc>
+            </a:pPr>
+            <a:r>
+              <a:rPr sz="1200" b="0">
                 <a:solidFill>
                   <a:srgbClr val="ECF1F6"/>
                 </a:solidFill>
@@ -11698,27 +11698,27 @@
         </p:nvSpPr>
         <p:spPr>
           <a:xfrm>
-            <a:off x="4928616" y="2752344"/>
-            <a:ext cx="4160520" cy="384048"/>
-          </a:xfrm>
-          <a:prstGeom prst="rect">
-            <a:avLst/>
-          </a:prstGeom>
-          <a:noFill/>
-        </p:spPr>
-        <p:txBody>
-          <a:bodyPr wrap="square" lIns="0" rIns="0" tIns="0" bIns="0" anchor="t">
-            <a:spAutoFit/>
-          </a:bodyPr>
-          <a:lstStyle/>
-          <a:p>
-            <a:pPr algn="l">
-              <a:lnSpc>
-                <a:spcPct val="115000"/>
-              </a:lnSpc>
-            </a:pPr>
-            <a:r>
-              <a:rPr sz="1250" b="0">
+            <a:off x="4928616" y="2624327"/>
+            <a:ext cx="4160520" cy="329184"/>
+          </a:xfrm>
+          <a:prstGeom prst="rect">
+            <a:avLst/>
+          </a:prstGeom>
+          <a:noFill/>
+        </p:spPr>
+        <p:txBody>
+          <a:bodyPr wrap="square" lIns="0" rIns="0" tIns="0" bIns="0" anchor="t">
+            <a:spAutoFit/>
+          </a:bodyPr>
+          <a:lstStyle/>
+          <a:p>
+            <a:pPr algn="l">
+              <a:lnSpc>
+                <a:spcPct val="115000"/>
+              </a:lnSpc>
+            </a:pPr>
+            <a:r>
+              <a:rPr sz="1200" b="0">
                 <a:solidFill>
                   <a:srgbClr val="ECF1F6"/>
                 </a:solidFill>
@@ -11739,27 +11739,27 @@
         </p:nvSpPr>
         <p:spPr>
           <a:xfrm>
-            <a:off x="9272016" y="2752344"/>
-            <a:ext cx="2194560" cy="384048"/>
-          </a:xfrm>
-          <a:prstGeom prst="rect">
-            <a:avLst/>
-          </a:prstGeom>
-          <a:noFill/>
-        </p:spPr>
-        <p:txBody>
-          <a:bodyPr wrap="square" lIns="0" rIns="0" tIns="0" bIns="0" anchor="t">
-            <a:spAutoFit/>
-          </a:bodyPr>
-          <a:lstStyle/>
-          <a:p>
-            <a:pPr algn="l">
-              <a:lnSpc>
-                <a:spcPct val="115000"/>
-              </a:lnSpc>
-            </a:pPr>
-            <a:r>
-              <a:rPr sz="1250" b="1">
+            <a:off x="9272016" y="2624327"/>
+            <a:ext cx="2194560" cy="329184"/>
+          </a:xfrm>
+          <a:prstGeom prst="rect">
+            <a:avLst/>
+          </a:prstGeom>
+          <a:noFill/>
+        </p:spPr>
+        <p:txBody>
+          <a:bodyPr wrap="square" lIns="0" rIns="0" tIns="0" bIns="0" anchor="t">
+            <a:spAutoFit/>
+          </a:bodyPr>
+          <a:lstStyle/>
+          <a:p>
+            <a:pPr algn="l">
+              <a:lnSpc>
+                <a:spcPct val="115000"/>
+              </a:lnSpc>
+            </a:pPr>
+            <a:r>
+              <a:rPr sz="1200" b="1">
                 <a:solidFill>
                   <a:srgbClr val="36D399"/>
                 </a:solidFill>
@@ -11780,27 +11780,27 @@
         </p:nvSpPr>
         <p:spPr>
           <a:xfrm>
-            <a:off x="813816" y="3136391"/>
-            <a:ext cx="1645920" cy="384048"/>
-          </a:xfrm>
-          <a:prstGeom prst="rect">
-            <a:avLst/>
-          </a:prstGeom>
-          <a:noFill/>
-        </p:spPr>
-        <p:txBody>
-          <a:bodyPr wrap="square" lIns="0" rIns="0" tIns="0" bIns="0" anchor="t">
-            <a:spAutoFit/>
-          </a:bodyPr>
-          <a:lstStyle/>
-          <a:p>
-            <a:pPr algn="l">
-              <a:lnSpc>
-                <a:spcPct val="115000"/>
-              </a:lnSpc>
-            </a:pPr>
-            <a:r>
-              <a:rPr sz="1250" b="0">
+            <a:off x="813816" y="2953511"/>
+            <a:ext cx="1645920" cy="329184"/>
+          </a:xfrm>
+          <a:prstGeom prst="rect">
+            <a:avLst/>
+          </a:prstGeom>
+          <a:noFill/>
+        </p:spPr>
+        <p:txBody>
+          <a:bodyPr wrap="square" lIns="0" rIns="0" tIns="0" bIns="0" anchor="t">
+            <a:spAutoFit/>
+          </a:bodyPr>
+          <a:lstStyle/>
+          <a:p>
+            <a:pPr algn="l">
+              <a:lnSpc>
+                <a:spcPct val="115000"/>
+              </a:lnSpc>
+            </a:pPr>
+            <a:r>
+              <a:rPr sz="1200" b="0">
                 <a:solidFill>
                   <a:srgbClr val="ECF1F6"/>
                 </a:solidFill>
@@ -11821,27 +11821,27 @@
         </p:nvSpPr>
         <p:spPr>
           <a:xfrm>
-            <a:off x="2642616" y="3136391"/>
-            <a:ext cx="2103120" cy="384048"/>
-          </a:xfrm>
-          <a:prstGeom prst="rect">
-            <a:avLst/>
-          </a:prstGeom>
-          <a:noFill/>
-        </p:spPr>
-        <p:txBody>
-          <a:bodyPr wrap="square" lIns="0" rIns="0" tIns="0" bIns="0" anchor="t">
-            <a:spAutoFit/>
-          </a:bodyPr>
-          <a:lstStyle/>
-          <a:p>
-            <a:pPr algn="l">
-              <a:lnSpc>
-                <a:spcPct val="115000"/>
-              </a:lnSpc>
-            </a:pPr>
-            <a:r>
-              <a:rPr sz="1250" b="0">
+            <a:off x="2642616" y="2953511"/>
+            <a:ext cx="2103120" cy="329184"/>
+          </a:xfrm>
+          <a:prstGeom prst="rect">
+            <a:avLst/>
+          </a:prstGeom>
+          <a:noFill/>
+        </p:spPr>
+        <p:txBody>
+          <a:bodyPr wrap="square" lIns="0" rIns="0" tIns="0" bIns="0" anchor="t">
+            <a:spAutoFit/>
+          </a:bodyPr>
+          <a:lstStyle/>
+          <a:p>
+            <a:pPr algn="l">
+              <a:lnSpc>
+                <a:spcPct val="115000"/>
+              </a:lnSpc>
+            </a:pPr>
+            <a:r>
+              <a:rPr sz="1200" b="0">
                 <a:solidFill>
                   <a:srgbClr val="ECF1F6"/>
                 </a:solidFill>
@@ -11862,27 +11862,27 @@
         </p:nvSpPr>
         <p:spPr>
           <a:xfrm>
-            <a:off x="4928616" y="3136391"/>
-            <a:ext cx="4160520" cy="384048"/>
-          </a:xfrm>
-          <a:prstGeom prst="rect">
-            <a:avLst/>
-          </a:prstGeom>
-          <a:noFill/>
-        </p:spPr>
-        <p:txBody>
-          <a:bodyPr wrap="square" lIns="0" rIns="0" tIns="0" bIns="0" anchor="t">
-            <a:spAutoFit/>
-          </a:bodyPr>
-          <a:lstStyle/>
-          <a:p>
-            <a:pPr algn="l">
-              <a:lnSpc>
-                <a:spcPct val="115000"/>
-              </a:lnSpc>
-            </a:pPr>
-            <a:r>
-              <a:rPr sz="1250" b="0">
+            <a:off x="4928616" y="2953511"/>
+            <a:ext cx="4160520" cy="329184"/>
+          </a:xfrm>
+          <a:prstGeom prst="rect">
+            <a:avLst/>
+          </a:prstGeom>
+          <a:noFill/>
+        </p:spPr>
+        <p:txBody>
+          <a:bodyPr wrap="square" lIns="0" rIns="0" tIns="0" bIns="0" anchor="t">
+            <a:spAutoFit/>
+          </a:bodyPr>
+          <a:lstStyle/>
+          <a:p>
+            <a:pPr algn="l">
+              <a:lnSpc>
+                <a:spcPct val="115000"/>
+              </a:lnSpc>
+            </a:pPr>
+            <a:r>
+              <a:rPr sz="1200" b="0">
                 <a:solidFill>
                   <a:srgbClr val="ECF1F6"/>
                 </a:solidFill>
@@ -11903,27 +11903,27 @@
         </p:nvSpPr>
         <p:spPr>
           <a:xfrm>
-            <a:off x="9272016" y="3136391"/>
-            <a:ext cx="2194560" cy="384048"/>
-          </a:xfrm>
-          <a:prstGeom prst="rect">
-            <a:avLst/>
-          </a:prstGeom>
-          <a:noFill/>
-        </p:spPr>
-        <p:txBody>
-          <a:bodyPr wrap="square" lIns="0" rIns="0" tIns="0" bIns="0" anchor="t">
-            <a:spAutoFit/>
-          </a:bodyPr>
-          <a:lstStyle/>
-          <a:p>
-            <a:pPr algn="l">
-              <a:lnSpc>
-                <a:spcPct val="115000"/>
-              </a:lnSpc>
-            </a:pPr>
-            <a:r>
-              <a:rPr sz="1250" b="1">
+            <a:off x="9272016" y="2953511"/>
+            <a:ext cx="2194560" cy="329184"/>
+          </a:xfrm>
+          <a:prstGeom prst="rect">
+            <a:avLst/>
+          </a:prstGeom>
+          <a:noFill/>
+        </p:spPr>
+        <p:txBody>
+          <a:bodyPr wrap="square" lIns="0" rIns="0" tIns="0" bIns="0" anchor="t">
+            <a:spAutoFit/>
+          </a:bodyPr>
+          <a:lstStyle/>
+          <a:p>
+            <a:pPr algn="l">
+              <a:lnSpc>
+                <a:spcPct val="115000"/>
+              </a:lnSpc>
+            </a:pPr>
+            <a:r>
+              <a:rPr sz="1200" b="1">
                 <a:solidFill>
                   <a:srgbClr val="5A9CFF"/>
                 </a:solidFill>
@@ -11944,8 +11944,8 @@
         </p:nvSpPr>
         <p:spPr>
           <a:xfrm>
-            <a:off x="685800" y="3438144"/>
-            <a:ext cx="10835640" cy="384048"/>
+            <a:off x="685800" y="3200400"/>
+            <a:ext cx="10835640" cy="329184"/>
           </a:xfrm>
           <a:prstGeom prst="rect">
             <a:avLst/>
@@ -11988,27 +11988,27 @@
         </p:nvSpPr>
         <p:spPr>
           <a:xfrm>
-            <a:off x="813816" y="3520439"/>
-            <a:ext cx="1645920" cy="384048"/>
-          </a:xfrm>
-          <a:prstGeom prst="rect">
-            <a:avLst/>
-          </a:prstGeom>
-          <a:noFill/>
-        </p:spPr>
-        <p:txBody>
-          <a:bodyPr wrap="square" lIns="0" rIns="0" tIns="0" bIns="0" anchor="t">
-            <a:spAutoFit/>
-          </a:bodyPr>
-          <a:lstStyle/>
-          <a:p>
-            <a:pPr algn="l">
-              <a:lnSpc>
-                <a:spcPct val="115000"/>
-              </a:lnSpc>
-            </a:pPr>
-            <a:r>
-              <a:rPr sz="1250" b="0">
+            <a:off x="813816" y="3282696"/>
+            <a:ext cx="1645920" cy="329184"/>
+          </a:xfrm>
+          <a:prstGeom prst="rect">
+            <a:avLst/>
+          </a:prstGeom>
+          <a:noFill/>
+        </p:spPr>
+        <p:txBody>
+          <a:bodyPr wrap="square" lIns="0" rIns="0" tIns="0" bIns="0" anchor="t">
+            <a:spAutoFit/>
+          </a:bodyPr>
+          <a:lstStyle/>
+          <a:p>
+            <a:pPr algn="l">
+              <a:lnSpc>
+                <a:spcPct val="115000"/>
+              </a:lnSpc>
+            </a:pPr>
+            <a:r>
+              <a:rPr sz="1200" b="0">
                 <a:solidFill>
                   <a:srgbClr val="ECF1F6"/>
                 </a:solidFill>
@@ -12029,27 +12029,27 @@
         </p:nvSpPr>
         <p:spPr>
           <a:xfrm>
-            <a:off x="2642616" y="3520439"/>
-            <a:ext cx="2103120" cy="384048"/>
-          </a:xfrm>
-          <a:prstGeom prst="rect">
-            <a:avLst/>
-          </a:prstGeom>
-          <a:noFill/>
-        </p:spPr>
-        <p:txBody>
-          <a:bodyPr wrap="square" lIns="0" rIns="0" tIns="0" bIns="0" anchor="t">
-            <a:spAutoFit/>
-          </a:bodyPr>
-          <a:lstStyle/>
-          <a:p>
-            <a:pPr algn="l">
-              <a:lnSpc>
-                <a:spcPct val="115000"/>
-              </a:lnSpc>
-            </a:pPr>
-            <a:r>
-              <a:rPr sz="1250" b="0">
+            <a:off x="2642616" y="3282696"/>
+            <a:ext cx="2103120" cy="329184"/>
+          </a:xfrm>
+          <a:prstGeom prst="rect">
+            <a:avLst/>
+          </a:prstGeom>
+          <a:noFill/>
+        </p:spPr>
+        <p:txBody>
+          <a:bodyPr wrap="square" lIns="0" rIns="0" tIns="0" bIns="0" anchor="t">
+            <a:spAutoFit/>
+          </a:bodyPr>
+          <a:lstStyle/>
+          <a:p>
+            <a:pPr algn="l">
+              <a:lnSpc>
+                <a:spcPct val="115000"/>
+              </a:lnSpc>
+            </a:pPr>
+            <a:r>
+              <a:rPr sz="1200" b="0">
                 <a:solidFill>
                   <a:srgbClr val="ECF1F6"/>
                 </a:solidFill>
@@ -12070,27 +12070,27 @@
         </p:nvSpPr>
         <p:spPr>
           <a:xfrm>
-            <a:off x="4928616" y="3520439"/>
-            <a:ext cx="4160520" cy="384048"/>
-          </a:xfrm>
-          <a:prstGeom prst="rect">
-            <a:avLst/>
-          </a:prstGeom>
-          <a:noFill/>
-        </p:spPr>
-        <p:txBody>
-          <a:bodyPr wrap="square" lIns="0" rIns="0" tIns="0" bIns="0" anchor="t">
-            <a:spAutoFit/>
-          </a:bodyPr>
-          <a:lstStyle/>
-          <a:p>
-            <a:pPr algn="l">
-              <a:lnSpc>
-                <a:spcPct val="115000"/>
-              </a:lnSpc>
-            </a:pPr>
-            <a:r>
-              <a:rPr sz="1250" b="0">
+            <a:off x="4928616" y="3282696"/>
+            <a:ext cx="4160520" cy="329184"/>
+          </a:xfrm>
+          <a:prstGeom prst="rect">
+            <a:avLst/>
+          </a:prstGeom>
+          <a:noFill/>
+        </p:spPr>
+        <p:txBody>
+          <a:bodyPr wrap="square" lIns="0" rIns="0" tIns="0" bIns="0" anchor="t">
+            <a:spAutoFit/>
+          </a:bodyPr>
+          <a:lstStyle/>
+          <a:p>
+            <a:pPr algn="l">
+              <a:lnSpc>
+                <a:spcPct val="115000"/>
+              </a:lnSpc>
+            </a:pPr>
+            <a:r>
+              <a:rPr sz="1200" b="0">
                 <a:solidFill>
                   <a:srgbClr val="ECF1F6"/>
                 </a:solidFill>
@@ -12111,27 +12111,27 @@
         </p:nvSpPr>
         <p:spPr>
           <a:xfrm>
-            <a:off x="9272016" y="3520439"/>
-            <a:ext cx="2194560" cy="384048"/>
-          </a:xfrm>
-          <a:prstGeom prst="rect">
-            <a:avLst/>
-          </a:prstGeom>
-          <a:noFill/>
-        </p:spPr>
-        <p:txBody>
-          <a:bodyPr wrap="square" lIns="0" rIns="0" tIns="0" bIns="0" anchor="t">
-            <a:spAutoFit/>
-          </a:bodyPr>
-          <a:lstStyle/>
-          <a:p>
-            <a:pPr algn="l">
-              <a:lnSpc>
-                <a:spcPct val="115000"/>
-              </a:lnSpc>
-            </a:pPr>
-            <a:r>
-              <a:rPr sz="1250" b="1">
+            <a:off x="9272016" y="3282696"/>
+            <a:ext cx="2194560" cy="329184"/>
+          </a:xfrm>
+          <a:prstGeom prst="rect">
+            <a:avLst/>
+          </a:prstGeom>
+          <a:noFill/>
+        </p:spPr>
+        <p:txBody>
+          <a:bodyPr wrap="square" lIns="0" rIns="0" tIns="0" bIns="0" anchor="t">
+            <a:spAutoFit/>
+          </a:bodyPr>
+          <a:lstStyle/>
+          <a:p>
+            <a:pPr algn="l">
+              <a:lnSpc>
+                <a:spcPct val="115000"/>
+              </a:lnSpc>
+            </a:pPr>
+            <a:r>
+              <a:rPr sz="1200" b="1">
                 <a:solidFill>
                   <a:srgbClr val="36D399"/>
                 </a:solidFill>
@@ -12152,27 +12152,27 @@
         </p:nvSpPr>
         <p:spPr>
           <a:xfrm>
-            <a:off x="813816" y="3904487"/>
-            <a:ext cx="1645920" cy="384048"/>
-          </a:xfrm>
-          <a:prstGeom prst="rect">
-            <a:avLst/>
-          </a:prstGeom>
-          <a:noFill/>
-        </p:spPr>
-        <p:txBody>
-          <a:bodyPr wrap="square" lIns="0" rIns="0" tIns="0" bIns="0" anchor="t">
-            <a:spAutoFit/>
-          </a:bodyPr>
-          <a:lstStyle/>
-          <a:p>
-            <a:pPr algn="l">
-              <a:lnSpc>
-                <a:spcPct val="115000"/>
-              </a:lnSpc>
-            </a:pPr>
-            <a:r>
-              <a:rPr sz="1250" b="0">
+            <a:off x="813816" y="3611879"/>
+            <a:ext cx="1645920" cy="329184"/>
+          </a:xfrm>
+          <a:prstGeom prst="rect">
+            <a:avLst/>
+          </a:prstGeom>
+          <a:noFill/>
+        </p:spPr>
+        <p:txBody>
+          <a:bodyPr wrap="square" lIns="0" rIns="0" tIns="0" bIns="0" anchor="t">
+            <a:spAutoFit/>
+          </a:bodyPr>
+          <a:lstStyle/>
+          <a:p>
+            <a:pPr algn="l">
+              <a:lnSpc>
+                <a:spcPct val="115000"/>
+              </a:lnSpc>
+            </a:pPr>
+            <a:r>
+              <a:rPr sz="1200" b="0">
                 <a:solidFill>
                   <a:srgbClr val="ECF1F6"/>
                 </a:solidFill>
@@ -12193,27 +12193,27 @@
         </p:nvSpPr>
         <p:spPr>
           <a:xfrm>
-            <a:off x="2642616" y="3904487"/>
-            <a:ext cx="2103120" cy="384048"/>
-          </a:xfrm>
-          <a:prstGeom prst="rect">
-            <a:avLst/>
-          </a:prstGeom>
-          <a:noFill/>
-        </p:spPr>
-        <p:txBody>
-          <a:bodyPr wrap="square" lIns="0" rIns="0" tIns="0" bIns="0" anchor="t">
-            <a:spAutoFit/>
-          </a:bodyPr>
-          <a:lstStyle/>
-          <a:p>
-            <a:pPr algn="l">
-              <a:lnSpc>
-                <a:spcPct val="115000"/>
-              </a:lnSpc>
-            </a:pPr>
-            <a:r>
-              <a:rPr sz="1250" b="0">
+            <a:off x="2642616" y="3611879"/>
+            <a:ext cx="2103120" cy="329184"/>
+          </a:xfrm>
+          <a:prstGeom prst="rect">
+            <a:avLst/>
+          </a:prstGeom>
+          <a:noFill/>
+        </p:spPr>
+        <p:txBody>
+          <a:bodyPr wrap="square" lIns="0" rIns="0" tIns="0" bIns="0" anchor="t">
+            <a:spAutoFit/>
+          </a:bodyPr>
+          <a:lstStyle/>
+          <a:p>
+            <a:pPr algn="l">
+              <a:lnSpc>
+                <a:spcPct val="115000"/>
+              </a:lnSpc>
+            </a:pPr>
+            <a:r>
+              <a:rPr sz="1200" b="0">
                 <a:solidFill>
                   <a:srgbClr val="ECF1F6"/>
                 </a:solidFill>
@@ -12234,27 +12234,27 @@
         </p:nvSpPr>
         <p:spPr>
           <a:xfrm>
-            <a:off x="4928616" y="3904487"/>
-            <a:ext cx="4160520" cy="384048"/>
-          </a:xfrm>
-          <a:prstGeom prst="rect">
-            <a:avLst/>
-          </a:prstGeom>
-          <a:noFill/>
-        </p:spPr>
-        <p:txBody>
-          <a:bodyPr wrap="square" lIns="0" rIns="0" tIns="0" bIns="0" anchor="t">
-            <a:spAutoFit/>
-          </a:bodyPr>
-          <a:lstStyle/>
-          <a:p>
-            <a:pPr algn="l">
-              <a:lnSpc>
-                <a:spcPct val="115000"/>
-              </a:lnSpc>
-            </a:pPr>
-            <a:r>
-              <a:rPr sz="1250" b="0">
+            <a:off x="4928616" y="3611879"/>
+            <a:ext cx="4160520" cy="329184"/>
+          </a:xfrm>
+          <a:prstGeom prst="rect">
+            <a:avLst/>
+          </a:prstGeom>
+          <a:noFill/>
+        </p:spPr>
+        <p:txBody>
+          <a:bodyPr wrap="square" lIns="0" rIns="0" tIns="0" bIns="0" anchor="t">
+            <a:spAutoFit/>
+          </a:bodyPr>
+          <a:lstStyle/>
+          <a:p>
+            <a:pPr algn="l">
+              <a:lnSpc>
+                <a:spcPct val="115000"/>
+              </a:lnSpc>
+            </a:pPr>
+            <a:r>
+              <a:rPr sz="1200" b="0">
                 <a:solidFill>
                   <a:srgbClr val="ECF1F6"/>
                 </a:solidFill>
@@ -12275,27 +12275,27 @@
         </p:nvSpPr>
         <p:spPr>
           <a:xfrm>
-            <a:off x="9272016" y="3904487"/>
-            <a:ext cx="2194560" cy="384048"/>
-          </a:xfrm>
-          <a:prstGeom prst="rect">
-            <a:avLst/>
-          </a:prstGeom>
-          <a:noFill/>
-        </p:spPr>
-        <p:txBody>
-          <a:bodyPr wrap="square" lIns="0" rIns="0" tIns="0" bIns="0" anchor="t">
-            <a:spAutoFit/>
-          </a:bodyPr>
-          <a:lstStyle/>
-          <a:p>
-            <a:pPr algn="l">
-              <a:lnSpc>
-                <a:spcPct val="115000"/>
-              </a:lnSpc>
-            </a:pPr>
-            <a:r>
-              <a:rPr sz="1250" b="1">
+            <a:off x="9272016" y="3611879"/>
+            <a:ext cx="2194560" cy="329184"/>
+          </a:xfrm>
+          <a:prstGeom prst="rect">
+            <a:avLst/>
+          </a:prstGeom>
+          <a:noFill/>
+        </p:spPr>
+        <p:txBody>
+          <a:bodyPr wrap="square" lIns="0" rIns="0" tIns="0" bIns="0" anchor="t">
+            <a:spAutoFit/>
+          </a:bodyPr>
+          <a:lstStyle/>
+          <a:p>
+            <a:pPr algn="l">
+              <a:lnSpc>
+                <a:spcPct val="115000"/>
+              </a:lnSpc>
+            </a:pPr>
+            <a:r>
+              <a:rPr sz="1200" b="1">
                 <a:solidFill>
                   <a:srgbClr val="36D399"/>
                 </a:solidFill>
@@ -12316,8 +12316,8 @@
         </p:nvSpPr>
         <p:spPr>
           <a:xfrm>
-            <a:off x="685800" y="4206240"/>
-            <a:ext cx="10835640" cy="384048"/>
+            <a:off x="685800" y="3858768"/>
+            <a:ext cx="10835640" cy="329184"/>
           </a:xfrm>
           <a:prstGeom prst="rect">
             <a:avLst/>
@@ -12360,27 +12360,27 @@
         </p:nvSpPr>
         <p:spPr>
           <a:xfrm>
-            <a:off x="813816" y="4288536"/>
-            <a:ext cx="1645920" cy="384048"/>
-          </a:xfrm>
-          <a:prstGeom prst="rect">
-            <a:avLst/>
-          </a:prstGeom>
-          <a:noFill/>
-        </p:spPr>
-        <p:txBody>
-          <a:bodyPr wrap="square" lIns="0" rIns="0" tIns="0" bIns="0" anchor="t">
-            <a:spAutoFit/>
-          </a:bodyPr>
-          <a:lstStyle/>
-          <a:p>
-            <a:pPr algn="l">
-              <a:lnSpc>
-                <a:spcPct val="115000"/>
-              </a:lnSpc>
-            </a:pPr>
-            <a:r>
-              <a:rPr sz="1250" b="0">
+            <a:off x="813816" y="3941063"/>
+            <a:ext cx="1645920" cy="329184"/>
+          </a:xfrm>
+          <a:prstGeom prst="rect">
+            <a:avLst/>
+          </a:prstGeom>
+          <a:noFill/>
+        </p:spPr>
+        <p:txBody>
+          <a:bodyPr wrap="square" lIns="0" rIns="0" tIns="0" bIns="0" anchor="t">
+            <a:spAutoFit/>
+          </a:bodyPr>
+          <a:lstStyle/>
+          <a:p>
+            <a:pPr algn="l">
+              <a:lnSpc>
+                <a:spcPct val="115000"/>
+              </a:lnSpc>
+            </a:pPr>
+            <a:r>
+              <a:rPr sz="1200" b="0">
                 <a:solidFill>
                   <a:srgbClr val="ECF1F6"/>
                 </a:solidFill>
@@ -12401,27 +12401,27 @@
         </p:nvSpPr>
         <p:spPr>
           <a:xfrm>
-            <a:off x="2642616" y="4288536"/>
-            <a:ext cx="2103120" cy="384048"/>
-          </a:xfrm>
-          <a:prstGeom prst="rect">
-            <a:avLst/>
-          </a:prstGeom>
-          <a:noFill/>
-        </p:spPr>
-        <p:txBody>
-          <a:bodyPr wrap="square" lIns="0" rIns="0" tIns="0" bIns="0" anchor="t">
-            <a:spAutoFit/>
-          </a:bodyPr>
-          <a:lstStyle/>
-          <a:p>
-            <a:pPr algn="l">
-              <a:lnSpc>
-                <a:spcPct val="115000"/>
-              </a:lnSpc>
-            </a:pPr>
-            <a:r>
-              <a:rPr sz="1250" b="0">
+            <a:off x="2642616" y="3941063"/>
+            <a:ext cx="2103120" cy="329184"/>
+          </a:xfrm>
+          <a:prstGeom prst="rect">
+            <a:avLst/>
+          </a:prstGeom>
+          <a:noFill/>
+        </p:spPr>
+        <p:txBody>
+          <a:bodyPr wrap="square" lIns="0" rIns="0" tIns="0" bIns="0" anchor="t">
+            <a:spAutoFit/>
+          </a:bodyPr>
+          <a:lstStyle/>
+          <a:p>
+            <a:pPr algn="l">
+              <a:lnSpc>
+                <a:spcPct val="115000"/>
+              </a:lnSpc>
+            </a:pPr>
+            <a:r>
+              <a:rPr sz="1200" b="0">
                 <a:solidFill>
                   <a:srgbClr val="ECF1F6"/>
                 </a:solidFill>
@@ -12442,27 +12442,27 @@
         </p:nvSpPr>
         <p:spPr>
           <a:xfrm>
-            <a:off x="4928616" y="4288536"/>
-            <a:ext cx="4160520" cy="384048"/>
-          </a:xfrm>
-          <a:prstGeom prst="rect">
-            <a:avLst/>
-          </a:prstGeom>
-          <a:noFill/>
-        </p:spPr>
-        <p:txBody>
-          <a:bodyPr wrap="square" lIns="0" rIns="0" tIns="0" bIns="0" anchor="t">
-            <a:spAutoFit/>
-          </a:bodyPr>
-          <a:lstStyle/>
-          <a:p>
-            <a:pPr algn="l">
-              <a:lnSpc>
-                <a:spcPct val="115000"/>
-              </a:lnSpc>
-            </a:pPr>
-            <a:r>
-              <a:rPr sz="1250" b="0">
+            <a:off x="4928616" y="3941063"/>
+            <a:ext cx="4160520" cy="329184"/>
+          </a:xfrm>
+          <a:prstGeom prst="rect">
+            <a:avLst/>
+          </a:prstGeom>
+          <a:noFill/>
+        </p:spPr>
+        <p:txBody>
+          <a:bodyPr wrap="square" lIns="0" rIns="0" tIns="0" bIns="0" anchor="t">
+            <a:spAutoFit/>
+          </a:bodyPr>
+          <a:lstStyle/>
+          <a:p>
+            <a:pPr algn="l">
+              <a:lnSpc>
+                <a:spcPct val="115000"/>
+              </a:lnSpc>
+            </a:pPr>
+            <a:r>
+              <a:rPr sz="1200" b="0">
                 <a:solidFill>
                   <a:srgbClr val="ECF1F6"/>
                 </a:solidFill>
@@ -12483,27 +12483,27 @@
         </p:nvSpPr>
         <p:spPr>
           <a:xfrm>
-            <a:off x="9272016" y="4288536"/>
-            <a:ext cx="2194560" cy="384048"/>
-          </a:xfrm>
-          <a:prstGeom prst="rect">
-            <a:avLst/>
-          </a:prstGeom>
-          <a:noFill/>
-        </p:spPr>
-        <p:txBody>
-          <a:bodyPr wrap="square" lIns="0" rIns="0" tIns="0" bIns="0" anchor="t">
-            <a:spAutoFit/>
-          </a:bodyPr>
-          <a:lstStyle/>
-          <a:p>
-            <a:pPr algn="l">
-              <a:lnSpc>
-                <a:spcPct val="115000"/>
-              </a:lnSpc>
-            </a:pPr>
-            <a:r>
-              <a:rPr sz="1250" b="1">
+            <a:off x="9272016" y="3941063"/>
+            <a:ext cx="2194560" cy="329184"/>
+          </a:xfrm>
+          <a:prstGeom prst="rect">
+            <a:avLst/>
+          </a:prstGeom>
+          <a:noFill/>
+        </p:spPr>
+        <p:txBody>
+          <a:bodyPr wrap="square" lIns="0" rIns="0" tIns="0" bIns="0" anchor="t">
+            <a:spAutoFit/>
+          </a:bodyPr>
+          <a:lstStyle/>
+          <a:p>
+            <a:pPr algn="l">
+              <a:lnSpc>
+                <a:spcPct val="115000"/>
+              </a:lnSpc>
+            </a:pPr>
+            <a:r>
+              <a:rPr sz="1200" b="1">
                 <a:solidFill>
                   <a:srgbClr val="5A9CFF"/>
                 </a:solidFill>
@@ -12524,8 +12524,8 @@
         </p:nvSpPr>
         <p:spPr>
           <a:xfrm>
-            <a:off x="685800" y="4617720"/>
-            <a:ext cx="6720840" cy="1280160"/>
+            <a:off x="685800" y="4462272"/>
+            <a:ext cx="6720840" cy="1572768"/>
           </a:xfrm>
           <a:prstGeom prst="roundRect">
             <a:avLst>
@@ -12570,8 +12570,8 @@
         </p:nvSpPr>
         <p:spPr>
           <a:xfrm>
-            <a:off x="685800" y="4617720"/>
-            <a:ext cx="50292" cy="1280160"/>
+            <a:off x="685800" y="4462272"/>
+            <a:ext cx="50292" cy="1572768"/>
           </a:xfrm>
           <a:prstGeom prst="rect">
             <a:avLst/>
@@ -12614,8 +12614,8 @@
         </p:nvSpPr>
         <p:spPr>
           <a:xfrm>
-            <a:off x="960120" y="4754880"/>
-            <a:ext cx="6309360" cy="320040"/>
+            <a:off x="960120" y="4572000"/>
+            <a:ext cx="6309360" cy="292608"/>
           </a:xfrm>
           <a:prstGeom prst="rect">
             <a:avLst/>
@@ -12655,8 +12655,8 @@
         </p:nvSpPr>
         <p:spPr>
           <a:xfrm>
-            <a:off x="960120" y="5138928"/>
-            <a:ext cx="4297680" cy="731520"/>
+            <a:off x="960120" y="4919472"/>
+            <a:ext cx="4297680" cy="1051560"/>
           </a:xfrm>
           <a:prstGeom prst="rect">
             <a:avLst/>
@@ -12731,6 +12731,27 @@
               <a:t>3층  공식 Inspector (IDE 경로)</a:t>
             </a:r>
           </a:p>
+          <a:p>
+            <a:pPr algn="l">
+              <a:lnSpc>
+                <a:spcPct val="115000"/>
+              </a:lnSpc>
+              <a:spcBef>
+                <a:spcPts val="400"/>
+              </a:spcBef>
+            </a:pPr>
+            <a:r>
+              <a:rPr sz="1200" b="0">
+                <a:solidFill>
+                  <a:srgbClr val="93A4B5"/>
+                </a:solidFill>
+                <a:latin typeface="맑은 고딕"/>
+                <a:ea typeface="맑은 고딕"/>
+                <a:cs typeface="맑은 고딕"/>
+              </a:rPr>
+              <a:t>4층  설정 파일에서 출발한 연결</a:t>
+            </a:r>
+          </a:p>
         </p:txBody>
       </p:sp>
       <p:sp>
@@ -12741,8 +12762,8 @@
         </p:nvSpPr>
         <p:spPr>
           <a:xfrm>
-            <a:off x="5486400" y="5138928"/>
-            <a:ext cx="1828800" cy="731520"/>
+            <a:off x="5486400" y="4919472"/>
+            <a:ext cx="1828800" cy="1051560"/>
           </a:xfrm>
           <a:prstGeom prst="rect">
             <a:avLst/>
@@ -12817,6 +12838,27 @@
               <a:t>도구 5개 인식</a:t>
             </a:r>
           </a:p>
+          <a:p>
+            <a:pPr algn="l">
+              <a:lnSpc>
+                <a:spcPct val="115000"/>
+              </a:lnSpc>
+              <a:spcBef>
+                <a:spcPts val="400"/>
+              </a:spcBef>
+            </a:pPr>
+            <a:r>
+              <a:rPr sz="1200" b="1">
+                <a:solidFill>
+                  <a:srgbClr val="36D399"/>
+                </a:solidFill>
+                <a:latin typeface="맑은 고딕"/>
+                <a:ea typeface="맑은 고딕"/>
+                <a:cs typeface="맑은 고딕"/>
+              </a:rPr>
+              <a:t>연결·호출 확인</a:t>
+            </a:r>
+          </a:p>
         </p:txBody>
       </p:sp>
       <p:sp>
@@ -12827,8 +12869,8 @@
         </p:nvSpPr>
         <p:spPr>
           <a:xfrm>
-            <a:off x="7635240" y="4617720"/>
-            <a:ext cx="3886200" cy="1280160"/>
+            <a:off x="7635240" y="4462272"/>
+            <a:ext cx="3886200" cy="1572768"/>
           </a:xfrm>
           <a:prstGeom prst="roundRect">
             <a:avLst>
@@ -12873,8 +12915,8 @@
         </p:nvSpPr>
         <p:spPr>
           <a:xfrm>
-            <a:off x="7635240" y="4617720"/>
-            <a:ext cx="50292" cy="1280160"/>
+            <a:off x="7635240" y="4462272"/>
+            <a:ext cx="50292" cy="1572768"/>
           </a:xfrm>
           <a:prstGeom prst="rect">
             <a:avLst/>
@@ -12917,7 +12959,7 @@
         </p:nvSpPr>
         <p:spPr>
           <a:xfrm>
-            <a:off x="7946136" y="4855464"/>
+            <a:off x="7946136" y="4700016"/>
             <a:ext cx="3337560" cy="365760"/>
           </a:xfrm>
           <a:prstGeom prst="rect">
@@ -12958,8 +13000,8 @@
         </p:nvSpPr>
         <p:spPr>
           <a:xfrm>
-            <a:off x="7946136" y="5394959"/>
-            <a:ext cx="3337560" cy="365759"/>
+            <a:off x="7946136" y="5239512"/>
+            <a:ext cx="3337560" cy="658368"/>
           </a:xfrm>
           <a:prstGeom prst="rect">
             <a:avLst/>
@@ -13002,7 +13044,7 @@
         </p:nvSpPr>
         <p:spPr>
           <a:xfrm>
-            <a:off x="685800" y="6053328"/>
+            <a:off x="685800" y="6144768"/>
             <a:ext cx="10789920" cy="320040"/>
           </a:xfrm>
           <a:prstGeom prst="rect">
@@ -13030,7 +13072,7 @@
                 <a:ea typeface="맑은 고딕"/>
                 <a:cs typeface="맑은 고딕"/>
               </a:rPr>
-              <a:t>bash agent_setup/verify_all.sh — 세 층위를 한 번에 돌립니다. AGENTS.md를 워크스페이스에 두면 도구 호출 시점까지 강제됩니다.</a:t>
+              <a:t>bash agent_setup/verify_all.sh — 네 층위를 한 번에 돌립니다. AGENTS.md를 워크스페이스에 두면 도구 호출 시점까지 강제됩니다.</a:t>
             </a:r>
           </a:p>
         </p:txBody>
@@ -13357,7 +13399,7 @@
         </p:nvSpPr>
         <p:spPr>
           <a:xfrm>
-            <a:off x="685800" y="2286000"/>
+            <a:off x="685800" y="2212848"/>
             <a:ext cx="10835640" cy="384048"/>
           </a:xfrm>
           <a:prstGeom prst="rect">
@@ -13401,7 +13443,7 @@
         </p:nvSpPr>
         <p:spPr>
           <a:xfrm>
-            <a:off x="813816" y="2368296"/>
+            <a:off x="813816" y="2295144"/>
             <a:ext cx="868680" cy="384048"/>
           </a:xfrm>
           <a:prstGeom prst="rect">
@@ -13442,7 +13484,7 @@
         </p:nvSpPr>
         <p:spPr>
           <a:xfrm>
-            <a:off x="1865376" y="2368296"/>
+            <a:off x="1865376" y="2295144"/>
             <a:ext cx="2194560" cy="384048"/>
           </a:xfrm>
           <a:prstGeom prst="rect">
@@ -13483,7 +13525,7 @@
         </p:nvSpPr>
         <p:spPr>
           <a:xfrm>
-            <a:off x="4242816" y="2368296"/>
+            <a:off x="4242816" y="2295144"/>
             <a:ext cx="3017520" cy="384048"/>
           </a:xfrm>
           <a:prstGeom prst="rect">
@@ -13524,7 +13566,7 @@
         </p:nvSpPr>
         <p:spPr>
           <a:xfrm>
-            <a:off x="7443216" y="2368296"/>
+            <a:off x="7443216" y="2295144"/>
             <a:ext cx="2286000" cy="384048"/>
           </a:xfrm>
           <a:prstGeom prst="rect">
@@ -13565,7 +13607,7 @@
         </p:nvSpPr>
         <p:spPr>
           <a:xfrm>
-            <a:off x="9912096" y="2368296"/>
+            <a:off x="9912096" y="2295144"/>
             <a:ext cx="1554480" cy="384048"/>
           </a:xfrm>
           <a:prstGeom prst="rect">
@@ -13606,7 +13648,7 @@
         </p:nvSpPr>
         <p:spPr>
           <a:xfrm>
-            <a:off x="685800" y="2670048"/>
+            <a:off x="685800" y="2596896"/>
             <a:ext cx="10835640" cy="384048"/>
           </a:xfrm>
           <a:prstGeom prst="rect">
@@ -13650,7 +13692,7 @@
         </p:nvSpPr>
         <p:spPr>
           <a:xfrm>
-            <a:off x="813816" y="2752344"/>
+            <a:off x="813816" y="2679191"/>
             <a:ext cx="868680" cy="384048"/>
           </a:xfrm>
           <a:prstGeom prst="rect">
@@ -13691,7 +13733,7 @@
         </p:nvSpPr>
         <p:spPr>
           <a:xfrm>
-            <a:off x="1865376" y="2752344"/>
+            <a:off x="1865376" y="2679191"/>
             <a:ext cx="2194560" cy="384048"/>
           </a:xfrm>
           <a:prstGeom prst="rect">
@@ -13732,7 +13774,7 @@
         </p:nvSpPr>
         <p:spPr>
           <a:xfrm>
-            <a:off x="4242816" y="2752344"/>
+            <a:off x="4242816" y="2679191"/>
             <a:ext cx="3017520" cy="384048"/>
           </a:xfrm>
           <a:prstGeom prst="rect">
@@ -13773,7 +13815,7 @@
         </p:nvSpPr>
         <p:spPr>
           <a:xfrm>
-            <a:off x="7443216" y="2752344"/>
+            <a:off x="7443216" y="2679191"/>
             <a:ext cx="2286000" cy="384048"/>
           </a:xfrm>
           <a:prstGeom prst="rect">
@@ -13814,7 +13856,7 @@
         </p:nvSpPr>
         <p:spPr>
           <a:xfrm>
-            <a:off x="9912096" y="2752344"/>
+            <a:off x="9912096" y="2679191"/>
             <a:ext cx="1554480" cy="384048"/>
           </a:xfrm>
           <a:prstGeom prst="rect">
@@ -13855,7 +13897,7 @@
         </p:nvSpPr>
         <p:spPr>
           <a:xfrm>
-            <a:off x="813816" y="3136391"/>
+            <a:off x="813816" y="3063239"/>
             <a:ext cx="868680" cy="384048"/>
           </a:xfrm>
           <a:prstGeom prst="rect">
@@ -13896,7 +13938,7 @@
         </p:nvSpPr>
         <p:spPr>
           <a:xfrm>
-            <a:off x="1865376" y="3136391"/>
+            <a:off x="1865376" y="3063239"/>
             <a:ext cx="2194560" cy="384048"/>
           </a:xfrm>
           <a:prstGeom prst="rect">
@@ -13937,7 +13979,7 @@
         </p:nvSpPr>
         <p:spPr>
           <a:xfrm>
-            <a:off x="4242816" y="3136391"/>
+            <a:off x="4242816" y="3063239"/>
             <a:ext cx="3017520" cy="384048"/>
           </a:xfrm>
           <a:prstGeom prst="rect">
@@ -13978,7 +14020,7 @@
         </p:nvSpPr>
         <p:spPr>
           <a:xfrm>
-            <a:off x="7443216" y="3136391"/>
+            <a:off x="7443216" y="3063239"/>
             <a:ext cx="2286000" cy="384048"/>
           </a:xfrm>
           <a:prstGeom prst="rect">
@@ -14019,7 +14061,7 @@
         </p:nvSpPr>
         <p:spPr>
           <a:xfrm>
-            <a:off x="9912096" y="3136391"/>
+            <a:off x="9912096" y="3063239"/>
             <a:ext cx="1554480" cy="384048"/>
           </a:xfrm>
           <a:prstGeom prst="rect">
@@ -14060,7 +14102,7 @@
         </p:nvSpPr>
         <p:spPr>
           <a:xfrm>
-            <a:off x="685800" y="3438144"/>
+            <a:off x="685800" y="3364991"/>
             <a:ext cx="10835640" cy="384048"/>
           </a:xfrm>
           <a:prstGeom prst="rect">
@@ -14104,7 +14146,7 @@
         </p:nvSpPr>
         <p:spPr>
           <a:xfrm>
-            <a:off x="813816" y="3520439"/>
+            <a:off x="813816" y="3447287"/>
             <a:ext cx="868680" cy="384048"/>
           </a:xfrm>
           <a:prstGeom prst="rect">
@@ -14145,7 +14187,7 @@
         </p:nvSpPr>
         <p:spPr>
           <a:xfrm>
-            <a:off x="1865376" y="3520439"/>
+            <a:off x="1865376" y="3447287"/>
             <a:ext cx="2194560" cy="384048"/>
           </a:xfrm>
           <a:prstGeom prst="rect">
@@ -14186,7 +14228,7 @@
         </p:nvSpPr>
         <p:spPr>
           <a:xfrm>
-            <a:off x="4242816" y="3520439"/>
+            <a:off x="4242816" y="3447287"/>
             <a:ext cx="3017520" cy="384048"/>
           </a:xfrm>
           <a:prstGeom prst="rect">
@@ -14227,7 +14269,7 @@
         </p:nvSpPr>
         <p:spPr>
           <a:xfrm>
-            <a:off x="7443216" y="3520439"/>
+            <a:off x="7443216" y="3447287"/>
             <a:ext cx="2286000" cy="384048"/>
           </a:xfrm>
           <a:prstGeom prst="rect">
@@ -14268,7 +14310,7 @@
         </p:nvSpPr>
         <p:spPr>
           <a:xfrm>
-            <a:off x="9912096" y="3520439"/>
+            <a:off x="9912096" y="3447287"/>
             <a:ext cx="1554480" cy="384048"/>
           </a:xfrm>
           <a:prstGeom prst="rect">
@@ -14309,7 +14351,7 @@
         </p:nvSpPr>
         <p:spPr>
           <a:xfrm>
-            <a:off x="813816" y="3904487"/>
+            <a:off x="813816" y="3831335"/>
             <a:ext cx="868680" cy="384048"/>
           </a:xfrm>
           <a:prstGeom prst="rect">
@@ -14350,7 +14392,7 @@
         </p:nvSpPr>
         <p:spPr>
           <a:xfrm>
-            <a:off x="1865376" y="3904487"/>
+            <a:off x="1865376" y="3831335"/>
             <a:ext cx="2194560" cy="384048"/>
           </a:xfrm>
           <a:prstGeom prst="rect">
@@ -14391,7 +14433,7 @@
         </p:nvSpPr>
         <p:spPr>
           <a:xfrm>
-            <a:off x="4242816" y="3904487"/>
+            <a:off x="4242816" y="3831335"/>
             <a:ext cx="3017520" cy="384048"/>
           </a:xfrm>
           <a:prstGeom prst="rect">
@@ -14432,7 +14474,7 @@
         </p:nvSpPr>
         <p:spPr>
           <a:xfrm>
-            <a:off x="7443216" y="3904487"/>
+            <a:off x="7443216" y="3831335"/>
             <a:ext cx="2286000" cy="384048"/>
           </a:xfrm>
           <a:prstGeom prst="rect">
@@ -14473,7 +14515,7 @@
         </p:nvSpPr>
         <p:spPr>
           <a:xfrm>
-            <a:off x="9912096" y="3904487"/>
+            <a:off x="9912096" y="3831335"/>
             <a:ext cx="1554480" cy="384048"/>
           </a:xfrm>
           <a:prstGeom prst="rect">
@@ -14514,7 +14556,7 @@
         </p:nvSpPr>
         <p:spPr>
           <a:xfrm>
-            <a:off x="685800" y="4206240"/>
+            <a:off x="685800" y="4133087"/>
             <a:ext cx="10835640" cy="384048"/>
           </a:xfrm>
           <a:prstGeom prst="rect">
@@ -14558,7 +14600,7 @@
         </p:nvSpPr>
         <p:spPr>
           <a:xfrm>
-            <a:off x="813816" y="4288536"/>
+            <a:off x="813816" y="4215383"/>
             <a:ext cx="868680" cy="384048"/>
           </a:xfrm>
           <a:prstGeom prst="rect">
@@ -14599,7 +14641,7 @@
         </p:nvSpPr>
         <p:spPr>
           <a:xfrm>
-            <a:off x="1865376" y="4288536"/>
+            <a:off x="1865376" y="4215383"/>
             <a:ext cx="2194560" cy="384048"/>
           </a:xfrm>
           <a:prstGeom prst="rect">
@@ -14640,7 +14682,7 @@
         </p:nvSpPr>
         <p:spPr>
           <a:xfrm>
-            <a:off x="4242816" y="4288536"/>
+            <a:off x="4242816" y="4215383"/>
             <a:ext cx="3017520" cy="384048"/>
           </a:xfrm>
           <a:prstGeom prst="rect">
@@ -14681,7 +14723,7 @@
         </p:nvSpPr>
         <p:spPr>
           <a:xfrm>
-            <a:off x="7443216" y="4288536"/>
+            <a:off x="7443216" y="4215383"/>
             <a:ext cx="2286000" cy="384048"/>
           </a:xfrm>
           <a:prstGeom prst="rect">
@@ -14722,7 +14764,7 @@
         </p:nvSpPr>
         <p:spPr>
           <a:xfrm>
-            <a:off x="9912096" y="4288536"/>
+            <a:off x="9912096" y="4215383"/>
             <a:ext cx="1554480" cy="384048"/>
           </a:xfrm>
           <a:prstGeom prst="rect">
@@ -14763,7 +14805,7 @@
         </p:nvSpPr>
         <p:spPr>
           <a:xfrm>
-            <a:off x="813816" y="4672583"/>
+            <a:off x="813816" y="4599431"/>
             <a:ext cx="868680" cy="384048"/>
           </a:xfrm>
           <a:prstGeom prst="rect">
@@ -14804,7 +14846,7 @@
         </p:nvSpPr>
         <p:spPr>
           <a:xfrm>
-            <a:off x="1865376" y="4672583"/>
+            <a:off x="1865376" y="4599431"/>
             <a:ext cx="2194560" cy="384048"/>
           </a:xfrm>
           <a:prstGeom prst="rect">
@@ -14845,7 +14887,7 @@
         </p:nvSpPr>
         <p:spPr>
           <a:xfrm>
-            <a:off x="4242816" y="4672583"/>
+            <a:off x="4242816" y="4599431"/>
             <a:ext cx="3017520" cy="384048"/>
           </a:xfrm>
           <a:prstGeom prst="rect">
@@ -14886,7 +14928,7 @@
         </p:nvSpPr>
         <p:spPr>
           <a:xfrm>
-            <a:off x="7443216" y="4672583"/>
+            <a:off x="7443216" y="4599431"/>
             <a:ext cx="2286000" cy="384048"/>
           </a:xfrm>
           <a:prstGeom prst="rect">
@@ -14927,7 +14969,7 @@
         </p:nvSpPr>
         <p:spPr>
           <a:xfrm>
-            <a:off x="9912096" y="4672583"/>
+            <a:off x="9912096" y="4599431"/>
             <a:ext cx="1554480" cy="384048"/>
           </a:xfrm>
           <a:prstGeom prst="rect">
@@ -22237,7 +22279,28 @@
                 <a:ea typeface="Consolas"/>
                 <a:cs typeface="Consolas"/>
               </a:rPr>
-              <a:t>            {"explain": "3-lines"})</a:t>
+              <a:t>            {"explain": "3-lines",</a:t>
+            </a:r>
+          </a:p>
+          <a:p>
+            <a:pPr algn="l">
+              <a:lnSpc>
+                <a:spcPct val="105000"/>
+              </a:lnSpc>
+              <a:spcBef>
+                <a:spcPts val="100"/>
+              </a:spcBef>
+            </a:pPr>
+            <a:r>
+              <a:rPr sz="1100" b="0">
+                <a:solidFill>
+                  <a:srgbClr val="ECF1F6"/>
+                </a:solidFill>
+                <a:latin typeface="Consolas"/>
+                <a:ea typeface="Consolas"/>
+                <a:cs typeface="Consolas"/>
+              </a:rPr>
+              <a:t>             "max_out_tok": 2500})</a:t>
             </a:r>
           </a:p>
         </p:txBody>
@@ -22585,7 +22648,7 @@
                 <a:ea typeface="맑은 고딕"/>
                 <a:cs typeface="맑은 고딕"/>
               </a:rPr>
-              <a:t>판정 정확도</a:t>
+              <a:t>순서가 정확도를 만든다</a:t>
             </a:r>
           </a:p>
         </p:txBody>
@@ -22629,7 +22692,7 @@
                 <a:ea typeface="맑은 고딕"/>
                 <a:cs typeface="맑은 고딕"/>
               </a:rPr>
-              <a:t>한국어 업무 요청 10종 테스트: 10/10 일치.</a:t>
+              <a:t>한국어 업무 요청 10종: 10/10 일치.</a:t>
             </a:r>
           </a:p>
           <a:p>
@@ -22650,7 +22713,7 @@
                 <a:ea typeface="맑은 고딕"/>
                 <a:cs typeface="맑은 고딕"/>
               </a:rPr>
-              <a:t>초기엔 "TODO 전부 grep"을 BULK로 오분류 →</a:t>
+              <a:t>"TODO 전부 grep"은 BULK가 아니라 TOOL이다.</a:t>
             </a:r>
           </a:p>
           <a:p>
@@ -22671,7 +22734,7 @@
                 <a:ea typeface="맑은 고딕"/>
                 <a:cs typeface="맑은 고딕"/>
               </a:rPr>
-              <a:t>TOOL 규칙을 BULK보다 앞에 두어 해결.</a:t>
+              <a:t>겹치는 규칙은 좁은 쪽을 위로 올릴 것.</a:t>
             </a:r>
           </a:p>
         </p:txBody>
@@ -22712,7 +22775,7 @@
                 <a:ea typeface="맑은 고딕"/>
                 <a:cs typeface="맑은 고딕"/>
               </a:rPr>
-              <a:t>오분류 사례를 남겨두는 이유 — 규칙 기반 라우터는 순서 버그가 대부분이다. 테스트가 그것을 잡는다.</a:t>
+              <a:t>규칙 기반 라우터의 버그는 대부분 순서 문제다. 규칙을 추가할 때마다 분류 테스트 98건을 다시 돌린다.</a:t>
             </a:r>
           </a:p>
         </p:txBody>

--- a/presentation/토큰_절약_발표_후속_에이전트셋팅.pptx
+++ b/presentation/토큰_절약_발표_후속_에이전트셋팅.pptx
@@ -3437,7 +3437,7 @@
                 <a:ea typeface="맑은 고딕"/>
                 <a:cs typeface="맑은 고딕"/>
               </a:rPr>
-              <a:t>이 덱의 모든 슬라이드는 agent_setup/ 에 대응 코드가 있고, IDE에 바로 붙습니다. 검증 181건 전부 PASS.</a:t>
+              <a:t>이 덱의 모든 슬라이드는 agent_setup/ 에 대응 코드가 있고, IDE에 바로 붙습니다. 검증 181건 전부 PASS — 라우터 98 · 프로토콜 61 · 공식 SDK 22.</a:t>
             </a:r>
           </a:p>
         </p:txBody>
